--- a/tractor_jd_1025r_X758.pptx
+++ b/tractor_jd_1025r_X758.pptx
@@ -266,7 +266,7 @@
           <a:lstStyle/>
           <a:p>
             <a:fld id="{16286276-9013-2A43-82D1-BA4685C95117}" type="datetimeFigureOut">
-              <a:t>1/29/26</a:t>
+              <a:t>2/2/26</a:t>
             </a:fld>
             <a:endParaRPr lang="en-US"/>
           </a:p>
@@ -462,7 +462,7 @@
           <a:lstStyle/>
           <a:p>
             <a:fld id="{16286276-9013-2A43-82D1-BA4685C95117}" type="datetimeFigureOut">
-              <a:t>1/29/26</a:t>
+              <a:t>2/2/26</a:t>
             </a:fld>
             <a:endParaRPr lang="en-US"/>
           </a:p>
@@ -668,7 +668,7 @@
           <a:lstStyle/>
           <a:p>
             <a:fld id="{16286276-9013-2A43-82D1-BA4685C95117}" type="datetimeFigureOut">
-              <a:t>1/29/26</a:t>
+              <a:t>2/2/26</a:t>
             </a:fld>
             <a:endParaRPr lang="en-US"/>
           </a:p>
@@ -864,7 +864,7 @@
           <a:lstStyle/>
           <a:p>
             <a:fld id="{16286276-9013-2A43-82D1-BA4685C95117}" type="datetimeFigureOut">
-              <a:t>1/29/26</a:t>
+              <a:t>2/2/26</a:t>
             </a:fld>
             <a:endParaRPr lang="en-US"/>
           </a:p>
@@ -1137,7 +1137,7 @@
           <a:lstStyle/>
           <a:p>
             <a:fld id="{16286276-9013-2A43-82D1-BA4685C95117}" type="datetimeFigureOut">
-              <a:t>1/29/26</a:t>
+              <a:t>2/2/26</a:t>
             </a:fld>
             <a:endParaRPr lang="en-US"/>
           </a:p>
@@ -1400,7 +1400,7 @@
           <a:lstStyle/>
           <a:p>
             <a:fld id="{16286276-9013-2A43-82D1-BA4685C95117}" type="datetimeFigureOut">
-              <a:t>1/29/26</a:t>
+              <a:t>2/2/26</a:t>
             </a:fld>
             <a:endParaRPr lang="en-US"/>
           </a:p>
@@ -1810,7 +1810,7 @@
           <a:lstStyle/>
           <a:p>
             <a:fld id="{16286276-9013-2A43-82D1-BA4685C95117}" type="datetimeFigureOut">
-              <a:t>1/29/26</a:t>
+              <a:t>2/2/26</a:t>
             </a:fld>
             <a:endParaRPr lang="en-US"/>
           </a:p>
@@ -1949,7 +1949,7 @@
           <a:lstStyle/>
           <a:p>
             <a:fld id="{16286276-9013-2A43-82D1-BA4685C95117}" type="datetimeFigureOut">
-              <a:t>1/29/26</a:t>
+              <a:t>2/2/26</a:t>
             </a:fld>
             <a:endParaRPr lang="en-US"/>
           </a:p>
@@ -2060,7 +2060,7 @@
           <a:lstStyle/>
           <a:p>
             <a:fld id="{16286276-9013-2A43-82D1-BA4685C95117}" type="datetimeFigureOut">
-              <a:t>1/29/26</a:t>
+              <a:t>2/2/26</a:t>
             </a:fld>
             <a:endParaRPr lang="en-US"/>
           </a:p>
@@ -2369,7 +2369,7 @@
           <a:lstStyle/>
           <a:p>
             <a:fld id="{16286276-9013-2A43-82D1-BA4685C95117}" type="datetimeFigureOut">
-              <a:t>1/29/26</a:t>
+              <a:t>2/2/26</a:t>
             </a:fld>
             <a:endParaRPr lang="en-US"/>
           </a:p>
@@ -2655,7 +2655,7 @@
           <a:lstStyle/>
           <a:p>
             <a:fld id="{16286276-9013-2A43-82D1-BA4685C95117}" type="datetimeFigureOut">
-              <a:t>1/29/26</a:t>
+              <a:t>2/2/26</a:t>
             </a:fld>
             <a:endParaRPr lang="en-US"/>
           </a:p>
@@ -2894,7 +2894,7 @@
           </a:lstStyle>
           <a:p>
             <a:fld id="{16286276-9013-2A43-82D1-BA4685C95117}" type="datetimeFigureOut">
-              <a:t>1/29/26</a:t>
+              <a:t>2/2/26</a:t>
             </a:fld>
             <a:endParaRPr lang="en-US"/>
           </a:p>
@@ -5885,8 +5885,8 @@
         </p:nvSpPr>
         <p:spPr>
           <a:xfrm>
-            <a:off x="5048251" y="71968"/>
-            <a:ext cx="6996630" cy="6832640"/>
+            <a:off x="5048251" y="567268"/>
+            <a:ext cx="6996630" cy="5632311"/>
           </a:xfrm>
           <a:prstGeom prst="rect">
             <a:avLst/>
@@ -5900,14 +5900,14 @@
           <a:lstStyle/>
           <a:p>
             <a:r>
-              <a:rPr lang="en-US" b="1" dirty="0">
+              <a:rPr lang="en-US" sz="1200" b="1" dirty="0">
                 <a:solidFill>
                   <a:srgbClr val="00B050"/>
                 </a:solidFill>
               </a:rPr>
               <a:t>What to do at low temperature: -20°C (-4°F):</a:t>
             </a:r>
-            <a:endParaRPr lang="en-US" sz="1400" dirty="0">
+            <a:endParaRPr lang="en-US" sz="1200" dirty="0">
               <a:solidFill>
                 <a:srgbClr val="00B050"/>
               </a:solidFill>
@@ -5919,7 +5919,7 @@
               <a:buChar char="o"/>
             </a:pPr>
             <a:r>
-              <a:rPr lang="en-US" sz="1400" b="1" dirty="0">
+              <a:rPr lang="en-US" sz="1200" b="1" dirty="0">
                 <a:solidFill>
                   <a:srgbClr val="FF0000"/>
                 </a:solidFill>
@@ -5927,11 +5927,11 @@
               <a:t>Engine oil</a:t>
             </a:r>
             <a:r>
-              <a:rPr lang="en-US" sz="1400" dirty="0"/>
+              <a:rPr lang="en-US" sz="1200" dirty="0"/>
               <a:t>: use lower viscosity 0W-40 or 5W-40 </a:t>
             </a:r>
             <a:r>
-              <a:rPr lang="en-US" sz="1400" b="1" dirty="0">
+              <a:rPr lang="en-US" sz="1200" b="1" dirty="0">
                 <a:solidFill>
                   <a:srgbClr val="00B0F0"/>
                 </a:solidFill>
@@ -5945,7 +5945,7 @@
               <a:buChar char="o"/>
             </a:pPr>
             <a:r>
-              <a:rPr lang="en-US" sz="1400" b="1" dirty="0">
+              <a:rPr lang="en-US" sz="1200" b="1" dirty="0">
                 <a:solidFill>
                   <a:srgbClr val="FF0000"/>
                 </a:solidFill>
@@ -5953,11 +5953,11 @@
               <a:t>Hydraulic fluid </a:t>
             </a:r>
             <a:r>
-              <a:rPr lang="en-US" sz="1400" dirty="0"/>
+              <a:rPr lang="en-US" sz="1200" dirty="0"/>
               <a:t>– </a:t>
             </a:r>
             <a:r>
-              <a:rPr lang="en-US" sz="1400" b="1" dirty="0">
+              <a:rPr lang="en-US" sz="1200" b="1" dirty="0">
                 <a:solidFill>
                   <a:srgbClr val="00B0F0"/>
                 </a:solidFill>
@@ -5965,7 +5965,7 @@
               <a:t>use premium synthetic hydraulic fluids with cold-flow improvers</a:t>
             </a:r>
             <a:r>
-              <a:rPr lang="en-US" sz="1400" dirty="0"/>
+              <a:rPr lang="en-US" sz="1200" dirty="0"/>
               <a:t>. </a:t>
             </a:r>
           </a:p>
@@ -5975,7 +5975,7 @@
               <a:buChar char="o"/>
             </a:pPr>
             <a:r>
-              <a:rPr lang="en-US" sz="1400" b="1" dirty="0">
+              <a:rPr lang="en-US" sz="1200" b="1" dirty="0">
                 <a:solidFill>
                   <a:srgbClr val="FF0000"/>
                 </a:solidFill>
@@ -5983,7 +5983,7 @@
               <a:t>Fuel Additives (anti-gel additives) </a:t>
             </a:r>
             <a:r>
-              <a:rPr lang="en-US" sz="1400" dirty="0"/>
+              <a:rPr lang="en-US" sz="1200" dirty="0"/>
               <a:t>– need to be added at temperatures below -12°C (10-15°F), they prevent wax crystals from sticking together, and disperse moisture to prevent ice formation in fuel filters. </a:t>
             </a:r>
           </a:p>
@@ -5993,7 +5993,7 @@
               <a:buChar char="o"/>
             </a:pPr>
             <a:r>
-              <a:rPr lang="en-US" sz="1400" dirty="0"/>
+              <a:rPr lang="en-US" sz="1200" dirty="0"/>
               <a:t>John Deere Recommended its own Additive - John Deere Fuel-Protect Winter Formula (TY27786). It contains wax crystal modifiers that prevent fuel gelling by changing the shape and size of wax crystals as they form. This allows smaller crystals to pass through the fuel filter instead of clumping together and blocking flow. </a:t>
             </a:r>
           </a:p>
@@ -6003,15 +6003,15 @@
               <a:buChar char="o"/>
             </a:pPr>
             <a:r>
-              <a:rPr lang="en-US" sz="1400" dirty="0"/>
+              <a:rPr lang="en-US" sz="1200" dirty="0"/>
               <a:t>The winter formula typically protects 15-20°F below the fuel's cloud point (which is 15-19F, so with additive we can go down to </a:t>
             </a:r>
             <a:r>
-              <a:rPr lang="en-US" sz="1400" dirty="0" err="1"/>
+              <a:rPr lang="en-US" sz="1200" dirty="0" err="1"/>
               <a:t>approx</a:t>
             </a:r>
             <a:r>
-              <a:rPr lang="en-US" sz="1400" dirty="0"/>
+              <a:rPr lang="en-US" sz="1200" dirty="0"/>
               <a:t> 0°F )</a:t>
             </a:r>
           </a:p>
@@ -6021,11 +6021,11 @@
               <a:buChar char="o"/>
             </a:pPr>
             <a:r>
-              <a:rPr lang="en-US" sz="1400" dirty="0"/>
+              <a:rPr lang="en-US" sz="1200" dirty="0"/>
               <a:t>Products like </a:t>
             </a:r>
             <a:r>
-              <a:rPr lang="en-US" sz="1400" b="1" dirty="0">
+              <a:rPr lang="en-US" sz="1200" b="1" dirty="0">
                 <a:solidFill>
                   <a:srgbClr val="00B0F0"/>
                 </a:solidFill>
@@ -6033,7 +6033,7 @@
               <a:t>Hot Shot's Secret Diesel Winter Anti-Gel or </a:t>
             </a:r>
             <a:r>
-              <a:rPr lang="en-US" sz="1400" b="1" dirty="0" err="1">
+              <a:rPr lang="en-US" sz="1200" b="1" dirty="0" err="1">
                 <a:solidFill>
                   <a:srgbClr val="00B0F0"/>
                 </a:solidFill>
@@ -6041,7 +6041,7 @@
               <a:t>Archoil</a:t>
             </a:r>
             <a:r>
-              <a:rPr lang="en-US" sz="1400" b="1" dirty="0">
+              <a:rPr lang="en-US" sz="1200" b="1" dirty="0">
                 <a:solidFill>
                   <a:srgbClr val="00B0F0"/>
                 </a:solidFill>
@@ -6049,7 +6049,7 @@
               <a:t> AR6300 </a:t>
             </a:r>
             <a:r>
-              <a:rPr lang="en-US" sz="1400" dirty="0"/>
+              <a:rPr lang="en-US" sz="1200" dirty="0"/>
               <a:t>can protect diesel fuel down to -40°F (-40°C) when used at every fill-up. </a:t>
             </a:r>
           </a:p>
@@ -6059,11 +6059,11 @@
               <a:buChar char="o"/>
             </a:pPr>
             <a:r>
-              <a:rPr lang="en-US" sz="1400" dirty="0"/>
+              <a:rPr lang="en-US" sz="1200" dirty="0"/>
               <a:t>Important - the additives should be mixed with fuel before temperatures drop, as </a:t>
             </a:r>
             <a:r>
-              <a:rPr lang="en-US" sz="1400" dirty="0">
+              <a:rPr lang="en-US" sz="1200" dirty="0">
                 <a:solidFill>
                   <a:srgbClr val="00B0F0"/>
                 </a:solidFill>
@@ -6071,14 +6071,8 @@
               <a:t>they cannot reverse gelling once it has already occurred</a:t>
             </a:r>
             <a:r>
-              <a:rPr lang="en-US" sz="1400" dirty="0"/>
+              <a:rPr lang="en-US" sz="1200" dirty="0"/>
               <a:t>.</a:t>
-            </a:r>
-          </a:p>
-          <a:p>
-            <a:r>
-              <a:rPr lang="en-US" sz="1400" dirty="0"/>
-              <a:t>------------------------------------------------</a:t>
             </a:r>
           </a:p>
           <a:p>
@@ -6087,16 +6081,14 @@
               <a:buChar char="o"/>
             </a:pPr>
             <a:r>
-              <a:rPr lang="en-US" sz="1400" b="1" dirty="0">
-                <a:solidFill>
-                  <a:srgbClr val="FF0000"/>
-                </a:solidFill>
-              </a:rPr>
-              <a:t>Keep fuel tank full </a:t>
-            </a:r>
-            <a:r>
-              <a:rPr lang="en-US" sz="1400" dirty="0"/>
-              <a:t>to reduce air space and reduce moisture condensation inside the tank which can freeze and cause additional fuel system blockages. The anti-gel additive should be added to the tank before filling so it mixes thoroughly with the incoming fuel.</a:t>
+              <a:rPr lang="en-US" sz="1200" dirty="0"/>
+              <a:t>K100 - is a premium all-in-one diesel fuel treatment and anti-gel additive that eliminates water in fuel systems and prevents fuel gelling in cold weather. The product chemically bond with water molecules, encapsulating them and allowing them to burn harmlessly through the engine rather than causing problems.</a:t>
+            </a:r>
+          </a:p>
+          <a:p>
+            <a:r>
+              <a:rPr lang="en-US" sz="1200" dirty="0"/>
+              <a:t>------------------------------------------------</a:t>
             </a:r>
           </a:p>
           <a:p>
@@ -6105,52 +6097,16 @@
               <a:buChar char="o"/>
             </a:pPr>
             <a:r>
-              <a:rPr lang="en-US" sz="1400" b="1" dirty="0">
+              <a:rPr lang="en-US" sz="1200" b="1" dirty="0">
                 <a:solidFill>
                   <a:srgbClr val="FF0000"/>
                 </a:solidFill>
               </a:rPr>
-              <a:t>Engine block heater</a:t>
-            </a:r>
-            <a:r>
-              <a:rPr lang="en-US" sz="1400" dirty="0"/>
-              <a:t> – JD engine </a:t>
-            </a:r>
-            <a:r>
-              <a:rPr lang="en-US" sz="1400" b="1" dirty="0">
-                <a:solidFill>
-                  <a:srgbClr val="00B0F0"/>
-                </a:solidFill>
-              </a:rPr>
-              <a:t>coolant heater (part number AR87167)</a:t>
-            </a:r>
-            <a:r>
-              <a:rPr lang="en-US" sz="1400" dirty="0"/>
-              <a:t> requires an </a:t>
-            </a:r>
-            <a:r>
-              <a:rPr lang="en-US" sz="1400" b="1" dirty="0">
-                <a:solidFill>
-                  <a:srgbClr val="00B0F0"/>
-                </a:solidFill>
-              </a:rPr>
-              <a:t>adapter kit (MIA881629) </a:t>
-            </a:r>
-            <a:r>
-              <a:rPr lang="en-US" sz="1400" dirty="0"/>
-              <a:t>for installation on the X758 and should be plugged in for at least </a:t>
-            </a:r>
-            <a:r>
-              <a:rPr lang="en-US" sz="1400" b="1" dirty="0">
-                <a:solidFill>
-                  <a:srgbClr val="FF0000"/>
-                </a:solidFill>
-              </a:rPr>
-              <a:t>one hour before starting</a:t>
-            </a:r>
-            <a:r>
-              <a:rPr lang="en-US" sz="1400" dirty="0"/>
-              <a:t>.</a:t>
+              <a:t>Keep fuel tank full </a:t>
+            </a:r>
+            <a:r>
+              <a:rPr lang="en-US" sz="1200" dirty="0"/>
+              <a:t>to reduce air space and reduce moisture condensation inside the tank which can freeze and cause additional fuel system blockages. The anti-gel additive should be added to the tank before filling so it mixes thoroughly with the incoming fuel.</a:t>
             </a:r>
           </a:p>
           <a:p>
@@ -6159,18 +6115,72 @@
               <a:buChar char="o"/>
             </a:pPr>
             <a:r>
-              <a:rPr lang="en-US" sz="1400" b="1" dirty="0">
+              <a:rPr lang="en-US" sz="1200" b="1" dirty="0">
                 <a:solidFill>
                   <a:srgbClr val="FF0000"/>
                 </a:solidFill>
               </a:rPr>
+              <a:t>Engine block heater</a:t>
+            </a:r>
+            <a:r>
+              <a:rPr lang="en-US" sz="1200" dirty="0"/>
+              <a:t> – JD engine </a:t>
+            </a:r>
+            <a:r>
+              <a:rPr lang="en-US" sz="1200" b="1" dirty="0">
+                <a:solidFill>
+                  <a:srgbClr val="00B0F0"/>
+                </a:solidFill>
+              </a:rPr>
+              <a:t>coolant heater (part number AR87167)</a:t>
+            </a:r>
+            <a:r>
+              <a:rPr lang="en-US" sz="1200" dirty="0"/>
+              <a:t> requires an </a:t>
+            </a:r>
+            <a:r>
+              <a:rPr lang="en-US" sz="1200" b="1" dirty="0">
+                <a:solidFill>
+                  <a:srgbClr val="00B0F0"/>
+                </a:solidFill>
+              </a:rPr>
+              <a:t>adapter kit (MIA881629) </a:t>
+            </a:r>
+            <a:r>
+              <a:rPr lang="en-US" sz="1200" dirty="0"/>
+              <a:t>for installation on the X758 and should be plugged in for at least </a:t>
+            </a:r>
+            <a:r>
+              <a:rPr lang="en-US" sz="1200" b="1" dirty="0">
+                <a:solidFill>
+                  <a:srgbClr val="FF0000"/>
+                </a:solidFill>
+              </a:rPr>
+              <a:t>one hour before starting</a:t>
+            </a:r>
+            <a:r>
+              <a:rPr lang="en-US" sz="1200" dirty="0"/>
+              <a:t>.</a:t>
+            </a:r>
+          </a:p>
+          <a:p>
+            <a:pPr marL="285750" indent="-285750">
+              <a:buFont typeface="Courier New" panose="02070309020205020404" pitchFamily="49" charset="0"/>
+              <a:buChar char="o"/>
+            </a:pPr>
+            <a:r>
+              <a:rPr lang="en-US" sz="1200" b="1" dirty="0">
+                <a:solidFill>
+                  <a:srgbClr val="FF0000"/>
+                </a:solidFill>
+              </a:rPr>
               <a:t>Replace fuel filters before cold weather </a:t>
             </a:r>
             <a:r>
-              <a:rPr lang="en-US" sz="1400" dirty="0"/>
+              <a:rPr lang="en-US" sz="1200" dirty="0"/>
               <a:t>arrives, as dirty filters trap moisture and accelerate gelling.</a:t>
             </a:r>
-            <a:endParaRPr lang="en-US" sz="1400" b="1" dirty="0">
+            <a:endParaRPr lang="en-US" sz="1200" b="1" dirty="0">
               <a:solidFill>
                 <a:srgbClr val="FF0000"/>
               </a:solidFill>
@@ -6182,7 +6192,7 @@
               <a:buChar char="o"/>
             </a:pPr>
             <a:r>
-              <a:rPr lang="en-US" sz="1400" b="1" dirty="0">
+              <a:rPr lang="en-US" sz="1200" b="1" dirty="0">
                 <a:solidFill>
                   <a:srgbClr val="FF0000"/>
                 </a:solidFill>
@@ -6190,11 +6200,11 @@
               <a:t>Engine Warm-Up </a:t>
             </a:r>
             <a:r>
-              <a:rPr lang="en-US" sz="1400" dirty="0"/>
+              <a:rPr lang="en-US" sz="1200" dirty="0"/>
               <a:t>- the X758 has glow plugs that warm the cylinders before starting.  Turn the key to the "ON" position, wait for the glow plug indicator light (squiggly line) to go off before cranking the engine. Then let the tractor idle for several minutes to </a:t>
             </a:r>
             <a:r>
-              <a:rPr lang="en-US" sz="1400" b="1" dirty="0">
+              <a:rPr lang="en-US" sz="1200" b="1" dirty="0">
                 <a:solidFill>
                   <a:srgbClr val="FF0000"/>
                 </a:solidFill>
@@ -6202,7 +6212,7 @@
               <a:t>allow both the engine and hydraulic oil to warm up</a:t>
             </a:r>
             <a:r>
-              <a:rPr lang="en-US" sz="1400" dirty="0"/>
+              <a:rPr lang="en-US" sz="1200" dirty="0"/>
               <a:t> before operating implements or the power steering system under load</a:t>
             </a:r>
           </a:p>

--- a/tractor_jd_1025r_X758.pptx
+++ b/tractor_jd_1025r_X758.pptx
@@ -9,11 +9,12 @@
     <p:sldId id="258" r:id="rId3"/>
     <p:sldId id="264" r:id="rId4"/>
     <p:sldId id="266" r:id="rId5"/>
-    <p:sldId id="261" r:id="rId6"/>
-    <p:sldId id="268" r:id="rId7"/>
-    <p:sldId id="267" r:id="rId8"/>
-    <p:sldId id="265" r:id="rId9"/>
-    <p:sldId id="263" r:id="rId10"/>
+    <p:sldId id="269" r:id="rId6"/>
+    <p:sldId id="261" r:id="rId7"/>
+    <p:sldId id="268" r:id="rId8"/>
+    <p:sldId id="267" r:id="rId9"/>
+    <p:sldId id="265" r:id="rId10"/>
+    <p:sldId id="263" r:id="rId11"/>
   </p:sldIdLst>
   <p:sldSz cx="12192000" cy="6858000"/>
   <p:notesSz cx="6858000" cy="9144000"/>
@@ -266,7 +267,7 @@
           <a:lstStyle/>
           <a:p>
             <a:fld id="{16286276-9013-2A43-82D1-BA4685C95117}" type="datetimeFigureOut">
-              <a:t>2/2/26</a:t>
+              <a:t>2/21/26</a:t>
             </a:fld>
             <a:endParaRPr lang="en-US"/>
           </a:p>
@@ -462,7 +463,7 @@
           <a:lstStyle/>
           <a:p>
             <a:fld id="{16286276-9013-2A43-82D1-BA4685C95117}" type="datetimeFigureOut">
-              <a:t>2/2/26</a:t>
+              <a:t>2/21/26</a:t>
             </a:fld>
             <a:endParaRPr lang="en-US"/>
           </a:p>
@@ -668,7 +669,7 @@
           <a:lstStyle/>
           <a:p>
             <a:fld id="{16286276-9013-2A43-82D1-BA4685C95117}" type="datetimeFigureOut">
-              <a:t>2/2/26</a:t>
+              <a:t>2/21/26</a:t>
             </a:fld>
             <a:endParaRPr lang="en-US"/>
           </a:p>
@@ -864,7 +865,7 @@
           <a:lstStyle/>
           <a:p>
             <a:fld id="{16286276-9013-2A43-82D1-BA4685C95117}" type="datetimeFigureOut">
-              <a:t>2/2/26</a:t>
+              <a:t>2/21/26</a:t>
             </a:fld>
             <a:endParaRPr lang="en-US"/>
           </a:p>
@@ -1137,7 +1138,7 @@
           <a:lstStyle/>
           <a:p>
             <a:fld id="{16286276-9013-2A43-82D1-BA4685C95117}" type="datetimeFigureOut">
-              <a:t>2/2/26</a:t>
+              <a:t>2/21/26</a:t>
             </a:fld>
             <a:endParaRPr lang="en-US"/>
           </a:p>
@@ -1400,7 +1401,7 @@
           <a:lstStyle/>
           <a:p>
             <a:fld id="{16286276-9013-2A43-82D1-BA4685C95117}" type="datetimeFigureOut">
-              <a:t>2/2/26</a:t>
+              <a:t>2/21/26</a:t>
             </a:fld>
             <a:endParaRPr lang="en-US"/>
           </a:p>
@@ -1810,7 +1811,7 @@
           <a:lstStyle/>
           <a:p>
             <a:fld id="{16286276-9013-2A43-82D1-BA4685C95117}" type="datetimeFigureOut">
-              <a:t>2/2/26</a:t>
+              <a:t>2/21/26</a:t>
             </a:fld>
             <a:endParaRPr lang="en-US"/>
           </a:p>
@@ -1949,7 +1950,7 @@
           <a:lstStyle/>
           <a:p>
             <a:fld id="{16286276-9013-2A43-82D1-BA4685C95117}" type="datetimeFigureOut">
-              <a:t>2/2/26</a:t>
+              <a:t>2/21/26</a:t>
             </a:fld>
             <a:endParaRPr lang="en-US"/>
           </a:p>
@@ -2060,7 +2061,7 @@
           <a:lstStyle/>
           <a:p>
             <a:fld id="{16286276-9013-2A43-82D1-BA4685C95117}" type="datetimeFigureOut">
-              <a:t>2/2/26</a:t>
+              <a:t>2/21/26</a:t>
             </a:fld>
             <a:endParaRPr lang="en-US"/>
           </a:p>
@@ -2369,7 +2370,7 @@
           <a:lstStyle/>
           <a:p>
             <a:fld id="{16286276-9013-2A43-82D1-BA4685C95117}" type="datetimeFigureOut">
-              <a:t>2/2/26</a:t>
+              <a:t>2/21/26</a:t>
             </a:fld>
             <a:endParaRPr lang="en-US"/>
           </a:p>
@@ -2655,7 +2656,7 @@
           <a:lstStyle/>
           <a:p>
             <a:fld id="{16286276-9013-2A43-82D1-BA4685C95117}" type="datetimeFigureOut">
-              <a:t>2/2/26</a:t>
+              <a:t>2/21/26</a:t>
             </a:fld>
             <a:endParaRPr lang="en-US"/>
           </a:p>
@@ -2894,7 +2895,7 @@
           </a:lstStyle>
           <a:p>
             <a:fld id="{16286276-9013-2A43-82D1-BA4685C95117}" type="datetimeFigureOut">
-              <a:t>2/2/26</a:t>
+              <a:t>2/21/26</a:t>
             </a:fld>
             <a:endParaRPr lang="en-US"/>
           </a:p>
@@ -4070,6 +4071,328 @@
 </p:sld>
 </file>
 
+<file path=ppt/slides/slide10.xml><?xml version="1.0" encoding="utf-8"?>
+<p:sld xmlns:a="http://schemas.openxmlformats.org/drawingml/2006/main" xmlns:r="http://schemas.openxmlformats.org/officeDocument/2006/relationships" xmlns:p="http://schemas.openxmlformats.org/presentationml/2006/main">
+  <p:cSld>
+    <p:spTree>
+      <p:nvGrpSpPr>
+        <p:cNvPr id="1" name=""/>
+        <p:cNvGrpSpPr/>
+        <p:nvPr/>
+      </p:nvGrpSpPr>
+      <p:grpSpPr>
+        <a:xfrm>
+          <a:off x="0" y="0"/>
+          <a:ext cx="0" cy="0"/>
+          <a:chOff x="0" y="0"/>
+          <a:chExt cx="0" cy="0"/>
+        </a:xfrm>
+      </p:grpSpPr>
+      <p:sp>
+        <p:nvSpPr>
+          <p:cNvPr id="2" name="TextBox 1">
+            <a:extLst>
+              <a:ext uri="{FF2B5EF4-FFF2-40B4-BE49-F238E27FC236}">
+                <a16:creationId xmlns:a16="http://schemas.microsoft.com/office/drawing/2014/main" id="{775BBD15-AEC2-1815-2347-A5BB8F308263}"/>
+              </a:ext>
+            </a:extLst>
+          </p:cNvPr>
+          <p:cNvSpPr txBox="1"/>
+          <p:nvPr/>
+        </p:nvSpPr>
+        <p:spPr>
+          <a:xfrm>
+            <a:off x="-1" y="0"/>
+            <a:ext cx="5585791" cy="523220"/>
+          </a:xfrm>
+          <a:prstGeom prst="rect">
+            <a:avLst/>
+          </a:prstGeom>
+          <a:noFill/>
+        </p:spPr>
+        <p:txBody>
+          <a:bodyPr wrap="square" rtlCol="0">
+            <a:spAutoFit/>
+          </a:bodyPr>
+          <a:lstStyle/>
+          <a:p>
+            <a:r>
+              <a:rPr lang="en-US" sz="2800" b="1" dirty="0"/>
+              <a:t>Other tractors with PTO $30-$50K</a:t>
+            </a:r>
+          </a:p>
+        </p:txBody>
+      </p:sp>
+      <p:sp>
+        <p:nvSpPr>
+          <p:cNvPr id="3" name="TextBox 2">
+            <a:extLst>
+              <a:ext uri="{FF2B5EF4-FFF2-40B4-BE49-F238E27FC236}">
+                <a16:creationId xmlns:a16="http://schemas.microsoft.com/office/drawing/2014/main" id="{6E16EF48-8881-49F2-8460-25D7441E2332}"/>
+              </a:ext>
+            </a:extLst>
+          </p:cNvPr>
+          <p:cNvSpPr txBox="1"/>
+          <p:nvPr/>
+        </p:nvSpPr>
+        <p:spPr>
+          <a:xfrm>
+            <a:off x="0" y="489392"/>
+            <a:ext cx="4593021" cy="276999"/>
+          </a:xfrm>
+          <a:prstGeom prst="rect">
+            <a:avLst/>
+          </a:prstGeom>
+          <a:noFill/>
+        </p:spPr>
+        <p:txBody>
+          <a:bodyPr wrap="square" rtlCol="0">
+            <a:spAutoFit/>
+          </a:bodyPr>
+          <a:lstStyle/>
+          <a:p>
+            <a:r>
+              <a:rPr lang="en-US" sz="1200">
+                <a:hlinkClick r:id="rId2"/>
+              </a:rPr>
+              <a:t>https://www.tractor.com/news/5-of-the-best-compact-tractor-choices/</a:t>
+            </a:r>
+            <a:endParaRPr lang="en-US" sz="1200"/>
+          </a:p>
+        </p:txBody>
+      </p:sp>
+      <p:pic>
+        <p:nvPicPr>
+          <p:cNvPr id="4" name="Picture 3">
+            <a:extLst>
+              <a:ext uri="{FF2B5EF4-FFF2-40B4-BE49-F238E27FC236}">
+                <a16:creationId xmlns:a16="http://schemas.microsoft.com/office/drawing/2014/main" id="{E417BA77-09D9-7E27-801F-69193D91F8DA}"/>
+              </a:ext>
+            </a:extLst>
+          </p:cNvPr>
+          <p:cNvPicPr>
+            <a:picLocks noChangeAspect="1"/>
+          </p:cNvPicPr>
+          <p:nvPr/>
+        </p:nvPicPr>
+        <p:blipFill>
+          <a:blip r:embed="rId3" cstate="email">
+            <a:extLst>
+              <a:ext uri="{28A0092B-C50C-407E-A947-70E740481C1C}">
+                <a14:useLocalDpi xmlns:a14="http://schemas.microsoft.com/office/drawing/2010/main"/>
+              </a:ext>
+            </a:extLst>
+          </a:blip>
+          <a:stretch>
+            <a:fillRect/>
+          </a:stretch>
+        </p:blipFill>
+        <p:spPr>
+          <a:xfrm>
+            <a:off x="200379" y="1138958"/>
+            <a:ext cx="2388860" cy="1934779"/>
+          </a:xfrm>
+          <a:prstGeom prst="rect">
+            <a:avLst/>
+          </a:prstGeom>
+        </p:spPr>
+      </p:pic>
+      <p:pic>
+        <p:nvPicPr>
+          <p:cNvPr id="5" name="Picture 4">
+            <a:extLst>
+              <a:ext uri="{FF2B5EF4-FFF2-40B4-BE49-F238E27FC236}">
+                <a16:creationId xmlns:a16="http://schemas.microsoft.com/office/drawing/2014/main" id="{49F5BA98-0D48-BA24-1215-B23D6670903D}"/>
+              </a:ext>
+            </a:extLst>
+          </p:cNvPr>
+          <p:cNvPicPr>
+            <a:picLocks noChangeAspect="1"/>
+          </p:cNvPicPr>
+          <p:nvPr/>
+        </p:nvPicPr>
+        <p:blipFill>
+          <a:blip r:embed="rId4" cstate="email">
+            <a:extLst>
+              <a:ext uri="{28A0092B-C50C-407E-A947-70E740481C1C}">
+                <a14:useLocalDpi xmlns:a14="http://schemas.microsoft.com/office/drawing/2010/main"/>
+              </a:ext>
+            </a:extLst>
+          </a:blip>
+          <a:stretch>
+            <a:fillRect/>
+          </a:stretch>
+        </p:blipFill>
+        <p:spPr>
+          <a:xfrm>
+            <a:off x="2990285" y="1138958"/>
+            <a:ext cx="2852152" cy="1882228"/>
+          </a:xfrm>
+          <a:prstGeom prst="rect">
+            <a:avLst/>
+          </a:prstGeom>
+        </p:spPr>
+      </p:pic>
+      <p:pic>
+        <p:nvPicPr>
+          <p:cNvPr id="6" name="Picture 5">
+            <a:extLst>
+              <a:ext uri="{FF2B5EF4-FFF2-40B4-BE49-F238E27FC236}">
+                <a16:creationId xmlns:a16="http://schemas.microsoft.com/office/drawing/2014/main" id="{9D2348EF-00F3-4732-6868-29433FD1B928}"/>
+              </a:ext>
+            </a:extLst>
+          </p:cNvPr>
+          <p:cNvPicPr>
+            <a:picLocks noChangeAspect="1"/>
+          </p:cNvPicPr>
+          <p:nvPr/>
+        </p:nvPicPr>
+        <p:blipFill>
+          <a:blip r:embed="rId5" cstate="email">
+            <a:extLst>
+              <a:ext uri="{28A0092B-C50C-407E-A947-70E740481C1C}">
+                <a14:useLocalDpi xmlns:a14="http://schemas.microsoft.com/office/drawing/2010/main"/>
+              </a:ext>
+            </a:extLst>
+          </a:blip>
+          <a:stretch>
+            <a:fillRect/>
+          </a:stretch>
+        </p:blipFill>
+        <p:spPr>
+          <a:xfrm>
+            <a:off x="6381756" y="1012612"/>
+            <a:ext cx="2424597" cy="1934779"/>
+          </a:xfrm>
+          <a:prstGeom prst="rect">
+            <a:avLst/>
+          </a:prstGeom>
+        </p:spPr>
+      </p:pic>
+      <p:sp>
+        <p:nvSpPr>
+          <p:cNvPr id="7" name="TextBox 6">
+            <a:extLst>
+              <a:ext uri="{FF2B5EF4-FFF2-40B4-BE49-F238E27FC236}">
+                <a16:creationId xmlns:a16="http://schemas.microsoft.com/office/drawing/2014/main" id="{A7E3F881-7D00-286B-91EB-07CF4CF08B35}"/>
+              </a:ext>
+            </a:extLst>
+          </p:cNvPr>
+          <p:cNvSpPr txBox="1"/>
+          <p:nvPr/>
+        </p:nvSpPr>
+        <p:spPr>
+          <a:xfrm>
+            <a:off x="493986" y="3594538"/>
+            <a:ext cx="4561490" cy="369332"/>
+          </a:xfrm>
+          <a:prstGeom prst="rect">
+            <a:avLst/>
+          </a:prstGeom>
+          <a:noFill/>
+        </p:spPr>
+        <p:txBody>
+          <a:bodyPr wrap="square" rtlCol="0">
+            <a:spAutoFit/>
+          </a:bodyPr>
+          <a:lstStyle/>
+          <a:p>
+            <a:r>
+              <a:rPr lang="en-US" dirty="0"/>
+              <a:t>Power Take-Off (PTO) </a:t>
+            </a:r>
+          </a:p>
+        </p:txBody>
+      </p:sp>
+      <p:sp>
+        <p:nvSpPr>
+          <p:cNvPr id="8" name="TextBox 7">
+            <a:extLst>
+              <a:ext uri="{FF2B5EF4-FFF2-40B4-BE49-F238E27FC236}">
+                <a16:creationId xmlns:a16="http://schemas.microsoft.com/office/drawing/2014/main" id="{0F7E2A2F-96C1-620D-A026-7F6ED7EBDE57}"/>
+              </a:ext>
+            </a:extLst>
+          </p:cNvPr>
+          <p:cNvSpPr txBox="1"/>
+          <p:nvPr/>
+        </p:nvSpPr>
+        <p:spPr>
+          <a:xfrm>
+            <a:off x="336331" y="4067503"/>
+            <a:ext cx="4256690" cy="738664"/>
+          </a:xfrm>
+          <a:prstGeom prst="rect">
+            <a:avLst/>
+          </a:prstGeom>
+          <a:noFill/>
+        </p:spPr>
+        <p:txBody>
+          <a:bodyPr wrap="square" rtlCol="0">
+            <a:spAutoFit/>
+          </a:bodyPr>
+          <a:lstStyle/>
+          <a:p>
+            <a:r>
+              <a:rPr lang="en-US" sz="1400" dirty="0"/>
+              <a:t>The tractor's </a:t>
+            </a:r>
+            <a:r>
+              <a:rPr lang="en-US" sz="1400" b="1" dirty="0">
+                <a:solidFill>
+                  <a:srgbClr val="FF0000"/>
+                </a:solidFill>
+              </a:rPr>
+              <a:t>stub shaft</a:t>
+            </a:r>
+            <a:r>
+              <a:rPr lang="en-US" sz="1400" dirty="0"/>
+              <a:t>, often called the </a:t>
+            </a:r>
+            <a:r>
+              <a:rPr lang="en-US" sz="1400" b="1" dirty="0">
+                <a:solidFill>
+                  <a:srgbClr val="FF0000"/>
+                </a:solidFill>
+              </a:rPr>
+              <a:t>PTO</a:t>
+            </a:r>
+            <a:r>
+              <a:rPr lang="en-US" sz="1400" dirty="0"/>
+              <a:t>, </a:t>
+            </a:r>
+          </a:p>
+          <a:p>
+            <a:r>
+              <a:rPr lang="en-US" sz="1400" dirty="0"/>
+              <a:t>rotates at 540 or 1000 rpm (9..17 times/sec) </a:t>
+            </a:r>
+          </a:p>
+          <a:p>
+            <a:r>
+              <a:rPr lang="en-US" sz="1400" dirty="0"/>
+              <a:t>and used to transfer power to external </a:t>
+            </a:r>
+            <a:r>
+              <a:rPr lang="en-US" sz="1400"/>
+              <a:t>attachments.</a:t>
+            </a:r>
+            <a:endParaRPr lang="en-US" sz="1400" dirty="0"/>
+          </a:p>
+        </p:txBody>
+      </p:sp>
+    </p:spTree>
+    <p:extLst>
+      <p:ext uri="{BB962C8B-B14F-4D97-AF65-F5344CB8AC3E}">
+        <p14:creationId xmlns:p14="http://schemas.microsoft.com/office/powerpoint/2010/main" val="387486117"/>
+      </p:ext>
+    </p:extLst>
+  </p:cSld>
+  <p:clrMapOvr>
+    <a:masterClrMapping/>
+  </p:clrMapOvr>
+</p:sld>
+</file>
+
 <file path=ppt/slides/slide2.xml><?xml version="1.0" encoding="utf-8"?>
 <p:sld xmlns:a="http://schemas.openxmlformats.org/drawingml/2006/main" xmlns:r="http://schemas.openxmlformats.org/officeDocument/2006/relationships" xmlns:p="http://schemas.openxmlformats.org/presentationml/2006/main">
   <p:cSld>
@@ -5793,7 +6116,7 @@
         </p:blipFill>
         <p:spPr>
           <a:xfrm>
-            <a:off x="6096000" y="1505650"/>
+            <a:off x="5657850" y="261610"/>
             <a:ext cx="5464920" cy="4374185"/>
           </a:xfrm>
           <a:prstGeom prst="rect">
@@ -5806,6 +6129,45 @@
           </a:ln>
         </p:spPr>
       </p:pic>
+      <p:sp>
+        <p:nvSpPr>
+          <p:cNvPr id="3" name="TextBox 2">
+            <a:extLst>
+              <a:ext uri="{FF2B5EF4-FFF2-40B4-BE49-F238E27FC236}">
+                <a16:creationId xmlns:a16="http://schemas.microsoft.com/office/drawing/2014/main" id="{615BF802-DEE9-AC91-C7F2-89B574D2C872}"/>
+              </a:ext>
+            </a:extLst>
+          </p:cNvPr>
+          <p:cNvSpPr txBox="1"/>
+          <p:nvPr/>
+        </p:nvSpPr>
+        <p:spPr>
+          <a:xfrm>
+            <a:off x="7010402" y="4897405"/>
+            <a:ext cx="5181598" cy="954107"/>
+          </a:xfrm>
+          <a:prstGeom prst="rect">
+            <a:avLst/>
+          </a:prstGeom>
+          <a:noFill/>
+        </p:spPr>
+        <p:txBody>
+          <a:bodyPr wrap="square" rtlCol="0">
+            <a:spAutoFit/>
+          </a:bodyPr>
+          <a:lstStyle/>
+          <a:p>
+            <a:pPr marL="285750" indent="-285750">
+              <a:buFont typeface="Courier New" panose="02070309020205020404" pitchFamily="49" charset="0"/>
+              <a:buChar char="o"/>
+            </a:pPr>
+            <a:r>
+              <a:rPr lang="en-US" sz="1400" dirty="0"/>
+              <a:t>Note: It is possible to install the a CAT‑1 style hitch kit at the back. This will give ability to attach standard 3-point attachments, like a compact 3‑point log splitter powered by tractor’s hydraulics</a:t>
+            </a:r>
+          </a:p>
+        </p:txBody>
+      </p:sp>
     </p:spTree>
     <p:extLst>
       <p:ext uri="{BB962C8B-B14F-4D97-AF65-F5344CB8AC3E}">
@@ -5824,7 +6186,13 @@
   <p:cSld>
     <p:spTree>
       <p:nvGrpSpPr>
-        <p:cNvPr id="1" name=""/>
+        <p:cNvPr id="1" name="">
+          <a:extLst>
+            <a:ext uri="{FF2B5EF4-FFF2-40B4-BE49-F238E27FC236}">
+              <a16:creationId xmlns:a16="http://schemas.microsoft.com/office/drawing/2014/main" id="{74343D31-ECE5-9365-93A5-EADC75847418}"/>
+            </a:ext>
+          </a:extLst>
+        </p:cNvPr>
         <p:cNvGrpSpPr/>
         <p:nvPr/>
       </p:nvGrpSpPr>
@@ -5841,7 +6209,7 @@
           <p:cNvPr id="2" name="TextBox 1">
             <a:extLst>
               <a:ext uri="{FF2B5EF4-FFF2-40B4-BE49-F238E27FC236}">
-                <a16:creationId xmlns:a16="http://schemas.microsoft.com/office/drawing/2014/main" id="{775BBD15-AEC2-1815-2347-A5BB8F308263}"/>
+                <a16:creationId xmlns:a16="http://schemas.microsoft.com/office/drawing/2014/main" id="{77D0C96E-112C-9AD5-4197-E7D6921D9754}"/>
               </a:ext>
             </a:extLst>
           </p:cNvPr>
@@ -5873,10 +6241,10 @@
       </p:sp>
       <p:sp>
         <p:nvSpPr>
-          <p:cNvPr id="3" name="TextBox 2">
-            <a:extLst>
-              <a:ext uri="{FF2B5EF4-FFF2-40B4-BE49-F238E27FC236}">
-                <a16:creationId xmlns:a16="http://schemas.microsoft.com/office/drawing/2014/main" id="{DC69E50A-DD6F-49A2-50A0-AE0A50A8C419}"/>
+          <p:cNvPr id="8" name="TextBox 7">
+            <a:extLst>
+              <a:ext uri="{FF2B5EF4-FFF2-40B4-BE49-F238E27FC236}">
+                <a16:creationId xmlns:a16="http://schemas.microsoft.com/office/drawing/2014/main" id="{40B1DAD5-098B-A626-FB87-CBFF942DA840}"/>
               </a:ext>
             </a:extLst>
           </p:cNvPr>
@@ -5885,8 +6253,8 @@
         </p:nvSpPr>
         <p:spPr>
           <a:xfrm>
-            <a:off x="5048251" y="567268"/>
-            <a:ext cx="6996630" cy="5632311"/>
+            <a:off x="6079066" y="209097"/>
+            <a:ext cx="5925483" cy="3539430"/>
           </a:xfrm>
           <a:prstGeom prst="rect">
             <a:avLst/>
@@ -5900,439 +6268,128 @@
           <a:lstStyle/>
           <a:p>
             <a:r>
-              <a:rPr lang="en-US" sz="1200" b="1" dirty="0">
-                <a:solidFill>
-                  <a:srgbClr val="00B050"/>
-                </a:solidFill>
-              </a:rPr>
-              <a:t>What to do at low temperature: -20°C (-4°F):</a:t>
-            </a:r>
-            <a:endParaRPr lang="en-US" sz="1200" dirty="0">
-              <a:solidFill>
-                <a:srgbClr val="00B050"/>
-              </a:solidFill>
-            </a:endParaRPr>
-          </a:p>
-          <a:p>
-            <a:pPr marL="285750" indent="-285750">
-              <a:buFont typeface="Courier New" panose="02070309020205020404" pitchFamily="49" charset="0"/>
-              <a:buChar char="o"/>
-            </a:pPr>
-            <a:r>
-              <a:rPr lang="en-US" sz="1200" b="1" dirty="0">
-                <a:solidFill>
-                  <a:srgbClr val="FF0000"/>
-                </a:solidFill>
-              </a:rPr>
-              <a:t>Engine oil</a:t>
-            </a:r>
-            <a:r>
-              <a:rPr lang="en-US" sz="1200" dirty="0"/>
-              <a:t>: use lower viscosity 0W-40 or 5W-40 </a:t>
-            </a:r>
-            <a:r>
-              <a:rPr lang="en-US" sz="1200" b="1" dirty="0">
-                <a:solidFill>
-                  <a:srgbClr val="00B0F0"/>
-                </a:solidFill>
-              </a:rPr>
-              <a:t>synthetic diesel oil</a:t>
-            </a:r>
-          </a:p>
-          <a:p>
-            <a:pPr marL="285750" indent="-285750">
-              <a:buFont typeface="Courier New" panose="02070309020205020404" pitchFamily="49" charset="0"/>
-              <a:buChar char="o"/>
-            </a:pPr>
-            <a:r>
-              <a:rPr lang="en-US" sz="1200" b="1" dirty="0">
-                <a:solidFill>
-                  <a:srgbClr val="FF0000"/>
-                </a:solidFill>
-              </a:rPr>
-              <a:t>Hydraulic fluid </a:t>
-            </a:r>
-            <a:r>
-              <a:rPr lang="en-US" sz="1200" dirty="0"/>
-              <a:t>– </a:t>
-            </a:r>
-            <a:r>
-              <a:rPr lang="en-US" sz="1200" b="1" dirty="0">
-                <a:solidFill>
-                  <a:srgbClr val="00B0F0"/>
-                </a:solidFill>
-              </a:rPr>
-              <a:t>use premium synthetic hydraulic fluids with cold-flow improvers</a:t>
-            </a:r>
-            <a:r>
-              <a:rPr lang="en-US" sz="1200" dirty="0"/>
-              <a:t>. </a:t>
-            </a:r>
-          </a:p>
-          <a:p>
-            <a:pPr marL="285750" indent="-285750">
-              <a:buFont typeface="Courier New" panose="02070309020205020404" pitchFamily="49" charset="0"/>
-              <a:buChar char="o"/>
-            </a:pPr>
-            <a:r>
-              <a:rPr lang="en-US" sz="1200" b="1" dirty="0">
-                <a:solidFill>
-                  <a:srgbClr val="FF0000"/>
-                </a:solidFill>
-              </a:rPr>
-              <a:t>Fuel Additives (anti-gel additives) </a:t>
-            </a:r>
-            <a:r>
-              <a:rPr lang="en-US" sz="1200" dirty="0"/>
-              <a:t>– need to be added at temperatures below -12°C (10-15°F), they prevent wax crystals from sticking together, and disperse moisture to prevent ice formation in fuel filters. </a:t>
-            </a:r>
-          </a:p>
-          <a:p>
-            <a:pPr marL="285750" indent="-285750">
-              <a:buFont typeface="Courier New" panose="02070309020205020404" pitchFamily="49" charset="0"/>
-              <a:buChar char="o"/>
-            </a:pPr>
-            <a:r>
-              <a:rPr lang="en-US" sz="1200" dirty="0"/>
-              <a:t>John Deere Recommended its own Additive - John Deere Fuel-Protect Winter Formula (TY27786). It contains wax crystal modifiers that prevent fuel gelling by changing the shape and size of wax crystals as they form. This allows smaller crystals to pass through the fuel filter instead of clumping together and blocking flow. </a:t>
-            </a:r>
-          </a:p>
-          <a:p>
-            <a:pPr marL="285750" indent="-285750">
-              <a:buFont typeface="Courier New" panose="02070309020205020404" pitchFamily="49" charset="0"/>
-              <a:buChar char="o"/>
-            </a:pPr>
-            <a:r>
-              <a:rPr lang="en-US" sz="1200" dirty="0"/>
-              <a:t>The winter formula typically protects 15-20°F below the fuel's cloud point (which is 15-19F, so with additive we can go down to </a:t>
-            </a:r>
-            <a:r>
-              <a:rPr lang="en-US" sz="1200" dirty="0" err="1"/>
-              <a:t>approx</a:t>
-            </a:r>
-            <a:r>
-              <a:rPr lang="en-US" sz="1200" dirty="0"/>
-              <a:t> 0°F )</a:t>
-            </a:r>
-          </a:p>
-          <a:p>
-            <a:pPr marL="285750" indent="-285750">
-              <a:buFont typeface="Courier New" panose="02070309020205020404" pitchFamily="49" charset="0"/>
-              <a:buChar char="o"/>
-            </a:pPr>
-            <a:r>
-              <a:rPr lang="en-US" sz="1200" dirty="0"/>
-              <a:t>Products like </a:t>
-            </a:r>
-            <a:r>
-              <a:rPr lang="en-US" sz="1200" b="1" dirty="0">
-                <a:solidFill>
-                  <a:srgbClr val="00B0F0"/>
-                </a:solidFill>
-              </a:rPr>
-              <a:t>Hot Shot's Secret Diesel Winter Anti-Gel or </a:t>
-            </a:r>
-            <a:r>
-              <a:rPr lang="en-US" sz="1200" b="1" dirty="0" err="1">
-                <a:solidFill>
-                  <a:srgbClr val="00B0F0"/>
-                </a:solidFill>
-              </a:rPr>
-              <a:t>Archoil</a:t>
-            </a:r>
-            <a:r>
-              <a:rPr lang="en-US" sz="1200" b="1" dirty="0">
-                <a:solidFill>
-                  <a:srgbClr val="00B0F0"/>
-                </a:solidFill>
-              </a:rPr>
-              <a:t> AR6300 </a:t>
-            </a:r>
-            <a:r>
-              <a:rPr lang="en-US" sz="1200" dirty="0"/>
-              <a:t>can protect diesel fuel down to -40°F (-40°C) when used at every fill-up. </a:t>
-            </a:r>
-          </a:p>
-          <a:p>
-            <a:pPr marL="285750" indent="-285750">
-              <a:buFont typeface="Courier New" panose="02070309020205020404" pitchFamily="49" charset="0"/>
-              <a:buChar char="o"/>
-            </a:pPr>
-            <a:r>
-              <a:rPr lang="en-US" sz="1200" dirty="0"/>
-              <a:t>Important - the additives should be mixed with fuel before temperatures drop, as </a:t>
-            </a:r>
-            <a:r>
-              <a:rPr lang="en-US" sz="1200" dirty="0">
-                <a:solidFill>
-                  <a:srgbClr val="00B0F0"/>
-                </a:solidFill>
-              </a:rPr>
-              <a:t>they cannot reverse gelling once it has already occurred</a:t>
-            </a:r>
-            <a:r>
-              <a:rPr lang="en-US" sz="1200" dirty="0"/>
-              <a:t>.</a:t>
-            </a:r>
-          </a:p>
-          <a:p>
-            <a:pPr marL="285750" indent="-285750">
-              <a:buFont typeface="Courier New" panose="02070309020205020404" pitchFamily="49" charset="0"/>
-              <a:buChar char="o"/>
-            </a:pPr>
-            <a:r>
-              <a:rPr lang="en-US" sz="1200" dirty="0"/>
-              <a:t>K100 - is a premium all-in-one diesel fuel treatment and anti-gel additive that eliminates water in fuel systems and prevents fuel gelling in cold weather. The product chemically bond with water molecules, encapsulating them and allowing them to burn harmlessly through the engine rather than causing problems.</a:t>
-            </a:r>
-          </a:p>
-          <a:p>
-            <a:r>
-              <a:rPr lang="en-US" sz="1200" dirty="0"/>
-              <a:t>------------------------------------------------</a:t>
-            </a:r>
-          </a:p>
-          <a:p>
-            <a:pPr marL="285750" indent="-285750">
-              <a:buFont typeface="Courier New" panose="02070309020205020404" pitchFamily="49" charset="0"/>
-              <a:buChar char="o"/>
-            </a:pPr>
-            <a:r>
-              <a:rPr lang="en-US" sz="1200" b="1" dirty="0">
-                <a:solidFill>
-                  <a:srgbClr val="FF0000"/>
-                </a:solidFill>
-              </a:rPr>
-              <a:t>Keep fuel tank full </a:t>
-            </a:r>
-            <a:r>
-              <a:rPr lang="en-US" sz="1200" dirty="0"/>
-              <a:t>to reduce air space and reduce moisture condensation inside the tank which can freeze and cause additional fuel system blockages. The anti-gel additive should be added to the tank before filling so it mixes thoroughly with the incoming fuel.</a:t>
-            </a:r>
-          </a:p>
-          <a:p>
-            <a:pPr marL="285750" indent="-285750">
-              <a:buFont typeface="Courier New" panose="02070309020205020404" pitchFamily="49" charset="0"/>
-              <a:buChar char="o"/>
-            </a:pPr>
-            <a:r>
-              <a:rPr lang="en-US" sz="1200" b="1" dirty="0">
-                <a:solidFill>
-                  <a:srgbClr val="FF0000"/>
-                </a:solidFill>
-              </a:rPr>
-              <a:t>Engine block heater</a:t>
-            </a:r>
-            <a:r>
-              <a:rPr lang="en-US" sz="1200" dirty="0"/>
-              <a:t> – JD engine </a:t>
-            </a:r>
-            <a:r>
-              <a:rPr lang="en-US" sz="1200" b="1" dirty="0">
-                <a:solidFill>
-                  <a:srgbClr val="00B0F0"/>
-                </a:solidFill>
-              </a:rPr>
-              <a:t>coolant heater (part number AR87167)</a:t>
-            </a:r>
-            <a:r>
-              <a:rPr lang="en-US" sz="1200" dirty="0"/>
-              <a:t> requires an </a:t>
-            </a:r>
-            <a:r>
-              <a:rPr lang="en-US" sz="1200" b="1" dirty="0">
-                <a:solidFill>
-                  <a:srgbClr val="00B0F0"/>
-                </a:solidFill>
-              </a:rPr>
-              <a:t>adapter kit (MIA881629) </a:t>
-            </a:r>
-            <a:r>
-              <a:rPr lang="en-US" sz="1200" dirty="0"/>
-              <a:t>for installation on the X758 and should be plugged in for at least </a:t>
-            </a:r>
-            <a:r>
-              <a:rPr lang="en-US" sz="1200" b="1" dirty="0">
-                <a:solidFill>
-                  <a:srgbClr val="FF0000"/>
-                </a:solidFill>
-              </a:rPr>
-              <a:t>one hour before starting</a:t>
-            </a:r>
-            <a:r>
-              <a:rPr lang="en-US" sz="1200" dirty="0"/>
-              <a:t>.</a:t>
-            </a:r>
-          </a:p>
-          <a:p>
-            <a:pPr marL="285750" indent="-285750">
-              <a:buFont typeface="Courier New" panose="02070309020205020404" pitchFamily="49" charset="0"/>
-              <a:buChar char="o"/>
-            </a:pPr>
-            <a:r>
-              <a:rPr lang="en-US" sz="1200" b="1" dirty="0">
-                <a:solidFill>
-                  <a:srgbClr val="FF0000"/>
-                </a:solidFill>
-              </a:rPr>
-              <a:t>Replace fuel filters before cold weather </a:t>
-            </a:r>
-            <a:r>
-              <a:rPr lang="en-US" sz="1200" dirty="0"/>
-              <a:t>arrives, as dirty filters trap moisture and accelerate gelling.</a:t>
-            </a:r>
-            <a:endParaRPr lang="en-US" sz="1200" b="1" dirty="0">
-              <a:solidFill>
-                <a:srgbClr val="FF0000"/>
-              </a:solidFill>
-            </a:endParaRPr>
-          </a:p>
-          <a:p>
-            <a:pPr marL="285750" indent="-285750">
-              <a:buFont typeface="Courier New" panose="02070309020205020404" pitchFamily="49" charset="0"/>
-              <a:buChar char="o"/>
-            </a:pPr>
-            <a:r>
-              <a:rPr lang="en-US" sz="1200" b="1" dirty="0">
-                <a:solidFill>
-                  <a:srgbClr val="FF0000"/>
-                </a:solidFill>
-              </a:rPr>
-              <a:t>Engine Warm-Up </a:t>
-            </a:r>
-            <a:r>
-              <a:rPr lang="en-US" sz="1200" dirty="0"/>
-              <a:t>- the X758 has glow plugs that warm the cylinders before starting.  Turn the key to the "ON" position, wait for the glow plug indicator light (squiggly line) to go off before cranking the engine. Then let the tractor idle for several minutes to </a:t>
-            </a:r>
-            <a:r>
-              <a:rPr lang="en-US" sz="1200" b="1" dirty="0">
-                <a:solidFill>
-                  <a:srgbClr val="FF0000"/>
-                </a:solidFill>
-              </a:rPr>
-              <a:t>allow both the engine and hydraulic oil to warm up</a:t>
-            </a:r>
-            <a:r>
-              <a:rPr lang="en-US" sz="1200" dirty="0"/>
-              <a:t> before operating implements or the power steering system under load</a:t>
-            </a:r>
-          </a:p>
-        </p:txBody>
-      </p:sp>
-      <p:pic>
-        <p:nvPicPr>
-          <p:cNvPr id="1026" name="Picture 2" descr="AR87167 Engine Block Coolant Heater Kit Fits for John Deere 1025R 110 2210  2305 4210 445 X495 XUV Gator 850D 855D 855M 865E - AliExpress">
-            <a:extLst>
-              <a:ext uri="{FF2B5EF4-FFF2-40B4-BE49-F238E27FC236}">
-                <a16:creationId xmlns:a16="http://schemas.microsoft.com/office/drawing/2014/main" id="{E31E646C-AD08-4238-DAB7-02DE88ECA7CC}"/>
-              </a:ext>
-            </a:extLst>
-          </p:cNvPr>
-          <p:cNvPicPr>
-            <a:picLocks noChangeAspect="1" noChangeArrowheads="1"/>
-          </p:cNvPicPr>
+              <a:rPr lang="en-US" sz="1400" dirty="0"/>
+              <a:t>21 modifications to X758:</a:t>
+            </a:r>
+          </a:p>
+          <a:p>
+            <a:r>
+              <a:rPr lang="en-US" sz="1400" dirty="0">
+                <a:hlinkClick r:id="rId2"/>
+              </a:rPr>
+              <a:t>https://</a:t>
+            </a:r>
+            <a:r>
+              <a:rPr lang="en-US" sz="1400" dirty="0" err="1">
+                <a:hlinkClick r:id="rId2"/>
+              </a:rPr>
+              <a:t>www.youtube.com</a:t>
+            </a:r>
+            <a:r>
+              <a:rPr lang="en-US" sz="1400" dirty="0">
+                <a:hlinkClick r:id="rId2"/>
+              </a:rPr>
+              <a:t>/</a:t>
+            </a:r>
+            <a:r>
+              <a:rPr lang="en-US" sz="1400" dirty="0" err="1">
+                <a:hlinkClick r:id="rId2"/>
+              </a:rPr>
+              <a:t>watch?v</a:t>
+            </a:r>
+            <a:r>
+              <a:rPr lang="en-US" sz="1400" dirty="0">
+                <a:hlinkClick r:id="rId2"/>
+              </a:rPr>
+              <a:t>=5bkI9KLGFZs</a:t>
+            </a:r>
+            <a:endParaRPr lang="en-US" sz="1400" dirty="0"/>
+          </a:p>
+          <a:p>
+            <a:r>
+              <a:rPr lang="en-US" sz="1400" dirty="0"/>
+              <a:t>Snowblower Lights; Chute Actuator (up/down);Chute Rotator (more turning);</a:t>
+            </a:r>
+          </a:p>
+          <a:p>
+            <a:r>
+              <a:rPr lang="en-US" sz="1400" dirty="0"/>
+              <a:t>Enclosed Chain for impeller; Rubber extensions for impeller; </a:t>
+            </a:r>
+          </a:p>
+          <a:p>
+            <a:r>
+              <a:rPr lang="en-US" sz="1400" dirty="0"/>
+              <a:t>Seat Cover; Seat Heaters; Heated Vest Plug; Steering Wheel Ball (spinner);</a:t>
+            </a:r>
+          </a:p>
+          <a:p>
+            <a:r>
+              <a:rPr lang="en-US" sz="1400" dirty="0"/>
+              <a:t>LED Headlights; LED Rear Lights; Dash Light; </a:t>
+            </a:r>
+          </a:p>
+          <a:p>
+            <a:r>
+              <a:rPr lang="en-US" sz="1400" dirty="0"/>
+              <a:t>Custom Relay for Chute Switch</a:t>
+            </a:r>
+          </a:p>
+          <a:p>
+            <a:r>
+              <a:rPr lang="en-US" sz="1400" dirty="0"/>
+              <a:t>Throttle Spring to throttle lever to prevent it from backing down</a:t>
+            </a:r>
+          </a:p>
+          <a:p>
+            <a:r>
+              <a:rPr lang="en-US" sz="1400" dirty="0"/>
+              <a:t>Hazard Lights; Pattern-Changing Hazard Switch; USB Output &amp; Voltmeter showing battery voltage; Toolbox Handle; Secondary Alternator (to handle electrical load of lights and heaters)</a:t>
+            </a:r>
+          </a:p>
+          <a:p>
+            <a:r>
+              <a:rPr lang="en-US" sz="1400" dirty="0"/>
+              <a:t>Bypass Modifications &amp; Lubrication - 3 smaller sub-tweaks: bypassing the reverse implement option (RIO), bypassing the seat safety switch with a jumper, and using "Fluid Film" to stop pedal squeaks and prevent rust</a:t>
+            </a:r>
+          </a:p>
+          <a:p>
+            <a:r>
+              <a:rPr lang="en-US" sz="1400" dirty="0"/>
+              <a:t>Bonus/Technical Fix: - shimming the four-wheel steer transfer shaft with feeler gauges and adding a grease </a:t>
+            </a:r>
+            <a:r>
+              <a:rPr lang="en-US" sz="1400" dirty="0" err="1"/>
+              <a:t>zert</a:t>
+            </a:r>
+            <a:r>
+              <a:rPr lang="en-US" sz="1400" dirty="0"/>
+              <a:t> to eliminate "shimmy" in the rear wheels</a:t>
+            </a:r>
+          </a:p>
+        </p:txBody>
+      </p:sp>
+      <p:sp>
+        <p:nvSpPr>
+          <p:cNvPr id="3" name="TextBox 2">
+            <a:extLst>
+              <a:ext uri="{FF2B5EF4-FFF2-40B4-BE49-F238E27FC236}">
+                <a16:creationId xmlns:a16="http://schemas.microsoft.com/office/drawing/2014/main" id="{7BC0A9F2-B671-84FC-1360-DA1CF032E6AF}"/>
+              </a:ext>
+            </a:extLst>
+          </p:cNvPr>
+          <p:cNvSpPr txBox="1"/>
           <p:nvPr/>
-        </p:nvPicPr>
-        <p:blipFill>
-          <a:blip r:embed="rId2" cstate="email">
-            <a:extLst>
-              <a:ext uri="{28A0092B-C50C-407E-A947-70E740481C1C}">
-                <a14:useLocalDpi xmlns:a14="http://schemas.microsoft.com/office/drawing/2010/main"/>
-              </a:ext>
-            </a:extLst>
-          </a:blip>
-          <a:srcRect/>
-          <a:stretch>
-            <a:fillRect/>
-          </a:stretch>
-        </p:blipFill>
-        <p:spPr bwMode="auto">
-          <a:xfrm>
-            <a:off x="147120" y="2500930"/>
-            <a:ext cx="4087091" cy="4087091"/>
+        </p:nvSpPr>
+        <p:spPr>
+          <a:xfrm>
+            <a:off x="187451" y="574020"/>
+            <a:ext cx="5925483" cy="3108543"/>
           </a:xfrm>
           <a:prstGeom prst="rect">
             <a:avLst/>
           </a:prstGeom>
           <a:noFill/>
-          <a:extLst>
-            <a:ext uri="{909E8E84-426E-40DD-AFC4-6F175D3DCCD1}">
-              <a14:hiddenFill xmlns:a14="http://schemas.microsoft.com/office/drawing/2010/main">
-                <a:solidFill>
-                  <a:srgbClr val="FFFFFF"/>
-                </a:solidFill>
-              </a14:hiddenFill>
-            </a:ext>
-          </a:extLst>
-        </p:spPr>
-      </p:pic>
-      <p:pic>
-        <p:nvPicPr>
-          <p:cNvPr id="1028" name="Picture 4" descr="John Deere AR87167 Engine Block Coolant Heater Kit 1025R 110 2210 2305 Gator">
-            <a:extLst>
-              <a:ext uri="{FF2B5EF4-FFF2-40B4-BE49-F238E27FC236}">
-                <a16:creationId xmlns:a16="http://schemas.microsoft.com/office/drawing/2014/main" id="{F97D0BC0-FBA4-1B8E-A5A3-C35BC59A28F2}"/>
-              </a:ext>
-            </a:extLst>
-          </p:cNvPr>
-          <p:cNvPicPr>
-            <a:picLocks noChangeAspect="1" noChangeArrowheads="1"/>
-          </p:cNvPicPr>
-          <p:nvPr/>
-        </p:nvPicPr>
-        <p:blipFill>
-          <a:blip r:embed="rId3" cstate="email">
-            <a:extLst>
-              <a:ext uri="{28A0092B-C50C-407E-A947-70E740481C1C}">
-                <a14:useLocalDpi xmlns:a14="http://schemas.microsoft.com/office/drawing/2010/main"/>
-              </a:ext>
-            </a:extLst>
-          </a:blip>
-          <a:srcRect/>
-          <a:stretch>
-            <a:fillRect/>
-          </a:stretch>
-        </p:blipFill>
-        <p:spPr bwMode="auto">
-          <a:xfrm>
-            <a:off x="147120" y="770857"/>
-            <a:ext cx="1482436" cy="1482436"/>
-          </a:xfrm>
-          <a:prstGeom prst="rect">
-            <a:avLst/>
-          </a:prstGeom>
-          <a:noFill/>
-          <a:extLst>
-            <a:ext uri="{909E8E84-426E-40DD-AFC4-6F175D3DCCD1}">
-              <a14:hiddenFill xmlns:a14="http://schemas.microsoft.com/office/drawing/2010/main">
-                <a:solidFill>
-                  <a:srgbClr val="FFFFFF"/>
-                </a:solidFill>
-              </a14:hiddenFill>
-            </a:ext>
-          </a:extLst>
-        </p:spPr>
-      </p:pic>
-      <p:sp>
-        <p:nvSpPr>
-          <p:cNvPr id="4" name="TextBox 3">
-            <a:extLst>
-              <a:ext uri="{FF2B5EF4-FFF2-40B4-BE49-F238E27FC236}">
-                <a16:creationId xmlns:a16="http://schemas.microsoft.com/office/drawing/2014/main" id="{4248EAA2-37A7-21EF-BFB2-53447F6C3A8C}"/>
-              </a:ext>
-            </a:extLst>
-          </p:cNvPr>
-          <p:cNvSpPr txBox="1"/>
-          <p:nvPr/>
-        </p:nvSpPr>
-        <p:spPr>
-          <a:xfrm>
-            <a:off x="1629556" y="808399"/>
-            <a:ext cx="3164117" cy="1200329"/>
-          </a:xfrm>
-          <a:prstGeom prst="rect">
-            <a:avLst/>
-          </a:prstGeom>
-          <a:noFill/>
         </p:spPr>
         <p:txBody>
           <a:bodyPr wrap="square" rtlCol="0">
@@ -6341,17 +6398,93 @@
           <a:lstStyle/>
           <a:p>
             <a:r>
-              <a:rPr lang="en-US" dirty="0"/>
-              <a:t>The warmth spreads through the entire engine via natural convection of the coolant. It takes 1-2 hours </a:t>
-            </a:r>
+              <a:rPr lang="en-US" sz="1400" dirty="0"/>
+              <a:t>I want BM20780 - a 7-bu (247-L) 2-Bag Hopper Assembly</a:t>
+            </a:r>
+          </a:p>
+          <a:p>
+            <a:r>
+              <a:rPr lang="en-US" sz="1400" dirty="0"/>
+              <a:t>(X400/X500 HDGT and X700 Series)</a:t>
+            </a:r>
+          </a:p>
+          <a:p>
             <a:endParaRPr lang="en-US" sz="1400" dirty="0"/>
+          </a:p>
+          <a:p>
+            <a:r>
+              <a:rPr lang="en-US" sz="1400" dirty="0"/>
+              <a:t>I don't like the JD 20-bushel Click-N-Go Material Collection System,</a:t>
+            </a:r>
+          </a:p>
+          <a:p>
+            <a:r>
+              <a:rPr lang="en-US" sz="1400" dirty="0"/>
+              <a:t>It is too heavy, requires weights at the front of the tractor for balance</a:t>
+            </a:r>
+          </a:p>
+          <a:p>
+            <a:r>
+              <a:rPr lang="en-US" sz="1400" dirty="0"/>
+              <a:t>My current bagger on JD-425 is 7-bu (two bags, each one is 3.5 </a:t>
+            </a:r>
+            <a:r>
+              <a:rPr lang="en-US" sz="1400" dirty="0" err="1"/>
+              <a:t>bu</a:t>
+            </a:r>
+            <a:r>
+              <a:rPr lang="en-US" sz="1400" dirty="0"/>
+              <a:t>) – I like it.</a:t>
+            </a:r>
+          </a:p>
+          <a:p>
+            <a:endParaRPr lang="en-US" sz="1400" dirty="0"/>
+          </a:p>
+          <a:p>
+            <a:r>
+              <a:rPr lang="en-US" sz="1400" dirty="0"/>
+              <a:t>Deere lists for X700 Signature Series (including X758):</a:t>
+            </a:r>
+          </a:p>
+          <a:p>
+            <a:r>
+              <a:rPr lang="en-US" sz="1400" dirty="0"/>
+              <a:t> - a 7‑bu two‑bag Power Flow hopper – my preference</a:t>
+            </a:r>
+          </a:p>
+          <a:p>
+            <a:r>
+              <a:rPr lang="en-US" sz="1400" dirty="0"/>
+              <a:t> - a 14‑bu three‑bag hopper – I don't need 3 bags</a:t>
+            </a:r>
+          </a:p>
+          <a:p>
+            <a:endParaRPr lang="en-US" sz="1400" dirty="0"/>
+          </a:p>
+          <a:p>
+            <a:r>
+              <a:rPr lang="en-US" sz="1400" dirty="0"/>
+              <a:t>The BM20780 7‑bu 2‑bag hopper is specifically</a:t>
+            </a:r>
+          </a:p>
+          <a:p>
+            <a:r>
+              <a:rPr lang="en-US" sz="1400" dirty="0"/>
+              <a:t>designed to mount to the rear Click‑N‑Go system BM20714</a:t>
+            </a:r>
+          </a:p>
+          <a:p>
+            <a:r>
+              <a:rPr lang="en-US" sz="1400" dirty="0"/>
+              <a:t>on X700‑series tractors, including the X758</a:t>
+            </a:r>
           </a:p>
         </p:txBody>
       </p:sp>
     </p:spTree>
     <p:extLst>
       <p:ext uri="{BB962C8B-B14F-4D97-AF65-F5344CB8AC3E}">
-        <p14:creationId xmlns:p14="http://schemas.microsoft.com/office/powerpoint/2010/main" val="1288276014"/>
+        <p14:creationId xmlns:p14="http://schemas.microsoft.com/office/powerpoint/2010/main" val="648698519"/>
       </p:ext>
     </p:extLst>
   </p:cSld>
@@ -6408,6 +6541,548 @@
           <a:p>
             <a:r>
               <a:rPr lang="en-US" sz="2800" b="1" dirty="0"/>
+              <a:t>John Deere X758</a:t>
+            </a:r>
+          </a:p>
+        </p:txBody>
+      </p:sp>
+      <p:sp>
+        <p:nvSpPr>
+          <p:cNvPr id="3" name="TextBox 2">
+            <a:extLst>
+              <a:ext uri="{FF2B5EF4-FFF2-40B4-BE49-F238E27FC236}">
+                <a16:creationId xmlns:a16="http://schemas.microsoft.com/office/drawing/2014/main" id="{DC69E50A-DD6F-49A2-50A0-AE0A50A8C419}"/>
+              </a:ext>
+            </a:extLst>
+          </p:cNvPr>
+          <p:cNvSpPr txBox="1"/>
+          <p:nvPr/>
+        </p:nvSpPr>
+        <p:spPr>
+          <a:xfrm>
+            <a:off x="5048251" y="567268"/>
+            <a:ext cx="6996630" cy="5632311"/>
+          </a:xfrm>
+          <a:prstGeom prst="rect">
+            <a:avLst/>
+          </a:prstGeom>
+          <a:noFill/>
+        </p:spPr>
+        <p:txBody>
+          <a:bodyPr wrap="square" rtlCol="0">
+            <a:spAutoFit/>
+          </a:bodyPr>
+          <a:lstStyle/>
+          <a:p>
+            <a:r>
+              <a:rPr lang="en-US" sz="1200" b="1" dirty="0">
+                <a:solidFill>
+                  <a:srgbClr val="00B050"/>
+                </a:solidFill>
+              </a:rPr>
+              <a:t>What to do at low temperature: -20°C (-4°F):</a:t>
+            </a:r>
+            <a:endParaRPr lang="en-US" sz="1200" dirty="0">
+              <a:solidFill>
+                <a:srgbClr val="00B050"/>
+              </a:solidFill>
+            </a:endParaRPr>
+          </a:p>
+          <a:p>
+            <a:pPr marL="285750" indent="-285750">
+              <a:buFont typeface="Courier New" panose="02070309020205020404" pitchFamily="49" charset="0"/>
+              <a:buChar char="o"/>
+            </a:pPr>
+            <a:r>
+              <a:rPr lang="en-US" sz="1200" b="1" dirty="0">
+                <a:solidFill>
+                  <a:srgbClr val="FF0000"/>
+                </a:solidFill>
+              </a:rPr>
+              <a:t>Engine oil</a:t>
+            </a:r>
+            <a:r>
+              <a:rPr lang="en-US" sz="1200" dirty="0"/>
+              <a:t>: use lower viscosity 0W-40 or 5W-40 </a:t>
+            </a:r>
+            <a:r>
+              <a:rPr lang="en-US" sz="1200" b="1" dirty="0">
+                <a:solidFill>
+                  <a:srgbClr val="00B0F0"/>
+                </a:solidFill>
+              </a:rPr>
+              <a:t>synthetic diesel oil</a:t>
+            </a:r>
+          </a:p>
+          <a:p>
+            <a:pPr marL="285750" indent="-285750">
+              <a:buFont typeface="Courier New" panose="02070309020205020404" pitchFamily="49" charset="0"/>
+              <a:buChar char="o"/>
+            </a:pPr>
+            <a:r>
+              <a:rPr lang="en-US" sz="1200" b="1" dirty="0">
+                <a:solidFill>
+                  <a:srgbClr val="FF0000"/>
+                </a:solidFill>
+              </a:rPr>
+              <a:t>Hydraulic fluid </a:t>
+            </a:r>
+            <a:r>
+              <a:rPr lang="en-US" sz="1200" dirty="0"/>
+              <a:t>– </a:t>
+            </a:r>
+            <a:r>
+              <a:rPr lang="en-US" sz="1200" b="1" dirty="0">
+                <a:solidFill>
+                  <a:srgbClr val="00B0F0"/>
+                </a:solidFill>
+              </a:rPr>
+              <a:t>use premium synthetic hydraulic fluids with cold-flow improvers</a:t>
+            </a:r>
+            <a:r>
+              <a:rPr lang="en-US" sz="1200" dirty="0"/>
+              <a:t>. </a:t>
+            </a:r>
+          </a:p>
+          <a:p>
+            <a:pPr marL="285750" indent="-285750">
+              <a:buFont typeface="Courier New" panose="02070309020205020404" pitchFamily="49" charset="0"/>
+              <a:buChar char="o"/>
+            </a:pPr>
+            <a:r>
+              <a:rPr lang="en-US" sz="1200" b="1" dirty="0">
+                <a:solidFill>
+                  <a:srgbClr val="FF0000"/>
+                </a:solidFill>
+              </a:rPr>
+              <a:t>Fuel Additives (anti-gel additives) </a:t>
+            </a:r>
+            <a:r>
+              <a:rPr lang="en-US" sz="1200" dirty="0"/>
+              <a:t>– need to be added at temperatures below -12°C (10-15°F), they prevent wax crystals from sticking together, and disperse moisture to prevent ice formation in fuel filters. </a:t>
+            </a:r>
+          </a:p>
+          <a:p>
+            <a:pPr marL="285750" indent="-285750">
+              <a:buFont typeface="Courier New" panose="02070309020205020404" pitchFamily="49" charset="0"/>
+              <a:buChar char="o"/>
+            </a:pPr>
+            <a:r>
+              <a:rPr lang="en-US" sz="1200" dirty="0"/>
+              <a:t>John Deere Recommended its own Additive - John Deere Fuel-Protect Winter Formula (TY27786). It contains wax crystal modifiers that prevent fuel gelling by changing the shape and size of wax crystals as they form. This allows smaller crystals to pass through the fuel filter instead of clumping together and blocking flow. </a:t>
+            </a:r>
+          </a:p>
+          <a:p>
+            <a:pPr marL="285750" indent="-285750">
+              <a:buFont typeface="Courier New" panose="02070309020205020404" pitchFamily="49" charset="0"/>
+              <a:buChar char="o"/>
+            </a:pPr>
+            <a:r>
+              <a:rPr lang="en-US" sz="1200" dirty="0"/>
+              <a:t>The winter formula typically protects 15-20°F below the fuel's cloud point (which is 15-19F, so with additive we can go down to </a:t>
+            </a:r>
+            <a:r>
+              <a:rPr lang="en-US" sz="1200" dirty="0" err="1"/>
+              <a:t>approx</a:t>
+            </a:r>
+            <a:r>
+              <a:rPr lang="en-US" sz="1200" dirty="0"/>
+              <a:t> 0°F )</a:t>
+            </a:r>
+          </a:p>
+          <a:p>
+            <a:pPr marL="285750" indent="-285750">
+              <a:buFont typeface="Courier New" panose="02070309020205020404" pitchFamily="49" charset="0"/>
+              <a:buChar char="o"/>
+            </a:pPr>
+            <a:r>
+              <a:rPr lang="en-US" sz="1200" dirty="0"/>
+              <a:t>Products like </a:t>
+            </a:r>
+            <a:r>
+              <a:rPr lang="en-US" sz="1200" b="1" dirty="0">
+                <a:solidFill>
+                  <a:srgbClr val="00B0F0"/>
+                </a:solidFill>
+              </a:rPr>
+              <a:t>Hot Shot's Secret Diesel Winter Anti-Gel or </a:t>
+            </a:r>
+            <a:r>
+              <a:rPr lang="en-US" sz="1200" b="1" dirty="0" err="1">
+                <a:solidFill>
+                  <a:srgbClr val="00B0F0"/>
+                </a:solidFill>
+              </a:rPr>
+              <a:t>Archoil</a:t>
+            </a:r>
+            <a:r>
+              <a:rPr lang="en-US" sz="1200" b="1" dirty="0">
+                <a:solidFill>
+                  <a:srgbClr val="00B0F0"/>
+                </a:solidFill>
+              </a:rPr>
+              <a:t> AR6300 </a:t>
+            </a:r>
+            <a:r>
+              <a:rPr lang="en-US" sz="1200" dirty="0"/>
+              <a:t>can protect diesel fuel down to -40°F (-40°C) when used at every fill-up. </a:t>
+            </a:r>
+          </a:p>
+          <a:p>
+            <a:pPr marL="285750" indent="-285750">
+              <a:buFont typeface="Courier New" panose="02070309020205020404" pitchFamily="49" charset="0"/>
+              <a:buChar char="o"/>
+            </a:pPr>
+            <a:r>
+              <a:rPr lang="en-US" sz="1200" dirty="0"/>
+              <a:t>Important - the additives should be mixed with fuel before temperatures drop, as </a:t>
+            </a:r>
+            <a:r>
+              <a:rPr lang="en-US" sz="1200" dirty="0">
+                <a:solidFill>
+                  <a:srgbClr val="00B0F0"/>
+                </a:solidFill>
+              </a:rPr>
+              <a:t>they cannot reverse gelling once it has already occurred</a:t>
+            </a:r>
+            <a:r>
+              <a:rPr lang="en-US" sz="1200" dirty="0"/>
+              <a:t>.</a:t>
+            </a:r>
+          </a:p>
+          <a:p>
+            <a:pPr marL="285750" indent="-285750">
+              <a:buFont typeface="Courier New" panose="02070309020205020404" pitchFamily="49" charset="0"/>
+              <a:buChar char="o"/>
+            </a:pPr>
+            <a:r>
+              <a:rPr lang="en-US" sz="1200" dirty="0"/>
+              <a:t>K100 - is a premium all-in-one diesel fuel treatment and anti-gel additive that eliminates water in fuel systems and prevents fuel gelling in cold weather. The product chemically bond with water molecules, encapsulating them and allowing them to burn harmlessly through the engine rather than causing problems.</a:t>
+            </a:r>
+          </a:p>
+          <a:p>
+            <a:r>
+              <a:rPr lang="en-US" sz="1200" dirty="0"/>
+              <a:t>------------------------------------------------</a:t>
+            </a:r>
+          </a:p>
+          <a:p>
+            <a:pPr marL="285750" indent="-285750">
+              <a:buFont typeface="Courier New" panose="02070309020205020404" pitchFamily="49" charset="0"/>
+              <a:buChar char="o"/>
+            </a:pPr>
+            <a:r>
+              <a:rPr lang="en-US" sz="1200" b="1" dirty="0">
+                <a:solidFill>
+                  <a:srgbClr val="FF0000"/>
+                </a:solidFill>
+              </a:rPr>
+              <a:t>Keep fuel tank full </a:t>
+            </a:r>
+            <a:r>
+              <a:rPr lang="en-US" sz="1200" dirty="0"/>
+              <a:t>to reduce air space and reduce moisture condensation inside the tank which can freeze and cause additional fuel system blockages. The anti-gel additive should be added to the tank before filling so it mixes thoroughly with the incoming fuel.</a:t>
+            </a:r>
+          </a:p>
+          <a:p>
+            <a:pPr marL="285750" indent="-285750">
+              <a:buFont typeface="Courier New" panose="02070309020205020404" pitchFamily="49" charset="0"/>
+              <a:buChar char="o"/>
+            </a:pPr>
+            <a:r>
+              <a:rPr lang="en-US" sz="1200" b="1" dirty="0">
+                <a:solidFill>
+                  <a:srgbClr val="FF0000"/>
+                </a:solidFill>
+              </a:rPr>
+              <a:t>Engine block heater</a:t>
+            </a:r>
+            <a:r>
+              <a:rPr lang="en-US" sz="1200" dirty="0"/>
+              <a:t> – JD engine </a:t>
+            </a:r>
+            <a:r>
+              <a:rPr lang="en-US" sz="1200" b="1" dirty="0">
+                <a:solidFill>
+                  <a:srgbClr val="00B0F0"/>
+                </a:solidFill>
+              </a:rPr>
+              <a:t>coolant heater (part number AR87167)</a:t>
+            </a:r>
+            <a:r>
+              <a:rPr lang="en-US" sz="1200" dirty="0"/>
+              <a:t> requires an </a:t>
+            </a:r>
+            <a:r>
+              <a:rPr lang="en-US" sz="1200" b="1" dirty="0">
+                <a:solidFill>
+                  <a:srgbClr val="00B0F0"/>
+                </a:solidFill>
+              </a:rPr>
+              <a:t>adapter kit (MIA881629) </a:t>
+            </a:r>
+            <a:r>
+              <a:rPr lang="en-US" sz="1200" dirty="0"/>
+              <a:t>for installation on the X758 and should be plugged in for at least </a:t>
+            </a:r>
+            <a:r>
+              <a:rPr lang="en-US" sz="1200" b="1" dirty="0">
+                <a:solidFill>
+                  <a:srgbClr val="FF0000"/>
+                </a:solidFill>
+              </a:rPr>
+              <a:t>one hour before starting</a:t>
+            </a:r>
+            <a:r>
+              <a:rPr lang="en-US" sz="1200" dirty="0"/>
+              <a:t>.</a:t>
+            </a:r>
+          </a:p>
+          <a:p>
+            <a:pPr marL="285750" indent="-285750">
+              <a:buFont typeface="Courier New" panose="02070309020205020404" pitchFamily="49" charset="0"/>
+              <a:buChar char="o"/>
+            </a:pPr>
+            <a:r>
+              <a:rPr lang="en-US" sz="1200" b="1" dirty="0">
+                <a:solidFill>
+                  <a:srgbClr val="FF0000"/>
+                </a:solidFill>
+              </a:rPr>
+              <a:t>Replace fuel filters before cold weather </a:t>
+            </a:r>
+            <a:r>
+              <a:rPr lang="en-US" sz="1200" dirty="0"/>
+              <a:t>arrives, as dirty filters trap moisture and accelerate gelling.</a:t>
+            </a:r>
+            <a:endParaRPr lang="en-US" sz="1200" b="1" dirty="0">
+              <a:solidFill>
+                <a:srgbClr val="FF0000"/>
+              </a:solidFill>
+            </a:endParaRPr>
+          </a:p>
+          <a:p>
+            <a:pPr marL="285750" indent="-285750">
+              <a:buFont typeface="Courier New" panose="02070309020205020404" pitchFamily="49" charset="0"/>
+              <a:buChar char="o"/>
+            </a:pPr>
+            <a:r>
+              <a:rPr lang="en-US" sz="1200" b="1" dirty="0">
+                <a:solidFill>
+                  <a:srgbClr val="FF0000"/>
+                </a:solidFill>
+              </a:rPr>
+              <a:t>Engine Warm-Up </a:t>
+            </a:r>
+            <a:r>
+              <a:rPr lang="en-US" sz="1200" dirty="0"/>
+              <a:t>- the X758 has glow plugs that warm the cylinders before starting.  Turn the key to the "ON" position, wait for the glow plug indicator light (squiggly line) to go off before cranking the engine. Then let the tractor idle for several minutes to </a:t>
+            </a:r>
+            <a:r>
+              <a:rPr lang="en-US" sz="1200" b="1" dirty="0">
+                <a:solidFill>
+                  <a:srgbClr val="FF0000"/>
+                </a:solidFill>
+              </a:rPr>
+              <a:t>allow both the engine and hydraulic oil to warm up</a:t>
+            </a:r>
+            <a:r>
+              <a:rPr lang="en-US" sz="1200" dirty="0"/>
+              <a:t> before operating implements or the power steering system under load</a:t>
+            </a:r>
+          </a:p>
+        </p:txBody>
+      </p:sp>
+      <p:pic>
+        <p:nvPicPr>
+          <p:cNvPr id="1026" name="Picture 2" descr="AR87167 Engine Block Coolant Heater Kit Fits for John Deere 1025R 110 2210  2305 4210 445 X495 XUV Gator 850D 855D 855M 865E - AliExpress">
+            <a:extLst>
+              <a:ext uri="{FF2B5EF4-FFF2-40B4-BE49-F238E27FC236}">
+                <a16:creationId xmlns:a16="http://schemas.microsoft.com/office/drawing/2014/main" id="{E31E646C-AD08-4238-DAB7-02DE88ECA7CC}"/>
+              </a:ext>
+            </a:extLst>
+          </p:cNvPr>
+          <p:cNvPicPr>
+            <a:picLocks noChangeAspect="1" noChangeArrowheads="1"/>
+          </p:cNvPicPr>
+          <p:nvPr/>
+        </p:nvPicPr>
+        <p:blipFill>
+          <a:blip r:embed="rId2" cstate="email">
+            <a:extLst>
+              <a:ext uri="{28A0092B-C50C-407E-A947-70E740481C1C}">
+                <a14:useLocalDpi xmlns:a14="http://schemas.microsoft.com/office/drawing/2010/main"/>
+              </a:ext>
+            </a:extLst>
+          </a:blip>
+          <a:srcRect/>
+          <a:stretch>
+            <a:fillRect/>
+          </a:stretch>
+        </p:blipFill>
+        <p:spPr bwMode="auto">
+          <a:xfrm>
+            <a:off x="147120" y="2500930"/>
+            <a:ext cx="4087091" cy="4087091"/>
+          </a:xfrm>
+          <a:prstGeom prst="rect">
+            <a:avLst/>
+          </a:prstGeom>
+          <a:noFill/>
+          <a:extLst>
+            <a:ext uri="{909E8E84-426E-40DD-AFC4-6F175D3DCCD1}">
+              <a14:hiddenFill xmlns:a14="http://schemas.microsoft.com/office/drawing/2010/main">
+                <a:solidFill>
+                  <a:srgbClr val="FFFFFF"/>
+                </a:solidFill>
+              </a14:hiddenFill>
+            </a:ext>
+          </a:extLst>
+        </p:spPr>
+      </p:pic>
+      <p:pic>
+        <p:nvPicPr>
+          <p:cNvPr id="1028" name="Picture 4" descr="John Deere AR87167 Engine Block Coolant Heater Kit 1025R 110 2210 2305 Gator">
+            <a:extLst>
+              <a:ext uri="{FF2B5EF4-FFF2-40B4-BE49-F238E27FC236}">
+                <a16:creationId xmlns:a16="http://schemas.microsoft.com/office/drawing/2014/main" id="{F97D0BC0-FBA4-1B8E-A5A3-C35BC59A28F2}"/>
+              </a:ext>
+            </a:extLst>
+          </p:cNvPr>
+          <p:cNvPicPr>
+            <a:picLocks noChangeAspect="1" noChangeArrowheads="1"/>
+          </p:cNvPicPr>
+          <p:nvPr/>
+        </p:nvPicPr>
+        <p:blipFill>
+          <a:blip r:embed="rId3" cstate="email">
+            <a:extLst>
+              <a:ext uri="{28A0092B-C50C-407E-A947-70E740481C1C}">
+                <a14:useLocalDpi xmlns:a14="http://schemas.microsoft.com/office/drawing/2010/main"/>
+              </a:ext>
+            </a:extLst>
+          </a:blip>
+          <a:srcRect/>
+          <a:stretch>
+            <a:fillRect/>
+          </a:stretch>
+        </p:blipFill>
+        <p:spPr bwMode="auto">
+          <a:xfrm>
+            <a:off x="147120" y="770857"/>
+            <a:ext cx="1482436" cy="1482436"/>
+          </a:xfrm>
+          <a:prstGeom prst="rect">
+            <a:avLst/>
+          </a:prstGeom>
+          <a:noFill/>
+          <a:extLst>
+            <a:ext uri="{909E8E84-426E-40DD-AFC4-6F175D3DCCD1}">
+              <a14:hiddenFill xmlns:a14="http://schemas.microsoft.com/office/drawing/2010/main">
+                <a:solidFill>
+                  <a:srgbClr val="FFFFFF"/>
+                </a:solidFill>
+              </a14:hiddenFill>
+            </a:ext>
+          </a:extLst>
+        </p:spPr>
+      </p:pic>
+      <p:sp>
+        <p:nvSpPr>
+          <p:cNvPr id="4" name="TextBox 3">
+            <a:extLst>
+              <a:ext uri="{FF2B5EF4-FFF2-40B4-BE49-F238E27FC236}">
+                <a16:creationId xmlns:a16="http://schemas.microsoft.com/office/drawing/2014/main" id="{4248EAA2-37A7-21EF-BFB2-53447F6C3A8C}"/>
+              </a:ext>
+            </a:extLst>
+          </p:cNvPr>
+          <p:cNvSpPr txBox="1"/>
+          <p:nvPr/>
+        </p:nvSpPr>
+        <p:spPr>
+          <a:xfrm>
+            <a:off x="1629556" y="808399"/>
+            <a:ext cx="3164117" cy="1200329"/>
+          </a:xfrm>
+          <a:prstGeom prst="rect">
+            <a:avLst/>
+          </a:prstGeom>
+          <a:noFill/>
+        </p:spPr>
+        <p:txBody>
+          <a:bodyPr wrap="square" rtlCol="0">
+            <a:spAutoFit/>
+          </a:bodyPr>
+          <a:lstStyle/>
+          <a:p>
+            <a:r>
+              <a:rPr lang="en-US" dirty="0"/>
+              <a:t>The warmth spreads through the entire engine via natural convection of the coolant. It takes 1-2 hours </a:t>
+            </a:r>
+            <a:endParaRPr lang="en-US" sz="1400" dirty="0"/>
+          </a:p>
+        </p:txBody>
+      </p:sp>
+    </p:spTree>
+    <p:extLst>
+      <p:ext uri="{BB962C8B-B14F-4D97-AF65-F5344CB8AC3E}">
+        <p14:creationId xmlns:p14="http://schemas.microsoft.com/office/powerpoint/2010/main" val="1288276014"/>
+      </p:ext>
+    </p:extLst>
+  </p:cSld>
+  <p:clrMapOvr>
+    <a:masterClrMapping/>
+  </p:clrMapOvr>
+</p:sld>
+</file>
+
+<file path=ppt/slides/slide7.xml><?xml version="1.0" encoding="utf-8"?>
+<p:sld xmlns:a="http://schemas.openxmlformats.org/drawingml/2006/main" xmlns:r="http://schemas.openxmlformats.org/officeDocument/2006/relationships" xmlns:p="http://schemas.openxmlformats.org/presentationml/2006/main">
+  <p:cSld>
+    <p:spTree>
+      <p:nvGrpSpPr>
+        <p:cNvPr id="1" name=""/>
+        <p:cNvGrpSpPr/>
+        <p:nvPr/>
+      </p:nvGrpSpPr>
+      <p:grpSpPr>
+        <a:xfrm>
+          <a:off x="0" y="0"/>
+          <a:ext cx="0" cy="0"/>
+          <a:chOff x="0" y="0"/>
+          <a:chExt cx="0" cy="0"/>
+        </a:xfrm>
+      </p:grpSpPr>
+      <p:sp>
+        <p:nvSpPr>
+          <p:cNvPr id="2" name="TextBox 1">
+            <a:extLst>
+              <a:ext uri="{FF2B5EF4-FFF2-40B4-BE49-F238E27FC236}">
+                <a16:creationId xmlns:a16="http://schemas.microsoft.com/office/drawing/2014/main" id="{775BBD15-AEC2-1815-2347-A5BB8F308263}"/>
+              </a:ext>
+            </a:extLst>
+          </p:cNvPr>
+          <p:cNvSpPr txBox="1"/>
+          <p:nvPr/>
+        </p:nvSpPr>
+        <p:spPr>
+          <a:xfrm>
+            <a:off x="-1" y="0"/>
+            <a:ext cx="6096001" cy="523220"/>
+          </a:xfrm>
+          <a:prstGeom prst="rect">
+            <a:avLst/>
+          </a:prstGeom>
+          <a:noFill/>
+        </p:spPr>
+        <p:txBody>
+          <a:bodyPr wrap="square" rtlCol="0">
+            <a:spAutoFit/>
+          </a:bodyPr>
+          <a:lstStyle/>
+          <a:p>
+            <a:r>
+              <a:rPr lang="en-US" sz="2800" b="1" dirty="0"/>
               <a:t>John Deere X758 – Fuel Filter Heater</a:t>
             </a:r>
           </a:p>
@@ -6837,7 +7512,7 @@
 </p:sld>
 </file>
 
-<file path=ppt/slides/slide7.xml><?xml version="1.0" encoding="utf-8"?>
+<file path=ppt/slides/slide8.xml><?xml version="1.0" encoding="utf-8"?>
 <p:sld xmlns:a="http://schemas.openxmlformats.org/drawingml/2006/main" xmlns:r="http://schemas.openxmlformats.org/officeDocument/2006/relationships" xmlns:p="http://schemas.openxmlformats.org/presentationml/2006/main">
   <p:cSld>
     <p:spTree>
@@ -7389,7 +8064,7 @@
 </p:sld>
 </file>
 
-<file path=ppt/slides/slide8.xml><?xml version="1.0" encoding="utf-8"?>
+<file path=ppt/slides/slide9.xml><?xml version="1.0" encoding="utf-8"?>
 <p:sld xmlns:a="http://schemas.openxmlformats.org/drawingml/2006/main" xmlns:r="http://schemas.openxmlformats.org/officeDocument/2006/relationships" xmlns:p="http://schemas.openxmlformats.org/presentationml/2006/main">
   <p:cSld>
     <p:spTree>
@@ -7774,328 +8449,6 @@
     <p:extLst>
       <p:ext uri="{BB962C8B-B14F-4D97-AF65-F5344CB8AC3E}">
         <p14:creationId xmlns:p14="http://schemas.microsoft.com/office/powerpoint/2010/main" val="1009907999"/>
-      </p:ext>
-    </p:extLst>
-  </p:cSld>
-  <p:clrMapOvr>
-    <a:masterClrMapping/>
-  </p:clrMapOvr>
-</p:sld>
-</file>
-
-<file path=ppt/slides/slide9.xml><?xml version="1.0" encoding="utf-8"?>
-<p:sld xmlns:a="http://schemas.openxmlformats.org/drawingml/2006/main" xmlns:r="http://schemas.openxmlformats.org/officeDocument/2006/relationships" xmlns:p="http://schemas.openxmlformats.org/presentationml/2006/main">
-  <p:cSld>
-    <p:spTree>
-      <p:nvGrpSpPr>
-        <p:cNvPr id="1" name=""/>
-        <p:cNvGrpSpPr/>
-        <p:nvPr/>
-      </p:nvGrpSpPr>
-      <p:grpSpPr>
-        <a:xfrm>
-          <a:off x="0" y="0"/>
-          <a:ext cx="0" cy="0"/>
-          <a:chOff x="0" y="0"/>
-          <a:chExt cx="0" cy="0"/>
-        </a:xfrm>
-      </p:grpSpPr>
-      <p:sp>
-        <p:nvSpPr>
-          <p:cNvPr id="2" name="TextBox 1">
-            <a:extLst>
-              <a:ext uri="{FF2B5EF4-FFF2-40B4-BE49-F238E27FC236}">
-                <a16:creationId xmlns:a16="http://schemas.microsoft.com/office/drawing/2014/main" id="{775BBD15-AEC2-1815-2347-A5BB8F308263}"/>
-              </a:ext>
-            </a:extLst>
-          </p:cNvPr>
-          <p:cNvSpPr txBox="1"/>
-          <p:nvPr/>
-        </p:nvSpPr>
-        <p:spPr>
-          <a:xfrm>
-            <a:off x="-1" y="0"/>
-            <a:ext cx="5585791" cy="523220"/>
-          </a:xfrm>
-          <a:prstGeom prst="rect">
-            <a:avLst/>
-          </a:prstGeom>
-          <a:noFill/>
-        </p:spPr>
-        <p:txBody>
-          <a:bodyPr wrap="square" rtlCol="0">
-            <a:spAutoFit/>
-          </a:bodyPr>
-          <a:lstStyle/>
-          <a:p>
-            <a:r>
-              <a:rPr lang="en-US" sz="2800" b="1" dirty="0"/>
-              <a:t>Other tractors with PTO $30-$50K</a:t>
-            </a:r>
-          </a:p>
-        </p:txBody>
-      </p:sp>
-      <p:sp>
-        <p:nvSpPr>
-          <p:cNvPr id="3" name="TextBox 2">
-            <a:extLst>
-              <a:ext uri="{FF2B5EF4-FFF2-40B4-BE49-F238E27FC236}">
-                <a16:creationId xmlns:a16="http://schemas.microsoft.com/office/drawing/2014/main" id="{6E16EF48-8881-49F2-8460-25D7441E2332}"/>
-              </a:ext>
-            </a:extLst>
-          </p:cNvPr>
-          <p:cNvSpPr txBox="1"/>
-          <p:nvPr/>
-        </p:nvSpPr>
-        <p:spPr>
-          <a:xfrm>
-            <a:off x="0" y="489392"/>
-            <a:ext cx="4593021" cy="276999"/>
-          </a:xfrm>
-          <a:prstGeom prst="rect">
-            <a:avLst/>
-          </a:prstGeom>
-          <a:noFill/>
-        </p:spPr>
-        <p:txBody>
-          <a:bodyPr wrap="square" rtlCol="0">
-            <a:spAutoFit/>
-          </a:bodyPr>
-          <a:lstStyle/>
-          <a:p>
-            <a:r>
-              <a:rPr lang="en-US" sz="1200">
-                <a:hlinkClick r:id="rId2"/>
-              </a:rPr>
-              <a:t>https://www.tractor.com/news/5-of-the-best-compact-tractor-choices/</a:t>
-            </a:r>
-            <a:endParaRPr lang="en-US" sz="1200"/>
-          </a:p>
-        </p:txBody>
-      </p:sp>
-      <p:pic>
-        <p:nvPicPr>
-          <p:cNvPr id="4" name="Picture 3">
-            <a:extLst>
-              <a:ext uri="{FF2B5EF4-FFF2-40B4-BE49-F238E27FC236}">
-                <a16:creationId xmlns:a16="http://schemas.microsoft.com/office/drawing/2014/main" id="{E417BA77-09D9-7E27-801F-69193D91F8DA}"/>
-              </a:ext>
-            </a:extLst>
-          </p:cNvPr>
-          <p:cNvPicPr>
-            <a:picLocks noChangeAspect="1"/>
-          </p:cNvPicPr>
-          <p:nvPr/>
-        </p:nvPicPr>
-        <p:blipFill>
-          <a:blip r:embed="rId3" cstate="email">
-            <a:extLst>
-              <a:ext uri="{28A0092B-C50C-407E-A947-70E740481C1C}">
-                <a14:useLocalDpi xmlns:a14="http://schemas.microsoft.com/office/drawing/2010/main"/>
-              </a:ext>
-            </a:extLst>
-          </a:blip>
-          <a:stretch>
-            <a:fillRect/>
-          </a:stretch>
-        </p:blipFill>
-        <p:spPr>
-          <a:xfrm>
-            <a:off x="200379" y="1138958"/>
-            <a:ext cx="2388860" cy="1934779"/>
-          </a:xfrm>
-          <a:prstGeom prst="rect">
-            <a:avLst/>
-          </a:prstGeom>
-        </p:spPr>
-      </p:pic>
-      <p:pic>
-        <p:nvPicPr>
-          <p:cNvPr id="5" name="Picture 4">
-            <a:extLst>
-              <a:ext uri="{FF2B5EF4-FFF2-40B4-BE49-F238E27FC236}">
-                <a16:creationId xmlns:a16="http://schemas.microsoft.com/office/drawing/2014/main" id="{49F5BA98-0D48-BA24-1215-B23D6670903D}"/>
-              </a:ext>
-            </a:extLst>
-          </p:cNvPr>
-          <p:cNvPicPr>
-            <a:picLocks noChangeAspect="1"/>
-          </p:cNvPicPr>
-          <p:nvPr/>
-        </p:nvPicPr>
-        <p:blipFill>
-          <a:blip r:embed="rId4" cstate="email">
-            <a:extLst>
-              <a:ext uri="{28A0092B-C50C-407E-A947-70E740481C1C}">
-                <a14:useLocalDpi xmlns:a14="http://schemas.microsoft.com/office/drawing/2010/main"/>
-              </a:ext>
-            </a:extLst>
-          </a:blip>
-          <a:stretch>
-            <a:fillRect/>
-          </a:stretch>
-        </p:blipFill>
-        <p:spPr>
-          <a:xfrm>
-            <a:off x="2990285" y="1138958"/>
-            <a:ext cx="2852152" cy="1882228"/>
-          </a:xfrm>
-          <a:prstGeom prst="rect">
-            <a:avLst/>
-          </a:prstGeom>
-        </p:spPr>
-      </p:pic>
-      <p:pic>
-        <p:nvPicPr>
-          <p:cNvPr id="6" name="Picture 5">
-            <a:extLst>
-              <a:ext uri="{FF2B5EF4-FFF2-40B4-BE49-F238E27FC236}">
-                <a16:creationId xmlns:a16="http://schemas.microsoft.com/office/drawing/2014/main" id="{9D2348EF-00F3-4732-6868-29433FD1B928}"/>
-              </a:ext>
-            </a:extLst>
-          </p:cNvPr>
-          <p:cNvPicPr>
-            <a:picLocks noChangeAspect="1"/>
-          </p:cNvPicPr>
-          <p:nvPr/>
-        </p:nvPicPr>
-        <p:blipFill>
-          <a:blip r:embed="rId5" cstate="email">
-            <a:extLst>
-              <a:ext uri="{28A0092B-C50C-407E-A947-70E740481C1C}">
-                <a14:useLocalDpi xmlns:a14="http://schemas.microsoft.com/office/drawing/2010/main"/>
-              </a:ext>
-            </a:extLst>
-          </a:blip>
-          <a:stretch>
-            <a:fillRect/>
-          </a:stretch>
-        </p:blipFill>
-        <p:spPr>
-          <a:xfrm>
-            <a:off x="6381756" y="1012612"/>
-            <a:ext cx="2424597" cy="1934779"/>
-          </a:xfrm>
-          <a:prstGeom prst="rect">
-            <a:avLst/>
-          </a:prstGeom>
-        </p:spPr>
-      </p:pic>
-      <p:sp>
-        <p:nvSpPr>
-          <p:cNvPr id="7" name="TextBox 6">
-            <a:extLst>
-              <a:ext uri="{FF2B5EF4-FFF2-40B4-BE49-F238E27FC236}">
-                <a16:creationId xmlns:a16="http://schemas.microsoft.com/office/drawing/2014/main" id="{A7E3F881-7D00-286B-91EB-07CF4CF08B35}"/>
-              </a:ext>
-            </a:extLst>
-          </p:cNvPr>
-          <p:cNvSpPr txBox="1"/>
-          <p:nvPr/>
-        </p:nvSpPr>
-        <p:spPr>
-          <a:xfrm>
-            <a:off x="493986" y="3594538"/>
-            <a:ext cx="4561490" cy="369332"/>
-          </a:xfrm>
-          <a:prstGeom prst="rect">
-            <a:avLst/>
-          </a:prstGeom>
-          <a:noFill/>
-        </p:spPr>
-        <p:txBody>
-          <a:bodyPr wrap="square" rtlCol="0">
-            <a:spAutoFit/>
-          </a:bodyPr>
-          <a:lstStyle/>
-          <a:p>
-            <a:r>
-              <a:rPr lang="en-US" dirty="0"/>
-              <a:t>Power Take-Off (PTO) </a:t>
-            </a:r>
-          </a:p>
-        </p:txBody>
-      </p:sp>
-      <p:sp>
-        <p:nvSpPr>
-          <p:cNvPr id="8" name="TextBox 7">
-            <a:extLst>
-              <a:ext uri="{FF2B5EF4-FFF2-40B4-BE49-F238E27FC236}">
-                <a16:creationId xmlns:a16="http://schemas.microsoft.com/office/drawing/2014/main" id="{0F7E2A2F-96C1-620D-A026-7F6ED7EBDE57}"/>
-              </a:ext>
-            </a:extLst>
-          </p:cNvPr>
-          <p:cNvSpPr txBox="1"/>
-          <p:nvPr/>
-        </p:nvSpPr>
-        <p:spPr>
-          <a:xfrm>
-            <a:off x="336331" y="4067503"/>
-            <a:ext cx="4256690" cy="738664"/>
-          </a:xfrm>
-          <a:prstGeom prst="rect">
-            <a:avLst/>
-          </a:prstGeom>
-          <a:noFill/>
-        </p:spPr>
-        <p:txBody>
-          <a:bodyPr wrap="square" rtlCol="0">
-            <a:spAutoFit/>
-          </a:bodyPr>
-          <a:lstStyle/>
-          <a:p>
-            <a:r>
-              <a:rPr lang="en-US" sz="1400" dirty="0"/>
-              <a:t>The tractor's </a:t>
-            </a:r>
-            <a:r>
-              <a:rPr lang="en-US" sz="1400" b="1" dirty="0">
-                <a:solidFill>
-                  <a:srgbClr val="FF0000"/>
-                </a:solidFill>
-              </a:rPr>
-              <a:t>stub shaft</a:t>
-            </a:r>
-            <a:r>
-              <a:rPr lang="en-US" sz="1400" dirty="0"/>
-              <a:t>, often called the </a:t>
-            </a:r>
-            <a:r>
-              <a:rPr lang="en-US" sz="1400" b="1" dirty="0">
-                <a:solidFill>
-                  <a:srgbClr val="FF0000"/>
-                </a:solidFill>
-              </a:rPr>
-              <a:t>PTO</a:t>
-            </a:r>
-            <a:r>
-              <a:rPr lang="en-US" sz="1400" dirty="0"/>
-              <a:t>, </a:t>
-            </a:r>
-          </a:p>
-          <a:p>
-            <a:r>
-              <a:rPr lang="en-US" sz="1400" dirty="0"/>
-              <a:t>rotates at 540 or 1000 rpm (9..17 times/sec) </a:t>
-            </a:r>
-          </a:p>
-          <a:p>
-            <a:r>
-              <a:rPr lang="en-US" sz="1400" dirty="0"/>
-              <a:t>and used to transfer power to external </a:t>
-            </a:r>
-            <a:r>
-              <a:rPr lang="en-US" sz="1400"/>
-              <a:t>attachments.</a:t>
-            </a:r>
-            <a:endParaRPr lang="en-US" sz="1400" dirty="0"/>
-          </a:p>
-        </p:txBody>
-      </p:sp>
-    </p:spTree>
-    <p:extLst>
-      <p:ext uri="{BB962C8B-B14F-4D97-AF65-F5344CB8AC3E}">
-        <p14:creationId xmlns:p14="http://schemas.microsoft.com/office/powerpoint/2010/main" val="387486117"/>
       </p:ext>
     </p:extLst>
   </p:cSld>

--- a/tractor_jd_1025r_X758.pptx
+++ b/tractor_jd_1025r_X758.pptx
@@ -9,12 +9,13 @@
     <p:sldId id="258" r:id="rId3"/>
     <p:sldId id="264" r:id="rId4"/>
     <p:sldId id="266" r:id="rId5"/>
-    <p:sldId id="269" r:id="rId6"/>
-    <p:sldId id="261" r:id="rId7"/>
-    <p:sldId id="268" r:id="rId8"/>
-    <p:sldId id="267" r:id="rId9"/>
-    <p:sldId id="265" r:id="rId10"/>
-    <p:sldId id="263" r:id="rId11"/>
+    <p:sldId id="270" r:id="rId6"/>
+    <p:sldId id="269" r:id="rId7"/>
+    <p:sldId id="261" r:id="rId8"/>
+    <p:sldId id="268" r:id="rId9"/>
+    <p:sldId id="267" r:id="rId10"/>
+    <p:sldId id="265" r:id="rId11"/>
+    <p:sldId id="263" r:id="rId12"/>
   </p:sldIdLst>
   <p:sldSz cx="12192000" cy="6858000"/>
   <p:notesSz cx="6858000" cy="9144000"/>
@@ -267,7 +268,7 @@
           <a:lstStyle/>
           <a:p>
             <a:fld id="{16286276-9013-2A43-82D1-BA4685C95117}" type="datetimeFigureOut">
-              <a:t>2/21/26</a:t>
+              <a:t>4/19/26</a:t>
             </a:fld>
             <a:endParaRPr lang="en-US"/>
           </a:p>
@@ -463,7 +464,7 @@
           <a:lstStyle/>
           <a:p>
             <a:fld id="{16286276-9013-2A43-82D1-BA4685C95117}" type="datetimeFigureOut">
-              <a:t>2/21/26</a:t>
+              <a:t>4/19/26</a:t>
             </a:fld>
             <a:endParaRPr lang="en-US"/>
           </a:p>
@@ -669,7 +670,7 @@
           <a:lstStyle/>
           <a:p>
             <a:fld id="{16286276-9013-2A43-82D1-BA4685C95117}" type="datetimeFigureOut">
-              <a:t>2/21/26</a:t>
+              <a:t>4/19/26</a:t>
             </a:fld>
             <a:endParaRPr lang="en-US"/>
           </a:p>
@@ -865,7 +866,7 @@
           <a:lstStyle/>
           <a:p>
             <a:fld id="{16286276-9013-2A43-82D1-BA4685C95117}" type="datetimeFigureOut">
-              <a:t>2/21/26</a:t>
+              <a:t>4/19/26</a:t>
             </a:fld>
             <a:endParaRPr lang="en-US"/>
           </a:p>
@@ -1138,7 +1139,7 @@
           <a:lstStyle/>
           <a:p>
             <a:fld id="{16286276-9013-2A43-82D1-BA4685C95117}" type="datetimeFigureOut">
-              <a:t>2/21/26</a:t>
+              <a:t>4/19/26</a:t>
             </a:fld>
             <a:endParaRPr lang="en-US"/>
           </a:p>
@@ -1401,7 +1402,7 @@
           <a:lstStyle/>
           <a:p>
             <a:fld id="{16286276-9013-2A43-82D1-BA4685C95117}" type="datetimeFigureOut">
-              <a:t>2/21/26</a:t>
+              <a:t>4/19/26</a:t>
             </a:fld>
             <a:endParaRPr lang="en-US"/>
           </a:p>
@@ -1811,7 +1812,7 @@
           <a:lstStyle/>
           <a:p>
             <a:fld id="{16286276-9013-2A43-82D1-BA4685C95117}" type="datetimeFigureOut">
-              <a:t>2/21/26</a:t>
+              <a:t>4/19/26</a:t>
             </a:fld>
             <a:endParaRPr lang="en-US"/>
           </a:p>
@@ -1950,7 +1951,7 @@
           <a:lstStyle/>
           <a:p>
             <a:fld id="{16286276-9013-2A43-82D1-BA4685C95117}" type="datetimeFigureOut">
-              <a:t>2/21/26</a:t>
+              <a:t>4/19/26</a:t>
             </a:fld>
             <a:endParaRPr lang="en-US"/>
           </a:p>
@@ -2061,7 +2062,7 @@
           <a:lstStyle/>
           <a:p>
             <a:fld id="{16286276-9013-2A43-82D1-BA4685C95117}" type="datetimeFigureOut">
-              <a:t>2/21/26</a:t>
+              <a:t>4/19/26</a:t>
             </a:fld>
             <a:endParaRPr lang="en-US"/>
           </a:p>
@@ -2370,7 +2371,7 @@
           <a:lstStyle/>
           <a:p>
             <a:fld id="{16286276-9013-2A43-82D1-BA4685C95117}" type="datetimeFigureOut">
-              <a:t>2/21/26</a:t>
+              <a:t>4/19/26</a:t>
             </a:fld>
             <a:endParaRPr lang="en-US"/>
           </a:p>
@@ -2656,7 +2657,7 @@
           <a:lstStyle/>
           <a:p>
             <a:fld id="{16286276-9013-2A43-82D1-BA4685C95117}" type="datetimeFigureOut">
-              <a:t>2/21/26</a:t>
+              <a:t>4/19/26</a:t>
             </a:fld>
             <a:endParaRPr lang="en-US"/>
           </a:p>
@@ -2895,7 +2896,7 @@
           </a:lstStyle>
           <a:p>
             <a:fld id="{16286276-9013-2A43-82D1-BA4685C95117}" type="datetimeFigureOut">
-              <a:t>2/21/26</a:t>
+              <a:t>4/19/26</a:t>
             </a:fld>
             <a:endParaRPr lang="en-US"/>
           </a:p>
@@ -4076,6 +4077,400 @@
   <p:cSld>
     <p:spTree>
       <p:nvGrpSpPr>
+        <p:cNvPr id="1" name="">
+          <a:extLst>
+            <a:ext uri="{FF2B5EF4-FFF2-40B4-BE49-F238E27FC236}">
+              <a16:creationId xmlns:a16="http://schemas.microsoft.com/office/drawing/2014/main" id="{2D16B695-A4C0-BC53-15EF-81548A04F130}"/>
+            </a:ext>
+          </a:extLst>
+        </p:cNvPr>
+        <p:cNvGrpSpPr/>
+        <p:nvPr/>
+      </p:nvGrpSpPr>
+      <p:grpSpPr>
+        <a:xfrm>
+          <a:off x="0" y="0"/>
+          <a:ext cx="0" cy="0"/>
+          <a:chOff x="0" y="0"/>
+          <a:chExt cx="0" cy="0"/>
+        </a:xfrm>
+      </p:grpSpPr>
+      <p:sp>
+        <p:nvSpPr>
+          <p:cNvPr id="2" name="TextBox 1">
+            <a:extLst>
+              <a:ext uri="{FF2B5EF4-FFF2-40B4-BE49-F238E27FC236}">
+                <a16:creationId xmlns:a16="http://schemas.microsoft.com/office/drawing/2014/main" id="{A5F44891-376B-DAA0-385F-BE3EBBF84680}"/>
+              </a:ext>
+            </a:extLst>
+          </p:cNvPr>
+          <p:cNvSpPr txBox="1"/>
+          <p:nvPr/>
+        </p:nvSpPr>
+        <p:spPr>
+          <a:xfrm>
+            <a:off x="-1" y="0"/>
+            <a:ext cx="4431253" cy="523220"/>
+          </a:xfrm>
+          <a:prstGeom prst="rect">
+            <a:avLst/>
+          </a:prstGeom>
+          <a:noFill/>
+        </p:spPr>
+        <p:txBody>
+          <a:bodyPr wrap="square" rtlCol="0">
+            <a:spAutoFit/>
+          </a:bodyPr>
+          <a:lstStyle/>
+          <a:p>
+            <a:r>
+              <a:rPr lang="en-US" sz="2800" b="1" dirty="0"/>
+              <a:t>Dual Tires (</a:t>
+            </a:r>
+            <a:r>
+              <a:rPr lang="en-US" sz="2800" b="1" dirty="0" err="1"/>
+              <a:t>Dualies</a:t>
+            </a:r>
+            <a:r>
+              <a:rPr lang="en-US" sz="2800" b="1" dirty="0"/>
+              <a:t>)</a:t>
+            </a:r>
+          </a:p>
+        </p:txBody>
+      </p:sp>
+      <p:sp>
+        <p:nvSpPr>
+          <p:cNvPr id="8" name="TextBox 7">
+            <a:extLst>
+              <a:ext uri="{FF2B5EF4-FFF2-40B4-BE49-F238E27FC236}">
+                <a16:creationId xmlns:a16="http://schemas.microsoft.com/office/drawing/2014/main" id="{E5EAD597-53B0-1A66-BAB2-6EA6A21F38F7}"/>
+              </a:ext>
+            </a:extLst>
+          </p:cNvPr>
+          <p:cNvSpPr txBox="1"/>
+          <p:nvPr/>
+        </p:nvSpPr>
+        <p:spPr>
+          <a:xfrm>
+            <a:off x="164052" y="807468"/>
+            <a:ext cx="5506736" cy="3754874"/>
+          </a:xfrm>
+          <a:prstGeom prst="rect">
+            <a:avLst/>
+          </a:prstGeom>
+          <a:noFill/>
+        </p:spPr>
+        <p:txBody>
+          <a:bodyPr wrap="square" rtlCol="0">
+            <a:spAutoFit/>
+          </a:bodyPr>
+          <a:lstStyle/>
+          <a:p>
+            <a:r>
+              <a:rPr lang="en-US" sz="1400" dirty="0"/>
+              <a:t>Can potentially help in muddy conditions</a:t>
+            </a:r>
+          </a:p>
+          <a:p>
+            <a:pPr marL="285750" indent="-285750">
+              <a:buFont typeface="Arial" panose="020B0604020202020204" pitchFamily="34" charset="0"/>
+              <a:buChar char="•"/>
+            </a:pPr>
+            <a:r>
+              <a:rPr lang="en-US" sz="1400" dirty="0"/>
+              <a:t>Distribute the weight over a larger surface area, which can reduce ground pressure, thus preventing the tractor from sinking into soft or muddy ground</a:t>
+            </a:r>
+          </a:p>
+          <a:p>
+            <a:pPr marL="285750" indent="-285750">
+              <a:buFont typeface="Arial" panose="020B0604020202020204" pitchFamily="34" charset="0"/>
+              <a:buChar char="•"/>
+            </a:pPr>
+            <a:r>
+              <a:rPr lang="en-US" sz="1400" dirty="0"/>
+              <a:t>Increase traction since there are now twice the number of lugs (the raised patterns on a tire) making contact with the ground. </a:t>
+            </a:r>
+          </a:p>
+          <a:p>
+            <a:endParaRPr lang="en-US" sz="1400" dirty="0"/>
+          </a:p>
+          <a:p>
+            <a:r>
+              <a:rPr lang="en-US" sz="1400" dirty="0"/>
+              <a:t>Downsides:</a:t>
+            </a:r>
+          </a:p>
+          <a:p>
+            <a:pPr marL="285750" indent="-285750">
+              <a:buFont typeface="Arial" panose="020B0604020202020204" pitchFamily="34" charset="0"/>
+              <a:buChar char="•"/>
+            </a:pPr>
+            <a:r>
+              <a:rPr lang="en-US" sz="1400" dirty="0"/>
+              <a:t>Added Weight</a:t>
+            </a:r>
+          </a:p>
+          <a:p>
+            <a:pPr marL="285750" indent="-285750">
+              <a:buFont typeface="Arial" panose="020B0604020202020204" pitchFamily="34" charset="0"/>
+              <a:buChar char="•"/>
+            </a:pPr>
+            <a:r>
+              <a:rPr lang="en-US" sz="1400" dirty="0"/>
+              <a:t>Turning Resistance</a:t>
+            </a:r>
+          </a:p>
+          <a:p>
+            <a:pPr marL="285750" indent="-285750">
+              <a:buFont typeface="Arial" panose="020B0604020202020204" pitchFamily="34" charset="0"/>
+              <a:buChar char="•"/>
+            </a:pPr>
+            <a:r>
+              <a:rPr lang="en-US" sz="1400" dirty="0"/>
+              <a:t>Cost and Installation</a:t>
+            </a:r>
+          </a:p>
+          <a:p>
+            <a:pPr marL="285750" indent="-285750">
+              <a:buFont typeface="Arial" panose="020B0604020202020204" pitchFamily="34" charset="0"/>
+              <a:buChar char="•"/>
+            </a:pPr>
+            <a:r>
+              <a:rPr lang="en-US" sz="1400" dirty="0"/>
+              <a:t>Wider Profile (harder to navigate)</a:t>
+            </a:r>
+          </a:p>
+          <a:p>
+            <a:pPr marL="285750" indent="-285750">
+              <a:buFont typeface="Arial" panose="020B0604020202020204" pitchFamily="34" charset="0"/>
+              <a:buChar char="•"/>
+            </a:pPr>
+            <a:r>
+              <a:rPr lang="en-US" sz="1400" dirty="0"/>
+              <a:t>Soil Compaction</a:t>
+            </a:r>
+          </a:p>
+          <a:p>
+            <a:pPr marL="285750" indent="-285750">
+              <a:buFont typeface="Arial" panose="020B0604020202020204" pitchFamily="34" charset="0"/>
+              <a:buChar char="•"/>
+            </a:pPr>
+            <a:endParaRPr lang="en-US" sz="1400" dirty="0"/>
+          </a:p>
+          <a:p>
+            <a:r>
+              <a:rPr lang="en-US" sz="1400" dirty="0"/>
+              <a:t>Other solutions to consider: </a:t>
+            </a:r>
+          </a:p>
+          <a:p>
+            <a:pPr marL="285750" indent="-285750">
+              <a:buFont typeface="Arial" panose="020B0604020202020204" pitchFamily="34" charset="0"/>
+              <a:buChar char="•"/>
+            </a:pPr>
+            <a:r>
+              <a:rPr lang="en-US" sz="1400" dirty="0"/>
+              <a:t>tire chains</a:t>
+            </a:r>
+          </a:p>
+          <a:p>
+            <a:pPr marL="285750" indent="-285750">
+              <a:buFont typeface="Arial" panose="020B0604020202020204" pitchFamily="34" charset="0"/>
+              <a:buChar char="•"/>
+            </a:pPr>
+            <a:r>
+              <a:rPr lang="en-US" sz="1400" dirty="0"/>
+              <a:t>wider single tires</a:t>
+            </a:r>
+          </a:p>
+        </p:txBody>
+      </p:sp>
+      <p:pic>
+        <p:nvPicPr>
+          <p:cNvPr id="1026" name="Picture 2" descr="How to Put Duals On a Mower - A Better Way">
+            <a:extLst>
+              <a:ext uri="{FF2B5EF4-FFF2-40B4-BE49-F238E27FC236}">
+                <a16:creationId xmlns:a16="http://schemas.microsoft.com/office/drawing/2014/main" id="{71D526FD-5301-0D68-CD3C-BFABB30F8E12}"/>
+              </a:ext>
+            </a:extLst>
+          </p:cNvPr>
+          <p:cNvPicPr>
+            <a:picLocks noChangeAspect="1" noChangeArrowheads="1"/>
+          </p:cNvPicPr>
+          <p:nvPr/>
+        </p:nvPicPr>
+        <p:blipFill>
+          <a:blip r:embed="rId2" cstate="email">
+            <a:extLst>
+              <a:ext uri="{28A0092B-C50C-407E-A947-70E740481C1C}">
+                <a14:useLocalDpi xmlns:a14="http://schemas.microsoft.com/office/drawing/2010/main"/>
+              </a:ext>
+            </a:extLst>
+          </a:blip>
+          <a:srcRect/>
+          <a:stretch>
+            <a:fillRect/>
+          </a:stretch>
+        </p:blipFill>
+        <p:spPr bwMode="auto">
+          <a:xfrm>
+            <a:off x="7760748" y="228600"/>
+            <a:ext cx="4267200" cy="3200400"/>
+          </a:xfrm>
+          <a:prstGeom prst="rect">
+            <a:avLst/>
+          </a:prstGeom>
+          <a:noFill/>
+          <a:extLst>
+            <a:ext uri="{909E8E84-426E-40DD-AFC4-6F175D3DCCD1}">
+              <a14:hiddenFill xmlns:a14="http://schemas.microsoft.com/office/drawing/2010/main">
+                <a:solidFill>
+                  <a:srgbClr val="FFFFFF"/>
+                </a:solidFill>
+              </a14:hiddenFill>
+            </a:ext>
+          </a:extLst>
+        </p:spPr>
+      </p:pic>
+      <p:sp>
+        <p:nvSpPr>
+          <p:cNvPr id="9" name="TextBox 8">
+            <a:extLst>
+              <a:ext uri="{FF2B5EF4-FFF2-40B4-BE49-F238E27FC236}">
+                <a16:creationId xmlns:a16="http://schemas.microsoft.com/office/drawing/2014/main" id="{FA27FBF3-5F1A-3128-93B1-65E9E5627FFA}"/>
+              </a:ext>
+            </a:extLst>
+          </p:cNvPr>
+          <p:cNvSpPr txBox="1"/>
+          <p:nvPr/>
+        </p:nvSpPr>
+        <p:spPr>
+          <a:xfrm>
+            <a:off x="3048000" y="76944"/>
+            <a:ext cx="3810000" cy="307777"/>
+          </a:xfrm>
+          <a:prstGeom prst="rect">
+            <a:avLst/>
+          </a:prstGeom>
+          <a:noFill/>
+        </p:spPr>
+        <p:txBody>
+          <a:bodyPr wrap="square" rtlCol="0">
+            <a:spAutoFit/>
+          </a:bodyPr>
+          <a:lstStyle/>
+          <a:p>
+            <a:r>
+              <a:rPr lang="en-US" sz="1400" dirty="0">
+                <a:hlinkClick r:id="rId3"/>
+              </a:rPr>
+              <a:t>https://</a:t>
+            </a:r>
+            <a:r>
+              <a:rPr lang="en-US" sz="1400" dirty="0" err="1">
+                <a:hlinkClick r:id="rId3"/>
+              </a:rPr>
+              <a:t>www.youtube.com</a:t>
+            </a:r>
+            <a:r>
+              <a:rPr lang="en-US" sz="1400" dirty="0">
+                <a:hlinkClick r:id="rId3"/>
+              </a:rPr>
+              <a:t>/</a:t>
+            </a:r>
+            <a:r>
+              <a:rPr lang="en-US" sz="1400" dirty="0" err="1">
+                <a:hlinkClick r:id="rId3"/>
+              </a:rPr>
+              <a:t>watch?v</a:t>
+            </a:r>
+            <a:r>
+              <a:rPr lang="en-US" sz="1400" dirty="0">
+                <a:hlinkClick r:id="rId3"/>
+              </a:rPr>
+              <a:t>=</a:t>
+            </a:r>
+            <a:r>
+              <a:rPr lang="en-US" sz="1400" dirty="0" err="1">
+                <a:hlinkClick r:id="rId3"/>
+              </a:rPr>
+              <a:t>oDdR</a:t>
+            </a:r>
+            <a:r>
+              <a:rPr lang="en-US" sz="1400" dirty="0">
+                <a:hlinkClick r:id="rId3"/>
+              </a:rPr>
+              <a:t>-KLIF-Q</a:t>
+            </a:r>
+            <a:endParaRPr lang="en-US" sz="1400" dirty="0"/>
+          </a:p>
+        </p:txBody>
+      </p:sp>
+      <p:pic>
+        <p:nvPicPr>
+          <p:cNvPr id="1028" name="Picture 4" descr="DUAL TIRES ON A 1025r? Carlisle Versa Turfs + Found A STEAL! - YouTube">
+            <a:extLst>
+              <a:ext uri="{FF2B5EF4-FFF2-40B4-BE49-F238E27FC236}">
+                <a16:creationId xmlns:a16="http://schemas.microsoft.com/office/drawing/2014/main" id="{EDAA7AC9-D55C-2BE4-8784-E24DB49BAEE4}"/>
+              </a:ext>
+            </a:extLst>
+          </p:cNvPr>
+          <p:cNvPicPr>
+            <a:picLocks noChangeAspect="1" noChangeArrowheads="1"/>
+          </p:cNvPicPr>
+          <p:nvPr/>
+        </p:nvPicPr>
+        <p:blipFill>
+          <a:blip r:embed="rId4">
+            <a:extLst>
+              <a:ext uri="{28A0092B-C50C-407E-A947-70E740481C1C}">
+                <a14:useLocalDpi xmlns:a14="http://schemas.microsoft.com/office/drawing/2010/main"/>
+              </a:ext>
+            </a:extLst>
+          </a:blip>
+          <a:srcRect/>
+          <a:stretch>
+            <a:fillRect/>
+          </a:stretch>
+        </p:blipFill>
+        <p:spPr bwMode="auto">
+          <a:xfrm>
+            <a:off x="7760748" y="3594652"/>
+            <a:ext cx="3810000" cy="2133600"/>
+          </a:xfrm>
+          <a:prstGeom prst="rect">
+            <a:avLst/>
+          </a:prstGeom>
+          <a:noFill/>
+          <a:extLst>
+            <a:ext uri="{909E8E84-426E-40DD-AFC4-6F175D3DCCD1}">
+              <a14:hiddenFill xmlns:a14="http://schemas.microsoft.com/office/drawing/2010/main">
+                <a:solidFill>
+                  <a:srgbClr val="FFFFFF"/>
+                </a:solidFill>
+              </a14:hiddenFill>
+            </a:ext>
+          </a:extLst>
+        </p:spPr>
+      </p:pic>
+    </p:spTree>
+    <p:extLst>
+      <p:ext uri="{BB962C8B-B14F-4D97-AF65-F5344CB8AC3E}">
+        <p14:creationId xmlns:p14="http://schemas.microsoft.com/office/powerpoint/2010/main" val="1009907999"/>
+      </p:ext>
+    </p:extLst>
+  </p:cSld>
+  <p:clrMapOvr>
+    <a:masterClrMapping/>
+  </p:clrMapOvr>
+</p:sld>
+</file>
+
+<file path=ppt/slides/slide11.xml><?xml version="1.0" encoding="utf-8"?>
+<p:sld xmlns:a="http://schemas.openxmlformats.org/drawingml/2006/main" xmlns:r="http://schemas.openxmlformats.org/officeDocument/2006/relationships" xmlns:p="http://schemas.openxmlformats.org/presentationml/2006/main">
+  <p:cSld>
+    <p:spTree>
+      <p:nvGrpSpPr>
         <p:cNvPr id="1" name=""/>
         <p:cNvGrpSpPr/>
         <p:nvPr/>
@@ -6234,257 +6629,567 @@
           <a:p>
             <a:r>
               <a:rPr lang="en-US" sz="2800" b="1" dirty="0"/>
-              <a:t>John Deere X758</a:t>
-            </a:r>
-          </a:p>
-        </p:txBody>
-      </p:sp>
-      <p:sp>
-        <p:nvSpPr>
-          <p:cNvPr id="8" name="TextBox 7">
-            <a:extLst>
-              <a:ext uri="{FF2B5EF4-FFF2-40B4-BE49-F238E27FC236}">
-                <a16:creationId xmlns:a16="http://schemas.microsoft.com/office/drawing/2014/main" id="{40B1DAD5-098B-A626-FB87-CBFF942DA840}"/>
-              </a:ext>
-            </a:extLst>
-          </p:cNvPr>
-          <p:cNvSpPr txBox="1"/>
+              <a:t>Little Buck Loader vs Little Bull Loader</a:t>
+            </a:r>
+          </a:p>
+        </p:txBody>
+      </p:sp>
+      <p:pic>
+        <p:nvPicPr>
+          <p:cNvPr id="1026" name="Picture 2">
+            <a:extLst>
+              <a:ext uri="{FF2B5EF4-FFF2-40B4-BE49-F238E27FC236}">
+                <a16:creationId xmlns:a16="http://schemas.microsoft.com/office/drawing/2014/main" id="{F73B192E-1F8A-5529-D2EE-6E2B28005294}"/>
+              </a:ext>
+            </a:extLst>
+          </p:cNvPr>
+          <p:cNvPicPr>
+            <a:picLocks noChangeAspect="1" noChangeArrowheads="1"/>
+          </p:cNvPicPr>
           <p:nvPr/>
-        </p:nvSpPr>
-        <p:spPr>
-          <a:xfrm>
-            <a:off x="6079066" y="209097"/>
-            <a:ext cx="5925483" cy="3539430"/>
+        </p:nvPicPr>
+        <p:blipFill rotWithShape="1">
+          <a:blip r:embed="rId2" cstate="email">
+            <a:extLst>
+              <a:ext uri="{28A0092B-C50C-407E-A947-70E740481C1C}">
+                <a14:useLocalDpi xmlns:a14="http://schemas.microsoft.com/office/drawing/2010/main"/>
+              </a:ext>
+            </a:extLst>
+          </a:blip>
+          <a:srcRect/>
+          <a:stretch>
+            <a:fillRect/>
+          </a:stretch>
+        </p:blipFill>
+        <p:spPr bwMode="auto">
+          <a:xfrm>
+            <a:off x="124176" y="643467"/>
+            <a:ext cx="4413957" cy="2390545"/>
           </a:xfrm>
           <a:prstGeom prst="rect">
             <a:avLst/>
           </a:prstGeom>
           <a:noFill/>
-        </p:spPr>
-        <p:txBody>
-          <a:bodyPr wrap="square" rtlCol="0">
-            <a:spAutoFit/>
-          </a:bodyPr>
-          <a:lstStyle/>
-          <a:p>
-            <a:r>
-              <a:rPr lang="en-US" sz="1400" dirty="0"/>
-              <a:t>21 modifications to X758:</a:t>
-            </a:r>
-          </a:p>
-          <a:p>
-            <a:r>
-              <a:rPr lang="en-US" sz="1400" dirty="0">
-                <a:hlinkClick r:id="rId2"/>
-              </a:rPr>
-              <a:t>https://</a:t>
-            </a:r>
-            <a:r>
-              <a:rPr lang="en-US" sz="1400" dirty="0" err="1">
-                <a:hlinkClick r:id="rId2"/>
-              </a:rPr>
-              <a:t>www.youtube.com</a:t>
-            </a:r>
-            <a:r>
-              <a:rPr lang="en-US" sz="1400" dirty="0">
-                <a:hlinkClick r:id="rId2"/>
-              </a:rPr>
-              <a:t>/</a:t>
-            </a:r>
-            <a:r>
-              <a:rPr lang="en-US" sz="1400" dirty="0" err="1">
-                <a:hlinkClick r:id="rId2"/>
-              </a:rPr>
-              <a:t>watch?v</a:t>
-            </a:r>
-            <a:r>
-              <a:rPr lang="en-US" sz="1400" dirty="0">
-                <a:hlinkClick r:id="rId2"/>
-              </a:rPr>
-              <a:t>=5bkI9KLGFZs</a:t>
-            </a:r>
-            <a:endParaRPr lang="en-US" sz="1400" dirty="0"/>
-          </a:p>
-          <a:p>
-            <a:r>
-              <a:rPr lang="en-US" sz="1400" dirty="0"/>
-              <a:t>Snowblower Lights; Chute Actuator (up/down);Chute Rotator (more turning);</a:t>
-            </a:r>
-          </a:p>
-          <a:p>
-            <a:r>
-              <a:rPr lang="en-US" sz="1400" dirty="0"/>
-              <a:t>Enclosed Chain for impeller; Rubber extensions for impeller; </a:t>
-            </a:r>
-          </a:p>
-          <a:p>
-            <a:r>
-              <a:rPr lang="en-US" sz="1400" dirty="0"/>
-              <a:t>Seat Cover; Seat Heaters; Heated Vest Plug; Steering Wheel Ball (spinner);</a:t>
-            </a:r>
-          </a:p>
-          <a:p>
-            <a:r>
-              <a:rPr lang="en-US" sz="1400" dirty="0"/>
-              <a:t>LED Headlights; LED Rear Lights; Dash Light; </a:t>
-            </a:r>
-          </a:p>
-          <a:p>
-            <a:r>
-              <a:rPr lang="en-US" sz="1400" dirty="0"/>
-              <a:t>Custom Relay for Chute Switch</a:t>
-            </a:r>
-          </a:p>
-          <a:p>
-            <a:r>
-              <a:rPr lang="en-US" sz="1400" dirty="0"/>
-              <a:t>Throttle Spring to throttle lever to prevent it from backing down</a:t>
-            </a:r>
-          </a:p>
-          <a:p>
-            <a:r>
-              <a:rPr lang="en-US" sz="1400" dirty="0"/>
-              <a:t>Hazard Lights; Pattern-Changing Hazard Switch; USB Output &amp; Voltmeter showing battery voltage; Toolbox Handle; Secondary Alternator (to handle electrical load of lights and heaters)</a:t>
-            </a:r>
-          </a:p>
-          <a:p>
-            <a:r>
-              <a:rPr lang="en-US" sz="1400" dirty="0"/>
-              <a:t>Bypass Modifications &amp; Lubrication - 3 smaller sub-tweaks: bypassing the reverse implement option (RIO), bypassing the seat safety switch with a jumper, and using "Fluid Film" to stop pedal squeaks and prevent rust</a:t>
-            </a:r>
-          </a:p>
-          <a:p>
-            <a:r>
-              <a:rPr lang="en-US" sz="1400" dirty="0"/>
-              <a:t>Bonus/Technical Fix: - shimming the four-wheel steer transfer shaft with feeler gauges and adding a grease </a:t>
-            </a:r>
-            <a:r>
-              <a:rPr lang="en-US" sz="1400" dirty="0" err="1"/>
-              <a:t>zert</a:t>
-            </a:r>
-            <a:r>
-              <a:rPr lang="en-US" sz="1400" dirty="0"/>
-              <a:t> to eliminate "shimmy" in the rear wheels</a:t>
-            </a:r>
-          </a:p>
-        </p:txBody>
-      </p:sp>
-      <p:sp>
-        <p:nvSpPr>
-          <p:cNvPr id="3" name="TextBox 2">
-            <a:extLst>
-              <a:ext uri="{FF2B5EF4-FFF2-40B4-BE49-F238E27FC236}">
-                <a16:creationId xmlns:a16="http://schemas.microsoft.com/office/drawing/2014/main" id="{7BC0A9F2-B671-84FC-1360-DA1CF032E6AF}"/>
-              </a:ext>
-            </a:extLst>
-          </p:cNvPr>
-          <p:cNvSpPr txBox="1"/>
+          <a:ln>
+            <a:solidFill>
+              <a:srgbClr val="FF0000"/>
+            </a:solidFill>
+          </a:ln>
+          <a:extLst>
+            <a:ext uri="{909E8E84-426E-40DD-AFC4-6F175D3DCCD1}">
+              <a14:hiddenFill xmlns:a14="http://schemas.microsoft.com/office/drawing/2010/main">
+                <a:solidFill>
+                  <a:srgbClr val="FFFFFF"/>
+                </a:solidFill>
+              </a14:hiddenFill>
+            </a:ext>
+          </a:extLst>
+        </p:spPr>
+      </p:pic>
+      <p:pic>
+        <p:nvPicPr>
+          <p:cNvPr id="1028" name="Picture 4">
+            <a:extLst>
+              <a:ext uri="{FF2B5EF4-FFF2-40B4-BE49-F238E27FC236}">
+                <a16:creationId xmlns:a16="http://schemas.microsoft.com/office/drawing/2014/main" id="{5A06A8B9-07AC-29E1-2271-356BE96EACF2}"/>
+              </a:ext>
+            </a:extLst>
+          </p:cNvPr>
+          <p:cNvPicPr>
+            <a:picLocks noChangeAspect="1" noChangeArrowheads="1"/>
+          </p:cNvPicPr>
           <p:nvPr/>
-        </p:nvSpPr>
-        <p:spPr>
-          <a:xfrm>
-            <a:off x="187451" y="574020"/>
-            <a:ext cx="5925483" cy="3108543"/>
+        </p:nvPicPr>
+        <p:blipFill rotWithShape="1">
+          <a:blip r:embed="rId3" cstate="email">
+            <a:extLst>
+              <a:ext uri="{28A0092B-C50C-407E-A947-70E740481C1C}">
+                <a14:useLocalDpi xmlns:a14="http://schemas.microsoft.com/office/drawing/2010/main"/>
+              </a:ext>
+            </a:extLst>
+          </a:blip>
+          <a:srcRect/>
+          <a:stretch>
+            <a:fillRect/>
+          </a:stretch>
+        </p:blipFill>
+        <p:spPr bwMode="auto">
+          <a:xfrm>
+            <a:off x="124176" y="3154259"/>
+            <a:ext cx="2726267" cy="2509251"/>
           </a:xfrm>
           <a:prstGeom prst="rect">
             <a:avLst/>
           </a:prstGeom>
           <a:noFill/>
-        </p:spPr>
-        <p:txBody>
-          <a:bodyPr wrap="square" rtlCol="0">
+          <a:ln>
+            <a:solidFill>
+              <a:srgbClr val="FF0000"/>
+            </a:solidFill>
+          </a:ln>
+          <a:extLst>
+            <a:ext uri="{909E8E84-426E-40DD-AFC4-6F175D3DCCD1}">
+              <a14:hiddenFill xmlns:a14="http://schemas.microsoft.com/office/drawing/2010/main">
+                <a:solidFill>
+                  <a:srgbClr val="FFFFFF"/>
+                </a:solidFill>
+              </a14:hiddenFill>
+            </a:ext>
+          </a:extLst>
+        </p:spPr>
+      </p:pic>
+      <p:pic>
+        <p:nvPicPr>
+          <p:cNvPr id="1030" name="Picture 6" descr="Little Buck Loader Blog">
+            <a:extLst>
+              <a:ext uri="{FF2B5EF4-FFF2-40B4-BE49-F238E27FC236}">
+                <a16:creationId xmlns:a16="http://schemas.microsoft.com/office/drawing/2014/main" id="{83F15B0B-B9BB-7D96-B32C-A6672662FC66}"/>
+              </a:ext>
+            </a:extLst>
+          </p:cNvPr>
+          <p:cNvPicPr>
+            <a:picLocks noChangeAspect="1" noChangeArrowheads="1"/>
+          </p:cNvPicPr>
+          <p:nvPr/>
+        </p:nvPicPr>
+        <p:blipFill rotWithShape="1">
+          <a:blip r:embed="rId4" cstate="email">
+            <a:extLst>
+              <a:ext uri="{28A0092B-C50C-407E-A947-70E740481C1C}">
+                <a14:useLocalDpi xmlns:a14="http://schemas.microsoft.com/office/drawing/2010/main"/>
+              </a:ext>
+            </a:extLst>
+          </a:blip>
+          <a:srcRect/>
+          <a:stretch>
+            <a:fillRect/>
+          </a:stretch>
+        </p:blipFill>
+        <p:spPr bwMode="auto">
+          <a:xfrm>
+            <a:off x="8043333" y="118217"/>
+            <a:ext cx="4024491" cy="2533938"/>
+          </a:xfrm>
+          <a:prstGeom prst="rect">
+            <a:avLst/>
+          </a:prstGeom>
+          <a:noFill/>
+          <a:ln>
+            <a:solidFill>
+              <a:srgbClr val="FF0000"/>
+            </a:solidFill>
+          </a:ln>
+          <a:extLst>
+            <a:ext uri="{909E8E84-426E-40DD-AFC4-6F175D3DCCD1}">
+              <a14:hiddenFill xmlns:a14="http://schemas.microsoft.com/office/drawing/2010/main">
+                <a:solidFill>
+                  <a:srgbClr val="FFFFFF"/>
+                </a:solidFill>
+              </a14:hiddenFill>
+            </a:ext>
+          </a:extLst>
+        </p:spPr>
+      </p:pic>
+      <p:pic>
+        <p:nvPicPr>
+          <p:cNvPr id="1032" name="Picture 8" descr="No photo description available.">
+            <a:extLst>
+              <a:ext uri="{FF2B5EF4-FFF2-40B4-BE49-F238E27FC236}">
+                <a16:creationId xmlns:a16="http://schemas.microsoft.com/office/drawing/2014/main" id="{BB1F295C-5615-0034-FB11-C82424AF61BD}"/>
+              </a:ext>
+            </a:extLst>
+          </p:cNvPr>
+          <p:cNvPicPr>
+            <a:picLocks noChangeAspect="1" noChangeArrowheads="1"/>
+          </p:cNvPicPr>
+          <p:nvPr/>
+        </p:nvPicPr>
+        <p:blipFill rotWithShape="1">
+          <a:blip r:embed="rId5" cstate="email">
+            <a:extLst>
+              <a:ext uri="{28A0092B-C50C-407E-A947-70E740481C1C}">
+                <a14:useLocalDpi xmlns:a14="http://schemas.microsoft.com/office/drawing/2010/main"/>
+              </a:ext>
+            </a:extLst>
+          </a:blip>
+          <a:srcRect/>
+          <a:stretch>
+            <a:fillRect/>
+          </a:stretch>
+        </p:blipFill>
+        <p:spPr bwMode="auto">
+          <a:xfrm>
+            <a:off x="8043333" y="2819505"/>
+            <a:ext cx="4024491" cy="2552724"/>
+          </a:xfrm>
+          <a:prstGeom prst="rect">
+            <a:avLst/>
+          </a:prstGeom>
+          <a:noFill/>
+          <a:ln>
+            <a:solidFill>
+              <a:srgbClr val="FF0000"/>
+            </a:solidFill>
+          </a:ln>
+          <a:extLst>
+            <a:ext uri="{909E8E84-426E-40DD-AFC4-6F175D3DCCD1}">
+              <a14:hiddenFill xmlns:a14="http://schemas.microsoft.com/office/drawing/2010/main">
+                <a:solidFill>
+                  <a:srgbClr val="FFFFFF"/>
+                </a:solidFill>
+              </a14:hiddenFill>
+            </a:ext>
+          </a:extLst>
+        </p:spPr>
+      </p:pic>
+      <p:graphicFrame>
+        <p:nvGraphicFramePr>
+          <p:cNvPr id="5" name="Table 4">
+            <a:extLst>
+              <a:ext uri="{FF2B5EF4-FFF2-40B4-BE49-F238E27FC236}">
+                <a16:creationId xmlns:a16="http://schemas.microsoft.com/office/drawing/2014/main" id="{5454B3BE-C5B4-2FC7-62AF-60BA291B02C0}"/>
+              </a:ext>
+            </a:extLst>
+          </p:cNvPr>
+          <p:cNvGraphicFramePr>
+            <a:graphicFrameLocks noGrp="1"/>
+          </p:cNvGraphicFramePr>
+          <p:nvPr>
+            <p:extLst>
+              <p:ext uri="{D42A27DB-BD31-4B8C-83A1-F6EECF244321}">
+                <p14:modId xmlns:p14="http://schemas.microsoft.com/office/powerpoint/2010/main" val="869364946"/>
+              </p:ext>
+            </p:extLst>
+          </p:nvPr>
+        </p:nvGraphicFramePr>
+        <p:xfrm>
+          <a:off x="3031066" y="4360333"/>
+          <a:ext cx="4876801" cy="1295400"/>
+        </p:xfrm>
+        <a:graphic>
+          <a:graphicData uri="http://schemas.openxmlformats.org/drawingml/2006/table">
+            <a:tbl>
+              <a:tblPr firstRow="1" bandRow="1">
+                <a:tableStyleId>{C4B1156A-380E-4F78-BDF5-A606A8083BF9}</a:tableStyleId>
+              </a:tblPr>
+              <a:tblGrid>
+                <a:gridCol w="1904397">
+                  <a:extLst>
+                    <a:ext uri="{9D8B030D-6E8A-4147-A177-3AD203B41FA5}">
+                      <a16:colId xmlns:a16="http://schemas.microsoft.com/office/drawing/2014/main" val="3479330998"/>
+                    </a:ext>
+                  </a:extLst>
+                </a:gridCol>
+                <a:gridCol w="1346804">
+                  <a:extLst>
+                    <a:ext uri="{9D8B030D-6E8A-4147-A177-3AD203B41FA5}">
+                      <a16:colId xmlns:a16="http://schemas.microsoft.com/office/drawing/2014/main" val="1162570689"/>
+                    </a:ext>
+                  </a:extLst>
+                </a:gridCol>
+                <a:gridCol w="1625600">
+                  <a:extLst>
+                    <a:ext uri="{9D8B030D-6E8A-4147-A177-3AD203B41FA5}">
+                      <a16:colId xmlns:a16="http://schemas.microsoft.com/office/drawing/2014/main" val="2197078146"/>
+                    </a:ext>
+                  </a:extLst>
+                </a:gridCol>
+              </a:tblGrid>
+              <a:tr h="231987">
+                <a:tc>
+                  <a:txBody>
+                    <a:bodyPr/>
+                    <a:lstStyle/>
+                    <a:p>
+                      <a:endParaRPr lang="en-US" sz="1100"/>
+                    </a:p>
+                  </a:txBody>
+                  <a:tcPr/>
+                </a:tc>
+                <a:tc>
+                  <a:txBody>
+                    <a:bodyPr/>
+                    <a:lstStyle/>
+                    <a:p>
+                      <a:r>
+                        <a:rPr lang="en-US" sz="1100" dirty="0"/>
+                        <a:t>Buck</a:t>
+                      </a:r>
+                    </a:p>
+                  </a:txBody>
+                  <a:tcPr/>
+                </a:tc>
+                <a:tc>
+                  <a:txBody>
+                    <a:bodyPr/>
+                    <a:lstStyle/>
+                    <a:p>
+                      <a:r>
+                        <a:rPr lang="en-US" sz="1100" dirty="0"/>
+                        <a:t>Bull</a:t>
+                      </a:r>
+                    </a:p>
+                  </a:txBody>
+                  <a:tcPr/>
+                </a:tc>
+                <a:extLst>
+                  <a:ext uri="{0D108BD9-81ED-4DB2-BD59-A6C34878D82A}">
+                    <a16:rowId xmlns:a16="http://schemas.microsoft.com/office/drawing/2014/main" val="1208195104"/>
+                  </a:ext>
+                </a:extLst>
+              </a:tr>
+              <a:tr h="231987">
+                <a:tc>
+                  <a:txBody>
+                    <a:bodyPr/>
+                    <a:lstStyle/>
+                    <a:p>
+                      <a:r>
+                        <a:rPr lang="en-US" sz="1100" dirty="0"/>
+                        <a:t>Weight </a:t>
+                      </a:r>
+                      <a:r>
+                        <a:rPr lang="en-US" sz="1100" dirty="0" err="1"/>
+                        <a:t>lbs</a:t>
+                      </a:r>
+                      <a:endParaRPr lang="en-US" sz="1100" dirty="0"/>
+                    </a:p>
+                  </a:txBody>
+                  <a:tcPr/>
+                </a:tc>
+                <a:tc>
+                  <a:txBody>
+                    <a:bodyPr/>
+                    <a:lstStyle/>
+                    <a:p>
+                      <a:r>
+                        <a:rPr lang="en-US" sz="1100" dirty="0"/>
+                        <a:t>200</a:t>
+                      </a:r>
+                    </a:p>
+                  </a:txBody>
+                  <a:tcPr/>
+                </a:tc>
+                <a:tc>
+                  <a:txBody>
+                    <a:bodyPr/>
+                    <a:lstStyle/>
+                    <a:p>
+                      <a:r>
+                        <a:rPr lang="en-US" sz="1100" dirty="0"/>
+                        <a:t>300</a:t>
+                      </a:r>
+                    </a:p>
+                  </a:txBody>
+                  <a:tcPr/>
+                </a:tc>
+                <a:extLst>
+                  <a:ext uri="{0D108BD9-81ED-4DB2-BD59-A6C34878D82A}">
+                    <a16:rowId xmlns:a16="http://schemas.microsoft.com/office/drawing/2014/main" val="763763541"/>
+                  </a:ext>
+                </a:extLst>
+              </a:tr>
+              <a:tr h="231987">
+                <a:tc>
+                  <a:txBody>
+                    <a:bodyPr/>
+                    <a:lstStyle/>
+                    <a:p>
+                      <a:r>
+                        <a:rPr lang="en-US" sz="1100" dirty="0"/>
+                        <a:t>Install time (min)</a:t>
+                      </a:r>
+                    </a:p>
+                  </a:txBody>
+                  <a:tcPr/>
+                </a:tc>
+                <a:tc>
+                  <a:txBody>
+                    <a:bodyPr/>
+                    <a:lstStyle/>
+                    <a:p>
+                      <a:r>
+                        <a:rPr lang="en-US" sz="1100" dirty="0"/>
+                        <a:t>2-3</a:t>
+                      </a:r>
+                    </a:p>
+                  </a:txBody>
+                  <a:tcPr/>
+                </a:tc>
+                <a:tc>
+                  <a:txBody>
+                    <a:bodyPr/>
+                    <a:lstStyle/>
+                    <a:p>
+                      <a:r>
+                        <a:rPr lang="en-US" sz="1100" dirty="0"/>
+                        <a:t>5-10</a:t>
+                      </a:r>
+                    </a:p>
+                  </a:txBody>
+                  <a:tcPr/>
+                </a:tc>
+                <a:extLst>
+                  <a:ext uri="{0D108BD9-81ED-4DB2-BD59-A6C34878D82A}">
+                    <a16:rowId xmlns:a16="http://schemas.microsoft.com/office/drawing/2014/main" val="1032192240"/>
+                  </a:ext>
+                </a:extLst>
+              </a:tr>
+              <a:tr h="231987">
+                <a:tc>
+                  <a:txBody>
+                    <a:bodyPr/>
+                    <a:lstStyle/>
+                    <a:p>
+                      <a:r>
+                        <a:rPr lang="en-US" sz="1100" dirty="0"/>
+                        <a:t>Lift weight </a:t>
+                      </a:r>
+                      <a:r>
+                        <a:rPr lang="en-US" sz="1100" dirty="0" err="1"/>
+                        <a:t>lbs</a:t>
+                      </a:r>
+                      <a:endParaRPr lang="en-US" sz="1100" dirty="0"/>
+                    </a:p>
+                  </a:txBody>
+                  <a:tcPr/>
+                </a:tc>
+                <a:tc>
+                  <a:txBody>
+                    <a:bodyPr/>
+                    <a:lstStyle/>
+                    <a:p>
+                      <a:r>
+                        <a:rPr lang="en-US" sz="1100" dirty="0"/>
+                        <a:t>340</a:t>
+                      </a:r>
+                    </a:p>
+                  </a:txBody>
+                  <a:tcPr/>
+                </a:tc>
+                <a:tc>
+                  <a:txBody>
+                    <a:bodyPr/>
+                    <a:lstStyle/>
+                    <a:p>
+                      <a:r>
+                        <a:rPr lang="en-US" sz="1100" dirty="0"/>
+                        <a:t>440</a:t>
+                      </a:r>
+                    </a:p>
+                  </a:txBody>
+                  <a:tcPr/>
+                </a:tc>
+                <a:extLst>
+                  <a:ext uri="{0D108BD9-81ED-4DB2-BD59-A6C34878D82A}">
+                    <a16:rowId xmlns:a16="http://schemas.microsoft.com/office/drawing/2014/main" val="2039114031"/>
+                  </a:ext>
+                </a:extLst>
+              </a:tr>
+              <a:tr h="231987">
+                <a:tc>
+                  <a:txBody>
+                    <a:bodyPr/>
+                    <a:lstStyle/>
+                    <a:p>
+                      <a:r>
+                        <a:rPr lang="en-US" sz="1100" dirty="0"/>
+                        <a:t>Price</a:t>
+                      </a:r>
+                    </a:p>
+                  </a:txBody>
+                  <a:tcPr/>
+                </a:tc>
+                <a:tc>
+                  <a:txBody>
+                    <a:bodyPr/>
+                    <a:lstStyle/>
+                    <a:p>
+                      <a:r>
+                        <a:rPr lang="en-US" sz="1100" dirty="0"/>
+                        <a:t>$2,300</a:t>
+                      </a:r>
+                    </a:p>
+                  </a:txBody>
+                  <a:tcPr/>
+                </a:tc>
+                <a:tc>
+                  <a:txBody>
+                    <a:bodyPr/>
+                    <a:lstStyle/>
+                    <a:p>
+                      <a:r>
+                        <a:rPr lang="en-US" sz="1100" dirty="0"/>
+                        <a:t>$3,300</a:t>
+                      </a:r>
+                    </a:p>
+                  </a:txBody>
+                  <a:tcPr/>
+                </a:tc>
+                <a:extLst>
+                  <a:ext uri="{0D108BD9-81ED-4DB2-BD59-A6C34878D82A}">
+                    <a16:rowId xmlns:a16="http://schemas.microsoft.com/office/drawing/2014/main" val="557019736"/>
+                  </a:ext>
+                </a:extLst>
+              </a:tr>
+            </a:tbl>
+          </a:graphicData>
+        </a:graphic>
+      </p:graphicFrame>
+      <p:sp>
+        <p:nvSpPr>
+          <p:cNvPr id="7" name="TextBox 6">
+            <a:extLst>
+              <a:ext uri="{FF2B5EF4-FFF2-40B4-BE49-F238E27FC236}">
+                <a16:creationId xmlns:a16="http://schemas.microsoft.com/office/drawing/2014/main" id="{B54669F2-6ED1-7423-DA32-8BC2E3EAD94F}"/>
+              </a:ext>
+            </a:extLst>
+          </p:cNvPr>
+          <p:cNvSpPr txBox="1"/>
+          <p:nvPr/>
+        </p:nvSpPr>
+        <p:spPr>
+          <a:xfrm>
+            <a:off x="8508999" y="5455761"/>
+            <a:ext cx="3093157" cy="415498"/>
+          </a:xfrm>
+          <a:prstGeom prst="rect">
+            <a:avLst/>
+          </a:prstGeom>
+          <a:noFill/>
+        </p:spPr>
+        <p:txBody>
+          <a:bodyPr wrap="square">
             <a:spAutoFit/>
           </a:bodyPr>
           <a:lstStyle/>
           <a:p>
             <a:r>
-              <a:rPr lang="en-US" sz="1400" dirty="0"/>
-              <a:t>I want BM20780 - a 7-bu (247-L) 2-Bag Hopper Assembly</a:t>
-            </a:r>
-          </a:p>
-          <a:p>
-            <a:r>
-              <a:rPr lang="en-US" sz="1400" dirty="0"/>
-              <a:t>(X400/X500 HDGT and X700 Series)</a:t>
-            </a:r>
-          </a:p>
-          <a:p>
-            <a:endParaRPr lang="en-US" sz="1400" dirty="0"/>
-          </a:p>
-          <a:p>
-            <a:r>
-              <a:rPr lang="en-US" sz="1400" dirty="0"/>
-              <a:t>I don't like the JD 20-bushel Click-N-Go Material Collection System,</a:t>
-            </a:r>
-          </a:p>
-          <a:p>
-            <a:r>
-              <a:rPr lang="en-US" sz="1400" dirty="0"/>
-              <a:t>It is too heavy, requires weights at the front of the tractor for balance</a:t>
-            </a:r>
-          </a:p>
-          <a:p>
-            <a:r>
-              <a:rPr lang="en-US" sz="1400" dirty="0"/>
-              <a:t>My current bagger on JD-425 is 7-bu (two bags, each one is 3.5 </a:t>
-            </a:r>
-            <a:r>
-              <a:rPr lang="en-US" sz="1400" dirty="0" err="1"/>
-              <a:t>bu</a:t>
-            </a:r>
-            <a:r>
-              <a:rPr lang="en-US" sz="1400" dirty="0"/>
-              <a:t>) – I like it.</a:t>
-            </a:r>
-          </a:p>
-          <a:p>
-            <a:endParaRPr lang="en-US" sz="1400" dirty="0"/>
-          </a:p>
-          <a:p>
-            <a:r>
-              <a:rPr lang="en-US" sz="1400" dirty="0"/>
-              <a:t>Deere lists for X700 Signature Series (including X758):</a:t>
-            </a:r>
-          </a:p>
-          <a:p>
-            <a:r>
-              <a:rPr lang="en-US" sz="1400" dirty="0"/>
-              <a:t> - a 7‑bu two‑bag Power Flow hopper – my preference</a:t>
-            </a:r>
-          </a:p>
-          <a:p>
-            <a:r>
-              <a:rPr lang="en-US" sz="1400" dirty="0"/>
-              <a:t> - a 14‑bu three‑bag hopper – I don't need 3 bags</a:t>
-            </a:r>
-          </a:p>
-          <a:p>
-            <a:endParaRPr lang="en-US" sz="1400" dirty="0"/>
-          </a:p>
-          <a:p>
-            <a:r>
-              <a:rPr lang="en-US" sz="1400" dirty="0"/>
-              <a:t>The BM20780 7‑bu 2‑bag hopper is specifically</a:t>
-            </a:r>
-          </a:p>
-          <a:p>
-            <a:r>
-              <a:rPr lang="en-US" sz="1400" dirty="0"/>
-              <a:t>designed to mount to the rear Click‑N‑Go system BM20714</a:t>
-            </a:r>
-          </a:p>
-          <a:p>
-            <a:r>
-              <a:rPr lang="en-US" sz="1400" dirty="0"/>
-              <a:t>on X700‑series tractors, including the X758</a:t>
-            </a:r>
+              <a:rPr lang="en-US" sz="1050" dirty="0">
+                <a:hlinkClick r:id="rId6"/>
+              </a:rPr>
+              <a:t>https://</a:t>
+            </a:r>
+            <a:r>
+              <a:rPr lang="en-US" sz="1050" dirty="0" err="1">
+                <a:hlinkClick r:id="rId6"/>
+              </a:rPr>
+              <a:t>www.littlebuckloader.com</a:t>
+            </a:r>
+            <a:r>
+              <a:rPr lang="en-US" sz="1050" dirty="0">
+                <a:hlinkClick r:id="rId6"/>
+              </a:rPr>
+              <a:t>/shop/p/little-bull-loader-front-end-loader-john-deere</a:t>
+            </a:r>
+            <a:endParaRPr lang="en-US" sz="1050" dirty="0"/>
           </a:p>
         </p:txBody>
       </p:sp>
     </p:spTree>
     <p:extLst>
       <p:ext uri="{BB962C8B-B14F-4D97-AF65-F5344CB8AC3E}">
-        <p14:creationId xmlns:p14="http://schemas.microsoft.com/office/powerpoint/2010/main" val="648698519"/>
+        <p14:creationId xmlns:p14="http://schemas.microsoft.com/office/powerpoint/2010/main" val="981582040"/>
       </p:ext>
     </p:extLst>
   </p:cSld>
@@ -6499,7 +7204,13 @@
   <p:cSld>
     <p:spTree>
       <p:nvGrpSpPr>
-        <p:cNvPr id="1" name=""/>
+        <p:cNvPr id="1" name="">
+          <a:extLst>
+            <a:ext uri="{FF2B5EF4-FFF2-40B4-BE49-F238E27FC236}">
+              <a16:creationId xmlns:a16="http://schemas.microsoft.com/office/drawing/2014/main" id="{74343D31-ECE5-9365-93A5-EADC75847418}"/>
+            </a:ext>
+          </a:extLst>
+        </p:cNvPr>
         <p:cNvGrpSpPr/>
         <p:nvPr/>
       </p:nvGrpSpPr>
@@ -6516,7 +7227,7 @@
           <p:cNvPr id="2" name="TextBox 1">
             <a:extLst>
               <a:ext uri="{FF2B5EF4-FFF2-40B4-BE49-F238E27FC236}">
-                <a16:creationId xmlns:a16="http://schemas.microsoft.com/office/drawing/2014/main" id="{775BBD15-AEC2-1815-2347-A5BB8F308263}"/>
+                <a16:creationId xmlns:a16="http://schemas.microsoft.com/office/drawing/2014/main" id="{77D0C96E-112C-9AD5-4197-E7D6921D9754}"/>
               </a:ext>
             </a:extLst>
           </p:cNvPr>
@@ -6548,10 +7259,10 @@
       </p:sp>
       <p:sp>
         <p:nvSpPr>
-          <p:cNvPr id="3" name="TextBox 2">
-            <a:extLst>
-              <a:ext uri="{FF2B5EF4-FFF2-40B4-BE49-F238E27FC236}">
-                <a16:creationId xmlns:a16="http://schemas.microsoft.com/office/drawing/2014/main" id="{DC69E50A-DD6F-49A2-50A0-AE0A50A8C419}"/>
+          <p:cNvPr id="8" name="TextBox 7">
+            <a:extLst>
+              <a:ext uri="{FF2B5EF4-FFF2-40B4-BE49-F238E27FC236}">
+                <a16:creationId xmlns:a16="http://schemas.microsoft.com/office/drawing/2014/main" id="{40B1DAD5-098B-A626-FB87-CBFF942DA840}"/>
               </a:ext>
             </a:extLst>
           </p:cNvPr>
@@ -6560,8 +7271,8 @@
         </p:nvSpPr>
         <p:spPr>
           <a:xfrm>
-            <a:off x="5048251" y="567268"/>
-            <a:ext cx="6996630" cy="5632311"/>
+            <a:off x="6079066" y="209097"/>
+            <a:ext cx="5925483" cy="3539430"/>
           </a:xfrm>
           <a:prstGeom prst="rect">
             <a:avLst/>
@@ -6575,439 +7286,128 @@
           <a:lstStyle/>
           <a:p>
             <a:r>
-              <a:rPr lang="en-US" sz="1200" b="1" dirty="0">
-                <a:solidFill>
-                  <a:srgbClr val="00B050"/>
-                </a:solidFill>
-              </a:rPr>
-              <a:t>What to do at low temperature: -20°C (-4°F):</a:t>
-            </a:r>
-            <a:endParaRPr lang="en-US" sz="1200" dirty="0">
-              <a:solidFill>
-                <a:srgbClr val="00B050"/>
-              </a:solidFill>
-            </a:endParaRPr>
-          </a:p>
-          <a:p>
-            <a:pPr marL="285750" indent="-285750">
-              <a:buFont typeface="Courier New" panose="02070309020205020404" pitchFamily="49" charset="0"/>
-              <a:buChar char="o"/>
-            </a:pPr>
-            <a:r>
-              <a:rPr lang="en-US" sz="1200" b="1" dirty="0">
-                <a:solidFill>
-                  <a:srgbClr val="FF0000"/>
-                </a:solidFill>
-              </a:rPr>
-              <a:t>Engine oil</a:t>
-            </a:r>
-            <a:r>
-              <a:rPr lang="en-US" sz="1200" dirty="0"/>
-              <a:t>: use lower viscosity 0W-40 or 5W-40 </a:t>
-            </a:r>
-            <a:r>
-              <a:rPr lang="en-US" sz="1200" b="1" dirty="0">
-                <a:solidFill>
-                  <a:srgbClr val="00B0F0"/>
-                </a:solidFill>
-              </a:rPr>
-              <a:t>synthetic diesel oil</a:t>
-            </a:r>
-          </a:p>
-          <a:p>
-            <a:pPr marL="285750" indent="-285750">
-              <a:buFont typeface="Courier New" panose="02070309020205020404" pitchFamily="49" charset="0"/>
-              <a:buChar char="o"/>
-            </a:pPr>
-            <a:r>
-              <a:rPr lang="en-US" sz="1200" b="1" dirty="0">
-                <a:solidFill>
-                  <a:srgbClr val="FF0000"/>
-                </a:solidFill>
-              </a:rPr>
-              <a:t>Hydraulic fluid </a:t>
-            </a:r>
-            <a:r>
-              <a:rPr lang="en-US" sz="1200" dirty="0"/>
-              <a:t>– </a:t>
-            </a:r>
-            <a:r>
-              <a:rPr lang="en-US" sz="1200" b="1" dirty="0">
-                <a:solidFill>
-                  <a:srgbClr val="00B0F0"/>
-                </a:solidFill>
-              </a:rPr>
-              <a:t>use premium synthetic hydraulic fluids with cold-flow improvers</a:t>
-            </a:r>
-            <a:r>
-              <a:rPr lang="en-US" sz="1200" dirty="0"/>
-              <a:t>. </a:t>
-            </a:r>
-          </a:p>
-          <a:p>
-            <a:pPr marL="285750" indent="-285750">
-              <a:buFont typeface="Courier New" panose="02070309020205020404" pitchFamily="49" charset="0"/>
-              <a:buChar char="o"/>
-            </a:pPr>
-            <a:r>
-              <a:rPr lang="en-US" sz="1200" b="1" dirty="0">
-                <a:solidFill>
-                  <a:srgbClr val="FF0000"/>
-                </a:solidFill>
-              </a:rPr>
-              <a:t>Fuel Additives (anti-gel additives) </a:t>
-            </a:r>
-            <a:r>
-              <a:rPr lang="en-US" sz="1200" dirty="0"/>
-              <a:t>– need to be added at temperatures below -12°C (10-15°F), they prevent wax crystals from sticking together, and disperse moisture to prevent ice formation in fuel filters. </a:t>
-            </a:r>
-          </a:p>
-          <a:p>
-            <a:pPr marL="285750" indent="-285750">
-              <a:buFont typeface="Courier New" panose="02070309020205020404" pitchFamily="49" charset="0"/>
-              <a:buChar char="o"/>
-            </a:pPr>
-            <a:r>
-              <a:rPr lang="en-US" sz="1200" dirty="0"/>
-              <a:t>John Deere Recommended its own Additive - John Deere Fuel-Protect Winter Formula (TY27786). It contains wax crystal modifiers that prevent fuel gelling by changing the shape and size of wax crystals as they form. This allows smaller crystals to pass through the fuel filter instead of clumping together and blocking flow. </a:t>
-            </a:r>
-          </a:p>
-          <a:p>
-            <a:pPr marL="285750" indent="-285750">
-              <a:buFont typeface="Courier New" panose="02070309020205020404" pitchFamily="49" charset="0"/>
-              <a:buChar char="o"/>
-            </a:pPr>
-            <a:r>
-              <a:rPr lang="en-US" sz="1200" dirty="0"/>
-              <a:t>The winter formula typically protects 15-20°F below the fuel's cloud point (which is 15-19F, so with additive we can go down to </a:t>
-            </a:r>
-            <a:r>
-              <a:rPr lang="en-US" sz="1200" dirty="0" err="1"/>
-              <a:t>approx</a:t>
-            </a:r>
-            <a:r>
-              <a:rPr lang="en-US" sz="1200" dirty="0"/>
-              <a:t> 0°F )</a:t>
-            </a:r>
-          </a:p>
-          <a:p>
-            <a:pPr marL="285750" indent="-285750">
-              <a:buFont typeface="Courier New" panose="02070309020205020404" pitchFamily="49" charset="0"/>
-              <a:buChar char="o"/>
-            </a:pPr>
-            <a:r>
-              <a:rPr lang="en-US" sz="1200" dirty="0"/>
-              <a:t>Products like </a:t>
-            </a:r>
-            <a:r>
-              <a:rPr lang="en-US" sz="1200" b="1" dirty="0">
-                <a:solidFill>
-                  <a:srgbClr val="00B0F0"/>
-                </a:solidFill>
-              </a:rPr>
-              <a:t>Hot Shot's Secret Diesel Winter Anti-Gel or </a:t>
-            </a:r>
-            <a:r>
-              <a:rPr lang="en-US" sz="1200" b="1" dirty="0" err="1">
-                <a:solidFill>
-                  <a:srgbClr val="00B0F0"/>
-                </a:solidFill>
-              </a:rPr>
-              <a:t>Archoil</a:t>
-            </a:r>
-            <a:r>
-              <a:rPr lang="en-US" sz="1200" b="1" dirty="0">
-                <a:solidFill>
-                  <a:srgbClr val="00B0F0"/>
-                </a:solidFill>
-              </a:rPr>
-              <a:t> AR6300 </a:t>
-            </a:r>
-            <a:r>
-              <a:rPr lang="en-US" sz="1200" dirty="0"/>
-              <a:t>can protect diesel fuel down to -40°F (-40°C) when used at every fill-up. </a:t>
-            </a:r>
-          </a:p>
-          <a:p>
-            <a:pPr marL="285750" indent="-285750">
-              <a:buFont typeface="Courier New" panose="02070309020205020404" pitchFamily="49" charset="0"/>
-              <a:buChar char="o"/>
-            </a:pPr>
-            <a:r>
-              <a:rPr lang="en-US" sz="1200" dirty="0"/>
-              <a:t>Important - the additives should be mixed with fuel before temperatures drop, as </a:t>
-            </a:r>
-            <a:r>
-              <a:rPr lang="en-US" sz="1200" dirty="0">
-                <a:solidFill>
-                  <a:srgbClr val="00B0F0"/>
-                </a:solidFill>
-              </a:rPr>
-              <a:t>they cannot reverse gelling once it has already occurred</a:t>
-            </a:r>
-            <a:r>
-              <a:rPr lang="en-US" sz="1200" dirty="0"/>
-              <a:t>.</a:t>
-            </a:r>
-          </a:p>
-          <a:p>
-            <a:pPr marL="285750" indent="-285750">
-              <a:buFont typeface="Courier New" panose="02070309020205020404" pitchFamily="49" charset="0"/>
-              <a:buChar char="o"/>
-            </a:pPr>
-            <a:r>
-              <a:rPr lang="en-US" sz="1200" dirty="0"/>
-              <a:t>K100 - is a premium all-in-one diesel fuel treatment and anti-gel additive that eliminates water in fuel systems and prevents fuel gelling in cold weather. The product chemically bond with water molecules, encapsulating them and allowing them to burn harmlessly through the engine rather than causing problems.</a:t>
-            </a:r>
-          </a:p>
-          <a:p>
-            <a:r>
-              <a:rPr lang="en-US" sz="1200" dirty="0"/>
-              <a:t>------------------------------------------------</a:t>
-            </a:r>
-          </a:p>
-          <a:p>
-            <a:pPr marL="285750" indent="-285750">
-              <a:buFont typeface="Courier New" panose="02070309020205020404" pitchFamily="49" charset="0"/>
-              <a:buChar char="o"/>
-            </a:pPr>
-            <a:r>
-              <a:rPr lang="en-US" sz="1200" b="1" dirty="0">
-                <a:solidFill>
-                  <a:srgbClr val="FF0000"/>
-                </a:solidFill>
-              </a:rPr>
-              <a:t>Keep fuel tank full </a:t>
-            </a:r>
-            <a:r>
-              <a:rPr lang="en-US" sz="1200" dirty="0"/>
-              <a:t>to reduce air space and reduce moisture condensation inside the tank which can freeze and cause additional fuel system blockages. The anti-gel additive should be added to the tank before filling so it mixes thoroughly with the incoming fuel.</a:t>
-            </a:r>
-          </a:p>
-          <a:p>
-            <a:pPr marL="285750" indent="-285750">
-              <a:buFont typeface="Courier New" panose="02070309020205020404" pitchFamily="49" charset="0"/>
-              <a:buChar char="o"/>
-            </a:pPr>
-            <a:r>
-              <a:rPr lang="en-US" sz="1200" b="1" dirty="0">
-                <a:solidFill>
-                  <a:srgbClr val="FF0000"/>
-                </a:solidFill>
-              </a:rPr>
-              <a:t>Engine block heater</a:t>
-            </a:r>
-            <a:r>
-              <a:rPr lang="en-US" sz="1200" dirty="0"/>
-              <a:t> – JD engine </a:t>
-            </a:r>
-            <a:r>
-              <a:rPr lang="en-US" sz="1200" b="1" dirty="0">
-                <a:solidFill>
-                  <a:srgbClr val="00B0F0"/>
-                </a:solidFill>
-              </a:rPr>
-              <a:t>coolant heater (part number AR87167)</a:t>
-            </a:r>
-            <a:r>
-              <a:rPr lang="en-US" sz="1200" dirty="0"/>
-              <a:t> requires an </a:t>
-            </a:r>
-            <a:r>
-              <a:rPr lang="en-US" sz="1200" b="1" dirty="0">
-                <a:solidFill>
-                  <a:srgbClr val="00B0F0"/>
-                </a:solidFill>
-              </a:rPr>
-              <a:t>adapter kit (MIA881629) </a:t>
-            </a:r>
-            <a:r>
-              <a:rPr lang="en-US" sz="1200" dirty="0"/>
-              <a:t>for installation on the X758 and should be plugged in for at least </a:t>
-            </a:r>
-            <a:r>
-              <a:rPr lang="en-US" sz="1200" b="1" dirty="0">
-                <a:solidFill>
-                  <a:srgbClr val="FF0000"/>
-                </a:solidFill>
-              </a:rPr>
-              <a:t>one hour before starting</a:t>
-            </a:r>
-            <a:r>
-              <a:rPr lang="en-US" sz="1200" dirty="0"/>
-              <a:t>.</a:t>
-            </a:r>
-          </a:p>
-          <a:p>
-            <a:pPr marL="285750" indent="-285750">
-              <a:buFont typeface="Courier New" panose="02070309020205020404" pitchFamily="49" charset="0"/>
-              <a:buChar char="o"/>
-            </a:pPr>
-            <a:r>
-              <a:rPr lang="en-US" sz="1200" b="1" dirty="0">
-                <a:solidFill>
-                  <a:srgbClr val="FF0000"/>
-                </a:solidFill>
-              </a:rPr>
-              <a:t>Replace fuel filters before cold weather </a:t>
-            </a:r>
-            <a:r>
-              <a:rPr lang="en-US" sz="1200" dirty="0"/>
-              <a:t>arrives, as dirty filters trap moisture and accelerate gelling.</a:t>
-            </a:r>
-            <a:endParaRPr lang="en-US" sz="1200" b="1" dirty="0">
-              <a:solidFill>
-                <a:srgbClr val="FF0000"/>
-              </a:solidFill>
-            </a:endParaRPr>
-          </a:p>
-          <a:p>
-            <a:pPr marL="285750" indent="-285750">
-              <a:buFont typeface="Courier New" panose="02070309020205020404" pitchFamily="49" charset="0"/>
-              <a:buChar char="o"/>
-            </a:pPr>
-            <a:r>
-              <a:rPr lang="en-US" sz="1200" b="1" dirty="0">
-                <a:solidFill>
-                  <a:srgbClr val="FF0000"/>
-                </a:solidFill>
-              </a:rPr>
-              <a:t>Engine Warm-Up </a:t>
-            </a:r>
-            <a:r>
-              <a:rPr lang="en-US" sz="1200" dirty="0"/>
-              <a:t>- the X758 has glow plugs that warm the cylinders before starting.  Turn the key to the "ON" position, wait for the glow plug indicator light (squiggly line) to go off before cranking the engine. Then let the tractor idle for several minutes to </a:t>
-            </a:r>
-            <a:r>
-              <a:rPr lang="en-US" sz="1200" b="1" dirty="0">
-                <a:solidFill>
-                  <a:srgbClr val="FF0000"/>
-                </a:solidFill>
-              </a:rPr>
-              <a:t>allow both the engine and hydraulic oil to warm up</a:t>
-            </a:r>
-            <a:r>
-              <a:rPr lang="en-US" sz="1200" dirty="0"/>
-              <a:t> before operating implements or the power steering system under load</a:t>
-            </a:r>
-          </a:p>
-        </p:txBody>
-      </p:sp>
-      <p:pic>
-        <p:nvPicPr>
-          <p:cNvPr id="1026" name="Picture 2" descr="AR87167 Engine Block Coolant Heater Kit Fits for John Deere 1025R 110 2210  2305 4210 445 X495 XUV Gator 850D 855D 855M 865E - AliExpress">
-            <a:extLst>
-              <a:ext uri="{FF2B5EF4-FFF2-40B4-BE49-F238E27FC236}">
-                <a16:creationId xmlns:a16="http://schemas.microsoft.com/office/drawing/2014/main" id="{E31E646C-AD08-4238-DAB7-02DE88ECA7CC}"/>
-              </a:ext>
-            </a:extLst>
-          </p:cNvPr>
-          <p:cNvPicPr>
-            <a:picLocks noChangeAspect="1" noChangeArrowheads="1"/>
-          </p:cNvPicPr>
+              <a:rPr lang="en-US" sz="1400" dirty="0"/>
+              <a:t>21 modifications to X758:</a:t>
+            </a:r>
+          </a:p>
+          <a:p>
+            <a:r>
+              <a:rPr lang="en-US" sz="1400" dirty="0">
+                <a:hlinkClick r:id="rId2"/>
+              </a:rPr>
+              <a:t>https://</a:t>
+            </a:r>
+            <a:r>
+              <a:rPr lang="en-US" sz="1400" dirty="0" err="1">
+                <a:hlinkClick r:id="rId2"/>
+              </a:rPr>
+              <a:t>www.youtube.com</a:t>
+            </a:r>
+            <a:r>
+              <a:rPr lang="en-US" sz="1400" dirty="0">
+                <a:hlinkClick r:id="rId2"/>
+              </a:rPr>
+              <a:t>/</a:t>
+            </a:r>
+            <a:r>
+              <a:rPr lang="en-US" sz="1400" dirty="0" err="1">
+                <a:hlinkClick r:id="rId2"/>
+              </a:rPr>
+              <a:t>watch?v</a:t>
+            </a:r>
+            <a:r>
+              <a:rPr lang="en-US" sz="1400" dirty="0">
+                <a:hlinkClick r:id="rId2"/>
+              </a:rPr>
+              <a:t>=5bkI9KLGFZs</a:t>
+            </a:r>
+            <a:endParaRPr lang="en-US" sz="1400" dirty="0"/>
+          </a:p>
+          <a:p>
+            <a:r>
+              <a:rPr lang="en-US" sz="1400" dirty="0"/>
+              <a:t>Snowblower Lights; Chute Actuator (up/down);Chute Rotator (more turning);</a:t>
+            </a:r>
+          </a:p>
+          <a:p>
+            <a:r>
+              <a:rPr lang="en-US" sz="1400" dirty="0"/>
+              <a:t>Enclosed Chain for impeller; Rubber extensions for impeller; </a:t>
+            </a:r>
+          </a:p>
+          <a:p>
+            <a:r>
+              <a:rPr lang="en-US" sz="1400" dirty="0"/>
+              <a:t>Seat Cover; Seat Heaters; Heated Vest Plug; Steering Wheel Ball (spinner);</a:t>
+            </a:r>
+          </a:p>
+          <a:p>
+            <a:r>
+              <a:rPr lang="en-US" sz="1400" dirty="0"/>
+              <a:t>LED Headlights; LED Rear Lights; Dash Light; </a:t>
+            </a:r>
+          </a:p>
+          <a:p>
+            <a:r>
+              <a:rPr lang="en-US" sz="1400" dirty="0"/>
+              <a:t>Custom Relay for Chute Switch</a:t>
+            </a:r>
+          </a:p>
+          <a:p>
+            <a:r>
+              <a:rPr lang="en-US" sz="1400" dirty="0"/>
+              <a:t>Throttle Spring to throttle lever to prevent it from backing down</a:t>
+            </a:r>
+          </a:p>
+          <a:p>
+            <a:r>
+              <a:rPr lang="en-US" sz="1400" dirty="0"/>
+              <a:t>Hazard Lights; Pattern-Changing Hazard Switch; USB Output &amp; Voltmeter showing battery voltage; Toolbox Handle; Secondary Alternator (to handle electrical load of lights and heaters)</a:t>
+            </a:r>
+          </a:p>
+          <a:p>
+            <a:r>
+              <a:rPr lang="en-US" sz="1400" dirty="0"/>
+              <a:t>Bypass Modifications &amp; Lubrication - 3 smaller sub-tweaks: bypassing the reverse implement option (RIO), bypassing the seat safety switch with a jumper, and using "Fluid Film" to stop pedal squeaks and prevent rust</a:t>
+            </a:r>
+          </a:p>
+          <a:p>
+            <a:r>
+              <a:rPr lang="en-US" sz="1400" dirty="0"/>
+              <a:t>Bonus/Technical Fix: - shimming the four-wheel steer transfer shaft with feeler gauges and adding a grease </a:t>
+            </a:r>
+            <a:r>
+              <a:rPr lang="en-US" sz="1400" dirty="0" err="1"/>
+              <a:t>zert</a:t>
+            </a:r>
+            <a:r>
+              <a:rPr lang="en-US" sz="1400" dirty="0"/>
+              <a:t> to eliminate "shimmy" in the rear wheels</a:t>
+            </a:r>
+          </a:p>
+        </p:txBody>
+      </p:sp>
+      <p:sp>
+        <p:nvSpPr>
+          <p:cNvPr id="3" name="TextBox 2">
+            <a:extLst>
+              <a:ext uri="{FF2B5EF4-FFF2-40B4-BE49-F238E27FC236}">
+                <a16:creationId xmlns:a16="http://schemas.microsoft.com/office/drawing/2014/main" id="{7BC0A9F2-B671-84FC-1360-DA1CF032E6AF}"/>
+              </a:ext>
+            </a:extLst>
+          </p:cNvPr>
+          <p:cNvSpPr txBox="1"/>
           <p:nvPr/>
-        </p:nvPicPr>
-        <p:blipFill>
-          <a:blip r:embed="rId2" cstate="email">
-            <a:extLst>
-              <a:ext uri="{28A0092B-C50C-407E-A947-70E740481C1C}">
-                <a14:useLocalDpi xmlns:a14="http://schemas.microsoft.com/office/drawing/2010/main"/>
-              </a:ext>
-            </a:extLst>
-          </a:blip>
-          <a:srcRect/>
-          <a:stretch>
-            <a:fillRect/>
-          </a:stretch>
-        </p:blipFill>
-        <p:spPr bwMode="auto">
-          <a:xfrm>
-            <a:off x="147120" y="2500930"/>
-            <a:ext cx="4087091" cy="4087091"/>
+        </p:nvSpPr>
+        <p:spPr>
+          <a:xfrm>
+            <a:off x="187451" y="574020"/>
+            <a:ext cx="5925483" cy="3108543"/>
           </a:xfrm>
           <a:prstGeom prst="rect">
             <a:avLst/>
           </a:prstGeom>
           <a:noFill/>
-          <a:extLst>
-            <a:ext uri="{909E8E84-426E-40DD-AFC4-6F175D3DCCD1}">
-              <a14:hiddenFill xmlns:a14="http://schemas.microsoft.com/office/drawing/2010/main">
-                <a:solidFill>
-                  <a:srgbClr val="FFFFFF"/>
-                </a:solidFill>
-              </a14:hiddenFill>
-            </a:ext>
-          </a:extLst>
-        </p:spPr>
-      </p:pic>
-      <p:pic>
-        <p:nvPicPr>
-          <p:cNvPr id="1028" name="Picture 4" descr="John Deere AR87167 Engine Block Coolant Heater Kit 1025R 110 2210 2305 Gator">
-            <a:extLst>
-              <a:ext uri="{FF2B5EF4-FFF2-40B4-BE49-F238E27FC236}">
-                <a16:creationId xmlns:a16="http://schemas.microsoft.com/office/drawing/2014/main" id="{F97D0BC0-FBA4-1B8E-A5A3-C35BC59A28F2}"/>
-              </a:ext>
-            </a:extLst>
-          </p:cNvPr>
-          <p:cNvPicPr>
-            <a:picLocks noChangeAspect="1" noChangeArrowheads="1"/>
-          </p:cNvPicPr>
-          <p:nvPr/>
-        </p:nvPicPr>
-        <p:blipFill>
-          <a:blip r:embed="rId3" cstate="email">
-            <a:extLst>
-              <a:ext uri="{28A0092B-C50C-407E-A947-70E740481C1C}">
-                <a14:useLocalDpi xmlns:a14="http://schemas.microsoft.com/office/drawing/2010/main"/>
-              </a:ext>
-            </a:extLst>
-          </a:blip>
-          <a:srcRect/>
-          <a:stretch>
-            <a:fillRect/>
-          </a:stretch>
-        </p:blipFill>
-        <p:spPr bwMode="auto">
-          <a:xfrm>
-            <a:off x="147120" y="770857"/>
-            <a:ext cx="1482436" cy="1482436"/>
-          </a:xfrm>
-          <a:prstGeom prst="rect">
-            <a:avLst/>
-          </a:prstGeom>
-          <a:noFill/>
-          <a:extLst>
-            <a:ext uri="{909E8E84-426E-40DD-AFC4-6F175D3DCCD1}">
-              <a14:hiddenFill xmlns:a14="http://schemas.microsoft.com/office/drawing/2010/main">
-                <a:solidFill>
-                  <a:srgbClr val="FFFFFF"/>
-                </a:solidFill>
-              </a14:hiddenFill>
-            </a:ext>
-          </a:extLst>
-        </p:spPr>
-      </p:pic>
-      <p:sp>
-        <p:nvSpPr>
-          <p:cNvPr id="4" name="TextBox 3">
-            <a:extLst>
-              <a:ext uri="{FF2B5EF4-FFF2-40B4-BE49-F238E27FC236}">
-                <a16:creationId xmlns:a16="http://schemas.microsoft.com/office/drawing/2014/main" id="{4248EAA2-37A7-21EF-BFB2-53447F6C3A8C}"/>
-              </a:ext>
-            </a:extLst>
-          </p:cNvPr>
-          <p:cNvSpPr txBox="1"/>
-          <p:nvPr/>
-        </p:nvSpPr>
-        <p:spPr>
-          <a:xfrm>
-            <a:off x="1629556" y="808399"/>
-            <a:ext cx="3164117" cy="1200329"/>
-          </a:xfrm>
-          <a:prstGeom prst="rect">
-            <a:avLst/>
-          </a:prstGeom>
-          <a:noFill/>
         </p:spPr>
         <p:txBody>
           <a:bodyPr wrap="square" rtlCol="0">
@@ -7016,17 +7416,93 @@
           <a:lstStyle/>
           <a:p>
             <a:r>
-              <a:rPr lang="en-US" dirty="0"/>
-              <a:t>The warmth spreads through the entire engine via natural convection of the coolant. It takes 1-2 hours </a:t>
-            </a:r>
+              <a:rPr lang="en-US" sz="1400" dirty="0"/>
+              <a:t>I want BM20780 - a 7-bu (247-L) 2-Bag Hopper Assembly</a:t>
+            </a:r>
+          </a:p>
+          <a:p>
+            <a:r>
+              <a:rPr lang="en-US" sz="1400" dirty="0"/>
+              <a:t>(X400/X500 HDGT and X700 Series)</a:t>
+            </a:r>
+          </a:p>
+          <a:p>
             <a:endParaRPr lang="en-US" sz="1400" dirty="0"/>
+          </a:p>
+          <a:p>
+            <a:r>
+              <a:rPr lang="en-US" sz="1400" dirty="0"/>
+              <a:t>I don't like the JD 20-bushel Click-N-Go Material Collection System,</a:t>
+            </a:r>
+          </a:p>
+          <a:p>
+            <a:r>
+              <a:rPr lang="en-US" sz="1400" dirty="0"/>
+              <a:t>It is too heavy, requires weights at the front of the tractor for balance</a:t>
+            </a:r>
+          </a:p>
+          <a:p>
+            <a:r>
+              <a:rPr lang="en-US" sz="1400" dirty="0"/>
+              <a:t>My current bagger on JD-425 is 7-bu (two bags, each one is 3.5 </a:t>
+            </a:r>
+            <a:r>
+              <a:rPr lang="en-US" sz="1400" dirty="0" err="1"/>
+              <a:t>bu</a:t>
+            </a:r>
+            <a:r>
+              <a:rPr lang="en-US" sz="1400" dirty="0"/>
+              <a:t>) – I like it.</a:t>
+            </a:r>
+          </a:p>
+          <a:p>
+            <a:endParaRPr lang="en-US" sz="1400" dirty="0"/>
+          </a:p>
+          <a:p>
+            <a:r>
+              <a:rPr lang="en-US" sz="1400" dirty="0"/>
+              <a:t>Deere lists for X700 Signature Series (including X758):</a:t>
+            </a:r>
+          </a:p>
+          <a:p>
+            <a:r>
+              <a:rPr lang="en-US" sz="1400" dirty="0"/>
+              <a:t> - a 7‑bu two‑bag Power Flow hopper – my preference</a:t>
+            </a:r>
+          </a:p>
+          <a:p>
+            <a:r>
+              <a:rPr lang="en-US" sz="1400" dirty="0"/>
+              <a:t> - a 14‑bu three‑bag hopper – I don't need 3 bags</a:t>
+            </a:r>
+          </a:p>
+          <a:p>
+            <a:endParaRPr lang="en-US" sz="1400" dirty="0"/>
+          </a:p>
+          <a:p>
+            <a:r>
+              <a:rPr lang="en-US" sz="1400" dirty="0"/>
+              <a:t>The BM20780 7‑bu 2‑bag hopper is specifically</a:t>
+            </a:r>
+          </a:p>
+          <a:p>
+            <a:r>
+              <a:rPr lang="en-US" sz="1400" dirty="0"/>
+              <a:t>designed to mount to the rear Click‑N‑Go system BM20714</a:t>
+            </a:r>
+          </a:p>
+          <a:p>
+            <a:r>
+              <a:rPr lang="en-US" sz="1400" dirty="0"/>
+              <a:t>on X700‑series tractors, including the X758</a:t>
+            </a:r>
           </a:p>
         </p:txBody>
       </p:sp>
     </p:spTree>
     <p:extLst>
       <p:ext uri="{BB962C8B-B14F-4D97-AF65-F5344CB8AC3E}">
-        <p14:creationId xmlns:p14="http://schemas.microsoft.com/office/powerpoint/2010/main" val="1288276014"/>
+        <p14:creationId xmlns:p14="http://schemas.microsoft.com/office/powerpoint/2010/main" val="648698519"/>
       </p:ext>
     </p:extLst>
   </p:cSld>
@@ -7083,6 +7559,548 @@
           <a:p>
             <a:r>
               <a:rPr lang="en-US" sz="2800" b="1" dirty="0"/>
+              <a:t>John Deere X758</a:t>
+            </a:r>
+          </a:p>
+        </p:txBody>
+      </p:sp>
+      <p:sp>
+        <p:nvSpPr>
+          <p:cNvPr id="3" name="TextBox 2">
+            <a:extLst>
+              <a:ext uri="{FF2B5EF4-FFF2-40B4-BE49-F238E27FC236}">
+                <a16:creationId xmlns:a16="http://schemas.microsoft.com/office/drawing/2014/main" id="{DC69E50A-DD6F-49A2-50A0-AE0A50A8C419}"/>
+              </a:ext>
+            </a:extLst>
+          </p:cNvPr>
+          <p:cNvSpPr txBox="1"/>
+          <p:nvPr/>
+        </p:nvSpPr>
+        <p:spPr>
+          <a:xfrm>
+            <a:off x="5048251" y="567268"/>
+            <a:ext cx="6996630" cy="5632311"/>
+          </a:xfrm>
+          <a:prstGeom prst="rect">
+            <a:avLst/>
+          </a:prstGeom>
+          <a:noFill/>
+        </p:spPr>
+        <p:txBody>
+          <a:bodyPr wrap="square" rtlCol="0">
+            <a:spAutoFit/>
+          </a:bodyPr>
+          <a:lstStyle/>
+          <a:p>
+            <a:r>
+              <a:rPr lang="en-US" sz="1200" b="1" dirty="0">
+                <a:solidFill>
+                  <a:srgbClr val="00B050"/>
+                </a:solidFill>
+              </a:rPr>
+              <a:t>What to do at low temperature: -20°C (-4°F):</a:t>
+            </a:r>
+            <a:endParaRPr lang="en-US" sz="1200" dirty="0">
+              <a:solidFill>
+                <a:srgbClr val="00B050"/>
+              </a:solidFill>
+            </a:endParaRPr>
+          </a:p>
+          <a:p>
+            <a:pPr marL="285750" indent="-285750">
+              <a:buFont typeface="Courier New" panose="02070309020205020404" pitchFamily="49" charset="0"/>
+              <a:buChar char="o"/>
+            </a:pPr>
+            <a:r>
+              <a:rPr lang="en-US" sz="1200" b="1" dirty="0">
+                <a:solidFill>
+                  <a:srgbClr val="FF0000"/>
+                </a:solidFill>
+              </a:rPr>
+              <a:t>Engine oil</a:t>
+            </a:r>
+            <a:r>
+              <a:rPr lang="en-US" sz="1200" dirty="0"/>
+              <a:t>: use lower viscosity 0W-40 or 5W-40 </a:t>
+            </a:r>
+            <a:r>
+              <a:rPr lang="en-US" sz="1200" b="1" dirty="0">
+                <a:solidFill>
+                  <a:srgbClr val="00B0F0"/>
+                </a:solidFill>
+              </a:rPr>
+              <a:t>synthetic diesel oil</a:t>
+            </a:r>
+          </a:p>
+          <a:p>
+            <a:pPr marL="285750" indent="-285750">
+              <a:buFont typeface="Courier New" panose="02070309020205020404" pitchFamily="49" charset="0"/>
+              <a:buChar char="o"/>
+            </a:pPr>
+            <a:r>
+              <a:rPr lang="en-US" sz="1200" b="1" dirty="0">
+                <a:solidFill>
+                  <a:srgbClr val="FF0000"/>
+                </a:solidFill>
+              </a:rPr>
+              <a:t>Hydraulic fluid </a:t>
+            </a:r>
+            <a:r>
+              <a:rPr lang="en-US" sz="1200" dirty="0"/>
+              <a:t>– </a:t>
+            </a:r>
+            <a:r>
+              <a:rPr lang="en-US" sz="1200" b="1" dirty="0">
+                <a:solidFill>
+                  <a:srgbClr val="00B0F0"/>
+                </a:solidFill>
+              </a:rPr>
+              <a:t>use premium synthetic hydraulic fluids with cold-flow improvers</a:t>
+            </a:r>
+            <a:r>
+              <a:rPr lang="en-US" sz="1200" dirty="0"/>
+              <a:t>. </a:t>
+            </a:r>
+          </a:p>
+          <a:p>
+            <a:pPr marL="285750" indent="-285750">
+              <a:buFont typeface="Courier New" panose="02070309020205020404" pitchFamily="49" charset="0"/>
+              <a:buChar char="o"/>
+            </a:pPr>
+            <a:r>
+              <a:rPr lang="en-US" sz="1200" b="1" dirty="0">
+                <a:solidFill>
+                  <a:srgbClr val="FF0000"/>
+                </a:solidFill>
+              </a:rPr>
+              <a:t>Fuel Additives (anti-gel additives) </a:t>
+            </a:r>
+            <a:r>
+              <a:rPr lang="en-US" sz="1200" dirty="0"/>
+              <a:t>– need to be added at temperatures below -12°C (10-15°F), they prevent wax crystals from sticking together, and disperse moisture to prevent ice formation in fuel filters. </a:t>
+            </a:r>
+          </a:p>
+          <a:p>
+            <a:pPr marL="285750" indent="-285750">
+              <a:buFont typeface="Courier New" panose="02070309020205020404" pitchFamily="49" charset="0"/>
+              <a:buChar char="o"/>
+            </a:pPr>
+            <a:r>
+              <a:rPr lang="en-US" sz="1200" dirty="0"/>
+              <a:t>John Deere Recommended its own Additive - John Deere Fuel-Protect Winter Formula (TY27786). It contains wax crystal modifiers that prevent fuel gelling by changing the shape and size of wax crystals as they form. This allows smaller crystals to pass through the fuel filter instead of clumping together and blocking flow. </a:t>
+            </a:r>
+          </a:p>
+          <a:p>
+            <a:pPr marL="285750" indent="-285750">
+              <a:buFont typeface="Courier New" panose="02070309020205020404" pitchFamily="49" charset="0"/>
+              <a:buChar char="o"/>
+            </a:pPr>
+            <a:r>
+              <a:rPr lang="en-US" sz="1200" dirty="0"/>
+              <a:t>The winter formula typically protects 15-20°F below the fuel's cloud point (which is 15-19F, so with additive we can go down to </a:t>
+            </a:r>
+            <a:r>
+              <a:rPr lang="en-US" sz="1200" dirty="0" err="1"/>
+              <a:t>approx</a:t>
+            </a:r>
+            <a:r>
+              <a:rPr lang="en-US" sz="1200" dirty="0"/>
+              <a:t> 0°F )</a:t>
+            </a:r>
+          </a:p>
+          <a:p>
+            <a:pPr marL="285750" indent="-285750">
+              <a:buFont typeface="Courier New" panose="02070309020205020404" pitchFamily="49" charset="0"/>
+              <a:buChar char="o"/>
+            </a:pPr>
+            <a:r>
+              <a:rPr lang="en-US" sz="1200" dirty="0"/>
+              <a:t>Products like </a:t>
+            </a:r>
+            <a:r>
+              <a:rPr lang="en-US" sz="1200" b="1" dirty="0">
+                <a:solidFill>
+                  <a:srgbClr val="00B0F0"/>
+                </a:solidFill>
+              </a:rPr>
+              <a:t>Hot Shot's Secret Diesel Winter Anti-Gel or </a:t>
+            </a:r>
+            <a:r>
+              <a:rPr lang="en-US" sz="1200" b="1" dirty="0" err="1">
+                <a:solidFill>
+                  <a:srgbClr val="00B0F0"/>
+                </a:solidFill>
+              </a:rPr>
+              <a:t>Archoil</a:t>
+            </a:r>
+            <a:r>
+              <a:rPr lang="en-US" sz="1200" b="1" dirty="0">
+                <a:solidFill>
+                  <a:srgbClr val="00B0F0"/>
+                </a:solidFill>
+              </a:rPr>
+              <a:t> AR6300 </a:t>
+            </a:r>
+            <a:r>
+              <a:rPr lang="en-US" sz="1200" dirty="0"/>
+              <a:t>can protect diesel fuel down to -40°F (-40°C) when used at every fill-up. </a:t>
+            </a:r>
+          </a:p>
+          <a:p>
+            <a:pPr marL="285750" indent="-285750">
+              <a:buFont typeface="Courier New" panose="02070309020205020404" pitchFamily="49" charset="0"/>
+              <a:buChar char="o"/>
+            </a:pPr>
+            <a:r>
+              <a:rPr lang="en-US" sz="1200" dirty="0"/>
+              <a:t>Important - the additives should be mixed with fuel before temperatures drop, as </a:t>
+            </a:r>
+            <a:r>
+              <a:rPr lang="en-US" sz="1200" dirty="0">
+                <a:solidFill>
+                  <a:srgbClr val="00B0F0"/>
+                </a:solidFill>
+              </a:rPr>
+              <a:t>they cannot reverse gelling once it has already occurred</a:t>
+            </a:r>
+            <a:r>
+              <a:rPr lang="en-US" sz="1200" dirty="0"/>
+              <a:t>.</a:t>
+            </a:r>
+          </a:p>
+          <a:p>
+            <a:pPr marL="285750" indent="-285750">
+              <a:buFont typeface="Courier New" panose="02070309020205020404" pitchFamily="49" charset="0"/>
+              <a:buChar char="o"/>
+            </a:pPr>
+            <a:r>
+              <a:rPr lang="en-US" sz="1200" dirty="0"/>
+              <a:t>K100 - is a premium all-in-one diesel fuel treatment and anti-gel additive that eliminates water in fuel systems and prevents fuel gelling in cold weather. The product chemically bond with water molecules, encapsulating them and allowing them to burn harmlessly through the engine rather than causing problems.</a:t>
+            </a:r>
+          </a:p>
+          <a:p>
+            <a:r>
+              <a:rPr lang="en-US" sz="1200" dirty="0"/>
+              <a:t>------------------------------------------------</a:t>
+            </a:r>
+          </a:p>
+          <a:p>
+            <a:pPr marL="285750" indent="-285750">
+              <a:buFont typeface="Courier New" panose="02070309020205020404" pitchFamily="49" charset="0"/>
+              <a:buChar char="o"/>
+            </a:pPr>
+            <a:r>
+              <a:rPr lang="en-US" sz="1200" b="1" dirty="0">
+                <a:solidFill>
+                  <a:srgbClr val="FF0000"/>
+                </a:solidFill>
+              </a:rPr>
+              <a:t>Keep fuel tank full </a:t>
+            </a:r>
+            <a:r>
+              <a:rPr lang="en-US" sz="1200" dirty="0"/>
+              <a:t>to reduce air space and reduce moisture condensation inside the tank which can freeze and cause additional fuel system blockages. The anti-gel additive should be added to the tank before filling so it mixes thoroughly with the incoming fuel.</a:t>
+            </a:r>
+          </a:p>
+          <a:p>
+            <a:pPr marL="285750" indent="-285750">
+              <a:buFont typeface="Courier New" panose="02070309020205020404" pitchFamily="49" charset="0"/>
+              <a:buChar char="o"/>
+            </a:pPr>
+            <a:r>
+              <a:rPr lang="en-US" sz="1200" b="1" dirty="0">
+                <a:solidFill>
+                  <a:srgbClr val="FF0000"/>
+                </a:solidFill>
+              </a:rPr>
+              <a:t>Engine block heater</a:t>
+            </a:r>
+            <a:r>
+              <a:rPr lang="en-US" sz="1200" dirty="0"/>
+              <a:t> – JD engine </a:t>
+            </a:r>
+            <a:r>
+              <a:rPr lang="en-US" sz="1200" b="1" dirty="0">
+                <a:solidFill>
+                  <a:srgbClr val="00B0F0"/>
+                </a:solidFill>
+              </a:rPr>
+              <a:t>coolant heater (part number AR87167)</a:t>
+            </a:r>
+            <a:r>
+              <a:rPr lang="en-US" sz="1200" dirty="0"/>
+              <a:t> requires an </a:t>
+            </a:r>
+            <a:r>
+              <a:rPr lang="en-US" sz="1200" b="1" dirty="0">
+                <a:solidFill>
+                  <a:srgbClr val="00B0F0"/>
+                </a:solidFill>
+              </a:rPr>
+              <a:t>adapter kit (MIA881629) </a:t>
+            </a:r>
+            <a:r>
+              <a:rPr lang="en-US" sz="1200" dirty="0"/>
+              <a:t>for installation on the X758 and should be plugged in for at least </a:t>
+            </a:r>
+            <a:r>
+              <a:rPr lang="en-US" sz="1200" b="1" dirty="0">
+                <a:solidFill>
+                  <a:srgbClr val="FF0000"/>
+                </a:solidFill>
+              </a:rPr>
+              <a:t>one hour before starting</a:t>
+            </a:r>
+            <a:r>
+              <a:rPr lang="en-US" sz="1200" dirty="0"/>
+              <a:t>.</a:t>
+            </a:r>
+          </a:p>
+          <a:p>
+            <a:pPr marL="285750" indent="-285750">
+              <a:buFont typeface="Courier New" panose="02070309020205020404" pitchFamily="49" charset="0"/>
+              <a:buChar char="o"/>
+            </a:pPr>
+            <a:r>
+              <a:rPr lang="en-US" sz="1200" b="1" dirty="0">
+                <a:solidFill>
+                  <a:srgbClr val="FF0000"/>
+                </a:solidFill>
+              </a:rPr>
+              <a:t>Replace fuel filters before cold weather </a:t>
+            </a:r>
+            <a:r>
+              <a:rPr lang="en-US" sz="1200" dirty="0"/>
+              <a:t>arrives, as dirty filters trap moisture and accelerate gelling.</a:t>
+            </a:r>
+            <a:endParaRPr lang="en-US" sz="1200" b="1" dirty="0">
+              <a:solidFill>
+                <a:srgbClr val="FF0000"/>
+              </a:solidFill>
+            </a:endParaRPr>
+          </a:p>
+          <a:p>
+            <a:pPr marL="285750" indent="-285750">
+              <a:buFont typeface="Courier New" panose="02070309020205020404" pitchFamily="49" charset="0"/>
+              <a:buChar char="o"/>
+            </a:pPr>
+            <a:r>
+              <a:rPr lang="en-US" sz="1200" b="1" dirty="0">
+                <a:solidFill>
+                  <a:srgbClr val="FF0000"/>
+                </a:solidFill>
+              </a:rPr>
+              <a:t>Engine Warm-Up </a:t>
+            </a:r>
+            <a:r>
+              <a:rPr lang="en-US" sz="1200" dirty="0"/>
+              <a:t>- the X758 has glow plugs that warm the cylinders before starting.  Turn the key to the "ON" position, wait for the glow plug indicator light (squiggly line) to go off before cranking the engine. Then let the tractor idle for several minutes to </a:t>
+            </a:r>
+            <a:r>
+              <a:rPr lang="en-US" sz="1200" b="1" dirty="0">
+                <a:solidFill>
+                  <a:srgbClr val="FF0000"/>
+                </a:solidFill>
+              </a:rPr>
+              <a:t>allow both the engine and hydraulic oil to warm up</a:t>
+            </a:r>
+            <a:r>
+              <a:rPr lang="en-US" sz="1200" dirty="0"/>
+              <a:t> before operating implements or the power steering system under load</a:t>
+            </a:r>
+          </a:p>
+        </p:txBody>
+      </p:sp>
+      <p:pic>
+        <p:nvPicPr>
+          <p:cNvPr id="1026" name="Picture 2" descr="AR87167 Engine Block Coolant Heater Kit Fits for John Deere 1025R 110 2210  2305 4210 445 X495 XUV Gator 850D 855D 855M 865E - AliExpress">
+            <a:extLst>
+              <a:ext uri="{FF2B5EF4-FFF2-40B4-BE49-F238E27FC236}">
+                <a16:creationId xmlns:a16="http://schemas.microsoft.com/office/drawing/2014/main" id="{E31E646C-AD08-4238-DAB7-02DE88ECA7CC}"/>
+              </a:ext>
+            </a:extLst>
+          </p:cNvPr>
+          <p:cNvPicPr>
+            <a:picLocks noChangeAspect="1" noChangeArrowheads="1"/>
+          </p:cNvPicPr>
+          <p:nvPr/>
+        </p:nvPicPr>
+        <p:blipFill>
+          <a:blip r:embed="rId2" cstate="email">
+            <a:extLst>
+              <a:ext uri="{28A0092B-C50C-407E-A947-70E740481C1C}">
+                <a14:useLocalDpi xmlns:a14="http://schemas.microsoft.com/office/drawing/2010/main"/>
+              </a:ext>
+            </a:extLst>
+          </a:blip>
+          <a:srcRect/>
+          <a:stretch>
+            <a:fillRect/>
+          </a:stretch>
+        </p:blipFill>
+        <p:spPr bwMode="auto">
+          <a:xfrm>
+            <a:off x="147120" y="2500930"/>
+            <a:ext cx="4087091" cy="4087091"/>
+          </a:xfrm>
+          <a:prstGeom prst="rect">
+            <a:avLst/>
+          </a:prstGeom>
+          <a:noFill/>
+          <a:extLst>
+            <a:ext uri="{909E8E84-426E-40DD-AFC4-6F175D3DCCD1}">
+              <a14:hiddenFill xmlns:a14="http://schemas.microsoft.com/office/drawing/2010/main">
+                <a:solidFill>
+                  <a:srgbClr val="FFFFFF"/>
+                </a:solidFill>
+              </a14:hiddenFill>
+            </a:ext>
+          </a:extLst>
+        </p:spPr>
+      </p:pic>
+      <p:pic>
+        <p:nvPicPr>
+          <p:cNvPr id="1028" name="Picture 4" descr="John Deere AR87167 Engine Block Coolant Heater Kit 1025R 110 2210 2305 Gator">
+            <a:extLst>
+              <a:ext uri="{FF2B5EF4-FFF2-40B4-BE49-F238E27FC236}">
+                <a16:creationId xmlns:a16="http://schemas.microsoft.com/office/drawing/2014/main" id="{F97D0BC0-FBA4-1B8E-A5A3-C35BC59A28F2}"/>
+              </a:ext>
+            </a:extLst>
+          </p:cNvPr>
+          <p:cNvPicPr>
+            <a:picLocks noChangeAspect="1" noChangeArrowheads="1"/>
+          </p:cNvPicPr>
+          <p:nvPr/>
+        </p:nvPicPr>
+        <p:blipFill>
+          <a:blip r:embed="rId3" cstate="email">
+            <a:extLst>
+              <a:ext uri="{28A0092B-C50C-407E-A947-70E740481C1C}">
+                <a14:useLocalDpi xmlns:a14="http://schemas.microsoft.com/office/drawing/2010/main"/>
+              </a:ext>
+            </a:extLst>
+          </a:blip>
+          <a:srcRect/>
+          <a:stretch>
+            <a:fillRect/>
+          </a:stretch>
+        </p:blipFill>
+        <p:spPr bwMode="auto">
+          <a:xfrm>
+            <a:off x="147120" y="770857"/>
+            <a:ext cx="1482436" cy="1482436"/>
+          </a:xfrm>
+          <a:prstGeom prst="rect">
+            <a:avLst/>
+          </a:prstGeom>
+          <a:noFill/>
+          <a:extLst>
+            <a:ext uri="{909E8E84-426E-40DD-AFC4-6F175D3DCCD1}">
+              <a14:hiddenFill xmlns:a14="http://schemas.microsoft.com/office/drawing/2010/main">
+                <a:solidFill>
+                  <a:srgbClr val="FFFFFF"/>
+                </a:solidFill>
+              </a14:hiddenFill>
+            </a:ext>
+          </a:extLst>
+        </p:spPr>
+      </p:pic>
+      <p:sp>
+        <p:nvSpPr>
+          <p:cNvPr id="4" name="TextBox 3">
+            <a:extLst>
+              <a:ext uri="{FF2B5EF4-FFF2-40B4-BE49-F238E27FC236}">
+                <a16:creationId xmlns:a16="http://schemas.microsoft.com/office/drawing/2014/main" id="{4248EAA2-37A7-21EF-BFB2-53447F6C3A8C}"/>
+              </a:ext>
+            </a:extLst>
+          </p:cNvPr>
+          <p:cNvSpPr txBox="1"/>
+          <p:nvPr/>
+        </p:nvSpPr>
+        <p:spPr>
+          <a:xfrm>
+            <a:off x="1629556" y="808399"/>
+            <a:ext cx="3164117" cy="1200329"/>
+          </a:xfrm>
+          <a:prstGeom prst="rect">
+            <a:avLst/>
+          </a:prstGeom>
+          <a:noFill/>
+        </p:spPr>
+        <p:txBody>
+          <a:bodyPr wrap="square" rtlCol="0">
+            <a:spAutoFit/>
+          </a:bodyPr>
+          <a:lstStyle/>
+          <a:p>
+            <a:r>
+              <a:rPr lang="en-US" dirty="0"/>
+              <a:t>The warmth spreads through the entire engine via natural convection of the coolant. It takes 1-2 hours </a:t>
+            </a:r>
+            <a:endParaRPr lang="en-US" sz="1400" dirty="0"/>
+          </a:p>
+        </p:txBody>
+      </p:sp>
+    </p:spTree>
+    <p:extLst>
+      <p:ext uri="{BB962C8B-B14F-4D97-AF65-F5344CB8AC3E}">
+        <p14:creationId xmlns:p14="http://schemas.microsoft.com/office/powerpoint/2010/main" val="1288276014"/>
+      </p:ext>
+    </p:extLst>
+  </p:cSld>
+  <p:clrMapOvr>
+    <a:masterClrMapping/>
+  </p:clrMapOvr>
+</p:sld>
+</file>
+
+<file path=ppt/slides/slide8.xml><?xml version="1.0" encoding="utf-8"?>
+<p:sld xmlns:a="http://schemas.openxmlformats.org/drawingml/2006/main" xmlns:r="http://schemas.openxmlformats.org/officeDocument/2006/relationships" xmlns:p="http://schemas.openxmlformats.org/presentationml/2006/main">
+  <p:cSld>
+    <p:spTree>
+      <p:nvGrpSpPr>
+        <p:cNvPr id="1" name=""/>
+        <p:cNvGrpSpPr/>
+        <p:nvPr/>
+      </p:nvGrpSpPr>
+      <p:grpSpPr>
+        <a:xfrm>
+          <a:off x="0" y="0"/>
+          <a:ext cx="0" cy="0"/>
+          <a:chOff x="0" y="0"/>
+          <a:chExt cx="0" cy="0"/>
+        </a:xfrm>
+      </p:grpSpPr>
+      <p:sp>
+        <p:nvSpPr>
+          <p:cNvPr id="2" name="TextBox 1">
+            <a:extLst>
+              <a:ext uri="{FF2B5EF4-FFF2-40B4-BE49-F238E27FC236}">
+                <a16:creationId xmlns:a16="http://schemas.microsoft.com/office/drawing/2014/main" id="{775BBD15-AEC2-1815-2347-A5BB8F308263}"/>
+              </a:ext>
+            </a:extLst>
+          </p:cNvPr>
+          <p:cNvSpPr txBox="1"/>
+          <p:nvPr/>
+        </p:nvSpPr>
+        <p:spPr>
+          <a:xfrm>
+            <a:off x="-1" y="0"/>
+            <a:ext cx="6096001" cy="523220"/>
+          </a:xfrm>
+          <a:prstGeom prst="rect">
+            <a:avLst/>
+          </a:prstGeom>
+          <a:noFill/>
+        </p:spPr>
+        <p:txBody>
+          <a:bodyPr wrap="square" rtlCol="0">
+            <a:spAutoFit/>
+          </a:bodyPr>
+          <a:lstStyle/>
+          <a:p>
+            <a:r>
+              <a:rPr lang="en-US" sz="2800" b="1" dirty="0"/>
               <a:t>John Deere X758 – Fuel Filter Heater</a:t>
             </a:r>
           </a:p>
@@ -7512,7 +8530,7 @@
 </p:sld>
 </file>
 
-<file path=ppt/slides/slide8.xml><?xml version="1.0" encoding="utf-8"?>
+<file path=ppt/slides/slide9.xml><?xml version="1.0" encoding="utf-8"?>
 <p:sld xmlns:a="http://schemas.openxmlformats.org/drawingml/2006/main" xmlns:r="http://schemas.openxmlformats.org/officeDocument/2006/relationships" xmlns:p="http://schemas.openxmlformats.org/presentationml/2006/main">
   <p:cSld>
     <p:spTree>
@@ -8055,400 +9073,6 @@
     <p:extLst>
       <p:ext uri="{BB962C8B-B14F-4D97-AF65-F5344CB8AC3E}">
         <p14:creationId xmlns:p14="http://schemas.microsoft.com/office/powerpoint/2010/main" val="179644997"/>
-      </p:ext>
-    </p:extLst>
-  </p:cSld>
-  <p:clrMapOvr>
-    <a:masterClrMapping/>
-  </p:clrMapOvr>
-</p:sld>
-</file>
-
-<file path=ppt/slides/slide9.xml><?xml version="1.0" encoding="utf-8"?>
-<p:sld xmlns:a="http://schemas.openxmlformats.org/drawingml/2006/main" xmlns:r="http://schemas.openxmlformats.org/officeDocument/2006/relationships" xmlns:p="http://schemas.openxmlformats.org/presentationml/2006/main">
-  <p:cSld>
-    <p:spTree>
-      <p:nvGrpSpPr>
-        <p:cNvPr id="1" name="">
-          <a:extLst>
-            <a:ext uri="{FF2B5EF4-FFF2-40B4-BE49-F238E27FC236}">
-              <a16:creationId xmlns:a16="http://schemas.microsoft.com/office/drawing/2014/main" id="{2D16B695-A4C0-BC53-15EF-81548A04F130}"/>
-            </a:ext>
-          </a:extLst>
-        </p:cNvPr>
-        <p:cNvGrpSpPr/>
-        <p:nvPr/>
-      </p:nvGrpSpPr>
-      <p:grpSpPr>
-        <a:xfrm>
-          <a:off x="0" y="0"/>
-          <a:ext cx="0" cy="0"/>
-          <a:chOff x="0" y="0"/>
-          <a:chExt cx="0" cy="0"/>
-        </a:xfrm>
-      </p:grpSpPr>
-      <p:sp>
-        <p:nvSpPr>
-          <p:cNvPr id="2" name="TextBox 1">
-            <a:extLst>
-              <a:ext uri="{FF2B5EF4-FFF2-40B4-BE49-F238E27FC236}">
-                <a16:creationId xmlns:a16="http://schemas.microsoft.com/office/drawing/2014/main" id="{A5F44891-376B-DAA0-385F-BE3EBBF84680}"/>
-              </a:ext>
-            </a:extLst>
-          </p:cNvPr>
-          <p:cNvSpPr txBox="1"/>
-          <p:nvPr/>
-        </p:nvSpPr>
-        <p:spPr>
-          <a:xfrm>
-            <a:off x="-1" y="0"/>
-            <a:ext cx="4431253" cy="523220"/>
-          </a:xfrm>
-          <a:prstGeom prst="rect">
-            <a:avLst/>
-          </a:prstGeom>
-          <a:noFill/>
-        </p:spPr>
-        <p:txBody>
-          <a:bodyPr wrap="square" rtlCol="0">
-            <a:spAutoFit/>
-          </a:bodyPr>
-          <a:lstStyle/>
-          <a:p>
-            <a:r>
-              <a:rPr lang="en-US" sz="2800" b="1" dirty="0"/>
-              <a:t>Dual Tires (</a:t>
-            </a:r>
-            <a:r>
-              <a:rPr lang="en-US" sz="2800" b="1" dirty="0" err="1"/>
-              <a:t>Dualies</a:t>
-            </a:r>
-            <a:r>
-              <a:rPr lang="en-US" sz="2800" b="1" dirty="0"/>
-              <a:t>)</a:t>
-            </a:r>
-          </a:p>
-        </p:txBody>
-      </p:sp>
-      <p:sp>
-        <p:nvSpPr>
-          <p:cNvPr id="8" name="TextBox 7">
-            <a:extLst>
-              <a:ext uri="{FF2B5EF4-FFF2-40B4-BE49-F238E27FC236}">
-                <a16:creationId xmlns:a16="http://schemas.microsoft.com/office/drawing/2014/main" id="{E5EAD597-53B0-1A66-BAB2-6EA6A21F38F7}"/>
-              </a:ext>
-            </a:extLst>
-          </p:cNvPr>
-          <p:cNvSpPr txBox="1"/>
-          <p:nvPr/>
-        </p:nvSpPr>
-        <p:spPr>
-          <a:xfrm>
-            <a:off x="164052" y="807468"/>
-            <a:ext cx="5506736" cy="3754874"/>
-          </a:xfrm>
-          <a:prstGeom prst="rect">
-            <a:avLst/>
-          </a:prstGeom>
-          <a:noFill/>
-        </p:spPr>
-        <p:txBody>
-          <a:bodyPr wrap="square" rtlCol="0">
-            <a:spAutoFit/>
-          </a:bodyPr>
-          <a:lstStyle/>
-          <a:p>
-            <a:r>
-              <a:rPr lang="en-US" sz="1400" dirty="0"/>
-              <a:t>Can potentially help in muddy conditions</a:t>
-            </a:r>
-          </a:p>
-          <a:p>
-            <a:pPr marL="285750" indent="-285750">
-              <a:buFont typeface="Arial" panose="020B0604020202020204" pitchFamily="34" charset="0"/>
-              <a:buChar char="•"/>
-            </a:pPr>
-            <a:r>
-              <a:rPr lang="en-US" sz="1400" dirty="0"/>
-              <a:t>Distribute the weight over a larger surface area, which can reduce ground pressure, thus preventing the tractor from sinking into soft or muddy ground</a:t>
-            </a:r>
-          </a:p>
-          <a:p>
-            <a:pPr marL="285750" indent="-285750">
-              <a:buFont typeface="Arial" panose="020B0604020202020204" pitchFamily="34" charset="0"/>
-              <a:buChar char="•"/>
-            </a:pPr>
-            <a:r>
-              <a:rPr lang="en-US" sz="1400" dirty="0"/>
-              <a:t>Increase traction since there are now twice the number of lugs (the raised patterns on a tire) making contact with the ground. </a:t>
-            </a:r>
-          </a:p>
-          <a:p>
-            <a:endParaRPr lang="en-US" sz="1400" dirty="0"/>
-          </a:p>
-          <a:p>
-            <a:r>
-              <a:rPr lang="en-US" sz="1400" dirty="0"/>
-              <a:t>Downsides:</a:t>
-            </a:r>
-          </a:p>
-          <a:p>
-            <a:pPr marL="285750" indent="-285750">
-              <a:buFont typeface="Arial" panose="020B0604020202020204" pitchFamily="34" charset="0"/>
-              <a:buChar char="•"/>
-            </a:pPr>
-            <a:r>
-              <a:rPr lang="en-US" sz="1400" dirty="0"/>
-              <a:t>Added Weight</a:t>
-            </a:r>
-          </a:p>
-          <a:p>
-            <a:pPr marL="285750" indent="-285750">
-              <a:buFont typeface="Arial" panose="020B0604020202020204" pitchFamily="34" charset="0"/>
-              <a:buChar char="•"/>
-            </a:pPr>
-            <a:r>
-              <a:rPr lang="en-US" sz="1400" dirty="0"/>
-              <a:t>Turning Resistance</a:t>
-            </a:r>
-          </a:p>
-          <a:p>
-            <a:pPr marL="285750" indent="-285750">
-              <a:buFont typeface="Arial" panose="020B0604020202020204" pitchFamily="34" charset="0"/>
-              <a:buChar char="•"/>
-            </a:pPr>
-            <a:r>
-              <a:rPr lang="en-US" sz="1400" dirty="0"/>
-              <a:t>Cost and Installation</a:t>
-            </a:r>
-          </a:p>
-          <a:p>
-            <a:pPr marL="285750" indent="-285750">
-              <a:buFont typeface="Arial" panose="020B0604020202020204" pitchFamily="34" charset="0"/>
-              <a:buChar char="•"/>
-            </a:pPr>
-            <a:r>
-              <a:rPr lang="en-US" sz="1400" dirty="0"/>
-              <a:t>Wider Profile (harder to navigate)</a:t>
-            </a:r>
-          </a:p>
-          <a:p>
-            <a:pPr marL="285750" indent="-285750">
-              <a:buFont typeface="Arial" panose="020B0604020202020204" pitchFamily="34" charset="0"/>
-              <a:buChar char="•"/>
-            </a:pPr>
-            <a:r>
-              <a:rPr lang="en-US" sz="1400" dirty="0"/>
-              <a:t>Soil Compaction</a:t>
-            </a:r>
-          </a:p>
-          <a:p>
-            <a:pPr marL="285750" indent="-285750">
-              <a:buFont typeface="Arial" panose="020B0604020202020204" pitchFamily="34" charset="0"/>
-              <a:buChar char="•"/>
-            </a:pPr>
-            <a:endParaRPr lang="en-US" sz="1400" dirty="0"/>
-          </a:p>
-          <a:p>
-            <a:r>
-              <a:rPr lang="en-US" sz="1400" dirty="0"/>
-              <a:t>Other solutions to consider: </a:t>
-            </a:r>
-          </a:p>
-          <a:p>
-            <a:pPr marL="285750" indent="-285750">
-              <a:buFont typeface="Arial" panose="020B0604020202020204" pitchFamily="34" charset="0"/>
-              <a:buChar char="•"/>
-            </a:pPr>
-            <a:r>
-              <a:rPr lang="en-US" sz="1400" dirty="0"/>
-              <a:t>tire chains</a:t>
-            </a:r>
-          </a:p>
-          <a:p>
-            <a:pPr marL="285750" indent="-285750">
-              <a:buFont typeface="Arial" panose="020B0604020202020204" pitchFamily="34" charset="0"/>
-              <a:buChar char="•"/>
-            </a:pPr>
-            <a:r>
-              <a:rPr lang="en-US" sz="1400" dirty="0"/>
-              <a:t>wider single tires</a:t>
-            </a:r>
-          </a:p>
-        </p:txBody>
-      </p:sp>
-      <p:pic>
-        <p:nvPicPr>
-          <p:cNvPr id="1026" name="Picture 2" descr="How to Put Duals On a Mower - A Better Way">
-            <a:extLst>
-              <a:ext uri="{FF2B5EF4-FFF2-40B4-BE49-F238E27FC236}">
-                <a16:creationId xmlns:a16="http://schemas.microsoft.com/office/drawing/2014/main" id="{71D526FD-5301-0D68-CD3C-BFABB30F8E12}"/>
-              </a:ext>
-            </a:extLst>
-          </p:cNvPr>
-          <p:cNvPicPr>
-            <a:picLocks noChangeAspect="1" noChangeArrowheads="1"/>
-          </p:cNvPicPr>
-          <p:nvPr/>
-        </p:nvPicPr>
-        <p:blipFill>
-          <a:blip r:embed="rId2" cstate="email">
-            <a:extLst>
-              <a:ext uri="{28A0092B-C50C-407E-A947-70E740481C1C}">
-                <a14:useLocalDpi xmlns:a14="http://schemas.microsoft.com/office/drawing/2010/main"/>
-              </a:ext>
-            </a:extLst>
-          </a:blip>
-          <a:srcRect/>
-          <a:stretch>
-            <a:fillRect/>
-          </a:stretch>
-        </p:blipFill>
-        <p:spPr bwMode="auto">
-          <a:xfrm>
-            <a:off x="7760748" y="228600"/>
-            <a:ext cx="4267200" cy="3200400"/>
-          </a:xfrm>
-          <a:prstGeom prst="rect">
-            <a:avLst/>
-          </a:prstGeom>
-          <a:noFill/>
-          <a:extLst>
-            <a:ext uri="{909E8E84-426E-40DD-AFC4-6F175D3DCCD1}">
-              <a14:hiddenFill xmlns:a14="http://schemas.microsoft.com/office/drawing/2010/main">
-                <a:solidFill>
-                  <a:srgbClr val="FFFFFF"/>
-                </a:solidFill>
-              </a14:hiddenFill>
-            </a:ext>
-          </a:extLst>
-        </p:spPr>
-      </p:pic>
-      <p:sp>
-        <p:nvSpPr>
-          <p:cNvPr id="9" name="TextBox 8">
-            <a:extLst>
-              <a:ext uri="{FF2B5EF4-FFF2-40B4-BE49-F238E27FC236}">
-                <a16:creationId xmlns:a16="http://schemas.microsoft.com/office/drawing/2014/main" id="{FA27FBF3-5F1A-3128-93B1-65E9E5627FFA}"/>
-              </a:ext>
-            </a:extLst>
-          </p:cNvPr>
-          <p:cNvSpPr txBox="1"/>
-          <p:nvPr/>
-        </p:nvSpPr>
-        <p:spPr>
-          <a:xfrm>
-            <a:off x="3048000" y="76944"/>
-            <a:ext cx="3810000" cy="307777"/>
-          </a:xfrm>
-          <a:prstGeom prst="rect">
-            <a:avLst/>
-          </a:prstGeom>
-          <a:noFill/>
-        </p:spPr>
-        <p:txBody>
-          <a:bodyPr wrap="square" rtlCol="0">
-            <a:spAutoFit/>
-          </a:bodyPr>
-          <a:lstStyle/>
-          <a:p>
-            <a:r>
-              <a:rPr lang="en-US" sz="1400" dirty="0">
-                <a:hlinkClick r:id="rId3"/>
-              </a:rPr>
-              <a:t>https://</a:t>
-            </a:r>
-            <a:r>
-              <a:rPr lang="en-US" sz="1400" dirty="0" err="1">
-                <a:hlinkClick r:id="rId3"/>
-              </a:rPr>
-              <a:t>www.youtube.com</a:t>
-            </a:r>
-            <a:r>
-              <a:rPr lang="en-US" sz="1400" dirty="0">
-                <a:hlinkClick r:id="rId3"/>
-              </a:rPr>
-              <a:t>/</a:t>
-            </a:r>
-            <a:r>
-              <a:rPr lang="en-US" sz="1400" dirty="0" err="1">
-                <a:hlinkClick r:id="rId3"/>
-              </a:rPr>
-              <a:t>watch?v</a:t>
-            </a:r>
-            <a:r>
-              <a:rPr lang="en-US" sz="1400" dirty="0">
-                <a:hlinkClick r:id="rId3"/>
-              </a:rPr>
-              <a:t>=</a:t>
-            </a:r>
-            <a:r>
-              <a:rPr lang="en-US" sz="1400" dirty="0" err="1">
-                <a:hlinkClick r:id="rId3"/>
-              </a:rPr>
-              <a:t>oDdR</a:t>
-            </a:r>
-            <a:r>
-              <a:rPr lang="en-US" sz="1400" dirty="0">
-                <a:hlinkClick r:id="rId3"/>
-              </a:rPr>
-              <a:t>-KLIF-Q</a:t>
-            </a:r>
-            <a:endParaRPr lang="en-US" sz="1400" dirty="0"/>
-          </a:p>
-        </p:txBody>
-      </p:sp>
-      <p:pic>
-        <p:nvPicPr>
-          <p:cNvPr id="1028" name="Picture 4" descr="DUAL TIRES ON A 1025r? Carlisle Versa Turfs + Found A STEAL! - YouTube">
-            <a:extLst>
-              <a:ext uri="{FF2B5EF4-FFF2-40B4-BE49-F238E27FC236}">
-                <a16:creationId xmlns:a16="http://schemas.microsoft.com/office/drawing/2014/main" id="{EDAA7AC9-D55C-2BE4-8784-E24DB49BAEE4}"/>
-              </a:ext>
-            </a:extLst>
-          </p:cNvPr>
-          <p:cNvPicPr>
-            <a:picLocks noChangeAspect="1" noChangeArrowheads="1"/>
-          </p:cNvPicPr>
-          <p:nvPr/>
-        </p:nvPicPr>
-        <p:blipFill>
-          <a:blip r:embed="rId4">
-            <a:extLst>
-              <a:ext uri="{28A0092B-C50C-407E-A947-70E740481C1C}">
-                <a14:useLocalDpi xmlns:a14="http://schemas.microsoft.com/office/drawing/2010/main"/>
-              </a:ext>
-            </a:extLst>
-          </a:blip>
-          <a:srcRect/>
-          <a:stretch>
-            <a:fillRect/>
-          </a:stretch>
-        </p:blipFill>
-        <p:spPr bwMode="auto">
-          <a:xfrm>
-            <a:off x="7760748" y="3594652"/>
-            <a:ext cx="3810000" cy="2133600"/>
-          </a:xfrm>
-          <a:prstGeom prst="rect">
-            <a:avLst/>
-          </a:prstGeom>
-          <a:noFill/>
-          <a:extLst>
-            <a:ext uri="{909E8E84-426E-40DD-AFC4-6F175D3DCCD1}">
-              <a14:hiddenFill xmlns:a14="http://schemas.microsoft.com/office/drawing/2010/main">
-                <a:solidFill>
-                  <a:srgbClr val="FFFFFF"/>
-                </a:solidFill>
-              </a14:hiddenFill>
-            </a:ext>
-          </a:extLst>
-        </p:spPr>
-      </p:pic>
-    </p:spTree>
-    <p:extLst>
-      <p:ext uri="{BB962C8B-B14F-4D97-AF65-F5344CB8AC3E}">
-        <p14:creationId xmlns:p14="http://schemas.microsoft.com/office/powerpoint/2010/main" val="1009907999"/>
       </p:ext>
     </p:extLst>
   </p:cSld>

--- a/tractor_jd_1025r_X758.pptx
+++ b/tractor_jd_1025r_X758.pptx
@@ -14,8 +14,9 @@
     <p:sldId id="261" r:id="rId8"/>
     <p:sldId id="268" r:id="rId9"/>
     <p:sldId id="267" r:id="rId10"/>
-    <p:sldId id="265" r:id="rId11"/>
-    <p:sldId id="263" r:id="rId12"/>
+    <p:sldId id="271" r:id="rId11"/>
+    <p:sldId id="265" r:id="rId12"/>
+    <p:sldId id="263" r:id="rId13"/>
   </p:sldIdLst>
   <p:sldSz cx="12192000" cy="6858000"/>
   <p:notesSz cx="6858000" cy="9144000"/>
@@ -268,7 +269,7 @@
           <a:lstStyle/>
           <a:p>
             <a:fld id="{16286276-9013-2A43-82D1-BA4685C95117}" type="datetimeFigureOut">
-              <a:t>4/19/26</a:t>
+              <a:t>5/3/26</a:t>
             </a:fld>
             <a:endParaRPr lang="en-US"/>
           </a:p>
@@ -464,7 +465,7 @@
           <a:lstStyle/>
           <a:p>
             <a:fld id="{16286276-9013-2A43-82D1-BA4685C95117}" type="datetimeFigureOut">
-              <a:t>4/19/26</a:t>
+              <a:t>5/3/26</a:t>
             </a:fld>
             <a:endParaRPr lang="en-US"/>
           </a:p>
@@ -670,7 +671,7 @@
           <a:lstStyle/>
           <a:p>
             <a:fld id="{16286276-9013-2A43-82D1-BA4685C95117}" type="datetimeFigureOut">
-              <a:t>4/19/26</a:t>
+              <a:t>5/3/26</a:t>
             </a:fld>
             <a:endParaRPr lang="en-US"/>
           </a:p>
@@ -866,7 +867,7 @@
           <a:lstStyle/>
           <a:p>
             <a:fld id="{16286276-9013-2A43-82D1-BA4685C95117}" type="datetimeFigureOut">
-              <a:t>4/19/26</a:t>
+              <a:t>5/3/26</a:t>
             </a:fld>
             <a:endParaRPr lang="en-US"/>
           </a:p>
@@ -1139,7 +1140,7 @@
           <a:lstStyle/>
           <a:p>
             <a:fld id="{16286276-9013-2A43-82D1-BA4685C95117}" type="datetimeFigureOut">
-              <a:t>4/19/26</a:t>
+              <a:t>5/3/26</a:t>
             </a:fld>
             <a:endParaRPr lang="en-US"/>
           </a:p>
@@ -1402,7 +1403,7 @@
           <a:lstStyle/>
           <a:p>
             <a:fld id="{16286276-9013-2A43-82D1-BA4685C95117}" type="datetimeFigureOut">
-              <a:t>4/19/26</a:t>
+              <a:t>5/3/26</a:t>
             </a:fld>
             <a:endParaRPr lang="en-US"/>
           </a:p>
@@ -1812,7 +1813,7 @@
           <a:lstStyle/>
           <a:p>
             <a:fld id="{16286276-9013-2A43-82D1-BA4685C95117}" type="datetimeFigureOut">
-              <a:t>4/19/26</a:t>
+              <a:t>5/3/26</a:t>
             </a:fld>
             <a:endParaRPr lang="en-US"/>
           </a:p>
@@ -1951,7 +1952,7 @@
           <a:lstStyle/>
           <a:p>
             <a:fld id="{16286276-9013-2A43-82D1-BA4685C95117}" type="datetimeFigureOut">
-              <a:t>4/19/26</a:t>
+              <a:t>5/3/26</a:t>
             </a:fld>
             <a:endParaRPr lang="en-US"/>
           </a:p>
@@ -2062,7 +2063,7 @@
           <a:lstStyle/>
           <a:p>
             <a:fld id="{16286276-9013-2A43-82D1-BA4685C95117}" type="datetimeFigureOut">
-              <a:t>4/19/26</a:t>
+              <a:t>5/3/26</a:t>
             </a:fld>
             <a:endParaRPr lang="en-US"/>
           </a:p>
@@ -2371,7 +2372,7 @@
           <a:lstStyle/>
           <a:p>
             <a:fld id="{16286276-9013-2A43-82D1-BA4685C95117}" type="datetimeFigureOut">
-              <a:t>4/19/26</a:t>
+              <a:t>5/3/26</a:t>
             </a:fld>
             <a:endParaRPr lang="en-US"/>
           </a:p>
@@ -2657,7 +2658,7 @@
           <a:lstStyle/>
           <a:p>
             <a:fld id="{16286276-9013-2A43-82D1-BA4685C95117}" type="datetimeFigureOut">
-              <a:t>4/19/26</a:t>
+              <a:t>5/3/26</a:t>
             </a:fld>
             <a:endParaRPr lang="en-US"/>
           </a:p>
@@ -2896,7 +2897,7 @@
           </a:lstStyle>
           <a:p>
             <a:fld id="{16286276-9013-2A43-82D1-BA4685C95117}" type="datetimeFigureOut">
-              <a:t>4/19/26</a:t>
+              <a:t>5/3/26</a:t>
             </a:fld>
             <a:endParaRPr lang="en-US"/>
           </a:p>
@@ -4125,6 +4126,303 @@
           <a:p>
             <a:r>
               <a:rPr lang="en-US" sz="2800" b="1" dirty="0"/>
+              <a:t>Bagger = Hopper</a:t>
+            </a:r>
+          </a:p>
+        </p:txBody>
+      </p:sp>
+      <p:sp>
+        <p:nvSpPr>
+          <p:cNvPr id="8" name="TextBox 7">
+            <a:extLst>
+              <a:ext uri="{FF2B5EF4-FFF2-40B4-BE49-F238E27FC236}">
+                <a16:creationId xmlns:a16="http://schemas.microsoft.com/office/drawing/2014/main" id="{E5EAD597-53B0-1A66-BAB2-6EA6A21F38F7}"/>
+              </a:ext>
+            </a:extLst>
+          </p:cNvPr>
+          <p:cNvSpPr txBox="1"/>
+          <p:nvPr/>
+        </p:nvSpPr>
+        <p:spPr>
+          <a:xfrm>
+            <a:off x="164052" y="807468"/>
+            <a:ext cx="5506736" cy="2192908"/>
+          </a:xfrm>
+          <a:prstGeom prst="rect">
+            <a:avLst/>
+          </a:prstGeom>
+          <a:noFill/>
+        </p:spPr>
+        <p:txBody>
+          <a:bodyPr wrap="square" rtlCol="0">
+            <a:spAutoFit/>
+          </a:bodyPr>
+          <a:lstStyle/>
+          <a:p>
+            <a:r>
+              <a:rPr lang="en-US" sz="1400" dirty="0">
+                <a:latin typeface="Calibri" panose="020F0502020204030204" pitchFamily="34" charset="0"/>
+                <a:cs typeface="Calibri" panose="020F0502020204030204" pitchFamily="34" charset="0"/>
+              </a:rPr>
+              <a:t>I have a bagger with 2 bags.</a:t>
+            </a:r>
+          </a:p>
+          <a:p>
+            <a:r>
+              <a:rPr lang="en-US" sz="1400" dirty="0">
+                <a:latin typeface="Calibri" panose="020F0502020204030204" pitchFamily="34" charset="0"/>
+                <a:cs typeface="Calibri" panose="020F0502020204030204" pitchFamily="34" charset="0"/>
+              </a:rPr>
+              <a:t>It has an annoying problem.</a:t>
+            </a:r>
+          </a:p>
+          <a:p>
+            <a:r>
+              <a:rPr lang="en-US" sz="1400" dirty="0">
+                <a:latin typeface="Calibri" panose="020F0502020204030204" pitchFamily="34" charset="0"/>
+                <a:cs typeface="Calibri" panose="020F0502020204030204" pitchFamily="34" charset="0"/>
+              </a:rPr>
+              <a:t>It fills the left bag first &amp; only the over-flow goes to the right bag. </a:t>
+            </a:r>
+          </a:p>
+          <a:p>
+            <a:r>
+              <a:rPr lang="en-US" sz="1400" dirty="0">
+                <a:latin typeface="Calibri" panose="020F0502020204030204" pitchFamily="34" charset="0"/>
+                <a:cs typeface="Calibri" panose="020F0502020204030204" pitchFamily="34" charset="0"/>
+              </a:rPr>
+              <a:t>This makes the left bag  heavy while right bag is empty</a:t>
+            </a:r>
+          </a:p>
+          <a:p>
+            <a:endParaRPr lang="en-US" sz="1400" dirty="0">
+              <a:latin typeface="Calibri" panose="020F0502020204030204" pitchFamily="34" charset="0"/>
+              <a:cs typeface="Calibri" panose="020F0502020204030204" pitchFamily="34" charset="0"/>
+            </a:endParaRPr>
+          </a:p>
+          <a:p>
+            <a:r>
+              <a:rPr lang="en-US" sz="1400" dirty="0">
+                <a:latin typeface="Calibri" panose="020F0502020204030204" pitchFamily="34" charset="0"/>
+                <a:cs typeface="Calibri" panose="020F0502020204030204" pitchFamily="34" charset="0"/>
+              </a:rPr>
+              <a:t>Easy fix – block part of the chute opening as shown.</a:t>
+            </a:r>
+          </a:p>
+          <a:p>
+            <a:r>
+              <a:rPr lang="en-US" sz="1400" dirty="0">
+                <a:latin typeface="Calibri" panose="020F0502020204030204" pitchFamily="34" charset="0"/>
+                <a:cs typeface="Calibri" panose="020F0502020204030204" pitchFamily="34" charset="0"/>
+              </a:rPr>
+              <a:t>Two layers of duct tape facing each other, nothing is sticking to them.</a:t>
+            </a:r>
+          </a:p>
+          <a:p>
+            <a:endParaRPr lang="en-US" sz="1400" dirty="0">
+              <a:latin typeface="Calibri" panose="020F0502020204030204" pitchFamily="34" charset="0"/>
+              <a:cs typeface="Calibri" panose="020F0502020204030204" pitchFamily="34" charset="0"/>
+            </a:endParaRPr>
+          </a:p>
+          <a:p>
+            <a:r>
+              <a:rPr lang="en-US" sz="1400" dirty="0">
+                <a:latin typeface="Calibri" panose="020F0502020204030204" pitchFamily="34" charset="0"/>
+                <a:cs typeface="Calibri" panose="020F0502020204030204" pitchFamily="34" charset="0"/>
+              </a:rPr>
+              <a:t>The 2 bags now got filled up at similar speed. </a:t>
+            </a:r>
+          </a:p>
+          <a:p>
+            <a:r>
+              <a:rPr lang="en-US" sz="1050" dirty="0">
+                <a:latin typeface="Calibri" panose="020F0502020204030204" pitchFamily="34" charset="0"/>
+                <a:cs typeface="Calibri" panose="020F0502020204030204" pitchFamily="34" charset="0"/>
+                <a:hlinkClick r:id="rId2"/>
+              </a:rPr>
+              <a:t>https://www.facebook.com/groups/781254733349946/posts/803478744460878/</a:t>
+            </a:r>
+            <a:endParaRPr lang="en-US" sz="1050" dirty="0">
+              <a:latin typeface="Calibri" panose="020F0502020204030204" pitchFamily="34" charset="0"/>
+              <a:cs typeface="Calibri" panose="020F0502020204030204" pitchFamily="34" charset="0"/>
+            </a:endParaRPr>
+          </a:p>
+        </p:txBody>
+      </p:sp>
+      <p:pic>
+        <p:nvPicPr>
+          <p:cNvPr id="3" name="Picture 2">
+            <a:extLst>
+              <a:ext uri="{FF2B5EF4-FFF2-40B4-BE49-F238E27FC236}">
+                <a16:creationId xmlns:a16="http://schemas.microsoft.com/office/drawing/2014/main" id="{FAA518FD-7EE2-032F-1F24-036ACB62B912}"/>
+              </a:ext>
+            </a:extLst>
+          </p:cNvPr>
+          <p:cNvPicPr>
+            <a:picLocks noChangeAspect="1"/>
+          </p:cNvPicPr>
+          <p:nvPr/>
+        </p:nvPicPr>
+        <p:blipFill>
+          <a:blip r:embed="rId3" cstate="email">
+            <a:extLst>
+              <a:ext uri="{28A0092B-C50C-407E-A947-70E740481C1C}">
+                <a14:useLocalDpi xmlns:a14="http://schemas.microsoft.com/office/drawing/2010/main"/>
+              </a:ext>
+            </a:extLst>
+          </a:blip>
+          <a:stretch>
+            <a:fillRect/>
+          </a:stretch>
+        </p:blipFill>
+        <p:spPr>
+          <a:xfrm>
+            <a:off x="9492343" y="149679"/>
+            <a:ext cx="2699657" cy="2616377"/>
+          </a:xfrm>
+          <a:prstGeom prst="rect">
+            <a:avLst/>
+          </a:prstGeom>
+        </p:spPr>
+      </p:pic>
+      <p:pic>
+        <p:nvPicPr>
+          <p:cNvPr id="4" name="Picture 3">
+            <a:extLst>
+              <a:ext uri="{FF2B5EF4-FFF2-40B4-BE49-F238E27FC236}">
+                <a16:creationId xmlns:a16="http://schemas.microsoft.com/office/drawing/2014/main" id="{F37986CB-6953-B8BE-0826-E958A8437145}"/>
+              </a:ext>
+            </a:extLst>
+          </p:cNvPr>
+          <p:cNvPicPr>
+            <a:picLocks noChangeAspect="1"/>
+          </p:cNvPicPr>
+          <p:nvPr/>
+        </p:nvPicPr>
+        <p:blipFill>
+          <a:blip r:embed="rId4" cstate="email">
+            <a:extLst>
+              <a:ext uri="{28A0092B-C50C-407E-A947-70E740481C1C}">
+                <a14:useLocalDpi xmlns:a14="http://schemas.microsoft.com/office/drawing/2010/main"/>
+              </a:ext>
+            </a:extLst>
+          </a:blip>
+          <a:stretch>
+            <a:fillRect/>
+          </a:stretch>
+        </p:blipFill>
+        <p:spPr>
+          <a:xfrm>
+            <a:off x="9492342" y="3613391"/>
+            <a:ext cx="2699657" cy="2281997"/>
+          </a:xfrm>
+          <a:prstGeom prst="rect">
+            <a:avLst/>
+          </a:prstGeom>
+        </p:spPr>
+      </p:pic>
+      <p:pic>
+        <p:nvPicPr>
+          <p:cNvPr id="5" name="Picture 4">
+            <a:extLst>
+              <a:ext uri="{FF2B5EF4-FFF2-40B4-BE49-F238E27FC236}">
+                <a16:creationId xmlns:a16="http://schemas.microsoft.com/office/drawing/2014/main" id="{65079173-F2C4-DB18-BDAD-0AEF787B154F}"/>
+              </a:ext>
+            </a:extLst>
+          </p:cNvPr>
+          <p:cNvPicPr>
+            <a:picLocks noChangeAspect="1"/>
+          </p:cNvPicPr>
+          <p:nvPr/>
+        </p:nvPicPr>
+        <p:blipFill>
+          <a:blip r:embed="rId5" cstate="email">
+            <a:extLst>
+              <a:ext uri="{28A0092B-C50C-407E-A947-70E740481C1C}">
+                <a14:useLocalDpi xmlns:a14="http://schemas.microsoft.com/office/drawing/2010/main"/>
+              </a:ext>
+            </a:extLst>
+          </a:blip>
+          <a:stretch>
+            <a:fillRect/>
+          </a:stretch>
+        </p:blipFill>
+        <p:spPr>
+          <a:xfrm>
+            <a:off x="6909866" y="149679"/>
+            <a:ext cx="2374900" cy="2311400"/>
+          </a:xfrm>
+          <a:prstGeom prst="rect">
+            <a:avLst/>
+          </a:prstGeom>
+        </p:spPr>
+      </p:pic>
+    </p:spTree>
+    <p:extLst>
+      <p:ext uri="{BB962C8B-B14F-4D97-AF65-F5344CB8AC3E}">
+        <p14:creationId xmlns:p14="http://schemas.microsoft.com/office/powerpoint/2010/main" val="2863060725"/>
+      </p:ext>
+    </p:extLst>
+  </p:cSld>
+  <p:clrMapOvr>
+    <a:masterClrMapping/>
+  </p:clrMapOvr>
+</p:sld>
+</file>
+
+<file path=ppt/slides/slide11.xml><?xml version="1.0" encoding="utf-8"?>
+<p:sld xmlns:a="http://schemas.openxmlformats.org/drawingml/2006/main" xmlns:r="http://schemas.openxmlformats.org/officeDocument/2006/relationships" xmlns:p="http://schemas.openxmlformats.org/presentationml/2006/main">
+  <p:cSld>
+    <p:spTree>
+      <p:nvGrpSpPr>
+        <p:cNvPr id="1" name="">
+          <a:extLst>
+            <a:ext uri="{FF2B5EF4-FFF2-40B4-BE49-F238E27FC236}">
+              <a16:creationId xmlns:a16="http://schemas.microsoft.com/office/drawing/2014/main" id="{2D16B695-A4C0-BC53-15EF-81548A04F130}"/>
+            </a:ext>
+          </a:extLst>
+        </p:cNvPr>
+        <p:cNvGrpSpPr/>
+        <p:nvPr/>
+      </p:nvGrpSpPr>
+      <p:grpSpPr>
+        <a:xfrm>
+          <a:off x="0" y="0"/>
+          <a:ext cx="0" cy="0"/>
+          <a:chOff x="0" y="0"/>
+          <a:chExt cx="0" cy="0"/>
+        </a:xfrm>
+      </p:grpSpPr>
+      <p:sp>
+        <p:nvSpPr>
+          <p:cNvPr id="2" name="TextBox 1">
+            <a:extLst>
+              <a:ext uri="{FF2B5EF4-FFF2-40B4-BE49-F238E27FC236}">
+                <a16:creationId xmlns:a16="http://schemas.microsoft.com/office/drawing/2014/main" id="{A5F44891-376B-DAA0-385F-BE3EBBF84680}"/>
+              </a:ext>
+            </a:extLst>
+          </p:cNvPr>
+          <p:cNvSpPr txBox="1"/>
+          <p:nvPr/>
+        </p:nvSpPr>
+        <p:spPr>
+          <a:xfrm>
+            <a:off x="-1" y="0"/>
+            <a:ext cx="4431253" cy="523220"/>
+          </a:xfrm>
+          <a:prstGeom prst="rect">
+            <a:avLst/>
+          </a:prstGeom>
+          <a:noFill/>
+        </p:spPr>
+        <p:txBody>
+          <a:bodyPr wrap="square" rtlCol="0">
+            <a:spAutoFit/>
+          </a:bodyPr>
+          <a:lstStyle/>
+          <a:p>
+            <a:r>
+              <a:rPr lang="en-US" sz="2800" b="1" dirty="0"/>
               <a:t>Dual Tires (</a:t>
             </a:r>
             <a:r>
@@ -4466,7 +4764,7 @@
 </p:sld>
 </file>
 
-<file path=ppt/slides/slide11.xml><?xml version="1.0" encoding="utf-8"?>
+<file path=ppt/slides/slide12.xml><?xml version="1.0" encoding="utf-8"?>
 <p:sld xmlns:a="http://schemas.openxmlformats.org/drawingml/2006/main" xmlns:r="http://schemas.openxmlformats.org/officeDocument/2006/relationships" xmlns:p="http://schemas.openxmlformats.org/presentationml/2006/main">
   <p:cSld>
     <p:spTree>

--- a/tractor_jd_1025r_X758.pptx
+++ b/tractor_jd_1025r_X758.pptx
@@ -16,7 +16,8 @@
     <p:sldId id="267" r:id="rId10"/>
     <p:sldId id="271" r:id="rId11"/>
     <p:sldId id="265" r:id="rId12"/>
-    <p:sldId id="263" r:id="rId13"/>
+    <p:sldId id="272" r:id="rId13"/>
+    <p:sldId id="263" r:id="rId14"/>
   </p:sldIdLst>
   <p:sldSz cx="12192000" cy="6858000"/>
   <p:notesSz cx="6858000" cy="9144000"/>
@@ -269,7 +270,7 @@
           <a:lstStyle/>
           <a:p>
             <a:fld id="{16286276-9013-2A43-82D1-BA4685C95117}" type="datetimeFigureOut">
-              <a:t>5/3/26</a:t>
+              <a:t>6/8/26</a:t>
             </a:fld>
             <a:endParaRPr lang="en-US"/>
           </a:p>
@@ -465,7 +466,7 @@
           <a:lstStyle/>
           <a:p>
             <a:fld id="{16286276-9013-2A43-82D1-BA4685C95117}" type="datetimeFigureOut">
-              <a:t>5/3/26</a:t>
+              <a:t>6/8/26</a:t>
             </a:fld>
             <a:endParaRPr lang="en-US"/>
           </a:p>
@@ -671,7 +672,7 @@
           <a:lstStyle/>
           <a:p>
             <a:fld id="{16286276-9013-2A43-82D1-BA4685C95117}" type="datetimeFigureOut">
-              <a:t>5/3/26</a:t>
+              <a:t>6/8/26</a:t>
             </a:fld>
             <a:endParaRPr lang="en-US"/>
           </a:p>
@@ -867,7 +868,7 @@
           <a:lstStyle/>
           <a:p>
             <a:fld id="{16286276-9013-2A43-82D1-BA4685C95117}" type="datetimeFigureOut">
-              <a:t>5/3/26</a:t>
+              <a:t>6/8/26</a:t>
             </a:fld>
             <a:endParaRPr lang="en-US"/>
           </a:p>
@@ -1140,7 +1141,7 @@
           <a:lstStyle/>
           <a:p>
             <a:fld id="{16286276-9013-2A43-82D1-BA4685C95117}" type="datetimeFigureOut">
-              <a:t>5/3/26</a:t>
+              <a:t>6/8/26</a:t>
             </a:fld>
             <a:endParaRPr lang="en-US"/>
           </a:p>
@@ -1403,7 +1404,7 @@
           <a:lstStyle/>
           <a:p>
             <a:fld id="{16286276-9013-2A43-82D1-BA4685C95117}" type="datetimeFigureOut">
-              <a:t>5/3/26</a:t>
+              <a:t>6/8/26</a:t>
             </a:fld>
             <a:endParaRPr lang="en-US"/>
           </a:p>
@@ -1813,7 +1814,7 @@
           <a:lstStyle/>
           <a:p>
             <a:fld id="{16286276-9013-2A43-82D1-BA4685C95117}" type="datetimeFigureOut">
-              <a:t>5/3/26</a:t>
+              <a:t>6/8/26</a:t>
             </a:fld>
             <a:endParaRPr lang="en-US"/>
           </a:p>
@@ -1952,7 +1953,7 @@
           <a:lstStyle/>
           <a:p>
             <a:fld id="{16286276-9013-2A43-82D1-BA4685C95117}" type="datetimeFigureOut">
-              <a:t>5/3/26</a:t>
+              <a:t>6/8/26</a:t>
             </a:fld>
             <a:endParaRPr lang="en-US"/>
           </a:p>
@@ -2063,7 +2064,7 @@
           <a:lstStyle/>
           <a:p>
             <a:fld id="{16286276-9013-2A43-82D1-BA4685C95117}" type="datetimeFigureOut">
-              <a:t>5/3/26</a:t>
+              <a:t>6/8/26</a:t>
             </a:fld>
             <a:endParaRPr lang="en-US"/>
           </a:p>
@@ -2372,7 +2373,7 @@
           <a:lstStyle/>
           <a:p>
             <a:fld id="{16286276-9013-2A43-82D1-BA4685C95117}" type="datetimeFigureOut">
-              <a:t>5/3/26</a:t>
+              <a:t>6/8/26</a:t>
             </a:fld>
             <a:endParaRPr lang="en-US"/>
           </a:p>
@@ -2658,7 +2659,7 @@
           <a:lstStyle/>
           <a:p>
             <a:fld id="{16286276-9013-2A43-82D1-BA4685C95117}" type="datetimeFigureOut">
-              <a:t>5/3/26</a:t>
+              <a:t>6/8/26</a:t>
             </a:fld>
             <a:endParaRPr lang="en-US"/>
           </a:p>
@@ -2897,7 +2898,7 @@
           </a:lstStyle>
           <a:p>
             <a:fld id="{16286276-9013-2A43-82D1-BA4685C95117}" type="datetimeFigureOut">
-              <a:t>5/3/26</a:t>
+              <a:t>6/8/26</a:t>
             </a:fld>
             <a:endParaRPr lang="en-US"/>
           </a:p>
@@ -4769,6 +4770,378 @@
   <p:cSld>
     <p:spTree>
       <p:nvGrpSpPr>
+        <p:cNvPr id="1" name="">
+          <a:extLst>
+            <a:ext uri="{FF2B5EF4-FFF2-40B4-BE49-F238E27FC236}">
+              <a16:creationId xmlns:a16="http://schemas.microsoft.com/office/drawing/2014/main" id="{1730B338-E842-3C96-D4BC-E392AD882003}"/>
+            </a:ext>
+          </a:extLst>
+        </p:cNvPr>
+        <p:cNvGrpSpPr/>
+        <p:nvPr/>
+      </p:nvGrpSpPr>
+      <p:grpSpPr>
+        <a:xfrm>
+          <a:off x="0" y="0"/>
+          <a:ext cx="0" cy="0"/>
+          <a:chOff x="0" y="0"/>
+          <a:chExt cx="0" cy="0"/>
+        </a:xfrm>
+      </p:grpSpPr>
+      <p:sp>
+        <p:nvSpPr>
+          <p:cNvPr id="2" name="TextBox 1">
+            <a:extLst>
+              <a:ext uri="{FF2B5EF4-FFF2-40B4-BE49-F238E27FC236}">
+                <a16:creationId xmlns:a16="http://schemas.microsoft.com/office/drawing/2014/main" id="{82A62B5C-52DA-6C87-FA5A-4A7AB2C58A4F}"/>
+              </a:ext>
+            </a:extLst>
+          </p:cNvPr>
+          <p:cNvSpPr txBox="1"/>
+          <p:nvPr/>
+        </p:nvSpPr>
+        <p:spPr>
+          <a:xfrm>
+            <a:off x="-1" y="0"/>
+            <a:ext cx="4431253" cy="523220"/>
+          </a:xfrm>
+          <a:prstGeom prst="rect">
+            <a:avLst/>
+          </a:prstGeom>
+          <a:noFill/>
+        </p:spPr>
+        <p:txBody>
+          <a:bodyPr wrap="square" rtlCol="0">
+            <a:spAutoFit/>
+          </a:bodyPr>
+          <a:lstStyle/>
+          <a:p>
+            <a:r>
+              <a:rPr lang="en-US" sz="2800" b="1" dirty="0"/>
+              <a:t>JD </a:t>
+            </a:r>
+            <a:r>
+              <a:rPr lang="en-US" sz="2800" b="1" dirty="0" err="1"/>
+              <a:t>PowerFlow</a:t>
+            </a:r>
+            <a:endParaRPr lang="en-US" sz="2800" b="1" dirty="0"/>
+          </a:p>
+        </p:txBody>
+      </p:sp>
+      <p:sp>
+        <p:nvSpPr>
+          <p:cNvPr id="8" name="TextBox 7">
+            <a:extLst>
+              <a:ext uri="{FF2B5EF4-FFF2-40B4-BE49-F238E27FC236}">
+                <a16:creationId xmlns:a16="http://schemas.microsoft.com/office/drawing/2014/main" id="{236796AA-9C3C-7F2D-64E1-0C9B96CA64C5}"/>
+              </a:ext>
+            </a:extLst>
+          </p:cNvPr>
+          <p:cNvSpPr txBox="1"/>
+          <p:nvPr/>
+        </p:nvSpPr>
+        <p:spPr>
+          <a:xfrm>
+            <a:off x="164051" y="807468"/>
+            <a:ext cx="5931949" cy="4708981"/>
+          </a:xfrm>
+          <a:prstGeom prst="rect">
+            <a:avLst/>
+          </a:prstGeom>
+          <a:noFill/>
+        </p:spPr>
+        <p:txBody>
+          <a:bodyPr wrap="square" rtlCol="0">
+            <a:spAutoFit/>
+          </a:bodyPr>
+          <a:lstStyle/>
+          <a:p>
+            <a:r>
+              <a:rPr lang="en-US" sz="1200" dirty="0"/>
+              <a:t>john deere 54 inch high capacity mower deck</a:t>
+            </a:r>
+          </a:p>
+          <a:p>
+            <a:endParaRPr lang="en-US" sz="1200" dirty="0"/>
+          </a:p>
+          <a:p>
+            <a:r>
+              <a:rPr lang="en-US" sz="1200" dirty="0"/>
+              <a:t>When looking at the mowing deck from above, the spools (sheaves) rotate clockwise </a:t>
+            </a:r>
+          </a:p>
+          <a:p>
+            <a:endParaRPr lang="en-US" sz="1200" dirty="0"/>
+          </a:p>
+          <a:p>
+            <a:r>
+              <a:rPr lang="en-US" sz="1200" dirty="0"/>
+              <a:t>When looking at the </a:t>
+            </a:r>
+            <a:r>
+              <a:rPr lang="en-US" sz="1200" dirty="0" err="1"/>
+              <a:t>powerflow</a:t>
+            </a:r>
+            <a:r>
+              <a:rPr lang="en-US" sz="1200" dirty="0"/>
+              <a:t> from the right side of the tractor, </a:t>
+            </a:r>
+            <a:br>
+              <a:rPr lang="en-US" sz="1200" dirty="0"/>
+            </a:br>
+            <a:r>
+              <a:rPr lang="en-US" sz="1200" dirty="0"/>
+              <a:t>it rotates counter-clockwise (collecting grass from the bottom, moving it up – then throwing it)</a:t>
+            </a:r>
+          </a:p>
+          <a:p>
+            <a:endParaRPr lang="en-US" sz="1200" dirty="0"/>
+          </a:p>
+          <a:p>
+            <a:r>
+              <a:rPr lang="en-US" sz="1200" dirty="0"/>
+              <a:t>The belt moves as following:</a:t>
+            </a:r>
+            <a:br>
+              <a:rPr lang="en-US" sz="1200" dirty="0"/>
+            </a:br>
+            <a:r>
+              <a:rPr lang="en-US" sz="1200" dirty="0">
+                <a:solidFill>
+                  <a:srgbClr val="0070C0"/>
+                </a:solidFill>
+                <a:latin typeface="Menlo" panose="020B0609030804020204" pitchFamily="49" charset="0"/>
+                <a:ea typeface="Menlo" panose="020B0609030804020204" pitchFamily="49" charset="0"/>
+                <a:cs typeface="Menlo" panose="020B0609030804020204" pitchFamily="49" charset="0"/>
+              </a:rPr>
+              <a:t>From top sheave M on the deck the belt moves</a:t>
+            </a:r>
+          </a:p>
+          <a:p>
+            <a:r>
+              <a:rPr lang="en-US" sz="1200" dirty="0">
+                <a:solidFill>
+                  <a:srgbClr val="0070C0"/>
+                </a:solidFill>
+                <a:latin typeface="Menlo" panose="020B0609030804020204" pitchFamily="49" charset="0"/>
+                <a:ea typeface="Menlo" panose="020B0609030804020204" pitchFamily="49" charset="0"/>
+                <a:cs typeface="Menlo" panose="020B0609030804020204" pitchFamily="49" charset="0"/>
+              </a:rPr>
+              <a:t> -&gt; </a:t>
+            </a:r>
+            <a:r>
+              <a:rPr lang="en-US" sz="1200" dirty="0">
+                <a:solidFill>
+                  <a:srgbClr val="0070C0"/>
+                </a:solidFill>
+                <a:latin typeface="Menlo" panose="020B0609030804020204" pitchFamily="49" charset="0"/>
+                <a:ea typeface="Menlo" panose="020B0609030804020204" pitchFamily="49" charset="0"/>
+                <a:cs typeface="Menlo" panose="020B0609030804020204" pitchFamily="49" charset="0"/>
+                <a:sym typeface="Wingdings" pitchFamily="2" charset="2"/>
+              </a:rPr>
+              <a:t>to the N </a:t>
+            </a:r>
+            <a:r>
+              <a:rPr lang="en-US" sz="1200" dirty="0">
+                <a:solidFill>
+                  <a:srgbClr val="0070C0"/>
+                </a:solidFill>
+                <a:latin typeface="Menlo" panose="020B0609030804020204" pitchFamily="49" charset="0"/>
+                <a:ea typeface="Menlo" panose="020B0609030804020204" pitchFamily="49" charset="0"/>
+                <a:cs typeface="Menlo" panose="020B0609030804020204" pitchFamily="49" charset="0"/>
+              </a:rPr>
+              <a:t>tensioner idler (top one)</a:t>
+            </a:r>
+          </a:p>
+          <a:p>
+            <a:r>
+              <a:rPr lang="en-US" sz="1200" dirty="0">
+                <a:solidFill>
+                  <a:srgbClr val="0070C0"/>
+                </a:solidFill>
+                <a:latin typeface="Menlo" panose="020B0609030804020204" pitchFamily="49" charset="0"/>
+                <a:ea typeface="Menlo" panose="020B0609030804020204" pitchFamily="49" charset="0"/>
+                <a:cs typeface="Menlo" panose="020B0609030804020204" pitchFamily="49" charset="0"/>
+              </a:rPr>
+              <a:t> -&gt; to the lower side of impeller sheeve O</a:t>
+            </a:r>
+          </a:p>
+          <a:p>
+            <a:r>
+              <a:rPr lang="en-US" sz="1200" dirty="0">
+                <a:solidFill>
+                  <a:srgbClr val="0070C0"/>
+                </a:solidFill>
+                <a:latin typeface="Menlo" panose="020B0609030804020204" pitchFamily="49" charset="0"/>
+                <a:ea typeface="Menlo" panose="020B0609030804020204" pitchFamily="49" charset="0"/>
+                <a:cs typeface="Menlo" panose="020B0609030804020204" pitchFamily="49" charset="0"/>
+              </a:rPr>
+              <a:t> -&gt; from the upper side of impeller sheeve O</a:t>
+            </a:r>
+            <a:br>
+              <a:rPr lang="en-US" sz="1200" dirty="0">
+                <a:solidFill>
+                  <a:srgbClr val="0070C0"/>
+                </a:solidFill>
+                <a:latin typeface="Menlo" panose="020B0609030804020204" pitchFamily="49" charset="0"/>
+                <a:ea typeface="Menlo" panose="020B0609030804020204" pitchFamily="49" charset="0"/>
+                <a:cs typeface="Menlo" panose="020B0609030804020204" pitchFamily="49" charset="0"/>
+              </a:rPr>
+            </a:br>
+            <a:r>
+              <a:rPr lang="en-US" sz="1200" dirty="0">
+                <a:solidFill>
+                  <a:srgbClr val="0070C0"/>
+                </a:solidFill>
+                <a:latin typeface="Menlo" panose="020B0609030804020204" pitchFamily="49" charset="0"/>
+                <a:ea typeface="Menlo" panose="020B0609030804020204" pitchFamily="49" charset="0"/>
+                <a:cs typeface="Menlo" panose="020B0609030804020204" pitchFamily="49" charset="0"/>
+              </a:rPr>
+              <a:t>    to the </a:t>
+            </a:r>
+            <a:r>
+              <a:rPr lang="en-US" sz="1200" dirty="0">
+                <a:solidFill>
+                  <a:srgbClr val="0070C0"/>
+                </a:solidFill>
+              </a:rPr>
+              <a:t>V-idler sheave P (the lower one)</a:t>
+            </a:r>
+          </a:p>
+          <a:p>
+            <a:r>
+              <a:rPr lang="en-US" sz="1200" dirty="0">
+                <a:solidFill>
+                  <a:srgbClr val="0070C0"/>
+                </a:solidFill>
+                <a:latin typeface="Menlo" panose="020B0609030804020204" pitchFamily="49" charset="0"/>
+                <a:ea typeface="Menlo" panose="020B0609030804020204" pitchFamily="49" charset="0"/>
+                <a:cs typeface="Menlo" panose="020B0609030804020204" pitchFamily="49" charset="0"/>
+              </a:rPr>
+              <a:t> -&gt; back to the sheave M on the deck</a:t>
+            </a:r>
+          </a:p>
+          <a:p>
+            <a:endParaRPr lang="en-US" sz="1200" dirty="0"/>
+          </a:p>
+          <a:p>
+            <a:r>
+              <a:rPr lang="en-US" sz="1200" dirty="0"/>
+              <a:t> (N) — the tensioner idler — sits closer to the deck, and the belt contacts its back/flat side to maintain tension. </a:t>
+            </a:r>
+          </a:p>
+          <a:p>
+            <a:endParaRPr lang="en-US" sz="1200" dirty="0"/>
+          </a:p>
+          <a:p>
+            <a:r>
+              <a:rPr lang="en-US" sz="1200" dirty="0"/>
+              <a:t>(P) — the V-idler sheave — sits on the return path from the blower (N) back to the deck sheave (M), guiding the belt in the V-groove. It is lower/closer to the blower on the return side.</a:t>
+            </a:r>
+          </a:p>
+          <a:p>
+            <a:endParaRPr lang="en-US" sz="1200" dirty="0"/>
+          </a:p>
+          <a:p>
+            <a:r>
+              <a:rPr lang="en-US" sz="1200" dirty="0"/>
+              <a:t>In short: (N) is above/closer to the deck and acts as a tensioner; </a:t>
+            </a:r>
+            <a:br>
+              <a:rPr lang="en-US" sz="1200" dirty="0"/>
+            </a:br>
+            <a:r>
+              <a:rPr lang="en-US" sz="1200" dirty="0"/>
+              <a:t>(P) is below/on the blower side and acts as a fixed V-groove guide</a:t>
+            </a:r>
+          </a:p>
+        </p:txBody>
+      </p:sp>
+      <p:pic>
+        <p:nvPicPr>
+          <p:cNvPr id="5" name="Picture 4" descr="John Deere X758 X700 Series | AG Pro">
+            <a:extLst>
+              <a:ext uri="{FF2B5EF4-FFF2-40B4-BE49-F238E27FC236}">
+                <a16:creationId xmlns:a16="http://schemas.microsoft.com/office/drawing/2014/main" id="{DBC1B5E5-B8F2-9E18-D714-A3DDDCC19EE1}"/>
+              </a:ext>
+            </a:extLst>
+          </p:cNvPr>
+          <p:cNvPicPr>
+            <a:picLocks noChangeAspect="1"/>
+          </p:cNvPicPr>
+          <p:nvPr/>
+        </p:nvPicPr>
+        <p:blipFill>
+          <a:blip r:embed="rId2" cstate="email">
+            <a:extLst>
+              <a:ext uri="{28A0092B-C50C-407E-A947-70E740481C1C}">
+                <a14:useLocalDpi xmlns:a14="http://schemas.microsoft.com/office/drawing/2010/main"/>
+              </a:ext>
+            </a:extLst>
+          </a:blip>
+          <a:srcRect/>
+          <a:stretch>
+            <a:fillRect/>
+          </a:stretch>
+        </p:blipFill>
+        <p:spPr>
+          <a:xfrm>
+            <a:off x="7582949" y="4057022"/>
+            <a:ext cx="4445000" cy="2670629"/>
+          </a:xfrm>
+          <a:prstGeom prst="rect">
+            <a:avLst/>
+          </a:prstGeom>
+        </p:spPr>
+      </p:pic>
+      <p:pic>
+        <p:nvPicPr>
+          <p:cNvPr id="6" name="Picture 5">
+            <a:extLst>
+              <a:ext uri="{FF2B5EF4-FFF2-40B4-BE49-F238E27FC236}">
+                <a16:creationId xmlns:a16="http://schemas.microsoft.com/office/drawing/2014/main" id="{EA5857D3-1AF8-50CB-2D7C-5E0795A3ED5B}"/>
+              </a:ext>
+            </a:extLst>
+          </p:cNvPr>
+          <p:cNvPicPr>
+            <a:picLocks noChangeAspect="1"/>
+          </p:cNvPicPr>
+          <p:nvPr/>
+        </p:nvPicPr>
+        <p:blipFill>
+          <a:blip r:embed="rId3"/>
+          <a:stretch>
+            <a:fillRect/>
+          </a:stretch>
+        </p:blipFill>
+        <p:spPr>
+          <a:xfrm>
+            <a:off x="7924800" y="261610"/>
+            <a:ext cx="4103149" cy="3795412"/>
+          </a:xfrm>
+          <a:prstGeom prst="rect">
+            <a:avLst/>
+          </a:prstGeom>
+        </p:spPr>
+      </p:pic>
+    </p:spTree>
+    <p:extLst>
+      <p:ext uri="{BB962C8B-B14F-4D97-AF65-F5344CB8AC3E}">
+        <p14:creationId xmlns:p14="http://schemas.microsoft.com/office/powerpoint/2010/main" val="4180096979"/>
+      </p:ext>
+    </p:extLst>
+  </p:cSld>
+  <p:clrMapOvr>
+    <a:masterClrMapping/>
+  </p:clrMapOvr>
+</p:sld>
+</file>
+
+<file path=ppt/slides/slide13.xml><?xml version="1.0" encoding="utf-8"?>
+<p:sld xmlns:a="http://schemas.openxmlformats.org/drawingml/2006/main" xmlns:r="http://schemas.openxmlformats.org/officeDocument/2006/relationships" xmlns:p="http://schemas.openxmlformats.org/presentationml/2006/main">
+  <p:cSld>
+    <p:spTree>
+      <p:nvGrpSpPr>
         <p:cNvPr id="1" name=""/>
         <p:cNvGrpSpPr/>
         <p:nvPr/>

--- a/tractor_jd_1025r_X758.pptx
+++ b/tractor_jd_1025r_X758.pptx
@@ -270,7 +270,7 @@
           <a:lstStyle/>
           <a:p>
             <a:fld id="{16286276-9013-2A43-82D1-BA4685C95117}" type="datetimeFigureOut">
-              <a:t>6/8/26</a:t>
+              <a:t>6/11/26</a:t>
             </a:fld>
             <a:endParaRPr lang="en-US"/>
           </a:p>
@@ -466,7 +466,7 @@
           <a:lstStyle/>
           <a:p>
             <a:fld id="{16286276-9013-2A43-82D1-BA4685C95117}" type="datetimeFigureOut">
-              <a:t>6/8/26</a:t>
+              <a:t>6/11/26</a:t>
             </a:fld>
             <a:endParaRPr lang="en-US"/>
           </a:p>
@@ -672,7 +672,7 @@
           <a:lstStyle/>
           <a:p>
             <a:fld id="{16286276-9013-2A43-82D1-BA4685C95117}" type="datetimeFigureOut">
-              <a:t>6/8/26</a:t>
+              <a:t>6/11/26</a:t>
             </a:fld>
             <a:endParaRPr lang="en-US"/>
           </a:p>
@@ -868,7 +868,7 @@
           <a:lstStyle/>
           <a:p>
             <a:fld id="{16286276-9013-2A43-82D1-BA4685C95117}" type="datetimeFigureOut">
-              <a:t>6/8/26</a:t>
+              <a:t>6/11/26</a:t>
             </a:fld>
             <a:endParaRPr lang="en-US"/>
           </a:p>
@@ -1141,7 +1141,7 @@
           <a:lstStyle/>
           <a:p>
             <a:fld id="{16286276-9013-2A43-82D1-BA4685C95117}" type="datetimeFigureOut">
-              <a:t>6/8/26</a:t>
+              <a:t>6/11/26</a:t>
             </a:fld>
             <a:endParaRPr lang="en-US"/>
           </a:p>
@@ -1404,7 +1404,7 @@
           <a:lstStyle/>
           <a:p>
             <a:fld id="{16286276-9013-2A43-82D1-BA4685C95117}" type="datetimeFigureOut">
-              <a:t>6/8/26</a:t>
+              <a:t>6/11/26</a:t>
             </a:fld>
             <a:endParaRPr lang="en-US"/>
           </a:p>
@@ -1814,7 +1814,7 @@
           <a:lstStyle/>
           <a:p>
             <a:fld id="{16286276-9013-2A43-82D1-BA4685C95117}" type="datetimeFigureOut">
-              <a:t>6/8/26</a:t>
+              <a:t>6/11/26</a:t>
             </a:fld>
             <a:endParaRPr lang="en-US"/>
           </a:p>
@@ -1953,7 +1953,7 @@
           <a:lstStyle/>
           <a:p>
             <a:fld id="{16286276-9013-2A43-82D1-BA4685C95117}" type="datetimeFigureOut">
-              <a:t>6/8/26</a:t>
+              <a:t>6/11/26</a:t>
             </a:fld>
             <a:endParaRPr lang="en-US"/>
           </a:p>
@@ -2064,7 +2064,7 @@
           <a:lstStyle/>
           <a:p>
             <a:fld id="{16286276-9013-2A43-82D1-BA4685C95117}" type="datetimeFigureOut">
-              <a:t>6/8/26</a:t>
+              <a:t>6/11/26</a:t>
             </a:fld>
             <a:endParaRPr lang="en-US"/>
           </a:p>
@@ -2373,7 +2373,7 @@
           <a:lstStyle/>
           <a:p>
             <a:fld id="{16286276-9013-2A43-82D1-BA4685C95117}" type="datetimeFigureOut">
-              <a:t>6/8/26</a:t>
+              <a:t>6/11/26</a:t>
             </a:fld>
             <a:endParaRPr lang="en-US"/>
           </a:p>
@@ -2659,7 +2659,7 @@
           <a:lstStyle/>
           <a:p>
             <a:fld id="{16286276-9013-2A43-82D1-BA4685C95117}" type="datetimeFigureOut">
-              <a:t>6/8/26</a:t>
+              <a:t>6/11/26</a:t>
             </a:fld>
             <a:endParaRPr lang="en-US"/>
           </a:p>
@@ -2898,7 +2898,7 @@
           </a:lstStyle>
           <a:p>
             <a:fld id="{16286276-9013-2A43-82D1-BA4685C95117}" type="datetimeFigureOut">
-              <a:t>6/8/26</a:t>
+              <a:t>6/11/26</a:t>
             </a:fld>
             <a:endParaRPr lang="en-US"/>
           </a:p>
@@ -4842,13 +4842,18 @@
         </p:nvSpPr>
         <p:spPr>
           <a:xfrm>
-            <a:off x="164051" y="807468"/>
-            <a:ext cx="5931949" cy="4708981"/>
+            <a:off x="164051" y="523220"/>
+            <a:ext cx="4544427" cy="4154984"/>
           </a:xfrm>
           <a:prstGeom prst="rect">
             <a:avLst/>
           </a:prstGeom>
           <a:noFill/>
+          <a:ln>
+            <a:solidFill>
+              <a:srgbClr val="FF0000"/>
+            </a:solidFill>
+          </a:ln>
         </p:spPr>
         <p:txBody>
           <a:bodyPr wrap="square" rtlCol="0">
@@ -4856,203 +4861,91 @@
           </a:bodyPr>
           <a:lstStyle/>
           <a:p>
+            <a:pPr marL="171450" indent="-171450">
+              <a:buFont typeface="Arial" panose="020B0604020202020204" pitchFamily="34" charset="0"/>
+              <a:buChar char="•"/>
+            </a:pPr>
             <a:r>
               <a:rPr lang="en-US" sz="1200" dirty="0"/>
-              <a:t>john deere 54 inch high capacity mower deck</a:t>
-            </a:r>
-          </a:p>
-          <a:p>
-            <a:endParaRPr lang="en-US" sz="1200" dirty="0"/>
-          </a:p>
-          <a:p>
+              <a:t>john deere 54 inch high capacity mower deck with Power Flow attachment to throw grass to the back.</a:t>
+            </a:r>
+          </a:p>
+          <a:p>
+            <a:pPr marL="171450" indent="-171450">
+              <a:buFont typeface="Arial" panose="020B0604020202020204" pitchFamily="34" charset="0"/>
+              <a:buChar char="•"/>
+            </a:pPr>
             <a:r>
               <a:rPr lang="en-US" sz="1200" dirty="0"/>
-              <a:t>When looking at the mowing deck from above, the spools (sheaves) rotate clockwise </a:t>
-            </a:r>
-          </a:p>
-          <a:p>
-            <a:endParaRPr lang="en-US" sz="1200" dirty="0"/>
-          </a:p>
-          <a:p>
+              <a:t>When looking at the mowing deck from above, the spools (sheaves) rotate clockwise (CW). </a:t>
+            </a:r>
+          </a:p>
+          <a:p>
+            <a:pPr marL="171450" indent="-171450">
+              <a:buFont typeface="Arial" panose="020B0604020202020204" pitchFamily="34" charset="0"/>
+              <a:buChar char="•"/>
+            </a:pPr>
             <a:r>
               <a:rPr lang="en-US" sz="1200" dirty="0"/>
-              <a:t>When looking at the </a:t>
+              <a:t>When looking from below – CCW (Counter-clockwise). </a:t>
+            </a:r>
+          </a:p>
+          <a:p>
+            <a:pPr marL="171450" indent="-171450">
+              <a:buFont typeface="Arial" panose="020B0604020202020204" pitchFamily="34" charset="0"/>
+              <a:buChar char="•"/>
+            </a:pPr>
+            <a:r>
+              <a:rPr lang="en-US" sz="1200" dirty="0"/>
+              <a:t>When looking at the Power Flow from the right side of the tractor (where the Power Flow is attached), the impeller rotates CW (clockwise) collecting grass from the bottom by moving from front to back – and throwing it to the back</a:t>
+            </a:r>
+          </a:p>
+          <a:p>
+            <a:pPr marL="171450" indent="-171450">
+              <a:buFont typeface="Arial" panose="020B0604020202020204" pitchFamily="34" charset="0"/>
+              <a:buChar char="•"/>
+            </a:pPr>
+            <a:r>
+              <a:rPr lang="en-US" sz="1200" dirty="0"/>
+              <a:t>There is a belt (a rubber loop) to pass rotation from the deck to the impeller. It goes from top sheave M on the deck (</a:t>
             </a:r>
             <a:r>
               <a:rPr lang="en-US" sz="1200" dirty="0" err="1"/>
-              <a:t>powerflow</a:t>
+              <a:t>horisontal</a:t>
             </a:r>
             <a:r>
               <a:rPr lang="en-US" sz="1200" dirty="0"/>
-              <a:t> from the right side of the tractor, </a:t>
-            </a:r>
-            <a:br>
+              <a:t> disk) to the (N) tensioner idler (top horizontal disk), then to the top side of impeller sheeve (O), then leaving from the down side of impeller sheeve (O) to the V-idler sheave P (the lower horizontal disk), and finally, back to the sheave M on the deck.</a:t>
+            </a:r>
+          </a:p>
+          <a:p>
+            <a:pPr marL="171450" indent="-171450">
+              <a:buFont typeface="Arial" panose="020B0604020202020204" pitchFamily="34" charset="0"/>
+              <a:buChar char="•"/>
+            </a:pPr>
+            <a:r>
               <a:rPr lang="en-US" sz="1200" dirty="0"/>
-            </a:br>
+              <a:t>(N) — the tensioner idler — sits closer to the deck, and the belt contacts its back/flat side to maintain tension. </a:t>
+            </a:r>
+          </a:p>
+          <a:p>
+            <a:pPr marL="171450" indent="-171450">
+              <a:buFont typeface="Arial" panose="020B0604020202020204" pitchFamily="34" charset="0"/>
+              <a:buChar char="•"/>
+            </a:pPr>
             <a:r>
               <a:rPr lang="en-US" sz="1200" dirty="0"/>
-              <a:t>it rotates counter-clockwise (collecting grass from the bottom, moving it up – then throwing it)</a:t>
-            </a:r>
-          </a:p>
-          <a:p>
-            <a:endParaRPr lang="en-US" sz="1200" dirty="0"/>
-          </a:p>
-          <a:p>
+              <a:t>(P) — the V-idler sheave — sits on the return path from the blower (O) back to the deck sheave (M), guiding the belt in the V-groove. It is lower/closer to the blower on the return side.</a:t>
+            </a:r>
+          </a:p>
+          <a:p>
+            <a:pPr marL="171450" indent="-171450">
+              <a:buFont typeface="Arial" panose="020B0604020202020204" pitchFamily="34" charset="0"/>
+              <a:buChar char="•"/>
+            </a:pPr>
             <a:r>
               <a:rPr lang="en-US" sz="1200" dirty="0"/>
-              <a:t>The belt moves as following:</a:t>
-            </a:r>
-            <a:br>
-              <a:rPr lang="en-US" sz="1200" dirty="0"/>
-            </a:br>
-            <a:r>
-              <a:rPr lang="en-US" sz="1200" dirty="0">
-                <a:solidFill>
-                  <a:srgbClr val="0070C0"/>
-                </a:solidFill>
-                <a:latin typeface="Menlo" panose="020B0609030804020204" pitchFamily="49" charset="0"/>
-                <a:ea typeface="Menlo" panose="020B0609030804020204" pitchFamily="49" charset="0"/>
-                <a:cs typeface="Menlo" panose="020B0609030804020204" pitchFamily="49" charset="0"/>
-              </a:rPr>
-              <a:t>From top sheave M on the deck the belt moves</a:t>
-            </a:r>
-          </a:p>
-          <a:p>
-            <a:r>
-              <a:rPr lang="en-US" sz="1200" dirty="0">
-                <a:solidFill>
-                  <a:srgbClr val="0070C0"/>
-                </a:solidFill>
-                <a:latin typeface="Menlo" panose="020B0609030804020204" pitchFamily="49" charset="0"/>
-                <a:ea typeface="Menlo" panose="020B0609030804020204" pitchFamily="49" charset="0"/>
-                <a:cs typeface="Menlo" panose="020B0609030804020204" pitchFamily="49" charset="0"/>
-              </a:rPr>
-              <a:t> -&gt; </a:t>
-            </a:r>
-            <a:r>
-              <a:rPr lang="en-US" sz="1200" dirty="0">
-                <a:solidFill>
-                  <a:srgbClr val="0070C0"/>
-                </a:solidFill>
-                <a:latin typeface="Menlo" panose="020B0609030804020204" pitchFamily="49" charset="0"/>
-                <a:ea typeface="Menlo" panose="020B0609030804020204" pitchFamily="49" charset="0"/>
-                <a:cs typeface="Menlo" panose="020B0609030804020204" pitchFamily="49" charset="0"/>
-                <a:sym typeface="Wingdings" pitchFamily="2" charset="2"/>
-              </a:rPr>
-              <a:t>to the N </a:t>
-            </a:r>
-            <a:r>
-              <a:rPr lang="en-US" sz="1200" dirty="0">
-                <a:solidFill>
-                  <a:srgbClr val="0070C0"/>
-                </a:solidFill>
-                <a:latin typeface="Menlo" panose="020B0609030804020204" pitchFamily="49" charset="0"/>
-                <a:ea typeface="Menlo" panose="020B0609030804020204" pitchFamily="49" charset="0"/>
-                <a:cs typeface="Menlo" panose="020B0609030804020204" pitchFamily="49" charset="0"/>
-              </a:rPr>
-              <a:t>tensioner idler (top one)</a:t>
-            </a:r>
-          </a:p>
-          <a:p>
-            <a:r>
-              <a:rPr lang="en-US" sz="1200" dirty="0">
-                <a:solidFill>
-                  <a:srgbClr val="0070C0"/>
-                </a:solidFill>
-                <a:latin typeface="Menlo" panose="020B0609030804020204" pitchFamily="49" charset="0"/>
-                <a:ea typeface="Menlo" panose="020B0609030804020204" pitchFamily="49" charset="0"/>
-                <a:cs typeface="Menlo" panose="020B0609030804020204" pitchFamily="49" charset="0"/>
-              </a:rPr>
-              <a:t> -&gt; to the lower side of impeller sheeve O</a:t>
-            </a:r>
-          </a:p>
-          <a:p>
-            <a:r>
-              <a:rPr lang="en-US" sz="1200" dirty="0">
-                <a:solidFill>
-                  <a:srgbClr val="0070C0"/>
-                </a:solidFill>
-                <a:latin typeface="Menlo" panose="020B0609030804020204" pitchFamily="49" charset="0"/>
-                <a:ea typeface="Menlo" panose="020B0609030804020204" pitchFamily="49" charset="0"/>
-                <a:cs typeface="Menlo" panose="020B0609030804020204" pitchFamily="49" charset="0"/>
-              </a:rPr>
-              <a:t> -&gt; from the upper side of impeller sheeve O</a:t>
-            </a:r>
-            <a:br>
-              <a:rPr lang="en-US" sz="1200" dirty="0">
-                <a:solidFill>
-                  <a:srgbClr val="0070C0"/>
-                </a:solidFill>
-                <a:latin typeface="Menlo" panose="020B0609030804020204" pitchFamily="49" charset="0"/>
-                <a:ea typeface="Menlo" panose="020B0609030804020204" pitchFamily="49" charset="0"/>
-                <a:cs typeface="Menlo" panose="020B0609030804020204" pitchFamily="49" charset="0"/>
-              </a:rPr>
-            </a:br>
-            <a:r>
-              <a:rPr lang="en-US" sz="1200" dirty="0">
-                <a:solidFill>
-                  <a:srgbClr val="0070C0"/>
-                </a:solidFill>
-                <a:latin typeface="Menlo" panose="020B0609030804020204" pitchFamily="49" charset="0"/>
-                <a:ea typeface="Menlo" panose="020B0609030804020204" pitchFamily="49" charset="0"/>
-                <a:cs typeface="Menlo" panose="020B0609030804020204" pitchFamily="49" charset="0"/>
-              </a:rPr>
-              <a:t>    to the </a:t>
-            </a:r>
-            <a:r>
-              <a:rPr lang="en-US" sz="1200" dirty="0">
-                <a:solidFill>
-                  <a:srgbClr val="0070C0"/>
-                </a:solidFill>
-              </a:rPr>
-              <a:t>V-idler sheave P (the lower one)</a:t>
-            </a:r>
-          </a:p>
-          <a:p>
-            <a:r>
-              <a:rPr lang="en-US" sz="1200" dirty="0">
-                <a:solidFill>
-                  <a:srgbClr val="0070C0"/>
-                </a:solidFill>
-                <a:latin typeface="Menlo" panose="020B0609030804020204" pitchFamily="49" charset="0"/>
-                <a:ea typeface="Menlo" panose="020B0609030804020204" pitchFamily="49" charset="0"/>
-                <a:cs typeface="Menlo" panose="020B0609030804020204" pitchFamily="49" charset="0"/>
-              </a:rPr>
-              <a:t> -&gt; back to the sheave M on the deck</a:t>
-            </a:r>
-          </a:p>
-          <a:p>
-            <a:endParaRPr lang="en-US" sz="1200" dirty="0"/>
-          </a:p>
-          <a:p>
-            <a:r>
-              <a:rPr lang="en-US" sz="1200" dirty="0"/>
-              <a:t> (N) — the tensioner idler — sits closer to the deck, and the belt contacts its back/flat side to maintain tension. </a:t>
-            </a:r>
-          </a:p>
-          <a:p>
-            <a:endParaRPr lang="en-US" sz="1200" dirty="0"/>
-          </a:p>
-          <a:p>
-            <a:r>
-              <a:rPr lang="en-US" sz="1200" dirty="0"/>
-              <a:t>(P) — the V-idler sheave — sits on the return path from the blower (N) back to the deck sheave (M), guiding the belt in the V-groove. It is lower/closer to the blower on the return side.</a:t>
-            </a:r>
-          </a:p>
-          <a:p>
-            <a:endParaRPr lang="en-US" sz="1200" dirty="0"/>
-          </a:p>
-          <a:p>
-            <a:r>
-              <a:rPr lang="en-US" sz="1200" dirty="0"/>
-              <a:t>In short: (N) is above/closer to the deck and acts as a tensioner; </a:t>
-            </a:r>
-            <a:br>
-              <a:rPr lang="en-US" sz="1200" dirty="0"/>
-            </a:br>
-            <a:r>
-              <a:rPr lang="en-US" sz="1200" dirty="0"/>
-              <a:t>(P) is below/on the blower side and acts as a fixed V-groove guide</a:t>
+              <a:t>In short: (N) is above/closer to the deck and acts as a tensioner; (P) is below/on the blower side and acts as a fixed V-groove guide</a:t>
             </a:r>
           </a:p>
         </p:txBody>
@@ -5086,12 +4979,17 @@
         </p:blipFill>
         <p:spPr>
           <a:xfrm>
-            <a:off x="7582949" y="4057022"/>
-            <a:ext cx="4445000" cy="2670629"/>
+            <a:off x="8924205" y="4862870"/>
+            <a:ext cx="3103744" cy="1864781"/>
           </a:xfrm>
           <a:prstGeom prst="rect">
             <a:avLst/>
           </a:prstGeom>
+          <a:ln>
+            <a:solidFill>
+              <a:srgbClr val="FF0000"/>
+            </a:solidFill>
+          </a:ln>
         </p:spPr>
       </p:pic>
       <p:pic>
@@ -5116,12 +5014,589 @@
         </p:blipFill>
         <p:spPr>
           <a:xfrm>
-            <a:off x="7924800" y="261610"/>
-            <a:ext cx="4103149" cy="3795412"/>
+            <a:off x="4843269" y="727285"/>
+            <a:ext cx="3424206" cy="3167390"/>
           </a:xfrm>
           <a:prstGeom prst="rect">
             <a:avLst/>
           </a:prstGeom>
+        </p:spPr>
+      </p:pic>
+      <p:pic>
+        <p:nvPicPr>
+          <p:cNvPr id="7" name="Picture 6" descr="Service">
+            <a:extLst>
+              <a:ext uri="{FF2B5EF4-FFF2-40B4-BE49-F238E27FC236}">
+                <a16:creationId xmlns:a16="http://schemas.microsoft.com/office/drawing/2014/main" id="{B2CE0C4C-84B1-BEAD-B285-10AB7B6F3D7C}"/>
+              </a:ext>
+            </a:extLst>
+          </p:cNvPr>
+          <p:cNvPicPr>
+            <a:picLocks noChangeAspect="1"/>
+          </p:cNvPicPr>
+          <p:nvPr/>
+        </p:nvPicPr>
+        <p:blipFill>
+          <a:blip r:embed="rId4"/>
+          <a:stretch>
+            <a:fillRect/>
+          </a:stretch>
+        </p:blipFill>
+        <p:spPr>
+          <a:xfrm>
+            <a:off x="164051" y="4980167"/>
+            <a:ext cx="2533670" cy="1678556"/>
+          </a:xfrm>
+          <a:prstGeom prst="rect">
+            <a:avLst/>
+          </a:prstGeom>
+        </p:spPr>
+      </p:pic>
+      <p:pic>
+        <p:nvPicPr>
+          <p:cNvPr id="9" name="Picture 8">
+            <a:extLst>
+              <a:ext uri="{FF2B5EF4-FFF2-40B4-BE49-F238E27FC236}">
+                <a16:creationId xmlns:a16="http://schemas.microsoft.com/office/drawing/2014/main" id="{3B07F3E7-A43C-0CD1-4BF6-F7E84377B202}"/>
+              </a:ext>
+            </a:extLst>
+          </p:cNvPr>
+          <p:cNvPicPr>
+            <a:picLocks noChangeAspect="1"/>
+          </p:cNvPicPr>
+          <p:nvPr/>
+        </p:nvPicPr>
+        <p:blipFill>
+          <a:blip r:embed="rId5"/>
+          <a:stretch>
+            <a:fillRect/>
+          </a:stretch>
+        </p:blipFill>
+        <p:spPr>
+          <a:xfrm>
+            <a:off x="4872530" y="5048379"/>
+            <a:ext cx="2044293" cy="1339365"/>
+          </a:xfrm>
+          <a:prstGeom prst="rect">
+            <a:avLst/>
+          </a:prstGeom>
+          <a:ln>
+            <a:solidFill>
+              <a:srgbClr val="FF0000"/>
+            </a:solidFill>
+          </a:ln>
+        </p:spPr>
+      </p:pic>
+      <p:cxnSp>
+        <p:nvCxnSpPr>
+          <p:cNvPr id="11" name="Straight Arrow Connector 10">
+            <a:extLst>
+              <a:ext uri="{FF2B5EF4-FFF2-40B4-BE49-F238E27FC236}">
+                <a16:creationId xmlns:a16="http://schemas.microsoft.com/office/drawing/2014/main" id="{3A2FE700-8922-D8AA-BC6E-D5412DFDC65E}"/>
+              </a:ext>
+            </a:extLst>
+          </p:cNvPr>
+          <p:cNvCxnSpPr>
+            <a:cxnSpLocks/>
+          </p:cNvCxnSpPr>
+          <p:nvPr/>
+        </p:nvCxnSpPr>
+        <p:spPr>
+          <a:xfrm flipV="1">
+            <a:off x="9690846" y="5342015"/>
+            <a:ext cx="510989" cy="210398"/>
+          </a:xfrm>
+          <a:prstGeom prst="straightConnector1">
+            <a:avLst/>
+          </a:prstGeom>
+          <a:ln w="34925">
+            <a:solidFill>
+              <a:srgbClr val="FF0000"/>
+            </a:solidFill>
+            <a:tailEnd type="triangle" w="lg" len="lg"/>
+          </a:ln>
+        </p:spPr>
+        <p:style>
+          <a:lnRef idx="1">
+            <a:schemeClr val="accent1"/>
+          </a:lnRef>
+          <a:fillRef idx="0">
+            <a:schemeClr val="accent1"/>
+          </a:fillRef>
+          <a:effectRef idx="0">
+            <a:schemeClr val="accent1"/>
+          </a:effectRef>
+          <a:fontRef idx="minor">
+            <a:schemeClr val="tx1"/>
+          </a:fontRef>
+        </p:style>
+      </p:cxnSp>
+      <p:cxnSp>
+        <p:nvCxnSpPr>
+          <p:cNvPr id="14" name="Straight Arrow Connector 13">
+            <a:extLst>
+              <a:ext uri="{FF2B5EF4-FFF2-40B4-BE49-F238E27FC236}">
+                <a16:creationId xmlns:a16="http://schemas.microsoft.com/office/drawing/2014/main" id="{76C169ED-B51E-7971-D337-24628012FA79}"/>
+              </a:ext>
+            </a:extLst>
+          </p:cNvPr>
+          <p:cNvCxnSpPr>
+            <a:cxnSpLocks/>
+          </p:cNvCxnSpPr>
+          <p:nvPr/>
+        </p:nvCxnSpPr>
+        <p:spPr>
+          <a:xfrm>
+            <a:off x="10581118" y="5657612"/>
+            <a:ext cx="510989" cy="137648"/>
+          </a:xfrm>
+          <a:prstGeom prst="straightConnector1">
+            <a:avLst/>
+          </a:prstGeom>
+          <a:ln w="34925">
+            <a:solidFill>
+              <a:srgbClr val="FF0000"/>
+            </a:solidFill>
+            <a:tailEnd type="triangle" w="lg" len="lg"/>
+          </a:ln>
+        </p:spPr>
+        <p:style>
+          <a:lnRef idx="1">
+            <a:schemeClr val="accent1"/>
+          </a:lnRef>
+          <a:fillRef idx="0">
+            <a:schemeClr val="accent1"/>
+          </a:fillRef>
+          <a:effectRef idx="0">
+            <a:schemeClr val="accent1"/>
+          </a:effectRef>
+          <a:fontRef idx="minor">
+            <a:schemeClr val="tx1"/>
+          </a:fontRef>
+        </p:style>
+      </p:cxnSp>
+      <p:cxnSp>
+        <p:nvCxnSpPr>
+          <p:cNvPr id="16" name="Straight Arrow Connector 15">
+            <a:extLst>
+              <a:ext uri="{FF2B5EF4-FFF2-40B4-BE49-F238E27FC236}">
+                <a16:creationId xmlns:a16="http://schemas.microsoft.com/office/drawing/2014/main" id="{3EB74257-19A8-D2FE-331E-1AC4DA71C9F4}"/>
+              </a:ext>
+            </a:extLst>
+          </p:cNvPr>
+          <p:cNvCxnSpPr>
+            <a:cxnSpLocks/>
+          </p:cNvCxnSpPr>
+          <p:nvPr/>
+        </p:nvCxnSpPr>
+        <p:spPr>
+          <a:xfrm flipH="1" flipV="1">
+            <a:off x="9645276" y="6230471"/>
+            <a:ext cx="1191336" cy="89647"/>
+          </a:xfrm>
+          <a:prstGeom prst="straightConnector1">
+            <a:avLst/>
+          </a:prstGeom>
+          <a:ln w="34925">
+            <a:solidFill>
+              <a:srgbClr val="FF0000"/>
+            </a:solidFill>
+            <a:tailEnd type="triangle" w="lg" len="lg"/>
+          </a:ln>
+        </p:spPr>
+        <p:style>
+          <a:lnRef idx="1">
+            <a:schemeClr val="accent1"/>
+          </a:lnRef>
+          <a:fillRef idx="0">
+            <a:schemeClr val="accent1"/>
+          </a:fillRef>
+          <a:effectRef idx="0">
+            <a:schemeClr val="accent1"/>
+          </a:effectRef>
+          <a:fontRef idx="minor">
+            <a:schemeClr val="tx1"/>
+          </a:fontRef>
+        </p:style>
+      </p:cxnSp>
+      <p:cxnSp>
+        <p:nvCxnSpPr>
+          <p:cNvPr id="19" name="Straight Arrow Connector 18">
+            <a:extLst>
+              <a:ext uri="{FF2B5EF4-FFF2-40B4-BE49-F238E27FC236}">
+                <a16:creationId xmlns:a16="http://schemas.microsoft.com/office/drawing/2014/main" id="{900D4889-ABA9-FE12-C61C-B515F215582A}"/>
+              </a:ext>
+            </a:extLst>
+          </p:cNvPr>
+          <p:cNvCxnSpPr>
+            <a:cxnSpLocks/>
+          </p:cNvCxnSpPr>
+          <p:nvPr/>
+        </p:nvCxnSpPr>
+        <p:spPr>
+          <a:xfrm flipH="1" flipV="1">
+            <a:off x="700480" y="6071553"/>
+            <a:ext cx="1002814" cy="36044"/>
+          </a:xfrm>
+          <a:prstGeom prst="straightConnector1">
+            <a:avLst/>
+          </a:prstGeom>
+          <a:ln w="34925">
+            <a:solidFill>
+              <a:srgbClr val="FF0000"/>
+            </a:solidFill>
+            <a:tailEnd type="triangle" w="lg" len="lg"/>
+          </a:ln>
+        </p:spPr>
+        <p:style>
+          <a:lnRef idx="1">
+            <a:schemeClr val="accent1"/>
+          </a:lnRef>
+          <a:fillRef idx="0">
+            <a:schemeClr val="accent1"/>
+          </a:fillRef>
+          <a:effectRef idx="0">
+            <a:schemeClr val="accent1"/>
+          </a:effectRef>
+          <a:fontRef idx="minor">
+            <a:schemeClr val="tx1"/>
+          </a:fontRef>
+        </p:style>
+      </p:cxnSp>
+      <p:cxnSp>
+        <p:nvCxnSpPr>
+          <p:cNvPr id="21" name="Straight Arrow Connector 20">
+            <a:extLst>
+              <a:ext uri="{FF2B5EF4-FFF2-40B4-BE49-F238E27FC236}">
+                <a16:creationId xmlns:a16="http://schemas.microsoft.com/office/drawing/2014/main" id="{6770F31A-E695-6051-4378-24E321F46EC8}"/>
+              </a:ext>
+            </a:extLst>
+          </p:cNvPr>
+          <p:cNvCxnSpPr>
+            <a:cxnSpLocks/>
+          </p:cNvCxnSpPr>
+          <p:nvPr/>
+        </p:nvCxnSpPr>
+        <p:spPr>
+          <a:xfrm flipV="1">
+            <a:off x="1071242" y="5616049"/>
+            <a:ext cx="683016" cy="110387"/>
+          </a:xfrm>
+          <a:prstGeom prst="straightConnector1">
+            <a:avLst/>
+          </a:prstGeom>
+          <a:ln w="34925">
+            <a:solidFill>
+              <a:srgbClr val="FF0000"/>
+            </a:solidFill>
+            <a:tailEnd type="triangle" w="lg" len="lg"/>
+          </a:ln>
+        </p:spPr>
+        <p:style>
+          <a:lnRef idx="1">
+            <a:schemeClr val="accent1"/>
+          </a:lnRef>
+          <a:fillRef idx="0">
+            <a:schemeClr val="accent1"/>
+          </a:fillRef>
+          <a:effectRef idx="0">
+            <a:schemeClr val="accent1"/>
+          </a:effectRef>
+          <a:fontRef idx="minor">
+            <a:schemeClr val="tx1"/>
+          </a:fontRef>
+        </p:style>
+      </p:cxnSp>
+      <p:cxnSp>
+        <p:nvCxnSpPr>
+          <p:cNvPr id="24" name="Straight Arrow Connector 23">
+            <a:extLst>
+              <a:ext uri="{FF2B5EF4-FFF2-40B4-BE49-F238E27FC236}">
+                <a16:creationId xmlns:a16="http://schemas.microsoft.com/office/drawing/2014/main" id="{B9223C13-63B4-7854-7369-2408775687F4}"/>
+              </a:ext>
+            </a:extLst>
+          </p:cNvPr>
+          <p:cNvCxnSpPr>
+            <a:cxnSpLocks/>
+          </p:cNvCxnSpPr>
+          <p:nvPr/>
+        </p:nvCxnSpPr>
+        <p:spPr>
+          <a:xfrm>
+            <a:off x="1721224" y="5048379"/>
+            <a:ext cx="715040" cy="293636"/>
+          </a:xfrm>
+          <a:prstGeom prst="straightConnector1">
+            <a:avLst/>
+          </a:prstGeom>
+          <a:ln w="34925">
+            <a:solidFill>
+              <a:srgbClr val="FF0000"/>
+            </a:solidFill>
+            <a:tailEnd type="triangle" w="lg" len="lg"/>
+          </a:ln>
+        </p:spPr>
+        <p:style>
+          <a:lnRef idx="1">
+            <a:schemeClr val="accent1"/>
+          </a:lnRef>
+          <a:fillRef idx="0">
+            <a:schemeClr val="accent1"/>
+          </a:fillRef>
+          <a:effectRef idx="0">
+            <a:schemeClr val="accent1"/>
+          </a:effectRef>
+          <a:fontRef idx="minor">
+            <a:schemeClr val="tx1"/>
+          </a:fontRef>
+        </p:style>
+      </p:cxnSp>
+      <p:cxnSp>
+        <p:nvCxnSpPr>
+          <p:cNvPr id="28" name="Straight Arrow Connector 27">
+            <a:extLst>
+              <a:ext uri="{FF2B5EF4-FFF2-40B4-BE49-F238E27FC236}">
+                <a16:creationId xmlns:a16="http://schemas.microsoft.com/office/drawing/2014/main" id="{84F2B16F-2341-355B-5340-4DEDB94247BE}"/>
+              </a:ext>
+            </a:extLst>
+          </p:cNvPr>
+          <p:cNvCxnSpPr>
+            <a:cxnSpLocks/>
+          </p:cNvCxnSpPr>
+          <p:nvPr/>
+        </p:nvCxnSpPr>
+        <p:spPr>
+          <a:xfrm>
+            <a:off x="2419265" y="5432800"/>
+            <a:ext cx="133731" cy="420751"/>
+          </a:xfrm>
+          <a:prstGeom prst="straightConnector1">
+            <a:avLst/>
+          </a:prstGeom>
+          <a:ln w="34925">
+            <a:solidFill>
+              <a:srgbClr val="FF0000"/>
+            </a:solidFill>
+            <a:tailEnd type="triangle" w="lg" len="lg"/>
+          </a:ln>
+        </p:spPr>
+        <p:style>
+          <a:lnRef idx="1">
+            <a:schemeClr val="accent1"/>
+          </a:lnRef>
+          <a:fillRef idx="0">
+            <a:schemeClr val="accent1"/>
+          </a:fillRef>
+          <a:effectRef idx="0">
+            <a:schemeClr val="accent1"/>
+          </a:effectRef>
+          <a:fontRef idx="minor">
+            <a:schemeClr val="tx1"/>
+          </a:fontRef>
+        </p:style>
+      </p:cxnSp>
+      <p:cxnSp>
+        <p:nvCxnSpPr>
+          <p:cNvPr id="30" name="Straight Arrow Connector 29">
+            <a:extLst>
+              <a:ext uri="{FF2B5EF4-FFF2-40B4-BE49-F238E27FC236}">
+                <a16:creationId xmlns:a16="http://schemas.microsoft.com/office/drawing/2014/main" id="{87E030E8-B3E7-FD16-BEE7-CAE141468A8D}"/>
+              </a:ext>
+            </a:extLst>
+          </p:cNvPr>
+          <p:cNvCxnSpPr>
+            <a:cxnSpLocks/>
+          </p:cNvCxnSpPr>
+          <p:nvPr/>
+        </p:nvCxnSpPr>
+        <p:spPr>
+          <a:xfrm flipH="1">
+            <a:off x="1981200" y="6334780"/>
+            <a:ext cx="438065" cy="302003"/>
+          </a:xfrm>
+          <a:prstGeom prst="straightConnector1">
+            <a:avLst/>
+          </a:prstGeom>
+          <a:ln w="34925">
+            <a:solidFill>
+              <a:srgbClr val="FF0000"/>
+            </a:solidFill>
+            <a:tailEnd type="triangle" w="lg" len="lg"/>
+          </a:ln>
+        </p:spPr>
+        <p:style>
+          <a:lnRef idx="1">
+            <a:schemeClr val="accent1"/>
+          </a:lnRef>
+          <a:fillRef idx="0">
+            <a:schemeClr val="accent1"/>
+          </a:fillRef>
+          <a:effectRef idx="0">
+            <a:schemeClr val="accent1"/>
+          </a:effectRef>
+          <a:fontRef idx="minor">
+            <a:schemeClr val="tx1"/>
+          </a:fontRef>
+        </p:style>
+      </p:cxnSp>
+      <p:cxnSp>
+        <p:nvCxnSpPr>
+          <p:cNvPr id="35" name="Straight Arrow Connector 34">
+            <a:extLst>
+              <a:ext uri="{FF2B5EF4-FFF2-40B4-BE49-F238E27FC236}">
+                <a16:creationId xmlns:a16="http://schemas.microsoft.com/office/drawing/2014/main" id="{E26DB8EA-3B7B-22DC-8D1E-2A883C5858C6}"/>
+              </a:ext>
+            </a:extLst>
+          </p:cNvPr>
+          <p:cNvCxnSpPr>
+            <a:cxnSpLocks/>
+          </p:cNvCxnSpPr>
+          <p:nvPr/>
+        </p:nvCxnSpPr>
+        <p:spPr>
+          <a:xfrm flipH="1" flipV="1">
+            <a:off x="1089829" y="6418729"/>
+            <a:ext cx="470030" cy="158528"/>
+          </a:xfrm>
+          <a:prstGeom prst="straightConnector1">
+            <a:avLst/>
+          </a:prstGeom>
+          <a:ln w="34925">
+            <a:solidFill>
+              <a:srgbClr val="FF0000"/>
+            </a:solidFill>
+            <a:tailEnd type="triangle" w="lg" len="lg"/>
+          </a:ln>
+        </p:spPr>
+        <p:style>
+          <a:lnRef idx="1">
+            <a:schemeClr val="accent1"/>
+          </a:lnRef>
+          <a:fillRef idx="0">
+            <a:schemeClr val="accent1"/>
+          </a:fillRef>
+          <a:effectRef idx="0">
+            <a:schemeClr val="accent1"/>
+          </a:effectRef>
+          <a:fontRef idx="minor">
+            <a:schemeClr val="tx1"/>
+          </a:fontRef>
+        </p:style>
+      </p:cxnSp>
+      <p:cxnSp>
+        <p:nvCxnSpPr>
+          <p:cNvPr id="38" name="Straight Arrow Connector 37">
+            <a:extLst>
+              <a:ext uri="{FF2B5EF4-FFF2-40B4-BE49-F238E27FC236}">
+                <a16:creationId xmlns:a16="http://schemas.microsoft.com/office/drawing/2014/main" id="{0CCB8689-C304-183A-E083-CE6C15099B00}"/>
+              </a:ext>
+            </a:extLst>
+          </p:cNvPr>
+          <p:cNvCxnSpPr>
+            <a:cxnSpLocks/>
+          </p:cNvCxnSpPr>
+          <p:nvPr/>
+        </p:nvCxnSpPr>
+        <p:spPr>
+          <a:xfrm flipH="1" flipV="1">
+            <a:off x="80682" y="4898701"/>
+            <a:ext cx="1559859" cy="1489043"/>
+          </a:xfrm>
+          <a:prstGeom prst="straightConnector1">
+            <a:avLst/>
+          </a:prstGeom>
+          <a:ln w="73025">
+            <a:solidFill>
+              <a:srgbClr val="00B0F0">
+                <a:alpha val="55000"/>
+              </a:srgbClr>
+            </a:solidFill>
+            <a:tailEnd type="triangle" w="lg" len="lg"/>
+          </a:ln>
+        </p:spPr>
+        <p:style>
+          <a:lnRef idx="1">
+            <a:schemeClr val="accent1"/>
+          </a:lnRef>
+          <a:fillRef idx="0">
+            <a:schemeClr val="accent1"/>
+          </a:fillRef>
+          <a:effectRef idx="0">
+            <a:schemeClr val="accent1"/>
+          </a:effectRef>
+          <a:fontRef idx="minor">
+            <a:schemeClr val="tx1"/>
+          </a:fontRef>
+        </p:style>
+      </p:cxnSp>
+      <p:pic>
+        <p:nvPicPr>
+          <p:cNvPr id="43" name="Picture 42" descr="Power Flow belt replacement : r/johndeere">
+            <a:extLst>
+              <a:ext uri="{FF2B5EF4-FFF2-40B4-BE49-F238E27FC236}">
+                <a16:creationId xmlns:a16="http://schemas.microsoft.com/office/drawing/2014/main" id="{6468FC12-7412-6BA1-68AF-6DB25A3B9114}"/>
+              </a:ext>
+            </a:extLst>
+          </p:cNvPr>
+          <p:cNvPicPr>
+            <a:picLocks noChangeAspect="1"/>
+          </p:cNvPicPr>
+          <p:nvPr/>
+        </p:nvPicPr>
+        <p:blipFill>
+          <a:blip r:embed="rId6"/>
+          <a:stretch>
+            <a:fillRect/>
+          </a:stretch>
+        </p:blipFill>
+        <p:spPr>
+          <a:xfrm>
+            <a:off x="4872530" y="3976867"/>
+            <a:ext cx="2019300" cy="1003300"/>
+          </a:xfrm>
+          <a:prstGeom prst="rect">
+            <a:avLst/>
+          </a:prstGeom>
+          <a:ln>
+            <a:solidFill>
+              <a:srgbClr val="FF0000"/>
+            </a:solidFill>
+          </a:ln>
+        </p:spPr>
+      </p:pic>
+      <p:pic>
+        <p:nvPicPr>
+          <p:cNvPr id="44" name="Picture 43">
+            <a:extLst>
+              <a:ext uri="{FF2B5EF4-FFF2-40B4-BE49-F238E27FC236}">
+                <a16:creationId xmlns:a16="http://schemas.microsoft.com/office/drawing/2014/main" id="{FDC0F939-8202-8FB1-5055-3D1A91B9A536}"/>
+              </a:ext>
+            </a:extLst>
+          </p:cNvPr>
+          <p:cNvPicPr>
+            <a:picLocks noChangeAspect="1"/>
+          </p:cNvPicPr>
+          <p:nvPr/>
+        </p:nvPicPr>
+        <p:blipFill>
+          <a:blip r:embed="rId7"/>
+          <a:stretch>
+            <a:fillRect/>
+          </a:stretch>
+        </p:blipFill>
+        <p:spPr>
+          <a:xfrm>
+            <a:off x="2778404" y="4787273"/>
+            <a:ext cx="1930074" cy="1983265"/>
+          </a:xfrm>
+          <a:prstGeom prst="rect">
+            <a:avLst/>
+          </a:prstGeom>
+          <a:ln>
+            <a:solidFill>
+              <a:srgbClr val="FF0000"/>
+            </a:solidFill>
+          </a:ln>
         </p:spPr>
       </p:pic>
     </p:spTree>

--- a/tractor_jd_1025r_X758.pptx
+++ b/tractor_jd_1025r_X758.pptx
@@ -270,7 +270,7 @@
           <a:lstStyle/>
           <a:p>
             <a:fld id="{16286276-9013-2A43-82D1-BA4685C95117}" type="datetimeFigureOut">
-              <a:t>6/11/26</a:t>
+              <a:t>6/13/26</a:t>
             </a:fld>
             <a:endParaRPr lang="en-US"/>
           </a:p>
@@ -466,7 +466,7 @@
           <a:lstStyle/>
           <a:p>
             <a:fld id="{16286276-9013-2A43-82D1-BA4685C95117}" type="datetimeFigureOut">
-              <a:t>6/11/26</a:t>
+              <a:t>6/13/26</a:t>
             </a:fld>
             <a:endParaRPr lang="en-US"/>
           </a:p>
@@ -672,7 +672,7 @@
           <a:lstStyle/>
           <a:p>
             <a:fld id="{16286276-9013-2A43-82D1-BA4685C95117}" type="datetimeFigureOut">
-              <a:t>6/11/26</a:t>
+              <a:t>6/13/26</a:t>
             </a:fld>
             <a:endParaRPr lang="en-US"/>
           </a:p>
@@ -868,7 +868,7 @@
           <a:lstStyle/>
           <a:p>
             <a:fld id="{16286276-9013-2A43-82D1-BA4685C95117}" type="datetimeFigureOut">
-              <a:t>6/11/26</a:t>
+              <a:t>6/13/26</a:t>
             </a:fld>
             <a:endParaRPr lang="en-US"/>
           </a:p>
@@ -1141,7 +1141,7 @@
           <a:lstStyle/>
           <a:p>
             <a:fld id="{16286276-9013-2A43-82D1-BA4685C95117}" type="datetimeFigureOut">
-              <a:t>6/11/26</a:t>
+              <a:t>6/13/26</a:t>
             </a:fld>
             <a:endParaRPr lang="en-US"/>
           </a:p>
@@ -1404,7 +1404,7 @@
           <a:lstStyle/>
           <a:p>
             <a:fld id="{16286276-9013-2A43-82D1-BA4685C95117}" type="datetimeFigureOut">
-              <a:t>6/11/26</a:t>
+              <a:t>6/13/26</a:t>
             </a:fld>
             <a:endParaRPr lang="en-US"/>
           </a:p>
@@ -1814,7 +1814,7 @@
           <a:lstStyle/>
           <a:p>
             <a:fld id="{16286276-9013-2A43-82D1-BA4685C95117}" type="datetimeFigureOut">
-              <a:t>6/11/26</a:t>
+              <a:t>6/13/26</a:t>
             </a:fld>
             <a:endParaRPr lang="en-US"/>
           </a:p>
@@ -1953,7 +1953,7 @@
           <a:lstStyle/>
           <a:p>
             <a:fld id="{16286276-9013-2A43-82D1-BA4685C95117}" type="datetimeFigureOut">
-              <a:t>6/11/26</a:t>
+              <a:t>6/13/26</a:t>
             </a:fld>
             <a:endParaRPr lang="en-US"/>
           </a:p>
@@ -2064,7 +2064,7 @@
           <a:lstStyle/>
           <a:p>
             <a:fld id="{16286276-9013-2A43-82D1-BA4685C95117}" type="datetimeFigureOut">
-              <a:t>6/11/26</a:t>
+              <a:t>6/13/26</a:t>
             </a:fld>
             <a:endParaRPr lang="en-US"/>
           </a:p>
@@ -2373,7 +2373,7 @@
           <a:lstStyle/>
           <a:p>
             <a:fld id="{16286276-9013-2A43-82D1-BA4685C95117}" type="datetimeFigureOut">
-              <a:t>6/11/26</a:t>
+              <a:t>6/13/26</a:t>
             </a:fld>
             <a:endParaRPr lang="en-US"/>
           </a:p>
@@ -2659,7 +2659,7 @@
           <a:lstStyle/>
           <a:p>
             <a:fld id="{16286276-9013-2A43-82D1-BA4685C95117}" type="datetimeFigureOut">
-              <a:t>6/11/26</a:t>
+              <a:t>6/13/26</a:t>
             </a:fld>
             <a:endParaRPr lang="en-US"/>
           </a:p>
@@ -2898,7 +2898,7 @@
           </a:lstStyle>
           <a:p>
             <a:fld id="{16286276-9013-2A43-82D1-BA4685C95117}" type="datetimeFigureOut">
-              <a:t>6/11/26</a:t>
+              <a:t>6/13/26</a:t>
             </a:fld>
             <a:endParaRPr lang="en-US"/>
           </a:p>
@@ -4907,15 +4907,7 @@
             </a:pPr>
             <a:r>
               <a:rPr lang="en-US" sz="1200" dirty="0"/>
-              <a:t>There is a belt (a rubber loop) to pass rotation from the deck to the impeller. It goes from top sheave M on the deck (</a:t>
-            </a:r>
-            <a:r>
-              <a:rPr lang="en-US" sz="1200" dirty="0" err="1"/>
-              <a:t>horisontal</a:t>
-            </a:r>
-            <a:r>
-              <a:rPr lang="en-US" sz="1200" dirty="0"/>
-              <a:t> disk) to the (N) tensioner idler (top horizontal disk), then to the top side of impeller sheeve (O), then leaving from the down side of impeller sheeve (O) to the V-idler sheave P (the lower horizontal disk), and finally, back to the sheave M on the deck.</a:t>
+              <a:t>There is a belt (a rubber loop) to pass rotation from the deck to the impeller. It goes from top sheave M on the deck (horizontal disk) to the (N) tensioner idler (top horizontal disk), then to the top side of impeller sheeve (O), then leaving from the bottom side of impeller sheeve (O) to the V-idler sheave P (the lower horizontal disk), and finally, back to the sheave M on the deck.</a:t>
             </a:r>
           </a:p>
           <a:p>
@@ -5020,6 +5012,11 @@
           <a:prstGeom prst="rect">
             <a:avLst/>
           </a:prstGeom>
+          <a:ln>
+            <a:solidFill>
+              <a:srgbClr val="FF0000"/>
+            </a:solidFill>
+          </a:ln>
         </p:spPr>
       </p:pic>
       <p:pic>
@@ -5037,7 +5034,13 @@
           <p:nvPr/>
         </p:nvPicPr>
         <p:blipFill>
-          <a:blip r:embed="rId4"/>
+          <a:blip r:embed="rId4" cstate="email">
+            <a:extLst>
+              <a:ext uri="{28A0092B-C50C-407E-A947-70E740481C1C}">
+                <a14:useLocalDpi xmlns:a14="http://schemas.microsoft.com/office/drawing/2010/main"/>
+              </a:ext>
+            </a:extLst>
+          </a:blip>
           <a:stretch>
             <a:fillRect/>
           </a:stretch>
@@ -5050,6 +5053,11 @@
           <a:prstGeom prst="rect">
             <a:avLst/>
           </a:prstGeom>
+          <a:ln>
+            <a:solidFill>
+              <a:srgbClr val="FF0000"/>
+            </a:solidFill>
+          </a:ln>
         </p:spPr>
       </p:pic>
       <p:pic>
@@ -5067,7 +5075,13 @@
           <p:nvPr/>
         </p:nvPicPr>
         <p:blipFill>
-          <a:blip r:embed="rId5"/>
+          <a:blip r:embed="rId5" cstate="email">
+            <a:extLst>
+              <a:ext uri="{28A0092B-C50C-407E-A947-70E740481C1C}">
+                <a14:useLocalDpi xmlns:a14="http://schemas.microsoft.com/office/drawing/2010/main"/>
+              </a:ext>
+            </a:extLst>
+          </a:blip>
           <a:stretch>
             <a:fillRect/>
           </a:stretch>
@@ -5544,7 +5558,13 @@
           <p:nvPr/>
         </p:nvPicPr>
         <p:blipFill>
-          <a:blip r:embed="rId6"/>
+          <a:blip r:embed="rId6" cstate="email">
+            <a:extLst>
+              <a:ext uri="{28A0092B-C50C-407E-A947-70E740481C1C}">
+                <a14:useLocalDpi xmlns:a14="http://schemas.microsoft.com/office/drawing/2010/main"/>
+              </a:ext>
+            </a:extLst>
+          </a:blip>
           <a:stretch>
             <a:fillRect/>
           </a:stretch>
@@ -5579,7 +5599,13 @@
           <p:nvPr/>
         </p:nvPicPr>
         <p:blipFill>
-          <a:blip r:embed="rId7"/>
+          <a:blip r:embed="rId7" cstate="email">
+            <a:extLst>
+              <a:ext uri="{28A0092B-C50C-407E-A947-70E740481C1C}">
+                <a14:useLocalDpi xmlns:a14="http://schemas.microsoft.com/office/drawing/2010/main"/>
+              </a:ext>
+            </a:extLst>
+          </a:blip>
           <a:stretch>
             <a:fillRect/>
           </a:stretch>
@@ -7150,6 +7176,9 @@
                 <a:solidFill>
                   <a:srgbClr val="FF0000"/>
                 </a:solidFill>
+                <a:highlight>
+                  <a:srgbClr val="FFFF00"/>
+                </a:highlight>
                 <a:latin typeface="Menlo" panose="020B0609030804020204" pitchFamily="49" charset="0"/>
                 <a:ea typeface="Menlo" panose="020B0609030804020204" pitchFamily="49" charset="0"/>
                 <a:cs typeface="Menlo" panose="020B0609030804020204" pitchFamily="49" charset="0"/>
@@ -7158,6 +7187,9 @@
             </a:r>
             <a:r>
               <a:rPr lang="en-US" sz="1100" dirty="0">
+                <a:highlight>
+                  <a:srgbClr val="FFFF00"/>
+                </a:highlight>
                 <a:latin typeface="Menlo" panose="020B0609030804020204" pitchFamily="49" charset="0"/>
                 <a:ea typeface="Menlo" panose="020B0609030804020204" pitchFamily="49" charset="0"/>
                 <a:cs typeface="Menlo" panose="020B0609030804020204" pitchFamily="49" charset="0"/>
@@ -7166,6 +7198,9 @@
             </a:r>
             <a:r>
               <a:rPr lang="en-US" sz="1100" dirty="0">
+                <a:highlight>
+                  <a:srgbClr val="FFFF00"/>
+                </a:highlight>
                 <a:latin typeface="Menlo" panose="020B0609030804020204" pitchFamily="49" charset="0"/>
                 <a:ea typeface="Menlo" panose="020B0609030804020204" pitchFamily="49" charset="0"/>
                 <a:cs typeface="Menlo" panose="020B0609030804020204" pitchFamily="49" charset="0"/>
@@ -7177,6 +7212,9 @@
               <a:solidFill>
                 <a:srgbClr val="FF0000"/>
               </a:solidFill>
+              <a:highlight>
+                <a:srgbClr val="FFFF00"/>
+              </a:highlight>
               <a:latin typeface="Menlo" panose="020B0609030804020204" pitchFamily="49" charset="0"/>
               <a:ea typeface="Menlo" panose="020B0609030804020204" pitchFamily="49" charset="0"/>
               <a:cs typeface="Menlo" panose="020B0609030804020204" pitchFamily="49" charset="0"/>
@@ -7229,6 +7267,9 @@
                 <a:solidFill>
                   <a:srgbClr val="FF0000"/>
                 </a:solidFill>
+                <a:highlight>
+                  <a:srgbClr val="FFFF00"/>
+                </a:highlight>
                 <a:latin typeface="Menlo" panose="020B0609030804020204" pitchFamily="49" charset="0"/>
                 <a:ea typeface="Menlo" panose="020B0609030804020204" pitchFamily="49" charset="0"/>
                 <a:cs typeface="Menlo" panose="020B0609030804020204" pitchFamily="49" charset="0"/>
@@ -7237,6 +7278,9 @@
             </a:r>
             <a:r>
               <a:rPr lang="en-US" sz="1100" dirty="0">
+                <a:highlight>
+                  <a:srgbClr val="FFFF00"/>
+                </a:highlight>
                 <a:latin typeface="Menlo" panose="020B0609030804020204" pitchFamily="49" charset="0"/>
                 <a:ea typeface="Menlo" panose="020B0609030804020204" pitchFamily="49" charset="0"/>
                 <a:cs typeface="Menlo" panose="020B0609030804020204" pitchFamily="49" charset="0"/>
@@ -7245,6 +7289,9 @@
             </a:r>
             <a:r>
               <a:rPr lang="en-US" sz="1100" dirty="0">
+                <a:highlight>
+                  <a:srgbClr val="FFFF00"/>
+                </a:highlight>
                 <a:latin typeface="Menlo" panose="020B0609030804020204" pitchFamily="49" charset="0"/>
                 <a:ea typeface="Menlo" panose="020B0609030804020204" pitchFamily="49" charset="0"/>
                 <a:cs typeface="Menlo" panose="020B0609030804020204" pitchFamily="49" charset="0"/>
@@ -7253,6 +7300,9 @@
               <a:t>link</a:t>
             </a:r>
             <a:endParaRPr lang="en-US" sz="1100" dirty="0">
+              <a:highlight>
+                <a:srgbClr val="FFFF00"/>
+              </a:highlight>
               <a:latin typeface="Menlo" panose="020B0609030804020204" pitchFamily="49" charset="0"/>
               <a:ea typeface="Menlo" panose="020B0609030804020204" pitchFamily="49" charset="0"/>
               <a:cs typeface="Menlo" panose="020B0609030804020204" pitchFamily="49" charset="0"/>
@@ -7299,6 +7349,9 @@
                 <a:solidFill>
                   <a:srgbClr val="FF0000"/>
                 </a:solidFill>
+                <a:highlight>
+                  <a:srgbClr val="FFFF00"/>
+                </a:highlight>
                 <a:latin typeface="Menlo" panose="020B0609030804020204" pitchFamily="49" charset="0"/>
                 <a:ea typeface="Menlo" panose="020B0609030804020204" pitchFamily="49" charset="0"/>
                 <a:cs typeface="Menlo" panose="020B0609030804020204" pitchFamily="49" charset="0"/>
@@ -7307,6 +7360,9 @@
             </a:r>
             <a:r>
               <a:rPr lang="en-US" sz="1100" dirty="0">
+                <a:highlight>
+                  <a:srgbClr val="FFFF00"/>
+                </a:highlight>
                 <a:latin typeface="Menlo" panose="020B0609030804020204" pitchFamily="49" charset="0"/>
                 <a:ea typeface="Menlo" panose="020B0609030804020204" pitchFamily="49" charset="0"/>
                 <a:cs typeface="Menlo" panose="020B0609030804020204" pitchFamily="49" charset="0"/>
@@ -7315,6 +7371,9 @@
             </a:r>
             <a:r>
               <a:rPr lang="en-US" sz="1100" dirty="0">
+                <a:highlight>
+                  <a:srgbClr val="FFFF00"/>
+                </a:highlight>
                 <a:latin typeface="Menlo" panose="020B0609030804020204" pitchFamily="49" charset="0"/>
                 <a:ea typeface="Menlo" panose="020B0609030804020204" pitchFamily="49" charset="0"/>
                 <a:cs typeface="Menlo" panose="020B0609030804020204" pitchFamily="49" charset="0"/>
@@ -7323,6 +7382,9 @@
               <a:t>link</a:t>
             </a:r>
             <a:endParaRPr lang="en-US" sz="1100" dirty="0">
+              <a:highlight>
+                <a:srgbClr val="FFFF00"/>
+              </a:highlight>
               <a:latin typeface="Menlo" panose="020B0609030804020204" pitchFamily="49" charset="0"/>
               <a:ea typeface="Menlo" panose="020B0609030804020204" pitchFamily="49" charset="0"/>
               <a:cs typeface="Menlo" panose="020B0609030804020204" pitchFamily="49" charset="0"/>
@@ -8003,13 +8065,13 @@
           <p:nvPr>
             <p:extLst>
               <p:ext uri="{D42A27DB-BD31-4B8C-83A1-F6EECF244321}">
-                <p14:modId xmlns:p14="http://schemas.microsoft.com/office/powerpoint/2010/main" val="869364946"/>
+                <p14:modId xmlns:p14="http://schemas.microsoft.com/office/powerpoint/2010/main" val="364487740"/>
               </p:ext>
             </p:extLst>
           </p:nvPr>
         </p:nvGraphicFramePr>
         <p:xfrm>
-          <a:off x="3031066" y="4360333"/>
+          <a:off x="3008487" y="3208887"/>
           <a:ext cx="4876801" cy="1295400"/>
         </p:xfrm>
         <a:graphic>
@@ -8329,6 +8391,264 @@
               <a:t>/shop/p/little-bull-loader-front-end-loader-john-deere</a:t>
             </a:r>
             <a:endParaRPr lang="en-US" sz="1050" dirty="0"/>
+          </a:p>
+        </p:txBody>
+      </p:sp>
+      <p:sp>
+        <p:nvSpPr>
+          <p:cNvPr id="3" name="TextBox 2">
+            <a:extLst>
+              <a:ext uri="{FF2B5EF4-FFF2-40B4-BE49-F238E27FC236}">
+                <a16:creationId xmlns:a16="http://schemas.microsoft.com/office/drawing/2014/main" id="{459F5C18-3A7C-EF50-57D8-C10A8A58F4F7}"/>
+              </a:ext>
+            </a:extLst>
+          </p:cNvPr>
+          <p:cNvSpPr txBox="1"/>
+          <p:nvPr/>
+        </p:nvSpPr>
+        <p:spPr>
+          <a:xfrm>
+            <a:off x="2956439" y="5789710"/>
+            <a:ext cx="3483514" cy="538609"/>
+          </a:xfrm>
+          <a:prstGeom prst="rect">
+            <a:avLst/>
+          </a:prstGeom>
+          <a:solidFill>
+            <a:schemeClr val="accent4">
+              <a:lumMod val="20000"/>
+              <a:lumOff val="80000"/>
+            </a:schemeClr>
+          </a:solidFill>
+          <a:ln>
+            <a:solidFill>
+              <a:srgbClr val="FF0000"/>
+            </a:solidFill>
+          </a:ln>
+        </p:spPr>
+        <p:txBody>
+          <a:bodyPr wrap="square" rtlCol="0">
+            <a:spAutoFit/>
+          </a:bodyPr>
+          <a:lstStyle/>
+          <a:p>
+            <a:r>
+              <a:rPr lang="en-US" sz="1100" dirty="0"/>
+              <a:t>MIA885144 - Pressure relief valve (transaxle) - $465.71</a:t>
+            </a:r>
+          </a:p>
+          <a:p>
+            <a:r>
+              <a:rPr lang="en-US" sz="900" dirty="0">
+                <a:hlinkClick r:id="rId7"/>
+              </a:rPr>
+              <a:t>https://shop.deere.com/us/product/MIA885144%3A-Pressure-Relief-Valve/p/MIA885144</a:t>
+            </a:r>
+            <a:endParaRPr lang="en-US" sz="900" dirty="0"/>
+          </a:p>
+        </p:txBody>
+      </p:sp>
+      <p:pic>
+        <p:nvPicPr>
+          <p:cNvPr id="4" name="Picture 3">
+            <a:extLst>
+              <a:ext uri="{FF2B5EF4-FFF2-40B4-BE49-F238E27FC236}">
+                <a16:creationId xmlns:a16="http://schemas.microsoft.com/office/drawing/2014/main" id="{584A5AE7-D9C4-192A-D273-85C1704444CA}"/>
+              </a:ext>
+            </a:extLst>
+          </p:cNvPr>
+          <p:cNvPicPr>
+            <a:picLocks noChangeAspect="1"/>
+          </p:cNvPicPr>
+          <p:nvPr/>
+        </p:nvPicPr>
+        <p:blipFill>
+          <a:blip r:embed="rId8" cstate="email">
+            <a:extLst>
+              <a:ext uri="{28A0092B-C50C-407E-A947-70E740481C1C}">
+                <a14:useLocalDpi xmlns:a14="http://schemas.microsoft.com/office/drawing/2010/main"/>
+              </a:ext>
+            </a:extLst>
+          </a:blip>
+          <a:stretch>
+            <a:fillRect/>
+          </a:stretch>
+        </p:blipFill>
+        <p:spPr>
+          <a:xfrm>
+            <a:off x="6592528" y="5414181"/>
+            <a:ext cx="824808" cy="488373"/>
+          </a:xfrm>
+          <a:prstGeom prst="rect">
+            <a:avLst/>
+          </a:prstGeom>
+        </p:spPr>
+      </p:pic>
+      <p:pic>
+        <p:nvPicPr>
+          <p:cNvPr id="6" name="Picture 5" descr="John Deere Flow Control Hyd. Valve ...">
+            <a:extLst>
+              <a:ext uri="{FF2B5EF4-FFF2-40B4-BE49-F238E27FC236}">
+                <a16:creationId xmlns:a16="http://schemas.microsoft.com/office/drawing/2014/main" id="{25A78FD5-0D19-DF64-0963-DCF51F63F8AC}"/>
+              </a:ext>
+            </a:extLst>
+          </p:cNvPr>
+          <p:cNvPicPr>
+            <a:picLocks noChangeAspect="1"/>
+          </p:cNvPicPr>
+          <p:nvPr/>
+        </p:nvPicPr>
+        <p:blipFill>
+          <a:blip r:embed="rId9" cstate="email">
+            <a:extLst>
+              <a:ext uri="{28A0092B-C50C-407E-A947-70E740481C1C}">
+                <a14:useLocalDpi xmlns:a14="http://schemas.microsoft.com/office/drawing/2010/main"/>
+              </a:ext>
+            </a:extLst>
+          </a:blip>
+          <a:stretch>
+            <a:fillRect/>
+          </a:stretch>
+        </p:blipFill>
+        <p:spPr>
+          <a:xfrm>
+            <a:off x="6565893" y="4696926"/>
+            <a:ext cx="669677" cy="669677"/>
+          </a:xfrm>
+          <a:prstGeom prst="rect">
+            <a:avLst/>
+          </a:prstGeom>
+        </p:spPr>
+      </p:pic>
+      <p:pic>
+        <p:nvPicPr>
+          <p:cNvPr id="8" name="Picture 7">
+            <a:extLst>
+              <a:ext uri="{FF2B5EF4-FFF2-40B4-BE49-F238E27FC236}">
+                <a16:creationId xmlns:a16="http://schemas.microsoft.com/office/drawing/2014/main" id="{FB9A3F71-D43D-BAD6-2923-E7873ACA866B}"/>
+              </a:ext>
+            </a:extLst>
+          </p:cNvPr>
+          <p:cNvPicPr>
+            <a:picLocks noChangeAspect="1"/>
+          </p:cNvPicPr>
+          <p:nvPr/>
+        </p:nvPicPr>
+        <p:blipFill>
+          <a:blip r:embed="rId10" cstate="email">
+            <a:extLst>
+              <a:ext uri="{28A0092B-C50C-407E-A947-70E740481C1C}">
+                <a14:useLocalDpi xmlns:a14="http://schemas.microsoft.com/office/drawing/2010/main"/>
+              </a:ext>
+            </a:extLst>
+          </a:blip>
+          <a:stretch>
+            <a:fillRect/>
+          </a:stretch>
+        </p:blipFill>
+        <p:spPr>
+          <a:xfrm rot="16200000">
+            <a:off x="7380986" y="5211295"/>
+            <a:ext cx="609602" cy="2447373"/>
+          </a:xfrm>
+          <a:prstGeom prst="rect">
+            <a:avLst/>
+          </a:prstGeom>
+        </p:spPr>
+      </p:pic>
+      <p:sp>
+        <p:nvSpPr>
+          <p:cNvPr id="9" name="TextBox 8">
+            <a:extLst>
+              <a:ext uri="{FF2B5EF4-FFF2-40B4-BE49-F238E27FC236}">
+                <a16:creationId xmlns:a16="http://schemas.microsoft.com/office/drawing/2014/main" id="{3A813802-09D7-B715-19EF-6AAC05332000}"/>
+              </a:ext>
+            </a:extLst>
+          </p:cNvPr>
+          <p:cNvSpPr txBox="1"/>
+          <p:nvPr/>
+        </p:nvSpPr>
+        <p:spPr>
+          <a:xfrm>
+            <a:off x="2956439" y="4701072"/>
+            <a:ext cx="3490182" cy="523220"/>
+          </a:xfrm>
+          <a:prstGeom prst="rect">
+            <a:avLst/>
+          </a:prstGeom>
+          <a:solidFill>
+            <a:schemeClr val="accent4">
+              <a:lumMod val="20000"/>
+              <a:lumOff val="80000"/>
+            </a:schemeClr>
+          </a:solidFill>
+          <a:ln>
+            <a:solidFill>
+              <a:srgbClr val="FF0000"/>
+            </a:solidFill>
+          </a:ln>
+        </p:spPr>
+        <p:txBody>
+          <a:bodyPr wrap="square" rtlCol="0">
+            <a:spAutoFit/>
+          </a:bodyPr>
+          <a:lstStyle/>
+          <a:p>
+            <a:r>
+              <a:rPr lang="en-US" sz="1400" dirty="0"/>
+              <a:t>AM134625 - Flow control valve - $283.36</a:t>
+            </a:r>
+          </a:p>
+          <a:p>
+            <a:r>
+              <a:rPr lang="en-US" sz="1400" dirty="0"/>
+              <a:t>Close for mowing, open for using FL</a:t>
+            </a:r>
+          </a:p>
+        </p:txBody>
+      </p:sp>
+      <p:sp>
+        <p:nvSpPr>
+          <p:cNvPr id="10" name="TextBox 9">
+            <a:extLst>
+              <a:ext uri="{FF2B5EF4-FFF2-40B4-BE49-F238E27FC236}">
+                <a16:creationId xmlns:a16="http://schemas.microsoft.com/office/drawing/2014/main" id="{9C12FCA1-9A63-D6F0-3AED-5A05E1EAAC0C}"/>
+              </a:ext>
+            </a:extLst>
+          </p:cNvPr>
+          <p:cNvSpPr txBox="1"/>
+          <p:nvPr/>
+        </p:nvSpPr>
+        <p:spPr>
+          <a:xfrm>
+            <a:off x="2949771" y="5321603"/>
+            <a:ext cx="3490182" cy="307777"/>
+          </a:xfrm>
+          <a:prstGeom prst="rect">
+            <a:avLst/>
+          </a:prstGeom>
+          <a:solidFill>
+            <a:schemeClr val="accent4">
+              <a:lumMod val="20000"/>
+              <a:lumOff val="80000"/>
+            </a:schemeClr>
+          </a:solidFill>
+          <a:ln>
+            <a:solidFill>
+              <a:srgbClr val="FF0000"/>
+            </a:solidFill>
+          </a:ln>
+        </p:spPr>
+        <p:txBody>
+          <a:bodyPr wrap="square" rtlCol="0">
+            <a:spAutoFit/>
+          </a:bodyPr>
+          <a:lstStyle/>
+          <a:p>
+            <a:r>
+              <a:rPr lang="en-US" sz="1400" dirty="0"/>
+              <a:t>M146148 - neutral control rod - $50.73</a:t>
+            </a:r>
           </a:p>
         </p:txBody>
       </p:sp>

--- a/tractor_jd_1025r_X758.pptx
+++ b/tractor_jd_1025r_X758.pptx
@@ -5,19 +5,21 @@
     <p:sldMasterId id="2147483648" r:id="rId1"/>
   </p:sldMasterIdLst>
   <p:sldIdLst>
-    <p:sldId id="262" r:id="rId2"/>
-    <p:sldId id="258" r:id="rId3"/>
-    <p:sldId id="264" r:id="rId4"/>
-    <p:sldId id="266" r:id="rId5"/>
-    <p:sldId id="270" r:id="rId6"/>
+    <p:sldId id="264" r:id="rId2"/>
+    <p:sldId id="273" r:id="rId3"/>
+    <p:sldId id="266" r:id="rId4"/>
+    <p:sldId id="270" r:id="rId5"/>
+    <p:sldId id="274" r:id="rId6"/>
     <p:sldId id="269" r:id="rId7"/>
     <p:sldId id="261" r:id="rId8"/>
     <p:sldId id="268" r:id="rId9"/>
-    <p:sldId id="267" r:id="rId10"/>
-    <p:sldId id="271" r:id="rId11"/>
-    <p:sldId id="265" r:id="rId12"/>
-    <p:sldId id="272" r:id="rId13"/>
-    <p:sldId id="263" r:id="rId14"/>
+    <p:sldId id="271" r:id="rId10"/>
+    <p:sldId id="272" r:id="rId11"/>
+    <p:sldId id="267" r:id="rId12"/>
+    <p:sldId id="262" r:id="rId13"/>
+    <p:sldId id="258" r:id="rId14"/>
+    <p:sldId id="265" r:id="rId15"/>
+    <p:sldId id="263" r:id="rId16"/>
   </p:sldIdLst>
   <p:sldSz cx="12192000" cy="6858000"/>
   <p:notesSz cx="6858000" cy="9144000"/>
@@ -270,7 +272,7 @@
           <a:lstStyle/>
           <a:p>
             <a:fld id="{16286276-9013-2A43-82D1-BA4685C95117}" type="datetimeFigureOut">
-              <a:t>6/13/26</a:t>
+              <a:t>6/17/26</a:t>
             </a:fld>
             <a:endParaRPr lang="en-US"/>
           </a:p>
@@ -466,7 +468,7 @@
           <a:lstStyle/>
           <a:p>
             <a:fld id="{16286276-9013-2A43-82D1-BA4685C95117}" type="datetimeFigureOut">
-              <a:t>6/13/26</a:t>
+              <a:t>6/17/26</a:t>
             </a:fld>
             <a:endParaRPr lang="en-US"/>
           </a:p>
@@ -672,7 +674,7 @@
           <a:lstStyle/>
           <a:p>
             <a:fld id="{16286276-9013-2A43-82D1-BA4685C95117}" type="datetimeFigureOut">
-              <a:t>6/13/26</a:t>
+              <a:t>6/17/26</a:t>
             </a:fld>
             <a:endParaRPr lang="en-US"/>
           </a:p>
@@ -868,7 +870,7 @@
           <a:lstStyle/>
           <a:p>
             <a:fld id="{16286276-9013-2A43-82D1-BA4685C95117}" type="datetimeFigureOut">
-              <a:t>6/13/26</a:t>
+              <a:t>6/17/26</a:t>
             </a:fld>
             <a:endParaRPr lang="en-US"/>
           </a:p>
@@ -1141,7 +1143,7 @@
           <a:lstStyle/>
           <a:p>
             <a:fld id="{16286276-9013-2A43-82D1-BA4685C95117}" type="datetimeFigureOut">
-              <a:t>6/13/26</a:t>
+              <a:t>6/17/26</a:t>
             </a:fld>
             <a:endParaRPr lang="en-US"/>
           </a:p>
@@ -1404,7 +1406,7 @@
           <a:lstStyle/>
           <a:p>
             <a:fld id="{16286276-9013-2A43-82D1-BA4685C95117}" type="datetimeFigureOut">
-              <a:t>6/13/26</a:t>
+              <a:t>6/17/26</a:t>
             </a:fld>
             <a:endParaRPr lang="en-US"/>
           </a:p>
@@ -1814,7 +1816,7 @@
           <a:lstStyle/>
           <a:p>
             <a:fld id="{16286276-9013-2A43-82D1-BA4685C95117}" type="datetimeFigureOut">
-              <a:t>6/13/26</a:t>
+              <a:t>6/17/26</a:t>
             </a:fld>
             <a:endParaRPr lang="en-US"/>
           </a:p>
@@ -1953,7 +1955,7 @@
           <a:lstStyle/>
           <a:p>
             <a:fld id="{16286276-9013-2A43-82D1-BA4685C95117}" type="datetimeFigureOut">
-              <a:t>6/13/26</a:t>
+              <a:t>6/17/26</a:t>
             </a:fld>
             <a:endParaRPr lang="en-US"/>
           </a:p>
@@ -2064,7 +2066,7 @@
           <a:lstStyle/>
           <a:p>
             <a:fld id="{16286276-9013-2A43-82D1-BA4685C95117}" type="datetimeFigureOut">
-              <a:t>6/13/26</a:t>
+              <a:t>6/17/26</a:t>
             </a:fld>
             <a:endParaRPr lang="en-US"/>
           </a:p>
@@ -2373,7 +2375,7 @@
           <a:lstStyle/>
           <a:p>
             <a:fld id="{16286276-9013-2A43-82D1-BA4685C95117}" type="datetimeFigureOut">
-              <a:t>6/13/26</a:t>
+              <a:t>6/17/26</a:t>
             </a:fld>
             <a:endParaRPr lang="en-US"/>
           </a:p>
@@ -2659,7 +2661,7 @@
           <a:lstStyle/>
           <a:p>
             <a:fld id="{16286276-9013-2A43-82D1-BA4685C95117}" type="datetimeFigureOut">
-              <a:t>6/13/26</a:t>
+              <a:t>6/17/26</a:t>
             </a:fld>
             <a:endParaRPr lang="en-US"/>
           </a:p>
@@ -2898,7 +2900,7 @@
           </a:lstStyle>
           <a:p>
             <a:fld id="{16286276-9013-2A43-82D1-BA4685C95117}" type="datetimeFigureOut">
-              <a:t>6/13/26</a:t>
+              <a:t>6/17/26</a:t>
             </a:fld>
             <a:endParaRPr lang="en-US"/>
           </a:p>
@@ -3302,787 +3304,10 @@
   <p:cSld>
     <p:spTree>
       <p:nvGrpSpPr>
-        <p:cNvPr id="1" name=""/>
-        <p:cNvGrpSpPr/>
-        <p:nvPr/>
-      </p:nvGrpSpPr>
-      <p:grpSpPr>
-        <a:xfrm>
-          <a:off x="0" y="0"/>
-          <a:ext cx="0" cy="0"/>
-          <a:chOff x="0" y="0"/>
-          <a:chExt cx="0" cy="0"/>
-        </a:xfrm>
-      </p:grpSpPr>
-      <p:sp>
-        <p:nvSpPr>
-          <p:cNvPr id="2" name="TextBox 1">
-            <a:extLst>
-              <a:ext uri="{FF2B5EF4-FFF2-40B4-BE49-F238E27FC236}">
-                <a16:creationId xmlns:a16="http://schemas.microsoft.com/office/drawing/2014/main" id="{775BBD15-AEC2-1815-2347-A5BB8F308263}"/>
-              </a:ext>
-            </a:extLst>
-          </p:cNvPr>
-          <p:cNvSpPr txBox="1"/>
-          <p:nvPr/>
-        </p:nvSpPr>
-        <p:spPr>
-          <a:xfrm>
-            <a:off x="0" y="0"/>
-            <a:ext cx="4434212" cy="1200329"/>
-          </a:xfrm>
-          <a:prstGeom prst="rect">
-            <a:avLst/>
-          </a:prstGeom>
-          <a:noFill/>
-        </p:spPr>
-        <p:txBody>
-          <a:bodyPr wrap="square" rtlCol="0">
-            <a:spAutoFit/>
-          </a:bodyPr>
-          <a:lstStyle/>
-          <a:p>
-            <a:r>
-              <a:rPr lang="en-US" sz="2400" b="1" dirty="0"/>
-              <a:t>John Deere </a:t>
-            </a:r>
-            <a:r>
-              <a:rPr lang="en-US" sz="2400" b="1" i="0" dirty="0">
-                <a:solidFill>
-                  <a:srgbClr val="333333"/>
-                </a:solidFill>
-                <a:effectLst/>
-              </a:rPr>
-              <a:t>Sub-Compact Tractor </a:t>
-            </a:r>
-          </a:p>
-          <a:p>
-            <a:r>
-              <a:rPr lang="en-US" sz="1200" b="1" i="0" dirty="0">
-                <a:solidFill>
-                  <a:srgbClr val="FF0000"/>
-                </a:solidFill>
-                <a:effectLst/>
-              </a:rPr>
-              <a:t>Prices in 2023:</a:t>
-            </a:r>
-          </a:p>
-          <a:p>
-            <a:r>
-              <a:rPr lang="en-US" sz="1200" b="1" i="0" dirty="0">
-                <a:solidFill>
-                  <a:srgbClr val="FF0000"/>
-                </a:solidFill>
-                <a:effectLst/>
-              </a:rPr>
-              <a:t>1023E - $15,600. </a:t>
-            </a:r>
-          </a:p>
-          <a:p>
-            <a:r>
-              <a:rPr lang="en-US" sz="1200" b="1" dirty="0">
-                <a:solidFill>
-                  <a:srgbClr val="FF0000"/>
-                </a:solidFill>
-              </a:rPr>
-              <a:t>1025R - $18,400 </a:t>
-            </a:r>
-          </a:p>
-          <a:p>
-            <a:r>
-              <a:rPr lang="en-US" sz="1200" b="1" dirty="0">
-                <a:solidFill>
-                  <a:srgbClr val="FF0000"/>
-                </a:solidFill>
-              </a:rPr>
-              <a:t>2025R - bigger wheels, longer, heavier)</a:t>
-            </a:r>
-          </a:p>
-        </p:txBody>
-      </p:sp>
-      <p:pic>
-        <p:nvPicPr>
-          <p:cNvPr id="1028" name="Picture 4" descr="A Review of the Key Features of the John Deere 1023E Sub-Compact Tractor">
-            <a:extLst>
-              <a:ext uri="{FF2B5EF4-FFF2-40B4-BE49-F238E27FC236}">
-                <a16:creationId xmlns:a16="http://schemas.microsoft.com/office/drawing/2014/main" id="{6F3D58B2-F45F-3598-9B8F-5F056C3FBB92}"/>
-              </a:ext>
-            </a:extLst>
-          </p:cNvPr>
-          <p:cNvPicPr>
-            <a:picLocks noChangeAspect="1" noChangeArrowheads="1"/>
-          </p:cNvPicPr>
-          <p:nvPr/>
-        </p:nvPicPr>
-        <p:blipFill>
-          <a:blip r:embed="rId2">
-            <a:extLst>
-              <a:ext uri="{28A0092B-C50C-407E-A947-70E740481C1C}">
-                <a14:useLocalDpi xmlns:a14="http://schemas.microsoft.com/office/drawing/2010/main"/>
-              </a:ext>
-            </a:extLst>
-          </a:blip>
-          <a:srcRect/>
-          <a:stretch>
-            <a:fillRect/>
-          </a:stretch>
-        </p:blipFill>
-        <p:spPr bwMode="auto">
-          <a:xfrm>
-            <a:off x="9429537" y="2987093"/>
-            <a:ext cx="2652054" cy="1901473"/>
-          </a:xfrm>
-          <a:prstGeom prst="rect">
-            <a:avLst/>
-          </a:prstGeom>
-          <a:noFill/>
-          <a:ln>
-            <a:solidFill>
-              <a:srgbClr val="FF0000"/>
-            </a:solidFill>
-          </a:ln>
-          <a:extLst>
-            <a:ext uri="{909E8E84-426E-40DD-AFC4-6F175D3DCCD1}">
-              <a14:hiddenFill xmlns:a14="http://schemas.microsoft.com/office/drawing/2010/main">
-                <a:solidFill>
-                  <a:srgbClr val="FFFFFF"/>
-                </a:solidFill>
-              </a14:hiddenFill>
-            </a:ext>
-          </a:extLst>
-        </p:spPr>
-      </p:pic>
-      <p:sp>
-        <p:nvSpPr>
-          <p:cNvPr id="9" name="TextBox 8">
-            <a:extLst>
-              <a:ext uri="{FF2B5EF4-FFF2-40B4-BE49-F238E27FC236}">
-                <a16:creationId xmlns:a16="http://schemas.microsoft.com/office/drawing/2014/main" id="{87F2F999-0791-BA74-78AD-0B5B443629CA}"/>
-              </a:ext>
-            </a:extLst>
-          </p:cNvPr>
-          <p:cNvSpPr txBox="1"/>
-          <p:nvPr/>
-        </p:nvSpPr>
-        <p:spPr>
-          <a:xfrm>
-            <a:off x="245841" y="1520645"/>
-            <a:ext cx="3630511" cy="3416320"/>
-          </a:xfrm>
-          <a:prstGeom prst="rect">
-            <a:avLst/>
-          </a:prstGeom>
-          <a:solidFill>
-            <a:schemeClr val="accent4">
-              <a:lumMod val="20000"/>
-              <a:lumOff val="80000"/>
-            </a:schemeClr>
-          </a:solidFill>
-          <a:ln>
-            <a:solidFill>
-              <a:srgbClr val="FF0000"/>
-            </a:solidFill>
-          </a:ln>
-        </p:spPr>
-        <p:txBody>
-          <a:bodyPr wrap="square" rtlCol="0">
-            <a:spAutoFit/>
-          </a:bodyPr>
-          <a:lstStyle/>
-          <a:p>
-            <a:r>
-              <a:rPr lang="en-US" dirty="0"/>
-              <a:t>Engine - </a:t>
-            </a:r>
-            <a:r>
-              <a:rPr lang="en-US" dirty="0">
-                <a:solidFill>
-                  <a:srgbClr val="FF0000"/>
-                </a:solidFill>
-              </a:rPr>
-              <a:t>diesel</a:t>
-            </a:r>
-            <a:r>
-              <a:rPr lang="en-US" dirty="0"/>
-              <a:t> , 21.5 or 24 hp</a:t>
-            </a:r>
-          </a:p>
-          <a:p>
-            <a:r>
-              <a:rPr lang="en-US" dirty="0"/>
-              <a:t>PTO – 14.5 or 17.2 hp</a:t>
-            </a:r>
-          </a:p>
-          <a:p>
-            <a:r>
-              <a:rPr lang="en-US" dirty="0"/>
-              <a:t>weight: 610 kg or 654 kg</a:t>
-            </a:r>
-          </a:p>
-          <a:p>
-            <a:r>
-              <a:rPr lang="en-US" dirty="0"/>
-              <a:t>mower deck, 120R loader, ...</a:t>
-            </a:r>
-          </a:p>
-          <a:p>
-            <a:endParaRPr lang="en-US" dirty="0"/>
-          </a:p>
-          <a:p>
-            <a:r>
-              <a:rPr lang="en-US" dirty="0"/>
-              <a:t>1025R is better – more PTO power, can use 3-point hitch implement, PTO precision handling, better seat, better steering</a:t>
-            </a:r>
-          </a:p>
-          <a:p>
-            <a:endParaRPr lang="en-US" dirty="0"/>
-          </a:p>
-          <a:p>
-            <a:r>
-              <a:rPr lang="en-US" dirty="0"/>
-              <a:t>1025R base weight – 1,440 </a:t>
-            </a:r>
-            <a:r>
-              <a:rPr lang="en-US" dirty="0" err="1"/>
-              <a:t>lbs</a:t>
-            </a:r>
-            <a:endParaRPr lang="en-US" dirty="0"/>
-          </a:p>
-          <a:p>
-            <a:r>
-              <a:rPr lang="en-US" dirty="0"/>
-              <a:t>(compare with 805 </a:t>
-            </a:r>
-            <a:r>
-              <a:rPr lang="en-US" dirty="0" err="1"/>
-              <a:t>lbs</a:t>
-            </a:r>
-            <a:r>
-              <a:rPr lang="en-US" dirty="0"/>
-              <a:t> for jd-425)</a:t>
-            </a:r>
-          </a:p>
-        </p:txBody>
-      </p:sp>
-      <p:sp>
-        <p:nvSpPr>
-          <p:cNvPr id="10" name="TextBox 9">
-            <a:extLst>
-              <a:ext uri="{FF2B5EF4-FFF2-40B4-BE49-F238E27FC236}">
-                <a16:creationId xmlns:a16="http://schemas.microsoft.com/office/drawing/2014/main" id="{9944A156-B590-1201-FCB9-1A6AB95CC9B7}"/>
-              </a:ext>
-            </a:extLst>
-          </p:cNvPr>
-          <p:cNvSpPr txBox="1"/>
-          <p:nvPr/>
-        </p:nvSpPr>
-        <p:spPr>
-          <a:xfrm>
-            <a:off x="5950334" y="76238"/>
-            <a:ext cx="6138100" cy="646331"/>
-          </a:xfrm>
-          <a:prstGeom prst="rect">
-            <a:avLst/>
-          </a:prstGeom>
-          <a:noFill/>
-        </p:spPr>
-        <p:txBody>
-          <a:bodyPr wrap="square" rtlCol="0">
-            <a:spAutoFit/>
-          </a:bodyPr>
-          <a:lstStyle/>
-          <a:p>
-            <a:r>
-              <a:rPr lang="en-US" sz="1200" dirty="0">
-                <a:hlinkClick r:id="rId3"/>
-              </a:rPr>
-              <a:t>https://</a:t>
-            </a:r>
-            <a:r>
-              <a:rPr lang="en-US" sz="1200" dirty="0" err="1">
-                <a:hlinkClick r:id="rId3"/>
-              </a:rPr>
-              <a:t>www.deere.com</a:t>
-            </a:r>
-            <a:r>
-              <a:rPr lang="en-US" sz="1200" dirty="0">
-                <a:hlinkClick r:id="rId3"/>
-              </a:rPr>
-              <a:t>/</a:t>
-            </a:r>
-            <a:r>
-              <a:rPr lang="en-US" sz="1200" dirty="0" err="1">
-                <a:hlinkClick r:id="rId3"/>
-              </a:rPr>
-              <a:t>en</a:t>
-            </a:r>
-            <a:r>
-              <a:rPr lang="en-US" sz="1200" dirty="0">
-                <a:hlinkClick r:id="rId3"/>
-              </a:rPr>
-              <a:t>/tractors/compact-tractors/1-series-sub-compact-tractors/1023e/</a:t>
-            </a:r>
-            <a:endParaRPr lang="en-US" sz="1200" dirty="0"/>
-          </a:p>
-          <a:p>
-            <a:r>
-              <a:rPr lang="en-US" sz="1200" dirty="0">
-                <a:hlinkClick r:id="rId4"/>
-              </a:rPr>
-              <a:t>https://</a:t>
-            </a:r>
-            <a:r>
-              <a:rPr lang="en-US" sz="1200" dirty="0" err="1">
-                <a:hlinkClick r:id="rId4"/>
-              </a:rPr>
-              <a:t>www.deere.com</a:t>
-            </a:r>
-            <a:r>
-              <a:rPr lang="en-US" sz="1200" dirty="0">
-                <a:hlinkClick r:id="rId4"/>
-              </a:rPr>
-              <a:t>/</a:t>
-            </a:r>
-            <a:r>
-              <a:rPr lang="en-US" sz="1200" dirty="0" err="1">
-                <a:hlinkClick r:id="rId4"/>
-              </a:rPr>
-              <a:t>en</a:t>
-            </a:r>
-            <a:r>
-              <a:rPr lang="en-US" sz="1200" dirty="0">
-                <a:hlinkClick r:id="rId4"/>
-              </a:rPr>
-              <a:t>/tractors/compact-tractors/1-series-sub-compact-tractors/1025r/</a:t>
-            </a:r>
-            <a:endParaRPr lang="en-US" sz="1200" dirty="0"/>
-          </a:p>
-          <a:p>
-            <a:r>
-              <a:rPr lang="en-US" sz="1200" dirty="0">
-                <a:hlinkClick r:id="rId5"/>
-              </a:rPr>
-              <a:t>https://www.youtube.com/watch?v=TeHIpRNJ3LU</a:t>
-            </a:r>
-            <a:endParaRPr lang="en-US" sz="1200" dirty="0"/>
-          </a:p>
-        </p:txBody>
-      </p:sp>
-      <p:pic>
-        <p:nvPicPr>
-          <p:cNvPr id="1030" name="Picture 6" descr="1023E Compact Utility Tractor | Explore John Deere">
-            <a:extLst>
-              <a:ext uri="{FF2B5EF4-FFF2-40B4-BE49-F238E27FC236}">
-                <a16:creationId xmlns:a16="http://schemas.microsoft.com/office/drawing/2014/main" id="{ECD513EA-4836-83C9-A47F-D2F269773E44}"/>
-              </a:ext>
-            </a:extLst>
-          </p:cNvPr>
-          <p:cNvPicPr>
-            <a:picLocks noChangeAspect="1" noChangeArrowheads="1"/>
-          </p:cNvPicPr>
-          <p:nvPr/>
-        </p:nvPicPr>
-        <p:blipFill rotWithShape="1">
-          <a:blip r:embed="rId6" cstate="email">
-            <a:extLst>
-              <a:ext uri="{28A0092B-C50C-407E-A947-70E740481C1C}">
-                <a14:useLocalDpi xmlns:a14="http://schemas.microsoft.com/office/drawing/2010/main"/>
-              </a:ext>
-            </a:extLst>
-          </a:blip>
-          <a:srcRect/>
-          <a:stretch/>
-        </p:blipFill>
-        <p:spPr bwMode="auto">
-          <a:xfrm>
-            <a:off x="3940712" y="1519149"/>
-            <a:ext cx="1556574" cy="1435286"/>
-          </a:xfrm>
-          <a:prstGeom prst="rect">
-            <a:avLst/>
-          </a:prstGeom>
-          <a:noFill/>
-          <a:ln>
-            <a:solidFill>
-              <a:srgbClr val="FF0000"/>
-            </a:solidFill>
-          </a:ln>
-          <a:extLst>
-            <a:ext uri="{909E8E84-426E-40DD-AFC4-6F175D3DCCD1}">
-              <a14:hiddenFill xmlns:a14="http://schemas.microsoft.com/office/drawing/2010/main">
-                <a:solidFill>
-                  <a:srgbClr val="FFFFFF"/>
-                </a:solidFill>
-              </a14:hiddenFill>
-            </a:ext>
-          </a:extLst>
-        </p:spPr>
-      </p:pic>
-      <p:pic>
-        <p:nvPicPr>
-          <p:cNvPr id="1034" name="Picture 10" descr="John Deere 1023E Sub-Compact Tractor | wordpress.soegel.de">
-            <a:extLst>
-              <a:ext uri="{FF2B5EF4-FFF2-40B4-BE49-F238E27FC236}">
-                <a16:creationId xmlns:a16="http://schemas.microsoft.com/office/drawing/2014/main" id="{70ED0C30-7549-F8BA-D4CA-6CFCE8D6E9BC}"/>
-              </a:ext>
-            </a:extLst>
-          </p:cNvPr>
-          <p:cNvPicPr>
-            <a:picLocks noChangeAspect="1" noChangeArrowheads="1"/>
-          </p:cNvPicPr>
-          <p:nvPr/>
-        </p:nvPicPr>
-        <p:blipFill>
-          <a:blip r:embed="rId7" cstate="email">
-            <a:extLst>
-              <a:ext uri="{28A0092B-C50C-407E-A947-70E740481C1C}">
-                <a14:useLocalDpi xmlns:a14="http://schemas.microsoft.com/office/drawing/2010/main"/>
-              </a:ext>
-            </a:extLst>
-          </a:blip>
-          <a:srcRect/>
-          <a:stretch>
-            <a:fillRect/>
-          </a:stretch>
-        </p:blipFill>
-        <p:spPr bwMode="auto">
-          <a:xfrm>
-            <a:off x="3150024" y="5050814"/>
-            <a:ext cx="2459435" cy="1756739"/>
-          </a:xfrm>
-          <a:prstGeom prst="rect">
-            <a:avLst/>
-          </a:prstGeom>
-          <a:noFill/>
-          <a:ln>
-            <a:solidFill>
-              <a:srgbClr val="FF0000"/>
-            </a:solidFill>
-          </a:ln>
-          <a:extLst>
-            <a:ext uri="{909E8E84-426E-40DD-AFC4-6F175D3DCCD1}">
-              <a14:hiddenFill xmlns:a14="http://schemas.microsoft.com/office/drawing/2010/main">
-                <a:solidFill>
-                  <a:srgbClr val="FFFFFF"/>
-                </a:solidFill>
-              </a14:hiddenFill>
-            </a:ext>
-          </a:extLst>
-        </p:spPr>
-      </p:pic>
-      <p:pic>
-        <p:nvPicPr>
-          <p:cNvPr id="1036" name="Picture 12" descr="Marissa Mann on X: &quot;Anybody in Twitter-land looking for a small acreage  tractor? We're looking to sell ours to upgrade to something larger so we  can move round bales for my hay">
-            <a:extLst>
-              <a:ext uri="{FF2B5EF4-FFF2-40B4-BE49-F238E27FC236}">
-                <a16:creationId xmlns:a16="http://schemas.microsoft.com/office/drawing/2014/main" id="{E69E1B8C-C34E-819C-34CF-E2A2400F22CF}"/>
-              </a:ext>
-            </a:extLst>
-          </p:cNvPr>
-          <p:cNvPicPr>
-            <a:picLocks noChangeAspect="1" noChangeArrowheads="1"/>
-          </p:cNvPicPr>
-          <p:nvPr/>
-        </p:nvPicPr>
-        <p:blipFill>
-          <a:blip r:embed="rId8" cstate="email">
-            <a:extLst>
-              <a:ext uri="{28A0092B-C50C-407E-A947-70E740481C1C}">
-                <a14:useLocalDpi xmlns:a14="http://schemas.microsoft.com/office/drawing/2010/main"/>
-              </a:ext>
-            </a:extLst>
-          </a:blip>
-          <a:srcRect/>
-          <a:stretch>
-            <a:fillRect/>
-          </a:stretch>
-        </p:blipFill>
-        <p:spPr bwMode="auto">
-          <a:xfrm>
-            <a:off x="9233584" y="976760"/>
-            <a:ext cx="2854850" cy="1901473"/>
-          </a:xfrm>
-          <a:prstGeom prst="rect">
-            <a:avLst/>
-          </a:prstGeom>
-          <a:noFill/>
-          <a:ln>
-            <a:solidFill>
-              <a:srgbClr val="FF0000"/>
-            </a:solidFill>
-          </a:ln>
-          <a:extLst>
-            <a:ext uri="{909E8E84-426E-40DD-AFC4-6F175D3DCCD1}">
-              <a14:hiddenFill xmlns:a14="http://schemas.microsoft.com/office/drawing/2010/main">
-                <a:solidFill>
-                  <a:srgbClr val="FFFFFF"/>
-                </a:solidFill>
-              </a14:hiddenFill>
-            </a:ext>
-          </a:extLst>
-        </p:spPr>
-      </p:pic>
-      <p:pic>
-        <p:nvPicPr>
-          <p:cNvPr id="1038" name="Picture 14" descr="John Deere 1023e backhoe usage for myself and the boys - YouTube">
-            <a:extLst>
-              <a:ext uri="{FF2B5EF4-FFF2-40B4-BE49-F238E27FC236}">
-                <a16:creationId xmlns:a16="http://schemas.microsoft.com/office/drawing/2014/main" id="{65AE8BB0-FA56-E493-B5AA-349B09F298D3}"/>
-              </a:ext>
-            </a:extLst>
-          </p:cNvPr>
-          <p:cNvPicPr>
-            <a:picLocks noChangeAspect="1" noChangeArrowheads="1"/>
-          </p:cNvPicPr>
-          <p:nvPr/>
-        </p:nvPicPr>
-        <p:blipFill rotWithShape="1">
-          <a:blip r:embed="rId9" cstate="email">
-            <a:extLst>
-              <a:ext uri="{28A0092B-C50C-407E-A947-70E740481C1C}">
-                <a14:useLocalDpi xmlns:a14="http://schemas.microsoft.com/office/drawing/2010/main"/>
-              </a:ext>
-            </a:extLst>
-          </a:blip>
-          <a:srcRect/>
-          <a:stretch/>
-        </p:blipFill>
-        <p:spPr bwMode="auto">
-          <a:xfrm>
-            <a:off x="3941472" y="2998351"/>
-            <a:ext cx="3733458" cy="1938614"/>
-          </a:xfrm>
-          <a:prstGeom prst="rect">
-            <a:avLst/>
-          </a:prstGeom>
-          <a:noFill/>
-          <a:ln>
-            <a:solidFill>
-              <a:srgbClr val="FF0000"/>
-            </a:solidFill>
-          </a:ln>
-          <a:extLst>
-            <a:ext uri="{909E8E84-426E-40DD-AFC4-6F175D3DCCD1}">
-              <a14:hiddenFill xmlns:a14="http://schemas.microsoft.com/office/drawing/2010/main">
-                <a:solidFill>
-                  <a:srgbClr val="FFFFFF"/>
-                </a:solidFill>
-              </a14:hiddenFill>
-            </a:ext>
-          </a:extLst>
-        </p:spPr>
-      </p:pic>
-      <p:sp>
-        <p:nvSpPr>
-          <p:cNvPr id="3" name="TextBox 2">
-            <a:extLst>
-              <a:ext uri="{FF2B5EF4-FFF2-40B4-BE49-F238E27FC236}">
-                <a16:creationId xmlns:a16="http://schemas.microsoft.com/office/drawing/2014/main" id="{D2CAF9AA-7188-244D-4207-3D6194A6A33F}"/>
-              </a:ext>
-            </a:extLst>
-          </p:cNvPr>
-          <p:cNvSpPr txBox="1"/>
-          <p:nvPr/>
-        </p:nvSpPr>
-        <p:spPr>
-          <a:xfrm>
-            <a:off x="60784" y="5050814"/>
-            <a:ext cx="3032686" cy="1754326"/>
-          </a:xfrm>
-          <a:prstGeom prst="rect">
-            <a:avLst/>
-          </a:prstGeom>
-          <a:solidFill>
-            <a:schemeClr val="accent4">
-              <a:lumMod val="20000"/>
-              <a:lumOff val="80000"/>
-            </a:schemeClr>
-          </a:solidFill>
-          <a:ln>
-            <a:solidFill>
-              <a:srgbClr val="FF0000"/>
-            </a:solidFill>
-          </a:ln>
-        </p:spPr>
-        <p:txBody>
-          <a:bodyPr wrap="square" rtlCol="0">
-            <a:spAutoFit/>
-          </a:bodyPr>
-          <a:lstStyle/>
-          <a:p>
-            <a:pPr marL="285750" indent="-285750">
-              <a:buFont typeface="Arial" panose="020B0604020202020204" pitchFamily="34" charset="0"/>
-              <a:buChar char="•"/>
-            </a:pPr>
-            <a:r>
-              <a:rPr lang="en-US" dirty="0"/>
-              <a:t>Front loader</a:t>
-            </a:r>
-          </a:p>
-          <a:p>
-            <a:pPr marL="285750" indent="-285750">
-              <a:buFont typeface="Arial" panose="020B0604020202020204" pitchFamily="34" charset="0"/>
-              <a:buChar char="•"/>
-            </a:pPr>
-            <a:r>
-              <a:rPr lang="en-US" dirty="0"/>
-              <a:t>Quick attach</a:t>
-            </a:r>
-          </a:p>
-          <a:p>
-            <a:pPr marL="285750" indent="-285750">
-              <a:buFont typeface="Arial" panose="020B0604020202020204" pitchFamily="34" charset="0"/>
-              <a:buChar char="•"/>
-            </a:pPr>
-            <a:r>
-              <a:rPr lang="en-US" dirty="0"/>
-              <a:t>back counter-weight</a:t>
-            </a:r>
-          </a:p>
-          <a:p>
-            <a:pPr marL="285750" indent="-285750">
-              <a:buFont typeface="Arial" panose="020B0604020202020204" pitchFamily="34" charset="0"/>
-              <a:buChar char="•"/>
-            </a:pPr>
-            <a:r>
-              <a:rPr lang="en-US" dirty="0"/>
-              <a:t>mower platform + bagger</a:t>
-            </a:r>
-          </a:p>
-          <a:p>
-            <a:pPr marL="285750" indent="-285750">
-              <a:buFont typeface="Arial" panose="020B0604020202020204" pitchFamily="34" charset="0"/>
-              <a:buChar char="•"/>
-            </a:pPr>
-            <a:r>
-              <a:rPr lang="en-US" dirty="0"/>
-              <a:t>tires, dual-tires</a:t>
-            </a:r>
-          </a:p>
-          <a:p>
-            <a:pPr marL="285750" indent="-285750">
-              <a:buFont typeface="Arial" panose="020B0604020202020204" pitchFamily="34" charset="0"/>
-              <a:buChar char="•"/>
-            </a:pPr>
-            <a:r>
-              <a:rPr lang="en-US" dirty="0"/>
-              <a:t>additional hydraulics</a:t>
-            </a:r>
-          </a:p>
-        </p:txBody>
-      </p:sp>
-      <p:pic>
-        <p:nvPicPr>
-          <p:cNvPr id="1026" name="Picture 2" descr="It's Mow Time: Here are Three Tips for Buying, Maintaining and Operating  Mid-Mount or Rear-Mount Mowers - Compact Equipment Magazine">
-            <a:extLst>
-              <a:ext uri="{FF2B5EF4-FFF2-40B4-BE49-F238E27FC236}">
-                <a16:creationId xmlns:a16="http://schemas.microsoft.com/office/drawing/2014/main" id="{E686C925-F3E8-F724-6E6D-7834F4452248}"/>
-              </a:ext>
-            </a:extLst>
-          </p:cNvPr>
-          <p:cNvPicPr>
-            <a:picLocks noChangeAspect="1" noChangeArrowheads="1"/>
-          </p:cNvPicPr>
-          <p:nvPr/>
-        </p:nvPicPr>
-        <p:blipFill>
-          <a:blip r:embed="rId10" cstate="email">
-            <a:extLst>
-              <a:ext uri="{28A0092B-C50C-407E-A947-70E740481C1C}">
-                <a14:useLocalDpi xmlns:a14="http://schemas.microsoft.com/office/drawing/2010/main"/>
-              </a:ext>
-            </a:extLst>
-          </a:blip>
-          <a:srcRect/>
-          <a:stretch>
-            <a:fillRect/>
-          </a:stretch>
-        </p:blipFill>
-        <p:spPr bwMode="auto">
-          <a:xfrm>
-            <a:off x="9436379" y="4983451"/>
-            <a:ext cx="2652055" cy="1818841"/>
-          </a:xfrm>
-          <a:prstGeom prst="rect">
-            <a:avLst/>
-          </a:prstGeom>
-          <a:noFill/>
-          <a:ln>
-            <a:solidFill>
-              <a:srgbClr val="FF0000"/>
-            </a:solidFill>
-          </a:ln>
-          <a:extLst>
-            <a:ext uri="{909E8E84-426E-40DD-AFC4-6F175D3DCCD1}">
-              <a14:hiddenFill xmlns:a14="http://schemas.microsoft.com/office/drawing/2010/main">
-                <a:solidFill>
-                  <a:srgbClr val="FFFFFF"/>
-                </a:solidFill>
-              </a14:hiddenFill>
-            </a:ext>
-          </a:extLst>
-        </p:spPr>
-      </p:pic>
-      <p:sp>
-        <p:nvSpPr>
-          <p:cNvPr id="4" name="TextBox 3">
-            <a:extLst>
-              <a:ext uri="{FF2B5EF4-FFF2-40B4-BE49-F238E27FC236}">
-                <a16:creationId xmlns:a16="http://schemas.microsoft.com/office/drawing/2014/main" id="{0D13D5CF-25CC-2C60-6834-D2E4CA048AE5}"/>
-              </a:ext>
-            </a:extLst>
-          </p:cNvPr>
-          <p:cNvSpPr txBox="1"/>
-          <p:nvPr/>
-        </p:nvSpPr>
-        <p:spPr>
-          <a:xfrm>
-            <a:off x="7808126" y="5795074"/>
-            <a:ext cx="1566971" cy="584775"/>
-          </a:xfrm>
-          <a:prstGeom prst="rect">
-            <a:avLst/>
-          </a:prstGeom>
-          <a:noFill/>
-        </p:spPr>
-        <p:txBody>
-          <a:bodyPr wrap="square" rtlCol="0">
-            <a:spAutoFit/>
-          </a:bodyPr>
-          <a:lstStyle/>
-          <a:p>
-            <a:r>
-              <a:rPr lang="en-US" sz="1600" dirty="0">
-                <a:latin typeface="Calibri" panose="020F0502020204030204" pitchFamily="34" charset="0"/>
-                <a:cs typeface="Calibri" panose="020F0502020204030204" pitchFamily="34" charset="0"/>
-              </a:rPr>
-              <a:t>Auto-connect mower platform</a:t>
-            </a:r>
-          </a:p>
-        </p:txBody>
-      </p:sp>
-    </p:spTree>
-    <p:extLst>
-      <p:ext uri="{BB962C8B-B14F-4D97-AF65-F5344CB8AC3E}">
-        <p14:creationId xmlns:p14="http://schemas.microsoft.com/office/powerpoint/2010/main" val="3381841661"/>
-      </p:ext>
-    </p:extLst>
-  </p:cSld>
-  <p:clrMapOvr>
-    <a:masterClrMapping/>
-  </p:clrMapOvr>
-</p:sld>
-</file>
-
-<file path=ppt/slides/slide10.xml><?xml version="1.0" encoding="utf-8"?>
-<p:sld xmlns:a="http://schemas.openxmlformats.org/drawingml/2006/main" xmlns:r="http://schemas.openxmlformats.org/officeDocument/2006/relationships" xmlns:p="http://schemas.openxmlformats.org/presentationml/2006/main">
-  <p:cSld>
-    <p:spTree>
-      <p:nvGrpSpPr>
         <p:cNvPr id="1" name="">
           <a:extLst>
             <a:ext uri="{FF2B5EF4-FFF2-40B4-BE49-F238E27FC236}">
-              <a16:creationId xmlns:a16="http://schemas.microsoft.com/office/drawing/2014/main" id="{2D16B695-A4C0-BC53-15EF-81548A04F130}"/>
+              <a16:creationId xmlns:a16="http://schemas.microsoft.com/office/drawing/2014/main" id="{BF0F6C77-9DF7-270C-CAF5-1425679466AF}"/>
             </a:ext>
           </a:extLst>
         </p:cNvPr>
@@ -4102,7 +3327,7 @@
           <p:cNvPr id="2" name="TextBox 1">
             <a:extLst>
               <a:ext uri="{FF2B5EF4-FFF2-40B4-BE49-F238E27FC236}">
-                <a16:creationId xmlns:a16="http://schemas.microsoft.com/office/drawing/2014/main" id="{A5F44891-376B-DAA0-385F-BE3EBBF84680}"/>
+                <a16:creationId xmlns:a16="http://schemas.microsoft.com/office/drawing/2014/main" id="{3956900E-1F44-5200-4B48-801051E08C91}"/>
               </a:ext>
             </a:extLst>
           </p:cNvPr>
@@ -4111,8 +3336,8 @@
         </p:nvSpPr>
         <p:spPr>
           <a:xfrm>
-            <a:off x="-1" y="0"/>
-            <a:ext cx="4431253" cy="523220"/>
+            <a:off x="0" y="0"/>
+            <a:ext cx="3358662" cy="461665"/>
           </a:xfrm>
           <a:prstGeom prst="rect">
             <a:avLst/>
@@ -4126,136 +3351,24 @@
           <a:lstStyle/>
           <a:p>
             <a:r>
-              <a:rPr lang="en-US" sz="2800" b="1" dirty="0"/>
-              <a:t>Bagger = Hopper</a:t>
-            </a:r>
-          </a:p>
-        </p:txBody>
-      </p:sp>
-      <p:sp>
-        <p:nvSpPr>
-          <p:cNvPr id="8" name="TextBox 7">
-            <a:extLst>
-              <a:ext uri="{FF2B5EF4-FFF2-40B4-BE49-F238E27FC236}">
-                <a16:creationId xmlns:a16="http://schemas.microsoft.com/office/drawing/2014/main" id="{E5EAD597-53B0-1A66-BAB2-6EA6A21F38F7}"/>
-              </a:ext>
-            </a:extLst>
-          </p:cNvPr>
-          <p:cNvSpPr txBox="1"/>
-          <p:nvPr/>
-        </p:nvSpPr>
-        <p:spPr>
-          <a:xfrm>
-            <a:off x="164052" y="807468"/>
-            <a:ext cx="5506736" cy="2192908"/>
-          </a:xfrm>
-          <a:prstGeom prst="rect">
-            <a:avLst/>
-          </a:prstGeom>
-          <a:noFill/>
-        </p:spPr>
-        <p:txBody>
-          <a:bodyPr wrap="square" rtlCol="0">
-            <a:spAutoFit/>
-          </a:bodyPr>
-          <a:lstStyle/>
-          <a:p>
-            <a:r>
-              <a:rPr lang="en-US" sz="1400" dirty="0">
-                <a:latin typeface="Calibri" panose="020F0502020204030204" pitchFamily="34" charset="0"/>
-                <a:cs typeface="Calibri" panose="020F0502020204030204" pitchFamily="34" charset="0"/>
-              </a:rPr>
-              <a:t>I have a bagger with 2 bags.</a:t>
-            </a:r>
-          </a:p>
-          <a:p>
-            <a:r>
-              <a:rPr lang="en-US" sz="1400" dirty="0">
-                <a:latin typeface="Calibri" panose="020F0502020204030204" pitchFamily="34" charset="0"/>
-                <a:cs typeface="Calibri" panose="020F0502020204030204" pitchFamily="34" charset="0"/>
-              </a:rPr>
-              <a:t>It has an annoying problem.</a:t>
-            </a:r>
-          </a:p>
-          <a:p>
-            <a:r>
-              <a:rPr lang="en-US" sz="1400" dirty="0">
-                <a:latin typeface="Calibri" panose="020F0502020204030204" pitchFamily="34" charset="0"/>
-                <a:cs typeface="Calibri" panose="020F0502020204030204" pitchFamily="34" charset="0"/>
-              </a:rPr>
-              <a:t>It fills the left bag first &amp; only the over-flow goes to the right bag. </a:t>
-            </a:r>
-          </a:p>
-          <a:p>
-            <a:r>
-              <a:rPr lang="en-US" sz="1400" dirty="0">
-                <a:latin typeface="Calibri" panose="020F0502020204030204" pitchFamily="34" charset="0"/>
-                <a:cs typeface="Calibri" panose="020F0502020204030204" pitchFamily="34" charset="0"/>
-              </a:rPr>
-              <a:t>This makes the left bag  heavy while right bag is empty</a:t>
-            </a:r>
-          </a:p>
-          <a:p>
-            <a:endParaRPr lang="en-US" sz="1400" dirty="0">
-              <a:latin typeface="Calibri" panose="020F0502020204030204" pitchFamily="34" charset="0"/>
-              <a:cs typeface="Calibri" panose="020F0502020204030204" pitchFamily="34" charset="0"/>
-            </a:endParaRPr>
-          </a:p>
-          <a:p>
-            <a:r>
-              <a:rPr lang="en-US" sz="1400" dirty="0">
-                <a:latin typeface="Calibri" panose="020F0502020204030204" pitchFamily="34" charset="0"/>
-                <a:cs typeface="Calibri" panose="020F0502020204030204" pitchFamily="34" charset="0"/>
-              </a:rPr>
-              <a:t>Easy fix – block part of the chute opening as shown.</a:t>
-            </a:r>
-          </a:p>
-          <a:p>
-            <a:r>
-              <a:rPr lang="en-US" sz="1400" dirty="0">
-                <a:latin typeface="Calibri" panose="020F0502020204030204" pitchFamily="34" charset="0"/>
-                <a:cs typeface="Calibri" panose="020F0502020204030204" pitchFamily="34" charset="0"/>
-              </a:rPr>
-              <a:t>Two layers of duct tape facing each other, nothing is sticking to them.</a:t>
-            </a:r>
-          </a:p>
-          <a:p>
-            <a:endParaRPr lang="en-US" sz="1400" dirty="0">
-              <a:latin typeface="Calibri" panose="020F0502020204030204" pitchFamily="34" charset="0"/>
-              <a:cs typeface="Calibri" panose="020F0502020204030204" pitchFamily="34" charset="0"/>
-            </a:endParaRPr>
-          </a:p>
-          <a:p>
-            <a:r>
-              <a:rPr lang="en-US" sz="1400" dirty="0">
-                <a:latin typeface="Calibri" panose="020F0502020204030204" pitchFamily="34" charset="0"/>
-                <a:cs typeface="Calibri" panose="020F0502020204030204" pitchFamily="34" charset="0"/>
-              </a:rPr>
-              <a:t>The 2 bags now got filled up at similar speed. </a:t>
-            </a:r>
-          </a:p>
-          <a:p>
-            <a:r>
-              <a:rPr lang="en-US" sz="1050" dirty="0">
-                <a:latin typeface="Calibri" panose="020F0502020204030204" pitchFamily="34" charset="0"/>
-                <a:cs typeface="Calibri" panose="020F0502020204030204" pitchFamily="34" charset="0"/>
-                <a:hlinkClick r:id="rId2"/>
-              </a:rPr>
-              <a:t>https://www.facebook.com/groups/781254733349946/posts/803478744460878/</a:t>
-            </a:r>
-            <a:endParaRPr lang="en-US" sz="1050" dirty="0">
-              <a:latin typeface="Calibri" panose="020F0502020204030204" pitchFamily="34" charset="0"/>
-              <a:cs typeface="Calibri" panose="020F0502020204030204" pitchFamily="34" charset="0"/>
+              <a:rPr lang="en-US" sz="2400" b="1" dirty="0"/>
+              <a:t>John Deere X758</a:t>
+            </a:r>
+            <a:endParaRPr lang="en-US" sz="2400" b="1" i="0" dirty="0">
+              <a:solidFill>
+                <a:srgbClr val="333333"/>
+              </a:solidFill>
+              <a:effectLst/>
             </a:endParaRPr>
           </a:p>
         </p:txBody>
       </p:sp>
       <p:pic>
         <p:nvPicPr>
-          <p:cNvPr id="3" name="Picture 2">
-            <a:extLst>
-              <a:ext uri="{FF2B5EF4-FFF2-40B4-BE49-F238E27FC236}">
-                <a16:creationId xmlns:a16="http://schemas.microsoft.com/office/drawing/2014/main" id="{FAA518FD-7EE2-032F-1F24-036ACB62B912}"/>
+          <p:cNvPr id="12" name="Picture 11">
+            <a:extLst>
+              <a:ext uri="{FF2B5EF4-FFF2-40B4-BE49-F238E27FC236}">
+                <a16:creationId xmlns:a16="http://schemas.microsoft.com/office/drawing/2014/main" id="{EE86A2F8-C2FD-D027-ABEC-F050AC6B852E}"/>
               </a:ext>
             </a:extLst>
           </p:cNvPr>
@@ -4265,7 +3378,7 @@
           <p:nvPr/>
         </p:nvPicPr>
         <p:blipFill>
-          <a:blip r:embed="rId3" cstate="email">
+          <a:blip r:embed="rId2" cstate="email">
             <a:extLst>
               <a:ext uri="{28A0092B-C50C-407E-A947-70E740481C1C}">
                 <a14:useLocalDpi xmlns:a14="http://schemas.microsoft.com/office/drawing/2010/main"/>
@@ -4278,90 +3391,196 @@
         </p:blipFill>
         <p:spPr>
           <a:xfrm>
-            <a:off x="9492343" y="149679"/>
-            <a:ext cx="2699657" cy="2616377"/>
+            <a:off x="8152921" y="740786"/>
+            <a:ext cx="2755148" cy="2160676"/>
           </a:xfrm>
           <a:prstGeom prst="rect">
             <a:avLst/>
           </a:prstGeom>
         </p:spPr>
       </p:pic>
-      <p:pic>
-        <p:nvPicPr>
-          <p:cNvPr id="4" name="Picture 3">
-            <a:extLst>
-              <a:ext uri="{FF2B5EF4-FFF2-40B4-BE49-F238E27FC236}">
-                <a16:creationId xmlns:a16="http://schemas.microsoft.com/office/drawing/2014/main" id="{F37986CB-6953-B8BE-0826-E958A8437145}"/>
-              </a:ext>
-            </a:extLst>
-          </p:cNvPr>
-          <p:cNvPicPr>
-            <a:picLocks noChangeAspect="1"/>
-          </p:cNvPicPr>
-          <p:nvPr/>
-        </p:nvPicPr>
-        <p:blipFill>
-          <a:blip r:embed="rId4" cstate="email">
-            <a:extLst>
-              <a:ext uri="{28A0092B-C50C-407E-A947-70E740481C1C}">
-                <a14:useLocalDpi xmlns:a14="http://schemas.microsoft.com/office/drawing/2010/main"/>
-              </a:ext>
-            </a:extLst>
-          </a:blip>
-          <a:stretch>
-            <a:fillRect/>
-          </a:stretch>
-        </p:blipFill>
+      <p:sp>
+        <p:nvSpPr>
+          <p:cNvPr id="3" name="TextBox 2">
+            <a:extLst>
+              <a:ext uri="{FF2B5EF4-FFF2-40B4-BE49-F238E27FC236}">
+                <a16:creationId xmlns:a16="http://schemas.microsoft.com/office/drawing/2014/main" id="{300305A7-914B-7488-5C71-E229D10278CE}"/>
+              </a:ext>
+            </a:extLst>
+          </p:cNvPr>
+          <p:cNvSpPr txBox="1"/>
+          <p:nvPr/>
+        </p:nvSpPr>
         <p:spPr>
           <a:xfrm>
-            <a:off x="9492342" y="3613391"/>
-            <a:ext cx="2699657" cy="2281997"/>
+            <a:off x="263398" y="672606"/>
+            <a:ext cx="7551364" cy="3693319"/>
           </a:xfrm>
           <a:prstGeom prst="rect">
             <a:avLst/>
           </a:prstGeom>
-        </p:spPr>
-      </p:pic>
-      <p:pic>
-        <p:nvPicPr>
-          <p:cNvPr id="5" name="Picture 4">
-            <a:extLst>
-              <a:ext uri="{FF2B5EF4-FFF2-40B4-BE49-F238E27FC236}">
-                <a16:creationId xmlns:a16="http://schemas.microsoft.com/office/drawing/2014/main" id="{65079173-F2C4-DB18-BDAD-0AEF787B154F}"/>
-              </a:ext>
-            </a:extLst>
-          </p:cNvPr>
-          <p:cNvPicPr>
-            <a:picLocks noChangeAspect="1"/>
-          </p:cNvPicPr>
-          <p:nvPr/>
-        </p:nvPicPr>
-        <p:blipFill>
-          <a:blip r:embed="rId5" cstate="email">
-            <a:extLst>
-              <a:ext uri="{28A0092B-C50C-407E-A947-70E740481C1C}">
-                <a14:useLocalDpi xmlns:a14="http://schemas.microsoft.com/office/drawing/2010/main"/>
-              </a:ext>
-            </a:extLst>
-          </a:blip>
-          <a:stretch>
-            <a:fillRect/>
-          </a:stretch>
-        </p:blipFill>
-        <p:spPr>
-          <a:xfrm>
-            <a:off x="6909866" y="149679"/>
-            <a:ext cx="2374900" cy="2311400"/>
-          </a:xfrm>
-          <a:prstGeom prst="rect">
-            <a:avLst/>
-          </a:prstGeom>
-        </p:spPr>
-      </p:pic>
+          <a:solidFill>
+            <a:schemeClr val="accent4">
+              <a:lumMod val="20000"/>
+              <a:lumOff val="80000"/>
+            </a:schemeClr>
+          </a:solidFill>
+          <a:ln>
+            <a:solidFill>
+              <a:srgbClr val="FF0000"/>
+            </a:solidFill>
+          </a:ln>
+        </p:spPr>
+        <p:txBody>
+          <a:bodyPr wrap="square" rtlCol="0">
+            <a:spAutoFit/>
+          </a:bodyPr>
+          <a:lstStyle/>
+          <a:p>
+            <a:pPr marL="285750" indent="-285750">
+              <a:buFont typeface="Arial" panose="020B0604020202020204" pitchFamily="34" charset="0"/>
+              <a:buChar char="•"/>
+            </a:pPr>
+            <a:r>
+              <a:rPr lang="en-US" dirty="0"/>
+              <a:t>X758 is a diesel-powered, full-time 4WD garden tractor</a:t>
+            </a:r>
+          </a:p>
+          <a:p>
+            <a:pPr marL="285750" indent="-285750">
+              <a:buFont typeface="Arial" panose="020B0604020202020204" pitchFamily="34" charset="0"/>
+              <a:buChar char="•"/>
+            </a:pPr>
+            <a:r>
+              <a:rPr lang="en-US" dirty="0"/>
+              <a:t>Built for heavy residential and estate use</a:t>
+            </a:r>
+          </a:p>
+          <a:p>
+            <a:pPr marL="285750" indent="-285750">
+              <a:buFont typeface="Arial" panose="020B0604020202020204" pitchFamily="34" charset="0"/>
+              <a:buChar char="•"/>
+            </a:pPr>
+            <a:r>
+              <a:rPr lang="en-US" dirty="0"/>
+              <a:t>24 hp (17.9 kW) liquid‑cooled Yanmar 993 cc 3‑cylinder diesel engine</a:t>
+            </a:r>
+          </a:p>
+          <a:p>
+            <a:pPr marL="285750" indent="-285750">
+              <a:buFont typeface="Arial" panose="020B0604020202020204" pitchFamily="34" charset="0"/>
+              <a:buChar char="•"/>
+            </a:pPr>
+            <a:r>
+              <a:rPr lang="en-US" dirty="0"/>
+              <a:t>K90 hydrostatic transmission</a:t>
+            </a:r>
+          </a:p>
+          <a:p>
+            <a:pPr marL="285750" indent="-285750">
+              <a:buFont typeface="Arial" panose="020B0604020202020204" pitchFamily="34" charset="0"/>
+              <a:buChar char="•"/>
+            </a:pPr>
+            <a:r>
+              <a:rPr lang="en-US" dirty="0"/>
+              <a:t>Twin‑Touch foot controls</a:t>
+            </a:r>
+          </a:p>
+          <a:p>
+            <a:pPr marL="285750" indent="-285750">
+              <a:buFont typeface="Arial" panose="020B0604020202020204" pitchFamily="34" charset="0"/>
+              <a:buChar char="•"/>
+            </a:pPr>
+            <a:r>
+              <a:rPr lang="en-US" dirty="0"/>
+              <a:t>Full-time four‑wheel drive</a:t>
+            </a:r>
+          </a:p>
+          <a:p>
+            <a:pPr marL="285750" indent="-285750">
+              <a:buFont typeface="Arial" panose="020B0604020202020204" pitchFamily="34" charset="0"/>
+              <a:buChar char="•"/>
+            </a:pPr>
+            <a:r>
+              <a:rPr lang="en-US" dirty="0"/>
+              <a:t>power steering</a:t>
+            </a:r>
+          </a:p>
+          <a:p>
+            <a:pPr marL="285750" indent="-285750">
+              <a:buFont typeface="Arial" panose="020B0604020202020204" pitchFamily="34" charset="0"/>
+              <a:buChar char="•"/>
+            </a:pPr>
+            <a:r>
+              <a:rPr lang="en-US" dirty="0"/>
+              <a:t>Internal wet disc brakes</a:t>
+            </a:r>
+          </a:p>
+          <a:p>
+            <a:pPr marL="285750" indent="-285750">
+              <a:buFont typeface="Arial" panose="020B0604020202020204" pitchFamily="34" charset="0"/>
+              <a:buChar char="•"/>
+            </a:pPr>
+            <a:r>
+              <a:rPr lang="en-US" dirty="0"/>
+              <a:t>Excellent traction and control on slopes and in snow</a:t>
+            </a:r>
+          </a:p>
+          <a:p>
+            <a:pPr marL="285750" indent="-285750">
+              <a:buFont typeface="Arial" panose="020B0604020202020204" pitchFamily="34" charset="0"/>
+              <a:buChar char="•"/>
+            </a:pPr>
+            <a:r>
+              <a:rPr lang="en-US" dirty="0"/>
+              <a:t>Supports 48", 54", and 60" mid‑mount mower decks</a:t>
+            </a:r>
+          </a:p>
+          <a:p>
+            <a:pPr marL="285750" indent="-285750">
+              <a:buFont typeface="Arial" panose="020B0604020202020204" pitchFamily="34" charset="0"/>
+              <a:buChar char="•"/>
+            </a:pPr>
+            <a:r>
+              <a:rPr lang="en-US" dirty="0"/>
+              <a:t>Optional front and rear PTO and 3‑point hitch for implements</a:t>
+            </a:r>
+          </a:p>
+          <a:p>
+            <a:pPr marL="285750" indent="-285750">
+              <a:buFont typeface="Arial" panose="020B0604020202020204" pitchFamily="34" charset="0"/>
+              <a:buChar char="•"/>
+            </a:pPr>
+            <a:r>
+              <a:rPr lang="en-US" dirty="0"/>
+              <a:t>Wheelbase is 54.5 in (138 cm)</a:t>
+            </a:r>
+          </a:p>
+          <a:p>
+            <a:pPr marL="285750" indent="-285750">
+              <a:buFont typeface="Arial" panose="020B0604020202020204" pitchFamily="34" charset="0"/>
+              <a:buChar char="•"/>
+            </a:pPr>
+            <a:r>
+              <a:rPr lang="en-US" dirty="0"/>
+              <a:t>Weight 1,030–1,040 </a:t>
+            </a:r>
+            <a:r>
+              <a:rPr lang="en-US" dirty="0" err="1"/>
+              <a:t>lbs</a:t>
+            </a:r>
+            <a:r>
+              <a:rPr lang="en-US" dirty="0"/>
+              <a:t> (tractor only)</a:t>
+            </a:r>
+            <a:endParaRPr lang="en-US" sz="1400" dirty="0"/>
+          </a:p>
+        </p:txBody>
+      </p:sp>
     </p:spTree>
     <p:extLst>
       <p:ext uri="{BB962C8B-B14F-4D97-AF65-F5344CB8AC3E}">
-        <p14:creationId xmlns:p14="http://schemas.microsoft.com/office/powerpoint/2010/main" val="2863060725"/>
+        <p14:creationId xmlns:p14="http://schemas.microsoft.com/office/powerpoint/2010/main" val="3398199461"/>
       </p:ext>
     </p:extLst>
   </p:cSld>
@@ -4371,401 +3590,7 @@
 </p:sld>
 </file>
 
-<file path=ppt/slides/slide11.xml><?xml version="1.0" encoding="utf-8"?>
-<p:sld xmlns:a="http://schemas.openxmlformats.org/drawingml/2006/main" xmlns:r="http://schemas.openxmlformats.org/officeDocument/2006/relationships" xmlns:p="http://schemas.openxmlformats.org/presentationml/2006/main">
-  <p:cSld>
-    <p:spTree>
-      <p:nvGrpSpPr>
-        <p:cNvPr id="1" name="">
-          <a:extLst>
-            <a:ext uri="{FF2B5EF4-FFF2-40B4-BE49-F238E27FC236}">
-              <a16:creationId xmlns:a16="http://schemas.microsoft.com/office/drawing/2014/main" id="{2D16B695-A4C0-BC53-15EF-81548A04F130}"/>
-            </a:ext>
-          </a:extLst>
-        </p:cNvPr>
-        <p:cNvGrpSpPr/>
-        <p:nvPr/>
-      </p:nvGrpSpPr>
-      <p:grpSpPr>
-        <a:xfrm>
-          <a:off x="0" y="0"/>
-          <a:ext cx="0" cy="0"/>
-          <a:chOff x="0" y="0"/>
-          <a:chExt cx="0" cy="0"/>
-        </a:xfrm>
-      </p:grpSpPr>
-      <p:sp>
-        <p:nvSpPr>
-          <p:cNvPr id="2" name="TextBox 1">
-            <a:extLst>
-              <a:ext uri="{FF2B5EF4-FFF2-40B4-BE49-F238E27FC236}">
-                <a16:creationId xmlns:a16="http://schemas.microsoft.com/office/drawing/2014/main" id="{A5F44891-376B-DAA0-385F-BE3EBBF84680}"/>
-              </a:ext>
-            </a:extLst>
-          </p:cNvPr>
-          <p:cNvSpPr txBox="1"/>
-          <p:nvPr/>
-        </p:nvSpPr>
-        <p:spPr>
-          <a:xfrm>
-            <a:off x="-1" y="0"/>
-            <a:ext cx="4431253" cy="523220"/>
-          </a:xfrm>
-          <a:prstGeom prst="rect">
-            <a:avLst/>
-          </a:prstGeom>
-          <a:noFill/>
-        </p:spPr>
-        <p:txBody>
-          <a:bodyPr wrap="square" rtlCol="0">
-            <a:spAutoFit/>
-          </a:bodyPr>
-          <a:lstStyle/>
-          <a:p>
-            <a:r>
-              <a:rPr lang="en-US" sz="2800" b="1" dirty="0"/>
-              <a:t>Dual Tires (</a:t>
-            </a:r>
-            <a:r>
-              <a:rPr lang="en-US" sz="2800" b="1" dirty="0" err="1"/>
-              <a:t>Dualies</a:t>
-            </a:r>
-            <a:r>
-              <a:rPr lang="en-US" sz="2800" b="1" dirty="0"/>
-              <a:t>)</a:t>
-            </a:r>
-          </a:p>
-        </p:txBody>
-      </p:sp>
-      <p:sp>
-        <p:nvSpPr>
-          <p:cNvPr id="8" name="TextBox 7">
-            <a:extLst>
-              <a:ext uri="{FF2B5EF4-FFF2-40B4-BE49-F238E27FC236}">
-                <a16:creationId xmlns:a16="http://schemas.microsoft.com/office/drawing/2014/main" id="{E5EAD597-53B0-1A66-BAB2-6EA6A21F38F7}"/>
-              </a:ext>
-            </a:extLst>
-          </p:cNvPr>
-          <p:cNvSpPr txBox="1"/>
-          <p:nvPr/>
-        </p:nvSpPr>
-        <p:spPr>
-          <a:xfrm>
-            <a:off x="164052" y="807468"/>
-            <a:ext cx="5506736" cy="3754874"/>
-          </a:xfrm>
-          <a:prstGeom prst="rect">
-            <a:avLst/>
-          </a:prstGeom>
-          <a:noFill/>
-        </p:spPr>
-        <p:txBody>
-          <a:bodyPr wrap="square" rtlCol="0">
-            <a:spAutoFit/>
-          </a:bodyPr>
-          <a:lstStyle/>
-          <a:p>
-            <a:r>
-              <a:rPr lang="en-US" sz="1400" dirty="0"/>
-              <a:t>Can potentially help in muddy conditions</a:t>
-            </a:r>
-          </a:p>
-          <a:p>
-            <a:pPr marL="285750" indent="-285750">
-              <a:buFont typeface="Arial" panose="020B0604020202020204" pitchFamily="34" charset="0"/>
-              <a:buChar char="•"/>
-            </a:pPr>
-            <a:r>
-              <a:rPr lang="en-US" sz="1400" dirty="0"/>
-              <a:t>Distribute the weight over a larger surface area, which can reduce ground pressure, thus preventing the tractor from sinking into soft or muddy ground</a:t>
-            </a:r>
-          </a:p>
-          <a:p>
-            <a:pPr marL="285750" indent="-285750">
-              <a:buFont typeface="Arial" panose="020B0604020202020204" pitchFamily="34" charset="0"/>
-              <a:buChar char="•"/>
-            </a:pPr>
-            <a:r>
-              <a:rPr lang="en-US" sz="1400" dirty="0"/>
-              <a:t>Increase traction since there are now twice the number of lugs (the raised patterns on a tire) making contact with the ground. </a:t>
-            </a:r>
-          </a:p>
-          <a:p>
-            <a:endParaRPr lang="en-US" sz="1400" dirty="0"/>
-          </a:p>
-          <a:p>
-            <a:r>
-              <a:rPr lang="en-US" sz="1400" dirty="0"/>
-              <a:t>Downsides:</a:t>
-            </a:r>
-          </a:p>
-          <a:p>
-            <a:pPr marL="285750" indent="-285750">
-              <a:buFont typeface="Arial" panose="020B0604020202020204" pitchFamily="34" charset="0"/>
-              <a:buChar char="•"/>
-            </a:pPr>
-            <a:r>
-              <a:rPr lang="en-US" sz="1400" dirty="0"/>
-              <a:t>Added Weight</a:t>
-            </a:r>
-          </a:p>
-          <a:p>
-            <a:pPr marL="285750" indent="-285750">
-              <a:buFont typeface="Arial" panose="020B0604020202020204" pitchFamily="34" charset="0"/>
-              <a:buChar char="•"/>
-            </a:pPr>
-            <a:r>
-              <a:rPr lang="en-US" sz="1400" dirty="0"/>
-              <a:t>Turning Resistance</a:t>
-            </a:r>
-          </a:p>
-          <a:p>
-            <a:pPr marL="285750" indent="-285750">
-              <a:buFont typeface="Arial" panose="020B0604020202020204" pitchFamily="34" charset="0"/>
-              <a:buChar char="•"/>
-            </a:pPr>
-            <a:r>
-              <a:rPr lang="en-US" sz="1400" dirty="0"/>
-              <a:t>Cost and Installation</a:t>
-            </a:r>
-          </a:p>
-          <a:p>
-            <a:pPr marL="285750" indent="-285750">
-              <a:buFont typeface="Arial" panose="020B0604020202020204" pitchFamily="34" charset="0"/>
-              <a:buChar char="•"/>
-            </a:pPr>
-            <a:r>
-              <a:rPr lang="en-US" sz="1400" dirty="0"/>
-              <a:t>Wider Profile (harder to navigate)</a:t>
-            </a:r>
-          </a:p>
-          <a:p>
-            <a:pPr marL="285750" indent="-285750">
-              <a:buFont typeface="Arial" panose="020B0604020202020204" pitchFamily="34" charset="0"/>
-              <a:buChar char="•"/>
-            </a:pPr>
-            <a:r>
-              <a:rPr lang="en-US" sz="1400" dirty="0"/>
-              <a:t>Soil Compaction</a:t>
-            </a:r>
-          </a:p>
-          <a:p>
-            <a:pPr marL="285750" indent="-285750">
-              <a:buFont typeface="Arial" panose="020B0604020202020204" pitchFamily="34" charset="0"/>
-              <a:buChar char="•"/>
-            </a:pPr>
-            <a:endParaRPr lang="en-US" sz="1400" dirty="0"/>
-          </a:p>
-          <a:p>
-            <a:r>
-              <a:rPr lang="en-US" sz="1400" dirty="0"/>
-              <a:t>Other solutions to consider: </a:t>
-            </a:r>
-          </a:p>
-          <a:p>
-            <a:pPr marL="285750" indent="-285750">
-              <a:buFont typeface="Arial" panose="020B0604020202020204" pitchFamily="34" charset="0"/>
-              <a:buChar char="•"/>
-            </a:pPr>
-            <a:r>
-              <a:rPr lang="en-US" sz="1400" dirty="0"/>
-              <a:t>tire chains</a:t>
-            </a:r>
-          </a:p>
-          <a:p>
-            <a:pPr marL="285750" indent="-285750">
-              <a:buFont typeface="Arial" panose="020B0604020202020204" pitchFamily="34" charset="0"/>
-              <a:buChar char="•"/>
-            </a:pPr>
-            <a:r>
-              <a:rPr lang="en-US" sz="1400" dirty="0"/>
-              <a:t>wider single tires</a:t>
-            </a:r>
-          </a:p>
-        </p:txBody>
-      </p:sp>
-      <p:pic>
-        <p:nvPicPr>
-          <p:cNvPr id="1026" name="Picture 2" descr="How to Put Duals On a Mower - A Better Way">
-            <a:extLst>
-              <a:ext uri="{FF2B5EF4-FFF2-40B4-BE49-F238E27FC236}">
-                <a16:creationId xmlns:a16="http://schemas.microsoft.com/office/drawing/2014/main" id="{71D526FD-5301-0D68-CD3C-BFABB30F8E12}"/>
-              </a:ext>
-            </a:extLst>
-          </p:cNvPr>
-          <p:cNvPicPr>
-            <a:picLocks noChangeAspect="1" noChangeArrowheads="1"/>
-          </p:cNvPicPr>
-          <p:nvPr/>
-        </p:nvPicPr>
-        <p:blipFill>
-          <a:blip r:embed="rId2" cstate="email">
-            <a:extLst>
-              <a:ext uri="{28A0092B-C50C-407E-A947-70E740481C1C}">
-                <a14:useLocalDpi xmlns:a14="http://schemas.microsoft.com/office/drawing/2010/main"/>
-              </a:ext>
-            </a:extLst>
-          </a:blip>
-          <a:srcRect/>
-          <a:stretch>
-            <a:fillRect/>
-          </a:stretch>
-        </p:blipFill>
-        <p:spPr bwMode="auto">
-          <a:xfrm>
-            <a:off x="7760748" y="228600"/>
-            <a:ext cx="4267200" cy="3200400"/>
-          </a:xfrm>
-          <a:prstGeom prst="rect">
-            <a:avLst/>
-          </a:prstGeom>
-          <a:noFill/>
-          <a:extLst>
-            <a:ext uri="{909E8E84-426E-40DD-AFC4-6F175D3DCCD1}">
-              <a14:hiddenFill xmlns:a14="http://schemas.microsoft.com/office/drawing/2010/main">
-                <a:solidFill>
-                  <a:srgbClr val="FFFFFF"/>
-                </a:solidFill>
-              </a14:hiddenFill>
-            </a:ext>
-          </a:extLst>
-        </p:spPr>
-      </p:pic>
-      <p:sp>
-        <p:nvSpPr>
-          <p:cNvPr id="9" name="TextBox 8">
-            <a:extLst>
-              <a:ext uri="{FF2B5EF4-FFF2-40B4-BE49-F238E27FC236}">
-                <a16:creationId xmlns:a16="http://schemas.microsoft.com/office/drawing/2014/main" id="{FA27FBF3-5F1A-3128-93B1-65E9E5627FFA}"/>
-              </a:ext>
-            </a:extLst>
-          </p:cNvPr>
-          <p:cNvSpPr txBox="1"/>
-          <p:nvPr/>
-        </p:nvSpPr>
-        <p:spPr>
-          <a:xfrm>
-            <a:off x="3048000" y="76944"/>
-            <a:ext cx="3810000" cy="307777"/>
-          </a:xfrm>
-          <a:prstGeom prst="rect">
-            <a:avLst/>
-          </a:prstGeom>
-          <a:noFill/>
-        </p:spPr>
-        <p:txBody>
-          <a:bodyPr wrap="square" rtlCol="0">
-            <a:spAutoFit/>
-          </a:bodyPr>
-          <a:lstStyle/>
-          <a:p>
-            <a:r>
-              <a:rPr lang="en-US" sz="1400" dirty="0">
-                <a:hlinkClick r:id="rId3"/>
-              </a:rPr>
-              <a:t>https://</a:t>
-            </a:r>
-            <a:r>
-              <a:rPr lang="en-US" sz="1400" dirty="0" err="1">
-                <a:hlinkClick r:id="rId3"/>
-              </a:rPr>
-              <a:t>www.youtube.com</a:t>
-            </a:r>
-            <a:r>
-              <a:rPr lang="en-US" sz="1400" dirty="0">
-                <a:hlinkClick r:id="rId3"/>
-              </a:rPr>
-              <a:t>/</a:t>
-            </a:r>
-            <a:r>
-              <a:rPr lang="en-US" sz="1400" dirty="0" err="1">
-                <a:hlinkClick r:id="rId3"/>
-              </a:rPr>
-              <a:t>watch?v</a:t>
-            </a:r>
-            <a:r>
-              <a:rPr lang="en-US" sz="1400" dirty="0">
-                <a:hlinkClick r:id="rId3"/>
-              </a:rPr>
-              <a:t>=</a:t>
-            </a:r>
-            <a:r>
-              <a:rPr lang="en-US" sz="1400" dirty="0" err="1">
-                <a:hlinkClick r:id="rId3"/>
-              </a:rPr>
-              <a:t>oDdR</a:t>
-            </a:r>
-            <a:r>
-              <a:rPr lang="en-US" sz="1400" dirty="0">
-                <a:hlinkClick r:id="rId3"/>
-              </a:rPr>
-              <a:t>-KLIF-Q</a:t>
-            </a:r>
-            <a:endParaRPr lang="en-US" sz="1400" dirty="0"/>
-          </a:p>
-        </p:txBody>
-      </p:sp>
-      <p:pic>
-        <p:nvPicPr>
-          <p:cNvPr id="1028" name="Picture 4" descr="DUAL TIRES ON A 1025r? Carlisle Versa Turfs + Found A STEAL! - YouTube">
-            <a:extLst>
-              <a:ext uri="{FF2B5EF4-FFF2-40B4-BE49-F238E27FC236}">
-                <a16:creationId xmlns:a16="http://schemas.microsoft.com/office/drawing/2014/main" id="{EDAA7AC9-D55C-2BE4-8784-E24DB49BAEE4}"/>
-              </a:ext>
-            </a:extLst>
-          </p:cNvPr>
-          <p:cNvPicPr>
-            <a:picLocks noChangeAspect="1" noChangeArrowheads="1"/>
-          </p:cNvPicPr>
-          <p:nvPr/>
-        </p:nvPicPr>
-        <p:blipFill>
-          <a:blip r:embed="rId4">
-            <a:extLst>
-              <a:ext uri="{28A0092B-C50C-407E-A947-70E740481C1C}">
-                <a14:useLocalDpi xmlns:a14="http://schemas.microsoft.com/office/drawing/2010/main"/>
-              </a:ext>
-            </a:extLst>
-          </a:blip>
-          <a:srcRect/>
-          <a:stretch>
-            <a:fillRect/>
-          </a:stretch>
-        </p:blipFill>
-        <p:spPr bwMode="auto">
-          <a:xfrm>
-            <a:off x="7760748" y="3594652"/>
-            <a:ext cx="3810000" cy="2133600"/>
-          </a:xfrm>
-          <a:prstGeom prst="rect">
-            <a:avLst/>
-          </a:prstGeom>
-          <a:noFill/>
-          <a:extLst>
-            <a:ext uri="{909E8E84-426E-40DD-AFC4-6F175D3DCCD1}">
-              <a14:hiddenFill xmlns:a14="http://schemas.microsoft.com/office/drawing/2010/main">
-                <a:solidFill>
-                  <a:srgbClr val="FFFFFF"/>
-                </a:solidFill>
-              </a14:hiddenFill>
-            </a:ext>
-          </a:extLst>
-        </p:spPr>
-      </p:pic>
-    </p:spTree>
-    <p:extLst>
-      <p:ext uri="{BB962C8B-B14F-4D97-AF65-F5344CB8AC3E}">
-        <p14:creationId xmlns:p14="http://schemas.microsoft.com/office/powerpoint/2010/main" val="1009907999"/>
-      </p:ext>
-    </p:extLst>
-  </p:cSld>
-  <p:clrMapOvr>
-    <a:masterClrMapping/>
-  </p:clrMapOvr>
-</p:sld>
-</file>
-
-<file path=ppt/slides/slide12.xml><?xml version="1.0" encoding="utf-8"?>
+<file path=ppt/slides/slide10.xml><?xml version="1.0" encoding="utf-8"?>
 <p:sld xmlns:a="http://schemas.openxmlformats.org/drawingml/2006/main" xmlns:r="http://schemas.openxmlformats.org/officeDocument/2006/relationships" xmlns:p="http://schemas.openxmlformats.org/presentationml/2006/main">
   <p:cSld>
     <p:spTree>
@@ -5628,7 +4453,1336 @@
     </p:spTree>
     <p:extLst>
       <p:ext uri="{BB962C8B-B14F-4D97-AF65-F5344CB8AC3E}">
-        <p14:creationId xmlns:p14="http://schemas.microsoft.com/office/powerpoint/2010/main" val="4180096979"/>
+        <p14:creationId xmlns:p14="http://schemas.microsoft.com/office/powerpoint/2010/main" val="3218093321"/>
+      </p:ext>
+    </p:extLst>
+  </p:cSld>
+  <p:clrMapOvr>
+    <a:masterClrMapping/>
+  </p:clrMapOvr>
+</p:sld>
+</file>
+
+<file path=ppt/slides/slide11.xml><?xml version="1.0" encoding="utf-8"?>
+<p:sld xmlns:a="http://schemas.openxmlformats.org/drawingml/2006/main" xmlns:r="http://schemas.openxmlformats.org/officeDocument/2006/relationships" xmlns:p="http://schemas.openxmlformats.org/presentationml/2006/main">
+  <p:cSld>
+    <p:spTree>
+      <p:nvGrpSpPr>
+        <p:cNvPr id="1" name="">
+          <a:extLst>
+            <a:ext uri="{FF2B5EF4-FFF2-40B4-BE49-F238E27FC236}">
+              <a16:creationId xmlns:a16="http://schemas.microsoft.com/office/drawing/2014/main" id="{DB30550F-07AE-1CE7-20E3-2AA8BA6113CE}"/>
+            </a:ext>
+          </a:extLst>
+        </p:cNvPr>
+        <p:cNvGrpSpPr/>
+        <p:nvPr/>
+      </p:nvGrpSpPr>
+      <p:grpSpPr>
+        <a:xfrm>
+          <a:off x="0" y="0"/>
+          <a:ext cx="0" cy="0"/>
+          <a:chOff x="0" y="0"/>
+          <a:chExt cx="0" cy="0"/>
+        </a:xfrm>
+      </p:grpSpPr>
+      <p:sp>
+        <p:nvSpPr>
+          <p:cNvPr id="2" name="TextBox 1">
+            <a:extLst>
+              <a:ext uri="{FF2B5EF4-FFF2-40B4-BE49-F238E27FC236}">
+                <a16:creationId xmlns:a16="http://schemas.microsoft.com/office/drawing/2014/main" id="{7CB81E7F-18BC-34A7-0606-71AF37FC41F0}"/>
+              </a:ext>
+            </a:extLst>
+          </p:cNvPr>
+          <p:cNvSpPr txBox="1"/>
+          <p:nvPr/>
+        </p:nvSpPr>
+        <p:spPr>
+          <a:xfrm>
+            <a:off x="0" y="0"/>
+            <a:ext cx="4793674" cy="954107"/>
+          </a:xfrm>
+          <a:prstGeom prst="rect">
+            <a:avLst/>
+          </a:prstGeom>
+          <a:noFill/>
+        </p:spPr>
+        <p:txBody>
+          <a:bodyPr wrap="square" rtlCol="0">
+            <a:spAutoFit/>
+          </a:bodyPr>
+          <a:lstStyle/>
+          <a:p>
+            <a:r>
+              <a:rPr lang="en-US" sz="2800" b="1" dirty="0"/>
+              <a:t>Heating Electric Charges, snow blowers, tractor</a:t>
+            </a:r>
+          </a:p>
+        </p:txBody>
+      </p:sp>
+      <p:sp>
+        <p:nvSpPr>
+          <p:cNvPr id="4" name="TextBox 3">
+            <a:extLst>
+              <a:ext uri="{FF2B5EF4-FFF2-40B4-BE49-F238E27FC236}">
+                <a16:creationId xmlns:a16="http://schemas.microsoft.com/office/drawing/2014/main" id="{A7454BCD-3F88-9905-117C-1AE825F6E254}"/>
+              </a:ext>
+            </a:extLst>
+          </p:cNvPr>
+          <p:cNvSpPr txBox="1"/>
+          <p:nvPr/>
+        </p:nvSpPr>
+        <p:spPr>
+          <a:xfrm>
+            <a:off x="170033" y="1230430"/>
+            <a:ext cx="4623641" cy="4832092"/>
+          </a:xfrm>
+          <a:prstGeom prst="rect">
+            <a:avLst/>
+          </a:prstGeom>
+          <a:noFill/>
+        </p:spPr>
+        <p:txBody>
+          <a:bodyPr wrap="square" rtlCol="0">
+            <a:spAutoFit/>
+          </a:bodyPr>
+          <a:lstStyle/>
+          <a:p>
+            <a:r>
+              <a:rPr lang="en-US" sz="1400" dirty="0">
+                <a:latin typeface="Calibri" panose="020F0502020204030204" pitchFamily="34" charset="0"/>
+                <a:cs typeface="Calibri" panose="020F0502020204030204" pitchFamily="34" charset="0"/>
+              </a:rPr>
+              <a:t>At cold weather electric charges have difficulty charging the batteries. And diesel tractor has difficulty starting.</a:t>
+            </a:r>
+          </a:p>
+          <a:p>
+            <a:endParaRPr lang="en-US" sz="1400" dirty="0">
+              <a:latin typeface="Calibri" panose="020F0502020204030204" pitchFamily="34" charset="0"/>
+              <a:cs typeface="Calibri" panose="020F0502020204030204" pitchFamily="34" charset="0"/>
+            </a:endParaRPr>
+          </a:p>
+          <a:p>
+            <a:r>
+              <a:rPr lang="en-US" sz="1400" dirty="0">
+                <a:latin typeface="Calibri" panose="020F0502020204030204" pitchFamily="34" charset="0"/>
+                <a:cs typeface="Calibri" panose="020F0502020204030204" pitchFamily="34" charset="0"/>
+              </a:rPr>
+              <a:t>Idea is to create an enclosure (12' x 6' x 6') </a:t>
+            </a:r>
+          </a:p>
+          <a:p>
+            <a:r>
+              <a:rPr lang="en-US" sz="1400" dirty="0">
+                <a:latin typeface="Calibri" panose="020F0502020204030204" pitchFamily="34" charset="0"/>
+                <a:cs typeface="Calibri" panose="020F0502020204030204" pitchFamily="34" charset="0"/>
+              </a:rPr>
+              <a:t>and warm equipment inside it.</a:t>
+            </a:r>
+          </a:p>
+          <a:p>
+            <a:endParaRPr lang="en-US" sz="1400" dirty="0">
+              <a:latin typeface="Calibri" panose="020F0502020204030204" pitchFamily="34" charset="0"/>
+              <a:cs typeface="Calibri" panose="020F0502020204030204" pitchFamily="34" charset="0"/>
+            </a:endParaRPr>
+          </a:p>
+          <a:p>
+            <a:r>
+              <a:rPr lang="en-US" sz="1400" dirty="0">
+                <a:latin typeface="Calibri" panose="020F0502020204030204" pitchFamily="34" charset="0"/>
+                <a:cs typeface="Calibri" panose="020F0502020204030204" pitchFamily="34" charset="0"/>
+              </a:rPr>
+              <a:t>This size is big enough (</a:t>
+            </a:r>
+            <a:r>
+              <a:rPr lang="en-US" sz="1400" dirty="0" err="1">
+                <a:latin typeface="Calibri" panose="020F0502020204030204" pitchFamily="34" charset="0"/>
+                <a:cs typeface="Calibri" panose="020F0502020204030204" pitchFamily="34" charset="0"/>
+              </a:rPr>
+              <a:t>approx</a:t>
+            </a:r>
+            <a:r>
+              <a:rPr lang="en-US" sz="1400" dirty="0">
+                <a:latin typeface="Calibri" panose="020F0502020204030204" pitchFamily="34" charset="0"/>
+                <a:cs typeface="Calibri" panose="020F0502020204030204" pitchFamily="34" charset="0"/>
+              </a:rPr>
+              <a:t> 4×2×2 meters) to fit a tractor with a snow blower. It can definitely fit a walk-behind snowblower and multiple electric chargers.</a:t>
+            </a:r>
+          </a:p>
+          <a:p>
+            <a:endParaRPr lang="en-US" sz="1400" dirty="0">
+              <a:latin typeface="Calibri" panose="020F0502020204030204" pitchFamily="34" charset="0"/>
+              <a:cs typeface="Calibri" panose="020F0502020204030204" pitchFamily="34" charset="0"/>
+            </a:endParaRPr>
+          </a:p>
+          <a:p>
+            <a:r>
+              <a:rPr lang="en-US" sz="1400" dirty="0">
+                <a:latin typeface="Calibri" panose="020F0502020204030204" pitchFamily="34" charset="0"/>
+                <a:cs typeface="Calibri" panose="020F0502020204030204" pitchFamily="34" charset="0"/>
+              </a:rPr>
+              <a:t>We can use a canopy, portable car shelter (garage) canopy, or a green house. </a:t>
+            </a:r>
+            <a:endParaRPr lang="en-US" sz="1400" dirty="0">
+              <a:latin typeface="fkGroteskNeue"/>
+            </a:endParaRPr>
+          </a:p>
+          <a:p>
+            <a:r>
+              <a:rPr lang="en-US" sz="1400" dirty="0">
+                <a:latin typeface="fkGroteskNeue"/>
+                <a:cs typeface="Calibri" panose="020F0502020204030204" pitchFamily="34" charset="0"/>
+              </a:rPr>
+              <a:t>Or create a DIY construction - </a:t>
+            </a:r>
+            <a:r>
+              <a:rPr lang="en-US" sz="1400" dirty="0">
+                <a:latin typeface="Calibri" panose="020F0502020204030204" pitchFamily="34" charset="0"/>
+                <a:cs typeface="Calibri" panose="020F0502020204030204" pitchFamily="34" charset="0"/>
+              </a:rPr>
+              <a:t>a light rectangular frame made of PVC tubes hanging above tractor, then hang tarp walls around the tractor (and put tarp on top)</a:t>
+            </a:r>
+          </a:p>
+          <a:p>
+            <a:endParaRPr lang="en-US" sz="1400" dirty="0">
+              <a:latin typeface="Calibri" panose="020F0502020204030204" pitchFamily="34" charset="0"/>
+              <a:cs typeface="Calibri" panose="020F0502020204030204" pitchFamily="34" charset="0"/>
+            </a:endParaRPr>
+          </a:p>
+          <a:p>
+            <a:r>
+              <a:rPr lang="en-US" sz="1400" dirty="0">
+                <a:latin typeface="Calibri" panose="020F0502020204030204" pitchFamily="34" charset="0"/>
+                <a:cs typeface="Calibri" panose="020F0502020204030204" pitchFamily="34" charset="0"/>
+              </a:rPr>
+              <a:t>Then push the hot air from a portable heater (with thermostat and overheat protection). </a:t>
+            </a:r>
+            <a:br>
+              <a:rPr lang="en-US" sz="1400" dirty="0">
+                <a:latin typeface="Calibri" panose="020F0502020204030204" pitchFamily="34" charset="0"/>
+                <a:cs typeface="Calibri" panose="020F0502020204030204" pitchFamily="34" charset="0"/>
+              </a:rPr>
+            </a:br>
+            <a:r>
+              <a:rPr lang="en-US" sz="1400" dirty="0">
+                <a:latin typeface="Calibri" panose="020F0502020204030204" pitchFamily="34" charset="0"/>
+                <a:cs typeface="Calibri" panose="020F0502020204030204" pitchFamily="34" charset="0"/>
+              </a:rPr>
+              <a:t>For example:</a:t>
+            </a:r>
+          </a:p>
+          <a:p>
+            <a:pPr marL="285750" indent="-285750">
+              <a:buFont typeface="Arial" panose="020B0604020202020204" pitchFamily="34" charset="0"/>
+              <a:buChar char="•"/>
+            </a:pPr>
+            <a:r>
+              <a:rPr lang="en-US" sz="1400" dirty="0">
+                <a:latin typeface="Calibri" panose="020F0502020204030204" pitchFamily="34" charset="0"/>
+                <a:cs typeface="Calibri" panose="020F0502020204030204" pitchFamily="34" charset="0"/>
+              </a:rPr>
+              <a:t>King Electric PSH1215T Portable Utility Heater</a:t>
+            </a:r>
+          </a:p>
+          <a:p>
+            <a:pPr marL="285750" indent="-285750">
+              <a:buFont typeface="Arial" panose="020B0604020202020204" pitchFamily="34" charset="0"/>
+              <a:buChar char="•"/>
+            </a:pPr>
+            <a:r>
+              <a:rPr lang="en-US" sz="1400" dirty="0" err="1">
+                <a:latin typeface="Calibri" panose="020F0502020204030204" pitchFamily="34" charset="0"/>
+                <a:cs typeface="Calibri" panose="020F0502020204030204" pitchFamily="34" charset="0"/>
+              </a:rPr>
+              <a:t>QMark</a:t>
+            </a:r>
+            <a:r>
+              <a:rPr lang="en-US" sz="1400" dirty="0">
+                <a:latin typeface="Calibri" panose="020F0502020204030204" pitchFamily="34" charset="0"/>
+                <a:cs typeface="Calibri" panose="020F0502020204030204" pitchFamily="34" charset="0"/>
+              </a:rPr>
+              <a:t> Portable Utility Heater (MMHD)</a:t>
+            </a:r>
+          </a:p>
+          <a:p>
+            <a:pPr marL="285750" indent="-285750">
+              <a:buFont typeface="Arial" panose="020B0604020202020204" pitchFamily="34" charset="0"/>
+              <a:buChar char="•"/>
+            </a:pPr>
+            <a:r>
+              <a:rPr lang="en-US" sz="1400" dirty="0">
+                <a:latin typeface="Calibri" panose="020F0502020204030204" pitchFamily="34" charset="0"/>
+                <a:cs typeface="Calibri" panose="020F0502020204030204" pitchFamily="34" charset="0"/>
+              </a:rPr>
+              <a:t>Lasko Ceramic Heater 754200 </a:t>
+            </a:r>
+          </a:p>
+        </p:txBody>
+      </p:sp>
+      <p:pic>
+        <p:nvPicPr>
+          <p:cNvPr id="5" name="Picture 2" descr="KING PSH1215T Yellow Jacket Portable Shop Heater w/Thermostat, 1500W / 120V">
+            <a:extLst>
+              <a:ext uri="{FF2B5EF4-FFF2-40B4-BE49-F238E27FC236}">
+                <a16:creationId xmlns:a16="http://schemas.microsoft.com/office/drawing/2014/main" id="{2EC226A0-6508-B8B4-B1D7-FDE48D14CD32}"/>
+              </a:ext>
+            </a:extLst>
+          </p:cNvPr>
+          <p:cNvPicPr>
+            <a:picLocks noChangeAspect="1" noChangeArrowheads="1"/>
+          </p:cNvPicPr>
+          <p:nvPr/>
+        </p:nvPicPr>
+        <p:blipFill>
+          <a:blip r:embed="rId2" cstate="email">
+            <a:extLst>
+              <a:ext uri="{28A0092B-C50C-407E-A947-70E740481C1C}">
+                <a14:useLocalDpi xmlns:a14="http://schemas.microsoft.com/office/drawing/2010/main"/>
+              </a:ext>
+            </a:extLst>
+          </a:blip>
+          <a:srcRect/>
+          <a:stretch>
+            <a:fillRect/>
+          </a:stretch>
+        </p:blipFill>
+        <p:spPr bwMode="auto">
+          <a:xfrm>
+            <a:off x="5130250" y="4448905"/>
+            <a:ext cx="2549433" cy="2079381"/>
+          </a:xfrm>
+          <a:prstGeom prst="rect">
+            <a:avLst/>
+          </a:prstGeom>
+          <a:noFill/>
+          <a:extLst>
+            <a:ext uri="{909E8E84-426E-40DD-AFC4-6F175D3DCCD1}">
+              <a14:hiddenFill xmlns:a14="http://schemas.microsoft.com/office/drawing/2010/main">
+                <a:solidFill>
+                  <a:srgbClr val="FFFFFF"/>
+                </a:solidFill>
+              </a14:hiddenFill>
+            </a:ext>
+          </a:extLst>
+        </p:spPr>
+      </p:pic>
+      <p:pic>
+        <p:nvPicPr>
+          <p:cNvPr id="6" name="Picture 4" descr="Lasko Desktop Electric Ceramic Space Heater with Adjustable Thermostat, 2 Heat Settings and Fan Only Mode, 9.2 Inches, Sil...">
+            <a:extLst>
+              <a:ext uri="{FF2B5EF4-FFF2-40B4-BE49-F238E27FC236}">
+                <a16:creationId xmlns:a16="http://schemas.microsoft.com/office/drawing/2014/main" id="{A4263724-4240-44D1-7A01-FFFDE1F5FEC4}"/>
+              </a:ext>
+            </a:extLst>
+          </p:cNvPr>
+          <p:cNvPicPr>
+            <a:picLocks noChangeAspect="1" noChangeArrowheads="1"/>
+          </p:cNvPicPr>
+          <p:nvPr/>
+        </p:nvPicPr>
+        <p:blipFill>
+          <a:blip r:embed="rId3" cstate="email">
+            <a:extLst>
+              <a:ext uri="{28A0092B-C50C-407E-A947-70E740481C1C}">
+                <a14:useLocalDpi xmlns:a14="http://schemas.microsoft.com/office/drawing/2010/main"/>
+              </a:ext>
+            </a:extLst>
+          </a:blip>
+          <a:srcRect/>
+          <a:stretch>
+            <a:fillRect/>
+          </a:stretch>
+        </p:blipFill>
+        <p:spPr bwMode="auto">
+          <a:xfrm>
+            <a:off x="10929662" y="4767015"/>
+            <a:ext cx="1019726" cy="1348398"/>
+          </a:xfrm>
+          <a:prstGeom prst="rect">
+            <a:avLst/>
+          </a:prstGeom>
+          <a:noFill/>
+          <a:extLst>
+            <a:ext uri="{909E8E84-426E-40DD-AFC4-6F175D3DCCD1}">
+              <a14:hiddenFill xmlns:a14="http://schemas.microsoft.com/office/drawing/2010/main">
+                <a:solidFill>
+                  <a:srgbClr val="FFFFFF"/>
+                </a:solidFill>
+              </a14:hiddenFill>
+            </a:ext>
+          </a:extLst>
+        </p:spPr>
+      </p:pic>
+      <p:pic>
+        <p:nvPicPr>
+          <p:cNvPr id="1030" name="Picture 6" descr="Qmark MMHD1502T Deluxe Portable Fan Forced Utility Heater - MMHD White Baked Enamel">
+            <a:extLst>
+              <a:ext uri="{FF2B5EF4-FFF2-40B4-BE49-F238E27FC236}">
+                <a16:creationId xmlns:a16="http://schemas.microsoft.com/office/drawing/2014/main" id="{EDF126DC-0177-B29A-43F9-D00DA4530583}"/>
+              </a:ext>
+            </a:extLst>
+          </p:cNvPr>
+          <p:cNvPicPr>
+            <a:picLocks noChangeAspect="1" noChangeArrowheads="1"/>
+          </p:cNvPicPr>
+          <p:nvPr/>
+        </p:nvPicPr>
+        <p:blipFill>
+          <a:blip r:embed="rId4" cstate="email">
+            <a:extLst>
+              <a:ext uri="{28A0092B-C50C-407E-A947-70E740481C1C}">
+                <a14:useLocalDpi xmlns:a14="http://schemas.microsoft.com/office/drawing/2010/main"/>
+              </a:ext>
+            </a:extLst>
+          </a:blip>
+          <a:srcRect/>
+          <a:stretch>
+            <a:fillRect/>
+          </a:stretch>
+        </p:blipFill>
+        <p:spPr bwMode="auto">
+          <a:xfrm>
+            <a:off x="8539476" y="4091840"/>
+            <a:ext cx="1530393" cy="2436446"/>
+          </a:xfrm>
+          <a:prstGeom prst="rect">
+            <a:avLst/>
+          </a:prstGeom>
+          <a:noFill/>
+          <a:extLst>
+            <a:ext uri="{909E8E84-426E-40DD-AFC4-6F175D3DCCD1}">
+              <a14:hiddenFill xmlns:a14="http://schemas.microsoft.com/office/drawing/2010/main">
+                <a:solidFill>
+                  <a:srgbClr val="FFFFFF"/>
+                </a:solidFill>
+              </a14:hiddenFill>
+            </a:ext>
+          </a:extLst>
+        </p:spPr>
+      </p:pic>
+      <p:pic>
+        <p:nvPicPr>
+          <p:cNvPr id="1026" name="Picture 2">
+            <a:extLst>
+              <a:ext uri="{FF2B5EF4-FFF2-40B4-BE49-F238E27FC236}">
+                <a16:creationId xmlns:a16="http://schemas.microsoft.com/office/drawing/2014/main" id="{2ED18D4B-5A66-5B97-2FB0-14C530943461}"/>
+              </a:ext>
+            </a:extLst>
+          </p:cNvPr>
+          <p:cNvPicPr>
+            <a:picLocks noChangeAspect="1" noChangeArrowheads="1"/>
+          </p:cNvPicPr>
+          <p:nvPr/>
+        </p:nvPicPr>
+        <p:blipFill>
+          <a:blip r:embed="rId5" cstate="email">
+            <a:extLst>
+              <a:ext uri="{28A0092B-C50C-407E-A947-70E740481C1C}">
+                <a14:useLocalDpi xmlns:a14="http://schemas.microsoft.com/office/drawing/2010/main"/>
+              </a:ext>
+            </a:extLst>
+          </a:blip>
+          <a:srcRect/>
+          <a:stretch>
+            <a:fillRect/>
+          </a:stretch>
+        </p:blipFill>
+        <p:spPr bwMode="auto">
+          <a:xfrm>
+            <a:off x="5586433" y="1230430"/>
+            <a:ext cx="2442235" cy="2418351"/>
+          </a:xfrm>
+          <a:prstGeom prst="rect">
+            <a:avLst/>
+          </a:prstGeom>
+          <a:noFill/>
+          <a:extLst>
+            <a:ext uri="{909E8E84-426E-40DD-AFC4-6F175D3DCCD1}">
+              <a14:hiddenFill xmlns:a14="http://schemas.microsoft.com/office/drawing/2010/main">
+                <a:solidFill>
+                  <a:srgbClr val="FFFFFF"/>
+                </a:solidFill>
+              </a14:hiddenFill>
+            </a:ext>
+          </a:extLst>
+        </p:spPr>
+      </p:pic>
+      <p:pic>
+        <p:nvPicPr>
+          <p:cNvPr id="1028" name="Picture 4">
+            <a:extLst>
+              <a:ext uri="{FF2B5EF4-FFF2-40B4-BE49-F238E27FC236}">
+                <a16:creationId xmlns:a16="http://schemas.microsoft.com/office/drawing/2014/main" id="{1F7F18C9-9C3A-AA1E-E455-724E4B9236E6}"/>
+              </a:ext>
+            </a:extLst>
+          </p:cNvPr>
+          <p:cNvPicPr>
+            <a:picLocks noChangeAspect="1" noChangeArrowheads="1"/>
+          </p:cNvPicPr>
+          <p:nvPr/>
+        </p:nvPicPr>
+        <p:blipFill rotWithShape="1">
+          <a:blip r:embed="rId6" cstate="email">
+            <a:extLst>
+              <a:ext uri="{28A0092B-C50C-407E-A947-70E740481C1C}">
+                <a14:useLocalDpi xmlns:a14="http://schemas.microsoft.com/office/drawing/2010/main"/>
+              </a:ext>
+            </a:extLst>
+          </a:blip>
+          <a:srcRect/>
+          <a:stretch>
+            <a:fillRect/>
+          </a:stretch>
+        </p:blipFill>
+        <p:spPr bwMode="auto">
+          <a:xfrm>
+            <a:off x="9507821" y="2417070"/>
+            <a:ext cx="2086789" cy="1011930"/>
+          </a:xfrm>
+          <a:prstGeom prst="rect">
+            <a:avLst/>
+          </a:prstGeom>
+          <a:noFill/>
+          <a:extLst>
+            <a:ext uri="{909E8E84-426E-40DD-AFC4-6F175D3DCCD1}">
+              <a14:hiddenFill xmlns:a14="http://schemas.microsoft.com/office/drawing/2010/main">
+                <a:solidFill>
+                  <a:srgbClr val="FFFFFF"/>
+                </a:solidFill>
+              </a14:hiddenFill>
+            </a:ext>
+          </a:extLst>
+        </p:spPr>
+      </p:pic>
+      <p:pic>
+        <p:nvPicPr>
+          <p:cNvPr id="9" name="Picture 6" descr="10x10 X7 Tectonic Canopy - Ultra ...">
+            <a:extLst>
+              <a:ext uri="{FF2B5EF4-FFF2-40B4-BE49-F238E27FC236}">
+                <a16:creationId xmlns:a16="http://schemas.microsoft.com/office/drawing/2014/main" id="{DC224871-106B-ED19-DEC9-83EC4D14455D}"/>
+              </a:ext>
+            </a:extLst>
+          </p:cNvPr>
+          <p:cNvPicPr>
+            <a:picLocks noChangeAspect="1" noChangeArrowheads="1"/>
+          </p:cNvPicPr>
+          <p:nvPr/>
+        </p:nvPicPr>
+        <p:blipFill rotWithShape="1">
+          <a:blip r:embed="rId7" cstate="email">
+            <a:extLst>
+              <a:ext uri="{28A0092B-C50C-407E-A947-70E740481C1C}">
+                <a14:useLocalDpi xmlns:a14="http://schemas.microsoft.com/office/drawing/2010/main"/>
+              </a:ext>
+            </a:extLst>
+          </a:blip>
+          <a:srcRect/>
+          <a:stretch>
+            <a:fillRect/>
+          </a:stretch>
+        </p:blipFill>
+        <p:spPr bwMode="auto">
+          <a:xfrm>
+            <a:off x="9176259" y="329714"/>
+            <a:ext cx="2418351" cy="1934308"/>
+          </a:xfrm>
+          <a:prstGeom prst="rect">
+            <a:avLst/>
+          </a:prstGeom>
+          <a:noFill/>
+          <a:extLst>
+            <a:ext uri="{909E8E84-426E-40DD-AFC4-6F175D3DCCD1}">
+              <a14:hiddenFill xmlns:a14="http://schemas.microsoft.com/office/drawing/2010/main">
+                <a:solidFill>
+                  <a:srgbClr val="FFFFFF"/>
+                </a:solidFill>
+              </a14:hiddenFill>
+            </a:ext>
+          </a:extLst>
+        </p:spPr>
+      </p:pic>
+    </p:spTree>
+    <p:extLst>
+      <p:ext uri="{BB962C8B-B14F-4D97-AF65-F5344CB8AC3E}">
+        <p14:creationId xmlns:p14="http://schemas.microsoft.com/office/powerpoint/2010/main" val="638605968"/>
+      </p:ext>
+    </p:extLst>
+  </p:cSld>
+  <p:clrMapOvr>
+    <a:masterClrMapping/>
+  </p:clrMapOvr>
+</p:sld>
+</file>
+
+<file path=ppt/slides/slide12.xml><?xml version="1.0" encoding="utf-8"?>
+<p:sld xmlns:a="http://schemas.openxmlformats.org/drawingml/2006/main" xmlns:r="http://schemas.openxmlformats.org/officeDocument/2006/relationships" xmlns:p="http://schemas.openxmlformats.org/presentationml/2006/main">
+  <p:cSld>
+    <p:spTree>
+      <p:nvGrpSpPr>
+        <p:cNvPr id="1" name=""/>
+        <p:cNvGrpSpPr/>
+        <p:nvPr/>
+      </p:nvGrpSpPr>
+      <p:grpSpPr>
+        <a:xfrm>
+          <a:off x="0" y="0"/>
+          <a:ext cx="0" cy="0"/>
+          <a:chOff x="0" y="0"/>
+          <a:chExt cx="0" cy="0"/>
+        </a:xfrm>
+      </p:grpSpPr>
+      <p:sp>
+        <p:nvSpPr>
+          <p:cNvPr id="2" name="TextBox 1">
+            <a:extLst>
+              <a:ext uri="{FF2B5EF4-FFF2-40B4-BE49-F238E27FC236}">
+                <a16:creationId xmlns:a16="http://schemas.microsoft.com/office/drawing/2014/main" id="{775BBD15-AEC2-1815-2347-A5BB8F308263}"/>
+              </a:ext>
+            </a:extLst>
+          </p:cNvPr>
+          <p:cNvSpPr txBox="1"/>
+          <p:nvPr/>
+        </p:nvSpPr>
+        <p:spPr>
+          <a:xfrm>
+            <a:off x="0" y="0"/>
+            <a:ext cx="4434212" cy="1200329"/>
+          </a:xfrm>
+          <a:prstGeom prst="rect">
+            <a:avLst/>
+          </a:prstGeom>
+          <a:noFill/>
+        </p:spPr>
+        <p:txBody>
+          <a:bodyPr wrap="square" rtlCol="0">
+            <a:spAutoFit/>
+          </a:bodyPr>
+          <a:lstStyle/>
+          <a:p>
+            <a:r>
+              <a:rPr lang="en-US" sz="2400" b="1" dirty="0"/>
+              <a:t>John Deere </a:t>
+            </a:r>
+            <a:r>
+              <a:rPr lang="en-US" sz="2400" b="1" i="0" dirty="0">
+                <a:solidFill>
+                  <a:srgbClr val="333333"/>
+                </a:solidFill>
+                <a:effectLst/>
+              </a:rPr>
+              <a:t>Sub-Compact Tractor </a:t>
+            </a:r>
+          </a:p>
+          <a:p>
+            <a:r>
+              <a:rPr lang="en-US" sz="1200" b="1" i="0" dirty="0">
+                <a:solidFill>
+                  <a:srgbClr val="FF0000"/>
+                </a:solidFill>
+                <a:effectLst/>
+              </a:rPr>
+              <a:t>Prices in 2023:</a:t>
+            </a:r>
+          </a:p>
+          <a:p>
+            <a:r>
+              <a:rPr lang="en-US" sz="1200" b="1" i="0" dirty="0">
+                <a:solidFill>
+                  <a:srgbClr val="FF0000"/>
+                </a:solidFill>
+                <a:effectLst/>
+              </a:rPr>
+              <a:t>1023E - $15,600. </a:t>
+            </a:r>
+          </a:p>
+          <a:p>
+            <a:r>
+              <a:rPr lang="en-US" sz="1200" b="1" dirty="0">
+                <a:solidFill>
+                  <a:srgbClr val="FF0000"/>
+                </a:solidFill>
+              </a:rPr>
+              <a:t>1025R - $18,400 </a:t>
+            </a:r>
+          </a:p>
+          <a:p>
+            <a:r>
+              <a:rPr lang="en-US" sz="1200" b="1" dirty="0">
+                <a:solidFill>
+                  <a:srgbClr val="FF0000"/>
+                </a:solidFill>
+              </a:rPr>
+              <a:t>2025R - bigger wheels, longer, heavier)</a:t>
+            </a:r>
+          </a:p>
+        </p:txBody>
+      </p:sp>
+      <p:pic>
+        <p:nvPicPr>
+          <p:cNvPr id="1028" name="Picture 4" descr="A Review of the Key Features of the John Deere 1023E Sub-Compact Tractor">
+            <a:extLst>
+              <a:ext uri="{FF2B5EF4-FFF2-40B4-BE49-F238E27FC236}">
+                <a16:creationId xmlns:a16="http://schemas.microsoft.com/office/drawing/2014/main" id="{6F3D58B2-F45F-3598-9B8F-5F056C3FBB92}"/>
+              </a:ext>
+            </a:extLst>
+          </p:cNvPr>
+          <p:cNvPicPr>
+            <a:picLocks noChangeAspect="1" noChangeArrowheads="1"/>
+          </p:cNvPicPr>
+          <p:nvPr/>
+        </p:nvPicPr>
+        <p:blipFill>
+          <a:blip r:embed="rId2">
+            <a:extLst>
+              <a:ext uri="{28A0092B-C50C-407E-A947-70E740481C1C}">
+                <a14:useLocalDpi xmlns:a14="http://schemas.microsoft.com/office/drawing/2010/main"/>
+              </a:ext>
+            </a:extLst>
+          </a:blip>
+          <a:srcRect/>
+          <a:stretch>
+            <a:fillRect/>
+          </a:stretch>
+        </p:blipFill>
+        <p:spPr bwMode="auto">
+          <a:xfrm>
+            <a:off x="9429537" y="2987093"/>
+            <a:ext cx="2652054" cy="1901473"/>
+          </a:xfrm>
+          <a:prstGeom prst="rect">
+            <a:avLst/>
+          </a:prstGeom>
+          <a:noFill/>
+          <a:ln>
+            <a:solidFill>
+              <a:srgbClr val="FF0000"/>
+            </a:solidFill>
+          </a:ln>
+          <a:extLst>
+            <a:ext uri="{909E8E84-426E-40DD-AFC4-6F175D3DCCD1}">
+              <a14:hiddenFill xmlns:a14="http://schemas.microsoft.com/office/drawing/2010/main">
+                <a:solidFill>
+                  <a:srgbClr val="FFFFFF"/>
+                </a:solidFill>
+              </a14:hiddenFill>
+            </a:ext>
+          </a:extLst>
+        </p:spPr>
+      </p:pic>
+      <p:sp>
+        <p:nvSpPr>
+          <p:cNvPr id="9" name="TextBox 8">
+            <a:extLst>
+              <a:ext uri="{FF2B5EF4-FFF2-40B4-BE49-F238E27FC236}">
+                <a16:creationId xmlns:a16="http://schemas.microsoft.com/office/drawing/2014/main" id="{87F2F999-0791-BA74-78AD-0B5B443629CA}"/>
+              </a:ext>
+            </a:extLst>
+          </p:cNvPr>
+          <p:cNvSpPr txBox="1"/>
+          <p:nvPr/>
+        </p:nvSpPr>
+        <p:spPr>
+          <a:xfrm>
+            <a:off x="245841" y="1520645"/>
+            <a:ext cx="3630511" cy="3416320"/>
+          </a:xfrm>
+          <a:prstGeom prst="rect">
+            <a:avLst/>
+          </a:prstGeom>
+          <a:solidFill>
+            <a:schemeClr val="accent4">
+              <a:lumMod val="20000"/>
+              <a:lumOff val="80000"/>
+            </a:schemeClr>
+          </a:solidFill>
+          <a:ln>
+            <a:solidFill>
+              <a:srgbClr val="FF0000"/>
+            </a:solidFill>
+          </a:ln>
+        </p:spPr>
+        <p:txBody>
+          <a:bodyPr wrap="square" rtlCol="0">
+            <a:spAutoFit/>
+          </a:bodyPr>
+          <a:lstStyle/>
+          <a:p>
+            <a:r>
+              <a:rPr lang="en-US" dirty="0"/>
+              <a:t>Engine - </a:t>
+            </a:r>
+            <a:r>
+              <a:rPr lang="en-US" dirty="0">
+                <a:solidFill>
+                  <a:srgbClr val="FF0000"/>
+                </a:solidFill>
+              </a:rPr>
+              <a:t>diesel</a:t>
+            </a:r>
+            <a:r>
+              <a:rPr lang="en-US" dirty="0"/>
+              <a:t> , 21.5 or 24 hp</a:t>
+            </a:r>
+          </a:p>
+          <a:p>
+            <a:r>
+              <a:rPr lang="en-US" dirty="0"/>
+              <a:t>PTO – 14.5 or 17.2 hp</a:t>
+            </a:r>
+          </a:p>
+          <a:p>
+            <a:r>
+              <a:rPr lang="en-US" dirty="0"/>
+              <a:t>weight: 610 kg or 654 kg</a:t>
+            </a:r>
+          </a:p>
+          <a:p>
+            <a:r>
+              <a:rPr lang="en-US" dirty="0"/>
+              <a:t>mower deck, 120R loader, ...</a:t>
+            </a:r>
+          </a:p>
+          <a:p>
+            <a:endParaRPr lang="en-US" dirty="0"/>
+          </a:p>
+          <a:p>
+            <a:r>
+              <a:rPr lang="en-US" dirty="0"/>
+              <a:t>1025R is better – more PTO power, can use 3-point hitch implement, PTO precision handling, better seat, better steering</a:t>
+            </a:r>
+          </a:p>
+          <a:p>
+            <a:endParaRPr lang="en-US" dirty="0"/>
+          </a:p>
+          <a:p>
+            <a:r>
+              <a:rPr lang="en-US" dirty="0"/>
+              <a:t>1025R base weight – 1,440 </a:t>
+            </a:r>
+            <a:r>
+              <a:rPr lang="en-US" dirty="0" err="1"/>
+              <a:t>lbs</a:t>
+            </a:r>
+            <a:endParaRPr lang="en-US" dirty="0"/>
+          </a:p>
+          <a:p>
+            <a:r>
+              <a:rPr lang="en-US" dirty="0"/>
+              <a:t>(compare with 805 </a:t>
+            </a:r>
+            <a:r>
+              <a:rPr lang="en-US" dirty="0" err="1"/>
+              <a:t>lbs</a:t>
+            </a:r>
+            <a:r>
+              <a:rPr lang="en-US" dirty="0"/>
+              <a:t> for jd-425)</a:t>
+            </a:r>
+          </a:p>
+        </p:txBody>
+      </p:sp>
+      <p:sp>
+        <p:nvSpPr>
+          <p:cNvPr id="10" name="TextBox 9">
+            <a:extLst>
+              <a:ext uri="{FF2B5EF4-FFF2-40B4-BE49-F238E27FC236}">
+                <a16:creationId xmlns:a16="http://schemas.microsoft.com/office/drawing/2014/main" id="{9944A156-B590-1201-FCB9-1A6AB95CC9B7}"/>
+              </a:ext>
+            </a:extLst>
+          </p:cNvPr>
+          <p:cNvSpPr txBox="1"/>
+          <p:nvPr/>
+        </p:nvSpPr>
+        <p:spPr>
+          <a:xfrm>
+            <a:off x="5950334" y="76238"/>
+            <a:ext cx="6138100" cy="646331"/>
+          </a:xfrm>
+          <a:prstGeom prst="rect">
+            <a:avLst/>
+          </a:prstGeom>
+          <a:noFill/>
+        </p:spPr>
+        <p:txBody>
+          <a:bodyPr wrap="square" rtlCol="0">
+            <a:spAutoFit/>
+          </a:bodyPr>
+          <a:lstStyle/>
+          <a:p>
+            <a:r>
+              <a:rPr lang="en-US" sz="1200" dirty="0">
+                <a:hlinkClick r:id="rId3"/>
+              </a:rPr>
+              <a:t>https://</a:t>
+            </a:r>
+            <a:r>
+              <a:rPr lang="en-US" sz="1200" dirty="0" err="1">
+                <a:hlinkClick r:id="rId3"/>
+              </a:rPr>
+              <a:t>www.deere.com</a:t>
+            </a:r>
+            <a:r>
+              <a:rPr lang="en-US" sz="1200" dirty="0">
+                <a:hlinkClick r:id="rId3"/>
+              </a:rPr>
+              <a:t>/</a:t>
+            </a:r>
+            <a:r>
+              <a:rPr lang="en-US" sz="1200" dirty="0" err="1">
+                <a:hlinkClick r:id="rId3"/>
+              </a:rPr>
+              <a:t>en</a:t>
+            </a:r>
+            <a:r>
+              <a:rPr lang="en-US" sz="1200" dirty="0">
+                <a:hlinkClick r:id="rId3"/>
+              </a:rPr>
+              <a:t>/tractors/compact-tractors/1-series-sub-compact-tractors/1023e/</a:t>
+            </a:r>
+            <a:endParaRPr lang="en-US" sz="1200" dirty="0"/>
+          </a:p>
+          <a:p>
+            <a:r>
+              <a:rPr lang="en-US" sz="1200" dirty="0">
+                <a:hlinkClick r:id="rId4"/>
+              </a:rPr>
+              <a:t>https://</a:t>
+            </a:r>
+            <a:r>
+              <a:rPr lang="en-US" sz="1200" dirty="0" err="1">
+                <a:hlinkClick r:id="rId4"/>
+              </a:rPr>
+              <a:t>www.deere.com</a:t>
+            </a:r>
+            <a:r>
+              <a:rPr lang="en-US" sz="1200" dirty="0">
+                <a:hlinkClick r:id="rId4"/>
+              </a:rPr>
+              <a:t>/</a:t>
+            </a:r>
+            <a:r>
+              <a:rPr lang="en-US" sz="1200" dirty="0" err="1">
+                <a:hlinkClick r:id="rId4"/>
+              </a:rPr>
+              <a:t>en</a:t>
+            </a:r>
+            <a:r>
+              <a:rPr lang="en-US" sz="1200" dirty="0">
+                <a:hlinkClick r:id="rId4"/>
+              </a:rPr>
+              <a:t>/tractors/compact-tractors/1-series-sub-compact-tractors/1025r/</a:t>
+            </a:r>
+            <a:endParaRPr lang="en-US" sz="1200" dirty="0"/>
+          </a:p>
+          <a:p>
+            <a:r>
+              <a:rPr lang="en-US" sz="1200" dirty="0">
+                <a:hlinkClick r:id="rId5"/>
+              </a:rPr>
+              <a:t>https://www.youtube.com/watch?v=TeHIpRNJ3LU</a:t>
+            </a:r>
+            <a:endParaRPr lang="en-US" sz="1200" dirty="0"/>
+          </a:p>
+        </p:txBody>
+      </p:sp>
+      <p:pic>
+        <p:nvPicPr>
+          <p:cNvPr id="1030" name="Picture 6" descr="1023E Compact Utility Tractor | Explore John Deere">
+            <a:extLst>
+              <a:ext uri="{FF2B5EF4-FFF2-40B4-BE49-F238E27FC236}">
+                <a16:creationId xmlns:a16="http://schemas.microsoft.com/office/drawing/2014/main" id="{ECD513EA-4836-83C9-A47F-D2F269773E44}"/>
+              </a:ext>
+            </a:extLst>
+          </p:cNvPr>
+          <p:cNvPicPr>
+            <a:picLocks noChangeAspect="1" noChangeArrowheads="1"/>
+          </p:cNvPicPr>
+          <p:nvPr/>
+        </p:nvPicPr>
+        <p:blipFill rotWithShape="1">
+          <a:blip r:embed="rId6" cstate="email">
+            <a:extLst>
+              <a:ext uri="{28A0092B-C50C-407E-A947-70E740481C1C}">
+                <a14:useLocalDpi xmlns:a14="http://schemas.microsoft.com/office/drawing/2010/main"/>
+              </a:ext>
+            </a:extLst>
+          </a:blip>
+          <a:srcRect/>
+          <a:stretch/>
+        </p:blipFill>
+        <p:spPr bwMode="auto">
+          <a:xfrm>
+            <a:off x="3940712" y="1519149"/>
+            <a:ext cx="1556574" cy="1435286"/>
+          </a:xfrm>
+          <a:prstGeom prst="rect">
+            <a:avLst/>
+          </a:prstGeom>
+          <a:noFill/>
+          <a:ln>
+            <a:solidFill>
+              <a:srgbClr val="FF0000"/>
+            </a:solidFill>
+          </a:ln>
+          <a:extLst>
+            <a:ext uri="{909E8E84-426E-40DD-AFC4-6F175D3DCCD1}">
+              <a14:hiddenFill xmlns:a14="http://schemas.microsoft.com/office/drawing/2010/main">
+                <a:solidFill>
+                  <a:srgbClr val="FFFFFF"/>
+                </a:solidFill>
+              </a14:hiddenFill>
+            </a:ext>
+          </a:extLst>
+        </p:spPr>
+      </p:pic>
+      <p:pic>
+        <p:nvPicPr>
+          <p:cNvPr id="1034" name="Picture 10" descr="John Deere 1023E Sub-Compact Tractor | wordpress.soegel.de">
+            <a:extLst>
+              <a:ext uri="{FF2B5EF4-FFF2-40B4-BE49-F238E27FC236}">
+                <a16:creationId xmlns:a16="http://schemas.microsoft.com/office/drawing/2014/main" id="{70ED0C30-7549-F8BA-D4CA-6CFCE8D6E9BC}"/>
+              </a:ext>
+            </a:extLst>
+          </p:cNvPr>
+          <p:cNvPicPr>
+            <a:picLocks noChangeAspect="1" noChangeArrowheads="1"/>
+          </p:cNvPicPr>
+          <p:nvPr/>
+        </p:nvPicPr>
+        <p:blipFill>
+          <a:blip r:embed="rId7" cstate="email">
+            <a:extLst>
+              <a:ext uri="{28A0092B-C50C-407E-A947-70E740481C1C}">
+                <a14:useLocalDpi xmlns:a14="http://schemas.microsoft.com/office/drawing/2010/main"/>
+              </a:ext>
+            </a:extLst>
+          </a:blip>
+          <a:srcRect/>
+          <a:stretch>
+            <a:fillRect/>
+          </a:stretch>
+        </p:blipFill>
+        <p:spPr bwMode="auto">
+          <a:xfrm>
+            <a:off x="3150024" y="5050814"/>
+            <a:ext cx="2459435" cy="1756739"/>
+          </a:xfrm>
+          <a:prstGeom prst="rect">
+            <a:avLst/>
+          </a:prstGeom>
+          <a:noFill/>
+          <a:ln>
+            <a:solidFill>
+              <a:srgbClr val="FF0000"/>
+            </a:solidFill>
+          </a:ln>
+          <a:extLst>
+            <a:ext uri="{909E8E84-426E-40DD-AFC4-6F175D3DCCD1}">
+              <a14:hiddenFill xmlns:a14="http://schemas.microsoft.com/office/drawing/2010/main">
+                <a:solidFill>
+                  <a:srgbClr val="FFFFFF"/>
+                </a:solidFill>
+              </a14:hiddenFill>
+            </a:ext>
+          </a:extLst>
+        </p:spPr>
+      </p:pic>
+      <p:pic>
+        <p:nvPicPr>
+          <p:cNvPr id="1036" name="Picture 12" descr="Marissa Mann on X: &quot;Anybody in Twitter-land looking for a small acreage  tractor? We're looking to sell ours to upgrade to something larger so we  can move round bales for my hay">
+            <a:extLst>
+              <a:ext uri="{FF2B5EF4-FFF2-40B4-BE49-F238E27FC236}">
+                <a16:creationId xmlns:a16="http://schemas.microsoft.com/office/drawing/2014/main" id="{E69E1B8C-C34E-819C-34CF-E2A2400F22CF}"/>
+              </a:ext>
+            </a:extLst>
+          </p:cNvPr>
+          <p:cNvPicPr>
+            <a:picLocks noChangeAspect="1" noChangeArrowheads="1"/>
+          </p:cNvPicPr>
+          <p:nvPr/>
+        </p:nvPicPr>
+        <p:blipFill>
+          <a:blip r:embed="rId8" cstate="email">
+            <a:extLst>
+              <a:ext uri="{28A0092B-C50C-407E-A947-70E740481C1C}">
+                <a14:useLocalDpi xmlns:a14="http://schemas.microsoft.com/office/drawing/2010/main"/>
+              </a:ext>
+            </a:extLst>
+          </a:blip>
+          <a:srcRect/>
+          <a:stretch>
+            <a:fillRect/>
+          </a:stretch>
+        </p:blipFill>
+        <p:spPr bwMode="auto">
+          <a:xfrm>
+            <a:off x="9233584" y="976760"/>
+            <a:ext cx="2854850" cy="1901473"/>
+          </a:xfrm>
+          <a:prstGeom prst="rect">
+            <a:avLst/>
+          </a:prstGeom>
+          <a:noFill/>
+          <a:ln>
+            <a:solidFill>
+              <a:srgbClr val="FF0000"/>
+            </a:solidFill>
+          </a:ln>
+          <a:extLst>
+            <a:ext uri="{909E8E84-426E-40DD-AFC4-6F175D3DCCD1}">
+              <a14:hiddenFill xmlns:a14="http://schemas.microsoft.com/office/drawing/2010/main">
+                <a:solidFill>
+                  <a:srgbClr val="FFFFFF"/>
+                </a:solidFill>
+              </a14:hiddenFill>
+            </a:ext>
+          </a:extLst>
+        </p:spPr>
+      </p:pic>
+      <p:pic>
+        <p:nvPicPr>
+          <p:cNvPr id="1038" name="Picture 14" descr="John Deere 1023e backhoe usage for myself and the boys - YouTube">
+            <a:extLst>
+              <a:ext uri="{FF2B5EF4-FFF2-40B4-BE49-F238E27FC236}">
+                <a16:creationId xmlns:a16="http://schemas.microsoft.com/office/drawing/2014/main" id="{65AE8BB0-FA56-E493-B5AA-349B09F298D3}"/>
+              </a:ext>
+            </a:extLst>
+          </p:cNvPr>
+          <p:cNvPicPr>
+            <a:picLocks noChangeAspect="1" noChangeArrowheads="1"/>
+          </p:cNvPicPr>
+          <p:nvPr/>
+        </p:nvPicPr>
+        <p:blipFill rotWithShape="1">
+          <a:blip r:embed="rId9" cstate="email">
+            <a:extLst>
+              <a:ext uri="{28A0092B-C50C-407E-A947-70E740481C1C}">
+                <a14:useLocalDpi xmlns:a14="http://schemas.microsoft.com/office/drawing/2010/main"/>
+              </a:ext>
+            </a:extLst>
+          </a:blip>
+          <a:srcRect/>
+          <a:stretch/>
+        </p:blipFill>
+        <p:spPr bwMode="auto">
+          <a:xfrm>
+            <a:off x="3941472" y="2998351"/>
+            <a:ext cx="3733458" cy="1938614"/>
+          </a:xfrm>
+          <a:prstGeom prst="rect">
+            <a:avLst/>
+          </a:prstGeom>
+          <a:noFill/>
+          <a:ln>
+            <a:solidFill>
+              <a:srgbClr val="FF0000"/>
+            </a:solidFill>
+          </a:ln>
+          <a:extLst>
+            <a:ext uri="{909E8E84-426E-40DD-AFC4-6F175D3DCCD1}">
+              <a14:hiddenFill xmlns:a14="http://schemas.microsoft.com/office/drawing/2010/main">
+                <a:solidFill>
+                  <a:srgbClr val="FFFFFF"/>
+                </a:solidFill>
+              </a14:hiddenFill>
+            </a:ext>
+          </a:extLst>
+        </p:spPr>
+      </p:pic>
+      <p:sp>
+        <p:nvSpPr>
+          <p:cNvPr id="3" name="TextBox 2">
+            <a:extLst>
+              <a:ext uri="{FF2B5EF4-FFF2-40B4-BE49-F238E27FC236}">
+                <a16:creationId xmlns:a16="http://schemas.microsoft.com/office/drawing/2014/main" id="{D2CAF9AA-7188-244D-4207-3D6194A6A33F}"/>
+              </a:ext>
+            </a:extLst>
+          </p:cNvPr>
+          <p:cNvSpPr txBox="1"/>
+          <p:nvPr/>
+        </p:nvSpPr>
+        <p:spPr>
+          <a:xfrm>
+            <a:off x="60784" y="5050814"/>
+            <a:ext cx="3032686" cy="1754326"/>
+          </a:xfrm>
+          <a:prstGeom prst="rect">
+            <a:avLst/>
+          </a:prstGeom>
+          <a:solidFill>
+            <a:schemeClr val="accent4">
+              <a:lumMod val="20000"/>
+              <a:lumOff val="80000"/>
+            </a:schemeClr>
+          </a:solidFill>
+          <a:ln>
+            <a:solidFill>
+              <a:srgbClr val="FF0000"/>
+            </a:solidFill>
+          </a:ln>
+        </p:spPr>
+        <p:txBody>
+          <a:bodyPr wrap="square" rtlCol="0">
+            <a:spAutoFit/>
+          </a:bodyPr>
+          <a:lstStyle/>
+          <a:p>
+            <a:pPr marL="285750" indent="-285750">
+              <a:buFont typeface="Arial" panose="020B0604020202020204" pitchFamily="34" charset="0"/>
+              <a:buChar char="•"/>
+            </a:pPr>
+            <a:r>
+              <a:rPr lang="en-US" dirty="0"/>
+              <a:t>Front loader</a:t>
+            </a:r>
+          </a:p>
+          <a:p>
+            <a:pPr marL="285750" indent="-285750">
+              <a:buFont typeface="Arial" panose="020B0604020202020204" pitchFamily="34" charset="0"/>
+              <a:buChar char="•"/>
+            </a:pPr>
+            <a:r>
+              <a:rPr lang="en-US" dirty="0"/>
+              <a:t>Quick attach</a:t>
+            </a:r>
+          </a:p>
+          <a:p>
+            <a:pPr marL="285750" indent="-285750">
+              <a:buFont typeface="Arial" panose="020B0604020202020204" pitchFamily="34" charset="0"/>
+              <a:buChar char="•"/>
+            </a:pPr>
+            <a:r>
+              <a:rPr lang="en-US" dirty="0"/>
+              <a:t>back counter-weight</a:t>
+            </a:r>
+          </a:p>
+          <a:p>
+            <a:pPr marL="285750" indent="-285750">
+              <a:buFont typeface="Arial" panose="020B0604020202020204" pitchFamily="34" charset="0"/>
+              <a:buChar char="•"/>
+            </a:pPr>
+            <a:r>
+              <a:rPr lang="en-US" dirty="0"/>
+              <a:t>mower platform + bagger</a:t>
+            </a:r>
+          </a:p>
+          <a:p>
+            <a:pPr marL="285750" indent="-285750">
+              <a:buFont typeface="Arial" panose="020B0604020202020204" pitchFamily="34" charset="0"/>
+              <a:buChar char="•"/>
+            </a:pPr>
+            <a:r>
+              <a:rPr lang="en-US" dirty="0"/>
+              <a:t>tires, dual-tires</a:t>
+            </a:r>
+          </a:p>
+          <a:p>
+            <a:pPr marL="285750" indent="-285750">
+              <a:buFont typeface="Arial" panose="020B0604020202020204" pitchFamily="34" charset="0"/>
+              <a:buChar char="•"/>
+            </a:pPr>
+            <a:r>
+              <a:rPr lang="en-US" dirty="0"/>
+              <a:t>additional hydraulics</a:t>
+            </a:r>
+          </a:p>
+        </p:txBody>
+      </p:sp>
+      <p:pic>
+        <p:nvPicPr>
+          <p:cNvPr id="1026" name="Picture 2" descr="It's Mow Time: Here are Three Tips for Buying, Maintaining and Operating  Mid-Mount or Rear-Mount Mowers - Compact Equipment Magazine">
+            <a:extLst>
+              <a:ext uri="{FF2B5EF4-FFF2-40B4-BE49-F238E27FC236}">
+                <a16:creationId xmlns:a16="http://schemas.microsoft.com/office/drawing/2014/main" id="{E686C925-F3E8-F724-6E6D-7834F4452248}"/>
+              </a:ext>
+            </a:extLst>
+          </p:cNvPr>
+          <p:cNvPicPr>
+            <a:picLocks noChangeAspect="1" noChangeArrowheads="1"/>
+          </p:cNvPicPr>
+          <p:nvPr/>
+        </p:nvPicPr>
+        <p:blipFill>
+          <a:blip r:embed="rId10" cstate="email">
+            <a:extLst>
+              <a:ext uri="{28A0092B-C50C-407E-A947-70E740481C1C}">
+                <a14:useLocalDpi xmlns:a14="http://schemas.microsoft.com/office/drawing/2010/main"/>
+              </a:ext>
+            </a:extLst>
+          </a:blip>
+          <a:srcRect/>
+          <a:stretch>
+            <a:fillRect/>
+          </a:stretch>
+        </p:blipFill>
+        <p:spPr bwMode="auto">
+          <a:xfrm>
+            <a:off x="9436379" y="4983451"/>
+            <a:ext cx="2652055" cy="1818841"/>
+          </a:xfrm>
+          <a:prstGeom prst="rect">
+            <a:avLst/>
+          </a:prstGeom>
+          <a:noFill/>
+          <a:ln>
+            <a:solidFill>
+              <a:srgbClr val="FF0000"/>
+            </a:solidFill>
+          </a:ln>
+          <a:extLst>
+            <a:ext uri="{909E8E84-426E-40DD-AFC4-6F175D3DCCD1}">
+              <a14:hiddenFill xmlns:a14="http://schemas.microsoft.com/office/drawing/2010/main">
+                <a:solidFill>
+                  <a:srgbClr val="FFFFFF"/>
+                </a:solidFill>
+              </a14:hiddenFill>
+            </a:ext>
+          </a:extLst>
+        </p:spPr>
+      </p:pic>
+      <p:sp>
+        <p:nvSpPr>
+          <p:cNvPr id="4" name="TextBox 3">
+            <a:extLst>
+              <a:ext uri="{FF2B5EF4-FFF2-40B4-BE49-F238E27FC236}">
+                <a16:creationId xmlns:a16="http://schemas.microsoft.com/office/drawing/2014/main" id="{0D13D5CF-25CC-2C60-6834-D2E4CA048AE5}"/>
+              </a:ext>
+            </a:extLst>
+          </p:cNvPr>
+          <p:cNvSpPr txBox="1"/>
+          <p:nvPr/>
+        </p:nvSpPr>
+        <p:spPr>
+          <a:xfrm>
+            <a:off x="7808126" y="5795074"/>
+            <a:ext cx="1566971" cy="584775"/>
+          </a:xfrm>
+          <a:prstGeom prst="rect">
+            <a:avLst/>
+          </a:prstGeom>
+          <a:noFill/>
+        </p:spPr>
+        <p:txBody>
+          <a:bodyPr wrap="square" rtlCol="0">
+            <a:spAutoFit/>
+          </a:bodyPr>
+          <a:lstStyle/>
+          <a:p>
+            <a:r>
+              <a:rPr lang="en-US" sz="1600" dirty="0">
+                <a:latin typeface="Calibri" panose="020F0502020204030204" pitchFamily="34" charset="0"/>
+                <a:cs typeface="Calibri" panose="020F0502020204030204" pitchFamily="34" charset="0"/>
+              </a:rPr>
+              <a:t>Auto-connect mower platform</a:t>
+            </a:r>
+          </a:p>
+        </p:txBody>
+      </p:sp>
+    </p:spTree>
+    <p:extLst>
+      <p:ext uri="{BB962C8B-B14F-4D97-AF65-F5344CB8AC3E}">
+        <p14:creationId xmlns:p14="http://schemas.microsoft.com/office/powerpoint/2010/main" val="3381841661"/>
       </p:ext>
     </p:extLst>
   </p:cSld>
@@ -5670,6 +5824,1013 @@
         <p:spPr>
           <a:xfrm>
             <a:off x="-1" y="0"/>
+            <a:ext cx="5795011" cy="461665"/>
+          </a:xfrm>
+          <a:prstGeom prst="rect">
+            <a:avLst/>
+          </a:prstGeom>
+          <a:noFill/>
+        </p:spPr>
+        <p:txBody>
+          <a:bodyPr wrap="square" rtlCol="0">
+            <a:spAutoFit/>
+          </a:bodyPr>
+          <a:lstStyle/>
+          <a:p>
+            <a:r>
+              <a:rPr lang="en-US" sz="2400" b="1" dirty="0"/>
+              <a:t>Backhoe 260b – use with 1025R</a:t>
+            </a:r>
+            <a:endParaRPr lang="en-US" sz="2400" b="1" i="0" dirty="0">
+              <a:solidFill>
+                <a:srgbClr val="333333"/>
+              </a:solidFill>
+              <a:effectLst/>
+            </a:endParaRPr>
+          </a:p>
+        </p:txBody>
+      </p:sp>
+      <p:pic>
+        <p:nvPicPr>
+          <p:cNvPr id="3" name="Picture 4" descr="Backhoe Storage Dolly John Deere 260 and 260B Back Hoe">
+            <a:extLst>
+              <a:ext uri="{FF2B5EF4-FFF2-40B4-BE49-F238E27FC236}">
+                <a16:creationId xmlns:a16="http://schemas.microsoft.com/office/drawing/2014/main" id="{3E020E38-F6F1-90B7-5CF4-DED18B6B7296}"/>
+              </a:ext>
+            </a:extLst>
+          </p:cNvPr>
+          <p:cNvPicPr>
+            <a:picLocks noChangeAspect="1" noChangeArrowheads="1"/>
+          </p:cNvPicPr>
+          <p:nvPr/>
+        </p:nvPicPr>
+        <p:blipFill rotWithShape="1">
+          <a:blip r:embed="rId2" cstate="email">
+            <a:extLst>
+              <a:ext uri="{28A0092B-C50C-407E-A947-70E740481C1C}">
+                <a14:useLocalDpi xmlns:a14="http://schemas.microsoft.com/office/drawing/2010/main"/>
+              </a:ext>
+            </a:extLst>
+          </a:blip>
+          <a:srcRect/>
+          <a:stretch/>
+        </p:blipFill>
+        <p:spPr bwMode="auto">
+          <a:xfrm>
+            <a:off x="194310" y="3620079"/>
+            <a:ext cx="3141240" cy="2176219"/>
+          </a:xfrm>
+          <a:prstGeom prst="rect">
+            <a:avLst/>
+          </a:prstGeom>
+          <a:noFill/>
+          <a:ln>
+            <a:solidFill>
+              <a:srgbClr val="FF0000"/>
+            </a:solidFill>
+          </a:ln>
+          <a:extLst>
+            <a:ext uri="{909E8E84-426E-40DD-AFC4-6F175D3DCCD1}">
+              <a14:hiddenFill xmlns:a14="http://schemas.microsoft.com/office/drawing/2010/main">
+                <a:solidFill>
+                  <a:srgbClr val="FFFFFF"/>
+                </a:solidFill>
+              </a14:hiddenFill>
+            </a:ext>
+          </a:extLst>
+        </p:spPr>
+      </p:pic>
+      <p:pic>
+        <p:nvPicPr>
+          <p:cNvPr id="4" name="Picture 6" descr="John Deere Backhoe Trencher Bucket - BXX10246">
+            <a:extLst>
+              <a:ext uri="{FF2B5EF4-FFF2-40B4-BE49-F238E27FC236}">
+                <a16:creationId xmlns:a16="http://schemas.microsoft.com/office/drawing/2014/main" id="{A40DB4D0-0B65-E474-FAA9-89F49AE0BA2E}"/>
+              </a:ext>
+            </a:extLst>
+          </p:cNvPr>
+          <p:cNvPicPr>
+            <a:picLocks noChangeAspect="1" noChangeArrowheads="1"/>
+          </p:cNvPicPr>
+          <p:nvPr/>
+        </p:nvPicPr>
+        <p:blipFill rotWithShape="1">
+          <a:blip r:embed="rId3" cstate="email">
+            <a:extLst>
+              <a:ext uri="{28A0092B-C50C-407E-A947-70E740481C1C}">
+                <a14:useLocalDpi xmlns:a14="http://schemas.microsoft.com/office/drawing/2010/main"/>
+              </a:ext>
+            </a:extLst>
+          </a:blip>
+          <a:srcRect/>
+          <a:stretch/>
+        </p:blipFill>
+        <p:spPr bwMode="auto">
+          <a:xfrm>
+            <a:off x="6771525" y="201753"/>
+            <a:ext cx="1394364" cy="1174025"/>
+          </a:xfrm>
+          <a:prstGeom prst="rect">
+            <a:avLst/>
+          </a:prstGeom>
+          <a:noFill/>
+          <a:ln>
+            <a:solidFill>
+              <a:srgbClr val="FF0000"/>
+            </a:solidFill>
+          </a:ln>
+          <a:extLst>
+            <a:ext uri="{909E8E84-426E-40DD-AFC4-6F175D3DCCD1}">
+              <a14:hiddenFill xmlns:a14="http://schemas.microsoft.com/office/drawing/2010/main">
+                <a:solidFill>
+                  <a:srgbClr val="FFFFFF"/>
+                </a:solidFill>
+              </a14:hiddenFill>
+            </a:ext>
+          </a:extLst>
+        </p:spPr>
+      </p:pic>
+      <p:pic>
+        <p:nvPicPr>
+          <p:cNvPr id="1032" name="Picture 8" descr="Here's Everything You Need to Know About the 1025R | Lasseter Tractor  Company - Lasseter Equipment Group LLC">
+            <a:extLst>
+              <a:ext uri="{FF2B5EF4-FFF2-40B4-BE49-F238E27FC236}">
+                <a16:creationId xmlns:a16="http://schemas.microsoft.com/office/drawing/2014/main" id="{77A051F0-1F54-EC8D-A775-6AB6A44A4F60}"/>
+              </a:ext>
+            </a:extLst>
+          </p:cNvPr>
+          <p:cNvPicPr>
+            <a:picLocks noChangeAspect="1" noChangeArrowheads="1"/>
+          </p:cNvPicPr>
+          <p:nvPr/>
+        </p:nvPicPr>
+        <p:blipFill>
+          <a:blip r:embed="rId4" cstate="email">
+            <a:extLst>
+              <a:ext uri="{28A0092B-C50C-407E-A947-70E740481C1C}">
+                <a14:useLocalDpi xmlns:a14="http://schemas.microsoft.com/office/drawing/2010/main"/>
+              </a:ext>
+            </a:extLst>
+          </a:blip>
+          <a:srcRect/>
+          <a:stretch>
+            <a:fillRect/>
+          </a:stretch>
+        </p:blipFill>
+        <p:spPr bwMode="auto">
+          <a:xfrm>
+            <a:off x="194310" y="971550"/>
+            <a:ext cx="3141241" cy="2512992"/>
+          </a:xfrm>
+          <a:prstGeom prst="rect">
+            <a:avLst/>
+          </a:prstGeom>
+          <a:noFill/>
+          <a:ln>
+            <a:solidFill>
+              <a:srgbClr val="FF0000"/>
+            </a:solidFill>
+          </a:ln>
+          <a:extLst>
+            <a:ext uri="{909E8E84-426E-40DD-AFC4-6F175D3DCCD1}">
+              <a14:hiddenFill xmlns:a14="http://schemas.microsoft.com/office/drawing/2010/main">
+                <a:solidFill>
+                  <a:srgbClr val="FFFFFF"/>
+                </a:solidFill>
+              </a14:hiddenFill>
+            </a:ext>
+          </a:extLst>
+        </p:spPr>
+      </p:pic>
+      <p:sp>
+        <p:nvSpPr>
+          <p:cNvPr id="6" name="TextBox 5">
+            <a:extLst>
+              <a:ext uri="{FF2B5EF4-FFF2-40B4-BE49-F238E27FC236}">
+                <a16:creationId xmlns:a16="http://schemas.microsoft.com/office/drawing/2014/main" id="{776C1E76-B84C-10BD-8368-BAEB43AEB16F}"/>
+              </a:ext>
+            </a:extLst>
+          </p:cNvPr>
+          <p:cNvSpPr txBox="1"/>
+          <p:nvPr/>
+        </p:nvSpPr>
+        <p:spPr>
+          <a:xfrm>
+            <a:off x="2897504" y="442117"/>
+            <a:ext cx="3785442" cy="923330"/>
+          </a:xfrm>
+          <a:prstGeom prst="rect">
+            <a:avLst/>
+          </a:prstGeom>
+          <a:solidFill>
+            <a:schemeClr val="accent4">
+              <a:lumMod val="20000"/>
+              <a:lumOff val="80000"/>
+            </a:schemeClr>
+          </a:solidFill>
+          <a:ln>
+            <a:solidFill>
+              <a:srgbClr val="FF0000"/>
+            </a:solidFill>
+          </a:ln>
+        </p:spPr>
+        <p:txBody>
+          <a:bodyPr wrap="square" rtlCol="0">
+            <a:spAutoFit/>
+          </a:bodyPr>
+          <a:lstStyle/>
+          <a:p>
+            <a:pPr marL="285750" indent="-285750">
+              <a:buFont typeface="Arial" panose="020B0604020202020204" pitchFamily="34" charset="0"/>
+              <a:buChar char="•"/>
+            </a:pPr>
+            <a:r>
+              <a:rPr lang="en-US" b="1" dirty="0">
+                <a:solidFill>
+                  <a:srgbClr val="FF0000"/>
+                </a:solidFill>
+              </a:rPr>
+              <a:t>$6K</a:t>
+            </a:r>
+          </a:p>
+          <a:p>
+            <a:pPr marL="285750" indent="-285750">
+              <a:buFont typeface="Arial" panose="020B0604020202020204" pitchFamily="34" charset="0"/>
+              <a:buChar char="•"/>
+            </a:pPr>
+            <a:r>
+              <a:rPr lang="en-US" dirty="0"/>
+              <a:t>has its own seat</a:t>
+            </a:r>
+          </a:p>
+          <a:p>
+            <a:pPr marL="285750" indent="-285750">
+              <a:buFont typeface="Arial" panose="020B0604020202020204" pitchFamily="34" charset="0"/>
+              <a:buChar char="•"/>
+            </a:pPr>
+            <a:r>
+              <a:rPr lang="en-US" dirty="0"/>
+              <a:t>regular bucket, trenching bucket</a:t>
+            </a:r>
+          </a:p>
+        </p:txBody>
+      </p:sp>
+      <p:sp>
+        <p:nvSpPr>
+          <p:cNvPr id="7" name="TextBox 6">
+            <a:extLst>
+              <a:ext uri="{FF2B5EF4-FFF2-40B4-BE49-F238E27FC236}">
+                <a16:creationId xmlns:a16="http://schemas.microsoft.com/office/drawing/2014/main" id="{BD458471-78CB-CF4F-AC46-8213A5687A8C}"/>
+              </a:ext>
+            </a:extLst>
+          </p:cNvPr>
+          <p:cNvSpPr txBox="1"/>
+          <p:nvPr/>
+        </p:nvSpPr>
+        <p:spPr>
+          <a:xfrm>
+            <a:off x="8254468" y="313789"/>
+            <a:ext cx="1394363" cy="646331"/>
+          </a:xfrm>
+          <a:prstGeom prst="rect">
+            <a:avLst/>
+          </a:prstGeom>
+          <a:noFill/>
+          <a:ln>
+            <a:noFill/>
+          </a:ln>
+        </p:spPr>
+        <p:txBody>
+          <a:bodyPr wrap="square" rtlCol="0">
+            <a:spAutoFit/>
+          </a:bodyPr>
+          <a:lstStyle/>
+          <a:p>
+            <a:pPr algn="ctr"/>
+            <a:r>
+              <a:rPr lang="en-US" dirty="0"/>
+              <a:t>trenching bucket</a:t>
+            </a:r>
+          </a:p>
+        </p:txBody>
+      </p:sp>
+      <p:pic>
+        <p:nvPicPr>
+          <p:cNvPr id="1026" name="Picture 2" descr="Backhoe VS Excavator : u/Friendly-Explosive">
+            <a:extLst>
+              <a:ext uri="{FF2B5EF4-FFF2-40B4-BE49-F238E27FC236}">
+                <a16:creationId xmlns:a16="http://schemas.microsoft.com/office/drawing/2014/main" id="{59CC2E99-AD62-6227-8CBE-9DCBABB5DCD7}"/>
+              </a:ext>
+            </a:extLst>
+          </p:cNvPr>
+          <p:cNvPicPr>
+            <a:picLocks noChangeAspect="1" noChangeArrowheads="1"/>
+          </p:cNvPicPr>
+          <p:nvPr/>
+        </p:nvPicPr>
+        <p:blipFill rotWithShape="1">
+          <a:blip r:embed="rId5" cstate="email">
+            <a:extLst>
+              <a:ext uri="{28A0092B-C50C-407E-A947-70E740481C1C}">
+                <a14:useLocalDpi xmlns:a14="http://schemas.microsoft.com/office/drawing/2010/main"/>
+              </a:ext>
+            </a:extLst>
+          </a:blip>
+          <a:srcRect/>
+          <a:stretch/>
+        </p:blipFill>
+        <p:spPr bwMode="auto">
+          <a:xfrm>
+            <a:off x="9862454" y="4179062"/>
+            <a:ext cx="2242459" cy="2603500"/>
+          </a:xfrm>
+          <a:prstGeom prst="rect">
+            <a:avLst/>
+          </a:prstGeom>
+          <a:noFill/>
+          <a:ln>
+            <a:solidFill>
+              <a:srgbClr val="FF0000"/>
+            </a:solidFill>
+          </a:ln>
+          <a:extLst>
+            <a:ext uri="{909E8E84-426E-40DD-AFC4-6F175D3DCCD1}">
+              <a14:hiddenFill xmlns:a14="http://schemas.microsoft.com/office/drawing/2010/main">
+                <a:solidFill>
+                  <a:srgbClr val="FFFFFF"/>
+                </a:solidFill>
+              </a14:hiddenFill>
+            </a:ext>
+          </a:extLst>
+        </p:spPr>
+      </p:pic>
+      <p:sp>
+        <p:nvSpPr>
+          <p:cNvPr id="5" name="TextBox 4">
+            <a:extLst>
+              <a:ext uri="{FF2B5EF4-FFF2-40B4-BE49-F238E27FC236}">
+                <a16:creationId xmlns:a16="http://schemas.microsoft.com/office/drawing/2014/main" id="{0E0429E4-AF4E-72D3-2146-DBFDE94382D0}"/>
+              </a:ext>
+            </a:extLst>
+          </p:cNvPr>
+          <p:cNvSpPr txBox="1"/>
+          <p:nvPr/>
+        </p:nvSpPr>
+        <p:spPr>
+          <a:xfrm>
+            <a:off x="6018778" y="5897880"/>
+            <a:ext cx="3785442" cy="646331"/>
+          </a:xfrm>
+          <a:prstGeom prst="rect">
+            <a:avLst/>
+          </a:prstGeom>
+          <a:solidFill>
+            <a:schemeClr val="accent4">
+              <a:lumMod val="20000"/>
+              <a:lumOff val="80000"/>
+            </a:schemeClr>
+          </a:solidFill>
+          <a:ln>
+            <a:solidFill>
+              <a:srgbClr val="FF0000"/>
+            </a:solidFill>
+          </a:ln>
+        </p:spPr>
+        <p:txBody>
+          <a:bodyPr wrap="square" rtlCol="0">
+            <a:spAutoFit/>
+          </a:bodyPr>
+          <a:lstStyle/>
+          <a:p>
+            <a:r>
+              <a:rPr lang="en-US" dirty="0"/>
+              <a:t>Tracked Excavator - heavier duty, can dig more, father and deeper</a:t>
+            </a:r>
+          </a:p>
+        </p:txBody>
+      </p:sp>
+      <p:sp>
+        <p:nvSpPr>
+          <p:cNvPr id="8" name="TextBox 7">
+            <a:extLst>
+              <a:ext uri="{FF2B5EF4-FFF2-40B4-BE49-F238E27FC236}">
+                <a16:creationId xmlns:a16="http://schemas.microsoft.com/office/drawing/2014/main" id="{2EF4C58F-A0F2-6DE0-54B2-1F5894122D66}"/>
+              </a:ext>
+            </a:extLst>
+          </p:cNvPr>
+          <p:cNvSpPr txBox="1"/>
+          <p:nvPr/>
+        </p:nvSpPr>
+        <p:spPr>
+          <a:xfrm>
+            <a:off x="6018778" y="4778455"/>
+            <a:ext cx="3785442" cy="646331"/>
+          </a:xfrm>
+          <a:prstGeom prst="rect">
+            <a:avLst/>
+          </a:prstGeom>
+          <a:solidFill>
+            <a:schemeClr val="accent4">
+              <a:lumMod val="20000"/>
+              <a:lumOff val="80000"/>
+            </a:schemeClr>
+          </a:solidFill>
+          <a:ln>
+            <a:solidFill>
+              <a:srgbClr val="FF0000"/>
+            </a:solidFill>
+          </a:ln>
+        </p:spPr>
+        <p:txBody>
+          <a:bodyPr wrap="square" rtlCol="0">
+            <a:spAutoFit/>
+          </a:bodyPr>
+          <a:lstStyle/>
+          <a:p>
+            <a:r>
+              <a:rPr lang="en-US" dirty="0"/>
+              <a:t>Wheeled Backhoe – smaller, lighter, more agile</a:t>
+            </a:r>
+          </a:p>
+        </p:txBody>
+      </p:sp>
+      <p:pic>
+        <p:nvPicPr>
+          <p:cNvPr id="9" name="Picture 2" descr="1025R vs 2025R spec comparison graphic | Green Tractor Talk">
+            <a:extLst>
+              <a:ext uri="{FF2B5EF4-FFF2-40B4-BE49-F238E27FC236}">
+                <a16:creationId xmlns:a16="http://schemas.microsoft.com/office/drawing/2014/main" id="{6EE92ACC-3C05-CEFE-7668-731BEC0696F5}"/>
+              </a:ext>
+            </a:extLst>
+          </p:cNvPr>
+          <p:cNvPicPr>
+            <a:picLocks noChangeAspect="1" noChangeArrowheads="1"/>
+          </p:cNvPicPr>
+          <p:nvPr/>
+        </p:nvPicPr>
+        <p:blipFill>
+          <a:blip r:embed="rId6" cstate="email">
+            <a:extLst>
+              <a:ext uri="{28A0092B-C50C-407E-A947-70E740481C1C}">
+                <a14:useLocalDpi xmlns:a14="http://schemas.microsoft.com/office/drawing/2010/main"/>
+              </a:ext>
+            </a:extLst>
+          </a:blip>
+          <a:srcRect/>
+          <a:stretch>
+            <a:fillRect/>
+          </a:stretch>
+        </p:blipFill>
+        <p:spPr bwMode="auto">
+          <a:xfrm>
+            <a:off x="4499776" y="2033512"/>
+            <a:ext cx="4693634" cy="2603500"/>
+          </a:xfrm>
+          <a:prstGeom prst="rect">
+            <a:avLst/>
+          </a:prstGeom>
+          <a:noFill/>
+          <a:ln>
+            <a:solidFill>
+              <a:srgbClr val="FF0000"/>
+            </a:solidFill>
+          </a:ln>
+          <a:extLst>
+            <a:ext uri="{909E8E84-426E-40DD-AFC4-6F175D3DCCD1}">
+              <a14:hiddenFill xmlns:a14="http://schemas.microsoft.com/office/drawing/2010/main">
+                <a:solidFill>
+                  <a:srgbClr val="FFFFFF"/>
+                </a:solidFill>
+              </a14:hiddenFill>
+            </a:ext>
+          </a:extLst>
+        </p:spPr>
+      </p:pic>
+      <p:sp>
+        <p:nvSpPr>
+          <p:cNvPr id="10" name="TextBox 9">
+            <a:extLst>
+              <a:ext uri="{FF2B5EF4-FFF2-40B4-BE49-F238E27FC236}">
+                <a16:creationId xmlns:a16="http://schemas.microsoft.com/office/drawing/2014/main" id="{F16BDBF8-78D7-2C01-01B7-8F1BC417A9C6}"/>
+              </a:ext>
+            </a:extLst>
+          </p:cNvPr>
+          <p:cNvSpPr txBox="1"/>
+          <p:nvPr/>
+        </p:nvSpPr>
+        <p:spPr>
+          <a:xfrm>
+            <a:off x="4953872" y="1639625"/>
+            <a:ext cx="3785442" cy="369332"/>
+          </a:xfrm>
+          <a:prstGeom prst="rect">
+            <a:avLst/>
+          </a:prstGeom>
+          <a:solidFill>
+            <a:schemeClr val="accent4">
+              <a:lumMod val="20000"/>
+              <a:lumOff val="80000"/>
+            </a:schemeClr>
+          </a:solidFill>
+          <a:ln>
+            <a:solidFill>
+              <a:srgbClr val="FF0000"/>
+            </a:solidFill>
+          </a:ln>
+        </p:spPr>
+        <p:txBody>
+          <a:bodyPr wrap="square" rtlCol="0">
+            <a:spAutoFit/>
+          </a:bodyPr>
+          <a:lstStyle/>
+          <a:p>
+            <a:r>
+              <a:rPr lang="en-US" dirty="0"/>
+              <a:t> 1025R                    vs                     2025R</a:t>
+            </a:r>
+          </a:p>
+        </p:txBody>
+      </p:sp>
+      <p:sp>
+        <p:nvSpPr>
+          <p:cNvPr id="11" name="TextBox 10">
+            <a:extLst>
+              <a:ext uri="{FF2B5EF4-FFF2-40B4-BE49-F238E27FC236}">
+                <a16:creationId xmlns:a16="http://schemas.microsoft.com/office/drawing/2014/main" id="{75618DCE-DC57-E6AF-91F2-A8276D2F428D}"/>
+              </a:ext>
+            </a:extLst>
+          </p:cNvPr>
+          <p:cNvSpPr txBox="1"/>
+          <p:nvPr/>
+        </p:nvSpPr>
+        <p:spPr>
+          <a:xfrm>
+            <a:off x="454375" y="5886450"/>
+            <a:ext cx="2621109" cy="307777"/>
+          </a:xfrm>
+          <a:prstGeom prst="rect">
+            <a:avLst/>
+          </a:prstGeom>
+          <a:noFill/>
+        </p:spPr>
+        <p:txBody>
+          <a:bodyPr wrap="square" rtlCol="0">
+            <a:spAutoFit/>
+          </a:bodyPr>
+          <a:lstStyle/>
+          <a:p>
+            <a:r>
+              <a:rPr lang="en-US" sz="1400" b="1" dirty="0"/>
+              <a:t>Backhoe 260b – use with 1025R</a:t>
+            </a:r>
+            <a:endParaRPr lang="en-US" sz="1400" b="1" i="0" dirty="0">
+              <a:solidFill>
+                <a:srgbClr val="333333"/>
+              </a:solidFill>
+              <a:effectLst/>
+            </a:endParaRPr>
+          </a:p>
+        </p:txBody>
+      </p:sp>
+    </p:spTree>
+    <p:extLst>
+      <p:ext uri="{BB962C8B-B14F-4D97-AF65-F5344CB8AC3E}">
+        <p14:creationId xmlns:p14="http://schemas.microsoft.com/office/powerpoint/2010/main" val="1823851163"/>
+      </p:ext>
+    </p:extLst>
+  </p:cSld>
+  <p:clrMapOvr>
+    <a:masterClrMapping/>
+  </p:clrMapOvr>
+</p:sld>
+</file>
+
+<file path=ppt/slides/slide14.xml><?xml version="1.0" encoding="utf-8"?>
+<p:sld xmlns:a="http://schemas.openxmlformats.org/drawingml/2006/main" xmlns:r="http://schemas.openxmlformats.org/officeDocument/2006/relationships" xmlns:p="http://schemas.openxmlformats.org/presentationml/2006/main">
+  <p:cSld>
+    <p:spTree>
+      <p:nvGrpSpPr>
+        <p:cNvPr id="1" name="">
+          <a:extLst>
+            <a:ext uri="{FF2B5EF4-FFF2-40B4-BE49-F238E27FC236}">
+              <a16:creationId xmlns:a16="http://schemas.microsoft.com/office/drawing/2014/main" id="{2D16B695-A4C0-BC53-15EF-81548A04F130}"/>
+            </a:ext>
+          </a:extLst>
+        </p:cNvPr>
+        <p:cNvGrpSpPr/>
+        <p:nvPr/>
+      </p:nvGrpSpPr>
+      <p:grpSpPr>
+        <a:xfrm>
+          <a:off x="0" y="0"/>
+          <a:ext cx="0" cy="0"/>
+          <a:chOff x="0" y="0"/>
+          <a:chExt cx="0" cy="0"/>
+        </a:xfrm>
+      </p:grpSpPr>
+      <p:sp>
+        <p:nvSpPr>
+          <p:cNvPr id="2" name="TextBox 1">
+            <a:extLst>
+              <a:ext uri="{FF2B5EF4-FFF2-40B4-BE49-F238E27FC236}">
+                <a16:creationId xmlns:a16="http://schemas.microsoft.com/office/drawing/2014/main" id="{A5F44891-376B-DAA0-385F-BE3EBBF84680}"/>
+              </a:ext>
+            </a:extLst>
+          </p:cNvPr>
+          <p:cNvSpPr txBox="1"/>
+          <p:nvPr/>
+        </p:nvSpPr>
+        <p:spPr>
+          <a:xfrm>
+            <a:off x="-1" y="0"/>
+            <a:ext cx="4431253" cy="523220"/>
+          </a:xfrm>
+          <a:prstGeom prst="rect">
+            <a:avLst/>
+          </a:prstGeom>
+          <a:noFill/>
+        </p:spPr>
+        <p:txBody>
+          <a:bodyPr wrap="square" rtlCol="0">
+            <a:spAutoFit/>
+          </a:bodyPr>
+          <a:lstStyle/>
+          <a:p>
+            <a:r>
+              <a:rPr lang="en-US" sz="2800" b="1" dirty="0"/>
+              <a:t>Dual Tires (</a:t>
+            </a:r>
+            <a:r>
+              <a:rPr lang="en-US" sz="2800" b="1" dirty="0" err="1"/>
+              <a:t>Dualies</a:t>
+            </a:r>
+            <a:r>
+              <a:rPr lang="en-US" sz="2800" b="1" dirty="0"/>
+              <a:t>)</a:t>
+            </a:r>
+          </a:p>
+        </p:txBody>
+      </p:sp>
+      <p:sp>
+        <p:nvSpPr>
+          <p:cNvPr id="8" name="TextBox 7">
+            <a:extLst>
+              <a:ext uri="{FF2B5EF4-FFF2-40B4-BE49-F238E27FC236}">
+                <a16:creationId xmlns:a16="http://schemas.microsoft.com/office/drawing/2014/main" id="{E5EAD597-53B0-1A66-BAB2-6EA6A21F38F7}"/>
+              </a:ext>
+            </a:extLst>
+          </p:cNvPr>
+          <p:cNvSpPr txBox="1"/>
+          <p:nvPr/>
+        </p:nvSpPr>
+        <p:spPr>
+          <a:xfrm>
+            <a:off x="164052" y="807468"/>
+            <a:ext cx="5506736" cy="3754874"/>
+          </a:xfrm>
+          <a:prstGeom prst="rect">
+            <a:avLst/>
+          </a:prstGeom>
+          <a:noFill/>
+        </p:spPr>
+        <p:txBody>
+          <a:bodyPr wrap="square" rtlCol="0">
+            <a:spAutoFit/>
+          </a:bodyPr>
+          <a:lstStyle/>
+          <a:p>
+            <a:r>
+              <a:rPr lang="en-US" sz="1400" dirty="0"/>
+              <a:t>Can potentially help in muddy conditions</a:t>
+            </a:r>
+          </a:p>
+          <a:p>
+            <a:pPr marL="285750" indent="-285750">
+              <a:buFont typeface="Arial" panose="020B0604020202020204" pitchFamily="34" charset="0"/>
+              <a:buChar char="•"/>
+            </a:pPr>
+            <a:r>
+              <a:rPr lang="en-US" sz="1400" dirty="0"/>
+              <a:t>Distribute the weight over a larger surface area, which can reduce ground pressure, thus preventing the tractor from sinking into soft or muddy ground</a:t>
+            </a:r>
+          </a:p>
+          <a:p>
+            <a:pPr marL="285750" indent="-285750">
+              <a:buFont typeface="Arial" panose="020B0604020202020204" pitchFamily="34" charset="0"/>
+              <a:buChar char="•"/>
+            </a:pPr>
+            <a:r>
+              <a:rPr lang="en-US" sz="1400" dirty="0"/>
+              <a:t>Increase traction since there are now twice the number of lugs (the raised patterns on a tire) making contact with the ground. </a:t>
+            </a:r>
+          </a:p>
+          <a:p>
+            <a:endParaRPr lang="en-US" sz="1400" dirty="0"/>
+          </a:p>
+          <a:p>
+            <a:r>
+              <a:rPr lang="en-US" sz="1400" dirty="0"/>
+              <a:t>Downsides:</a:t>
+            </a:r>
+          </a:p>
+          <a:p>
+            <a:pPr marL="285750" indent="-285750">
+              <a:buFont typeface="Arial" panose="020B0604020202020204" pitchFamily="34" charset="0"/>
+              <a:buChar char="•"/>
+            </a:pPr>
+            <a:r>
+              <a:rPr lang="en-US" sz="1400" dirty="0"/>
+              <a:t>Added Weight</a:t>
+            </a:r>
+          </a:p>
+          <a:p>
+            <a:pPr marL="285750" indent="-285750">
+              <a:buFont typeface="Arial" panose="020B0604020202020204" pitchFamily="34" charset="0"/>
+              <a:buChar char="•"/>
+            </a:pPr>
+            <a:r>
+              <a:rPr lang="en-US" sz="1400" dirty="0"/>
+              <a:t>Turning Resistance</a:t>
+            </a:r>
+          </a:p>
+          <a:p>
+            <a:pPr marL="285750" indent="-285750">
+              <a:buFont typeface="Arial" panose="020B0604020202020204" pitchFamily="34" charset="0"/>
+              <a:buChar char="•"/>
+            </a:pPr>
+            <a:r>
+              <a:rPr lang="en-US" sz="1400" dirty="0"/>
+              <a:t>Cost and Installation</a:t>
+            </a:r>
+          </a:p>
+          <a:p>
+            <a:pPr marL="285750" indent="-285750">
+              <a:buFont typeface="Arial" panose="020B0604020202020204" pitchFamily="34" charset="0"/>
+              <a:buChar char="•"/>
+            </a:pPr>
+            <a:r>
+              <a:rPr lang="en-US" sz="1400" dirty="0"/>
+              <a:t>Wider Profile (harder to navigate)</a:t>
+            </a:r>
+          </a:p>
+          <a:p>
+            <a:pPr marL="285750" indent="-285750">
+              <a:buFont typeface="Arial" panose="020B0604020202020204" pitchFamily="34" charset="0"/>
+              <a:buChar char="•"/>
+            </a:pPr>
+            <a:r>
+              <a:rPr lang="en-US" sz="1400" dirty="0"/>
+              <a:t>Soil Compaction</a:t>
+            </a:r>
+          </a:p>
+          <a:p>
+            <a:pPr marL="285750" indent="-285750">
+              <a:buFont typeface="Arial" panose="020B0604020202020204" pitchFamily="34" charset="0"/>
+              <a:buChar char="•"/>
+            </a:pPr>
+            <a:endParaRPr lang="en-US" sz="1400" dirty="0"/>
+          </a:p>
+          <a:p>
+            <a:r>
+              <a:rPr lang="en-US" sz="1400" dirty="0"/>
+              <a:t>Other solutions to consider: </a:t>
+            </a:r>
+          </a:p>
+          <a:p>
+            <a:pPr marL="285750" indent="-285750">
+              <a:buFont typeface="Arial" panose="020B0604020202020204" pitchFamily="34" charset="0"/>
+              <a:buChar char="•"/>
+            </a:pPr>
+            <a:r>
+              <a:rPr lang="en-US" sz="1400" dirty="0"/>
+              <a:t>tire chains</a:t>
+            </a:r>
+          </a:p>
+          <a:p>
+            <a:pPr marL="285750" indent="-285750">
+              <a:buFont typeface="Arial" panose="020B0604020202020204" pitchFamily="34" charset="0"/>
+              <a:buChar char="•"/>
+            </a:pPr>
+            <a:r>
+              <a:rPr lang="en-US" sz="1400" dirty="0"/>
+              <a:t>wider single tires</a:t>
+            </a:r>
+          </a:p>
+        </p:txBody>
+      </p:sp>
+      <p:pic>
+        <p:nvPicPr>
+          <p:cNvPr id="1026" name="Picture 2" descr="How to Put Duals On a Mower - A Better Way">
+            <a:extLst>
+              <a:ext uri="{FF2B5EF4-FFF2-40B4-BE49-F238E27FC236}">
+                <a16:creationId xmlns:a16="http://schemas.microsoft.com/office/drawing/2014/main" id="{71D526FD-5301-0D68-CD3C-BFABB30F8E12}"/>
+              </a:ext>
+            </a:extLst>
+          </p:cNvPr>
+          <p:cNvPicPr>
+            <a:picLocks noChangeAspect="1" noChangeArrowheads="1"/>
+          </p:cNvPicPr>
+          <p:nvPr/>
+        </p:nvPicPr>
+        <p:blipFill>
+          <a:blip r:embed="rId2" cstate="email">
+            <a:extLst>
+              <a:ext uri="{28A0092B-C50C-407E-A947-70E740481C1C}">
+                <a14:useLocalDpi xmlns:a14="http://schemas.microsoft.com/office/drawing/2010/main"/>
+              </a:ext>
+            </a:extLst>
+          </a:blip>
+          <a:srcRect/>
+          <a:stretch>
+            <a:fillRect/>
+          </a:stretch>
+        </p:blipFill>
+        <p:spPr bwMode="auto">
+          <a:xfrm>
+            <a:off x="7760748" y="228600"/>
+            <a:ext cx="4267200" cy="3200400"/>
+          </a:xfrm>
+          <a:prstGeom prst="rect">
+            <a:avLst/>
+          </a:prstGeom>
+          <a:noFill/>
+          <a:extLst>
+            <a:ext uri="{909E8E84-426E-40DD-AFC4-6F175D3DCCD1}">
+              <a14:hiddenFill xmlns:a14="http://schemas.microsoft.com/office/drawing/2010/main">
+                <a:solidFill>
+                  <a:srgbClr val="FFFFFF"/>
+                </a:solidFill>
+              </a14:hiddenFill>
+            </a:ext>
+          </a:extLst>
+        </p:spPr>
+      </p:pic>
+      <p:sp>
+        <p:nvSpPr>
+          <p:cNvPr id="9" name="TextBox 8">
+            <a:extLst>
+              <a:ext uri="{FF2B5EF4-FFF2-40B4-BE49-F238E27FC236}">
+                <a16:creationId xmlns:a16="http://schemas.microsoft.com/office/drawing/2014/main" id="{FA27FBF3-5F1A-3128-93B1-65E9E5627FFA}"/>
+              </a:ext>
+            </a:extLst>
+          </p:cNvPr>
+          <p:cNvSpPr txBox="1"/>
+          <p:nvPr/>
+        </p:nvSpPr>
+        <p:spPr>
+          <a:xfrm>
+            <a:off x="3048000" y="76944"/>
+            <a:ext cx="3810000" cy="307777"/>
+          </a:xfrm>
+          <a:prstGeom prst="rect">
+            <a:avLst/>
+          </a:prstGeom>
+          <a:noFill/>
+        </p:spPr>
+        <p:txBody>
+          <a:bodyPr wrap="square" rtlCol="0">
+            <a:spAutoFit/>
+          </a:bodyPr>
+          <a:lstStyle/>
+          <a:p>
+            <a:r>
+              <a:rPr lang="en-US" sz="1400" dirty="0">
+                <a:hlinkClick r:id="rId3"/>
+              </a:rPr>
+              <a:t>https://</a:t>
+            </a:r>
+            <a:r>
+              <a:rPr lang="en-US" sz="1400" dirty="0" err="1">
+                <a:hlinkClick r:id="rId3"/>
+              </a:rPr>
+              <a:t>www.youtube.com</a:t>
+            </a:r>
+            <a:r>
+              <a:rPr lang="en-US" sz="1400" dirty="0">
+                <a:hlinkClick r:id="rId3"/>
+              </a:rPr>
+              <a:t>/</a:t>
+            </a:r>
+            <a:r>
+              <a:rPr lang="en-US" sz="1400" dirty="0" err="1">
+                <a:hlinkClick r:id="rId3"/>
+              </a:rPr>
+              <a:t>watch?v</a:t>
+            </a:r>
+            <a:r>
+              <a:rPr lang="en-US" sz="1400" dirty="0">
+                <a:hlinkClick r:id="rId3"/>
+              </a:rPr>
+              <a:t>=</a:t>
+            </a:r>
+            <a:r>
+              <a:rPr lang="en-US" sz="1400" dirty="0" err="1">
+                <a:hlinkClick r:id="rId3"/>
+              </a:rPr>
+              <a:t>oDdR</a:t>
+            </a:r>
+            <a:r>
+              <a:rPr lang="en-US" sz="1400" dirty="0">
+                <a:hlinkClick r:id="rId3"/>
+              </a:rPr>
+              <a:t>-KLIF-Q</a:t>
+            </a:r>
+            <a:endParaRPr lang="en-US" sz="1400" dirty="0"/>
+          </a:p>
+        </p:txBody>
+      </p:sp>
+      <p:pic>
+        <p:nvPicPr>
+          <p:cNvPr id="1028" name="Picture 4" descr="DUAL TIRES ON A 1025r? Carlisle Versa Turfs + Found A STEAL! - YouTube">
+            <a:extLst>
+              <a:ext uri="{FF2B5EF4-FFF2-40B4-BE49-F238E27FC236}">
+                <a16:creationId xmlns:a16="http://schemas.microsoft.com/office/drawing/2014/main" id="{EDAA7AC9-D55C-2BE4-8784-E24DB49BAEE4}"/>
+              </a:ext>
+            </a:extLst>
+          </p:cNvPr>
+          <p:cNvPicPr>
+            <a:picLocks noChangeAspect="1" noChangeArrowheads="1"/>
+          </p:cNvPicPr>
+          <p:nvPr/>
+        </p:nvPicPr>
+        <p:blipFill>
+          <a:blip r:embed="rId4">
+            <a:extLst>
+              <a:ext uri="{28A0092B-C50C-407E-A947-70E740481C1C}">
+                <a14:useLocalDpi xmlns:a14="http://schemas.microsoft.com/office/drawing/2010/main"/>
+              </a:ext>
+            </a:extLst>
+          </a:blip>
+          <a:srcRect/>
+          <a:stretch>
+            <a:fillRect/>
+          </a:stretch>
+        </p:blipFill>
+        <p:spPr bwMode="auto">
+          <a:xfrm>
+            <a:off x="7760748" y="3594652"/>
+            <a:ext cx="3810000" cy="2133600"/>
+          </a:xfrm>
+          <a:prstGeom prst="rect">
+            <a:avLst/>
+          </a:prstGeom>
+          <a:noFill/>
+          <a:extLst>
+            <a:ext uri="{909E8E84-426E-40DD-AFC4-6F175D3DCCD1}">
+              <a14:hiddenFill xmlns:a14="http://schemas.microsoft.com/office/drawing/2010/main">
+                <a:solidFill>
+                  <a:srgbClr val="FFFFFF"/>
+                </a:solidFill>
+              </a14:hiddenFill>
+            </a:ext>
+          </a:extLst>
+        </p:spPr>
+      </p:pic>
+    </p:spTree>
+    <p:extLst>
+      <p:ext uri="{BB962C8B-B14F-4D97-AF65-F5344CB8AC3E}">
+        <p14:creationId xmlns:p14="http://schemas.microsoft.com/office/powerpoint/2010/main" val="1009907999"/>
+      </p:ext>
+    </p:extLst>
+  </p:cSld>
+  <p:clrMapOvr>
+    <a:masterClrMapping/>
+  </p:clrMapOvr>
+</p:sld>
+</file>
+
+<file path=ppt/slides/slide15.xml><?xml version="1.0" encoding="utf-8"?>
+<p:sld xmlns:a="http://schemas.openxmlformats.org/drawingml/2006/main" xmlns:r="http://schemas.openxmlformats.org/officeDocument/2006/relationships" xmlns:p="http://schemas.openxmlformats.org/presentationml/2006/main">
+  <p:cSld>
+    <p:spTree>
+      <p:nvGrpSpPr>
+        <p:cNvPr id="1" name=""/>
+        <p:cNvGrpSpPr/>
+        <p:nvPr/>
+      </p:nvGrpSpPr>
+      <p:grpSpPr>
+        <a:xfrm>
+          <a:off x="0" y="0"/>
+          <a:ext cx="0" cy="0"/>
+          <a:chOff x="0" y="0"/>
+          <a:chExt cx="0" cy="0"/>
+        </a:xfrm>
+      </p:grpSpPr>
+      <p:sp>
+        <p:nvSpPr>
+          <p:cNvPr id="2" name="TextBox 1">
+            <a:extLst>
+              <a:ext uri="{FF2B5EF4-FFF2-40B4-BE49-F238E27FC236}">
+                <a16:creationId xmlns:a16="http://schemas.microsoft.com/office/drawing/2014/main" id="{775BBD15-AEC2-1815-2347-A5BB8F308263}"/>
+              </a:ext>
+            </a:extLst>
+          </p:cNvPr>
+          <p:cNvSpPr txBox="1"/>
+          <p:nvPr/>
+        </p:nvSpPr>
+        <p:spPr>
+          <a:xfrm>
+            <a:off x="-1" y="0"/>
             <a:ext cx="5585791" cy="523220"/>
           </a:xfrm>
           <a:prstGeom prst="rect">
@@ -5965,7 +7126,13 @@
   <p:cSld>
     <p:spTree>
       <p:nvGrpSpPr>
-        <p:cNvPr id="1" name=""/>
+        <p:cNvPr id="1" name="">
+          <a:extLst>
+            <a:ext uri="{FF2B5EF4-FFF2-40B4-BE49-F238E27FC236}">
+              <a16:creationId xmlns:a16="http://schemas.microsoft.com/office/drawing/2014/main" id="{14D6E071-F688-B29D-91EB-400306740ACE}"/>
+            </a:ext>
+          </a:extLst>
+        </p:cNvPr>
         <p:cNvGrpSpPr/>
         <p:nvPr/>
       </p:nvGrpSpPr>
@@ -5982,7 +7149,7 @@
           <p:cNvPr id="2" name="TextBox 1">
             <a:extLst>
               <a:ext uri="{FF2B5EF4-FFF2-40B4-BE49-F238E27FC236}">
-                <a16:creationId xmlns:a16="http://schemas.microsoft.com/office/drawing/2014/main" id="{775BBD15-AEC2-1815-2347-A5BB8F308263}"/>
+                <a16:creationId xmlns:a16="http://schemas.microsoft.com/office/drawing/2014/main" id="{60BC9489-C383-C189-7644-8C2E7989623A}"/>
               </a:ext>
             </a:extLst>
           </p:cNvPr>
@@ -5992,7 +7159,7 @@
         <p:spPr>
           <a:xfrm>
             <a:off x="-1" y="0"/>
-            <a:ext cx="5795011" cy="461665"/>
+            <a:ext cx="2788921" cy="461665"/>
           </a:xfrm>
           <a:prstGeom prst="rect">
             <a:avLst/>
@@ -6007,7 +7174,7 @@
           <a:p>
             <a:r>
               <a:rPr lang="en-US" sz="2400" b="1" dirty="0"/>
-              <a:t>Backhoe 260b – use with 1025R</a:t>
+              <a:t>1025R   vs    X758</a:t>
             </a:r>
             <a:endParaRPr lang="en-US" sz="2400" b="1" i="0" dirty="0">
               <a:solidFill>
@@ -6018,164 +7185,12 @@
           </a:p>
         </p:txBody>
       </p:sp>
-      <p:pic>
-        <p:nvPicPr>
-          <p:cNvPr id="3" name="Picture 4" descr="Backhoe Storage Dolly John Deere 260 and 260B Back Hoe">
-            <a:extLst>
-              <a:ext uri="{FF2B5EF4-FFF2-40B4-BE49-F238E27FC236}">
-                <a16:creationId xmlns:a16="http://schemas.microsoft.com/office/drawing/2014/main" id="{3E020E38-F6F1-90B7-5CF4-DED18B6B7296}"/>
-              </a:ext>
-            </a:extLst>
-          </p:cNvPr>
-          <p:cNvPicPr>
-            <a:picLocks noChangeAspect="1" noChangeArrowheads="1"/>
-          </p:cNvPicPr>
-          <p:nvPr/>
-        </p:nvPicPr>
-        <p:blipFill rotWithShape="1">
-          <a:blip r:embed="rId2" cstate="email">
-            <a:extLst>
-              <a:ext uri="{28A0092B-C50C-407E-A947-70E740481C1C}">
-                <a14:useLocalDpi xmlns:a14="http://schemas.microsoft.com/office/drawing/2010/main"/>
-              </a:ext>
-            </a:extLst>
-          </a:blip>
-          <a:srcRect/>
-          <a:stretch/>
-        </p:blipFill>
-        <p:spPr bwMode="auto">
-          <a:xfrm>
-            <a:off x="194310" y="3620079"/>
-            <a:ext cx="3141240" cy="2176219"/>
-          </a:xfrm>
-          <a:prstGeom prst="rect">
-            <a:avLst/>
-          </a:prstGeom>
-          <a:noFill/>
-          <a:ln>
-            <a:solidFill>
-              <a:srgbClr val="FF0000"/>
-            </a:solidFill>
-          </a:ln>
-          <a:extLst>
-            <a:ext uri="{909E8E84-426E-40DD-AFC4-6F175D3DCCD1}">
-              <a14:hiddenFill xmlns:a14="http://schemas.microsoft.com/office/drawing/2010/main">
-                <a:solidFill>
-                  <a:srgbClr val="FFFFFF"/>
-                </a:solidFill>
-              </a14:hiddenFill>
-            </a:ext>
-          </a:extLst>
-        </p:spPr>
-      </p:pic>
-      <p:pic>
-        <p:nvPicPr>
-          <p:cNvPr id="4" name="Picture 6" descr="John Deere Backhoe Trencher Bucket - BXX10246">
-            <a:extLst>
-              <a:ext uri="{FF2B5EF4-FFF2-40B4-BE49-F238E27FC236}">
-                <a16:creationId xmlns:a16="http://schemas.microsoft.com/office/drawing/2014/main" id="{A40DB4D0-0B65-E474-FAA9-89F49AE0BA2E}"/>
-              </a:ext>
-            </a:extLst>
-          </p:cNvPr>
-          <p:cNvPicPr>
-            <a:picLocks noChangeAspect="1" noChangeArrowheads="1"/>
-          </p:cNvPicPr>
-          <p:nvPr/>
-        </p:nvPicPr>
-        <p:blipFill rotWithShape="1">
-          <a:blip r:embed="rId3" cstate="email">
-            <a:extLst>
-              <a:ext uri="{28A0092B-C50C-407E-A947-70E740481C1C}">
-                <a14:useLocalDpi xmlns:a14="http://schemas.microsoft.com/office/drawing/2010/main"/>
-              </a:ext>
-            </a:extLst>
-          </a:blip>
-          <a:srcRect/>
-          <a:stretch/>
-        </p:blipFill>
-        <p:spPr bwMode="auto">
-          <a:xfrm>
-            <a:off x="6771525" y="201753"/>
-            <a:ext cx="1394364" cy="1174025"/>
-          </a:xfrm>
-          <a:prstGeom prst="rect">
-            <a:avLst/>
-          </a:prstGeom>
-          <a:noFill/>
-          <a:ln>
-            <a:solidFill>
-              <a:srgbClr val="FF0000"/>
-            </a:solidFill>
-          </a:ln>
-          <a:extLst>
-            <a:ext uri="{909E8E84-426E-40DD-AFC4-6F175D3DCCD1}">
-              <a14:hiddenFill xmlns:a14="http://schemas.microsoft.com/office/drawing/2010/main">
-                <a:solidFill>
-                  <a:srgbClr val="FFFFFF"/>
-                </a:solidFill>
-              </a14:hiddenFill>
-            </a:ext>
-          </a:extLst>
-        </p:spPr>
-      </p:pic>
-      <p:pic>
-        <p:nvPicPr>
-          <p:cNvPr id="1032" name="Picture 8" descr="Here's Everything You Need to Know About the 1025R | Lasseter Tractor  Company - Lasseter Equipment Group LLC">
-            <a:extLst>
-              <a:ext uri="{FF2B5EF4-FFF2-40B4-BE49-F238E27FC236}">
-                <a16:creationId xmlns:a16="http://schemas.microsoft.com/office/drawing/2014/main" id="{77A051F0-1F54-EC8D-A775-6AB6A44A4F60}"/>
-              </a:ext>
-            </a:extLst>
-          </p:cNvPr>
-          <p:cNvPicPr>
-            <a:picLocks noChangeAspect="1" noChangeArrowheads="1"/>
-          </p:cNvPicPr>
-          <p:nvPr/>
-        </p:nvPicPr>
-        <p:blipFill>
-          <a:blip r:embed="rId4" cstate="email">
-            <a:extLst>
-              <a:ext uri="{28A0092B-C50C-407E-A947-70E740481C1C}">
-                <a14:useLocalDpi xmlns:a14="http://schemas.microsoft.com/office/drawing/2010/main"/>
-              </a:ext>
-            </a:extLst>
-          </a:blip>
-          <a:srcRect/>
-          <a:stretch>
-            <a:fillRect/>
-          </a:stretch>
-        </p:blipFill>
-        <p:spPr bwMode="auto">
-          <a:xfrm>
-            <a:off x="194310" y="971550"/>
-            <a:ext cx="3141241" cy="2512992"/>
-          </a:xfrm>
-          <a:prstGeom prst="rect">
-            <a:avLst/>
-          </a:prstGeom>
-          <a:noFill/>
-          <a:ln>
-            <a:solidFill>
-              <a:srgbClr val="FF0000"/>
-            </a:solidFill>
-          </a:ln>
-          <a:extLst>
-            <a:ext uri="{909E8E84-426E-40DD-AFC4-6F175D3DCCD1}">
-              <a14:hiddenFill xmlns:a14="http://schemas.microsoft.com/office/drawing/2010/main">
-                <a:solidFill>
-                  <a:srgbClr val="FFFFFF"/>
-                </a:solidFill>
-              </a14:hiddenFill>
-            </a:ext>
-          </a:extLst>
-        </p:spPr>
-      </p:pic>
-      <p:sp>
-        <p:nvSpPr>
-          <p:cNvPr id="6" name="TextBox 5">
-            <a:extLst>
-              <a:ext uri="{FF2B5EF4-FFF2-40B4-BE49-F238E27FC236}">
-                <a16:creationId xmlns:a16="http://schemas.microsoft.com/office/drawing/2014/main" id="{776C1E76-B84C-10BD-8368-BAEB43AEB16F}"/>
+      <p:sp>
+        <p:nvSpPr>
+          <p:cNvPr id="8" name="TextBox 7">
+            <a:extLst>
+              <a:ext uri="{FF2B5EF4-FFF2-40B4-BE49-F238E27FC236}">
+                <a16:creationId xmlns:a16="http://schemas.microsoft.com/office/drawing/2014/main" id="{E72B42A4-6968-FC8E-BCE9-7F3721915796}"/>
               </a:ext>
             </a:extLst>
           </p:cNvPr>
@@ -6184,8 +7199,8 @@
         </p:nvSpPr>
         <p:spPr>
           <a:xfrm>
-            <a:off x="2897504" y="442117"/>
-            <a:ext cx="3785442" cy="923330"/>
+            <a:off x="262129" y="4908477"/>
+            <a:ext cx="3785442" cy="1169551"/>
           </a:xfrm>
           <a:prstGeom prst="rect">
             <a:avLst/>
@@ -6208,17 +7223,19 @@
           </a:bodyPr>
           <a:lstStyle/>
           <a:p>
+            <a:r>
+              <a:rPr lang="en-US" sz="1400" dirty="0"/>
+              <a:t>Both have diesel engine.</a:t>
+            </a:r>
+          </a:p>
+          <a:p>
             <a:pPr marL="285750" indent="-285750">
               <a:buFont typeface="Arial" panose="020B0604020202020204" pitchFamily="34" charset="0"/>
               <a:buChar char="•"/>
             </a:pPr>
             <a:r>
-              <a:rPr lang="en-US" b="1" dirty="0">
-                <a:solidFill>
-                  <a:srgbClr val="FF0000"/>
-                </a:solidFill>
-              </a:rPr>
-              <a:t>$6K</a:t>
+              <a:rPr lang="en-US" sz="1400" dirty="0"/>
+              <a:t>X758 is a garden tractor (mowing, with optional 3-point hitch and PTO)</a:t>
             </a:r>
           </a:p>
           <a:p>
@@ -6227,28 +7244,18 @@
               <a:buChar char="•"/>
             </a:pPr>
             <a:r>
-              <a:rPr lang="en-US" dirty="0"/>
-              <a:t>has its own seat</a:t>
-            </a:r>
-          </a:p>
-          <a:p>
-            <a:pPr marL="285750" indent="-285750">
-              <a:buFont typeface="Arial" panose="020B0604020202020204" pitchFamily="34" charset="0"/>
-              <a:buChar char="•"/>
-            </a:pPr>
-            <a:r>
-              <a:rPr lang="en-US" dirty="0"/>
-              <a:t>regular bucket, trenching bucket</a:t>
-            </a:r>
-          </a:p>
-        </p:txBody>
-      </p:sp>
-      <p:sp>
-        <p:nvSpPr>
-          <p:cNvPr id="7" name="TextBox 6">
-            <a:extLst>
-              <a:ext uri="{FF2B5EF4-FFF2-40B4-BE49-F238E27FC236}">
-                <a16:creationId xmlns:a16="http://schemas.microsoft.com/office/drawing/2014/main" id="{BD458471-78CB-CF4F-AC46-8213A5687A8C}"/>
+              <a:rPr lang="en-US" sz="1400" dirty="0"/>
+              <a:t>1025R is a true sub-compact utility tractor (loader, backhoe, ...), heavier</a:t>
+            </a:r>
+          </a:p>
+        </p:txBody>
+      </p:sp>
+      <p:sp>
+        <p:nvSpPr>
+          <p:cNvPr id="10" name="TextBox 9">
+            <a:extLst>
+              <a:ext uri="{FF2B5EF4-FFF2-40B4-BE49-F238E27FC236}">
+                <a16:creationId xmlns:a16="http://schemas.microsoft.com/office/drawing/2014/main" id="{D19453EA-CBE0-B624-F445-DE81D46BCB3A}"/>
               </a:ext>
             </a:extLst>
           </p:cNvPr>
@@ -6257,96 +7264,7 @@
         </p:nvSpPr>
         <p:spPr>
           <a:xfrm>
-            <a:off x="8254468" y="313789"/>
-            <a:ext cx="1394363" cy="646331"/>
-          </a:xfrm>
-          <a:prstGeom prst="rect">
-            <a:avLst/>
-          </a:prstGeom>
-          <a:noFill/>
-          <a:ln>
-            <a:noFill/>
-          </a:ln>
-        </p:spPr>
-        <p:txBody>
-          <a:bodyPr wrap="square" rtlCol="0">
-            <a:spAutoFit/>
-          </a:bodyPr>
-          <a:lstStyle/>
-          <a:p>
-            <a:pPr algn="ctr"/>
-            <a:r>
-              <a:rPr lang="en-US" dirty="0"/>
-              <a:t>trenching bucket</a:t>
-            </a:r>
-          </a:p>
-        </p:txBody>
-      </p:sp>
-      <p:pic>
-        <p:nvPicPr>
-          <p:cNvPr id="1026" name="Picture 2" descr="Backhoe VS Excavator : u/Friendly-Explosive">
-            <a:extLst>
-              <a:ext uri="{FF2B5EF4-FFF2-40B4-BE49-F238E27FC236}">
-                <a16:creationId xmlns:a16="http://schemas.microsoft.com/office/drawing/2014/main" id="{59CC2E99-AD62-6227-8CBE-9DCBABB5DCD7}"/>
-              </a:ext>
-            </a:extLst>
-          </p:cNvPr>
-          <p:cNvPicPr>
-            <a:picLocks noChangeAspect="1" noChangeArrowheads="1"/>
-          </p:cNvPicPr>
-          <p:nvPr/>
-        </p:nvPicPr>
-        <p:blipFill rotWithShape="1">
-          <a:blip r:embed="rId5" cstate="email">
-            <a:extLst>
-              <a:ext uri="{28A0092B-C50C-407E-A947-70E740481C1C}">
-                <a14:useLocalDpi xmlns:a14="http://schemas.microsoft.com/office/drawing/2010/main"/>
-              </a:ext>
-            </a:extLst>
-          </a:blip>
-          <a:srcRect/>
-          <a:stretch/>
-        </p:blipFill>
-        <p:spPr bwMode="auto">
-          <a:xfrm>
-            <a:off x="9862454" y="4179062"/>
-            <a:ext cx="2242459" cy="2603500"/>
-          </a:xfrm>
-          <a:prstGeom prst="rect">
-            <a:avLst/>
-          </a:prstGeom>
-          <a:noFill/>
-          <a:ln>
-            <a:solidFill>
-              <a:srgbClr val="FF0000"/>
-            </a:solidFill>
-          </a:ln>
-          <a:extLst>
-            <a:ext uri="{909E8E84-426E-40DD-AFC4-6F175D3DCCD1}">
-              <a14:hiddenFill xmlns:a14="http://schemas.microsoft.com/office/drawing/2010/main">
-                <a:solidFill>
-                  <a:srgbClr val="FFFFFF"/>
-                </a:solidFill>
-              </a14:hiddenFill>
-            </a:ext>
-          </a:extLst>
-        </p:spPr>
-      </p:pic>
-      <p:sp>
-        <p:nvSpPr>
-          <p:cNvPr id="5" name="TextBox 4">
-            <a:extLst>
-              <a:ext uri="{FF2B5EF4-FFF2-40B4-BE49-F238E27FC236}">
-                <a16:creationId xmlns:a16="http://schemas.microsoft.com/office/drawing/2014/main" id="{0E0429E4-AF4E-72D3-2146-DBFDE94382D0}"/>
-              </a:ext>
-            </a:extLst>
-          </p:cNvPr>
-          <p:cNvSpPr txBox="1"/>
-          <p:nvPr/>
-        </p:nvSpPr>
-        <p:spPr>
-          <a:xfrm>
-            <a:off x="6018778" y="5897880"/>
+            <a:off x="262129" y="775454"/>
             <a:ext cx="3785442" cy="646331"/>
           </a:xfrm>
           <a:prstGeom prst="rect">
@@ -6372,17 +7290,143 @@
           <a:p>
             <a:r>
               <a:rPr lang="en-US" dirty="0"/>
-              <a:t>Tracked Excavator - heavier duty, can dig more, father and deeper</a:t>
-            </a:r>
-          </a:p>
-        </p:txBody>
-      </p:sp>
-      <p:sp>
-        <p:nvSpPr>
-          <p:cNvPr id="8" name="TextBox 7">
-            <a:extLst>
-              <a:ext uri="{FF2B5EF4-FFF2-40B4-BE49-F238E27FC236}">
-                <a16:creationId xmlns:a16="http://schemas.microsoft.com/office/drawing/2014/main" id="{2EF4C58F-A0F2-6DE0-54B2-1F5894122D66}"/>
+              <a:t> </a:t>
+            </a:r>
+            <a:r>
+              <a:rPr lang="en-US" b="1" dirty="0"/>
+              <a:t>1025R                vs                 X758</a:t>
+            </a:r>
+          </a:p>
+          <a:p>
+            <a:r>
+              <a:rPr lang="en-US" dirty="0">
+                <a:solidFill>
+                  <a:srgbClr val="00B0F0"/>
+                </a:solidFill>
+              </a:rPr>
+              <a:t>1,444 </a:t>
+            </a:r>
+            <a:r>
+              <a:rPr lang="en-US" dirty="0" err="1">
+                <a:solidFill>
+                  <a:srgbClr val="00B0F0"/>
+                </a:solidFill>
+              </a:rPr>
+              <a:t>lbs</a:t>
+            </a:r>
+            <a:r>
+              <a:rPr lang="en-US" dirty="0">
+                <a:solidFill>
+                  <a:srgbClr val="00B0F0"/>
+                </a:solidFill>
+              </a:rPr>
+              <a:t>                              1,038 </a:t>
+            </a:r>
+            <a:r>
+              <a:rPr lang="en-US" dirty="0" err="1">
+                <a:solidFill>
+                  <a:srgbClr val="00B0F0"/>
+                </a:solidFill>
+              </a:rPr>
+              <a:t>lbs</a:t>
+            </a:r>
+            <a:endParaRPr lang="en-US" dirty="0">
+              <a:solidFill>
+                <a:srgbClr val="00B0F0"/>
+              </a:solidFill>
+            </a:endParaRPr>
+          </a:p>
+        </p:txBody>
+      </p:sp>
+      <p:pic>
+        <p:nvPicPr>
+          <p:cNvPr id="12" name="Picture 11">
+            <a:extLst>
+              <a:ext uri="{FF2B5EF4-FFF2-40B4-BE49-F238E27FC236}">
+                <a16:creationId xmlns:a16="http://schemas.microsoft.com/office/drawing/2014/main" id="{C37D4C28-4ABB-E206-0F08-00C67784AA68}"/>
+              </a:ext>
+            </a:extLst>
+          </p:cNvPr>
+          <p:cNvPicPr>
+            <a:picLocks noChangeAspect="1"/>
+          </p:cNvPicPr>
+          <p:nvPr/>
+        </p:nvPicPr>
+        <p:blipFill>
+          <a:blip r:embed="rId2" cstate="email">
+            <a:extLst>
+              <a:ext uri="{28A0092B-C50C-407E-A947-70E740481C1C}">
+                <a14:useLocalDpi xmlns:a14="http://schemas.microsoft.com/office/drawing/2010/main"/>
+              </a:ext>
+            </a:extLst>
+          </a:blip>
+          <a:stretch>
+            <a:fillRect/>
+          </a:stretch>
+        </p:blipFill>
+        <p:spPr>
+          <a:xfrm>
+            <a:off x="4301890" y="230832"/>
+            <a:ext cx="1530350" cy="1200150"/>
+          </a:xfrm>
+          <a:prstGeom prst="rect">
+            <a:avLst/>
+          </a:prstGeom>
+        </p:spPr>
+      </p:pic>
+      <p:pic>
+        <p:nvPicPr>
+          <p:cNvPr id="1028" name="Picture 4" descr="x758 vs 1025r: new owner impressions | My Tractor Forum">
+            <a:extLst>
+              <a:ext uri="{FF2B5EF4-FFF2-40B4-BE49-F238E27FC236}">
+                <a16:creationId xmlns:a16="http://schemas.microsoft.com/office/drawing/2014/main" id="{0BC28BF1-A389-2F70-EEC5-1F47CC3B7076}"/>
+              </a:ext>
+            </a:extLst>
+          </p:cNvPr>
+          <p:cNvPicPr>
+            <a:picLocks noChangeAspect="1" noChangeArrowheads="1"/>
+          </p:cNvPicPr>
+          <p:nvPr/>
+        </p:nvPicPr>
+        <p:blipFill>
+          <a:blip r:embed="rId3" cstate="email">
+            <a:extLst>
+              <a:ext uri="{28A0092B-C50C-407E-A947-70E740481C1C}">
+                <a14:useLocalDpi xmlns:a14="http://schemas.microsoft.com/office/drawing/2010/main"/>
+              </a:ext>
+            </a:extLst>
+          </a:blip>
+          <a:srcRect/>
+          <a:stretch>
+            <a:fillRect/>
+          </a:stretch>
+        </p:blipFill>
+        <p:spPr bwMode="auto">
+          <a:xfrm>
+            <a:off x="262128" y="1908858"/>
+            <a:ext cx="3785443" cy="2839082"/>
+          </a:xfrm>
+          <a:prstGeom prst="rect">
+            <a:avLst/>
+          </a:prstGeom>
+          <a:noFill/>
+          <a:extLst>
+            <a:ext uri="{909E8E84-426E-40DD-AFC4-6F175D3DCCD1}">
+              <a14:hiddenFill xmlns:a14="http://schemas.microsoft.com/office/drawing/2010/main">
+                <a:solidFill>
+                  <a:srgbClr val="FFFFFF"/>
+                </a:solidFill>
+              </a14:hiddenFill>
+            </a:ext>
+          </a:extLst>
+        </p:spPr>
+      </p:pic>
+      <p:sp>
+        <p:nvSpPr>
+          <p:cNvPr id="3" name="TextBox 2">
+            <a:extLst>
+              <a:ext uri="{FF2B5EF4-FFF2-40B4-BE49-F238E27FC236}">
+                <a16:creationId xmlns:a16="http://schemas.microsoft.com/office/drawing/2014/main" id="{BFA7BD63-2067-9CF7-7AC2-AB120CE27350}"/>
               </a:ext>
             </a:extLst>
           </p:cNvPr>
@@ -6391,8 +7435,8 @@
         </p:nvSpPr>
         <p:spPr>
           <a:xfrm>
-            <a:off x="6018778" y="4778455"/>
-            <a:ext cx="3785442" cy="646331"/>
+            <a:off x="6086560" y="139392"/>
+            <a:ext cx="5980472" cy="2046714"/>
           </a:xfrm>
           <a:prstGeom prst="rect">
             <a:avLst/>
@@ -6417,69 +7461,96 @@
           <a:p>
             <a:r>
               <a:rPr lang="en-US" dirty="0"/>
-              <a:t>Wheeled Backhoe – smaller, lighter, more agile</a:t>
-            </a:r>
-          </a:p>
-        </p:txBody>
-      </p:sp>
-      <p:pic>
-        <p:nvPicPr>
-          <p:cNvPr id="9" name="Picture 2" descr="1025R vs 2025R spec comparison graphic | Green Tractor Talk">
-            <a:extLst>
-              <a:ext uri="{FF2B5EF4-FFF2-40B4-BE49-F238E27FC236}">
-                <a16:creationId xmlns:a16="http://schemas.microsoft.com/office/drawing/2014/main" id="{6EE92ACC-3C05-CEFE-7668-731BEC0696F5}"/>
-              </a:ext>
-            </a:extLst>
-          </p:cNvPr>
-          <p:cNvPicPr>
-            <a:picLocks noChangeAspect="1" noChangeArrowheads="1"/>
-          </p:cNvPicPr>
-          <p:nvPr/>
-        </p:nvPicPr>
-        <p:blipFill>
-          <a:blip r:embed="rId6" cstate="email">
-            <a:extLst>
-              <a:ext uri="{28A0092B-C50C-407E-A947-70E740481C1C}">
-                <a14:useLocalDpi xmlns:a14="http://schemas.microsoft.com/office/drawing/2010/main"/>
-              </a:ext>
-            </a:extLst>
-          </a:blip>
-          <a:srcRect/>
-          <a:stretch>
-            <a:fillRect/>
-          </a:stretch>
-        </p:blipFill>
-        <p:spPr bwMode="auto">
-          <a:xfrm>
-            <a:off x="4499776" y="2033512"/>
-            <a:ext cx="4693634" cy="2603500"/>
-          </a:xfrm>
-          <a:prstGeom prst="rect">
-            <a:avLst/>
-          </a:prstGeom>
-          <a:noFill/>
-          <a:ln>
-            <a:solidFill>
-              <a:srgbClr val="FF0000"/>
-            </a:solidFill>
-          </a:ln>
-          <a:extLst>
-            <a:ext uri="{909E8E84-426E-40DD-AFC4-6F175D3DCCD1}">
-              <a14:hiddenFill xmlns:a14="http://schemas.microsoft.com/office/drawing/2010/main">
-                <a:solidFill>
-                  <a:srgbClr val="FFFFFF"/>
-                </a:solidFill>
-              </a14:hiddenFill>
-            </a:ext>
-          </a:extLst>
-        </p:spPr>
-      </p:pic>
-      <p:sp>
-        <p:nvSpPr>
-          <p:cNvPr id="10" name="TextBox 9">
-            <a:extLst>
-              <a:ext uri="{FF2B5EF4-FFF2-40B4-BE49-F238E27FC236}">
-                <a16:creationId xmlns:a16="http://schemas.microsoft.com/office/drawing/2014/main" id="{F16BDBF8-78D7-2C01-01B7-8F1BC417A9C6}"/>
+              <a:t>X700 series 4WD models:  X738, X739, X758</a:t>
+            </a:r>
+          </a:p>
+          <a:p>
+            <a:r>
+              <a:rPr lang="en-US" sz="1100" dirty="0">
+                <a:hlinkClick r:id="rId4"/>
+              </a:rPr>
+              <a:t>https://www.deere.com/en/mowers/lawn-tractors/x700-series/ </a:t>
+            </a:r>
+            <a:endParaRPr lang="en-US" dirty="0"/>
+          </a:p>
+          <a:p>
+            <a:pPr marL="285750" indent="-285750">
+              <a:buFont typeface="Arial" panose="020B0604020202020204" pitchFamily="34" charset="0"/>
+              <a:buChar char="•"/>
+            </a:pPr>
+            <a:r>
+              <a:rPr lang="en-US" sz="1400" dirty="0"/>
+              <a:t>All accept mowing decks 48, 54, 60 inches</a:t>
+            </a:r>
+          </a:p>
+          <a:p>
+            <a:pPr marL="285750" indent="-285750">
+              <a:buFont typeface="Arial" panose="020B0604020202020204" pitchFamily="34" charset="0"/>
+              <a:buChar char="•"/>
+            </a:pPr>
+            <a:r>
+              <a:rPr lang="en-US" sz="1400" dirty="0"/>
+              <a:t>All have power lift - two-function hydraulic lift system to raise and lower attachments (mower decks, front blades, snow blowers, or rotary brooms)</a:t>
+            </a:r>
+          </a:p>
+          <a:p>
+            <a:pPr marL="285750" indent="-285750">
+              <a:buFont typeface="Arial" panose="020B0604020202020204" pitchFamily="34" charset="0"/>
+              <a:buChar char="•"/>
+            </a:pPr>
+            <a:r>
+              <a:rPr lang="en-US" sz="1400" dirty="0"/>
+              <a:t>Prices: $17..$19K</a:t>
+            </a:r>
+          </a:p>
+          <a:p>
+            <a:pPr marL="285750" indent="-285750">
+              <a:buFont typeface="Arial" panose="020B0604020202020204" pitchFamily="34" charset="0"/>
+              <a:buChar char="•"/>
+            </a:pPr>
+            <a:r>
+              <a:rPr lang="en-US" sz="1400" dirty="0"/>
+              <a:t>X738 4wd, gas, fuel injection, V-twin, power lift, 947 </a:t>
+            </a:r>
+            <a:r>
+              <a:rPr lang="en-US" sz="1400" dirty="0" err="1"/>
+              <a:t>lbs</a:t>
+            </a:r>
+            <a:endParaRPr lang="en-US" sz="1400" dirty="0"/>
+          </a:p>
+          <a:p>
+            <a:pPr marL="285750" indent="-285750">
+              <a:buFont typeface="Arial" panose="020B0604020202020204" pitchFamily="34" charset="0"/>
+              <a:buChar char="•"/>
+            </a:pPr>
+            <a:r>
+              <a:rPr lang="en-US" sz="1400" dirty="0"/>
+              <a:t>X739 4wd, gas, fuel injection, V-twin, power lift, 4-wheel steer</a:t>
+            </a:r>
+          </a:p>
+          <a:p>
+            <a:pPr marL="285750" indent="-285750">
+              <a:buFont typeface="Arial" panose="020B0604020202020204" pitchFamily="34" charset="0"/>
+              <a:buChar char="•"/>
+            </a:pPr>
+            <a:r>
+              <a:rPr lang="en-US" sz="1400" dirty="0"/>
+              <a:t>X758 4wd, diesel, power lift , 1,038 </a:t>
+            </a:r>
+            <a:r>
+              <a:rPr lang="en-US" sz="1400" dirty="0" err="1"/>
+              <a:t>lbs</a:t>
+            </a:r>
+            <a:endParaRPr lang="en-US" sz="1400" dirty="0"/>
+          </a:p>
+        </p:txBody>
+      </p:sp>
+      <p:sp>
+        <p:nvSpPr>
+          <p:cNvPr id="5" name="TextBox 4">
+            <a:extLst>
+              <a:ext uri="{FF2B5EF4-FFF2-40B4-BE49-F238E27FC236}">
+                <a16:creationId xmlns:a16="http://schemas.microsoft.com/office/drawing/2014/main" id="{5954BFCB-5BCC-4A0D-C06E-9E5C16879F02}"/>
               </a:ext>
             </a:extLst>
           </p:cNvPr>
@@ -6488,8 +7559,8 @@
         </p:nvSpPr>
         <p:spPr>
           <a:xfrm>
-            <a:off x="4953872" y="1639625"/>
-            <a:ext cx="3785442" cy="369332"/>
+            <a:off x="6086560" y="2323154"/>
+            <a:ext cx="4093760" cy="2800767"/>
           </a:xfrm>
           <a:prstGeom prst="rect">
             <a:avLst/>
@@ -6513,57 +7584,376 @@
           <a:lstStyle/>
           <a:p>
             <a:r>
-              <a:rPr lang="en-US" dirty="0"/>
-              <a:t> 1025R                    vs                     2025R</a:t>
-            </a:r>
-          </a:p>
-        </p:txBody>
-      </p:sp>
-      <p:sp>
-        <p:nvSpPr>
-          <p:cNvPr id="11" name="TextBox 10">
-            <a:extLst>
-              <a:ext uri="{FF2B5EF4-FFF2-40B4-BE49-F238E27FC236}">
-                <a16:creationId xmlns:a16="http://schemas.microsoft.com/office/drawing/2014/main" id="{75618DCE-DC57-E6AF-91F2-A8276D2F428D}"/>
-              </a:ext>
-            </a:extLst>
-          </p:cNvPr>
-          <p:cNvSpPr txBox="1"/>
-          <p:nvPr/>
-        </p:nvSpPr>
-        <p:spPr>
-          <a:xfrm>
-            <a:off x="454375" y="5886450"/>
-            <a:ext cx="2621109" cy="307777"/>
-          </a:xfrm>
-          <a:prstGeom prst="rect">
-            <a:avLst/>
-          </a:prstGeom>
-          <a:noFill/>
-        </p:spPr>
-        <p:txBody>
-          <a:bodyPr wrap="square" rtlCol="0">
-            <a:spAutoFit/>
-          </a:bodyPr>
-          <a:lstStyle/>
-          <a:p>
-            <a:r>
-              <a:rPr lang="en-US" sz="1400" b="1" dirty="0"/>
-              <a:t>Backhoe 260b – use with 1025R</a:t>
-            </a:r>
-            <a:endParaRPr lang="en-US" sz="1400" b="1" i="0" dirty="0">
+              <a:rPr lang="en-US" sz="1100" dirty="0">
+                <a:latin typeface="Menlo" panose="020B0609030804020204" pitchFamily="49" charset="0"/>
+                <a:ea typeface="Menlo" panose="020B0609030804020204" pitchFamily="49" charset="0"/>
+                <a:cs typeface="Menlo" panose="020B0609030804020204" pitchFamily="49" charset="0"/>
+              </a:rPr>
+              <a:t>JD-425 2wd gas carburetor</a:t>
+            </a:r>
+          </a:p>
+          <a:p>
+            <a:r>
+              <a:rPr lang="en-US" sz="1100" dirty="0">
+                <a:latin typeface="Menlo" panose="020B0609030804020204" pitchFamily="49" charset="0"/>
+                <a:ea typeface="Menlo" panose="020B0609030804020204" pitchFamily="49" charset="0"/>
+                <a:cs typeface="Menlo" panose="020B0609030804020204" pitchFamily="49" charset="0"/>
+              </a:rPr>
+              <a:t>JD-445 2wd gas fuel injection</a:t>
+            </a:r>
+          </a:p>
+          <a:p>
+            <a:r>
+              <a:rPr lang="en-US" sz="1100" b="1" dirty="0">
+                <a:solidFill>
+                  <a:srgbClr val="FF0000"/>
+                </a:solidFill>
+                <a:latin typeface="Menlo" panose="020B0609030804020204" pitchFamily="49" charset="0"/>
+                <a:ea typeface="Menlo" panose="020B0609030804020204" pitchFamily="49" charset="0"/>
+                <a:cs typeface="Menlo" panose="020B0609030804020204" pitchFamily="49" charset="0"/>
+              </a:rPr>
+              <a:t>JD-455 2wd diesel</a:t>
+            </a:r>
+            <a:r>
+              <a:rPr lang="en-US" sz="1100" dirty="0">
+                <a:latin typeface="Menlo" panose="020B0609030804020204" pitchFamily="49" charset="0"/>
+                <a:ea typeface="Menlo" panose="020B0609030804020204" pitchFamily="49" charset="0"/>
+                <a:cs typeface="Menlo" panose="020B0609030804020204" pitchFamily="49" charset="0"/>
+              </a:rPr>
+              <a:t> - </a:t>
+            </a:r>
+            <a:r>
+              <a:rPr lang="en-US" sz="1100" dirty="0">
+                <a:latin typeface="Menlo" panose="020B0609030804020204" pitchFamily="49" charset="0"/>
+                <a:ea typeface="Menlo" panose="020B0609030804020204" pitchFamily="49" charset="0"/>
+                <a:cs typeface="Menlo" panose="020B0609030804020204" pitchFamily="49" charset="0"/>
+                <a:hlinkClick r:id="rId5"/>
+              </a:rPr>
+              <a:t>link</a:t>
+            </a:r>
+            <a:endParaRPr lang="en-US" sz="1100" b="1" dirty="0">
               <a:solidFill>
-                <a:srgbClr val="333333"/>
+                <a:srgbClr val="FF0000"/>
               </a:solidFill>
-              <a:effectLst/>
+              <a:latin typeface="Menlo" panose="020B0609030804020204" pitchFamily="49" charset="0"/>
+              <a:ea typeface="Menlo" panose="020B0609030804020204" pitchFamily="49" charset="0"/>
+              <a:cs typeface="Menlo" panose="020B0609030804020204" pitchFamily="49" charset="0"/>
             </a:endParaRPr>
+          </a:p>
+          <a:p>
+            <a:r>
+              <a:rPr lang="en-US" sz="1100" dirty="0">
+                <a:latin typeface="Menlo" panose="020B0609030804020204" pitchFamily="49" charset="0"/>
+                <a:ea typeface="Menlo" panose="020B0609030804020204" pitchFamily="49" charset="0"/>
+                <a:cs typeface="Menlo" panose="020B0609030804020204" pitchFamily="49" charset="0"/>
+              </a:rPr>
+              <a:t>---------</a:t>
+            </a:r>
+          </a:p>
+          <a:p>
+            <a:r>
+              <a:rPr lang="en-US" sz="1100" dirty="0">
+                <a:latin typeface="Menlo" panose="020B0609030804020204" pitchFamily="49" charset="0"/>
+                <a:ea typeface="Menlo" panose="020B0609030804020204" pitchFamily="49" charset="0"/>
+                <a:cs typeface="Menlo" panose="020B0609030804020204" pitchFamily="49" charset="0"/>
+              </a:rPr>
+              <a:t>X485 4wd gas fuel injection</a:t>
+            </a:r>
+          </a:p>
+          <a:p>
+            <a:r>
+              <a:rPr lang="en-US" sz="1100" b="1" dirty="0">
+                <a:solidFill>
+                  <a:srgbClr val="FF0000"/>
+                </a:solidFill>
+                <a:latin typeface="Menlo" panose="020B0609030804020204" pitchFamily="49" charset="0"/>
+                <a:ea typeface="Menlo" panose="020B0609030804020204" pitchFamily="49" charset="0"/>
+                <a:cs typeface="Menlo" panose="020B0609030804020204" pitchFamily="49" charset="0"/>
+              </a:rPr>
+              <a:t>X495 2wd diesel  (2002-2005)</a:t>
+            </a:r>
+            <a:r>
+              <a:rPr lang="en-US" sz="1100" dirty="0">
+                <a:latin typeface="Menlo" panose="020B0609030804020204" pitchFamily="49" charset="0"/>
+                <a:ea typeface="Menlo" panose="020B0609030804020204" pitchFamily="49" charset="0"/>
+                <a:cs typeface="Menlo" panose="020B0609030804020204" pitchFamily="49" charset="0"/>
+              </a:rPr>
+              <a:t> - </a:t>
+            </a:r>
+            <a:r>
+              <a:rPr lang="en-US" sz="1100" dirty="0">
+                <a:latin typeface="Menlo" panose="020B0609030804020204" pitchFamily="49" charset="0"/>
+                <a:ea typeface="Menlo" panose="020B0609030804020204" pitchFamily="49" charset="0"/>
+                <a:cs typeface="Menlo" panose="020B0609030804020204" pitchFamily="49" charset="0"/>
+                <a:hlinkClick r:id="rId6"/>
+              </a:rPr>
+              <a:t>link</a:t>
+            </a:r>
+            <a:r>
+              <a:rPr lang="en-US" sz="1100" dirty="0">
+                <a:latin typeface="Menlo" panose="020B0609030804020204" pitchFamily="49" charset="0"/>
+                <a:ea typeface="Menlo" panose="020B0609030804020204" pitchFamily="49" charset="0"/>
+                <a:cs typeface="Menlo" panose="020B0609030804020204" pitchFamily="49" charset="0"/>
+              </a:rPr>
+              <a:t> </a:t>
+            </a:r>
+          </a:p>
+          <a:p>
+            <a:r>
+              <a:rPr lang="en-US" sz="1100" dirty="0">
+                <a:latin typeface="Menlo" panose="020B0609030804020204" pitchFamily="49" charset="0"/>
+                <a:ea typeface="Menlo" panose="020B0609030804020204" pitchFamily="49" charset="0"/>
+                <a:cs typeface="Menlo" panose="020B0609030804020204" pitchFamily="49" charset="0"/>
+              </a:rPr>
+              <a:t>---------</a:t>
+            </a:r>
+          </a:p>
+          <a:p>
+            <a:r>
+              <a:rPr lang="en-US" sz="1100" dirty="0">
+                <a:latin typeface="Menlo" panose="020B0609030804020204" pitchFamily="49" charset="0"/>
+                <a:ea typeface="Menlo" panose="020B0609030804020204" pitchFamily="49" charset="0"/>
+                <a:cs typeface="Menlo" panose="020B0609030804020204" pitchFamily="49" charset="0"/>
+              </a:rPr>
+              <a:t>X590 2wd gas fuel injection</a:t>
+            </a:r>
+          </a:p>
+          <a:p>
+            <a:r>
+              <a:rPr lang="en-US" sz="1100" b="1" dirty="0">
+                <a:solidFill>
+                  <a:srgbClr val="FF0000"/>
+                </a:solidFill>
+                <a:highlight>
+                  <a:srgbClr val="FFFF00"/>
+                </a:highlight>
+                <a:latin typeface="Menlo" panose="020B0609030804020204" pitchFamily="49" charset="0"/>
+                <a:ea typeface="Menlo" panose="020B0609030804020204" pitchFamily="49" charset="0"/>
+                <a:cs typeface="Menlo" panose="020B0609030804020204" pitchFamily="49" charset="0"/>
+              </a:rPr>
+              <a:t>X595 4wd diesel (2002-2005) </a:t>
+            </a:r>
+            <a:r>
+              <a:rPr lang="en-US" sz="1100" dirty="0">
+                <a:highlight>
+                  <a:srgbClr val="FFFF00"/>
+                </a:highlight>
+                <a:latin typeface="Menlo" panose="020B0609030804020204" pitchFamily="49" charset="0"/>
+                <a:ea typeface="Menlo" panose="020B0609030804020204" pitchFamily="49" charset="0"/>
+                <a:cs typeface="Menlo" panose="020B0609030804020204" pitchFamily="49" charset="0"/>
+              </a:rPr>
+              <a:t> - </a:t>
+            </a:r>
+            <a:r>
+              <a:rPr lang="en-US" sz="1100" dirty="0">
+                <a:highlight>
+                  <a:srgbClr val="FFFF00"/>
+                </a:highlight>
+                <a:latin typeface="Menlo" panose="020B0609030804020204" pitchFamily="49" charset="0"/>
+                <a:ea typeface="Menlo" panose="020B0609030804020204" pitchFamily="49" charset="0"/>
+                <a:cs typeface="Menlo" panose="020B0609030804020204" pitchFamily="49" charset="0"/>
+                <a:hlinkClick r:id="rId7"/>
+              </a:rPr>
+              <a:t>link</a:t>
+            </a:r>
+            <a:endParaRPr lang="en-US" sz="1100" b="1" dirty="0">
+              <a:solidFill>
+                <a:srgbClr val="FF0000"/>
+              </a:solidFill>
+              <a:highlight>
+                <a:srgbClr val="FFFF00"/>
+              </a:highlight>
+              <a:latin typeface="Menlo" panose="020B0609030804020204" pitchFamily="49" charset="0"/>
+              <a:ea typeface="Menlo" panose="020B0609030804020204" pitchFamily="49" charset="0"/>
+              <a:cs typeface="Menlo" panose="020B0609030804020204" pitchFamily="49" charset="0"/>
+            </a:endParaRPr>
+          </a:p>
+          <a:p>
+            <a:r>
+              <a:rPr lang="en-US" sz="1100" dirty="0">
+                <a:latin typeface="Menlo" panose="020B0609030804020204" pitchFamily="49" charset="0"/>
+                <a:ea typeface="Menlo" panose="020B0609030804020204" pitchFamily="49" charset="0"/>
+                <a:cs typeface="Menlo" panose="020B0609030804020204" pitchFamily="49" charset="0"/>
+              </a:rPr>
+              <a:t>---------</a:t>
+            </a:r>
+          </a:p>
+          <a:p>
+            <a:r>
+              <a:rPr lang="en-US" sz="1100" dirty="0">
+                <a:latin typeface="Menlo" panose="020B0609030804020204" pitchFamily="49" charset="0"/>
+                <a:ea typeface="Menlo" panose="020B0609030804020204" pitchFamily="49" charset="0"/>
+                <a:cs typeface="Menlo" panose="020B0609030804020204" pitchFamily="49" charset="0"/>
+              </a:rPr>
+              <a:t>X738, X739 4wd gas fuel injection</a:t>
+            </a:r>
+          </a:p>
+          <a:p>
+            <a:r>
+              <a:rPr lang="en-US" sz="1100" b="1" dirty="0">
+                <a:solidFill>
+                  <a:srgbClr val="FF0000"/>
+                </a:solidFill>
+                <a:latin typeface="Menlo" panose="020B0609030804020204" pitchFamily="49" charset="0"/>
+                <a:ea typeface="Menlo" panose="020B0609030804020204" pitchFamily="49" charset="0"/>
+                <a:cs typeface="Menlo" panose="020B0609030804020204" pitchFamily="49" charset="0"/>
+              </a:rPr>
+              <a:t>X740, X744 </a:t>
+            </a:r>
+            <a:r>
+              <a:rPr lang="en-US" sz="1100" dirty="0">
+                <a:latin typeface="Menlo" panose="020B0609030804020204" pitchFamily="49" charset="0"/>
+                <a:ea typeface="Menlo" panose="020B0609030804020204" pitchFamily="49" charset="0"/>
+                <a:cs typeface="Menlo" panose="020B0609030804020204" pitchFamily="49" charset="0"/>
+              </a:rPr>
+              <a:t>2wd diesel (2006-12)</a:t>
+            </a:r>
+          </a:p>
+          <a:p>
+            <a:r>
+              <a:rPr lang="en-US" sz="1100" b="1" dirty="0">
+                <a:solidFill>
+                  <a:srgbClr val="FF0000"/>
+                </a:solidFill>
+                <a:highlight>
+                  <a:srgbClr val="FFFF00"/>
+                </a:highlight>
+                <a:latin typeface="Menlo" panose="020B0609030804020204" pitchFamily="49" charset="0"/>
+                <a:ea typeface="Menlo" panose="020B0609030804020204" pitchFamily="49" charset="0"/>
+                <a:cs typeface="Menlo" panose="020B0609030804020204" pitchFamily="49" charset="0"/>
+              </a:rPr>
+              <a:t>X748, X749</a:t>
+            </a:r>
+            <a:r>
+              <a:rPr lang="en-US" sz="1100" dirty="0">
+                <a:highlight>
+                  <a:srgbClr val="FFFF00"/>
+                </a:highlight>
+                <a:latin typeface="Menlo" panose="020B0609030804020204" pitchFamily="49" charset="0"/>
+                <a:ea typeface="Menlo" panose="020B0609030804020204" pitchFamily="49" charset="0"/>
+                <a:cs typeface="Menlo" panose="020B0609030804020204" pitchFamily="49" charset="0"/>
+              </a:rPr>
+              <a:t> 4wd diesel (2006-12) - </a:t>
+            </a:r>
+            <a:r>
+              <a:rPr lang="en-US" sz="1100" dirty="0">
+                <a:highlight>
+                  <a:srgbClr val="FFFF00"/>
+                </a:highlight>
+                <a:latin typeface="Menlo" panose="020B0609030804020204" pitchFamily="49" charset="0"/>
+                <a:ea typeface="Menlo" panose="020B0609030804020204" pitchFamily="49" charset="0"/>
+                <a:cs typeface="Menlo" panose="020B0609030804020204" pitchFamily="49" charset="0"/>
+                <a:hlinkClick r:id="rId8"/>
+              </a:rPr>
+              <a:t>link</a:t>
+            </a:r>
+            <a:endParaRPr lang="en-US" sz="1100" dirty="0">
+              <a:highlight>
+                <a:srgbClr val="FFFF00"/>
+              </a:highlight>
+              <a:latin typeface="Menlo" panose="020B0609030804020204" pitchFamily="49" charset="0"/>
+              <a:ea typeface="Menlo" panose="020B0609030804020204" pitchFamily="49" charset="0"/>
+              <a:cs typeface="Menlo" panose="020B0609030804020204" pitchFamily="49" charset="0"/>
+            </a:endParaRPr>
+          </a:p>
+          <a:p>
+            <a:r>
+              <a:rPr lang="en-US" sz="1100" b="1" dirty="0">
+                <a:solidFill>
+                  <a:srgbClr val="FF0000"/>
+                </a:solidFill>
+                <a:latin typeface="Menlo" panose="020B0609030804020204" pitchFamily="49" charset="0"/>
+                <a:ea typeface="Menlo" panose="020B0609030804020204" pitchFamily="49" charset="0"/>
+                <a:cs typeface="Menlo" panose="020B0609030804020204" pitchFamily="49" charset="0"/>
+              </a:rPr>
+              <a:t>X750, X754</a:t>
+            </a:r>
+            <a:r>
+              <a:rPr lang="en-US" sz="1100" dirty="0">
+                <a:latin typeface="Menlo" panose="020B0609030804020204" pitchFamily="49" charset="0"/>
+                <a:ea typeface="Menlo" panose="020B0609030804020204" pitchFamily="49" charset="0"/>
+                <a:cs typeface="Menlo" panose="020B0609030804020204" pitchFamily="49" charset="0"/>
+              </a:rPr>
+              <a:t> 2wd diesel (2013-present) - </a:t>
+            </a:r>
+            <a:r>
+              <a:rPr lang="en-US" sz="1100" dirty="0">
+                <a:latin typeface="Menlo" panose="020B0609030804020204" pitchFamily="49" charset="0"/>
+                <a:ea typeface="Menlo" panose="020B0609030804020204" pitchFamily="49" charset="0"/>
+                <a:cs typeface="Menlo" panose="020B0609030804020204" pitchFamily="49" charset="0"/>
+                <a:hlinkClick r:id="rId9"/>
+              </a:rPr>
+              <a:t>link</a:t>
+            </a:r>
+            <a:endParaRPr lang="en-US" sz="1100" dirty="0">
+              <a:latin typeface="Menlo" panose="020B0609030804020204" pitchFamily="49" charset="0"/>
+              <a:ea typeface="Menlo" panose="020B0609030804020204" pitchFamily="49" charset="0"/>
+              <a:cs typeface="Menlo" panose="020B0609030804020204" pitchFamily="49" charset="0"/>
+            </a:endParaRPr>
+          </a:p>
+          <a:p>
+            <a:r>
+              <a:rPr lang="en-US" sz="1100" b="1" dirty="0">
+                <a:solidFill>
+                  <a:srgbClr val="FF0000"/>
+                </a:solidFill>
+                <a:highlight>
+                  <a:srgbClr val="FFFF00"/>
+                </a:highlight>
+                <a:latin typeface="Menlo" panose="020B0609030804020204" pitchFamily="49" charset="0"/>
+                <a:ea typeface="Menlo" panose="020B0609030804020204" pitchFamily="49" charset="0"/>
+                <a:cs typeface="Menlo" panose="020B0609030804020204" pitchFamily="49" charset="0"/>
+              </a:rPr>
+              <a:t>X758</a:t>
+            </a:r>
+            <a:r>
+              <a:rPr lang="en-US" sz="1100" dirty="0">
+                <a:highlight>
+                  <a:srgbClr val="FFFF00"/>
+                </a:highlight>
+                <a:latin typeface="Menlo" panose="020B0609030804020204" pitchFamily="49" charset="0"/>
+                <a:ea typeface="Menlo" panose="020B0609030804020204" pitchFamily="49" charset="0"/>
+                <a:cs typeface="Menlo" panose="020B0609030804020204" pitchFamily="49" charset="0"/>
+              </a:rPr>
+              <a:t>       4wd diesel (2013-present) - </a:t>
+            </a:r>
+            <a:r>
+              <a:rPr lang="en-US" sz="1100" dirty="0">
+                <a:highlight>
+                  <a:srgbClr val="FFFF00"/>
+                </a:highlight>
+                <a:latin typeface="Menlo" panose="020B0609030804020204" pitchFamily="49" charset="0"/>
+                <a:ea typeface="Menlo" panose="020B0609030804020204" pitchFamily="49" charset="0"/>
+                <a:cs typeface="Menlo" panose="020B0609030804020204" pitchFamily="49" charset="0"/>
+                <a:hlinkClick r:id="rId9"/>
+              </a:rPr>
+              <a:t>link</a:t>
+            </a:r>
+            <a:endParaRPr lang="en-US" sz="1100" dirty="0">
+              <a:highlight>
+                <a:srgbClr val="FFFF00"/>
+              </a:highlight>
+              <a:latin typeface="Menlo" panose="020B0609030804020204" pitchFamily="49" charset="0"/>
+              <a:ea typeface="Menlo" panose="020B0609030804020204" pitchFamily="49" charset="0"/>
+              <a:cs typeface="Menlo" panose="020B0609030804020204" pitchFamily="49" charset="0"/>
+            </a:endParaRPr>
+          </a:p>
+          <a:p>
+            <a:r>
+              <a:rPr lang="en-US" sz="1100" dirty="0">
+                <a:latin typeface="Menlo" panose="020B0609030804020204" pitchFamily="49" charset="0"/>
+                <a:ea typeface="Menlo" panose="020B0609030804020204" pitchFamily="49" charset="0"/>
+                <a:cs typeface="Menlo" panose="020B0609030804020204" pitchFamily="49" charset="0"/>
+              </a:rPr>
+              <a:t>---------</a:t>
+            </a:r>
           </a:p>
         </p:txBody>
       </p:sp>
     </p:spTree>
     <p:extLst>
       <p:ext uri="{BB962C8B-B14F-4D97-AF65-F5344CB8AC3E}">
-        <p14:creationId xmlns:p14="http://schemas.microsoft.com/office/powerpoint/2010/main" val="1823851163"/>
+        <p14:creationId xmlns:p14="http://schemas.microsoft.com/office/powerpoint/2010/main" val="532771993"/>
       </p:ext>
     </p:extLst>
   </p:cSld>
@@ -6581,7 +7971,7 @@
         <p:cNvPr id="1" name="">
           <a:extLst>
             <a:ext uri="{FF2B5EF4-FFF2-40B4-BE49-F238E27FC236}">
-              <a16:creationId xmlns:a16="http://schemas.microsoft.com/office/drawing/2014/main" id="{BF0F6C77-9DF7-270C-CAF5-1425679466AF}"/>
+              <a16:creationId xmlns:a16="http://schemas.microsoft.com/office/drawing/2014/main" id="{74343D31-ECE5-9365-93A5-EADC75847418}"/>
             </a:ext>
           </a:extLst>
         </p:cNvPr>
@@ -6601,7 +7991,7 @@
           <p:cNvPr id="2" name="TextBox 1">
             <a:extLst>
               <a:ext uri="{FF2B5EF4-FFF2-40B4-BE49-F238E27FC236}">
-                <a16:creationId xmlns:a16="http://schemas.microsoft.com/office/drawing/2014/main" id="{3956900E-1F44-5200-4B48-801051E08C91}"/>
+                <a16:creationId xmlns:a16="http://schemas.microsoft.com/office/drawing/2014/main" id="{77D0C96E-112C-9AD5-4197-E7D6921D9754}"/>
               </a:ext>
             </a:extLst>
           </p:cNvPr>
@@ -6611,7 +8001,7 @@
         <p:spPr>
           <a:xfrm>
             <a:off x="-1" y="0"/>
-            <a:ext cx="2788921" cy="461665"/>
+            <a:ext cx="6096001" cy="523220"/>
           </a:xfrm>
           <a:prstGeom prst="rect">
             <a:avLst/>
@@ -6625,15 +8015,9 @@
           <a:lstStyle/>
           <a:p>
             <a:r>
-              <a:rPr lang="en-US" sz="2400" b="1" dirty="0"/>
-              <a:t>1025R   vs    X758</a:t>
-            </a:r>
-            <a:endParaRPr lang="en-US" sz="2400" b="1" i="0" dirty="0">
-              <a:solidFill>
-                <a:srgbClr val="333333"/>
-              </a:solidFill>
-              <a:effectLst/>
-            </a:endParaRPr>
+              <a:rPr lang="en-US" sz="2800" b="1" dirty="0"/>
+              <a:t>John Deere X758</a:t>
+            </a:r>
           </a:p>
         </p:txBody>
       </p:sp>
@@ -6642,7 +8026,7 @@
           <p:cNvPr id="8" name="TextBox 7">
             <a:extLst>
               <a:ext uri="{FF2B5EF4-FFF2-40B4-BE49-F238E27FC236}">
-                <a16:creationId xmlns:a16="http://schemas.microsoft.com/office/drawing/2014/main" id="{021FCEF9-3A32-8081-FC7A-EE3CAB7FCD67}"/>
+                <a16:creationId xmlns:a16="http://schemas.microsoft.com/office/drawing/2014/main" id="{40B1DAD5-098B-A626-FB87-CBFF942DA840}"/>
               </a:ext>
             </a:extLst>
           </p:cNvPr>
@@ -6651,23 +8035,13 @@
         </p:nvSpPr>
         <p:spPr>
           <a:xfrm>
-            <a:off x="262129" y="4908477"/>
-            <a:ext cx="3785442" cy="1169551"/>
+            <a:off x="255183" y="832299"/>
+            <a:ext cx="5181598" cy="5693866"/>
           </a:xfrm>
           <a:prstGeom prst="rect">
             <a:avLst/>
           </a:prstGeom>
-          <a:solidFill>
-            <a:schemeClr val="accent4">
-              <a:lumMod val="20000"/>
-              <a:lumOff val="80000"/>
-            </a:schemeClr>
-          </a:solidFill>
-          <a:ln>
-            <a:solidFill>
-              <a:srgbClr val="FF0000"/>
-            </a:solidFill>
-          </a:ln>
+          <a:noFill/>
         </p:spPr>
         <p:txBody>
           <a:bodyPr wrap="square" rtlCol="0">
@@ -6675,127 +8049,202 @@
           </a:bodyPr>
           <a:lstStyle/>
           <a:p>
+            <a:pPr marL="285750" indent="-285750">
+              <a:buFont typeface="Courier New" panose="02070309020205020404" pitchFamily="49" charset="0"/>
+              <a:buChar char="o"/>
+            </a:pPr>
             <a:r>
               <a:rPr lang="en-US" sz="1400" dirty="0"/>
-              <a:t>Both have diesel engine.</a:t>
-            </a:r>
+              <a:t>Attachments: mower deck, snow plow, snow blower, snow broom, aerators, thatchers, material collection systems, utility carts, spreaders</a:t>
+            </a:r>
+            <a:endParaRPr lang="en-US" sz="1400" dirty="0">
+              <a:hlinkClick r:id="rId2"/>
+            </a:endParaRPr>
           </a:p>
           <a:p>
             <a:pPr marL="285750" indent="-285750">
-              <a:buFont typeface="Arial" panose="020B0604020202020204" pitchFamily="34" charset="0"/>
-              <a:buChar char="•"/>
+              <a:buFont typeface="Courier New" panose="02070309020205020404" pitchFamily="49" charset="0"/>
+              <a:buChar char="o"/>
             </a:pPr>
             <a:r>
+              <a:rPr lang="en-US" sz="1400" dirty="0">
+                <a:hlinkClick r:id="rId2"/>
+              </a:rPr>
+              <a:t>https://www.youtube.com/watch?v=ymtZBvOIQdw</a:t>
+            </a:r>
+            <a:endParaRPr lang="en-US" sz="1400" dirty="0"/>
+          </a:p>
+          <a:p>
+            <a:pPr marL="285750" indent="-285750">
+              <a:buFont typeface="Courier New" panose="02070309020205020404" pitchFamily="49" charset="0"/>
+              <a:buChar char="o"/>
+            </a:pPr>
+            <a:r>
               <a:rPr lang="en-US" sz="1400" dirty="0"/>
-              <a:t>X758 is a garden tractor (mowing, with optional 3-point hitch and PTO)</a:t>
+              <a:t>54-inch mowing deck - shaft driven (no belt)</a:t>
             </a:r>
           </a:p>
           <a:p>
             <a:pPr marL="285750" indent="-285750">
-              <a:buFont typeface="Arial" panose="020B0604020202020204" pitchFamily="34" charset="0"/>
-              <a:buChar char="•"/>
+              <a:buFont typeface="Courier New" panose="02070309020205020404" pitchFamily="49" charset="0"/>
+              <a:buChar char="o"/>
             </a:pPr>
             <a:r>
               <a:rPr lang="en-US" sz="1400" dirty="0"/>
-              <a:t>1025R is a true sub-compact utility tractor (loader, backhoe, ...), heavier</a:t>
-            </a:r>
-          </a:p>
-        </p:txBody>
-      </p:sp>
-      <p:sp>
-        <p:nvSpPr>
-          <p:cNvPr id="10" name="TextBox 9">
-            <a:extLst>
-              <a:ext uri="{FF2B5EF4-FFF2-40B4-BE49-F238E27FC236}">
-                <a16:creationId xmlns:a16="http://schemas.microsoft.com/office/drawing/2014/main" id="{2EACD354-3FD4-BB1F-4646-02FD15077B14}"/>
-              </a:ext>
-            </a:extLst>
-          </p:cNvPr>
-          <p:cNvSpPr txBox="1"/>
-          <p:nvPr/>
-        </p:nvSpPr>
-        <p:spPr>
-          <a:xfrm>
-            <a:off x="262129" y="775454"/>
-            <a:ext cx="3785442" cy="646331"/>
-          </a:xfrm>
-          <a:prstGeom prst="rect">
-            <a:avLst/>
-          </a:prstGeom>
-          <a:solidFill>
-            <a:schemeClr val="accent4">
-              <a:lumMod val="20000"/>
-              <a:lumOff val="80000"/>
-            </a:schemeClr>
-          </a:solidFill>
-          <a:ln>
-            <a:solidFill>
-              <a:srgbClr val="FF0000"/>
-            </a:solidFill>
-          </a:ln>
-        </p:spPr>
-        <p:txBody>
-          <a:bodyPr wrap="square" rtlCol="0">
-            <a:spAutoFit/>
-          </a:bodyPr>
-          <a:lstStyle/>
-          <a:p>
-            <a:r>
-              <a:rPr lang="en-US" dirty="0"/>
-              <a:t> </a:t>
-            </a:r>
-            <a:r>
-              <a:rPr lang="en-US" b="1" dirty="0"/>
-              <a:t>1025R                vs                 X758</a:t>
-            </a:r>
-          </a:p>
-          <a:p>
-            <a:r>
-              <a:rPr lang="en-US" dirty="0">
-                <a:solidFill>
-                  <a:srgbClr val="00B0F0"/>
-                </a:solidFill>
-              </a:rPr>
-              <a:t>1,444 </a:t>
-            </a:r>
-            <a:r>
-              <a:rPr lang="en-US" dirty="0" err="1">
-                <a:solidFill>
-                  <a:srgbClr val="00B0F0"/>
-                </a:solidFill>
-              </a:rPr>
-              <a:t>lbs</a:t>
-            </a:r>
-            <a:r>
-              <a:rPr lang="en-US" dirty="0">
-                <a:solidFill>
-                  <a:srgbClr val="00B0F0"/>
-                </a:solidFill>
-              </a:rPr>
-              <a:t>                              1,038 </a:t>
-            </a:r>
-            <a:r>
-              <a:rPr lang="en-US" dirty="0" err="1">
-                <a:solidFill>
-                  <a:srgbClr val="00B0F0"/>
-                </a:solidFill>
-              </a:rPr>
-              <a:t>lbs</a:t>
-            </a:r>
-            <a:endParaRPr lang="en-US" dirty="0">
-              <a:solidFill>
-                <a:srgbClr val="00B0F0"/>
-              </a:solidFill>
-            </a:endParaRPr>
+              <a:t>Power Flow Bagger System (3 bags)</a:t>
+            </a:r>
+          </a:p>
+          <a:p>
+            <a:pPr marL="285750" indent="-285750">
+              <a:buFont typeface="Courier New" panose="02070309020205020404" pitchFamily="49" charset="0"/>
+              <a:buChar char="o"/>
+            </a:pPr>
+            <a:r>
+              <a:rPr lang="en-US" sz="1400" dirty="0"/>
+              <a:t>Little Buck Loader (Aftermarket, front-mounted)</a:t>
+            </a:r>
+          </a:p>
+          <a:p>
+            <a:pPr marL="285750" indent="-285750">
+              <a:buFont typeface="Courier New" panose="02070309020205020404" pitchFamily="49" charset="0"/>
+              <a:buChar char="o"/>
+            </a:pPr>
+            <a:r>
+              <a:rPr lang="en-US" sz="1400" dirty="0"/>
+              <a:t>Grapple - mechanically controlled (closes when the bucket is curled and opens when tilted)</a:t>
+            </a:r>
+          </a:p>
+          <a:p>
+            <a:pPr marL="285750" indent="-285750">
+              <a:buFont typeface="Courier New" panose="02070309020205020404" pitchFamily="49" charset="0"/>
+              <a:buChar char="o"/>
+            </a:pPr>
+            <a:r>
+              <a:rPr lang="en-US" sz="1400" dirty="0"/>
+              <a:t>Piranha Bar - A jagged tooth bar bolted to the bucket edge to improve digging in dirt and rock</a:t>
+            </a:r>
+          </a:p>
+          <a:p>
+            <a:pPr marL="285750" indent="-285750">
+              <a:buFont typeface="Courier New" panose="02070309020205020404" pitchFamily="49" charset="0"/>
+              <a:buChar char="o"/>
+            </a:pPr>
+            <a:r>
+              <a:rPr lang="en-US" sz="1400" dirty="0"/>
+              <a:t>54-inch Blade (snow plowing or pushing dirt/leaves)</a:t>
+            </a:r>
+          </a:p>
+          <a:p>
+            <a:pPr marL="285750" indent="-285750">
+              <a:buFont typeface="Courier New" panose="02070309020205020404" pitchFamily="49" charset="0"/>
+              <a:buChar char="o"/>
+            </a:pPr>
+            <a:r>
+              <a:rPr lang="en-US" sz="1400" dirty="0"/>
+              <a:t>Click-and-Go System - a bracket system that allows for very fast switching of rear attachments</a:t>
+            </a:r>
+          </a:p>
+          <a:p>
+            <a:pPr marL="285750" indent="-285750">
+              <a:buFont typeface="Courier New" panose="02070309020205020404" pitchFamily="49" charset="0"/>
+              <a:buChar char="o"/>
+            </a:pPr>
+            <a:r>
+              <a:rPr lang="en-US" sz="1400" dirty="0"/>
+              <a:t> (like the bagger or weight brackets) without a full 3-point hitch</a:t>
+            </a:r>
+          </a:p>
+          <a:p>
+            <a:pPr marL="285750" indent="-285750">
+              <a:buFont typeface="Courier New" panose="02070309020205020404" pitchFamily="49" charset="0"/>
+              <a:buChar char="o"/>
+            </a:pPr>
+            <a:r>
+              <a:rPr lang="en-US" sz="1400" dirty="0"/>
+              <a:t>Weights - used on the rear for traction</a:t>
+            </a:r>
+          </a:p>
+          <a:p>
+            <a:pPr marL="285750" indent="-285750">
+              <a:buFont typeface="Courier New" panose="02070309020205020404" pitchFamily="49" charset="0"/>
+              <a:buChar char="o"/>
+            </a:pPr>
+            <a:r>
+              <a:rPr lang="en-US" sz="1400" dirty="0"/>
+              <a:t>Spreader - a 125lb electronic spreader for salt, seed, or fertilizer</a:t>
+            </a:r>
+          </a:p>
+          <a:p>
+            <a:pPr marL="285750" indent="-285750">
+              <a:buFont typeface="Courier New" panose="02070309020205020404" pitchFamily="49" charset="0"/>
+              <a:buChar char="o"/>
+            </a:pPr>
+            <a:endParaRPr lang="en-US" sz="1400" dirty="0"/>
+          </a:p>
+          <a:p>
+            <a:pPr marL="285750" indent="-285750">
+              <a:buFont typeface="Courier New" panose="02070309020205020404" pitchFamily="49" charset="0"/>
+              <a:buChar char="o"/>
+            </a:pPr>
+            <a:r>
+              <a:rPr lang="en-US" sz="1400" dirty="0"/>
+              <a:t>Tires - HDAP (Heavy-Duty All-Purpose) tires</a:t>
+            </a:r>
+          </a:p>
+          <a:p>
+            <a:pPr marL="285750" indent="-285750">
+              <a:buFont typeface="Courier New" panose="02070309020205020404" pitchFamily="49" charset="0"/>
+              <a:buChar char="o"/>
+            </a:pPr>
+            <a:r>
+              <a:rPr lang="en-US" sz="1400" dirty="0"/>
+              <a:t>Bulbs - change to LED (</a:t>
+            </a:r>
+            <a:r>
+              <a:rPr lang="en-US" sz="1400" dirty="0" err="1"/>
+              <a:t>ebay</a:t>
+            </a:r>
+            <a:r>
+              <a:rPr lang="en-US" sz="1400" dirty="0"/>
+              <a:t>)</a:t>
+            </a:r>
+          </a:p>
+          <a:p>
+            <a:pPr marL="285750" indent="-285750">
+              <a:buFont typeface="Courier New" panose="02070309020205020404" pitchFamily="49" charset="0"/>
+              <a:buChar char="o"/>
+            </a:pPr>
+            <a:r>
+              <a:rPr lang="en-US" sz="1400" dirty="0"/>
+              <a:t>The user "shimmed" the Implement Relief Valve to increase hydraulic pressure from roughly 1,000 PSI to 1,350 PSI to improve the lifting power of the loader</a:t>
+            </a:r>
+          </a:p>
+          <a:p>
+            <a:pPr marL="285750" indent="-285750">
+              <a:buFont typeface="Courier New" panose="02070309020205020404" pitchFamily="49" charset="0"/>
+              <a:buChar char="o"/>
+            </a:pPr>
+            <a:r>
+              <a:rPr lang="en-US" sz="1400" dirty="0"/>
+              <a:t>"</a:t>
+            </a:r>
+            <a:r>
+              <a:rPr lang="en-US" sz="1400" dirty="0" err="1"/>
+              <a:t>Autoconnect</a:t>
+            </a:r>
+            <a:r>
+              <a:rPr lang="en-US" sz="1400" dirty="0"/>
+              <a:t>" drive shaft for the deck is noisy and vibrate. Better swap it for a manual shaft connection for a smoother, quieter ride.</a:t>
+            </a:r>
           </a:p>
         </p:txBody>
       </p:sp>
       <p:pic>
         <p:nvPicPr>
-          <p:cNvPr id="12" name="Picture 11">
-            <a:extLst>
-              <a:ext uri="{FF2B5EF4-FFF2-40B4-BE49-F238E27FC236}">
-                <a16:creationId xmlns:a16="http://schemas.microsoft.com/office/drawing/2014/main" id="{EE86A2F8-C2FD-D027-ABEC-F050AC6B852E}"/>
+          <p:cNvPr id="4" name="Picture 3">
+            <a:extLst>
+              <a:ext uri="{FF2B5EF4-FFF2-40B4-BE49-F238E27FC236}">
+                <a16:creationId xmlns:a16="http://schemas.microsoft.com/office/drawing/2014/main" id="{B42ACF02-2E18-B107-ECBC-A3BE9CACFC04}"/>
               </a:ext>
             </a:extLst>
           </p:cNvPr>
@@ -6805,7 +8254,7 @@
           <p:nvPr/>
         </p:nvPicPr>
         <p:blipFill>
-          <a:blip r:embed="rId2" cstate="email">
+          <a:blip r:embed="rId3" cstate="email">
             <a:extLst>
               <a:ext uri="{28A0092B-C50C-407E-A947-70E740481C1C}">
                 <a14:useLocalDpi xmlns:a14="http://schemas.microsoft.com/office/drawing/2010/main"/>
@@ -6818,586 +8267,54 @@
         </p:blipFill>
         <p:spPr>
           <a:xfrm>
-            <a:off x="4301890" y="230832"/>
-            <a:ext cx="1530350" cy="1200150"/>
+            <a:off x="5657850" y="261610"/>
+            <a:ext cx="5464920" cy="4374185"/>
           </a:xfrm>
           <a:prstGeom prst="rect">
             <a:avLst/>
           </a:prstGeom>
-        </p:spPr>
-      </p:pic>
-      <p:pic>
-        <p:nvPicPr>
-          <p:cNvPr id="1028" name="Picture 4" descr="x758 vs 1025r: new owner impressions | My Tractor Forum">
-            <a:extLst>
-              <a:ext uri="{FF2B5EF4-FFF2-40B4-BE49-F238E27FC236}">
-                <a16:creationId xmlns:a16="http://schemas.microsoft.com/office/drawing/2014/main" id="{454F66C4-2B11-96E3-1FC1-489106CE95D7}"/>
-              </a:ext>
-            </a:extLst>
-          </p:cNvPr>
-          <p:cNvPicPr>
-            <a:picLocks noChangeAspect="1" noChangeArrowheads="1"/>
-          </p:cNvPicPr>
-          <p:nvPr/>
-        </p:nvPicPr>
-        <p:blipFill>
-          <a:blip r:embed="rId3" cstate="email">
-            <a:extLst>
-              <a:ext uri="{28A0092B-C50C-407E-A947-70E740481C1C}">
-                <a14:useLocalDpi xmlns:a14="http://schemas.microsoft.com/office/drawing/2010/main"/>
-              </a:ext>
-            </a:extLst>
-          </a:blip>
-          <a:srcRect/>
-          <a:stretch>
-            <a:fillRect/>
-          </a:stretch>
-        </p:blipFill>
-        <p:spPr bwMode="auto">
-          <a:xfrm>
-            <a:off x="262128" y="1908858"/>
-            <a:ext cx="3785443" cy="2839082"/>
-          </a:xfrm>
-          <a:prstGeom prst="rect">
-            <a:avLst/>
-          </a:prstGeom>
-          <a:noFill/>
-          <a:extLst>
-            <a:ext uri="{909E8E84-426E-40DD-AFC4-6F175D3DCCD1}">
-              <a14:hiddenFill xmlns:a14="http://schemas.microsoft.com/office/drawing/2010/main">
-                <a:solidFill>
-                  <a:srgbClr val="FFFFFF"/>
-                </a:solidFill>
-              </a14:hiddenFill>
-            </a:ext>
-          </a:extLst>
-        </p:spPr>
-      </p:pic>
-      <p:sp>
-        <p:nvSpPr>
-          <p:cNvPr id="3" name="TextBox 2">
-            <a:extLst>
-              <a:ext uri="{FF2B5EF4-FFF2-40B4-BE49-F238E27FC236}">
-                <a16:creationId xmlns:a16="http://schemas.microsoft.com/office/drawing/2014/main" id="{300305A7-914B-7488-5C71-E229D10278CE}"/>
-              </a:ext>
-            </a:extLst>
-          </p:cNvPr>
-          <p:cNvSpPr txBox="1"/>
-          <p:nvPr/>
-        </p:nvSpPr>
-        <p:spPr>
-          <a:xfrm>
-            <a:off x="6086560" y="139392"/>
-            <a:ext cx="5980472" cy="2046714"/>
-          </a:xfrm>
-          <a:prstGeom prst="rect">
-            <a:avLst/>
-          </a:prstGeom>
-          <a:solidFill>
-            <a:schemeClr val="accent4">
-              <a:lumMod val="20000"/>
-              <a:lumOff val="80000"/>
-            </a:schemeClr>
-          </a:solidFill>
           <a:ln>
             <a:solidFill>
               <a:srgbClr val="FF0000"/>
             </a:solidFill>
           </a:ln>
         </p:spPr>
+      </p:pic>
+      <p:sp>
+        <p:nvSpPr>
+          <p:cNvPr id="3" name="TextBox 2">
+            <a:extLst>
+              <a:ext uri="{FF2B5EF4-FFF2-40B4-BE49-F238E27FC236}">
+                <a16:creationId xmlns:a16="http://schemas.microsoft.com/office/drawing/2014/main" id="{615BF802-DEE9-AC91-C7F2-89B574D2C872}"/>
+              </a:ext>
+            </a:extLst>
+          </p:cNvPr>
+          <p:cNvSpPr txBox="1"/>
+          <p:nvPr/>
+        </p:nvSpPr>
+        <p:spPr>
+          <a:xfrm>
+            <a:off x="7010402" y="4897405"/>
+            <a:ext cx="5181598" cy="954107"/>
+          </a:xfrm>
+          <a:prstGeom prst="rect">
+            <a:avLst/>
+          </a:prstGeom>
+          <a:noFill/>
+        </p:spPr>
         <p:txBody>
           <a:bodyPr wrap="square" rtlCol="0">
             <a:spAutoFit/>
           </a:bodyPr>
           <a:lstStyle/>
           <a:p>
-            <a:r>
-              <a:rPr lang="en-US" dirty="0"/>
-              <a:t>X700 series 4WD models:  X738, X739, X758</a:t>
-            </a:r>
-          </a:p>
-          <a:p>
-            <a:r>
-              <a:rPr lang="en-US" sz="1100" dirty="0">
-                <a:hlinkClick r:id="rId4"/>
-              </a:rPr>
-              <a:t>https://www.deere.com/en/mowers/lawn-tractors/x700-series/ </a:t>
-            </a:r>
-            <a:endParaRPr lang="en-US" dirty="0"/>
-          </a:p>
-          <a:p>
             <a:pPr marL="285750" indent="-285750">
-              <a:buFont typeface="Arial" panose="020B0604020202020204" pitchFamily="34" charset="0"/>
-              <a:buChar char="•"/>
+              <a:buFont typeface="Courier New" panose="02070309020205020404" pitchFamily="49" charset="0"/>
+              <a:buChar char="o"/>
             </a:pPr>
             <a:r>
               <a:rPr lang="en-US" sz="1400" dirty="0"/>
-              <a:t>All accept mowing decks 48, 54, 60 inches</a:t>
-            </a:r>
-          </a:p>
-          <a:p>
-            <a:pPr marL="285750" indent="-285750">
-              <a:buFont typeface="Arial" panose="020B0604020202020204" pitchFamily="34" charset="0"/>
-              <a:buChar char="•"/>
-            </a:pPr>
-            <a:r>
-              <a:rPr lang="en-US" sz="1400" dirty="0"/>
-              <a:t>All have power lift - two-function hydraulic lift system to raise and lower attachments (mower decks, front blades, snow blowers, or rotary brooms)</a:t>
-            </a:r>
-          </a:p>
-          <a:p>
-            <a:pPr marL="285750" indent="-285750">
-              <a:buFont typeface="Arial" panose="020B0604020202020204" pitchFamily="34" charset="0"/>
-              <a:buChar char="•"/>
-            </a:pPr>
-            <a:r>
-              <a:rPr lang="en-US" sz="1400" dirty="0"/>
-              <a:t>Prices: $17..$19K</a:t>
-            </a:r>
-          </a:p>
-          <a:p>
-            <a:pPr marL="285750" indent="-285750">
-              <a:buFont typeface="Arial" panose="020B0604020202020204" pitchFamily="34" charset="0"/>
-              <a:buChar char="•"/>
-            </a:pPr>
-            <a:r>
-              <a:rPr lang="en-US" sz="1400" dirty="0"/>
-              <a:t>X738 4wd, gas, fuel injection, V-twin, power lift, 947 </a:t>
-            </a:r>
-            <a:r>
-              <a:rPr lang="en-US" sz="1400" dirty="0" err="1"/>
-              <a:t>lbs</a:t>
-            </a:r>
-            <a:endParaRPr lang="en-US" sz="1400" dirty="0"/>
-          </a:p>
-          <a:p>
-            <a:pPr marL="285750" indent="-285750">
-              <a:buFont typeface="Arial" panose="020B0604020202020204" pitchFamily="34" charset="0"/>
-              <a:buChar char="•"/>
-            </a:pPr>
-            <a:r>
-              <a:rPr lang="en-US" sz="1400" dirty="0"/>
-              <a:t>X739 4wd, gas, fuel injection, V-twin, power lift, 4-wheel steer</a:t>
-            </a:r>
-          </a:p>
-          <a:p>
-            <a:pPr marL="285750" indent="-285750">
-              <a:buFont typeface="Arial" panose="020B0604020202020204" pitchFamily="34" charset="0"/>
-              <a:buChar char="•"/>
-            </a:pPr>
-            <a:r>
-              <a:rPr lang="en-US" sz="1400" dirty="0"/>
-              <a:t>X758 4wd, diesel, power lift , 1,038 </a:t>
-            </a:r>
-            <a:r>
-              <a:rPr lang="en-US" sz="1400" dirty="0" err="1"/>
-              <a:t>lbs</a:t>
-            </a:r>
-            <a:endParaRPr lang="en-US" sz="1400" dirty="0"/>
-          </a:p>
-        </p:txBody>
-      </p:sp>
-      <p:sp>
-        <p:nvSpPr>
-          <p:cNvPr id="5" name="TextBox 4">
-            <a:extLst>
-              <a:ext uri="{FF2B5EF4-FFF2-40B4-BE49-F238E27FC236}">
-                <a16:creationId xmlns:a16="http://schemas.microsoft.com/office/drawing/2014/main" id="{B4C867C9-7A27-AA35-EB7C-6B97B448BD44}"/>
-              </a:ext>
-            </a:extLst>
-          </p:cNvPr>
-          <p:cNvSpPr txBox="1"/>
-          <p:nvPr/>
-        </p:nvSpPr>
-        <p:spPr>
-          <a:xfrm>
-            <a:off x="6086560" y="2323154"/>
-            <a:ext cx="4093760" cy="2800767"/>
-          </a:xfrm>
-          <a:prstGeom prst="rect">
-            <a:avLst/>
-          </a:prstGeom>
-          <a:solidFill>
-            <a:schemeClr val="accent4">
-              <a:lumMod val="20000"/>
-              <a:lumOff val="80000"/>
-            </a:schemeClr>
-          </a:solidFill>
-          <a:ln>
-            <a:solidFill>
-              <a:srgbClr val="FF0000"/>
-            </a:solidFill>
-          </a:ln>
-        </p:spPr>
-        <p:txBody>
-          <a:bodyPr wrap="square" rtlCol="0">
-            <a:spAutoFit/>
-          </a:bodyPr>
-          <a:lstStyle/>
-          <a:p>
-            <a:r>
-              <a:rPr lang="en-US" sz="1100" dirty="0">
-                <a:latin typeface="Menlo" panose="020B0609030804020204" pitchFamily="49" charset="0"/>
-                <a:ea typeface="Menlo" panose="020B0609030804020204" pitchFamily="49" charset="0"/>
-                <a:cs typeface="Menlo" panose="020B0609030804020204" pitchFamily="49" charset="0"/>
-              </a:rPr>
-              <a:t>JD-425 2wd gas carburetor</a:t>
-            </a:r>
-          </a:p>
-          <a:p>
-            <a:r>
-              <a:rPr lang="en-US" sz="1100" dirty="0">
-                <a:latin typeface="Menlo" panose="020B0609030804020204" pitchFamily="49" charset="0"/>
-                <a:ea typeface="Menlo" panose="020B0609030804020204" pitchFamily="49" charset="0"/>
-                <a:cs typeface="Menlo" panose="020B0609030804020204" pitchFamily="49" charset="0"/>
-              </a:rPr>
-              <a:t>JD-445 2wd gas fuel injection</a:t>
-            </a:r>
-          </a:p>
-          <a:p>
-            <a:r>
-              <a:rPr lang="en-US" sz="1100" b="1" dirty="0">
-                <a:solidFill>
-                  <a:srgbClr val="FF0000"/>
-                </a:solidFill>
-                <a:latin typeface="Menlo" panose="020B0609030804020204" pitchFamily="49" charset="0"/>
-                <a:ea typeface="Menlo" panose="020B0609030804020204" pitchFamily="49" charset="0"/>
-                <a:cs typeface="Menlo" panose="020B0609030804020204" pitchFamily="49" charset="0"/>
-              </a:rPr>
-              <a:t>JD-455 2wd diesel</a:t>
-            </a:r>
-            <a:r>
-              <a:rPr lang="en-US" sz="1100" dirty="0">
-                <a:latin typeface="Menlo" panose="020B0609030804020204" pitchFamily="49" charset="0"/>
-                <a:ea typeface="Menlo" panose="020B0609030804020204" pitchFamily="49" charset="0"/>
-                <a:cs typeface="Menlo" panose="020B0609030804020204" pitchFamily="49" charset="0"/>
-              </a:rPr>
-              <a:t> - </a:t>
-            </a:r>
-            <a:r>
-              <a:rPr lang="en-US" sz="1100" dirty="0">
-                <a:latin typeface="Menlo" panose="020B0609030804020204" pitchFamily="49" charset="0"/>
-                <a:ea typeface="Menlo" panose="020B0609030804020204" pitchFamily="49" charset="0"/>
-                <a:cs typeface="Menlo" panose="020B0609030804020204" pitchFamily="49" charset="0"/>
-                <a:hlinkClick r:id="rId5"/>
-              </a:rPr>
-              <a:t>link</a:t>
-            </a:r>
-            <a:endParaRPr lang="en-US" sz="1100" b="1" dirty="0">
-              <a:solidFill>
-                <a:srgbClr val="FF0000"/>
-              </a:solidFill>
-              <a:latin typeface="Menlo" panose="020B0609030804020204" pitchFamily="49" charset="0"/>
-              <a:ea typeface="Menlo" panose="020B0609030804020204" pitchFamily="49" charset="0"/>
-              <a:cs typeface="Menlo" panose="020B0609030804020204" pitchFamily="49" charset="0"/>
-            </a:endParaRPr>
-          </a:p>
-          <a:p>
-            <a:r>
-              <a:rPr lang="en-US" sz="1100" dirty="0">
-                <a:latin typeface="Menlo" panose="020B0609030804020204" pitchFamily="49" charset="0"/>
-                <a:ea typeface="Menlo" panose="020B0609030804020204" pitchFamily="49" charset="0"/>
-                <a:cs typeface="Menlo" panose="020B0609030804020204" pitchFamily="49" charset="0"/>
-              </a:rPr>
-              <a:t>---------</a:t>
-            </a:r>
-          </a:p>
-          <a:p>
-            <a:r>
-              <a:rPr lang="en-US" sz="1100" dirty="0">
-                <a:latin typeface="Menlo" panose="020B0609030804020204" pitchFamily="49" charset="0"/>
-                <a:ea typeface="Menlo" panose="020B0609030804020204" pitchFamily="49" charset="0"/>
-                <a:cs typeface="Menlo" panose="020B0609030804020204" pitchFamily="49" charset="0"/>
-              </a:rPr>
-              <a:t>X485 4wd gas fuel injection</a:t>
-            </a:r>
-          </a:p>
-          <a:p>
-            <a:r>
-              <a:rPr lang="en-US" sz="1100" b="1" dirty="0">
-                <a:solidFill>
-                  <a:srgbClr val="FF0000"/>
-                </a:solidFill>
-                <a:latin typeface="Menlo" panose="020B0609030804020204" pitchFamily="49" charset="0"/>
-                <a:ea typeface="Menlo" panose="020B0609030804020204" pitchFamily="49" charset="0"/>
-                <a:cs typeface="Menlo" panose="020B0609030804020204" pitchFamily="49" charset="0"/>
-              </a:rPr>
-              <a:t>X495 2wd diesel  (2002-2005)</a:t>
-            </a:r>
-            <a:r>
-              <a:rPr lang="en-US" sz="1100" dirty="0">
-                <a:latin typeface="Menlo" panose="020B0609030804020204" pitchFamily="49" charset="0"/>
-                <a:ea typeface="Menlo" panose="020B0609030804020204" pitchFamily="49" charset="0"/>
-                <a:cs typeface="Menlo" panose="020B0609030804020204" pitchFamily="49" charset="0"/>
-              </a:rPr>
-              <a:t> - </a:t>
-            </a:r>
-            <a:r>
-              <a:rPr lang="en-US" sz="1100" dirty="0">
-                <a:latin typeface="Menlo" panose="020B0609030804020204" pitchFamily="49" charset="0"/>
-                <a:ea typeface="Menlo" panose="020B0609030804020204" pitchFamily="49" charset="0"/>
-                <a:cs typeface="Menlo" panose="020B0609030804020204" pitchFamily="49" charset="0"/>
-                <a:hlinkClick r:id="rId6"/>
-              </a:rPr>
-              <a:t>link</a:t>
-            </a:r>
-            <a:r>
-              <a:rPr lang="en-US" sz="1100" dirty="0">
-                <a:latin typeface="Menlo" panose="020B0609030804020204" pitchFamily="49" charset="0"/>
-                <a:ea typeface="Menlo" panose="020B0609030804020204" pitchFamily="49" charset="0"/>
-                <a:cs typeface="Menlo" panose="020B0609030804020204" pitchFamily="49" charset="0"/>
-              </a:rPr>
-              <a:t> </a:t>
-            </a:r>
-          </a:p>
-          <a:p>
-            <a:r>
-              <a:rPr lang="en-US" sz="1100" dirty="0">
-                <a:latin typeface="Menlo" panose="020B0609030804020204" pitchFamily="49" charset="0"/>
-                <a:ea typeface="Menlo" panose="020B0609030804020204" pitchFamily="49" charset="0"/>
-                <a:cs typeface="Menlo" panose="020B0609030804020204" pitchFamily="49" charset="0"/>
-              </a:rPr>
-              <a:t>---------</a:t>
-            </a:r>
-          </a:p>
-          <a:p>
-            <a:r>
-              <a:rPr lang="en-US" sz="1100" dirty="0">
-                <a:latin typeface="Menlo" panose="020B0609030804020204" pitchFamily="49" charset="0"/>
-                <a:ea typeface="Menlo" panose="020B0609030804020204" pitchFamily="49" charset="0"/>
-                <a:cs typeface="Menlo" panose="020B0609030804020204" pitchFamily="49" charset="0"/>
-              </a:rPr>
-              <a:t>X590 2wd gas fuel injection</a:t>
-            </a:r>
-          </a:p>
-          <a:p>
-            <a:r>
-              <a:rPr lang="en-US" sz="1100" b="1" dirty="0">
-                <a:solidFill>
-                  <a:srgbClr val="FF0000"/>
-                </a:solidFill>
-                <a:highlight>
-                  <a:srgbClr val="FFFF00"/>
-                </a:highlight>
-                <a:latin typeface="Menlo" panose="020B0609030804020204" pitchFamily="49" charset="0"/>
-                <a:ea typeface="Menlo" panose="020B0609030804020204" pitchFamily="49" charset="0"/>
-                <a:cs typeface="Menlo" panose="020B0609030804020204" pitchFamily="49" charset="0"/>
-              </a:rPr>
-              <a:t>X595 4wd diesel (2002-2005) </a:t>
-            </a:r>
-            <a:r>
-              <a:rPr lang="en-US" sz="1100" dirty="0">
-                <a:highlight>
-                  <a:srgbClr val="FFFF00"/>
-                </a:highlight>
-                <a:latin typeface="Menlo" panose="020B0609030804020204" pitchFamily="49" charset="0"/>
-                <a:ea typeface="Menlo" panose="020B0609030804020204" pitchFamily="49" charset="0"/>
-                <a:cs typeface="Menlo" panose="020B0609030804020204" pitchFamily="49" charset="0"/>
-              </a:rPr>
-              <a:t> - </a:t>
-            </a:r>
-            <a:r>
-              <a:rPr lang="en-US" sz="1100" dirty="0">
-                <a:highlight>
-                  <a:srgbClr val="FFFF00"/>
-                </a:highlight>
-                <a:latin typeface="Menlo" panose="020B0609030804020204" pitchFamily="49" charset="0"/>
-                <a:ea typeface="Menlo" panose="020B0609030804020204" pitchFamily="49" charset="0"/>
-                <a:cs typeface="Menlo" panose="020B0609030804020204" pitchFamily="49" charset="0"/>
-                <a:hlinkClick r:id="rId7"/>
-              </a:rPr>
-              <a:t>link</a:t>
-            </a:r>
-            <a:endParaRPr lang="en-US" sz="1100" b="1" dirty="0">
-              <a:solidFill>
-                <a:srgbClr val="FF0000"/>
-              </a:solidFill>
-              <a:highlight>
-                <a:srgbClr val="FFFF00"/>
-              </a:highlight>
-              <a:latin typeface="Menlo" panose="020B0609030804020204" pitchFamily="49" charset="0"/>
-              <a:ea typeface="Menlo" panose="020B0609030804020204" pitchFamily="49" charset="0"/>
-              <a:cs typeface="Menlo" panose="020B0609030804020204" pitchFamily="49" charset="0"/>
-            </a:endParaRPr>
-          </a:p>
-          <a:p>
-            <a:r>
-              <a:rPr lang="en-US" sz="1100" dirty="0">
-                <a:latin typeface="Menlo" panose="020B0609030804020204" pitchFamily="49" charset="0"/>
-                <a:ea typeface="Menlo" panose="020B0609030804020204" pitchFamily="49" charset="0"/>
-                <a:cs typeface="Menlo" panose="020B0609030804020204" pitchFamily="49" charset="0"/>
-              </a:rPr>
-              <a:t>---------</a:t>
-            </a:r>
-          </a:p>
-          <a:p>
-            <a:r>
-              <a:rPr lang="en-US" sz="1100" dirty="0">
-                <a:latin typeface="Menlo" panose="020B0609030804020204" pitchFamily="49" charset="0"/>
-                <a:ea typeface="Menlo" panose="020B0609030804020204" pitchFamily="49" charset="0"/>
-                <a:cs typeface="Menlo" panose="020B0609030804020204" pitchFamily="49" charset="0"/>
-              </a:rPr>
-              <a:t>X738, X739 4wd gas fuel injection</a:t>
-            </a:r>
-          </a:p>
-          <a:p>
-            <a:r>
-              <a:rPr lang="en-US" sz="1100" b="1" dirty="0">
-                <a:solidFill>
-                  <a:srgbClr val="FF0000"/>
-                </a:solidFill>
-                <a:latin typeface="Menlo" panose="020B0609030804020204" pitchFamily="49" charset="0"/>
-                <a:ea typeface="Menlo" panose="020B0609030804020204" pitchFamily="49" charset="0"/>
-                <a:cs typeface="Menlo" panose="020B0609030804020204" pitchFamily="49" charset="0"/>
-              </a:rPr>
-              <a:t>X740, X744 </a:t>
-            </a:r>
-            <a:r>
-              <a:rPr lang="en-US" sz="1100" dirty="0">
-                <a:latin typeface="Menlo" panose="020B0609030804020204" pitchFamily="49" charset="0"/>
-                <a:ea typeface="Menlo" panose="020B0609030804020204" pitchFamily="49" charset="0"/>
-                <a:cs typeface="Menlo" panose="020B0609030804020204" pitchFamily="49" charset="0"/>
-              </a:rPr>
-              <a:t>2wd diesel (2006-12)</a:t>
-            </a:r>
-          </a:p>
-          <a:p>
-            <a:r>
-              <a:rPr lang="en-US" sz="1100" b="1" dirty="0">
-                <a:solidFill>
-                  <a:srgbClr val="FF0000"/>
-                </a:solidFill>
-                <a:highlight>
-                  <a:srgbClr val="FFFF00"/>
-                </a:highlight>
-                <a:latin typeface="Menlo" panose="020B0609030804020204" pitchFamily="49" charset="0"/>
-                <a:ea typeface="Menlo" panose="020B0609030804020204" pitchFamily="49" charset="0"/>
-                <a:cs typeface="Menlo" panose="020B0609030804020204" pitchFamily="49" charset="0"/>
-              </a:rPr>
-              <a:t>X748, X749</a:t>
-            </a:r>
-            <a:r>
-              <a:rPr lang="en-US" sz="1100" dirty="0">
-                <a:highlight>
-                  <a:srgbClr val="FFFF00"/>
-                </a:highlight>
-                <a:latin typeface="Menlo" panose="020B0609030804020204" pitchFamily="49" charset="0"/>
-                <a:ea typeface="Menlo" panose="020B0609030804020204" pitchFamily="49" charset="0"/>
-                <a:cs typeface="Menlo" panose="020B0609030804020204" pitchFamily="49" charset="0"/>
-              </a:rPr>
-              <a:t> 4wd diesel (2006-12) - </a:t>
-            </a:r>
-            <a:r>
-              <a:rPr lang="en-US" sz="1100" dirty="0">
-                <a:highlight>
-                  <a:srgbClr val="FFFF00"/>
-                </a:highlight>
-                <a:latin typeface="Menlo" panose="020B0609030804020204" pitchFamily="49" charset="0"/>
-                <a:ea typeface="Menlo" panose="020B0609030804020204" pitchFamily="49" charset="0"/>
-                <a:cs typeface="Menlo" panose="020B0609030804020204" pitchFamily="49" charset="0"/>
-                <a:hlinkClick r:id="rId8"/>
-              </a:rPr>
-              <a:t>link</a:t>
-            </a:r>
-            <a:endParaRPr lang="en-US" sz="1100" dirty="0">
-              <a:highlight>
-                <a:srgbClr val="FFFF00"/>
-              </a:highlight>
-              <a:latin typeface="Menlo" panose="020B0609030804020204" pitchFamily="49" charset="0"/>
-              <a:ea typeface="Menlo" panose="020B0609030804020204" pitchFamily="49" charset="0"/>
-              <a:cs typeface="Menlo" panose="020B0609030804020204" pitchFamily="49" charset="0"/>
-            </a:endParaRPr>
-          </a:p>
-          <a:p>
-            <a:r>
-              <a:rPr lang="en-US" sz="1100" b="1" dirty="0">
-                <a:solidFill>
-                  <a:srgbClr val="FF0000"/>
-                </a:solidFill>
-                <a:latin typeface="Menlo" panose="020B0609030804020204" pitchFamily="49" charset="0"/>
-                <a:ea typeface="Menlo" panose="020B0609030804020204" pitchFamily="49" charset="0"/>
-                <a:cs typeface="Menlo" panose="020B0609030804020204" pitchFamily="49" charset="0"/>
-              </a:rPr>
-              <a:t>X750, X754</a:t>
-            </a:r>
-            <a:r>
-              <a:rPr lang="en-US" sz="1100" dirty="0">
-                <a:latin typeface="Menlo" panose="020B0609030804020204" pitchFamily="49" charset="0"/>
-                <a:ea typeface="Menlo" panose="020B0609030804020204" pitchFamily="49" charset="0"/>
-                <a:cs typeface="Menlo" panose="020B0609030804020204" pitchFamily="49" charset="0"/>
-              </a:rPr>
-              <a:t> 2wd diesel (2013-present) - </a:t>
-            </a:r>
-            <a:r>
-              <a:rPr lang="en-US" sz="1100" dirty="0">
-                <a:latin typeface="Menlo" panose="020B0609030804020204" pitchFamily="49" charset="0"/>
-                <a:ea typeface="Menlo" panose="020B0609030804020204" pitchFamily="49" charset="0"/>
-                <a:cs typeface="Menlo" panose="020B0609030804020204" pitchFamily="49" charset="0"/>
-                <a:hlinkClick r:id="rId9"/>
-              </a:rPr>
-              <a:t>link</a:t>
-            </a:r>
-            <a:endParaRPr lang="en-US" sz="1100" dirty="0">
-              <a:latin typeface="Menlo" panose="020B0609030804020204" pitchFamily="49" charset="0"/>
-              <a:ea typeface="Menlo" panose="020B0609030804020204" pitchFamily="49" charset="0"/>
-              <a:cs typeface="Menlo" panose="020B0609030804020204" pitchFamily="49" charset="0"/>
-            </a:endParaRPr>
-          </a:p>
-          <a:p>
-            <a:r>
-              <a:rPr lang="en-US" sz="1100" b="1" dirty="0">
-                <a:solidFill>
-                  <a:srgbClr val="FF0000"/>
-                </a:solidFill>
-                <a:highlight>
-                  <a:srgbClr val="FFFF00"/>
-                </a:highlight>
-                <a:latin typeface="Menlo" panose="020B0609030804020204" pitchFamily="49" charset="0"/>
-                <a:ea typeface="Menlo" panose="020B0609030804020204" pitchFamily="49" charset="0"/>
-                <a:cs typeface="Menlo" panose="020B0609030804020204" pitchFamily="49" charset="0"/>
-              </a:rPr>
-              <a:t>X758</a:t>
-            </a:r>
-            <a:r>
-              <a:rPr lang="en-US" sz="1100" dirty="0">
-                <a:highlight>
-                  <a:srgbClr val="FFFF00"/>
-                </a:highlight>
-                <a:latin typeface="Menlo" panose="020B0609030804020204" pitchFamily="49" charset="0"/>
-                <a:ea typeface="Menlo" panose="020B0609030804020204" pitchFamily="49" charset="0"/>
-                <a:cs typeface="Menlo" panose="020B0609030804020204" pitchFamily="49" charset="0"/>
-              </a:rPr>
-              <a:t>       4wd diesel (2013-present) - </a:t>
-            </a:r>
-            <a:r>
-              <a:rPr lang="en-US" sz="1100" dirty="0">
-                <a:highlight>
-                  <a:srgbClr val="FFFF00"/>
-                </a:highlight>
-                <a:latin typeface="Menlo" panose="020B0609030804020204" pitchFamily="49" charset="0"/>
-                <a:ea typeface="Menlo" panose="020B0609030804020204" pitchFamily="49" charset="0"/>
-                <a:cs typeface="Menlo" panose="020B0609030804020204" pitchFamily="49" charset="0"/>
-                <a:hlinkClick r:id="rId9"/>
-              </a:rPr>
-              <a:t>link</a:t>
-            </a:r>
-            <a:endParaRPr lang="en-US" sz="1100" dirty="0">
-              <a:highlight>
-                <a:srgbClr val="FFFF00"/>
-              </a:highlight>
-              <a:latin typeface="Menlo" panose="020B0609030804020204" pitchFamily="49" charset="0"/>
-              <a:ea typeface="Menlo" panose="020B0609030804020204" pitchFamily="49" charset="0"/>
-              <a:cs typeface="Menlo" panose="020B0609030804020204" pitchFamily="49" charset="0"/>
-            </a:endParaRPr>
-          </a:p>
-          <a:p>
-            <a:r>
-              <a:rPr lang="en-US" sz="1100" dirty="0">
-                <a:latin typeface="Menlo" panose="020B0609030804020204" pitchFamily="49" charset="0"/>
-                <a:ea typeface="Menlo" panose="020B0609030804020204" pitchFamily="49" charset="0"/>
-                <a:cs typeface="Menlo" panose="020B0609030804020204" pitchFamily="49" charset="0"/>
-              </a:rPr>
-              <a:t>---------</a:t>
+              <a:t>Note: It is possible to install the a CAT‑1 style hitch kit at the back. This will give ability to attach standard 3-point attachments, like a compact 3‑point log splitter powered by tractor’s hydraulics</a:t>
             </a:r>
           </a:p>
         </p:txBody>
@@ -7405,7 +8322,7 @@
     </p:spTree>
     <p:extLst>
       <p:ext uri="{BB962C8B-B14F-4D97-AF65-F5344CB8AC3E}">
-        <p14:creationId xmlns:p14="http://schemas.microsoft.com/office/powerpoint/2010/main" val="701099002"/>
+        <p14:creationId xmlns:p14="http://schemas.microsoft.com/office/powerpoint/2010/main" val="3384990765"/>
       </p:ext>
     </p:extLst>
   </p:cSld>
@@ -7468,375 +8385,6 @@
           <a:p>
             <a:r>
               <a:rPr lang="en-US" sz="2800" b="1" dirty="0"/>
-              <a:t>John Deere X758</a:t>
-            </a:r>
-          </a:p>
-        </p:txBody>
-      </p:sp>
-      <p:sp>
-        <p:nvSpPr>
-          <p:cNvPr id="8" name="TextBox 7">
-            <a:extLst>
-              <a:ext uri="{FF2B5EF4-FFF2-40B4-BE49-F238E27FC236}">
-                <a16:creationId xmlns:a16="http://schemas.microsoft.com/office/drawing/2014/main" id="{40B1DAD5-098B-A626-FB87-CBFF942DA840}"/>
-              </a:ext>
-            </a:extLst>
-          </p:cNvPr>
-          <p:cNvSpPr txBox="1"/>
-          <p:nvPr/>
-        </p:nvSpPr>
-        <p:spPr>
-          <a:xfrm>
-            <a:off x="255183" y="832299"/>
-            <a:ext cx="5181598" cy="5693866"/>
-          </a:xfrm>
-          <a:prstGeom prst="rect">
-            <a:avLst/>
-          </a:prstGeom>
-          <a:noFill/>
-        </p:spPr>
-        <p:txBody>
-          <a:bodyPr wrap="square" rtlCol="0">
-            <a:spAutoFit/>
-          </a:bodyPr>
-          <a:lstStyle/>
-          <a:p>
-            <a:pPr marL="285750" indent="-285750">
-              <a:buFont typeface="Courier New" panose="02070309020205020404" pitchFamily="49" charset="0"/>
-              <a:buChar char="o"/>
-            </a:pPr>
-            <a:r>
-              <a:rPr lang="en-US" sz="1400" dirty="0"/>
-              <a:t>Attachments: mower deck, snow plow, snow blower, snow broom, aerators, thatchers, material collection systems, utility carts, spreaders</a:t>
-            </a:r>
-            <a:endParaRPr lang="en-US" sz="1400" dirty="0">
-              <a:hlinkClick r:id="rId2"/>
-            </a:endParaRPr>
-          </a:p>
-          <a:p>
-            <a:pPr marL="285750" indent="-285750">
-              <a:buFont typeface="Courier New" panose="02070309020205020404" pitchFamily="49" charset="0"/>
-              <a:buChar char="o"/>
-            </a:pPr>
-            <a:r>
-              <a:rPr lang="en-US" sz="1400" dirty="0">
-                <a:hlinkClick r:id="rId2"/>
-              </a:rPr>
-              <a:t>https://www.youtube.com/watch?v=ymtZBvOIQdw</a:t>
-            </a:r>
-            <a:endParaRPr lang="en-US" sz="1400" dirty="0"/>
-          </a:p>
-          <a:p>
-            <a:pPr marL="285750" indent="-285750">
-              <a:buFont typeface="Courier New" panose="02070309020205020404" pitchFamily="49" charset="0"/>
-              <a:buChar char="o"/>
-            </a:pPr>
-            <a:r>
-              <a:rPr lang="en-US" sz="1400" dirty="0"/>
-              <a:t>54-inch mowing deck - shaft driven (no belt)</a:t>
-            </a:r>
-          </a:p>
-          <a:p>
-            <a:pPr marL="285750" indent="-285750">
-              <a:buFont typeface="Courier New" panose="02070309020205020404" pitchFamily="49" charset="0"/>
-              <a:buChar char="o"/>
-            </a:pPr>
-            <a:r>
-              <a:rPr lang="en-US" sz="1400" dirty="0"/>
-              <a:t>Power Flow Bagger System (3 bags)</a:t>
-            </a:r>
-          </a:p>
-          <a:p>
-            <a:pPr marL="285750" indent="-285750">
-              <a:buFont typeface="Courier New" panose="02070309020205020404" pitchFamily="49" charset="0"/>
-              <a:buChar char="o"/>
-            </a:pPr>
-            <a:r>
-              <a:rPr lang="en-US" sz="1400" dirty="0"/>
-              <a:t>Little Buck Loader (Aftermarket, front-mounted)</a:t>
-            </a:r>
-          </a:p>
-          <a:p>
-            <a:pPr marL="285750" indent="-285750">
-              <a:buFont typeface="Courier New" panose="02070309020205020404" pitchFamily="49" charset="0"/>
-              <a:buChar char="o"/>
-            </a:pPr>
-            <a:r>
-              <a:rPr lang="en-US" sz="1400" dirty="0"/>
-              <a:t>Grapple - mechanically controlled (closes when the bucket is curled and opens when tilted)</a:t>
-            </a:r>
-          </a:p>
-          <a:p>
-            <a:pPr marL="285750" indent="-285750">
-              <a:buFont typeface="Courier New" panose="02070309020205020404" pitchFamily="49" charset="0"/>
-              <a:buChar char="o"/>
-            </a:pPr>
-            <a:r>
-              <a:rPr lang="en-US" sz="1400" dirty="0"/>
-              <a:t>Piranha Bar - A jagged tooth bar bolted to the bucket edge to improve digging in dirt and rock</a:t>
-            </a:r>
-          </a:p>
-          <a:p>
-            <a:pPr marL="285750" indent="-285750">
-              <a:buFont typeface="Courier New" panose="02070309020205020404" pitchFamily="49" charset="0"/>
-              <a:buChar char="o"/>
-            </a:pPr>
-            <a:r>
-              <a:rPr lang="en-US" sz="1400" dirty="0"/>
-              <a:t>54-inch Blade (snow plowing or pushing dirt/leaves)</a:t>
-            </a:r>
-          </a:p>
-          <a:p>
-            <a:pPr marL="285750" indent="-285750">
-              <a:buFont typeface="Courier New" panose="02070309020205020404" pitchFamily="49" charset="0"/>
-              <a:buChar char="o"/>
-            </a:pPr>
-            <a:r>
-              <a:rPr lang="en-US" sz="1400" dirty="0"/>
-              <a:t>Click-and-Go System - a bracket system that allows for very fast switching of rear attachments</a:t>
-            </a:r>
-          </a:p>
-          <a:p>
-            <a:pPr marL="285750" indent="-285750">
-              <a:buFont typeface="Courier New" panose="02070309020205020404" pitchFamily="49" charset="0"/>
-              <a:buChar char="o"/>
-            </a:pPr>
-            <a:r>
-              <a:rPr lang="en-US" sz="1400" dirty="0"/>
-              <a:t> (like the bagger or weight brackets) without a full 3-point hitch</a:t>
-            </a:r>
-          </a:p>
-          <a:p>
-            <a:pPr marL="285750" indent="-285750">
-              <a:buFont typeface="Courier New" panose="02070309020205020404" pitchFamily="49" charset="0"/>
-              <a:buChar char="o"/>
-            </a:pPr>
-            <a:r>
-              <a:rPr lang="en-US" sz="1400" dirty="0"/>
-              <a:t>Weights - used on the rear for traction</a:t>
-            </a:r>
-          </a:p>
-          <a:p>
-            <a:pPr marL="285750" indent="-285750">
-              <a:buFont typeface="Courier New" panose="02070309020205020404" pitchFamily="49" charset="0"/>
-              <a:buChar char="o"/>
-            </a:pPr>
-            <a:r>
-              <a:rPr lang="en-US" sz="1400" dirty="0"/>
-              <a:t>Spreader - a 125lb electronic spreader for salt, seed, or fertilizer</a:t>
-            </a:r>
-          </a:p>
-          <a:p>
-            <a:pPr marL="285750" indent="-285750">
-              <a:buFont typeface="Courier New" panose="02070309020205020404" pitchFamily="49" charset="0"/>
-              <a:buChar char="o"/>
-            </a:pPr>
-            <a:endParaRPr lang="en-US" sz="1400" dirty="0"/>
-          </a:p>
-          <a:p>
-            <a:pPr marL="285750" indent="-285750">
-              <a:buFont typeface="Courier New" panose="02070309020205020404" pitchFamily="49" charset="0"/>
-              <a:buChar char="o"/>
-            </a:pPr>
-            <a:r>
-              <a:rPr lang="en-US" sz="1400" dirty="0"/>
-              <a:t>Tires - HDAP (Heavy-Duty All-Purpose) tires</a:t>
-            </a:r>
-          </a:p>
-          <a:p>
-            <a:pPr marL="285750" indent="-285750">
-              <a:buFont typeface="Courier New" panose="02070309020205020404" pitchFamily="49" charset="0"/>
-              <a:buChar char="o"/>
-            </a:pPr>
-            <a:r>
-              <a:rPr lang="en-US" sz="1400" dirty="0"/>
-              <a:t>Bulbs - change to LED (</a:t>
-            </a:r>
-            <a:r>
-              <a:rPr lang="en-US" sz="1400" dirty="0" err="1"/>
-              <a:t>ebay</a:t>
-            </a:r>
-            <a:r>
-              <a:rPr lang="en-US" sz="1400" dirty="0"/>
-              <a:t>)</a:t>
-            </a:r>
-          </a:p>
-          <a:p>
-            <a:pPr marL="285750" indent="-285750">
-              <a:buFont typeface="Courier New" panose="02070309020205020404" pitchFamily="49" charset="0"/>
-              <a:buChar char="o"/>
-            </a:pPr>
-            <a:r>
-              <a:rPr lang="en-US" sz="1400" dirty="0"/>
-              <a:t>The user "shimmed" the Implement Relief Valve to increase hydraulic pressure from roughly 1,000 PSI to 1,350 PSI to improve the lifting power of the loader</a:t>
-            </a:r>
-          </a:p>
-          <a:p>
-            <a:pPr marL="285750" indent="-285750">
-              <a:buFont typeface="Courier New" panose="02070309020205020404" pitchFamily="49" charset="0"/>
-              <a:buChar char="o"/>
-            </a:pPr>
-            <a:r>
-              <a:rPr lang="en-US" sz="1400" dirty="0"/>
-              <a:t>"</a:t>
-            </a:r>
-            <a:r>
-              <a:rPr lang="en-US" sz="1400" dirty="0" err="1"/>
-              <a:t>Autoconnect</a:t>
-            </a:r>
-            <a:r>
-              <a:rPr lang="en-US" sz="1400" dirty="0"/>
-              <a:t>" drive shaft for the deck is noisy and vibrate. Better swap it for a manual shaft connection for a smoother, quieter ride.</a:t>
-            </a:r>
-          </a:p>
-        </p:txBody>
-      </p:sp>
-      <p:pic>
-        <p:nvPicPr>
-          <p:cNvPr id="4" name="Picture 3">
-            <a:extLst>
-              <a:ext uri="{FF2B5EF4-FFF2-40B4-BE49-F238E27FC236}">
-                <a16:creationId xmlns:a16="http://schemas.microsoft.com/office/drawing/2014/main" id="{B42ACF02-2E18-B107-ECBC-A3BE9CACFC04}"/>
-              </a:ext>
-            </a:extLst>
-          </p:cNvPr>
-          <p:cNvPicPr>
-            <a:picLocks noChangeAspect="1"/>
-          </p:cNvPicPr>
-          <p:nvPr/>
-        </p:nvPicPr>
-        <p:blipFill>
-          <a:blip r:embed="rId3" cstate="email">
-            <a:extLst>
-              <a:ext uri="{28A0092B-C50C-407E-A947-70E740481C1C}">
-                <a14:useLocalDpi xmlns:a14="http://schemas.microsoft.com/office/drawing/2010/main"/>
-              </a:ext>
-            </a:extLst>
-          </a:blip>
-          <a:stretch>
-            <a:fillRect/>
-          </a:stretch>
-        </p:blipFill>
-        <p:spPr>
-          <a:xfrm>
-            <a:off x="5657850" y="261610"/>
-            <a:ext cx="5464920" cy="4374185"/>
-          </a:xfrm>
-          <a:prstGeom prst="rect">
-            <a:avLst/>
-          </a:prstGeom>
-          <a:ln>
-            <a:solidFill>
-              <a:srgbClr val="FF0000"/>
-            </a:solidFill>
-          </a:ln>
-        </p:spPr>
-      </p:pic>
-      <p:sp>
-        <p:nvSpPr>
-          <p:cNvPr id="3" name="TextBox 2">
-            <a:extLst>
-              <a:ext uri="{FF2B5EF4-FFF2-40B4-BE49-F238E27FC236}">
-                <a16:creationId xmlns:a16="http://schemas.microsoft.com/office/drawing/2014/main" id="{615BF802-DEE9-AC91-C7F2-89B574D2C872}"/>
-              </a:ext>
-            </a:extLst>
-          </p:cNvPr>
-          <p:cNvSpPr txBox="1"/>
-          <p:nvPr/>
-        </p:nvSpPr>
-        <p:spPr>
-          <a:xfrm>
-            <a:off x="7010402" y="4897405"/>
-            <a:ext cx="5181598" cy="954107"/>
-          </a:xfrm>
-          <a:prstGeom prst="rect">
-            <a:avLst/>
-          </a:prstGeom>
-          <a:noFill/>
-        </p:spPr>
-        <p:txBody>
-          <a:bodyPr wrap="square" rtlCol="0">
-            <a:spAutoFit/>
-          </a:bodyPr>
-          <a:lstStyle/>
-          <a:p>
-            <a:pPr marL="285750" indent="-285750">
-              <a:buFont typeface="Courier New" panose="02070309020205020404" pitchFamily="49" charset="0"/>
-              <a:buChar char="o"/>
-            </a:pPr>
-            <a:r>
-              <a:rPr lang="en-US" sz="1400" dirty="0"/>
-              <a:t>Note: It is possible to install the a CAT‑1 style hitch kit at the back. This will give ability to attach standard 3-point attachments, like a compact 3‑point log splitter powered by tractor’s hydraulics</a:t>
-            </a:r>
-          </a:p>
-        </p:txBody>
-      </p:sp>
-    </p:spTree>
-    <p:extLst>
-      <p:ext uri="{BB962C8B-B14F-4D97-AF65-F5344CB8AC3E}">
-        <p14:creationId xmlns:p14="http://schemas.microsoft.com/office/powerpoint/2010/main" val="1825921603"/>
-      </p:ext>
-    </p:extLst>
-  </p:cSld>
-  <p:clrMapOvr>
-    <a:masterClrMapping/>
-  </p:clrMapOvr>
-</p:sld>
-</file>
-
-<file path=ppt/slides/slide5.xml><?xml version="1.0" encoding="utf-8"?>
-<p:sld xmlns:a="http://schemas.openxmlformats.org/drawingml/2006/main" xmlns:r="http://schemas.openxmlformats.org/officeDocument/2006/relationships" xmlns:p="http://schemas.openxmlformats.org/presentationml/2006/main">
-  <p:cSld>
-    <p:spTree>
-      <p:nvGrpSpPr>
-        <p:cNvPr id="1" name="">
-          <a:extLst>
-            <a:ext uri="{FF2B5EF4-FFF2-40B4-BE49-F238E27FC236}">
-              <a16:creationId xmlns:a16="http://schemas.microsoft.com/office/drawing/2014/main" id="{74343D31-ECE5-9365-93A5-EADC75847418}"/>
-            </a:ext>
-          </a:extLst>
-        </p:cNvPr>
-        <p:cNvGrpSpPr/>
-        <p:nvPr/>
-      </p:nvGrpSpPr>
-      <p:grpSpPr>
-        <a:xfrm>
-          <a:off x="0" y="0"/>
-          <a:ext cx="0" cy="0"/>
-          <a:chOff x="0" y="0"/>
-          <a:chExt cx="0" cy="0"/>
-        </a:xfrm>
-      </p:grpSpPr>
-      <p:sp>
-        <p:nvSpPr>
-          <p:cNvPr id="2" name="TextBox 1">
-            <a:extLst>
-              <a:ext uri="{FF2B5EF4-FFF2-40B4-BE49-F238E27FC236}">
-                <a16:creationId xmlns:a16="http://schemas.microsoft.com/office/drawing/2014/main" id="{77D0C96E-112C-9AD5-4197-E7D6921D9754}"/>
-              </a:ext>
-            </a:extLst>
-          </p:cNvPr>
-          <p:cNvSpPr txBox="1"/>
-          <p:nvPr/>
-        </p:nvSpPr>
-        <p:spPr>
-          <a:xfrm>
-            <a:off x="-1" y="0"/>
-            <a:ext cx="6096001" cy="523220"/>
-          </a:xfrm>
-          <a:prstGeom prst="rect">
-            <a:avLst/>
-          </a:prstGeom>
-          <a:noFill/>
-        </p:spPr>
-        <p:txBody>
-          <a:bodyPr wrap="square" rtlCol="0">
-            <a:spAutoFit/>
-          </a:bodyPr>
-          <a:lstStyle/>
-          <a:p>
-            <a:r>
-              <a:rPr lang="en-US" sz="2800" b="1" dirty="0"/>
               <a:t>Little Buck Loader vs Little Bull Loader</a:t>
             </a:r>
           </a:p>
@@ -8062,13 +8610,7 @@
           <p:cNvGraphicFramePr>
             <a:graphicFrameLocks noGrp="1"/>
           </p:cNvGraphicFramePr>
-          <p:nvPr>
-            <p:extLst>
-              <p:ext uri="{D42A27DB-BD31-4B8C-83A1-F6EECF244321}">
-                <p14:modId xmlns:p14="http://schemas.microsoft.com/office/powerpoint/2010/main" val="364487740"/>
-              </p:ext>
-            </p:extLst>
-          </p:nvPr>
+          <p:nvPr/>
         </p:nvGraphicFramePr>
         <p:xfrm>
           <a:off x="3008487" y="3208887"/>
@@ -8655,7 +9197,793 @@
     </p:spTree>
     <p:extLst>
       <p:ext uri="{BB962C8B-B14F-4D97-AF65-F5344CB8AC3E}">
-        <p14:creationId xmlns:p14="http://schemas.microsoft.com/office/powerpoint/2010/main" val="981582040"/>
+        <p14:creationId xmlns:p14="http://schemas.microsoft.com/office/powerpoint/2010/main" val="1141024046"/>
+      </p:ext>
+    </p:extLst>
+  </p:cSld>
+  <p:clrMapOvr>
+    <a:masterClrMapping/>
+  </p:clrMapOvr>
+</p:sld>
+</file>
+
+<file path=ppt/slides/slide5.xml><?xml version="1.0" encoding="utf-8"?>
+<p:sld xmlns:a="http://schemas.openxmlformats.org/drawingml/2006/main" xmlns:r="http://schemas.openxmlformats.org/officeDocument/2006/relationships" xmlns:p="http://schemas.openxmlformats.org/presentationml/2006/main">
+  <p:cSld>
+    <p:spTree>
+      <p:nvGrpSpPr>
+        <p:cNvPr id="1" name="">
+          <a:extLst>
+            <a:ext uri="{FF2B5EF4-FFF2-40B4-BE49-F238E27FC236}">
+              <a16:creationId xmlns:a16="http://schemas.microsoft.com/office/drawing/2014/main" id="{874C337E-6D80-29E4-4D29-564B2D10C0CC}"/>
+            </a:ext>
+          </a:extLst>
+        </p:cNvPr>
+        <p:cNvGrpSpPr/>
+        <p:nvPr/>
+      </p:nvGrpSpPr>
+      <p:grpSpPr>
+        <a:xfrm>
+          <a:off x="0" y="0"/>
+          <a:ext cx="0" cy="0"/>
+          <a:chOff x="0" y="0"/>
+          <a:chExt cx="0" cy="0"/>
+        </a:xfrm>
+      </p:grpSpPr>
+      <p:sp>
+        <p:nvSpPr>
+          <p:cNvPr id="2" name="TextBox 1">
+            <a:extLst>
+              <a:ext uri="{FF2B5EF4-FFF2-40B4-BE49-F238E27FC236}">
+                <a16:creationId xmlns:a16="http://schemas.microsoft.com/office/drawing/2014/main" id="{ACD12671-C346-7C70-0F79-C9B56BF67EF4}"/>
+              </a:ext>
+            </a:extLst>
+          </p:cNvPr>
+          <p:cNvSpPr txBox="1"/>
+          <p:nvPr/>
+        </p:nvSpPr>
+        <p:spPr>
+          <a:xfrm>
+            <a:off x="-1" y="0"/>
+            <a:ext cx="6096001" cy="523220"/>
+          </a:xfrm>
+          <a:prstGeom prst="rect">
+            <a:avLst/>
+          </a:prstGeom>
+          <a:noFill/>
+        </p:spPr>
+        <p:txBody>
+          <a:bodyPr wrap="square" rtlCol="0">
+            <a:spAutoFit/>
+          </a:bodyPr>
+          <a:lstStyle/>
+          <a:p>
+            <a:r>
+              <a:rPr lang="en-US" sz="2800" b="1" dirty="0"/>
+              <a:t>Little Buck Loader  - valves</a:t>
+            </a:r>
+          </a:p>
+        </p:txBody>
+      </p:sp>
+      <p:sp>
+        <p:nvSpPr>
+          <p:cNvPr id="3" name="TextBox 2">
+            <a:extLst>
+              <a:ext uri="{FF2B5EF4-FFF2-40B4-BE49-F238E27FC236}">
+                <a16:creationId xmlns:a16="http://schemas.microsoft.com/office/drawing/2014/main" id="{4F59BE96-003E-9A65-A9EF-B1B68BC4FC58}"/>
+              </a:ext>
+            </a:extLst>
+          </p:cNvPr>
+          <p:cNvSpPr txBox="1"/>
+          <p:nvPr/>
+        </p:nvSpPr>
+        <p:spPr>
+          <a:xfrm>
+            <a:off x="230823" y="1815587"/>
+            <a:ext cx="3483514" cy="538609"/>
+          </a:xfrm>
+          <a:prstGeom prst="rect">
+            <a:avLst/>
+          </a:prstGeom>
+          <a:solidFill>
+            <a:schemeClr val="accent4">
+              <a:lumMod val="20000"/>
+              <a:lumOff val="80000"/>
+            </a:schemeClr>
+          </a:solidFill>
+          <a:ln>
+            <a:solidFill>
+              <a:srgbClr val="FF0000"/>
+            </a:solidFill>
+          </a:ln>
+        </p:spPr>
+        <p:txBody>
+          <a:bodyPr wrap="square" rtlCol="0">
+            <a:spAutoFit/>
+          </a:bodyPr>
+          <a:lstStyle/>
+          <a:p>
+            <a:r>
+              <a:rPr lang="en-US" sz="1100" dirty="0"/>
+              <a:t>MIA885144 - Pressure relief valve (transaxle) - $465.71</a:t>
+            </a:r>
+          </a:p>
+          <a:p>
+            <a:r>
+              <a:rPr lang="en-US" sz="900" dirty="0">
+                <a:hlinkClick r:id="rId2"/>
+              </a:rPr>
+              <a:t>https://shop.deere.com/us/product/MIA885144%3A-Pressure-Relief-Valve/p/MIA885144</a:t>
+            </a:r>
+            <a:endParaRPr lang="en-US" sz="900" dirty="0"/>
+          </a:p>
+        </p:txBody>
+      </p:sp>
+      <p:pic>
+        <p:nvPicPr>
+          <p:cNvPr id="4" name="Picture 3">
+            <a:extLst>
+              <a:ext uri="{FF2B5EF4-FFF2-40B4-BE49-F238E27FC236}">
+                <a16:creationId xmlns:a16="http://schemas.microsoft.com/office/drawing/2014/main" id="{D31C8A9D-6A97-91F3-50F1-7EB96E0FBB77}"/>
+              </a:ext>
+            </a:extLst>
+          </p:cNvPr>
+          <p:cNvPicPr>
+            <a:picLocks noChangeAspect="1"/>
+          </p:cNvPicPr>
+          <p:nvPr/>
+        </p:nvPicPr>
+        <p:blipFill>
+          <a:blip r:embed="rId3" cstate="email">
+            <a:extLst>
+              <a:ext uri="{28A0092B-C50C-407E-A947-70E740481C1C}">
+                <a14:useLocalDpi xmlns:a14="http://schemas.microsoft.com/office/drawing/2010/main"/>
+              </a:ext>
+            </a:extLst>
+          </a:blip>
+          <a:stretch>
+            <a:fillRect/>
+          </a:stretch>
+        </p:blipFill>
+        <p:spPr>
+          <a:xfrm>
+            <a:off x="3866912" y="1440058"/>
+            <a:ext cx="824808" cy="488373"/>
+          </a:xfrm>
+          <a:prstGeom prst="rect">
+            <a:avLst/>
+          </a:prstGeom>
+        </p:spPr>
+      </p:pic>
+      <p:pic>
+        <p:nvPicPr>
+          <p:cNvPr id="6" name="Picture 5" descr="John Deere Flow Control Hyd. Valve ...">
+            <a:extLst>
+              <a:ext uri="{FF2B5EF4-FFF2-40B4-BE49-F238E27FC236}">
+                <a16:creationId xmlns:a16="http://schemas.microsoft.com/office/drawing/2014/main" id="{4D1212C0-6E1B-F85A-87E9-D20A2C152699}"/>
+              </a:ext>
+            </a:extLst>
+          </p:cNvPr>
+          <p:cNvPicPr>
+            <a:picLocks noChangeAspect="1"/>
+          </p:cNvPicPr>
+          <p:nvPr/>
+        </p:nvPicPr>
+        <p:blipFill>
+          <a:blip r:embed="rId4" cstate="email">
+            <a:extLst>
+              <a:ext uri="{28A0092B-C50C-407E-A947-70E740481C1C}">
+                <a14:useLocalDpi xmlns:a14="http://schemas.microsoft.com/office/drawing/2010/main"/>
+              </a:ext>
+            </a:extLst>
+          </a:blip>
+          <a:stretch>
+            <a:fillRect/>
+          </a:stretch>
+        </p:blipFill>
+        <p:spPr>
+          <a:xfrm>
+            <a:off x="3840277" y="273895"/>
+            <a:ext cx="1118585" cy="1118585"/>
+          </a:xfrm>
+          <a:prstGeom prst="rect">
+            <a:avLst/>
+          </a:prstGeom>
+        </p:spPr>
+      </p:pic>
+      <p:pic>
+        <p:nvPicPr>
+          <p:cNvPr id="8" name="Picture 7">
+            <a:extLst>
+              <a:ext uri="{FF2B5EF4-FFF2-40B4-BE49-F238E27FC236}">
+                <a16:creationId xmlns:a16="http://schemas.microsoft.com/office/drawing/2014/main" id="{2F17EC26-7058-81A1-B144-693A585A44DE}"/>
+              </a:ext>
+            </a:extLst>
+          </p:cNvPr>
+          <p:cNvPicPr>
+            <a:picLocks noChangeAspect="1"/>
+          </p:cNvPicPr>
+          <p:nvPr/>
+        </p:nvPicPr>
+        <p:blipFill>
+          <a:blip r:embed="rId5" cstate="email">
+            <a:extLst>
+              <a:ext uri="{28A0092B-C50C-407E-A947-70E740481C1C}">
+                <a14:useLocalDpi xmlns:a14="http://schemas.microsoft.com/office/drawing/2010/main"/>
+              </a:ext>
+            </a:extLst>
+          </a:blip>
+          <a:stretch>
+            <a:fillRect/>
+          </a:stretch>
+        </p:blipFill>
+        <p:spPr>
+          <a:xfrm rot="16200000">
+            <a:off x="4655370" y="1237172"/>
+            <a:ext cx="609602" cy="2447373"/>
+          </a:xfrm>
+          <a:prstGeom prst="rect">
+            <a:avLst/>
+          </a:prstGeom>
+        </p:spPr>
+      </p:pic>
+      <p:sp>
+        <p:nvSpPr>
+          <p:cNvPr id="9" name="TextBox 8">
+            <a:extLst>
+              <a:ext uri="{FF2B5EF4-FFF2-40B4-BE49-F238E27FC236}">
+                <a16:creationId xmlns:a16="http://schemas.microsoft.com/office/drawing/2014/main" id="{7A4DBC42-94B8-9172-0159-3D94C09B2E86}"/>
+              </a:ext>
+            </a:extLst>
+          </p:cNvPr>
+          <p:cNvSpPr txBox="1"/>
+          <p:nvPr/>
+        </p:nvSpPr>
+        <p:spPr>
+          <a:xfrm>
+            <a:off x="230823" y="726949"/>
+            <a:ext cx="3490182" cy="523220"/>
+          </a:xfrm>
+          <a:prstGeom prst="rect">
+            <a:avLst/>
+          </a:prstGeom>
+          <a:solidFill>
+            <a:schemeClr val="accent4">
+              <a:lumMod val="20000"/>
+              <a:lumOff val="80000"/>
+            </a:schemeClr>
+          </a:solidFill>
+          <a:ln>
+            <a:solidFill>
+              <a:srgbClr val="FF0000"/>
+            </a:solidFill>
+          </a:ln>
+        </p:spPr>
+        <p:txBody>
+          <a:bodyPr wrap="square" rtlCol="0">
+            <a:spAutoFit/>
+          </a:bodyPr>
+          <a:lstStyle/>
+          <a:p>
+            <a:r>
+              <a:rPr lang="en-US" sz="1400" dirty="0"/>
+              <a:t>AM134625 - Flow control valve - $283.36</a:t>
+            </a:r>
+          </a:p>
+          <a:p>
+            <a:r>
+              <a:rPr lang="en-US" sz="1400" dirty="0"/>
+              <a:t>Close for mowing, open for using FL</a:t>
+            </a:r>
+          </a:p>
+        </p:txBody>
+      </p:sp>
+      <p:sp>
+        <p:nvSpPr>
+          <p:cNvPr id="10" name="TextBox 9">
+            <a:extLst>
+              <a:ext uri="{FF2B5EF4-FFF2-40B4-BE49-F238E27FC236}">
+                <a16:creationId xmlns:a16="http://schemas.microsoft.com/office/drawing/2014/main" id="{D46D2E68-5A4D-A5FF-E322-6DE8F16CA4C9}"/>
+              </a:ext>
+            </a:extLst>
+          </p:cNvPr>
+          <p:cNvSpPr txBox="1"/>
+          <p:nvPr/>
+        </p:nvSpPr>
+        <p:spPr>
+          <a:xfrm>
+            <a:off x="224155" y="1347480"/>
+            <a:ext cx="3490182" cy="307777"/>
+          </a:xfrm>
+          <a:prstGeom prst="rect">
+            <a:avLst/>
+          </a:prstGeom>
+          <a:solidFill>
+            <a:schemeClr val="accent4">
+              <a:lumMod val="20000"/>
+              <a:lumOff val="80000"/>
+            </a:schemeClr>
+          </a:solidFill>
+          <a:ln>
+            <a:solidFill>
+              <a:srgbClr val="FF0000"/>
+            </a:solidFill>
+          </a:ln>
+        </p:spPr>
+        <p:txBody>
+          <a:bodyPr wrap="square" rtlCol="0">
+            <a:spAutoFit/>
+          </a:bodyPr>
+          <a:lstStyle/>
+          <a:p>
+            <a:r>
+              <a:rPr lang="en-US" sz="1400" dirty="0"/>
+              <a:t>M146148 - neutral control rod - $50.73</a:t>
+            </a:r>
+          </a:p>
+        </p:txBody>
+      </p:sp>
+      <p:pic>
+        <p:nvPicPr>
+          <p:cNvPr id="11" name="Picture 10">
+            <a:extLst>
+              <a:ext uri="{FF2B5EF4-FFF2-40B4-BE49-F238E27FC236}">
+                <a16:creationId xmlns:a16="http://schemas.microsoft.com/office/drawing/2014/main" id="{249481BF-71E2-F93B-9FE5-401D660FE5DD}"/>
+              </a:ext>
+            </a:extLst>
+          </p:cNvPr>
+          <p:cNvPicPr>
+            <a:picLocks noChangeAspect="1"/>
+          </p:cNvPicPr>
+          <p:nvPr/>
+        </p:nvPicPr>
+        <p:blipFill>
+          <a:blip r:embed="rId6"/>
+          <a:stretch>
+            <a:fillRect/>
+          </a:stretch>
+        </p:blipFill>
+        <p:spPr>
+          <a:xfrm>
+            <a:off x="425449" y="2993286"/>
+            <a:ext cx="3923085" cy="2517234"/>
+          </a:xfrm>
+          <a:prstGeom prst="rect">
+            <a:avLst/>
+          </a:prstGeom>
+        </p:spPr>
+      </p:pic>
+      <p:pic>
+        <p:nvPicPr>
+          <p:cNvPr id="14" name="Picture 13">
+            <a:extLst>
+              <a:ext uri="{FF2B5EF4-FFF2-40B4-BE49-F238E27FC236}">
+                <a16:creationId xmlns:a16="http://schemas.microsoft.com/office/drawing/2014/main" id="{4AA656C1-E2E0-A882-C9A7-5F0616DFDEC0}"/>
+              </a:ext>
+            </a:extLst>
+          </p:cNvPr>
+          <p:cNvPicPr>
+            <a:picLocks noChangeAspect="1"/>
+          </p:cNvPicPr>
+          <p:nvPr/>
+        </p:nvPicPr>
+        <p:blipFill>
+          <a:blip r:embed="rId7"/>
+          <a:stretch>
+            <a:fillRect/>
+          </a:stretch>
+        </p:blipFill>
+        <p:spPr>
+          <a:xfrm>
+            <a:off x="4556151" y="3024581"/>
+            <a:ext cx="2329631" cy="1547419"/>
+          </a:xfrm>
+          <a:prstGeom prst="rect">
+            <a:avLst/>
+          </a:prstGeom>
+        </p:spPr>
+      </p:pic>
+      <p:sp>
+        <p:nvSpPr>
+          <p:cNvPr id="15" name="TextBox 14">
+            <a:extLst>
+              <a:ext uri="{FF2B5EF4-FFF2-40B4-BE49-F238E27FC236}">
+                <a16:creationId xmlns:a16="http://schemas.microsoft.com/office/drawing/2014/main" id="{744506F9-DD58-4679-3320-960486BE9929}"/>
+              </a:ext>
+            </a:extLst>
+          </p:cNvPr>
+          <p:cNvSpPr txBox="1"/>
+          <p:nvPr/>
+        </p:nvSpPr>
+        <p:spPr>
+          <a:xfrm>
+            <a:off x="447491" y="5838663"/>
+            <a:ext cx="3139771" cy="584775"/>
+          </a:xfrm>
+          <a:prstGeom prst="rect">
+            <a:avLst/>
+          </a:prstGeom>
+          <a:solidFill>
+            <a:schemeClr val="accent4">
+              <a:lumMod val="20000"/>
+              <a:lumOff val="80000"/>
+            </a:schemeClr>
+          </a:solidFill>
+          <a:ln>
+            <a:solidFill>
+              <a:srgbClr val="FF0000"/>
+            </a:solidFill>
+          </a:ln>
+        </p:spPr>
+        <p:txBody>
+          <a:bodyPr wrap="square" rtlCol="0">
+            <a:spAutoFit/>
+          </a:bodyPr>
+          <a:lstStyle/>
+          <a:p>
+            <a:r>
+              <a:rPr lang="en-US" sz="1600" b="1" dirty="0" err="1">
+                <a:latin typeface="Menlo" panose="020B0609030804020204" pitchFamily="49" charset="0"/>
+                <a:ea typeface="Menlo" panose="020B0609030804020204" pitchFamily="49" charset="0"/>
+                <a:cs typeface="Menlo" panose="020B0609030804020204" pitchFamily="49" charset="0"/>
+              </a:rPr>
+              <a:t>A_black</a:t>
+            </a:r>
+            <a:r>
+              <a:rPr lang="en-US" sz="1600" b="1" dirty="0">
+                <a:latin typeface="Menlo" panose="020B0609030804020204" pitchFamily="49" charset="0"/>
+                <a:ea typeface="Menlo" panose="020B0609030804020204" pitchFamily="49" charset="0"/>
+                <a:cs typeface="Menlo" panose="020B0609030804020204" pitchFamily="49" charset="0"/>
+              </a:rPr>
+              <a:t>   </a:t>
+            </a:r>
+            <a:r>
+              <a:rPr lang="en-US" sz="1600" b="1" dirty="0" err="1">
+                <a:latin typeface="Menlo" panose="020B0609030804020204" pitchFamily="49" charset="0"/>
+                <a:ea typeface="Menlo" panose="020B0609030804020204" pitchFamily="49" charset="0"/>
+                <a:cs typeface="Menlo" panose="020B0609030804020204" pitchFamily="49" charset="0"/>
+              </a:rPr>
+              <a:t>B_green</a:t>
+            </a:r>
+            <a:r>
+              <a:rPr lang="en-US" sz="1600" b="1" dirty="0">
+                <a:latin typeface="Menlo" panose="020B0609030804020204" pitchFamily="49" charset="0"/>
+                <a:ea typeface="Menlo" panose="020B0609030804020204" pitchFamily="49" charset="0"/>
+                <a:cs typeface="Menlo" panose="020B0609030804020204" pitchFamily="49" charset="0"/>
+              </a:rPr>
+              <a:t>  </a:t>
+            </a:r>
+            <a:r>
+              <a:rPr lang="en-US" sz="1200" b="1" dirty="0">
+                <a:latin typeface="Calibri" panose="020F0502020204030204" pitchFamily="34" charset="0"/>
+                <a:ea typeface="Menlo" panose="020B0609030804020204" pitchFamily="49" charset="0"/>
+                <a:cs typeface="Calibri" panose="020F0502020204030204" pitchFamily="34" charset="0"/>
+              </a:rPr>
+              <a:t> </a:t>
+            </a:r>
+            <a:r>
+              <a:rPr lang="en-US" sz="1200" dirty="0">
+                <a:latin typeface="Calibri" panose="020F0502020204030204" pitchFamily="34" charset="0"/>
+                <a:ea typeface="Menlo" panose="020B0609030804020204" pitchFamily="49" charset="0"/>
+                <a:cs typeface="Calibri" panose="020F0502020204030204" pitchFamily="34" charset="0"/>
+              </a:rPr>
+              <a:t>- raising</a:t>
+            </a:r>
+          </a:p>
+          <a:p>
+            <a:r>
+              <a:rPr lang="en-US" sz="1600" b="1" dirty="0" err="1">
+                <a:latin typeface="Menlo" panose="020B0609030804020204" pitchFamily="49" charset="0"/>
+                <a:ea typeface="Menlo" panose="020B0609030804020204" pitchFamily="49" charset="0"/>
+                <a:cs typeface="Menlo" panose="020B0609030804020204" pitchFamily="49" charset="0"/>
+              </a:rPr>
+              <a:t>D_Yellow</a:t>
+            </a:r>
+            <a:r>
+              <a:rPr lang="en-US" sz="1600" b="1" dirty="0">
+                <a:latin typeface="Menlo" panose="020B0609030804020204" pitchFamily="49" charset="0"/>
+                <a:ea typeface="Menlo" panose="020B0609030804020204" pitchFamily="49" charset="0"/>
+                <a:cs typeface="Menlo" panose="020B0609030804020204" pitchFamily="49" charset="0"/>
+              </a:rPr>
+              <a:t>  </a:t>
+            </a:r>
+            <a:r>
+              <a:rPr lang="en-US" sz="1600" b="1" dirty="0" err="1">
+                <a:latin typeface="Menlo" panose="020B0609030804020204" pitchFamily="49" charset="0"/>
+                <a:ea typeface="Menlo" panose="020B0609030804020204" pitchFamily="49" charset="0"/>
+                <a:cs typeface="Menlo" panose="020B0609030804020204" pitchFamily="49" charset="0"/>
+              </a:rPr>
+              <a:t>E_silver</a:t>
+            </a:r>
+            <a:r>
+              <a:rPr lang="en-US" sz="1200" dirty="0">
+                <a:latin typeface="Calibri" panose="020F0502020204030204" pitchFamily="34" charset="0"/>
+                <a:ea typeface="Menlo" panose="020B0609030804020204" pitchFamily="49" charset="0"/>
+                <a:cs typeface="Calibri" panose="020F0502020204030204" pitchFamily="34" charset="0"/>
+              </a:rPr>
+              <a:t>    - tilting</a:t>
+            </a:r>
+          </a:p>
+        </p:txBody>
+      </p:sp>
+      <p:sp>
+        <p:nvSpPr>
+          <p:cNvPr id="16" name="TextBox 15">
+            <a:extLst>
+              <a:ext uri="{FF2B5EF4-FFF2-40B4-BE49-F238E27FC236}">
+                <a16:creationId xmlns:a16="http://schemas.microsoft.com/office/drawing/2014/main" id="{F61AD6D4-42FB-DBA5-985D-5B70FFC697FF}"/>
+              </a:ext>
+            </a:extLst>
+          </p:cNvPr>
+          <p:cNvSpPr txBox="1"/>
+          <p:nvPr/>
+        </p:nvSpPr>
+        <p:spPr>
+          <a:xfrm>
+            <a:off x="7561284" y="153593"/>
+            <a:ext cx="4485450" cy="3508653"/>
+          </a:xfrm>
+          <a:prstGeom prst="rect">
+            <a:avLst/>
+          </a:prstGeom>
+          <a:solidFill>
+            <a:schemeClr val="accent4">
+              <a:lumMod val="20000"/>
+              <a:lumOff val="80000"/>
+            </a:schemeClr>
+          </a:solidFill>
+          <a:ln>
+            <a:solidFill>
+              <a:srgbClr val="FF0000"/>
+            </a:solidFill>
+          </a:ln>
+        </p:spPr>
+        <p:txBody>
+          <a:bodyPr wrap="square" rtlCol="0">
+            <a:spAutoFit/>
+          </a:bodyPr>
+          <a:lstStyle/>
+          <a:p>
+            <a:r>
+              <a:rPr lang="en-US" sz="1400" b="1" dirty="0">
+                <a:solidFill>
+                  <a:srgbClr val="FF0000"/>
+                </a:solidFill>
+              </a:rPr>
+              <a:t>AM134625 valve use:</a:t>
+            </a:r>
+          </a:p>
+          <a:p>
+            <a:pPr marL="120650" indent="-120650">
+              <a:buFont typeface="Arial" panose="020B0604020202020204" pitchFamily="34" charset="0"/>
+              <a:buChar char="•"/>
+            </a:pPr>
+            <a:r>
+              <a:rPr lang="en-US" sz="1400" dirty="0"/>
+              <a:t>shut it off when using Front Loader so that oil doesn't go to mowing deck and rear. This makes FL tilt faster.</a:t>
+            </a:r>
+          </a:p>
+          <a:p>
+            <a:pPr marL="120650" indent="-120650">
+              <a:buFont typeface="Arial" panose="020B0604020202020204" pitchFamily="34" charset="0"/>
+              <a:buChar char="•"/>
+            </a:pPr>
+            <a:r>
+              <a:rPr lang="en-US" sz="1400" dirty="0"/>
+              <a:t>open it – then oil will go to the rear – and thus the Front Loader tilt will be slower</a:t>
+            </a:r>
+          </a:p>
+          <a:p>
+            <a:endParaRPr lang="en-US" sz="1400" dirty="0"/>
+          </a:p>
+          <a:p>
+            <a:r>
+              <a:rPr lang="en-US" sz="1400" b="1" dirty="0">
+                <a:solidFill>
+                  <a:srgbClr val="FF0000"/>
+                </a:solidFill>
+              </a:rPr>
+              <a:t>AM134625 installation instructions:</a:t>
+            </a:r>
+          </a:p>
+          <a:p>
+            <a:pPr marL="171450" indent="-171450">
+              <a:buFont typeface="Arial" panose="020B0604020202020204" pitchFamily="34" charset="0"/>
+              <a:buChar char="•"/>
+            </a:pPr>
+            <a:r>
+              <a:rPr lang="en-US" sz="1000" dirty="0">
+                <a:hlinkClick r:id="rId8"/>
+              </a:rPr>
+              <a:t>https://www.tractorbynet.com/forums/threads/x700-series-hydraulic-lock-out-valve-am134625-installation.228998/</a:t>
+            </a:r>
+            <a:endParaRPr lang="en-US" sz="1000" dirty="0"/>
+          </a:p>
+          <a:p>
+            <a:pPr marL="171450" indent="-171450">
+              <a:buFont typeface="Arial" panose="020B0604020202020204" pitchFamily="34" charset="0"/>
+              <a:buChar char="•"/>
+            </a:pPr>
+            <a:r>
+              <a:rPr lang="en-US" sz="1000" dirty="0">
+                <a:hlinkClick r:id="rId9"/>
+              </a:rPr>
+              <a:t>https://www.youtube.com/watch?v=EIQnRFgVMG0</a:t>
+            </a:r>
+            <a:endParaRPr lang="en-US" sz="1000" dirty="0"/>
+          </a:p>
+          <a:p>
+            <a:pPr marL="171450" indent="-171450">
+              <a:buFont typeface="Arial" panose="020B0604020202020204" pitchFamily="34" charset="0"/>
+              <a:buChar char="•"/>
+            </a:pPr>
+            <a:r>
+              <a:rPr lang="en-US" sz="1000" dirty="0">
+                <a:hlinkClick r:id="rId10"/>
+              </a:rPr>
+              <a:t>https://www.youtube.com/watch?v=iv3qfw-JJZk</a:t>
+            </a:r>
+            <a:endParaRPr lang="en-US" sz="1000" dirty="0"/>
+          </a:p>
+          <a:p>
+            <a:endParaRPr lang="en-US" sz="1400" dirty="0"/>
+          </a:p>
+          <a:p>
+            <a:r>
+              <a:rPr lang="en-US" sz="1400" dirty="0"/>
+              <a:t>The valve is installed right behind the 4 hydraulic ports on the right side. Specifically, behind the yellow hydraulic connector. </a:t>
+            </a:r>
+          </a:p>
+          <a:p>
+            <a:r>
+              <a:rPr lang="en-US" sz="1400" dirty="0"/>
+              <a:t>Installation requires removal of one elbow connector - and substituting it by the valve.</a:t>
+            </a:r>
+          </a:p>
+        </p:txBody>
+      </p:sp>
+      <p:pic>
+        <p:nvPicPr>
+          <p:cNvPr id="17" name="Picture 16" descr="DSC00481.JPG">
+            <a:extLst>
+              <a:ext uri="{FF2B5EF4-FFF2-40B4-BE49-F238E27FC236}">
+                <a16:creationId xmlns:a16="http://schemas.microsoft.com/office/drawing/2014/main" id="{96B6640C-BF44-B564-2FFB-F783331F0827}"/>
+              </a:ext>
+            </a:extLst>
+          </p:cNvPr>
+          <p:cNvPicPr>
+            <a:picLocks noChangeAspect="1"/>
+          </p:cNvPicPr>
+          <p:nvPr/>
+        </p:nvPicPr>
+        <p:blipFill>
+          <a:blip r:embed="rId11"/>
+          <a:stretch>
+            <a:fillRect/>
+          </a:stretch>
+        </p:blipFill>
+        <p:spPr>
+          <a:xfrm>
+            <a:off x="4556151" y="4665161"/>
+            <a:ext cx="2329630" cy="1553087"/>
+          </a:xfrm>
+          <a:prstGeom prst="rect">
+            <a:avLst/>
+          </a:prstGeom>
+        </p:spPr>
+      </p:pic>
+      <p:pic>
+        <p:nvPicPr>
+          <p:cNvPr id="18" name="Picture 17" descr="DSC00477.JPG">
+            <a:extLst>
+              <a:ext uri="{FF2B5EF4-FFF2-40B4-BE49-F238E27FC236}">
+                <a16:creationId xmlns:a16="http://schemas.microsoft.com/office/drawing/2014/main" id="{F4832ADD-42E9-D40D-6BE1-463C3772D19D}"/>
+              </a:ext>
+            </a:extLst>
+          </p:cNvPr>
+          <p:cNvPicPr>
+            <a:picLocks noChangeAspect="1"/>
+          </p:cNvPicPr>
+          <p:nvPr/>
+        </p:nvPicPr>
+        <p:blipFill>
+          <a:blip r:embed="rId12"/>
+          <a:srcRect l="20466"/>
+          <a:stretch>
+            <a:fillRect/>
+          </a:stretch>
+        </p:blipFill>
+        <p:spPr>
+          <a:xfrm rot="5400000" flipV="1">
+            <a:off x="10440899" y="5209512"/>
+            <a:ext cx="1696946" cy="1343610"/>
+          </a:xfrm>
+          <a:prstGeom prst="rect">
+            <a:avLst/>
+          </a:prstGeom>
+        </p:spPr>
+      </p:pic>
+      <p:pic>
+        <p:nvPicPr>
+          <p:cNvPr id="19" name="Picture 18" descr="John Deere Flow Control Hyd. Valve ...">
+            <a:extLst>
+              <a:ext uri="{FF2B5EF4-FFF2-40B4-BE49-F238E27FC236}">
+                <a16:creationId xmlns:a16="http://schemas.microsoft.com/office/drawing/2014/main" id="{3F9FBACD-0BCB-84DB-F385-7DBCC2FD5FEE}"/>
+              </a:ext>
+            </a:extLst>
+          </p:cNvPr>
+          <p:cNvPicPr>
+            <a:picLocks noChangeAspect="1"/>
+          </p:cNvPicPr>
+          <p:nvPr/>
+        </p:nvPicPr>
+        <p:blipFill>
+          <a:blip r:embed="rId13"/>
+          <a:srcRect t="3838" b="9836"/>
+          <a:stretch>
+            <a:fillRect/>
+          </a:stretch>
+        </p:blipFill>
+        <p:spPr>
+          <a:xfrm flipH="1">
+            <a:off x="7401330" y="4906108"/>
+            <a:ext cx="2131575" cy="1823682"/>
+          </a:xfrm>
+          <a:prstGeom prst="rect">
+            <a:avLst/>
+          </a:prstGeom>
+        </p:spPr>
+      </p:pic>
+      <p:sp>
+        <p:nvSpPr>
+          <p:cNvPr id="20" name="Right Arrow 19">
+            <a:extLst>
+              <a:ext uri="{FF2B5EF4-FFF2-40B4-BE49-F238E27FC236}">
+                <a16:creationId xmlns:a16="http://schemas.microsoft.com/office/drawing/2014/main" id="{E27E4B30-BB5E-86B5-A3C3-92B2D99CFA80}"/>
+              </a:ext>
+            </a:extLst>
+          </p:cNvPr>
+          <p:cNvSpPr/>
+          <p:nvPr/>
+        </p:nvSpPr>
+        <p:spPr>
+          <a:xfrm rot="10800000">
+            <a:off x="9601200" y="5881317"/>
+            <a:ext cx="826477" cy="396960"/>
+          </a:xfrm>
+          <a:prstGeom prst="rightArrow">
+            <a:avLst/>
+          </a:prstGeom>
+        </p:spPr>
+        <p:style>
+          <a:lnRef idx="2">
+            <a:schemeClr val="accent1">
+              <a:shade val="15000"/>
+            </a:schemeClr>
+          </a:lnRef>
+          <a:fillRef idx="1">
+            <a:schemeClr val="accent1"/>
+          </a:fillRef>
+          <a:effectRef idx="0">
+            <a:schemeClr val="accent1"/>
+          </a:effectRef>
+          <a:fontRef idx="minor">
+            <a:schemeClr val="lt1"/>
+          </a:fontRef>
+        </p:style>
+        <p:txBody>
+          <a:bodyPr rtlCol="0" anchor="ctr"/>
+          <a:lstStyle/>
+          <a:p>
+            <a:pPr algn="ctr"/>
+            <a:endParaRPr lang="en-US"/>
+          </a:p>
+        </p:txBody>
+      </p:sp>
+    </p:spTree>
+    <p:extLst>
+      <p:ext uri="{BB962C8B-B14F-4D97-AF65-F5344CB8AC3E}">
+        <p14:creationId xmlns:p14="http://schemas.microsoft.com/office/powerpoint/2010/main" val="895755368"/>
       </p:ext>
     </p:extLst>
   </p:cSld>
@@ -8738,7 +10066,7 @@
         <p:spPr>
           <a:xfrm>
             <a:off x="6079066" y="209097"/>
-            <a:ext cx="5925483" cy="3539430"/>
+            <a:ext cx="5925483" cy="5693866"/>
           </a:xfrm>
           <a:prstGeom prst="rect">
             <a:avLst/>
@@ -8792,25 +10120,73 @@
           <a:p>
             <a:r>
               <a:rPr lang="en-US" sz="1400" dirty="0"/>
-              <a:t>Snowblower Lights; Chute Actuator (up/down);Chute Rotator (more turning);</a:t>
+              <a:t>Snowblower Lights; </a:t>
             </a:r>
           </a:p>
           <a:p>
             <a:r>
               <a:rPr lang="en-US" sz="1400" dirty="0"/>
-              <a:t>Enclosed Chain for impeller; Rubber extensions for impeller; </a:t>
+              <a:t>Chute Actuator (up/down);</a:t>
             </a:r>
           </a:p>
           <a:p>
             <a:r>
               <a:rPr lang="en-US" sz="1400" dirty="0"/>
-              <a:t>Seat Cover; Seat Heaters; Heated Vest Plug; Steering Wheel Ball (spinner);</a:t>
+              <a:t>Chute Rotator (more turning);</a:t>
             </a:r>
           </a:p>
           <a:p>
             <a:r>
               <a:rPr lang="en-US" sz="1400" dirty="0"/>
-              <a:t>LED Headlights; LED Rear Lights; Dash Light; </a:t>
+              <a:t>Enclosed Chain for impeller; </a:t>
+            </a:r>
+          </a:p>
+          <a:p>
+            <a:r>
+              <a:rPr lang="en-US" sz="1400" dirty="0"/>
+              <a:t>Rubber extensions for impeller; </a:t>
+            </a:r>
+          </a:p>
+          <a:p>
+            <a:r>
+              <a:rPr lang="en-US" sz="1400" dirty="0"/>
+              <a:t>Seat Cover; </a:t>
+            </a:r>
+          </a:p>
+          <a:p>
+            <a:r>
+              <a:rPr lang="en-US" sz="1400" dirty="0"/>
+              <a:t>Seat Heaters; </a:t>
+            </a:r>
+          </a:p>
+          <a:p>
+            <a:r>
+              <a:rPr lang="en-US" sz="1400" dirty="0"/>
+              <a:t>Heated Vest Plug; </a:t>
+            </a:r>
+          </a:p>
+          <a:p>
+            <a:r>
+              <a:rPr lang="en-US" sz="1400" dirty="0"/>
+              <a:t>Steering Wheel Ball (spinner);</a:t>
+            </a:r>
+          </a:p>
+          <a:p>
+            <a:r>
+              <a:rPr lang="en-US" sz="1400" dirty="0"/>
+              <a:t>LED Headlights; </a:t>
+            </a:r>
+          </a:p>
+          <a:p>
+            <a:r>
+              <a:rPr lang="en-US" sz="1400" dirty="0"/>
+              <a:t>LED Rear Lights; </a:t>
+            </a:r>
+          </a:p>
+          <a:p>
+            <a:r>
+              <a:rPr lang="en-US" sz="1400" dirty="0"/>
+              <a:t>Dash Light; </a:t>
             </a:r>
           </a:p>
           <a:p>
@@ -8828,7 +10204,39 @@
           <a:p>
             <a:r>
               <a:rPr lang="en-US" sz="1400" dirty="0"/>
-              <a:t>Hazard Lights; Pattern-Changing Hazard Switch; USB Output &amp; Voltmeter showing battery voltage; Toolbox Handle; Secondary Alternator (to handle electrical load of lights and heaters)</a:t>
+              <a:t>Hazard Lights; </a:t>
+            </a:r>
+          </a:p>
+          <a:p>
+            <a:r>
+              <a:rPr lang="en-US" sz="1400" dirty="0"/>
+              <a:t>Pattern-Changing Hazard Switch; </a:t>
+            </a:r>
+          </a:p>
+          <a:p>
+            <a:r>
+              <a:rPr lang="en-US" sz="1400" dirty="0"/>
+              <a:t>USB Output &amp; Voltmeter showing battery voltage</a:t>
+            </a:r>
+            <a:r>
+              <a:rPr lang="en-US" sz="1400"/>
+              <a:t>; </a:t>
+            </a:r>
+          </a:p>
+          <a:p>
+            <a:r>
+              <a:rPr lang="en-US" sz="1400"/>
+              <a:t>Toolbox </a:t>
+            </a:r>
+            <a:r>
+              <a:rPr lang="en-US" sz="1400" dirty="0"/>
+              <a:t>Handle; </a:t>
+            </a:r>
+          </a:p>
+          <a:p>
+            <a:r>
+              <a:rPr lang="en-US" sz="1400" dirty="0"/>
+              <a:t>Secondary Alternator (to handle electrical load of lights and heaters)</a:t>
             </a:r>
           </a:p>
           <a:p>
@@ -8968,7 +10376,7 @@
     </p:spTree>
     <p:extLst>
       <p:ext uri="{BB962C8B-B14F-4D97-AF65-F5344CB8AC3E}">
-        <p14:creationId xmlns:p14="http://schemas.microsoft.com/office/powerpoint/2010/main" val="648698519"/>
+        <p14:creationId xmlns:p14="http://schemas.microsoft.com/office/powerpoint/2010/main" val="3802280698"/>
       </p:ext>
     </p:extLst>
   </p:cSld>
@@ -9510,7 +10918,7 @@
     </p:spTree>
     <p:extLst>
       <p:ext uri="{BB962C8B-B14F-4D97-AF65-F5344CB8AC3E}">
-        <p14:creationId xmlns:p14="http://schemas.microsoft.com/office/powerpoint/2010/main" val="1288276014"/>
+        <p14:creationId xmlns:p14="http://schemas.microsoft.com/office/powerpoint/2010/main" val="1065232430"/>
       </p:ext>
     </p:extLst>
   </p:cSld>
@@ -9986,7 +11394,7 @@
     </p:spTree>
     <p:extLst>
       <p:ext uri="{BB962C8B-B14F-4D97-AF65-F5344CB8AC3E}">
-        <p14:creationId xmlns:p14="http://schemas.microsoft.com/office/powerpoint/2010/main" val="3965094128"/>
+        <p14:creationId xmlns:p14="http://schemas.microsoft.com/office/powerpoint/2010/main" val="3269277156"/>
       </p:ext>
     </p:extLst>
   </p:cSld>
@@ -10004,7 +11412,7 @@
         <p:cNvPr id="1" name="">
           <a:extLst>
             <a:ext uri="{FF2B5EF4-FFF2-40B4-BE49-F238E27FC236}">
-              <a16:creationId xmlns:a16="http://schemas.microsoft.com/office/drawing/2014/main" id="{DB30550F-07AE-1CE7-20E3-2AA8BA6113CE}"/>
+              <a16:creationId xmlns:a16="http://schemas.microsoft.com/office/drawing/2014/main" id="{2D16B695-A4C0-BC53-15EF-81548A04F130}"/>
             </a:ext>
           </a:extLst>
         </p:cNvPr>
@@ -10024,7 +11432,7 @@
           <p:cNvPr id="2" name="TextBox 1">
             <a:extLst>
               <a:ext uri="{FF2B5EF4-FFF2-40B4-BE49-F238E27FC236}">
-                <a16:creationId xmlns:a16="http://schemas.microsoft.com/office/drawing/2014/main" id="{7CB81E7F-18BC-34A7-0606-71AF37FC41F0}"/>
+                <a16:creationId xmlns:a16="http://schemas.microsoft.com/office/drawing/2014/main" id="{A5F44891-376B-DAA0-385F-BE3EBBF84680}"/>
               </a:ext>
             </a:extLst>
           </p:cNvPr>
@@ -10033,8 +11441,8 @@
         </p:nvSpPr>
         <p:spPr>
           <a:xfrm>
-            <a:off x="0" y="0"/>
-            <a:ext cx="4793674" cy="954107"/>
+            <a:off x="-1" y="0"/>
+            <a:ext cx="4431253" cy="523220"/>
           </a:xfrm>
           <a:prstGeom prst="rect">
             <a:avLst/>
@@ -10049,17 +11457,17 @@
           <a:p>
             <a:r>
               <a:rPr lang="en-US" sz="2800" b="1" dirty="0"/>
-              <a:t>Heating Electric Charges, snow blowers, tractor</a:t>
-            </a:r>
-          </a:p>
-        </p:txBody>
-      </p:sp>
-      <p:sp>
-        <p:nvSpPr>
-          <p:cNvPr id="4" name="TextBox 3">
-            <a:extLst>
-              <a:ext uri="{FF2B5EF4-FFF2-40B4-BE49-F238E27FC236}">
-                <a16:creationId xmlns:a16="http://schemas.microsoft.com/office/drawing/2014/main" id="{A7454BCD-3F88-9905-117C-1AE825F6E254}"/>
+              <a:t>Bagger = Hopper</a:t>
+            </a:r>
+          </a:p>
+        </p:txBody>
+      </p:sp>
+      <p:sp>
+        <p:nvSpPr>
+          <p:cNvPr id="8" name="TextBox 7">
+            <a:extLst>
+              <a:ext uri="{FF2B5EF4-FFF2-40B4-BE49-F238E27FC236}">
+                <a16:creationId xmlns:a16="http://schemas.microsoft.com/office/drawing/2014/main" id="{E5EAD597-53B0-1A66-BAB2-6EA6A21F38F7}"/>
               </a:ext>
             </a:extLst>
           </p:cNvPr>
@@ -10068,8 +11476,8 @@
         </p:nvSpPr>
         <p:spPr>
           <a:xfrm>
-            <a:off x="170033" y="1230430"/>
-            <a:ext cx="4623641" cy="4832092"/>
+            <a:off x="164052" y="807468"/>
+            <a:ext cx="5506736" cy="2192908"/>
           </a:xfrm>
           <a:prstGeom prst="rect">
             <a:avLst/>
@@ -10087,7 +11495,34 @@
                 <a:latin typeface="Calibri" panose="020F0502020204030204" pitchFamily="34" charset="0"/>
                 <a:cs typeface="Calibri" panose="020F0502020204030204" pitchFamily="34" charset="0"/>
               </a:rPr>
-              <a:t>At cold weather electric charges have difficulty charging the batteries. And diesel tractor has difficulty starting.</a:t>
+              <a:t>I have a bagger with 2 bags.</a:t>
+            </a:r>
+          </a:p>
+          <a:p>
+            <a:r>
+              <a:rPr lang="en-US" sz="1400" dirty="0">
+                <a:latin typeface="Calibri" panose="020F0502020204030204" pitchFamily="34" charset="0"/>
+                <a:cs typeface="Calibri" panose="020F0502020204030204" pitchFamily="34" charset="0"/>
+              </a:rPr>
+              <a:t>It has an annoying problem.</a:t>
+            </a:r>
+          </a:p>
+          <a:p>
+            <a:r>
+              <a:rPr lang="en-US" sz="1400" dirty="0">
+                <a:latin typeface="Calibri" panose="020F0502020204030204" pitchFamily="34" charset="0"/>
+                <a:cs typeface="Calibri" panose="020F0502020204030204" pitchFamily="34" charset="0"/>
+              </a:rPr>
+              <a:t>It fills the left bag first &amp; only the over-flow goes to the right bag. </a:t>
+            </a:r>
+          </a:p>
+          <a:p>
+            <a:r>
+              <a:rPr lang="en-US" sz="1400" dirty="0">
+                <a:latin typeface="Calibri" panose="020F0502020204030204" pitchFamily="34" charset="0"/>
+                <a:cs typeface="Calibri" panose="020F0502020204030204" pitchFamily="34" charset="0"/>
+              </a:rPr>
+              <a:t>This makes the left bag  heavy while right bag is empty</a:t>
             </a:r>
           </a:p>
           <a:p>
@@ -10102,7 +11537,7 @@
                 <a:latin typeface="Calibri" panose="020F0502020204030204" pitchFamily="34" charset="0"/>
                 <a:cs typeface="Calibri" panose="020F0502020204030204" pitchFamily="34" charset="0"/>
               </a:rPr>
-              <a:t>Idea is to create an enclosure (12' x 6' x 6') </a:t>
+              <a:t>Easy fix – block part of the chute opening as shown.</a:t>
             </a:r>
           </a:p>
           <a:p>
@@ -10111,7 +11546,7 @@
                 <a:latin typeface="Calibri" panose="020F0502020204030204" pitchFamily="34" charset="0"/>
                 <a:cs typeface="Calibri" panose="020F0502020204030204" pitchFamily="34" charset="0"/>
               </a:rPr>
-              <a:t>and warm equipment inside it.</a:t>
+              <a:t>Two layers of duct tape facing each other, nothing is sticking to them.</a:t>
             </a:r>
           </a:p>
           <a:p>
@@ -10126,419 +11561,137 @@
                 <a:latin typeface="Calibri" panose="020F0502020204030204" pitchFamily="34" charset="0"/>
                 <a:cs typeface="Calibri" panose="020F0502020204030204" pitchFamily="34" charset="0"/>
               </a:rPr>
-              <a:t>This size is big enough (</a:t>
-            </a:r>
-            <a:r>
-              <a:rPr lang="en-US" sz="1400" dirty="0" err="1">
+              <a:t>The 2 bags now got filled up at similar speed. </a:t>
+            </a:r>
+          </a:p>
+          <a:p>
+            <a:r>
+              <a:rPr lang="en-US" sz="1050" dirty="0">
                 <a:latin typeface="Calibri" panose="020F0502020204030204" pitchFamily="34" charset="0"/>
                 <a:cs typeface="Calibri" panose="020F0502020204030204" pitchFamily="34" charset="0"/>
-              </a:rPr>
-              <a:t>approx</a:t>
-            </a:r>
-            <a:r>
-              <a:rPr lang="en-US" sz="1400" dirty="0">
-                <a:latin typeface="Calibri" panose="020F0502020204030204" pitchFamily="34" charset="0"/>
-                <a:cs typeface="Calibri" panose="020F0502020204030204" pitchFamily="34" charset="0"/>
-              </a:rPr>
-              <a:t> 4×2×2 meters) to fit a tractor with a snow blower. It can definitely fit a walk-behind snowblower and multiple electric chargers.</a:t>
-            </a:r>
-          </a:p>
-          <a:p>
-            <a:endParaRPr lang="en-US" sz="1400" dirty="0">
+                <a:hlinkClick r:id="rId2"/>
+              </a:rPr>
+              <a:t>https://www.facebook.com/groups/781254733349946/posts/803478744460878/</a:t>
+            </a:r>
+            <a:endParaRPr lang="en-US" sz="1050" dirty="0">
               <a:latin typeface="Calibri" panose="020F0502020204030204" pitchFamily="34" charset="0"/>
               <a:cs typeface="Calibri" panose="020F0502020204030204" pitchFamily="34" charset="0"/>
             </a:endParaRPr>
           </a:p>
-          <a:p>
-            <a:r>
-              <a:rPr lang="en-US" sz="1400" dirty="0">
-                <a:latin typeface="Calibri" panose="020F0502020204030204" pitchFamily="34" charset="0"/>
-                <a:cs typeface="Calibri" panose="020F0502020204030204" pitchFamily="34" charset="0"/>
-              </a:rPr>
-              <a:t>We can use a canopy, portable car shelter (garage) canopy, or a green house. </a:t>
-            </a:r>
-            <a:endParaRPr lang="en-US" sz="1400" dirty="0">
-              <a:latin typeface="fkGroteskNeue"/>
-            </a:endParaRPr>
-          </a:p>
-          <a:p>
-            <a:r>
-              <a:rPr lang="en-US" sz="1400" dirty="0">
-                <a:latin typeface="fkGroteskNeue"/>
-                <a:cs typeface="Calibri" panose="020F0502020204030204" pitchFamily="34" charset="0"/>
-              </a:rPr>
-              <a:t>Or create a DIY construction - </a:t>
-            </a:r>
-            <a:r>
-              <a:rPr lang="en-US" sz="1400" dirty="0">
-                <a:latin typeface="Calibri" panose="020F0502020204030204" pitchFamily="34" charset="0"/>
-                <a:cs typeface="Calibri" panose="020F0502020204030204" pitchFamily="34" charset="0"/>
-              </a:rPr>
-              <a:t>a light rectangular frame made of PVC tubes hanging above tractor, then hang tarp walls around the tractor (and put tarp on top)</a:t>
-            </a:r>
-          </a:p>
-          <a:p>
-            <a:endParaRPr lang="en-US" sz="1400" dirty="0">
-              <a:latin typeface="Calibri" panose="020F0502020204030204" pitchFamily="34" charset="0"/>
-              <a:cs typeface="Calibri" panose="020F0502020204030204" pitchFamily="34" charset="0"/>
-            </a:endParaRPr>
-          </a:p>
-          <a:p>
-            <a:r>
-              <a:rPr lang="en-US" sz="1400" dirty="0">
-                <a:latin typeface="Calibri" panose="020F0502020204030204" pitchFamily="34" charset="0"/>
-                <a:cs typeface="Calibri" panose="020F0502020204030204" pitchFamily="34" charset="0"/>
-              </a:rPr>
-              <a:t>Then push the hot air from a portable heater (with thermostat and overheat protection). </a:t>
-            </a:r>
-            <a:br>
-              <a:rPr lang="en-US" sz="1400" dirty="0">
-                <a:latin typeface="Calibri" panose="020F0502020204030204" pitchFamily="34" charset="0"/>
-                <a:cs typeface="Calibri" panose="020F0502020204030204" pitchFamily="34" charset="0"/>
-              </a:rPr>
-            </a:br>
-            <a:r>
-              <a:rPr lang="en-US" sz="1400" dirty="0">
-                <a:latin typeface="Calibri" panose="020F0502020204030204" pitchFamily="34" charset="0"/>
-                <a:cs typeface="Calibri" panose="020F0502020204030204" pitchFamily="34" charset="0"/>
-              </a:rPr>
-              <a:t>For example:</a:t>
-            </a:r>
-          </a:p>
-          <a:p>
-            <a:pPr marL="285750" indent="-285750">
-              <a:buFont typeface="Arial" panose="020B0604020202020204" pitchFamily="34" charset="0"/>
-              <a:buChar char="•"/>
-            </a:pPr>
-            <a:r>
-              <a:rPr lang="en-US" sz="1400" dirty="0">
-                <a:latin typeface="Calibri" panose="020F0502020204030204" pitchFamily="34" charset="0"/>
-                <a:cs typeface="Calibri" panose="020F0502020204030204" pitchFamily="34" charset="0"/>
-              </a:rPr>
-              <a:t>King Electric PSH1215T Portable Utility Heater</a:t>
-            </a:r>
-          </a:p>
-          <a:p>
-            <a:pPr marL="285750" indent="-285750">
-              <a:buFont typeface="Arial" panose="020B0604020202020204" pitchFamily="34" charset="0"/>
-              <a:buChar char="•"/>
-            </a:pPr>
-            <a:r>
-              <a:rPr lang="en-US" sz="1400" dirty="0" err="1">
-                <a:latin typeface="Calibri" panose="020F0502020204030204" pitchFamily="34" charset="0"/>
-                <a:cs typeface="Calibri" panose="020F0502020204030204" pitchFamily="34" charset="0"/>
-              </a:rPr>
-              <a:t>QMark</a:t>
-            </a:r>
-            <a:r>
-              <a:rPr lang="en-US" sz="1400" dirty="0">
-                <a:latin typeface="Calibri" panose="020F0502020204030204" pitchFamily="34" charset="0"/>
-                <a:cs typeface="Calibri" panose="020F0502020204030204" pitchFamily="34" charset="0"/>
-              </a:rPr>
-              <a:t> Portable Utility Heater (MMHD)</a:t>
-            </a:r>
-          </a:p>
-          <a:p>
-            <a:pPr marL="285750" indent="-285750">
-              <a:buFont typeface="Arial" panose="020B0604020202020204" pitchFamily="34" charset="0"/>
-              <a:buChar char="•"/>
-            </a:pPr>
-            <a:r>
-              <a:rPr lang="en-US" sz="1400" dirty="0">
-                <a:latin typeface="Calibri" panose="020F0502020204030204" pitchFamily="34" charset="0"/>
-                <a:cs typeface="Calibri" panose="020F0502020204030204" pitchFamily="34" charset="0"/>
-              </a:rPr>
-              <a:t>Lasko Ceramic Heater 754200 </a:t>
-            </a:r>
-          </a:p>
         </p:txBody>
       </p:sp>
       <p:pic>
         <p:nvPicPr>
-          <p:cNvPr id="5" name="Picture 2" descr="KING PSH1215T Yellow Jacket Portable Shop Heater w/Thermostat, 1500W / 120V">
-            <a:extLst>
-              <a:ext uri="{FF2B5EF4-FFF2-40B4-BE49-F238E27FC236}">
-                <a16:creationId xmlns:a16="http://schemas.microsoft.com/office/drawing/2014/main" id="{2EC226A0-6508-B8B4-B1D7-FDE48D14CD32}"/>
+          <p:cNvPr id="3" name="Picture 2">
+            <a:extLst>
+              <a:ext uri="{FF2B5EF4-FFF2-40B4-BE49-F238E27FC236}">
+                <a16:creationId xmlns:a16="http://schemas.microsoft.com/office/drawing/2014/main" id="{FAA518FD-7EE2-032F-1F24-036ACB62B912}"/>
               </a:ext>
             </a:extLst>
           </p:cNvPr>
           <p:cNvPicPr>
-            <a:picLocks noChangeAspect="1" noChangeArrowheads="1"/>
+            <a:picLocks noChangeAspect="1"/>
           </p:cNvPicPr>
           <p:nvPr/>
         </p:nvPicPr>
         <p:blipFill>
-          <a:blip r:embed="rId2" cstate="email">
+          <a:blip r:embed="rId3" cstate="email">
             <a:extLst>
               <a:ext uri="{28A0092B-C50C-407E-A947-70E740481C1C}">
                 <a14:useLocalDpi xmlns:a14="http://schemas.microsoft.com/office/drawing/2010/main"/>
               </a:ext>
             </a:extLst>
           </a:blip>
-          <a:srcRect/>
           <a:stretch>
             <a:fillRect/>
           </a:stretch>
         </p:blipFill>
-        <p:spPr bwMode="auto">
-          <a:xfrm>
-            <a:off x="5130250" y="4448905"/>
-            <a:ext cx="2549433" cy="2079381"/>
+        <p:spPr>
+          <a:xfrm>
+            <a:off x="9492343" y="149679"/>
+            <a:ext cx="2699657" cy="2616377"/>
           </a:xfrm>
           <a:prstGeom prst="rect">
             <a:avLst/>
           </a:prstGeom>
-          <a:noFill/>
-          <a:extLst>
-            <a:ext uri="{909E8E84-426E-40DD-AFC4-6F175D3DCCD1}">
-              <a14:hiddenFill xmlns:a14="http://schemas.microsoft.com/office/drawing/2010/main">
-                <a:solidFill>
-                  <a:srgbClr val="FFFFFF"/>
-                </a:solidFill>
-              </a14:hiddenFill>
-            </a:ext>
-          </a:extLst>
         </p:spPr>
       </p:pic>
       <p:pic>
         <p:nvPicPr>
-          <p:cNvPr id="6" name="Picture 4" descr="Lasko Desktop Electric Ceramic Space Heater with Adjustable Thermostat, 2 Heat Settings and Fan Only Mode, 9.2 Inches, Sil...">
-            <a:extLst>
-              <a:ext uri="{FF2B5EF4-FFF2-40B4-BE49-F238E27FC236}">
-                <a16:creationId xmlns:a16="http://schemas.microsoft.com/office/drawing/2014/main" id="{A4263724-4240-44D1-7A01-FFFDE1F5FEC4}"/>
+          <p:cNvPr id="4" name="Picture 3">
+            <a:extLst>
+              <a:ext uri="{FF2B5EF4-FFF2-40B4-BE49-F238E27FC236}">
+                <a16:creationId xmlns:a16="http://schemas.microsoft.com/office/drawing/2014/main" id="{F37986CB-6953-B8BE-0826-E958A8437145}"/>
               </a:ext>
             </a:extLst>
           </p:cNvPr>
           <p:cNvPicPr>
-            <a:picLocks noChangeAspect="1" noChangeArrowheads="1"/>
+            <a:picLocks noChangeAspect="1"/>
           </p:cNvPicPr>
           <p:nvPr/>
         </p:nvPicPr>
         <p:blipFill>
-          <a:blip r:embed="rId3" cstate="email">
+          <a:blip r:embed="rId4" cstate="email">
             <a:extLst>
               <a:ext uri="{28A0092B-C50C-407E-A947-70E740481C1C}">
                 <a14:useLocalDpi xmlns:a14="http://schemas.microsoft.com/office/drawing/2010/main"/>
               </a:ext>
             </a:extLst>
           </a:blip>
-          <a:srcRect/>
           <a:stretch>
             <a:fillRect/>
           </a:stretch>
         </p:blipFill>
-        <p:spPr bwMode="auto">
-          <a:xfrm>
-            <a:off x="10929662" y="4767015"/>
-            <a:ext cx="1019726" cy="1348398"/>
+        <p:spPr>
+          <a:xfrm>
+            <a:off x="9492342" y="3613391"/>
+            <a:ext cx="2699657" cy="2281997"/>
           </a:xfrm>
           <a:prstGeom prst="rect">
             <a:avLst/>
           </a:prstGeom>
-          <a:noFill/>
-          <a:extLst>
-            <a:ext uri="{909E8E84-426E-40DD-AFC4-6F175D3DCCD1}">
-              <a14:hiddenFill xmlns:a14="http://schemas.microsoft.com/office/drawing/2010/main">
-                <a:solidFill>
-                  <a:srgbClr val="FFFFFF"/>
-                </a:solidFill>
-              </a14:hiddenFill>
-            </a:ext>
-          </a:extLst>
         </p:spPr>
       </p:pic>
       <p:pic>
         <p:nvPicPr>
-          <p:cNvPr id="1030" name="Picture 6" descr="Qmark MMHD1502T Deluxe Portable Fan Forced Utility Heater - MMHD White Baked Enamel">
-            <a:extLst>
-              <a:ext uri="{FF2B5EF4-FFF2-40B4-BE49-F238E27FC236}">
-                <a16:creationId xmlns:a16="http://schemas.microsoft.com/office/drawing/2014/main" id="{EDF126DC-0177-B29A-43F9-D00DA4530583}"/>
+          <p:cNvPr id="5" name="Picture 4">
+            <a:extLst>
+              <a:ext uri="{FF2B5EF4-FFF2-40B4-BE49-F238E27FC236}">
+                <a16:creationId xmlns:a16="http://schemas.microsoft.com/office/drawing/2014/main" id="{65079173-F2C4-DB18-BDAD-0AEF787B154F}"/>
               </a:ext>
             </a:extLst>
           </p:cNvPr>
           <p:cNvPicPr>
-            <a:picLocks noChangeAspect="1" noChangeArrowheads="1"/>
+            <a:picLocks noChangeAspect="1"/>
           </p:cNvPicPr>
           <p:nvPr/>
         </p:nvPicPr>
         <p:blipFill>
-          <a:blip r:embed="rId4" cstate="email">
+          <a:blip r:embed="rId5" cstate="email">
             <a:extLst>
               <a:ext uri="{28A0092B-C50C-407E-A947-70E740481C1C}">
                 <a14:useLocalDpi xmlns:a14="http://schemas.microsoft.com/office/drawing/2010/main"/>
               </a:ext>
             </a:extLst>
           </a:blip>
-          <a:srcRect/>
           <a:stretch>
             <a:fillRect/>
           </a:stretch>
         </p:blipFill>
-        <p:spPr bwMode="auto">
-          <a:xfrm>
-            <a:off x="8539476" y="4091840"/>
-            <a:ext cx="1530393" cy="2436446"/>
+        <p:spPr>
+          <a:xfrm>
+            <a:off x="6909866" y="149679"/>
+            <a:ext cx="2374900" cy="2311400"/>
           </a:xfrm>
           <a:prstGeom prst="rect">
             <a:avLst/>
           </a:prstGeom>
-          <a:noFill/>
-          <a:extLst>
-            <a:ext uri="{909E8E84-426E-40DD-AFC4-6F175D3DCCD1}">
-              <a14:hiddenFill xmlns:a14="http://schemas.microsoft.com/office/drawing/2010/main">
-                <a:solidFill>
-                  <a:srgbClr val="FFFFFF"/>
-                </a:solidFill>
-              </a14:hiddenFill>
-            </a:ext>
-          </a:extLst>
-        </p:spPr>
-      </p:pic>
-      <p:pic>
-        <p:nvPicPr>
-          <p:cNvPr id="1026" name="Picture 2">
-            <a:extLst>
-              <a:ext uri="{FF2B5EF4-FFF2-40B4-BE49-F238E27FC236}">
-                <a16:creationId xmlns:a16="http://schemas.microsoft.com/office/drawing/2014/main" id="{2ED18D4B-5A66-5B97-2FB0-14C530943461}"/>
-              </a:ext>
-            </a:extLst>
-          </p:cNvPr>
-          <p:cNvPicPr>
-            <a:picLocks noChangeAspect="1" noChangeArrowheads="1"/>
-          </p:cNvPicPr>
-          <p:nvPr/>
-        </p:nvPicPr>
-        <p:blipFill>
-          <a:blip r:embed="rId5" cstate="email">
-            <a:extLst>
-              <a:ext uri="{28A0092B-C50C-407E-A947-70E740481C1C}">
-                <a14:useLocalDpi xmlns:a14="http://schemas.microsoft.com/office/drawing/2010/main"/>
-              </a:ext>
-            </a:extLst>
-          </a:blip>
-          <a:srcRect/>
-          <a:stretch>
-            <a:fillRect/>
-          </a:stretch>
-        </p:blipFill>
-        <p:spPr bwMode="auto">
-          <a:xfrm>
-            <a:off x="5586433" y="1230430"/>
-            <a:ext cx="2442235" cy="2418351"/>
-          </a:xfrm>
-          <a:prstGeom prst="rect">
-            <a:avLst/>
-          </a:prstGeom>
-          <a:noFill/>
-          <a:extLst>
-            <a:ext uri="{909E8E84-426E-40DD-AFC4-6F175D3DCCD1}">
-              <a14:hiddenFill xmlns:a14="http://schemas.microsoft.com/office/drawing/2010/main">
-                <a:solidFill>
-                  <a:srgbClr val="FFFFFF"/>
-                </a:solidFill>
-              </a14:hiddenFill>
-            </a:ext>
-          </a:extLst>
-        </p:spPr>
-      </p:pic>
-      <p:pic>
-        <p:nvPicPr>
-          <p:cNvPr id="1028" name="Picture 4">
-            <a:extLst>
-              <a:ext uri="{FF2B5EF4-FFF2-40B4-BE49-F238E27FC236}">
-                <a16:creationId xmlns:a16="http://schemas.microsoft.com/office/drawing/2014/main" id="{1F7F18C9-9C3A-AA1E-E455-724E4B9236E6}"/>
-              </a:ext>
-            </a:extLst>
-          </p:cNvPr>
-          <p:cNvPicPr>
-            <a:picLocks noChangeAspect="1" noChangeArrowheads="1"/>
-          </p:cNvPicPr>
-          <p:nvPr/>
-        </p:nvPicPr>
-        <p:blipFill rotWithShape="1">
-          <a:blip r:embed="rId6" cstate="email">
-            <a:extLst>
-              <a:ext uri="{28A0092B-C50C-407E-A947-70E740481C1C}">
-                <a14:useLocalDpi xmlns:a14="http://schemas.microsoft.com/office/drawing/2010/main"/>
-              </a:ext>
-            </a:extLst>
-          </a:blip>
-          <a:srcRect/>
-          <a:stretch>
-            <a:fillRect/>
-          </a:stretch>
-        </p:blipFill>
-        <p:spPr bwMode="auto">
-          <a:xfrm>
-            <a:off x="9507821" y="2417070"/>
-            <a:ext cx="2086789" cy="1011930"/>
-          </a:xfrm>
-          <a:prstGeom prst="rect">
-            <a:avLst/>
-          </a:prstGeom>
-          <a:noFill/>
-          <a:extLst>
-            <a:ext uri="{909E8E84-426E-40DD-AFC4-6F175D3DCCD1}">
-              <a14:hiddenFill xmlns:a14="http://schemas.microsoft.com/office/drawing/2010/main">
-                <a:solidFill>
-                  <a:srgbClr val="FFFFFF"/>
-                </a:solidFill>
-              </a14:hiddenFill>
-            </a:ext>
-          </a:extLst>
-        </p:spPr>
-      </p:pic>
-      <p:pic>
-        <p:nvPicPr>
-          <p:cNvPr id="9" name="Picture 6" descr="10x10 X7 Tectonic Canopy - Ultra ...">
-            <a:extLst>
-              <a:ext uri="{FF2B5EF4-FFF2-40B4-BE49-F238E27FC236}">
-                <a16:creationId xmlns:a16="http://schemas.microsoft.com/office/drawing/2014/main" id="{DC224871-106B-ED19-DEC9-83EC4D14455D}"/>
-              </a:ext>
-            </a:extLst>
-          </p:cNvPr>
-          <p:cNvPicPr>
-            <a:picLocks noChangeAspect="1" noChangeArrowheads="1"/>
-          </p:cNvPicPr>
-          <p:nvPr/>
-        </p:nvPicPr>
-        <p:blipFill rotWithShape="1">
-          <a:blip r:embed="rId7" cstate="email">
-            <a:extLst>
-              <a:ext uri="{28A0092B-C50C-407E-A947-70E740481C1C}">
-                <a14:useLocalDpi xmlns:a14="http://schemas.microsoft.com/office/drawing/2010/main"/>
-              </a:ext>
-            </a:extLst>
-          </a:blip>
-          <a:srcRect/>
-          <a:stretch>
-            <a:fillRect/>
-          </a:stretch>
-        </p:blipFill>
-        <p:spPr bwMode="auto">
-          <a:xfrm>
-            <a:off x="9176259" y="329714"/>
-            <a:ext cx="2418351" cy="1934308"/>
-          </a:xfrm>
-          <a:prstGeom prst="rect">
-            <a:avLst/>
-          </a:prstGeom>
-          <a:noFill/>
-          <a:extLst>
-            <a:ext uri="{909E8E84-426E-40DD-AFC4-6F175D3DCCD1}">
-              <a14:hiddenFill xmlns:a14="http://schemas.microsoft.com/office/drawing/2010/main">
-                <a:solidFill>
-                  <a:srgbClr val="FFFFFF"/>
-                </a:solidFill>
-              </a14:hiddenFill>
-            </a:ext>
-          </a:extLst>
         </p:spPr>
       </p:pic>
     </p:spTree>
     <p:extLst>
       <p:ext uri="{BB962C8B-B14F-4D97-AF65-F5344CB8AC3E}">
-        <p14:creationId xmlns:p14="http://schemas.microsoft.com/office/powerpoint/2010/main" val="179644997"/>
+        <p14:creationId xmlns:p14="http://schemas.microsoft.com/office/powerpoint/2010/main" val="1255854292"/>
       </p:ext>
     </p:extLst>
   </p:cSld>

--- a/tractor_jd_1025r_X758.pptx
+++ b/tractor_jd_1025r_X758.pptx
@@ -10,16 +10,17 @@
     <p:sldId id="266" r:id="rId4"/>
     <p:sldId id="270" r:id="rId5"/>
     <p:sldId id="274" r:id="rId6"/>
-    <p:sldId id="269" r:id="rId7"/>
-    <p:sldId id="261" r:id="rId8"/>
-    <p:sldId id="268" r:id="rId9"/>
-    <p:sldId id="271" r:id="rId10"/>
-    <p:sldId id="272" r:id="rId11"/>
-    <p:sldId id="267" r:id="rId12"/>
-    <p:sldId id="262" r:id="rId13"/>
-    <p:sldId id="258" r:id="rId14"/>
-    <p:sldId id="265" r:id="rId15"/>
-    <p:sldId id="263" r:id="rId16"/>
+    <p:sldId id="275" r:id="rId7"/>
+    <p:sldId id="269" r:id="rId8"/>
+    <p:sldId id="261" r:id="rId9"/>
+    <p:sldId id="268" r:id="rId10"/>
+    <p:sldId id="271" r:id="rId11"/>
+    <p:sldId id="272" r:id="rId12"/>
+    <p:sldId id="267" r:id="rId13"/>
+    <p:sldId id="262" r:id="rId14"/>
+    <p:sldId id="258" r:id="rId15"/>
+    <p:sldId id="265" r:id="rId16"/>
+    <p:sldId id="263" r:id="rId17"/>
   </p:sldIdLst>
   <p:sldSz cx="12192000" cy="6858000"/>
   <p:notesSz cx="6858000" cy="9144000"/>
@@ -272,7 +273,7 @@
           <a:lstStyle/>
           <a:p>
             <a:fld id="{16286276-9013-2A43-82D1-BA4685C95117}" type="datetimeFigureOut">
-              <a:t>6/17/26</a:t>
+              <a:t>6/18/26</a:t>
             </a:fld>
             <a:endParaRPr lang="en-US"/>
           </a:p>
@@ -468,7 +469,7 @@
           <a:lstStyle/>
           <a:p>
             <a:fld id="{16286276-9013-2A43-82D1-BA4685C95117}" type="datetimeFigureOut">
-              <a:t>6/17/26</a:t>
+              <a:t>6/18/26</a:t>
             </a:fld>
             <a:endParaRPr lang="en-US"/>
           </a:p>
@@ -674,7 +675,7 @@
           <a:lstStyle/>
           <a:p>
             <a:fld id="{16286276-9013-2A43-82D1-BA4685C95117}" type="datetimeFigureOut">
-              <a:t>6/17/26</a:t>
+              <a:t>6/18/26</a:t>
             </a:fld>
             <a:endParaRPr lang="en-US"/>
           </a:p>
@@ -870,7 +871,7 @@
           <a:lstStyle/>
           <a:p>
             <a:fld id="{16286276-9013-2A43-82D1-BA4685C95117}" type="datetimeFigureOut">
-              <a:t>6/17/26</a:t>
+              <a:t>6/18/26</a:t>
             </a:fld>
             <a:endParaRPr lang="en-US"/>
           </a:p>
@@ -1143,7 +1144,7 @@
           <a:lstStyle/>
           <a:p>
             <a:fld id="{16286276-9013-2A43-82D1-BA4685C95117}" type="datetimeFigureOut">
-              <a:t>6/17/26</a:t>
+              <a:t>6/18/26</a:t>
             </a:fld>
             <a:endParaRPr lang="en-US"/>
           </a:p>
@@ -1406,7 +1407,7 @@
           <a:lstStyle/>
           <a:p>
             <a:fld id="{16286276-9013-2A43-82D1-BA4685C95117}" type="datetimeFigureOut">
-              <a:t>6/17/26</a:t>
+              <a:t>6/18/26</a:t>
             </a:fld>
             <a:endParaRPr lang="en-US"/>
           </a:p>
@@ -1816,7 +1817,7 @@
           <a:lstStyle/>
           <a:p>
             <a:fld id="{16286276-9013-2A43-82D1-BA4685C95117}" type="datetimeFigureOut">
-              <a:t>6/17/26</a:t>
+              <a:t>6/18/26</a:t>
             </a:fld>
             <a:endParaRPr lang="en-US"/>
           </a:p>
@@ -1955,7 +1956,7 @@
           <a:lstStyle/>
           <a:p>
             <a:fld id="{16286276-9013-2A43-82D1-BA4685C95117}" type="datetimeFigureOut">
-              <a:t>6/17/26</a:t>
+              <a:t>6/18/26</a:t>
             </a:fld>
             <a:endParaRPr lang="en-US"/>
           </a:p>
@@ -2066,7 +2067,7 @@
           <a:lstStyle/>
           <a:p>
             <a:fld id="{16286276-9013-2A43-82D1-BA4685C95117}" type="datetimeFigureOut">
-              <a:t>6/17/26</a:t>
+              <a:t>6/18/26</a:t>
             </a:fld>
             <a:endParaRPr lang="en-US"/>
           </a:p>
@@ -2375,7 +2376,7 @@
           <a:lstStyle/>
           <a:p>
             <a:fld id="{16286276-9013-2A43-82D1-BA4685C95117}" type="datetimeFigureOut">
-              <a:t>6/17/26</a:t>
+              <a:t>6/18/26</a:t>
             </a:fld>
             <a:endParaRPr lang="en-US"/>
           </a:p>
@@ -2661,7 +2662,7 @@
           <a:lstStyle/>
           <a:p>
             <a:fld id="{16286276-9013-2A43-82D1-BA4685C95117}" type="datetimeFigureOut">
-              <a:t>6/17/26</a:t>
+              <a:t>6/18/26</a:t>
             </a:fld>
             <a:endParaRPr lang="en-US"/>
           </a:p>
@@ -2900,7 +2901,7 @@
           </a:lstStyle>
           <a:p>
             <a:fld id="{16286276-9013-2A43-82D1-BA4685C95117}" type="datetimeFigureOut">
-              <a:t>6/17/26</a:t>
+              <a:t>6/18/26</a:t>
             </a:fld>
             <a:endParaRPr lang="en-US"/>
           </a:p>
@@ -3598,6 +3599,303 @@
         <p:cNvPr id="1" name="">
           <a:extLst>
             <a:ext uri="{FF2B5EF4-FFF2-40B4-BE49-F238E27FC236}">
+              <a16:creationId xmlns:a16="http://schemas.microsoft.com/office/drawing/2014/main" id="{2D16B695-A4C0-BC53-15EF-81548A04F130}"/>
+            </a:ext>
+          </a:extLst>
+        </p:cNvPr>
+        <p:cNvGrpSpPr/>
+        <p:nvPr/>
+      </p:nvGrpSpPr>
+      <p:grpSpPr>
+        <a:xfrm>
+          <a:off x="0" y="0"/>
+          <a:ext cx="0" cy="0"/>
+          <a:chOff x="0" y="0"/>
+          <a:chExt cx="0" cy="0"/>
+        </a:xfrm>
+      </p:grpSpPr>
+      <p:sp>
+        <p:nvSpPr>
+          <p:cNvPr id="2" name="TextBox 1">
+            <a:extLst>
+              <a:ext uri="{FF2B5EF4-FFF2-40B4-BE49-F238E27FC236}">
+                <a16:creationId xmlns:a16="http://schemas.microsoft.com/office/drawing/2014/main" id="{A5F44891-376B-DAA0-385F-BE3EBBF84680}"/>
+              </a:ext>
+            </a:extLst>
+          </p:cNvPr>
+          <p:cNvSpPr txBox="1"/>
+          <p:nvPr/>
+        </p:nvSpPr>
+        <p:spPr>
+          <a:xfrm>
+            <a:off x="-1" y="0"/>
+            <a:ext cx="4431253" cy="523220"/>
+          </a:xfrm>
+          <a:prstGeom prst="rect">
+            <a:avLst/>
+          </a:prstGeom>
+          <a:noFill/>
+        </p:spPr>
+        <p:txBody>
+          <a:bodyPr wrap="square" rtlCol="0">
+            <a:spAutoFit/>
+          </a:bodyPr>
+          <a:lstStyle/>
+          <a:p>
+            <a:r>
+              <a:rPr lang="en-US" sz="2800" b="1" dirty="0"/>
+              <a:t>Bagger = Hopper</a:t>
+            </a:r>
+          </a:p>
+        </p:txBody>
+      </p:sp>
+      <p:sp>
+        <p:nvSpPr>
+          <p:cNvPr id="8" name="TextBox 7">
+            <a:extLst>
+              <a:ext uri="{FF2B5EF4-FFF2-40B4-BE49-F238E27FC236}">
+                <a16:creationId xmlns:a16="http://schemas.microsoft.com/office/drawing/2014/main" id="{E5EAD597-53B0-1A66-BAB2-6EA6A21F38F7}"/>
+              </a:ext>
+            </a:extLst>
+          </p:cNvPr>
+          <p:cNvSpPr txBox="1"/>
+          <p:nvPr/>
+        </p:nvSpPr>
+        <p:spPr>
+          <a:xfrm>
+            <a:off x="164052" y="807468"/>
+            <a:ext cx="5506736" cy="2192908"/>
+          </a:xfrm>
+          <a:prstGeom prst="rect">
+            <a:avLst/>
+          </a:prstGeom>
+          <a:noFill/>
+        </p:spPr>
+        <p:txBody>
+          <a:bodyPr wrap="square" rtlCol="0">
+            <a:spAutoFit/>
+          </a:bodyPr>
+          <a:lstStyle/>
+          <a:p>
+            <a:r>
+              <a:rPr lang="en-US" sz="1400" dirty="0">
+                <a:latin typeface="Calibri" panose="020F0502020204030204" pitchFamily="34" charset="0"/>
+                <a:cs typeface="Calibri" panose="020F0502020204030204" pitchFamily="34" charset="0"/>
+              </a:rPr>
+              <a:t>I have a bagger with 2 bags.</a:t>
+            </a:r>
+          </a:p>
+          <a:p>
+            <a:r>
+              <a:rPr lang="en-US" sz="1400" dirty="0">
+                <a:latin typeface="Calibri" panose="020F0502020204030204" pitchFamily="34" charset="0"/>
+                <a:cs typeface="Calibri" panose="020F0502020204030204" pitchFamily="34" charset="0"/>
+              </a:rPr>
+              <a:t>It has an annoying problem.</a:t>
+            </a:r>
+          </a:p>
+          <a:p>
+            <a:r>
+              <a:rPr lang="en-US" sz="1400" dirty="0">
+                <a:latin typeface="Calibri" panose="020F0502020204030204" pitchFamily="34" charset="0"/>
+                <a:cs typeface="Calibri" panose="020F0502020204030204" pitchFamily="34" charset="0"/>
+              </a:rPr>
+              <a:t>It fills the left bag first &amp; only the over-flow goes to the right bag. </a:t>
+            </a:r>
+          </a:p>
+          <a:p>
+            <a:r>
+              <a:rPr lang="en-US" sz="1400" dirty="0">
+                <a:latin typeface="Calibri" panose="020F0502020204030204" pitchFamily="34" charset="0"/>
+                <a:cs typeface="Calibri" panose="020F0502020204030204" pitchFamily="34" charset="0"/>
+              </a:rPr>
+              <a:t>This makes the left bag  heavy while right bag is empty</a:t>
+            </a:r>
+          </a:p>
+          <a:p>
+            <a:endParaRPr lang="en-US" sz="1400" dirty="0">
+              <a:latin typeface="Calibri" panose="020F0502020204030204" pitchFamily="34" charset="0"/>
+              <a:cs typeface="Calibri" panose="020F0502020204030204" pitchFamily="34" charset="0"/>
+            </a:endParaRPr>
+          </a:p>
+          <a:p>
+            <a:r>
+              <a:rPr lang="en-US" sz="1400" dirty="0">
+                <a:latin typeface="Calibri" panose="020F0502020204030204" pitchFamily="34" charset="0"/>
+                <a:cs typeface="Calibri" panose="020F0502020204030204" pitchFamily="34" charset="0"/>
+              </a:rPr>
+              <a:t>Easy fix – block part of the chute opening as shown.</a:t>
+            </a:r>
+          </a:p>
+          <a:p>
+            <a:r>
+              <a:rPr lang="en-US" sz="1400" dirty="0">
+                <a:latin typeface="Calibri" panose="020F0502020204030204" pitchFamily="34" charset="0"/>
+                <a:cs typeface="Calibri" panose="020F0502020204030204" pitchFamily="34" charset="0"/>
+              </a:rPr>
+              <a:t>Two layers of duct tape facing each other, nothing is sticking to them.</a:t>
+            </a:r>
+          </a:p>
+          <a:p>
+            <a:endParaRPr lang="en-US" sz="1400" dirty="0">
+              <a:latin typeface="Calibri" panose="020F0502020204030204" pitchFamily="34" charset="0"/>
+              <a:cs typeface="Calibri" panose="020F0502020204030204" pitchFamily="34" charset="0"/>
+            </a:endParaRPr>
+          </a:p>
+          <a:p>
+            <a:r>
+              <a:rPr lang="en-US" sz="1400" dirty="0">
+                <a:latin typeface="Calibri" panose="020F0502020204030204" pitchFamily="34" charset="0"/>
+                <a:cs typeface="Calibri" panose="020F0502020204030204" pitchFamily="34" charset="0"/>
+              </a:rPr>
+              <a:t>The 2 bags now got filled up at similar speed. </a:t>
+            </a:r>
+          </a:p>
+          <a:p>
+            <a:r>
+              <a:rPr lang="en-US" sz="1050" dirty="0">
+                <a:latin typeface="Calibri" panose="020F0502020204030204" pitchFamily="34" charset="0"/>
+                <a:cs typeface="Calibri" panose="020F0502020204030204" pitchFamily="34" charset="0"/>
+                <a:hlinkClick r:id="rId2"/>
+              </a:rPr>
+              <a:t>https://www.facebook.com/groups/781254733349946/posts/803478744460878/</a:t>
+            </a:r>
+            <a:endParaRPr lang="en-US" sz="1050" dirty="0">
+              <a:latin typeface="Calibri" panose="020F0502020204030204" pitchFamily="34" charset="0"/>
+              <a:cs typeface="Calibri" panose="020F0502020204030204" pitchFamily="34" charset="0"/>
+            </a:endParaRPr>
+          </a:p>
+        </p:txBody>
+      </p:sp>
+      <p:pic>
+        <p:nvPicPr>
+          <p:cNvPr id="3" name="Picture 2">
+            <a:extLst>
+              <a:ext uri="{FF2B5EF4-FFF2-40B4-BE49-F238E27FC236}">
+                <a16:creationId xmlns:a16="http://schemas.microsoft.com/office/drawing/2014/main" id="{FAA518FD-7EE2-032F-1F24-036ACB62B912}"/>
+              </a:ext>
+            </a:extLst>
+          </p:cNvPr>
+          <p:cNvPicPr>
+            <a:picLocks noChangeAspect="1"/>
+          </p:cNvPicPr>
+          <p:nvPr/>
+        </p:nvPicPr>
+        <p:blipFill>
+          <a:blip r:embed="rId3" cstate="email">
+            <a:extLst>
+              <a:ext uri="{28A0092B-C50C-407E-A947-70E740481C1C}">
+                <a14:useLocalDpi xmlns:a14="http://schemas.microsoft.com/office/drawing/2010/main"/>
+              </a:ext>
+            </a:extLst>
+          </a:blip>
+          <a:stretch>
+            <a:fillRect/>
+          </a:stretch>
+        </p:blipFill>
+        <p:spPr>
+          <a:xfrm>
+            <a:off x="9492343" y="149679"/>
+            <a:ext cx="2699657" cy="2616377"/>
+          </a:xfrm>
+          <a:prstGeom prst="rect">
+            <a:avLst/>
+          </a:prstGeom>
+        </p:spPr>
+      </p:pic>
+      <p:pic>
+        <p:nvPicPr>
+          <p:cNvPr id="4" name="Picture 3">
+            <a:extLst>
+              <a:ext uri="{FF2B5EF4-FFF2-40B4-BE49-F238E27FC236}">
+                <a16:creationId xmlns:a16="http://schemas.microsoft.com/office/drawing/2014/main" id="{F37986CB-6953-B8BE-0826-E958A8437145}"/>
+              </a:ext>
+            </a:extLst>
+          </p:cNvPr>
+          <p:cNvPicPr>
+            <a:picLocks noChangeAspect="1"/>
+          </p:cNvPicPr>
+          <p:nvPr/>
+        </p:nvPicPr>
+        <p:blipFill>
+          <a:blip r:embed="rId4" cstate="email">
+            <a:extLst>
+              <a:ext uri="{28A0092B-C50C-407E-A947-70E740481C1C}">
+                <a14:useLocalDpi xmlns:a14="http://schemas.microsoft.com/office/drawing/2010/main"/>
+              </a:ext>
+            </a:extLst>
+          </a:blip>
+          <a:stretch>
+            <a:fillRect/>
+          </a:stretch>
+        </p:blipFill>
+        <p:spPr>
+          <a:xfrm>
+            <a:off x="9492342" y="3613391"/>
+            <a:ext cx="2699657" cy="2281997"/>
+          </a:xfrm>
+          <a:prstGeom prst="rect">
+            <a:avLst/>
+          </a:prstGeom>
+        </p:spPr>
+      </p:pic>
+      <p:pic>
+        <p:nvPicPr>
+          <p:cNvPr id="5" name="Picture 4">
+            <a:extLst>
+              <a:ext uri="{FF2B5EF4-FFF2-40B4-BE49-F238E27FC236}">
+                <a16:creationId xmlns:a16="http://schemas.microsoft.com/office/drawing/2014/main" id="{65079173-F2C4-DB18-BDAD-0AEF787B154F}"/>
+              </a:ext>
+            </a:extLst>
+          </p:cNvPr>
+          <p:cNvPicPr>
+            <a:picLocks noChangeAspect="1"/>
+          </p:cNvPicPr>
+          <p:nvPr/>
+        </p:nvPicPr>
+        <p:blipFill>
+          <a:blip r:embed="rId5" cstate="email">
+            <a:extLst>
+              <a:ext uri="{28A0092B-C50C-407E-A947-70E740481C1C}">
+                <a14:useLocalDpi xmlns:a14="http://schemas.microsoft.com/office/drawing/2010/main"/>
+              </a:ext>
+            </a:extLst>
+          </a:blip>
+          <a:stretch>
+            <a:fillRect/>
+          </a:stretch>
+        </p:blipFill>
+        <p:spPr>
+          <a:xfrm>
+            <a:off x="6909866" y="149679"/>
+            <a:ext cx="2374900" cy="2311400"/>
+          </a:xfrm>
+          <a:prstGeom prst="rect">
+            <a:avLst/>
+          </a:prstGeom>
+        </p:spPr>
+      </p:pic>
+    </p:spTree>
+    <p:extLst>
+      <p:ext uri="{BB962C8B-B14F-4D97-AF65-F5344CB8AC3E}">
+        <p14:creationId xmlns:p14="http://schemas.microsoft.com/office/powerpoint/2010/main" val="1255854292"/>
+      </p:ext>
+    </p:extLst>
+  </p:cSld>
+  <p:clrMapOvr>
+    <a:masterClrMapping/>
+  </p:clrMapOvr>
+</p:sld>
+</file>
+
+<file path=ppt/slides/slide11.xml><?xml version="1.0" encoding="utf-8"?>
+<p:sld xmlns:a="http://schemas.openxmlformats.org/drawingml/2006/main" xmlns:r="http://schemas.openxmlformats.org/officeDocument/2006/relationships" xmlns:p="http://schemas.openxmlformats.org/presentationml/2006/main">
+  <p:cSld>
+    <p:spTree>
+      <p:nvGrpSpPr>
+        <p:cNvPr id="1" name="">
+          <a:extLst>
+            <a:ext uri="{FF2B5EF4-FFF2-40B4-BE49-F238E27FC236}">
               <a16:creationId xmlns:a16="http://schemas.microsoft.com/office/drawing/2014/main" id="{1730B338-E842-3C96-D4BC-E392AD882003}"/>
             </a:ext>
           </a:extLst>
@@ -4463,7 +4761,7 @@
 </p:sld>
 </file>
 
-<file path=ppt/slides/slide11.xml><?xml version="1.0" encoding="utf-8"?>
+<file path=ppt/slides/slide12.xml><?xml version="1.0" encoding="utf-8"?>
 <p:sld xmlns:a="http://schemas.openxmlformats.org/drawingml/2006/main" xmlns:r="http://schemas.openxmlformats.org/officeDocument/2006/relationships" xmlns:p="http://schemas.openxmlformats.org/presentationml/2006/main">
   <p:cSld>
     <p:spTree>
@@ -5006,783 +5304,6 @@
     <p:extLst>
       <p:ext uri="{BB962C8B-B14F-4D97-AF65-F5344CB8AC3E}">
         <p14:creationId xmlns:p14="http://schemas.microsoft.com/office/powerpoint/2010/main" val="638605968"/>
-      </p:ext>
-    </p:extLst>
-  </p:cSld>
-  <p:clrMapOvr>
-    <a:masterClrMapping/>
-  </p:clrMapOvr>
-</p:sld>
-</file>
-
-<file path=ppt/slides/slide12.xml><?xml version="1.0" encoding="utf-8"?>
-<p:sld xmlns:a="http://schemas.openxmlformats.org/drawingml/2006/main" xmlns:r="http://schemas.openxmlformats.org/officeDocument/2006/relationships" xmlns:p="http://schemas.openxmlformats.org/presentationml/2006/main">
-  <p:cSld>
-    <p:spTree>
-      <p:nvGrpSpPr>
-        <p:cNvPr id="1" name=""/>
-        <p:cNvGrpSpPr/>
-        <p:nvPr/>
-      </p:nvGrpSpPr>
-      <p:grpSpPr>
-        <a:xfrm>
-          <a:off x="0" y="0"/>
-          <a:ext cx="0" cy="0"/>
-          <a:chOff x="0" y="0"/>
-          <a:chExt cx="0" cy="0"/>
-        </a:xfrm>
-      </p:grpSpPr>
-      <p:sp>
-        <p:nvSpPr>
-          <p:cNvPr id="2" name="TextBox 1">
-            <a:extLst>
-              <a:ext uri="{FF2B5EF4-FFF2-40B4-BE49-F238E27FC236}">
-                <a16:creationId xmlns:a16="http://schemas.microsoft.com/office/drawing/2014/main" id="{775BBD15-AEC2-1815-2347-A5BB8F308263}"/>
-              </a:ext>
-            </a:extLst>
-          </p:cNvPr>
-          <p:cNvSpPr txBox="1"/>
-          <p:nvPr/>
-        </p:nvSpPr>
-        <p:spPr>
-          <a:xfrm>
-            <a:off x="0" y="0"/>
-            <a:ext cx="4434212" cy="1200329"/>
-          </a:xfrm>
-          <a:prstGeom prst="rect">
-            <a:avLst/>
-          </a:prstGeom>
-          <a:noFill/>
-        </p:spPr>
-        <p:txBody>
-          <a:bodyPr wrap="square" rtlCol="0">
-            <a:spAutoFit/>
-          </a:bodyPr>
-          <a:lstStyle/>
-          <a:p>
-            <a:r>
-              <a:rPr lang="en-US" sz="2400" b="1" dirty="0"/>
-              <a:t>John Deere </a:t>
-            </a:r>
-            <a:r>
-              <a:rPr lang="en-US" sz="2400" b="1" i="0" dirty="0">
-                <a:solidFill>
-                  <a:srgbClr val="333333"/>
-                </a:solidFill>
-                <a:effectLst/>
-              </a:rPr>
-              <a:t>Sub-Compact Tractor </a:t>
-            </a:r>
-          </a:p>
-          <a:p>
-            <a:r>
-              <a:rPr lang="en-US" sz="1200" b="1" i="0" dirty="0">
-                <a:solidFill>
-                  <a:srgbClr val="FF0000"/>
-                </a:solidFill>
-                <a:effectLst/>
-              </a:rPr>
-              <a:t>Prices in 2023:</a:t>
-            </a:r>
-          </a:p>
-          <a:p>
-            <a:r>
-              <a:rPr lang="en-US" sz="1200" b="1" i="0" dirty="0">
-                <a:solidFill>
-                  <a:srgbClr val="FF0000"/>
-                </a:solidFill>
-                <a:effectLst/>
-              </a:rPr>
-              <a:t>1023E - $15,600. </a:t>
-            </a:r>
-          </a:p>
-          <a:p>
-            <a:r>
-              <a:rPr lang="en-US" sz="1200" b="1" dirty="0">
-                <a:solidFill>
-                  <a:srgbClr val="FF0000"/>
-                </a:solidFill>
-              </a:rPr>
-              <a:t>1025R - $18,400 </a:t>
-            </a:r>
-          </a:p>
-          <a:p>
-            <a:r>
-              <a:rPr lang="en-US" sz="1200" b="1" dirty="0">
-                <a:solidFill>
-                  <a:srgbClr val="FF0000"/>
-                </a:solidFill>
-              </a:rPr>
-              <a:t>2025R - bigger wheels, longer, heavier)</a:t>
-            </a:r>
-          </a:p>
-        </p:txBody>
-      </p:sp>
-      <p:pic>
-        <p:nvPicPr>
-          <p:cNvPr id="1028" name="Picture 4" descr="A Review of the Key Features of the John Deere 1023E Sub-Compact Tractor">
-            <a:extLst>
-              <a:ext uri="{FF2B5EF4-FFF2-40B4-BE49-F238E27FC236}">
-                <a16:creationId xmlns:a16="http://schemas.microsoft.com/office/drawing/2014/main" id="{6F3D58B2-F45F-3598-9B8F-5F056C3FBB92}"/>
-              </a:ext>
-            </a:extLst>
-          </p:cNvPr>
-          <p:cNvPicPr>
-            <a:picLocks noChangeAspect="1" noChangeArrowheads="1"/>
-          </p:cNvPicPr>
-          <p:nvPr/>
-        </p:nvPicPr>
-        <p:blipFill>
-          <a:blip r:embed="rId2">
-            <a:extLst>
-              <a:ext uri="{28A0092B-C50C-407E-A947-70E740481C1C}">
-                <a14:useLocalDpi xmlns:a14="http://schemas.microsoft.com/office/drawing/2010/main"/>
-              </a:ext>
-            </a:extLst>
-          </a:blip>
-          <a:srcRect/>
-          <a:stretch>
-            <a:fillRect/>
-          </a:stretch>
-        </p:blipFill>
-        <p:spPr bwMode="auto">
-          <a:xfrm>
-            <a:off x="9429537" y="2987093"/>
-            <a:ext cx="2652054" cy="1901473"/>
-          </a:xfrm>
-          <a:prstGeom prst="rect">
-            <a:avLst/>
-          </a:prstGeom>
-          <a:noFill/>
-          <a:ln>
-            <a:solidFill>
-              <a:srgbClr val="FF0000"/>
-            </a:solidFill>
-          </a:ln>
-          <a:extLst>
-            <a:ext uri="{909E8E84-426E-40DD-AFC4-6F175D3DCCD1}">
-              <a14:hiddenFill xmlns:a14="http://schemas.microsoft.com/office/drawing/2010/main">
-                <a:solidFill>
-                  <a:srgbClr val="FFFFFF"/>
-                </a:solidFill>
-              </a14:hiddenFill>
-            </a:ext>
-          </a:extLst>
-        </p:spPr>
-      </p:pic>
-      <p:sp>
-        <p:nvSpPr>
-          <p:cNvPr id="9" name="TextBox 8">
-            <a:extLst>
-              <a:ext uri="{FF2B5EF4-FFF2-40B4-BE49-F238E27FC236}">
-                <a16:creationId xmlns:a16="http://schemas.microsoft.com/office/drawing/2014/main" id="{87F2F999-0791-BA74-78AD-0B5B443629CA}"/>
-              </a:ext>
-            </a:extLst>
-          </p:cNvPr>
-          <p:cNvSpPr txBox="1"/>
-          <p:nvPr/>
-        </p:nvSpPr>
-        <p:spPr>
-          <a:xfrm>
-            <a:off x="245841" y="1520645"/>
-            <a:ext cx="3630511" cy="3416320"/>
-          </a:xfrm>
-          <a:prstGeom prst="rect">
-            <a:avLst/>
-          </a:prstGeom>
-          <a:solidFill>
-            <a:schemeClr val="accent4">
-              <a:lumMod val="20000"/>
-              <a:lumOff val="80000"/>
-            </a:schemeClr>
-          </a:solidFill>
-          <a:ln>
-            <a:solidFill>
-              <a:srgbClr val="FF0000"/>
-            </a:solidFill>
-          </a:ln>
-        </p:spPr>
-        <p:txBody>
-          <a:bodyPr wrap="square" rtlCol="0">
-            <a:spAutoFit/>
-          </a:bodyPr>
-          <a:lstStyle/>
-          <a:p>
-            <a:r>
-              <a:rPr lang="en-US" dirty="0"/>
-              <a:t>Engine - </a:t>
-            </a:r>
-            <a:r>
-              <a:rPr lang="en-US" dirty="0">
-                <a:solidFill>
-                  <a:srgbClr val="FF0000"/>
-                </a:solidFill>
-              </a:rPr>
-              <a:t>diesel</a:t>
-            </a:r>
-            <a:r>
-              <a:rPr lang="en-US" dirty="0"/>
-              <a:t> , 21.5 or 24 hp</a:t>
-            </a:r>
-          </a:p>
-          <a:p>
-            <a:r>
-              <a:rPr lang="en-US" dirty="0"/>
-              <a:t>PTO – 14.5 or 17.2 hp</a:t>
-            </a:r>
-          </a:p>
-          <a:p>
-            <a:r>
-              <a:rPr lang="en-US" dirty="0"/>
-              <a:t>weight: 610 kg or 654 kg</a:t>
-            </a:r>
-          </a:p>
-          <a:p>
-            <a:r>
-              <a:rPr lang="en-US" dirty="0"/>
-              <a:t>mower deck, 120R loader, ...</a:t>
-            </a:r>
-          </a:p>
-          <a:p>
-            <a:endParaRPr lang="en-US" dirty="0"/>
-          </a:p>
-          <a:p>
-            <a:r>
-              <a:rPr lang="en-US" dirty="0"/>
-              <a:t>1025R is better – more PTO power, can use 3-point hitch implement, PTO precision handling, better seat, better steering</a:t>
-            </a:r>
-          </a:p>
-          <a:p>
-            <a:endParaRPr lang="en-US" dirty="0"/>
-          </a:p>
-          <a:p>
-            <a:r>
-              <a:rPr lang="en-US" dirty="0"/>
-              <a:t>1025R base weight – 1,440 </a:t>
-            </a:r>
-            <a:r>
-              <a:rPr lang="en-US" dirty="0" err="1"/>
-              <a:t>lbs</a:t>
-            </a:r>
-            <a:endParaRPr lang="en-US" dirty="0"/>
-          </a:p>
-          <a:p>
-            <a:r>
-              <a:rPr lang="en-US" dirty="0"/>
-              <a:t>(compare with 805 </a:t>
-            </a:r>
-            <a:r>
-              <a:rPr lang="en-US" dirty="0" err="1"/>
-              <a:t>lbs</a:t>
-            </a:r>
-            <a:r>
-              <a:rPr lang="en-US" dirty="0"/>
-              <a:t> for jd-425)</a:t>
-            </a:r>
-          </a:p>
-        </p:txBody>
-      </p:sp>
-      <p:sp>
-        <p:nvSpPr>
-          <p:cNvPr id="10" name="TextBox 9">
-            <a:extLst>
-              <a:ext uri="{FF2B5EF4-FFF2-40B4-BE49-F238E27FC236}">
-                <a16:creationId xmlns:a16="http://schemas.microsoft.com/office/drawing/2014/main" id="{9944A156-B590-1201-FCB9-1A6AB95CC9B7}"/>
-              </a:ext>
-            </a:extLst>
-          </p:cNvPr>
-          <p:cNvSpPr txBox="1"/>
-          <p:nvPr/>
-        </p:nvSpPr>
-        <p:spPr>
-          <a:xfrm>
-            <a:off x="5950334" y="76238"/>
-            <a:ext cx="6138100" cy="646331"/>
-          </a:xfrm>
-          <a:prstGeom prst="rect">
-            <a:avLst/>
-          </a:prstGeom>
-          <a:noFill/>
-        </p:spPr>
-        <p:txBody>
-          <a:bodyPr wrap="square" rtlCol="0">
-            <a:spAutoFit/>
-          </a:bodyPr>
-          <a:lstStyle/>
-          <a:p>
-            <a:r>
-              <a:rPr lang="en-US" sz="1200" dirty="0">
-                <a:hlinkClick r:id="rId3"/>
-              </a:rPr>
-              <a:t>https://</a:t>
-            </a:r>
-            <a:r>
-              <a:rPr lang="en-US" sz="1200" dirty="0" err="1">
-                <a:hlinkClick r:id="rId3"/>
-              </a:rPr>
-              <a:t>www.deere.com</a:t>
-            </a:r>
-            <a:r>
-              <a:rPr lang="en-US" sz="1200" dirty="0">
-                <a:hlinkClick r:id="rId3"/>
-              </a:rPr>
-              <a:t>/</a:t>
-            </a:r>
-            <a:r>
-              <a:rPr lang="en-US" sz="1200" dirty="0" err="1">
-                <a:hlinkClick r:id="rId3"/>
-              </a:rPr>
-              <a:t>en</a:t>
-            </a:r>
-            <a:r>
-              <a:rPr lang="en-US" sz="1200" dirty="0">
-                <a:hlinkClick r:id="rId3"/>
-              </a:rPr>
-              <a:t>/tractors/compact-tractors/1-series-sub-compact-tractors/1023e/</a:t>
-            </a:r>
-            <a:endParaRPr lang="en-US" sz="1200" dirty="0"/>
-          </a:p>
-          <a:p>
-            <a:r>
-              <a:rPr lang="en-US" sz="1200" dirty="0">
-                <a:hlinkClick r:id="rId4"/>
-              </a:rPr>
-              <a:t>https://</a:t>
-            </a:r>
-            <a:r>
-              <a:rPr lang="en-US" sz="1200" dirty="0" err="1">
-                <a:hlinkClick r:id="rId4"/>
-              </a:rPr>
-              <a:t>www.deere.com</a:t>
-            </a:r>
-            <a:r>
-              <a:rPr lang="en-US" sz="1200" dirty="0">
-                <a:hlinkClick r:id="rId4"/>
-              </a:rPr>
-              <a:t>/</a:t>
-            </a:r>
-            <a:r>
-              <a:rPr lang="en-US" sz="1200" dirty="0" err="1">
-                <a:hlinkClick r:id="rId4"/>
-              </a:rPr>
-              <a:t>en</a:t>
-            </a:r>
-            <a:r>
-              <a:rPr lang="en-US" sz="1200" dirty="0">
-                <a:hlinkClick r:id="rId4"/>
-              </a:rPr>
-              <a:t>/tractors/compact-tractors/1-series-sub-compact-tractors/1025r/</a:t>
-            </a:r>
-            <a:endParaRPr lang="en-US" sz="1200" dirty="0"/>
-          </a:p>
-          <a:p>
-            <a:r>
-              <a:rPr lang="en-US" sz="1200" dirty="0">
-                <a:hlinkClick r:id="rId5"/>
-              </a:rPr>
-              <a:t>https://www.youtube.com/watch?v=TeHIpRNJ3LU</a:t>
-            </a:r>
-            <a:endParaRPr lang="en-US" sz="1200" dirty="0"/>
-          </a:p>
-        </p:txBody>
-      </p:sp>
-      <p:pic>
-        <p:nvPicPr>
-          <p:cNvPr id="1030" name="Picture 6" descr="1023E Compact Utility Tractor | Explore John Deere">
-            <a:extLst>
-              <a:ext uri="{FF2B5EF4-FFF2-40B4-BE49-F238E27FC236}">
-                <a16:creationId xmlns:a16="http://schemas.microsoft.com/office/drawing/2014/main" id="{ECD513EA-4836-83C9-A47F-D2F269773E44}"/>
-              </a:ext>
-            </a:extLst>
-          </p:cNvPr>
-          <p:cNvPicPr>
-            <a:picLocks noChangeAspect="1" noChangeArrowheads="1"/>
-          </p:cNvPicPr>
-          <p:nvPr/>
-        </p:nvPicPr>
-        <p:blipFill rotWithShape="1">
-          <a:blip r:embed="rId6" cstate="email">
-            <a:extLst>
-              <a:ext uri="{28A0092B-C50C-407E-A947-70E740481C1C}">
-                <a14:useLocalDpi xmlns:a14="http://schemas.microsoft.com/office/drawing/2010/main"/>
-              </a:ext>
-            </a:extLst>
-          </a:blip>
-          <a:srcRect/>
-          <a:stretch/>
-        </p:blipFill>
-        <p:spPr bwMode="auto">
-          <a:xfrm>
-            <a:off x="3940712" y="1519149"/>
-            <a:ext cx="1556574" cy="1435286"/>
-          </a:xfrm>
-          <a:prstGeom prst="rect">
-            <a:avLst/>
-          </a:prstGeom>
-          <a:noFill/>
-          <a:ln>
-            <a:solidFill>
-              <a:srgbClr val="FF0000"/>
-            </a:solidFill>
-          </a:ln>
-          <a:extLst>
-            <a:ext uri="{909E8E84-426E-40DD-AFC4-6F175D3DCCD1}">
-              <a14:hiddenFill xmlns:a14="http://schemas.microsoft.com/office/drawing/2010/main">
-                <a:solidFill>
-                  <a:srgbClr val="FFFFFF"/>
-                </a:solidFill>
-              </a14:hiddenFill>
-            </a:ext>
-          </a:extLst>
-        </p:spPr>
-      </p:pic>
-      <p:pic>
-        <p:nvPicPr>
-          <p:cNvPr id="1034" name="Picture 10" descr="John Deere 1023E Sub-Compact Tractor | wordpress.soegel.de">
-            <a:extLst>
-              <a:ext uri="{FF2B5EF4-FFF2-40B4-BE49-F238E27FC236}">
-                <a16:creationId xmlns:a16="http://schemas.microsoft.com/office/drawing/2014/main" id="{70ED0C30-7549-F8BA-D4CA-6CFCE8D6E9BC}"/>
-              </a:ext>
-            </a:extLst>
-          </p:cNvPr>
-          <p:cNvPicPr>
-            <a:picLocks noChangeAspect="1" noChangeArrowheads="1"/>
-          </p:cNvPicPr>
-          <p:nvPr/>
-        </p:nvPicPr>
-        <p:blipFill>
-          <a:blip r:embed="rId7" cstate="email">
-            <a:extLst>
-              <a:ext uri="{28A0092B-C50C-407E-A947-70E740481C1C}">
-                <a14:useLocalDpi xmlns:a14="http://schemas.microsoft.com/office/drawing/2010/main"/>
-              </a:ext>
-            </a:extLst>
-          </a:blip>
-          <a:srcRect/>
-          <a:stretch>
-            <a:fillRect/>
-          </a:stretch>
-        </p:blipFill>
-        <p:spPr bwMode="auto">
-          <a:xfrm>
-            <a:off x="3150024" y="5050814"/>
-            <a:ext cx="2459435" cy="1756739"/>
-          </a:xfrm>
-          <a:prstGeom prst="rect">
-            <a:avLst/>
-          </a:prstGeom>
-          <a:noFill/>
-          <a:ln>
-            <a:solidFill>
-              <a:srgbClr val="FF0000"/>
-            </a:solidFill>
-          </a:ln>
-          <a:extLst>
-            <a:ext uri="{909E8E84-426E-40DD-AFC4-6F175D3DCCD1}">
-              <a14:hiddenFill xmlns:a14="http://schemas.microsoft.com/office/drawing/2010/main">
-                <a:solidFill>
-                  <a:srgbClr val="FFFFFF"/>
-                </a:solidFill>
-              </a14:hiddenFill>
-            </a:ext>
-          </a:extLst>
-        </p:spPr>
-      </p:pic>
-      <p:pic>
-        <p:nvPicPr>
-          <p:cNvPr id="1036" name="Picture 12" descr="Marissa Mann on X: &quot;Anybody in Twitter-land looking for a small acreage  tractor? We're looking to sell ours to upgrade to something larger so we  can move round bales for my hay">
-            <a:extLst>
-              <a:ext uri="{FF2B5EF4-FFF2-40B4-BE49-F238E27FC236}">
-                <a16:creationId xmlns:a16="http://schemas.microsoft.com/office/drawing/2014/main" id="{E69E1B8C-C34E-819C-34CF-E2A2400F22CF}"/>
-              </a:ext>
-            </a:extLst>
-          </p:cNvPr>
-          <p:cNvPicPr>
-            <a:picLocks noChangeAspect="1" noChangeArrowheads="1"/>
-          </p:cNvPicPr>
-          <p:nvPr/>
-        </p:nvPicPr>
-        <p:blipFill>
-          <a:blip r:embed="rId8" cstate="email">
-            <a:extLst>
-              <a:ext uri="{28A0092B-C50C-407E-A947-70E740481C1C}">
-                <a14:useLocalDpi xmlns:a14="http://schemas.microsoft.com/office/drawing/2010/main"/>
-              </a:ext>
-            </a:extLst>
-          </a:blip>
-          <a:srcRect/>
-          <a:stretch>
-            <a:fillRect/>
-          </a:stretch>
-        </p:blipFill>
-        <p:spPr bwMode="auto">
-          <a:xfrm>
-            <a:off x="9233584" y="976760"/>
-            <a:ext cx="2854850" cy="1901473"/>
-          </a:xfrm>
-          <a:prstGeom prst="rect">
-            <a:avLst/>
-          </a:prstGeom>
-          <a:noFill/>
-          <a:ln>
-            <a:solidFill>
-              <a:srgbClr val="FF0000"/>
-            </a:solidFill>
-          </a:ln>
-          <a:extLst>
-            <a:ext uri="{909E8E84-426E-40DD-AFC4-6F175D3DCCD1}">
-              <a14:hiddenFill xmlns:a14="http://schemas.microsoft.com/office/drawing/2010/main">
-                <a:solidFill>
-                  <a:srgbClr val="FFFFFF"/>
-                </a:solidFill>
-              </a14:hiddenFill>
-            </a:ext>
-          </a:extLst>
-        </p:spPr>
-      </p:pic>
-      <p:pic>
-        <p:nvPicPr>
-          <p:cNvPr id="1038" name="Picture 14" descr="John Deere 1023e backhoe usage for myself and the boys - YouTube">
-            <a:extLst>
-              <a:ext uri="{FF2B5EF4-FFF2-40B4-BE49-F238E27FC236}">
-                <a16:creationId xmlns:a16="http://schemas.microsoft.com/office/drawing/2014/main" id="{65AE8BB0-FA56-E493-B5AA-349B09F298D3}"/>
-              </a:ext>
-            </a:extLst>
-          </p:cNvPr>
-          <p:cNvPicPr>
-            <a:picLocks noChangeAspect="1" noChangeArrowheads="1"/>
-          </p:cNvPicPr>
-          <p:nvPr/>
-        </p:nvPicPr>
-        <p:blipFill rotWithShape="1">
-          <a:blip r:embed="rId9" cstate="email">
-            <a:extLst>
-              <a:ext uri="{28A0092B-C50C-407E-A947-70E740481C1C}">
-                <a14:useLocalDpi xmlns:a14="http://schemas.microsoft.com/office/drawing/2010/main"/>
-              </a:ext>
-            </a:extLst>
-          </a:blip>
-          <a:srcRect/>
-          <a:stretch/>
-        </p:blipFill>
-        <p:spPr bwMode="auto">
-          <a:xfrm>
-            <a:off x="3941472" y="2998351"/>
-            <a:ext cx="3733458" cy="1938614"/>
-          </a:xfrm>
-          <a:prstGeom prst="rect">
-            <a:avLst/>
-          </a:prstGeom>
-          <a:noFill/>
-          <a:ln>
-            <a:solidFill>
-              <a:srgbClr val="FF0000"/>
-            </a:solidFill>
-          </a:ln>
-          <a:extLst>
-            <a:ext uri="{909E8E84-426E-40DD-AFC4-6F175D3DCCD1}">
-              <a14:hiddenFill xmlns:a14="http://schemas.microsoft.com/office/drawing/2010/main">
-                <a:solidFill>
-                  <a:srgbClr val="FFFFFF"/>
-                </a:solidFill>
-              </a14:hiddenFill>
-            </a:ext>
-          </a:extLst>
-        </p:spPr>
-      </p:pic>
-      <p:sp>
-        <p:nvSpPr>
-          <p:cNvPr id="3" name="TextBox 2">
-            <a:extLst>
-              <a:ext uri="{FF2B5EF4-FFF2-40B4-BE49-F238E27FC236}">
-                <a16:creationId xmlns:a16="http://schemas.microsoft.com/office/drawing/2014/main" id="{D2CAF9AA-7188-244D-4207-3D6194A6A33F}"/>
-              </a:ext>
-            </a:extLst>
-          </p:cNvPr>
-          <p:cNvSpPr txBox="1"/>
-          <p:nvPr/>
-        </p:nvSpPr>
-        <p:spPr>
-          <a:xfrm>
-            <a:off x="60784" y="5050814"/>
-            <a:ext cx="3032686" cy="1754326"/>
-          </a:xfrm>
-          <a:prstGeom prst="rect">
-            <a:avLst/>
-          </a:prstGeom>
-          <a:solidFill>
-            <a:schemeClr val="accent4">
-              <a:lumMod val="20000"/>
-              <a:lumOff val="80000"/>
-            </a:schemeClr>
-          </a:solidFill>
-          <a:ln>
-            <a:solidFill>
-              <a:srgbClr val="FF0000"/>
-            </a:solidFill>
-          </a:ln>
-        </p:spPr>
-        <p:txBody>
-          <a:bodyPr wrap="square" rtlCol="0">
-            <a:spAutoFit/>
-          </a:bodyPr>
-          <a:lstStyle/>
-          <a:p>
-            <a:pPr marL="285750" indent="-285750">
-              <a:buFont typeface="Arial" panose="020B0604020202020204" pitchFamily="34" charset="0"/>
-              <a:buChar char="•"/>
-            </a:pPr>
-            <a:r>
-              <a:rPr lang="en-US" dirty="0"/>
-              <a:t>Front loader</a:t>
-            </a:r>
-          </a:p>
-          <a:p>
-            <a:pPr marL="285750" indent="-285750">
-              <a:buFont typeface="Arial" panose="020B0604020202020204" pitchFamily="34" charset="0"/>
-              <a:buChar char="•"/>
-            </a:pPr>
-            <a:r>
-              <a:rPr lang="en-US" dirty="0"/>
-              <a:t>Quick attach</a:t>
-            </a:r>
-          </a:p>
-          <a:p>
-            <a:pPr marL="285750" indent="-285750">
-              <a:buFont typeface="Arial" panose="020B0604020202020204" pitchFamily="34" charset="0"/>
-              <a:buChar char="•"/>
-            </a:pPr>
-            <a:r>
-              <a:rPr lang="en-US" dirty="0"/>
-              <a:t>back counter-weight</a:t>
-            </a:r>
-          </a:p>
-          <a:p>
-            <a:pPr marL="285750" indent="-285750">
-              <a:buFont typeface="Arial" panose="020B0604020202020204" pitchFamily="34" charset="0"/>
-              <a:buChar char="•"/>
-            </a:pPr>
-            <a:r>
-              <a:rPr lang="en-US" dirty="0"/>
-              <a:t>mower platform + bagger</a:t>
-            </a:r>
-          </a:p>
-          <a:p>
-            <a:pPr marL="285750" indent="-285750">
-              <a:buFont typeface="Arial" panose="020B0604020202020204" pitchFamily="34" charset="0"/>
-              <a:buChar char="•"/>
-            </a:pPr>
-            <a:r>
-              <a:rPr lang="en-US" dirty="0"/>
-              <a:t>tires, dual-tires</a:t>
-            </a:r>
-          </a:p>
-          <a:p>
-            <a:pPr marL="285750" indent="-285750">
-              <a:buFont typeface="Arial" panose="020B0604020202020204" pitchFamily="34" charset="0"/>
-              <a:buChar char="•"/>
-            </a:pPr>
-            <a:r>
-              <a:rPr lang="en-US" dirty="0"/>
-              <a:t>additional hydraulics</a:t>
-            </a:r>
-          </a:p>
-        </p:txBody>
-      </p:sp>
-      <p:pic>
-        <p:nvPicPr>
-          <p:cNvPr id="1026" name="Picture 2" descr="It's Mow Time: Here are Three Tips for Buying, Maintaining and Operating  Mid-Mount or Rear-Mount Mowers - Compact Equipment Magazine">
-            <a:extLst>
-              <a:ext uri="{FF2B5EF4-FFF2-40B4-BE49-F238E27FC236}">
-                <a16:creationId xmlns:a16="http://schemas.microsoft.com/office/drawing/2014/main" id="{E686C925-F3E8-F724-6E6D-7834F4452248}"/>
-              </a:ext>
-            </a:extLst>
-          </p:cNvPr>
-          <p:cNvPicPr>
-            <a:picLocks noChangeAspect="1" noChangeArrowheads="1"/>
-          </p:cNvPicPr>
-          <p:nvPr/>
-        </p:nvPicPr>
-        <p:blipFill>
-          <a:blip r:embed="rId10" cstate="email">
-            <a:extLst>
-              <a:ext uri="{28A0092B-C50C-407E-A947-70E740481C1C}">
-                <a14:useLocalDpi xmlns:a14="http://schemas.microsoft.com/office/drawing/2010/main"/>
-              </a:ext>
-            </a:extLst>
-          </a:blip>
-          <a:srcRect/>
-          <a:stretch>
-            <a:fillRect/>
-          </a:stretch>
-        </p:blipFill>
-        <p:spPr bwMode="auto">
-          <a:xfrm>
-            <a:off x="9436379" y="4983451"/>
-            <a:ext cx="2652055" cy="1818841"/>
-          </a:xfrm>
-          <a:prstGeom prst="rect">
-            <a:avLst/>
-          </a:prstGeom>
-          <a:noFill/>
-          <a:ln>
-            <a:solidFill>
-              <a:srgbClr val="FF0000"/>
-            </a:solidFill>
-          </a:ln>
-          <a:extLst>
-            <a:ext uri="{909E8E84-426E-40DD-AFC4-6F175D3DCCD1}">
-              <a14:hiddenFill xmlns:a14="http://schemas.microsoft.com/office/drawing/2010/main">
-                <a:solidFill>
-                  <a:srgbClr val="FFFFFF"/>
-                </a:solidFill>
-              </a14:hiddenFill>
-            </a:ext>
-          </a:extLst>
-        </p:spPr>
-      </p:pic>
-      <p:sp>
-        <p:nvSpPr>
-          <p:cNvPr id="4" name="TextBox 3">
-            <a:extLst>
-              <a:ext uri="{FF2B5EF4-FFF2-40B4-BE49-F238E27FC236}">
-                <a16:creationId xmlns:a16="http://schemas.microsoft.com/office/drawing/2014/main" id="{0D13D5CF-25CC-2C60-6834-D2E4CA048AE5}"/>
-              </a:ext>
-            </a:extLst>
-          </p:cNvPr>
-          <p:cNvSpPr txBox="1"/>
-          <p:nvPr/>
-        </p:nvSpPr>
-        <p:spPr>
-          <a:xfrm>
-            <a:off x="7808126" y="5795074"/>
-            <a:ext cx="1566971" cy="584775"/>
-          </a:xfrm>
-          <a:prstGeom prst="rect">
-            <a:avLst/>
-          </a:prstGeom>
-          <a:noFill/>
-        </p:spPr>
-        <p:txBody>
-          <a:bodyPr wrap="square" rtlCol="0">
-            <a:spAutoFit/>
-          </a:bodyPr>
-          <a:lstStyle/>
-          <a:p>
-            <a:r>
-              <a:rPr lang="en-US" sz="1600" dirty="0">
-                <a:latin typeface="Calibri" panose="020F0502020204030204" pitchFamily="34" charset="0"/>
-                <a:cs typeface="Calibri" panose="020F0502020204030204" pitchFamily="34" charset="0"/>
-              </a:rPr>
-              <a:t>Auto-connect mower platform</a:t>
-            </a:r>
-          </a:p>
-        </p:txBody>
-      </p:sp>
-    </p:spTree>
-    <p:extLst>
-      <p:ext uri="{BB962C8B-B14F-4D97-AF65-F5344CB8AC3E}">
-        <p14:creationId xmlns:p14="http://schemas.microsoft.com/office/powerpoint/2010/main" val="3381841661"/>
       </p:ext>
     </p:extLst>
   </p:cSld>
@@ -5823,8 +5344,8 @@
         </p:nvSpPr>
         <p:spPr>
           <a:xfrm>
-            <a:off x="-1" y="0"/>
-            <a:ext cx="5795011" cy="461665"/>
+            <a:off x="0" y="0"/>
+            <a:ext cx="4434212" cy="1200329"/>
           </a:xfrm>
           <a:prstGeom prst="rect">
             <a:avLst/>
@@ -5839,23 +5360,68 @@
           <a:p>
             <a:r>
               <a:rPr lang="en-US" sz="2400" b="1" dirty="0"/>
-              <a:t>Backhoe 260b – use with 1025R</a:t>
-            </a:r>
-            <a:endParaRPr lang="en-US" sz="2400" b="1" i="0" dirty="0">
-              <a:solidFill>
-                <a:srgbClr val="333333"/>
-              </a:solidFill>
-              <a:effectLst/>
-            </a:endParaRPr>
+              <a:t>John Deere </a:t>
+            </a:r>
+            <a:r>
+              <a:rPr lang="en-US" sz="2400" b="1" i="0" dirty="0">
+                <a:solidFill>
+                  <a:srgbClr val="333333"/>
+                </a:solidFill>
+                <a:effectLst/>
+              </a:rPr>
+              <a:t>Sub-Compact Tractor </a:t>
+            </a:r>
+          </a:p>
+          <a:p>
+            <a:r>
+              <a:rPr lang="en-US" sz="1200" b="1" i="0" dirty="0">
+                <a:solidFill>
+                  <a:srgbClr val="FF0000"/>
+                </a:solidFill>
+                <a:effectLst/>
+              </a:rPr>
+              <a:t>Prices in 2023:</a:t>
+            </a:r>
+          </a:p>
+          <a:p>
+            <a:r>
+              <a:rPr lang="en-US" sz="1200" b="1" i="0" dirty="0">
+                <a:solidFill>
+                  <a:srgbClr val="FF0000"/>
+                </a:solidFill>
+                <a:effectLst/>
+              </a:rPr>
+              <a:t>1023E - $15,600. </a:t>
+            </a:r>
+          </a:p>
+          <a:p>
+            <a:r>
+              <a:rPr lang="en-US" sz="1200" b="1" dirty="0">
+                <a:solidFill>
+                  <a:srgbClr val="FF0000"/>
+                </a:solidFill>
+              </a:rPr>
+              <a:t>1025R - $18,400 </a:t>
+            </a:r>
+          </a:p>
+          <a:p>
+            <a:r>
+              <a:rPr lang="en-US" sz="1200" b="1" dirty="0">
+                <a:solidFill>
+                  <a:srgbClr val="FF0000"/>
+                </a:solidFill>
+              </a:rPr>
+              <a:t>2025R - bigger wheels, longer, heavier)</a:t>
+            </a:r>
           </a:p>
         </p:txBody>
       </p:sp>
       <p:pic>
         <p:nvPicPr>
-          <p:cNvPr id="3" name="Picture 4" descr="Backhoe Storage Dolly John Deere 260 and 260B Back Hoe">
-            <a:extLst>
-              <a:ext uri="{FF2B5EF4-FFF2-40B4-BE49-F238E27FC236}">
-                <a16:creationId xmlns:a16="http://schemas.microsoft.com/office/drawing/2014/main" id="{3E020E38-F6F1-90B7-5CF4-DED18B6B7296}"/>
+          <p:cNvPr id="1028" name="Picture 4" descr="A Review of the Key Features of the John Deere 1023E Sub-Compact Tractor">
+            <a:extLst>
+              <a:ext uri="{FF2B5EF4-FFF2-40B4-BE49-F238E27FC236}">
+                <a16:creationId xmlns:a16="http://schemas.microsoft.com/office/drawing/2014/main" id="{6F3D58B2-F45F-3598-9B8F-5F056C3FBB92}"/>
               </a:ext>
             </a:extLst>
           </p:cNvPr>
@@ -5864,8 +5430,8 @@
           </p:cNvPicPr>
           <p:nvPr/>
         </p:nvPicPr>
-        <p:blipFill rotWithShape="1">
-          <a:blip r:embed="rId2" cstate="email">
+        <p:blipFill>
+          <a:blip r:embed="rId2">
             <a:extLst>
               <a:ext uri="{28A0092B-C50C-407E-A947-70E740481C1C}">
                 <a14:useLocalDpi xmlns:a14="http://schemas.microsoft.com/office/drawing/2010/main"/>
@@ -5873,12 +5439,14 @@
             </a:extLst>
           </a:blip>
           <a:srcRect/>
-          <a:stretch/>
+          <a:stretch>
+            <a:fillRect/>
+          </a:stretch>
         </p:blipFill>
         <p:spPr bwMode="auto">
           <a:xfrm>
-            <a:off x="194310" y="3620079"/>
-            <a:ext cx="3141240" cy="2176219"/>
+            <a:off x="9429537" y="2987093"/>
+            <a:ext cx="2652054" cy="1901473"/>
           </a:xfrm>
           <a:prstGeom prst="rect">
             <a:avLst/>
@@ -5900,12 +5468,228 @@
           </a:extLst>
         </p:spPr>
       </p:pic>
+      <p:sp>
+        <p:nvSpPr>
+          <p:cNvPr id="9" name="TextBox 8">
+            <a:extLst>
+              <a:ext uri="{FF2B5EF4-FFF2-40B4-BE49-F238E27FC236}">
+                <a16:creationId xmlns:a16="http://schemas.microsoft.com/office/drawing/2014/main" id="{87F2F999-0791-BA74-78AD-0B5B443629CA}"/>
+              </a:ext>
+            </a:extLst>
+          </p:cNvPr>
+          <p:cNvSpPr txBox="1"/>
+          <p:nvPr/>
+        </p:nvSpPr>
+        <p:spPr>
+          <a:xfrm>
+            <a:off x="245841" y="1520645"/>
+            <a:ext cx="3630511" cy="3416320"/>
+          </a:xfrm>
+          <a:prstGeom prst="rect">
+            <a:avLst/>
+          </a:prstGeom>
+          <a:solidFill>
+            <a:schemeClr val="accent4">
+              <a:lumMod val="20000"/>
+              <a:lumOff val="80000"/>
+            </a:schemeClr>
+          </a:solidFill>
+          <a:ln>
+            <a:solidFill>
+              <a:srgbClr val="FF0000"/>
+            </a:solidFill>
+          </a:ln>
+        </p:spPr>
+        <p:txBody>
+          <a:bodyPr wrap="square" rtlCol="0">
+            <a:spAutoFit/>
+          </a:bodyPr>
+          <a:lstStyle/>
+          <a:p>
+            <a:r>
+              <a:rPr lang="en-US" dirty="0"/>
+              <a:t>Engine - </a:t>
+            </a:r>
+            <a:r>
+              <a:rPr lang="en-US" dirty="0">
+                <a:solidFill>
+                  <a:srgbClr val="FF0000"/>
+                </a:solidFill>
+              </a:rPr>
+              <a:t>diesel</a:t>
+            </a:r>
+            <a:r>
+              <a:rPr lang="en-US" dirty="0"/>
+              <a:t> , 21.5 or 24 hp</a:t>
+            </a:r>
+          </a:p>
+          <a:p>
+            <a:r>
+              <a:rPr lang="en-US" dirty="0"/>
+              <a:t>PTO – 14.5 or 17.2 hp</a:t>
+            </a:r>
+          </a:p>
+          <a:p>
+            <a:r>
+              <a:rPr lang="en-US" dirty="0"/>
+              <a:t>weight: 610 kg or 654 kg</a:t>
+            </a:r>
+          </a:p>
+          <a:p>
+            <a:r>
+              <a:rPr lang="en-US" dirty="0"/>
+              <a:t>mower deck, 120R loader, ...</a:t>
+            </a:r>
+          </a:p>
+          <a:p>
+            <a:endParaRPr lang="en-US" dirty="0"/>
+          </a:p>
+          <a:p>
+            <a:r>
+              <a:rPr lang="en-US" dirty="0"/>
+              <a:t>1025R is better – more PTO power, can use 3-point hitch implement, PTO precision handling, better seat, better steering</a:t>
+            </a:r>
+          </a:p>
+          <a:p>
+            <a:endParaRPr lang="en-US" dirty="0"/>
+          </a:p>
+          <a:p>
+            <a:r>
+              <a:rPr lang="en-US" dirty="0"/>
+              <a:t>1025R base weight – 1,440 </a:t>
+            </a:r>
+            <a:r>
+              <a:rPr lang="en-US" dirty="0" err="1"/>
+              <a:t>lbs</a:t>
+            </a:r>
+            <a:endParaRPr lang="en-US" dirty="0"/>
+          </a:p>
+          <a:p>
+            <a:r>
+              <a:rPr lang="en-US" dirty="0"/>
+              <a:t>(compare with 805 </a:t>
+            </a:r>
+            <a:r>
+              <a:rPr lang="en-US" dirty="0" err="1"/>
+              <a:t>lbs</a:t>
+            </a:r>
+            <a:r>
+              <a:rPr lang="en-US" dirty="0"/>
+              <a:t> for jd-425)</a:t>
+            </a:r>
+          </a:p>
+        </p:txBody>
+      </p:sp>
+      <p:sp>
+        <p:nvSpPr>
+          <p:cNvPr id="10" name="TextBox 9">
+            <a:extLst>
+              <a:ext uri="{FF2B5EF4-FFF2-40B4-BE49-F238E27FC236}">
+                <a16:creationId xmlns:a16="http://schemas.microsoft.com/office/drawing/2014/main" id="{9944A156-B590-1201-FCB9-1A6AB95CC9B7}"/>
+              </a:ext>
+            </a:extLst>
+          </p:cNvPr>
+          <p:cNvSpPr txBox="1"/>
+          <p:nvPr/>
+        </p:nvSpPr>
+        <p:spPr>
+          <a:xfrm>
+            <a:off x="5950334" y="76238"/>
+            <a:ext cx="6138100" cy="646331"/>
+          </a:xfrm>
+          <a:prstGeom prst="rect">
+            <a:avLst/>
+          </a:prstGeom>
+          <a:noFill/>
+        </p:spPr>
+        <p:txBody>
+          <a:bodyPr wrap="square" rtlCol="0">
+            <a:spAutoFit/>
+          </a:bodyPr>
+          <a:lstStyle/>
+          <a:p>
+            <a:r>
+              <a:rPr lang="en-US" sz="1200" dirty="0">
+                <a:hlinkClick r:id="rId3"/>
+              </a:rPr>
+              <a:t>https://</a:t>
+            </a:r>
+            <a:r>
+              <a:rPr lang="en-US" sz="1200" dirty="0" err="1">
+                <a:hlinkClick r:id="rId3"/>
+              </a:rPr>
+              <a:t>www.deere.com</a:t>
+            </a:r>
+            <a:r>
+              <a:rPr lang="en-US" sz="1200" dirty="0">
+                <a:hlinkClick r:id="rId3"/>
+              </a:rPr>
+              <a:t>/</a:t>
+            </a:r>
+            <a:r>
+              <a:rPr lang="en-US" sz="1200" dirty="0" err="1">
+                <a:hlinkClick r:id="rId3"/>
+              </a:rPr>
+              <a:t>en</a:t>
+            </a:r>
+            <a:r>
+              <a:rPr lang="en-US" sz="1200" dirty="0">
+                <a:hlinkClick r:id="rId3"/>
+              </a:rPr>
+              <a:t>/tractors/compact-tractors/1-series-sub-compact-tractors/1023e/</a:t>
+            </a:r>
+            <a:endParaRPr lang="en-US" sz="1200" dirty="0"/>
+          </a:p>
+          <a:p>
+            <a:r>
+              <a:rPr lang="en-US" sz="1200" dirty="0">
+                <a:hlinkClick r:id="rId4"/>
+              </a:rPr>
+              <a:t>https://</a:t>
+            </a:r>
+            <a:r>
+              <a:rPr lang="en-US" sz="1200" dirty="0" err="1">
+                <a:hlinkClick r:id="rId4"/>
+              </a:rPr>
+              <a:t>www.deere.com</a:t>
+            </a:r>
+            <a:r>
+              <a:rPr lang="en-US" sz="1200" dirty="0">
+                <a:hlinkClick r:id="rId4"/>
+              </a:rPr>
+              <a:t>/</a:t>
+            </a:r>
+            <a:r>
+              <a:rPr lang="en-US" sz="1200" dirty="0" err="1">
+                <a:hlinkClick r:id="rId4"/>
+              </a:rPr>
+              <a:t>en</a:t>
+            </a:r>
+            <a:r>
+              <a:rPr lang="en-US" sz="1200" dirty="0">
+                <a:hlinkClick r:id="rId4"/>
+              </a:rPr>
+              <a:t>/tractors/compact-tractors/1-series-sub-compact-tractors/1025r/</a:t>
+            </a:r>
+            <a:endParaRPr lang="en-US" sz="1200" dirty="0"/>
+          </a:p>
+          <a:p>
+            <a:r>
+              <a:rPr lang="en-US" sz="1200" dirty="0">
+                <a:hlinkClick r:id="rId5"/>
+              </a:rPr>
+              <a:t>https://www.youtube.com/watch?v=TeHIpRNJ3LU</a:t>
+            </a:r>
+            <a:endParaRPr lang="en-US" sz="1200" dirty="0"/>
+          </a:p>
+        </p:txBody>
+      </p:sp>
       <p:pic>
         <p:nvPicPr>
-          <p:cNvPr id="4" name="Picture 6" descr="John Deere Backhoe Trencher Bucket - BXX10246">
-            <a:extLst>
-              <a:ext uri="{FF2B5EF4-FFF2-40B4-BE49-F238E27FC236}">
-                <a16:creationId xmlns:a16="http://schemas.microsoft.com/office/drawing/2014/main" id="{A40DB4D0-0B65-E474-FAA9-89F49AE0BA2E}"/>
+          <p:cNvPr id="1030" name="Picture 6" descr="1023E Compact Utility Tractor | Explore John Deere">
+            <a:extLst>
+              <a:ext uri="{FF2B5EF4-FFF2-40B4-BE49-F238E27FC236}">
+                <a16:creationId xmlns:a16="http://schemas.microsoft.com/office/drawing/2014/main" id="{ECD513EA-4836-83C9-A47F-D2F269773E44}"/>
               </a:ext>
             </a:extLst>
           </p:cNvPr>
@@ -5915,7 +5699,7 @@
           <p:nvPr/>
         </p:nvPicPr>
         <p:blipFill rotWithShape="1">
-          <a:blip r:embed="rId3" cstate="email">
+          <a:blip r:embed="rId6" cstate="email">
             <a:extLst>
               <a:ext uri="{28A0092B-C50C-407E-A947-70E740481C1C}">
                 <a14:useLocalDpi xmlns:a14="http://schemas.microsoft.com/office/drawing/2010/main"/>
@@ -5927,8 +5711,8 @@
         </p:blipFill>
         <p:spPr bwMode="auto">
           <a:xfrm>
-            <a:off x="6771525" y="201753"/>
-            <a:ext cx="1394364" cy="1174025"/>
+            <a:off x="3940712" y="1519149"/>
+            <a:ext cx="1556574" cy="1435286"/>
           </a:xfrm>
           <a:prstGeom prst="rect">
             <a:avLst/>
@@ -5952,10 +5736,10 @@
       </p:pic>
       <p:pic>
         <p:nvPicPr>
-          <p:cNvPr id="1032" name="Picture 8" descr="Here's Everything You Need to Know About the 1025R | Lasseter Tractor  Company - Lasseter Equipment Group LLC">
-            <a:extLst>
-              <a:ext uri="{FF2B5EF4-FFF2-40B4-BE49-F238E27FC236}">
-                <a16:creationId xmlns:a16="http://schemas.microsoft.com/office/drawing/2014/main" id="{77A051F0-1F54-EC8D-A775-6AB6A44A4F60}"/>
+          <p:cNvPr id="1034" name="Picture 10" descr="John Deere 1023E Sub-Compact Tractor | wordpress.soegel.de">
+            <a:extLst>
+              <a:ext uri="{FF2B5EF4-FFF2-40B4-BE49-F238E27FC236}">
+                <a16:creationId xmlns:a16="http://schemas.microsoft.com/office/drawing/2014/main" id="{70ED0C30-7549-F8BA-D4CA-6CFCE8D6E9BC}"/>
               </a:ext>
             </a:extLst>
           </p:cNvPr>
@@ -5965,7 +5749,7 @@
           <p:nvPr/>
         </p:nvPicPr>
         <p:blipFill>
-          <a:blip r:embed="rId4" cstate="email">
+          <a:blip r:embed="rId7" cstate="email">
             <a:extLst>
               <a:ext uri="{28A0092B-C50C-407E-A947-70E740481C1C}">
                 <a14:useLocalDpi xmlns:a14="http://schemas.microsoft.com/office/drawing/2010/main"/>
@@ -5979,8 +5763,8 @@
         </p:blipFill>
         <p:spPr bwMode="auto">
           <a:xfrm>
-            <a:off x="194310" y="971550"/>
-            <a:ext cx="3141241" cy="2512992"/>
+            <a:off x="3150024" y="5050814"/>
+            <a:ext cx="2459435" cy="1756739"/>
           </a:xfrm>
           <a:prstGeom prst="rect">
             <a:avLst/>
@@ -6002,124 +5786,12 @@
           </a:extLst>
         </p:spPr>
       </p:pic>
-      <p:sp>
-        <p:nvSpPr>
-          <p:cNvPr id="6" name="TextBox 5">
-            <a:extLst>
-              <a:ext uri="{FF2B5EF4-FFF2-40B4-BE49-F238E27FC236}">
-                <a16:creationId xmlns:a16="http://schemas.microsoft.com/office/drawing/2014/main" id="{776C1E76-B84C-10BD-8368-BAEB43AEB16F}"/>
-              </a:ext>
-            </a:extLst>
-          </p:cNvPr>
-          <p:cNvSpPr txBox="1"/>
-          <p:nvPr/>
-        </p:nvSpPr>
-        <p:spPr>
-          <a:xfrm>
-            <a:off x="2897504" y="442117"/>
-            <a:ext cx="3785442" cy="923330"/>
-          </a:xfrm>
-          <a:prstGeom prst="rect">
-            <a:avLst/>
-          </a:prstGeom>
-          <a:solidFill>
-            <a:schemeClr val="accent4">
-              <a:lumMod val="20000"/>
-              <a:lumOff val="80000"/>
-            </a:schemeClr>
-          </a:solidFill>
-          <a:ln>
-            <a:solidFill>
-              <a:srgbClr val="FF0000"/>
-            </a:solidFill>
-          </a:ln>
-        </p:spPr>
-        <p:txBody>
-          <a:bodyPr wrap="square" rtlCol="0">
-            <a:spAutoFit/>
-          </a:bodyPr>
-          <a:lstStyle/>
-          <a:p>
-            <a:pPr marL="285750" indent="-285750">
-              <a:buFont typeface="Arial" panose="020B0604020202020204" pitchFamily="34" charset="0"/>
-              <a:buChar char="•"/>
-            </a:pPr>
-            <a:r>
-              <a:rPr lang="en-US" b="1" dirty="0">
-                <a:solidFill>
-                  <a:srgbClr val="FF0000"/>
-                </a:solidFill>
-              </a:rPr>
-              <a:t>$6K</a:t>
-            </a:r>
-          </a:p>
-          <a:p>
-            <a:pPr marL="285750" indent="-285750">
-              <a:buFont typeface="Arial" panose="020B0604020202020204" pitchFamily="34" charset="0"/>
-              <a:buChar char="•"/>
-            </a:pPr>
-            <a:r>
-              <a:rPr lang="en-US" dirty="0"/>
-              <a:t>has its own seat</a:t>
-            </a:r>
-          </a:p>
-          <a:p>
-            <a:pPr marL="285750" indent="-285750">
-              <a:buFont typeface="Arial" panose="020B0604020202020204" pitchFamily="34" charset="0"/>
-              <a:buChar char="•"/>
-            </a:pPr>
-            <a:r>
-              <a:rPr lang="en-US" dirty="0"/>
-              <a:t>regular bucket, trenching bucket</a:t>
-            </a:r>
-          </a:p>
-        </p:txBody>
-      </p:sp>
-      <p:sp>
-        <p:nvSpPr>
-          <p:cNvPr id="7" name="TextBox 6">
-            <a:extLst>
-              <a:ext uri="{FF2B5EF4-FFF2-40B4-BE49-F238E27FC236}">
-                <a16:creationId xmlns:a16="http://schemas.microsoft.com/office/drawing/2014/main" id="{BD458471-78CB-CF4F-AC46-8213A5687A8C}"/>
-              </a:ext>
-            </a:extLst>
-          </p:cNvPr>
-          <p:cNvSpPr txBox="1"/>
-          <p:nvPr/>
-        </p:nvSpPr>
-        <p:spPr>
-          <a:xfrm>
-            <a:off x="8254468" y="313789"/>
-            <a:ext cx="1394363" cy="646331"/>
-          </a:xfrm>
-          <a:prstGeom prst="rect">
-            <a:avLst/>
-          </a:prstGeom>
-          <a:noFill/>
-          <a:ln>
-            <a:noFill/>
-          </a:ln>
-        </p:spPr>
-        <p:txBody>
-          <a:bodyPr wrap="square" rtlCol="0">
-            <a:spAutoFit/>
-          </a:bodyPr>
-          <a:lstStyle/>
-          <a:p>
-            <a:pPr algn="ctr"/>
-            <a:r>
-              <a:rPr lang="en-US" dirty="0"/>
-              <a:t>trenching bucket</a:t>
-            </a:r>
-          </a:p>
-        </p:txBody>
-      </p:sp>
       <p:pic>
         <p:nvPicPr>
-          <p:cNvPr id="1026" name="Picture 2" descr="Backhoe VS Excavator : u/Friendly-Explosive">
-            <a:extLst>
-              <a:ext uri="{FF2B5EF4-FFF2-40B4-BE49-F238E27FC236}">
-                <a16:creationId xmlns:a16="http://schemas.microsoft.com/office/drawing/2014/main" id="{59CC2E99-AD62-6227-8CBE-9DCBABB5DCD7}"/>
+          <p:cNvPr id="1036" name="Picture 12" descr="Marissa Mann on X: &quot;Anybody in Twitter-land looking for a small acreage  tractor? We're looking to sell ours to upgrade to something larger so we  can move round bales for my hay">
+            <a:extLst>
+              <a:ext uri="{FF2B5EF4-FFF2-40B4-BE49-F238E27FC236}">
+                <a16:creationId xmlns:a16="http://schemas.microsoft.com/office/drawing/2014/main" id="{E69E1B8C-C34E-819C-34CF-E2A2400F22CF}"/>
               </a:ext>
             </a:extLst>
           </p:cNvPr>
@@ -6128,8 +5800,8 @@
           </p:cNvPicPr>
           <p:nvPr/>
         </p:nvPicPr>
-        <p:blipFill rotWithShape="1">
-          <a:blip r:embed="rId5" cstate="email">
+        <p:blipFill>
+          <a:blip r:embed="rId8" cstate="email">
             <a:extLst>
               <a:ext uri="{28A0092B-C50C-407E-A947-70E740481C1C}">
                 <a14:useLocalDpi xmlns:a14="http://schemas.microsoft.com/office/drawing/2010/main"/>
@@ -6137,12 +5809,14 @@
             </a:extLst>
           </a:blip>
           <a:srcRect/>
-          <a:stretch/>
+          <a:stretch>
+            <a:fillRect/>
+          </a:stretch>
         </p:blipFill>
         <p:spPr bwMode="auto">
           <a:xfrm>
-            <a:off x="9862454" y="4179062"/>
-            <a:ext cx="2242459" cy="2603500"/>
+            <a:off x="9233584" y="976760"/>
+            <a:ext cx="2854850" cy="1901473"/>
           </a:xfrm>
           <a:prstGeom prst="rect">
             <a:avLst/>
@@ -6164,102 +5838,12 @@
           </a:extLst>
         </p:spPr>
       </p:pic>
-      <p:sp>
-        <p:nvSpPr>
-          <p:cNvPr id="5" name="TextBox 4">
-            <a:extLst>
-              <a:ext uri="{FF2B5EF4-FFF2-40B4-BE49-F238E27FC236}">
-                <a16:creationId xmlns:a16="http://schemas.microsoft.com/office/drawing/2014/main" id="{0E0429E4-AF4E-72D3-2146-DBFDE94382D0}"/>
-              </a:ext>
-            </a:extLst>
-          </p:cNvPr>
-          <p:cNvSpPr txBox="1"/>
-          <p:nvPr/>
-        </p:nvSpPr>
-        <p:spPr>
-          <a:xfrm>
-            <a:off x="6018778" y="5897880"/>
-            <a:ext cx="3785442" cy="646331"/>
-          </a:xfrm>
-          <a:prstGeom prst="rect">
-            <a:avLst/>
-          </a:prstGeom>
-          <a:solidFill>
-            <a:schemeClr val="accent4">
-              <a:lumMod val="20000"/>
-              <a:lumOff val="80000"/>
-            </a:schemeClr>
-          </a:solidFill>
-          <a:ln>
-            <a:solidFill>
-              <a:srgbClr val="FF0000"/>
-            </a:solidFill>
-          </a:ln>
-        </p:spPr>
-        <p:txBody>
-          <a:bodyPr wrap="square" rtlCol="0">
-            <a:spAutoFit/>
-          </a:bodyPr>
-          <a:lstStyle/>
-          <a:p>
-            <a:r>
-              <a:rPr lang="en-US" dirty="0"/>
-              <a:t>Tracked Excavator - heavier duty, can dig more, father and deeper</a:t>
-            </a:r>
-          </a:p>
-        </p:txBody>
-      </p:sp>
-      <p:sp>
-        <p:nvSpPr>
-          <p:cNvPr id="8" name="TextBox 7">
-            <a:extLst>
-              <a:ext uri="{FF2B5EF4-FFF2-40B4-BE49-F238E27FC236}">
-                <a16:creationId xmlns:a16="http://schemas.microsoft.com/office/drawing/2014/main" id="{2EF4C58F-A0F2-6DE0-54B2-1F5894122D66}"/>
-              </a:ext>
-            </a:extLst>
-          </p:cNvPr>
-          <p:cNvSpPr txBox="1"/>
-          <p:nvPr/>
-        </p:nvSpPr>
-        <p:spPr>
-          <a:xfrm>
-            <a:off x="6018778" y="4778455"/>
-            <a:ext cx="3785442" cy="646331"/>
-          </a:xfrm>
-          <a:prstGeom prst="rect">
-            <a:avLst/>
-          </a:prstGeom>
-          <a:solidFill>
-            <a:schemeClr val="accent4">
-              <a:lumMod val="20000"/>
-              <a:lumOff val="80000"/>
-            </a:schemeClr>
-          </a:solidFill>
-          <a:ln>
-            <a:solidFill>
-              <a:srgbClr val="FF0000"/>
-            </a:solidFill>
-          </a:ln>
-        </p:spPr>
-        <p:txBody>
-          <a:bodyPr wrap="square" rtlCol="0">
-            <a:spAutoFit/>
-          </a:bodyPr>
-          <a:lstStyle/>
-          <a:p>
-            <a:r>
-              <a:rPr lang="en-US" dirty="0"/>
-              <a:t>Wheeled Backhoe – smaller, lighter, more agile</a:t>
-            </a:r>
-          </a:p>
-        </p:txBody>
-      </p:sp>
       <p:pic>
         <p:nvPicPr>
-          <p:cNvPr id="9" name="Picture 2" descr="1025R vs 2025R spec comparison graphic | Green Tractor Talk">
-            <a:extLst>
-              <a:ext uri="{FF2B5EF4-FFF2-40B4-BE49-F238E27FC236}">
-                <a16:creationId xmlns:a16="http://schemas.microsoft.com/office/drawing/2014/main" id="{6EE92ACC-3C05-CEFE-7668-731BEC0696F5}"/>
+          <p:cNvPr id="1038" name="Picture 14" descr="John Deere 1023e backhoe usage for myself and the boys - YouTube">
+            <a:extLst>
+              <a:ext uri="{FF2B5EF4-FFF2-40B4-BE49-F238E27FC236}">
+                <a16:creationId xmlns:a16="http://schemas.microsoft.com/office/drawing/2014/main" id="{65AE8BB0-FA56-E493-B5AA-349B09F298D3}"/>
               </a:ext>
             </a:extLst>
           </p:cNvPr>
@@ -6268,8 +5852,8 @@
           </p:cNvPicPr>
           <p:nvPr/>
         </p:nvPicPr>
-        <p:blipFill>
-          <a:blip r:embed="rId6" cstate="email">
+        <p:blipFill rotWithShape="1">
+          <a:blip r:embed="rId9" cstate="email">
             <a:extLst>
               <a:ext uri="{28A0092B-C50C-407E-A947-70E740481C1C}">
                 <a14:useLocalDpi xmlns:a14="http://schemas.microsoft.com/office/drawing/2010/main"/>
@@ -6277,14 +5861,12 @@
             </a:extLst>
           </a:blip>
           <a:srcRect/>
-          <a:stretch>
-            <a:fillRect/>
-          </a:stretch>
+          <a:stretch/>
         </p:blipFill>
         <p:spPr bwMode="auto">
           <a:xfrm>
-            <a:off x="4499776" y="2033512"/>
-            <a:ext cx="4693634" cy="2603500"/>
+            <a:off x="3941472" y="2998351"/>
+            <a:ext cx="3733458" cy="1938614"/>
           </a:xfrm>
           <a:prstGeom prst="rect">
             <a:avLst/>
@@ -6308,6 +5890,722 @@
       </p:pic>
       <p:sp>
         <p:nvSpPr>
+          <p:cNvPr id="3" name="TextBox 2">
+            <a:extLst>
+              <a:ext uri="{FF2B5EF4-FFF2-40B4-BE49-F238E27FC236}">
+                <a16:creationId xmlns:a16="http://schemas.microsoft.com/office/drawing/2014/main" id="{D2CAF9AA-7188-244D-4207-3D6194A6A33F}"/>
+              </a:ext>
+            </a:extLst>
+          </p:cNvPr>
+          <p:cNvSpPr txBox="1"/>
+          <p:nvPr/>
+        </p:nvSpPr>
+        <p:spPr>
+          <a:xfrm>
+            <a:off x="60784" y="5050814"/>
+            <a:ext cx="3032686" cy="1754326"/>
+          </a:xfrm>
+          <a:prstGeom prst="rect">
+            <a:avLst/>
+          </a:prstGeom>
+          <a:solidFill>
+            <a:schemeClr val="accent4">
+              <a:lumMod val="20000"/>
+              <a:lumOff val="80000"/>
+            </a:schemeClr>
+          </a:solidFill>
+          <a:ln>
+            <a:solidFill>
+              <a:srgbClr val="FF0000"/>
+            </a:solidFill>
+          </a:ln>
+        </p:spPr>
+        <p:txBody>
+          <a:bodyPr wrap="square" rtlCol="0">
+            <a:spAutoFit/>
+          </a:bodyPr>
+          <a:lstStyle/>
+          <a:p>
+            <a:pPr marL="285750" indent="-285750">
+              <a:buFont typeface="Arial" panose="020B0604020202020204" pitchFamily="34" charset="0"/>
+              <a:buChar char="•"/>
+            </a:pPr>
+            <a:r>
+              <a:rPr lang="en-US" dirty="0"/>
+              <a:t>Front loader</a:t>
+            </a:r>
+          </a:p>
+          <a:p>
+            <a:pPr marL="285750" indent="-285750">
+              <a:buFont typeface="Arial" panose="020B0604020202020204" pitchFamily="34" charset="0"/>
+              <a:buChar char="•"/>
+            </a:pPr>
+            <a:r>
+              <a:rPr lang="en-US" dirty="0"/>
+              <a:t>Quick attach</a:t>
+            </a:r>
+          </a:p>
+          <a:p>
+            <a:pPr marL="285750" indent="-285750">
+              <a:buFont typeface="Arial" panose="020B0604020202020204" pitchFamily="34" charset="0"/>
+              <a:buChar char="•"/>
+            </a:pPr>
+            <a:r>
+              <a:rPr lang="en-US" dirty="0"/>
+              <a:t>back counter-weight</a:t>
+            </a:r>
+          </a:p>
+          <a:p>
+            <a:pPr marL="285750" indent="-285750">
+              <a:buFont typeface="Arial" panose="020B0604020202020204" pitchFamily="34" charset="0"/>
+              <a:buChar char="•"/>
+            </a:pPr>
+            <a:r>
+              <a:rPr lang="en-US" dirty="0"/>
+              <a:t>mower platform + bagger</a:t>
+            </a:r>
+          </a:p>
+          <a:p>
+            <a:pPr marL="285750" indent="-285750">
+              <a:buFont typeface="Arial" panose="020B0604020202020204" pitchFamily="34" charset="0"/>
+              <a:buChar char="•"/>
+            </a:pPr>
+            <a:r>
+              <a:rPr lang="en-US" dirty="0"/>
+              <a:t>tires, dual-tires</a:t>
+            </a:r>
+          </a:p>
+          <a:p>
+            <a:pPr marL="285750" indent="-285750">
+              <a:buFont typeface="Arial" panose="020B0604020202020204" pitchFamily="34" charset="0"/>
+              <a:buChar char="•"/>
+            </a:pPr>
+            <a:r>
+              <a:rPr lang="en-US" dirty="0"/>
+              <a:t>additional hydraulics</a:t>
+            </a:r>
+          </a:p>
+        </p:txBody>
+      </p:sp>
+      <p:pic>
+        <p:nvPicPr>
+          <p:cNvPr id="1026" name="Picture 2" descr="It's Mow Time: Here are Three Tips for Buying, Maintaining and Operating  Mid-Mount or Rear-Mount Mowers - Compact Equipment Magazine">
+            <a:extLst>
+              <a:ext uri="{FF2B5EF4-FFF2-40B4-BE49-F238E27FC236}">
+                <a16:creationId xmlns:a16="http://schemas.microsoft.com/office/drawing/2014/main" id="{E686C925-F3E8-F724-6E6D-7834F4452248}"/>
+              </a:ext>
+            </a:extLst>
+          </p:cNvPr>
+          <p:cNvPicPr>
+            <a:picLocks noChangeAspect="1" noChangeArrowheads="1"/>
+          </p:cNvPicPr>
+          <p:nvPr/>
+        </p:nvPicPr>
+        <p:blipFill>
+          <a:blip r:embed="rId10" cstate="email">
+            <a:extLst>
+              <a:ext uri="{28A0092B-C50C-407E-A947-70E740481C1C}">
+                <a14:useLocalDpi xmlns:a14="http://schemas.microsoft.com/office/drawing/2010/main"/>
+              </a:ext>
+            </a:extLst>
+          </a:blip>
+          <a:srcRect/>
+          <a:stretch>
+            <a:fillRect/>
+          </a:stretch>
+        </p:blipFill>
+        <p:spPr bwMode="auto">
+          <a:xfrm>
+            <a:off x="9436379" y="4983451"/>
+            <a:ext cx="2652055" cy="1818841"/>
+          </a:xfrm>
+          <a:prstGeom prst="rect">
+            <a:avLst/>
+          </a:prstGeom>
+          <a:noFill/>
+          <a:ln>
+            <a:solidFill>
+              <a:srgbClr val="FF0000"/>
+            </a:solidFill>
+          </a:ln>
+          <a:extLst>
+            <a:ext uri="{909E8E84-426E-40DD-AFC4-6F175D3DCCD1}">
+              <a14:hiddenFill xmlns:a14="http://schemas.microsoft.com/office/drawing/2010/main">
+                <a:solidFill>
+                  <a:srgbClr val="FFFFFF"/>
+                </a:solidFill>
+              </a14:hiddenFill>
+            </a:ext>
+          </a:extLst>
+        </p:spPr>
+      </p:pic>
+      <p:sp>
+        <p:nvSpPr>
+          <p:cNvPr id="4" name="TextBox 3">
+            <a:extLst>
+              <a:ext uri="{FF2B5EF4-FFF2-40B4-BE49-F238E27FC236}">
+                <a16:creationId xmlns:a16="http://schemas.microsoft.com/office/drawing/2014/main" id="{0D13D5CF-25CC-2C60-6834-D2E4CA048AE5}"/>
+              </a:ext>
+            </a:extLst>
+          </p:cNvPr>
+          <p:cNvSpPr txBox="1"/>
+          <p:nvPr/>
+        </p:nvSpPr>
+        <p:spPr>
+          <a:xfrm>
+            <a:off x="7808126" y="5795074"/>
+            <a:ext cx="1566971" cy="584775"/>
+          </a:xfrm>
+          <a:prstGeom prst="rect">
+            <a:avLst/>
+          </a:prstGeom>
+          <a:noFill/>
+        </p:spPr>
+        <p:txBody>
+          <a:bodyPr wrap="square" rtlCol="0">
+            <a:spAutoFit/>
+          </a:bodyPr>
+          <a:lstStyle/>
+          <a:p>
+            <a:r>
+              <a:rPr lang="en-US" sz="1600" dirty="0">
+                <a:latin typeface="Calibri" panose="020F0502020204030204" pitchFamily="34" charset="0"/>
+                <a:cs typeface="Calibri" panose="020F0502020204030204" pitchFamily="34" charset="0"/>
+              </a:rPr>
+              <a:t>Auto-connect mower platform</a:t>
+            </a:r>
+          </a:p>
+        </p:txBody>
+      </p:sp>
+    </p:spTree>
+    <p:extLst>
+      <p:ext uri="{BB962C8B-B14F-4D97-AF65-F5344CB8AC3E}">
+        <p14:creationId xmlns:p14="http://schemas.microsoft.com/office/powerpoint/2010/main" val="3381841661"/>
+      </p:ext>
+    </p:extLst>
+  </p:cSld>
+  <p:clrMapOvr>
+    <a:masterClrMapping/>
+  </p:clrMapOvr>
+</p:sld>
+</file>
+
+<file path=ppt/slides/slide14.xml><?xml version="1.0" encoding="utf-8"?>
+<p:sld xmlns:a="http://schemas.openxmlformats.org/drawingml/2006/main" xmlns:r="http://schemas.openxmlformats.org/officeDocument/2006/relationships" xmlns:p="http://schemas.openxmlformats.org/presentationml/2006/main">
+  <p:cSld>
+    <p:spTree>
+      <p:nvGrpSpPr>
+        <p:cNvPr id="1" name=""/>
+        <p:cNvGrpSpPr/>
+        <p:nvPr/>
+      </p:nvGrpSpPr>
+      <p:grpSpPr>
+        <a:xfrm>
+          <a:off x="0" y="0"/>
+          <a:ext cx="0" cy="0"/>
+          <a:chOff x="0" y="0"/>
+          <a:chExt cx="0" cy="0"/>
+        </a:xfrm>
+      </p:grpSpPr>
+      <p:sp>
+        <p:nvSpPr>
+          <p:cNvPr id="2" name="TextBox 1">
+            <a:extLst>
+              <a:ext uri="{FF2B5EF4-FFF2-40B4-BE49-F238E27FC236}">
+                <a16:creationId xmlns:a16="http://schemas.microsoft.com/office/drawing/2014/main" id="{775BBD15-AEC2-1815-2347-A5BB8F308263}"/>
+              </a:ext>
+            </a:extLst>
+          </p:cNvPr>
+          <p:cNvSpPr txBox="1"/>
+          <p:nvPr/>
+        </p:nvSpPr>
+        <p:spPr>
+          <a:xfrm>
+            <a:off x="-1" y="0"/>
+            <a:ext cx="5795011" cy="461665"/>
+          </a:xfrm>
+          <a:prstGeom prst="rect">
+            <a:avLst/>
+          </a:prstGeom>
+          <a:noFill/>
+        </p:spPr>
+        <p:txBody>
+          <a:bodyPr wrap="square" rtlCol="0">
+            <a:spAutoFit/>
+          </a:bodyPr>
+          <a:lstStyle/>
+          <a:p>
+            <a:r>
+              <a:rPr lang="en-US" sz="2400" b="1" dirty="0"/>
+              <a:t>Backhoe 260b – use with 1025R</a:t>
+            </a:r>
+            <a:endParaRPr lang="en-US" sz="2400" b="1" i="0" dirty="0">
+              <a:solidFill>
+                <a:srgbClr val="333333"/>
+              </a:solidFill>
+              <a:effectLst/>
+            </a:endParaRPr>
+          </a:p>
+        </p:txBody>
+      </p:sp>
+      <p:pic>
+        <p:nvPicPr>
+          <p:cNvPr id="3" name="Picture 4" descr="Backhoe Storage Dolly John Deere 260 and 260B Back Hoe">
+            <a:extLst>
+              <a:ext uri="{FF2B5EF4-FFF2-40B4-BE49-F238E27FC236}">
+                <a16:creationId xmlns:a16="http://schemas.microsoft.com/office/drawing/2014/main" id="{3E020E38-F6F1-90B7-5CF4-DED18B6B7296}"/>
+              </a:ext>
+            </a:extLst>
+          </p:cNvPr>
+          <p:cNvPicPr>
+            <a:picLocks noChangeAspect="1" noChangeArrowheads="1"/>
+          </p:cNvPicPr>
+          <p:nvPr/>
+        </p:nvPicPr>
+        <p:blipFill rotWithShape="1">
+          <a:blip r:embed="rId2" cstate="email">
+            <a:extLst>
+              <a:ext uri="{28A0092B-C50C-407E-A947-70E740481C1C}">
+                <a14:useLocalDpi xmlns:a14="http://schemas.microsoft.com/office/drawing/2010/main"/>
+              </a:ext>
+            </a:extLst>
+          </a:blip>
+          <a:srcRect/>
+          <a:stretch/>
+        </p:blipFill>
+        <p:spPr bwMode="auto">
+          <a:xfrm>
+            <a:off x="194310" y="3620079"/>
+            <a:ext cx="3141240" cy="2176219"/>
+          </a:xfrm>
+          <a:prstGeom prst="rect">
+            <a:avLst/>
+          </a:prstGeom>
+          <a:noFill/>
+          <a:ln>
+            <a:solidFill>
+              <a:srgbClr val="FF0000"/>
+            </a:solidFill>
+          </a:ln>
+          <a:extLst>
+            <a:ext uri="{909E8E84-426E-40DD-AFC4-6F175D3DCCD1}">
+              <a14:hiddenFill xmlns:a14="http://schemas.microsoft.com/office/drawing/2010/main">
+                <a:solidFill>
+                  <a:srgbClr val="FFFFFF"/>
+                </a:solidFill>
+              </a14:hiddenFill>
+            </a:ext>
+          </a:extLst>
+        </p:spPr>
+      </p:pic>
+      <p:pic>
+        <p:nvPicPr>
+          <p:cNvPr id="4" name="Picture 6" descr="John Deere Backhoe Trencher Bucket - BXX10246">
+            <a:extLst>
+              <a:ext uri="{FF2B5EF4-FFF2-40B4-BE49-F238E27FC236}">
+                <a16:creationId xmlns:a16="http://schemas.microsoft.com/office/drawing/2014/main" id="{A40DB4D0-0B65-E474-FAA9-89F49AE0BA2E}"/>
+              </a:ext>
+            </a:extLst>
+          </p:cNvPr>
+          <p:cNvPicPr>
+            <a:picLocks noChangeAspect="1" noChangeArrowheads="1"/>
+          </p:cNvPicPr>
+          <p:nvPr/>
+        </p:nvPicPr>
+        <p:blipFill rotWithShape="1">
+          <a:blip r:embed="rId3" cstate="email">
+            <a:extLst>
+              <a:ext uri="{28A0092B-C50C-407E-A947-70E740481C1C}">
+                <a14:useLocalDpi xmlns:a14="http://schemas.microsoft.com/office/drawing/2010/main"/>
+              </a:ext>
+            </a:extLst>
+          </a:blip>
+          <a:srcRect/>
+          <a:stretch/>
+        </p:blipFill>
+        <p:spPr bwMode="auto">
+          <a:xfrm>
+            <a:off x="6771525" y="201753"/>
+            <a:ext cx="1394364" cy="1174025"/>
+          </a:xfrm>
+          <a:prstGeom prst="rect">
+            <a:avLst/>
+          </a:prstGeom>
+          <a:noFill/>
+          <a:ln>
+            <a:solidFill>
+              <a:srgbClr val="FF0000"/>
+            </a:solidFill>
+          </a:ln>
+          <a:extLst>
+            <a:ext uri="{909E8E84-426E-40DD-AFC4-6F175D3DCCD1}">
+              <a14:hiddenFill xmlns:a14="http://schemas.microsoft.com/office/drawing/2010/main">
+                <a:solidFill>
+                  <a:srgbClr val="FFFFFF"/>
+                </a:solidFill>
+              </a14:hiddenFill>
+            </a:ext>
+          </a:extLst>
+        </p:spPr>
+      </p:pic>
+      <p:pic>
+        <p:nvPicPr>
+          <p:cNvPr id="1032" name="Picture 8" descr="Here's Everything You Need to Know About the 1025R | Lasseter Tractor  Company - Lasseter Equipment Group LLC">
+            <a:extLst>
+              <a:ext uri="{FF2B5EF4-FFF2-40B4-BE49-F238E27FC236}">
+                <a16:creationId xmlns:a16="http://schemas.microsoft.com/office/drawing/2014/main" id="{77A051F0-1F54-EC8D-A775-6AB6A44A4F60}"/>
+              </a:ext>
+            </a:extLst>
+          </p:cNvPr>
+          <p:cNvPicPr>
+            <a:picLocks noChangeAspect="1" noChangeArrowheads="1"/>
+          </p:cNvPicPr>
+          <p:nvPr/>
+        </p:nvPicPr>
+        <p:blipFill>
+          <a:blip r:embed="rId4" cstate="email">
+            <a:extLst>
+              <a:ext uri="{28A0092B-C50C-407E-A947-70E740481C1C}">
+                <a14:useLocalDpi xmlns:a14="http://schemas.microsoft.com/office/drawing/2010/main"/>
+              </a:ext>
+            </a:extLst>
+          </a:blip>
+          <a:srcRect/>
+          <a:stretch>
+            <a:fillRect/>
+          </a:stretch>
+        </p:blipFill>
+        <p:spPr bwMode="auto">
+          <a:xfrm>
+            <a:off x="194310" y="971550"/>
+            <a:ext cx="3141241" cy="2512992"/>
+          </a:xfrm>
+          <a:prstGeom prst="rect">
+            <a:avLst/>
+          </a:prstGeom>
+          <a:noFill/>
+          <a:ln>
+            <a:solidFill>
+              <a:srgbClr val="FF0000"/>
+            </a:solidFill>
+          </a:ln>
+          <a:extLst>
+            <a:ext uri="{909E8E84-426E-40DD-AFC4-6F175D3DCCD1}">
+              <a14:hiddenFill xmlns:a14="http://schemas.microsoft.com/office/drawing/2010/main">
+                <a:solidFill>
+                  <a:srgbClr val="FFFFFF"/>
+                </a:solidFill>
+              </a14:hiddenFill>
+            </a:ext>
+          </a:extLst>
+        </p:spPr>
+      </p:pic>
+      <p:sp>
+        <p:nvSpPr>
+          <p:cNvPr id="6" name="TextBox 5">
+            <a:extLst>
+              <a:ext uri="{FF2B5EF4-FFF2-40B4-BE49-F238E27FC236}">
+                <a16:creationId xmlns:a16="http://schemas.microsoft.com/office/drawing/2014/main" id="{776C1E76-B84C-10BD-8368-BAEB43AEB16F}"/>
+              </a:ext>
+            </a:extLst>
+          </p:cNvPr>
+          <p:cNvSpPr txBox="1"/>
+          <p:nvPr/>
+        </p:nvSpPr>
+        <p:spPr>
+          <a:xfrm>
+            <a:off x="2897504" y="442117"/>
+            <a:ext cx="3785442" cy="923330"/>
+          </a:xfrm>
+          <a:prstGeom prst="rect">
+            <a:avLst/>
+          </a:prstGeom>
+          <a:solidFill>
+            <a:schemeClr val="accent4">
+              <a:lumMod val="20000"/>
+              <a:lumOff val="80000"/>
+            </a:schemeClr>
+          </a:solidFill>
+          <a:ln>
+            <a:solidFill>
+              <a:srgbClr val="FF0000"/>
+            </a:solidFill>
+          </a:ln>
+        </p:spPr>
+        <p:txBody>
+          <a:bodyPr wrap="square" rtlCol="0">
+            <a:spAutoFit/>
+          </a:bodyPr>
+          <a:lstStyle/>
+          <a:p>
+            <a:pPr marL="285750" indent="-285750">
+              <a:buFont typeface="Arial" panose="020B0604020202020204" pitchFamily="34" charset="0"/>
+              <a:buChar char="•"/>
+            </a:pPr>
+            <a:r>
+              <a:rPr lang="en-US" b="1" dirty="0">
+                <a:solidFill>
+                  <a:srgbClr val="FF0000"/>
+                </a:solidFill>
+              </a:rPr>
+              <a:t>$6K</a:t>
+            </a:r>
+          </a:p>
+          <a:p>
+            <a:pPr marL="285750" indent="-285750">
+              <a:buFont typeface="Arial" panose="020B0604020202020204" pitchFamily="34" charset="0"/>
+              <a:buChar char="•"/>
+            </a:pPr>
+            <a:r>
+              <a:rPr lang="en-US" dirty="0"/>
+              <a:t>has its own seat</a:t>
+            </a:r>
+          </a:p>
+          <a:p>
+            <a:pPr marL="285750" indent="-285750">
+              <a:buFont typeface="Arial" panose="020B0604020202020204" pitchFamily="34" charset="0"/>
+              <a:buChar char="•"/>
+            </a:pPr>
+            <a:r>
+              <a:rPr lang="en-US" dirty="0"/>
+              <a:t>regular bucket, trenching bucket</a:t>
+            </a:r>
+          </a:p>
+        </p:txBody>
+      </p:sp>
+      <p:sp>
+        <p:nvSpPr>
+          <p:cNvPr id="7" name="TextBox 6">
+            <a:extLst>
+              <a:ext uri="{FF2B5EF4-FFF2-40B4-BE49-F238E27FC236}">
+                <a16:creationId xmlns:a16="http://schemas.microsoft.com/office/drawing/2014/main" id="{BD458471-78CB-CF4F-AC46-8213A5687A8C}"/>
+              </a:ext>
+            </a:extLst>
+          </p:cNvPr>
+          <p:cNvSpPr txBox="1"/>
+          <p:nvPr/>
+        </p:nvSpPr>
+        <p:spPr>
+          <a:xfrm>
+            <a:off x="8254468" y="313789"/>
+            <a:ext cx="1394363" cy="646331"/>
+          </a:xfrm>
+          <a:prstGeom prst="rect">
+            <a:avLst/>
+          </a:prstGeom>
+          <a:noFill/>
+          <a:ln>
+            <a:noFill/>
+          </a:ln>
+        </p:spPr>
+        <p:txBody>
+          <a:bodyPr wrap="square" rtlCol="0">
+            <a:spAutoFit/>
+          </a:bodyPr>
+          <a:lstStyle/>
+          <a:p>
+            <a:pPr algn="ctr"/>
+            <a:r>
+              <a:rPr lang="en-US" dirty="0"/>
+              <a:t>trenching bucket</a:t>
+            </a:r>
+          </a:p>
+        </p:txBody>
+      </p:sp>
+      <p:pic>
+        <p:nvPicPr>
+          <p:cNvPr id="1026" name="Picture 2" descr="Backhoe VS Excavator : u/Friendly-Explosive">
+            <a:extLst>
+              <a:ext uri="{FF2B5EF4-FFF2-40B4-BE49-F238E27FC236}">
+                <a16:creationId xmlns:a16="http://schemas.microsoft.com/office/drawing/2014/main" id="{59CC2E99-AD62-6227-8CBE-9DCBABB5DCD7}"/>
+              </a:ext>
+            </a:extLst>
+          </p:cNvPr>
+          <p:cNvPicPr>
+            <a:picLocks noChangeAspect="1" noChangeArrowheads="1"/>
+          </p:cNvPicPr>
+          <p:nvPr/>
+        </p:nvPicPr>
+        <p:blipFill rotWithShape="1">
+          <a:blip r:embed="rId5" cstate="email">
+            <a:extLst>
+              <a:ext uri="{28A0092B-C50C-407E-A947-70E740481C1C}">
+                <a14:useLocalDpi xmlns:a14="http://schemas.microsoft.com/office/drawing/2010/main"/>
+              </a:ext>
+            </a:extLst>
+          </a:blip>
+          <a:srcRect/>
+          <a:stretch/>
+        </p:blipFill>
+        <p:spPr bwMode="auto">
+          <a:xfrm>
+            <a:off x="9862454" y="4179062"/>
+            <a:ext cx="2242459" cy="2603500"/>
+          </a:xfrm>
+          <a:prstGeom prst="rect">
+            <a:avLst/>
+          </a:prstGeom>
+          <a:noFill/>
+          <a:ln>
+            <a:solidFill>
+              <a:srgbClr val="FF0000"/>
+            </a:solidFill>
+          </a:ln>
+          <a:extLst>
+            <a:ext uri="{909E8E84-426E-40DD-AFC4-6F175D3DCCD1}">
+              <a14:hiddenFill xmlns:a14="http://schemas.microsoft.com/office/drawing/2010/main">
+                <a:solidFill>
+                  <a:srgbClr val="FFFFFF"/>
+                </a:solidFill>
+              </a14:hiddenFill>
+            </a:ext>
+          </a:extLst>
+        </p:spPr>
+      </p:pic>
+      <p:sp>
+        <p:nvSpPr>
+          <p:cNvPr id="5" name="TextBox 4">
+            <a:extLst>
+              <a:ext uri="{FF2B5EF4-FFF2-40B4-BE49-F238E27FC236}">
+                <a16:creationId xmlns:a16="http://schemas.microsoft.com/office/drawing/2014/main" id="{0E0429E4-AF4E-72D3-2146-DBFDE94382D0}"/>
+              </a:ext>
+            </a:extLst>
+          </p:cNvPr>
+          <p:cNvSpPr txBox="1"/>
+          <p:nvPr/>
+        </p:nvSpPr>
+        <p:spPr>
+          <a:xfrm>
+            <a:off x="6018778" y="5897880"/>
+            <a:ext cx="3785442" cy="646331"/>
+          </a:xfrm>
+          <a:prstGeom prst="rect">
+            <a:avLst/>
+          </a:prstGeom>
+          <a:solidFill>
+            <a:schemeClr val="accent4">
+              <a:lumMod val="20000"/>
+              <a:lumOff val="80000"/>
+            </a:schemeClr>
+          </a:solidFill>
+          <a:ln>
+            <a:solidFill>
+              <a:srgbClr val="FF0000"/>
+            </a:solidFill>
+          </a:ln>
+        </p:spPr>
+        <p:txBody>
+          <a:bodyPr wrap="square" rtlCol="0">
+            <a:spAutoFit/>
+          </a:bodyPr>
+          <a:lstStyle/>
+          <a:p>
+            <a:r>
+              <a:rPr lang="en-US" dirty="0"/>
+              <a:t>Tracked Excavator - heavier duty, can dig more, father and deeper</a:t>
+            </a:r>
+          </a:p>
+        </p:txBody>
+      </p:sp>
+      <p:sp>
+        <p:nvSpPr>
+          <p:cNvPr id="8" name="TextBox 7">
+            <a:extLst>
+              <a:ext uri="{FF2B5EF4-FFF2-40B4-BE49-F238E27FC236}">
+                <a16:creationId xmlns:a16="http://schemas.microsoft.com/office/drawing/2014/main" id="{2EF4C58F-A0F2-6DE0-54B2-1F5894122D66}"/>
+              </a:ext>
+            </a:extLst>
+          </p:cNvPr>
+          <p:cNvSpPr txBox="1"/>
+          <p:nvPr/>
+        </p:nvSpPr>
+        <p:spPr>
+          <a:xfrm>
+            <a:off x="6018778" y="4778455"/>
+            <a:ext cx="3785442" cy="646331"/>
+          </a:xfrm>
+          <a:prstGeom prst="rect">
+            <a:avLst/>
+          </a:prstGeom>
+          <a:solidFill>
+            <a:schemeClr val="accent4">
+              <a:lumMod val="20000"/>
+              <a:lumOff val="80000"/>
+            </a:schemeClr>
+          </a:solidFill>
+          <a:ln>
+            <a:solidFill>
+              <a:srgbClr val="FF0000"/>
+            </a:solidFill>
+          </a:ln>
+        </p:spPr>
+        <p:txBody>
+          <a:bodyPr wrap="square" rtlCol="0">
+            <a:spAutoFit/>
+          </a:bodyPr>
+          <a:lstStyle/>
+          <a:p>
+            <a:r>
+              <a:rPr lang="en-US" dirty="0"/>
+              <a:t>Wheeled Backhoe – smaller, lighter, more agile</a:t>
+            </a:r>
+          </a:p>
+        </p:txBody>
+      </p:sp>
+      <p:pic>
+        <p:nvPicPr>
+          <p:cNvPr id="9" name="Picture 2" descr="1025R vs 2025R spec comparison graphic | Green Tractor Talk">
+            <a:extLst>
+              <a:ext uri="{FF2B5EF4-FFF2-40B4-BE49-F238E27FC236}">
+                <a16:creationId xmlns:a16="http://schemas.microsoft.com/office/drawing/2014/main" id="{6EE92ACC-3C05-CEFE-7668-731BEC0696F5}"/>
+              </a:ext>
+            </a:extLst>
+          </p:cNvPr>
+          <p:cNvPicPr>
+            <a:picLocks noChangeAspect="1" noChangeArrowheads="1"/>
+          </p:cNvPicPr>
+          <p:nvPr/>
+        </p:nvPicPr>
+        <p:blipFill>
+          <a:blip r:embed="rId6" cstate="email">
+            <a:extLst>
+              <a:ext uri="{28A0092B-C50C-407E-A947-70E740481C1C}">
+                <a14:useLocalDpi xmlns:a14="http://schemas.microsoft.com/office/drawing/2010/main"/>
+              </a:ext>
+            </a:extLst>
+          </a:blip>
+          <a:srcRect/>
+          <a:stretch>
+            <a:fillRect/>
+          </a:stretch>
+        </p:blipFill>
+        <p:spPr bwMode="auto">
+          <a:xfrm>
+            <a:off x="4499776" y="2033512"/>
+            <a:ext cx="4693634" cy="2603500"/>
+          </a:xfrm>
+          <a:prstGeom prst="rect">
+            <a:avLst/>
+          </a:prstGeom>
+          <a:noFill/>
+          <a:ln>
+            <a:solidFill>
+              <a:srgbClr val="FF0000"/>
+            </a:solidFill>
+          </a:ln>
+          <a:extLst>
+            <a:ext uri="{909E8E84-426E-40DD-AFC4-6F175D3DCCD1}">
+              <a14:hiddenFill xmlns:a14="http://schemas.microsoft.com/office/drawing/2010/main">
+                <a:solidFill>
+                  <a:srgbClr val="FFFFFF"/>
+                </a:solidFill>
+              </a14:hiddenFill>
+            </a:ext>
+          </a:extLst>
+        </p:spPr>
+      </p:pic>
+      <p:sp>
+        <p:nvSpPr>
           <p:cNvPr id="10" name="TextBox 9">
             <a:extLst>
               <a:ext uri="{FF2B5EF4-FFF2-40B4-BE49-F238E27FC236}">
@@ -6405,7 +6703,7 @@
 </p:sld>
 </file>
 
-<file path=ppt/slides/slide14.xml><?xml version="1.0" encoding="utf-8"?>
+<file path=ppt/slides/slide15.xml><?xml version="1.0" encoding="utf-8"?>
 <p:sld xmlns:a="http://schemas.openxmlformats.org/drawingml/2006/main" xmlns:r="http://schemas.openxmlformats.org/officeDocument/2006/relationships" xmlns:p="http://schemas.openxmlformats.org/presentationml/2006/main">
   <p:cSld>
     <p:spTree>
@@ -6799,7 +7097,7 @@
 </p:sld>
 </file>
 
-<file path=ppt/slides/slide15.xml><?xml version="1.0" encoding="utf-8"?>
+<file path=ppt/slides/slide16.xml><?xml version="1.0" encoding="utf-8"?>
 <p:sld xmlns:a="http://schemas.openxmlformats.org/drawingml/2006/main" xmlns:r="http://schemas.openxmlformats.org/officeDocument/2006/relationships" xmlns:p="http://schemas.openxmlformats.org/presentationml/2006/main">
   <p:cSld>
     <p:spTree>
@@ -9538,45 +9836,21 @@
           <p:nvPr/>
         </p:nvPicPr>
         <p:blipFill>
-          <a:blip r:embed="rId6"/>
+          <a:blip r:embed="rId6" cstate="email">
+            <a:extLst>
+              <a:ext uri="{28A0092B-C50C-407E-A947-70E740481C1C}">
+                <a14:useLocalDpi xmlns:a14="http://schemas.microsoft.com/office/drawing/2010/main"/>
+              </a:ext>
+            </a:extLst>
+          </a:blip>
           <a:stretch>
             <a:fillRect/>
           </a:stretch>
         </p:blipFill>
         <p:spPr>
           <a:xfrm>
-            <a:off x="425449" y="2993286"/>
-            <a:ext cx="3923085" cy="2517234"/>
-          </a:xfrm>
-          <a:prstGeom prst="rect">
-            <a:avLst/>
-          </a:prstGeom>
-        </p:spPr>
-      </p:pic>
-      <p:pic>
-        <p:nvPicPr>
-          <p:cNvPr id="14" name="Picture 13">
-            <a:extLst>
-              <a:ext uri="{FF2B5EF4-FFF2-40B4-BE49-F238E27FC236}">
-                <a16:creationId xmlns:a16="http://schemas.microsoft.com/office/drawing/2014/main" id="{4AA656C1-E2E0-A882-C9A7-5F0616DFDEC0}"/>
-              </a:ext>
-            </a:extLst>
-          </p:cNvPr>
-          <p:cNvPicPr>
-            <a:picLocks noChangeAspect="1"/>
-          </p:cNvPicPr>
-          <p:nvPr/>
-        </p:nvPicPr>
-        <p:blipFill>
-          <a:blip r:embed="rId7"/>
-          <a:stretch>
-            <a:fillRect/>
-          </a:stretch>
-        </p:blipFill>
-        <p:spPr>
-          <a:xfrm>
-            <a:off x="4556151" y="3024581"/>
-            <a:ext cx="2329631" cy="1547419"/>
+            <a:off x="145267" y="2993286"/>
+            <a:ext cx="3441996" cy="2208545"/>
           </a:xfrm>
           <a:prstGeom prst="rect">
             <a:avLst/>
@@ -9597,7 +9871,7 @@
         </p:nvSpPr>
         <p:spPr>
           <a:xfrm>
-            <a:off x="447491" y="5838663"/>
+            <a:off x="145267" y="5273397"/>
             <a:ext cx="3139771" cy="584775"/>
           </a:xfrm>
           <a:prstGeom prst="rect">
@@ -9721,7 +9995,7 @@
         <p:spPr>
           <a:xfrm>
             <a:off x="7561284" y="153593"/>
-            <a:ext cx="4485450" cy="3508653"/>
+            <a:ext cx="4485450" cy="3662541"/>
           </a:xfrm>
           <a:prstGeom prst="rect">
             <a:avLst/>
@@ -9793,7 +10067,7 @@
             </a:pPr>
             <a:r>
               <a:rPr lang="en-US" sz="1000" dirty="0">
-                <a:hlinkClick r:id="rId8"/>
+                <a:hlinkClick r:id="rId7"/>
               </a:rPr>
               <a:t>https://www.tractorbynet.com/forums/threads/x700-series-hydraulic-lock-out-valve-am134625-installation.228998/</a:t>
             </a:r>
@@ -9806,7 +10080,7 @@
             </a:pPr>
             <a:r>
               <a:rPr lang="en-US" sz="1000" dirty="0">
-                <a:hlinkClick r:id="rId9"/>
+                <a:hlinkClick r:id="rId8"/>
               </a:rPr>
               <a:t>https://www.youtube.com/watch?v=EIQnRFgVMG0</a:t>
             </a:r>
@@ -9819,9 +10093,46 @@
             </a:pPr>
             <a:r>
               <a:rPr lang="en-US" sz="1000" dirty="0">
+                <a:hlinkClick r:id="rId9"/>
+              </a:rPr>
+              <a:t>https://www.youtube.com/watch?v=iv3qfw-JJZk</a:t>
+            </a:r>
+            <a:endParaRPr lang="en-US" sz="1000" dirty="0"/>
+          </a:p>
+          <a:p>
+            <a:pPr marL="171450" indent="-171450">
+              <a:buFont typeface="Arial" panose="020B0604020202020204" pitchFamily="34" charset="0"/>
+              <a:buChar char="•"/>
+            </a:pPr>
+            <a:r>
+              <a:rPr lang="en-US" sz="1000" dirty="0">
                 <a:hlinkClick r:id="rId10"/>
               </a:rPr>
-              <a:t>https://www.youtube.com/watch?v=iv3qfw-JJZk</a:t>
+              <a:t>https://</a:t>
+            </a:r>
+            <a:r>
+              <a:rPr lang="en-US" sz="1000" dirty="0" err="1">
+                <a:hlinkClick r:id="rId10"/>
+              </a:rPr>
+              <a:t>www.youtube.com</a:t>
+            </a:r>
+            <a:r>
+              <a:rPr lang="en-US" sz="1000" dirty="0">
+                <a:hlinkClick r:id="rId10"/>
+              </a:rPr>
+              <a:t>/</a:t>
+            </a:r>
+            <a:r>
+              <a:rPr lang="en-US" sz="1000" dirty="0" err="1">
+                <a:hlinkClick r:id="rId10"/>
+              </a:rPr>
+              <a:t>watch?v</a:t>
+            </a:r>
+            <a:r>
+              <a:rPr lang="en-US" sz="1000" dirty="0">
+                <a:hlinkClick r:id="rId10"/>
+              </a:rPr>
+              <a:t>=_6_KFG1wcUQ</a:t>
             </a:r>
             <a:endParaRPr lang="en-US" sz="1000" dirty="0"/>
           </a:p>
@@ -9864,7 +10175,7 @@
         </p:blipFill>
         <p:spPr>
           <a:xfrm>
-            <a:off x="4556151" y="4665161"/>
+            <a:off x="4399569" y="5201831"/>
             <a:ext cx="2329630" cy="1553087"/>
           </a:xfrm>
           <a:prstGeom prst="rect">
@@ -9887,8 +10198,14 @@
           <p:nvPr/>
         </p:nvPicPr>
         <p:blipFill>
-          <a:blip r:embed="rId12"/>
-          <a:srcRect l="20466"/>
+          <a:blip r:embed="rId12" cstate="email">
+            <a:extLst>
+              <a:ext uri="{28A0092B-C50C-407E-A947-70E740481C1C}">
+                <a14:useLocalDpi xmlns:a14="http://schemas.microsoft.com/office/drawing/2010/main"/>
+              </a:ext>
+            </a:extLst>
+          </a:blip>
+          <a:srcRect/>
           <a:stretch>
             <a:fillRect/>
           </a:stretch>
@@ -9918,8 +10235,14 @@
           <p:nvPr/>
         </p:nvPicPr>
         <p:blipFill>
-          <a:blip r:embed="rId13"/>
-          <a:srcRect t="3838" b="9836"/>
+          <a:blip r:embed="rId13" cstate="email">
+            <a:extLst>
+              <a:ext uri="{28A0092B-C50C-407E-A947-70E740481C1C}">
+                <a14:useLocalDpi xmlns:a14="http://schemas.microsoft.com/office/drawing/2010/main"/>
+              </a:ext>
+            </a:extLst>
+          </a:blip>
+          <a:srcRect/>
           <a:stretch>
             <a:fillRect/>
           </a:stretch>
@@ -9980,6 +10303,42 @@
           </a:p>
         </p:txBody>
       </p:sp>
+      <p:pic>
+        <p:nvPicPr>
+          <p:cNvPr id="5" name="Picture 4">
+            <a:extLst>
+              <a:ext uri="{FF2B5EF4-FFF2-40B4-BE49-F238E27FC236}">
+                <a16:creationId xmlns:a16="http://schemas.microsoft.com/office/drawing/2014/main" id="{27B9866A-E349-23BE-7DEA-CBF880BE4564}"/>
+              </a:ext>
+            </a:extLst>
+          </p:cNvPr>
+          <p:cNvPicPr>
+            <a:picLocks noChangeAspect="1"/>
+          </p:cNvPicPr>
+          <p:nvPr/>
+        </p:nvPicPr>
+        <p:blipFill>
+          <a:blip r:embed="rId14" cstate="email">
+            <a:extLst>
+              <a:ext uri="{28A0092B-C50C-407E-A947-70E740481C1C}">
+                <a14:useLocalDpi xmlns:a14="http://schemas.microsoft.com/office/drawing/2010/main"/>
+              </a:ext>
+            </a:extLst>
+          </a:blip>
+          <a:stretch>
+            <a:fillRect/>
+          </a:stretch>
+        </p:blipFill>
+        <p:spPr>
+          <a:xfrm>
+            <a:off x="3800681" y="2993285"/>
+            <a:ext cx="3692307" cy="2039559"/>
+          </a:xfrm>
+          <a:prstGeom prst="rect">
+            <a:avLst/>
+          </a:prstGeom>
+        </p:spPr>
+      </p:pic>
     </p:spTree>
     <p:extLst>
       <p:ext uri="{BB962C8B-B14F-4D97-AF65-F5344CB8AC3E}">
@@ -9994,6 +10353,200 @@
 </file>
 
 <file path=ppt/slides/slide6.xml><?xml version="1.0" encoding="utf-8"?>
+<p:sld xmlns:a="http://schemas.openxmlformats.org/drawingml/2006/main" xmlns:r="http://schemas.openxmlformats.org/officeDocument/2006/relationships" xmlns:p="http://schemas.openxmlformats.org/presentationml/2006/main">
+  <p:cSld>
+    <p:spTree>
+      <p:nvGrpSpPr>
+        <p:cNvPr id="1" name="">
+          <a:extLst>
+            <a:ext uri="{FF2B5EF4-FFF2-40B4-BE49-F238E27FC236}">
+              <a16:creationId xmlns:a16="http://schemas.microsoft.com/office/drawing/2014/main" id="{874C337E-6D80-29E4-4D29-564B2D10C0CC}"/>
+            </a:ext>
+          </a:extLst>
+        </p:cNvPr>
+        <p:cNvGrpSpPr/>
+        <p:nvPr/>
+      </p:nvGrpSpPr>
+      <p:grpSpPr>
+        <a:xfrm>
+          <a:off x="0" y="0"/>
+          <a:ext cx="0" cy="0"/>
+          <a:chOff x="0" y="0"/>
+          <a:chExt cx="0" cy="0"/>
+        </a:xfrm>
+      </p:grpSpPr>
+      <p:sp>
+        <p:nvSpPr>
+          <p:cNvPr id="2" name="TextBox 1">
+            <a:extLst>
+              <a:ext uri="{FF2B5EF4-FFF2-40B4-BE49-F238E27FC236}">
+                <a16:creationId xmlns:a16="http://schemas.microsoft.com/office/drawing/2014/main" id="{ACD12671-C346-7C70-0F79-C9B56BF67EF4}"/>
+              </a:ext>
+            </a:extLst>
+          </p:cNvPr>
+          <p:cNvSpPr txBox="1"/>
+          <p:nvPr/>
+        </p:nvSpPr>
+        <p:spPr>
+          <a:xfrm>
+            <a:off x="-1" y="0"/>
+            <a:ext cx="6096001" cy="523220"/>
+          </a:xfrm>
+          <a:prstGeom prst="rect">
+            <a:avLst/>
+          </a:prstGeom>
+          <a:noFill/>
+        </p:spPr>
+        <p:txBody>
+          <a:bodyPr wrap="square" rtlCol="0">
+            <a:spAutoFit/>
+          </a:bodyPr>
+          <a:lstStyle/>
+          <a:p>
+            <a:r>
+              <a:rPr lang="en-US" sz="2800" b="1" dirty="0"/>
+              <a:t>Snowblower Install</a:t>
+            </a:r>
+          </a:p>
+        </p:txBody>
+      </p:sp>
+      <p:sp>
+        <p:nvSpPr>
+          <p:cNvPr id="9" name="TextBox 8">
+            <a:extLst>
+              <a:ext uri="{FF2B5EF4-FFF2-40B4-BE49-F238E27FC236}">
+                <a16:creationId xmlns:a16="http://schemas.microsoft.com/office/drawing/2014/main" id="{7A4DBC42-94B8-9172-0159-3D94C09B2E86}"/>
+              </a:ext>
+            </a:extLst>
+          </p:cNvPr>
+          <p:cNvSpPr txBox="1"/>
+          <p:nvPr/>
+        </p:nvSpPr>
+        <p:spPr>
+          <a:xfrm>
+            <a:off x="230822" y="726949"/>
+            <a:ext cx="5865177" cy="738664"/>
+          </a:xfrm>
+          <a:prstGeom prst="rect">
+            <a:avLst/>
+          </a:prstGeom>
+          <a:solidFill>
+            <a:schemeClr val="accent4">
+              <a:lumMod val="20000"/>
+              <a:lumOff val="80000"/>
+            </a:schemeClr>
+          </a:solidFill>
+          <a:ln>
+            <a:solidFill>
+              <a:srgbClr val="FF0000"/>
+            </a:solidFill>
+          </a:ln>
+        </p:spPr>
+        <p:txBody>
+          <a:bodyPr wrap="square" rtlCol="0">
+            <a:spAutoFit/>
+          </a:bodyPr>
+          <a:lstStyle/>
+          <a:p>
+            <a:r>
+              <a:rPr lang="en-US" sz="1400" dirty="0"/>
+              <a:t>Here is a 5-min video step-by-step</a:t>
+            </a:r>
+          </a:p>
+          <a:p>
+            <a:r>
+              <a:rPr lang="en-US" sz="1400" dirty="0">
+                <a:hlinkClick r:id="rId2"/>
+              </a:rPr>
+              <a:t>https://www.youtube.com/watch?v=jAjLZqK2zy0</a:t>
+            </a:r>
+            <a:endParaRPr lang="en-US" sz="1400" dirty="0"/>
+          </a:p>
+          <a:p>
+            <a:r>
+              <a:rPr lang="en-US" sz="1400" dirty="0">
+                <a:hlinkClick r:id="rId3"/>
+              </a:rPr>
+              <a:t>https://</a:t>
+            </a:r>
+            <a:r>
+              <a:rPr lang="en-US" sz="1400" dirty="0" err="1">
+                <a:hlinkClick r:id="rId3"/>
+              </a:rPr>
+              <a:t>www.youtube.com</a:t>
+            </a:r>
+            <a:r>
+              <a:rPr lang="en-US" sz="1400" dirty="0">
+                <a:hlinkClick r:id="rId3"/>
+              </a:rPr>
+              <a:t>/</a:t>
+            </a:r>
+            <a:r>
+              <a:rPr lang="en-US" sz="1400" dirty="0" err="1">
+                <a:hlinkClick r:id="rId3"/>
+              </a:rPr>
+              <a:t>watch?v</a:t>
+            </a:r>
+            <a:r>
+              <a:rPr lang="en-US" sz="1400" dirty="0">
+                <a:hlinkClick r:id="rId3"/>
+              </a:rPr>
+              <a:t>=6TV8WRo6v9M</a:t>
+            </a:r>
+            <a:endParaRPr lang="en-US" sz="1400" dirty="0"/>
+          </a:p>
+        </p:txBody>
+      </p:sp>
+      <p:pic>
+        <p:nvPicPr>
+          <p:cNvPr id="7" name="Picture 6">
+            <a:extLst>
+              <a:ext uri="{FF2B5EF4-FFF2-40B4-BE49-F238E27FC236}">
+                <a16:creationId xmlns:a16="http://schemas.microsoft.com/office/drawing/2014/main" id="{6BAF1BD1-C1ED-D12B-A2E1-EDE5CF196752}"/>
+              </a:ext>
+            </a:extLst>
+          </p:cNvPr>
+          <p:cNvPicPr>
+            <a:picLocks noChangeAspect="1"/>
+          </p:cNvPicPr>
+          <p:nvPr/>
+        </p:nvPicPr>
+        <p:blipFill>
+          <a:blip r:embed="rId4" cstate="email">
+            <a:extLst>
+              <a:ext uri="{28A0092B-C50C-407E-A947-70E740481C1C}">
+                <a14:useLocalDpi xmlns:a14="http://schemas.microsoft.com/office/drawing/2010/main"/>
+              </a:ext>
+            </a:extLst>
+          </a:blip>
+          <a:stretch>
+            <a:fillRect/>
+          </a:stretch>
+        </p:blipFill>
+        <p:spPr>
+          <a:xfrm>
+            <a:off x="775945" y="1669342"/>
+            <a:ext cx="4741859" cy="2168533"/>
+          </a:xfrm>
+          <a:prstGeom prst="rect">
+            <a:avLst/>
+          </a:prstGeom>
+        </p:spPr>
+      </p:pic>
+    </p:spTree>
+    <p:extLst>
+      <p:ext uri="{BB962C8B-B14F-4D97-AF65-F5344CB8AC3E}">
+        <p14:creationId xmlns:p14="http://schemas.microsoft.com/office/powerpoint/2010/main" val="2096375212"/>
+      </p:ext>
+    </p:extLst>
+  </p:cSld>
+  <p:clrMapOvr>
+    <a:masterClrMapping/>
+  </p:clrMapOvr>
+</p:sld>
+</file>
+
+<file path=ppt/slides/slide7.xml><?xml version="1.0" encoding="utf-8"?>
 <p:sld xmlns:a="http://schemas.openxmlformats.org/drawingml/2006/main" xmlns:r="http://schemas.openxmlformats.org/officeDocument/2006/relationships" xmlns:p="http://schemas.openxmlformats.org/presentationml/2006/main">
   <p:cSld>
     <p:spTree>
@@ -10377,548 +10930,6 @@
     <p:extLst>
       <p:ext uri="{BB962C8B-B14F-4D97-AF65-F5344CB8AC3E}">
         <p14:creationId xmlns:p14="http://schemas.microsoft.com/office/powerpoint/2010/main" val="3802280698"/>
-      </p:ext>
-    </p:extLst>
-  </p:cSld>
-  <p:clrMapOvr>
-    <a:masterClrMapping/>
-  </p:clrMapOvr>
-</p:sld>
-</file>
-
-<file path=ppt/slides/slide7.xml><?xml version="1.0" encoding="utf-8"?>
-<p:sld xmlns:a="http://schemas.openxmlformats.org/drawingml/2006/main" xmlns:r="http://schemas.openxmlformats.org/officeDocument/2006/relationships" xmlns:p="http://schemas.openxmlformats.org/presentationml/2006/main">
-  <p:cSld>
-    <p:spTree>
-      <p:nvGrpSpPr>
-        <p:cNvPr id="1" name=""/>
-        <p:cNvGrpSpPr/>
-        <p:nvPr/>
-      </p:nvGrpSpPr>
-      <p:grpSpPr>
-        <a:xfrm>
-          <a:off x="0" y="0"/>
-          <a:ext cx="0" cy="0"/>
-          <a:chOff x="0" y="0"/>
-          <a:chExt cx="0" cy="0"/>
-        </a:xfrm>
-      </p:grpSpPr>
-      <p:sp>
-        <p:nvSpPr>
-          <p:cNvPr id="2" name="TextBox 1">
-            <a:extLst>
-              <a:ext uri="{FF2B5EF4-FFF2-40B4-BE49-F238E27FC236}">
-                <a16:creationId xmlns:a16="http://schemas.microsoft.com/office/drawing/2014/main" id="{775BBD15-AEC2-1815-2347-A5BB8F308263}"/>
-              </a:ext>
-            </a:extLst>
-          </p:cNvPr>
-          <p:cNvSpPr txBox="1"/>
-          <p:nvPr/>
-        </p:nvSpPr>
-        <p:spPr>
-          <a:xfrm>
-            <a:off x="-1" y="0"/>
-            <a:ext cx="6096001" cy="523220"/>
-          </a:xfrm>
-          <a:prstGeom prst="rect">
-            <a:avLst/>
-          </a:prstGeom>
-          <a:noFill/>
-        </p:spPr>
-        <p:txBody>
-          <a:bodyPr wrap="square" rtlCol="0">
-            <a:spAutoFit/>
-          </a:bodyPr>
-          <a:lstStyle/>
-          <a:p>
-            <a:r>
-              <a:rPr lang="en-US" sz="2800" b="1" dirty="0"/>
-              <a:t>John Deere X758</a:t>
-            </a:r>
-          </a:p>
-        </p:txBody>
-      </p:sp>
-      <p:sp>
-        <p:nvSpPr>
-          <p:cNvPr id="3" name="TextBox 2">
-            <a:extLst>
-              <a:ext uri="{FF2B5EF4-FFF2-40B4-BE49-F238E27FC236}">
-                <a16:creationId xmlns:a16="http://schemas.microsoft.com/office/drawing/2014/main" id="{DC69E50A-DD6F-49A2-50A0-AE0A50A8C419}"/>
-              </a:ext>
-            </a:extLst>
-          </p:cNvPr>
-          <p:cNvSpPr txBox="1"/>
-          <p:nvPr/>
-        </p:nvSpPr>
-        <p:spPr>
-          <a:xfrm>
-            <a:off x="5048251" y="567268"/>
-            <a:ext cx="6996630" cy="5632311"/>
-          </a:xfrm>
-          <a:prstGeom prst="rect">
-            <a:avLst/>
-          </a:prstGeom>
-          <a:noFill/>
-        </p:spPr>
-        <p:txBody>
-          <a:bodyPr wrap="square" rtlCol="0">
-            <a:spAutoFit/>
-          </a:bodyPr>
-          <a:lstStyle/>
-          <a:p>
-            <a:r>
-              <a:rPr lang="en-US" sz="1200" b="1" dirty="0">
-                <a:solidFill>
-                  <a:srgbClr val="00B050"/>
-                </a:solidFill>
-              </a:rPr>
-              <a:t>What to do at low temperature: -20°C (-4°F):</a:t>
-            </a:r>
-            <a:endParaRPr lang="en-US" sz="1200" dirty="0">
-              <a:solidFill>
-                <a:srgbClr val="00B050"/>
-              </a:solidFill>
-            </a:endParaRPr>
-          </a:p>
-          <a:p>
-            <a:pPr marL="285750" indent="-285750">
-              <a:buFont typeface="Courier New" panose="02070309020205020404" pitchFamily="49" charset="0"/>
-              <a:buChar char="o"/>
-            </a:pPr>
-            <a:r>
-              <a:rPr lang="en-US" sz="1200" b="1" dirty="0">
-                <a:solidFill>
-                  <a:srgbClr val="FF0000"/>
-                </a:solidFill>
-              </a:rPr>
-              <a:t>Engine oil</a:t>
-            </a:r>
-            <a:r>
-              <a:rPr lang="en-US" sz="1200" dirty="0"/>
-              <a:t>: use lower viscosity 0W-40 or 5W-40 </a:t>
-            </a:r>
-            <a:r>
-              <a:rPr lang="en-US" sz="1200" b="1" dirty="0">
-                <a:solidFill>
-                  <a:srgbClr val="00B0F0"/>
-                </a:solidFill>
-              </a:rPr>
-              <a:t>synthetic diesel oil</a:t>
-            </a:r>
-          </a:p>
-          <a:p>
-            <a:pPr marL="285750" indent="-285750">
-              <a:buFont typeface="Courier New" panose="02070309020205020404" pitchFamily="49" charset="0"/>
-              <a:buChar char="o"/>
-            </a:pPr>
-            <a:r>
-              <a:rPr lang="en-US" sz="1200" b="1" dirty="0">
-                <a:solidFill>
-                  <a:srgbClr val="FF0000"/>
-                </a:solidFill>
-              </a:rPr>
-              <a:t>Hydraulic fluid </a:t>
-            </a:r>
-            <a:r>
-              <a:rPr lang="en-US" sz="1200" dirty="0"/>
-              <a:t>– </a:t>
-            </a:r>
-            <a:r>
-              <a:rPr lang="en-US" sz="1200" b="1" dirty="0">
-                <a:solidFill>
-                  <a:srgbClr val="00B0F0"/>
-                </a:solidFill>
-              </a:rPr>
-              <a:t>use premium synthetic hydraulic fluids with cold-flow improvers</a:t>
-            </a:r>
-            <a:r>
-              <a:rPr lang="en-US" sz="1200" dirty="0"/>
-              <a:t>. </a:t>
-            </a:r>
-          </a:p>
-          <a:p>
-            <a:pPr marL="285750" indent="-285750">
-              <a:buFont typeface="Courier New" panose="02070309020205020404" pitchFamily="49" charset="0"/>
-              <a:buChar char="o"/>
-            </a:pPr>
-            <a:r>
-              <a:rPr lang="en-US" sz="1200" b="1" dirty="0">
-                <a:solidFill>
-                  <a:srgbClr val="FF0000"/>
-                </a:solidFill>
-              </a:rPr>
-              <a:t>Fuel Additives (anti-gel additives) </a:t>
-            </a:r>
-            <a:r>
-              <a:rPr lang="en-US" sz="1200" dirty="0"/>
-              <a:t>– need to be added at temperatures below -12°C (10-15°F), they prevent wax crystals from sticking together, and disperse moisture to prevent ice formation in fuel filters. </a:t>
-            </a:r>
-          </a:p>
-          <a:p>
-            <a:pPr marL="285750" indent="-285750">
-              <a:buFont typeface="Courier New" panose="02070309020205020404" pitchFamily="49" charset="0"/>
-              <a:buChar char="o"/>
-            </a:pPr>
-            <a:r>
-              <a:rPr lang="en-US" sz="1200" dirty="0"/>
-              <a:t>John Deere Recommended its own Additive - John Deere Fuel-Protect Winter Formula (TY27786). It contains wax crystal modifiers that prevent fuel gelling by changing the shape and size of wax crystals as they form. This allows smaller crystals to pass through the fuel filter instead of clumping together and blocking flow. </a:t>
-            </a:r>
-          </a:p>
-          <a:p>
-            <a:pPr marL="285750" indent="-285750">
-              <a:buFont typeface="Courier New" panose="02070309020205020404" pitchFamily="49" charset="0"/>
-              <a:buChar char="o"/>
-            </a:pPr>
-            <a:r>
-              <a:rPr lang="en-US" sz="1200" dirty="0"/>
-              <a:t>The winter formula typically protects 15-20°F below the fuel's cloud point (which is 15-19F, so with additive we can go down to </a:t>
-            </a:r>
-            <a:r>
-              <a:rPr lang="en-US" sz="1200" dirty="0" err="1"/>
-              <a:t>approx</a:t>
-            </a:r>
-            <a:r>
-              <a:rPr lang="en-US" sz="1200" dirty="0"/>
-              <a:t> 0°F )</a:t>
-            </a:r>
-          </a:p>
-          <a:p>
-            <a:pPr marL="285750" indent="-285750">
-              <a:buFont typeface="Courier New" panose="02070309020205020404" pitchFamily="49" charset="0"/>
-              <a:buChar char="o"/>
-            </a:pPr>
-            <a:r>
-              <a:rPr lang="en-US" sz="1200" dirty="0"/>
-              <a:t>Products like </a:t>
-            </a:r>
-            <a:r>
-              <a:rPr lang="en-US" sz="1200" b="1" dirty="0">
-                <a:solidFill>
-                  <a:srgbClr val="00B0F0"/>
-                </a:solidFill>
-              </a:rPr>
-              <a:t>Hot Shot's Secret Diesel Winter Anti-Gel or </a:t>
-            </a:r>
-            <a:r>
-              <a:rPr lang="en-US" sz="1200" b="1" dirty="0" err="1">
-                <a:solidFill>
-                  <a:srgbClr val="00B0F0"/>
-                </a:solidFill>
-              </a:rPr>
-              <a:t>Archoil</a:t>
-            </a:r>
-            <a:r>
-              <a:rPr lang="en-US" sz="1200" b="1" dirty="0">
-                <a:solidFill>
-                  <a:srgbClr val="00B0F0"/>
-                </a:solidFill>
-              </a:rPr>
-              <a:t> AR6300 </a:t>
-            </a:r>
-            <a:r>
-              <a:rPr lang="en-US" sz="1200" dirty="0"/>
-              <a:t>can protect diesel fuel down to -40°F (-40°C) when used at every fill-up. </a:t>
-            </a:r>
-          </a:p>
-          <a:p>
-            <a:pPr marL="285750" indent="-285750">
-              <a:buFont typeface="Courier New" panose="02070309020205020404" pitchFamily="49" charset="0"/>
-              <a:buChar char="o"/>
-            </a:pPr>
-            <a:r>
-              <a:rPr lang="en-US" sz="1200" dirty="0"/>
-              <a:t>Important - the additives should be mixed with fuel before temperatures drop, as </a:t>
-            </a:r>
-            <a:r>
-              <a:rPr lang="en-US" sz="1200" dirty="0">
-                <a:solidFill>
-                  <a:srgbClr val="00B0F0"/>
-                </a:solidFill>
-              </a:rPr>
-              <a:t>they cannot reverse gelling once it has already occurred</a:t>
-            </a:r>
-            <a:r>
-              <a:rPr lang="en-US" sz="1200" dirty="0"/>
-              <a:t>.</a:t>
-            </a:r>
-          </a:p>
-          <a:p>
-            <a:pPr marL="285750" indent="-285750">
-              <a:buFont typeface="Courier New" panose="02070309020205020404" pitchFamily="49" charset="0"/>
-              <a:buChar char="o"/>
-            </a:pPr>
-            <a:r>
-              <a:rPr lang="en-US" sz="1200" dirty="0"/>
-              <a:t>K100 - is a premium all-in-one diesel fuel treatment and anti-gel additive that eliminates water in fuel systems and prevents fuel gelling in cold weather. The product chemically bond with water molecules, encapsulating them and allowing them to burn harmlessly through the engine rather than causing problems.</a:t>
-            </a:r>
-          </a:p>
-          <a:p>
-            <a:r>
-              <a:rPr lang="en-US" sz="1200" dirty="0"/>
-              <a:t>------------------------------------------------</a:t>
-            </a:r>
-          </a:p>
-          <a:p>
-            <a:pPr marL="285750" indent="-285750">
-              <a:buFont typeface="Courier New" panose="02070309020205020404" pitchFamily="49" charset="0"/>
-              <a:buChar char="o"/>
-            </a:pPr>
-            <a:r>
-              <a:rPr lang="en-US" sz="1200" b="1" dirty="0">
-                <a:solidFill>
-                  <a:srgbClr val="FF0000"/>
-                </a:solidFill>
-              </a:rPr>
-              <a:t>Keep fuel tank full </a:t>
-            </a:r>
-            <a:r>
-              <a:rPr lang="en-US" sz="1200" dirty="0"/>
-              <a:t>to reduce air space and reduce moisture condensation inside the tank which can freeze and cause additional fuel system blockages. The anti-gel additive should be added to the tank before filling so it mixes thoroughly with the incoming fuel.</a:t>
-            </a:r>
-          </a:p>
-          <a:p>
-            <a:pPr marL="285750" indent="-285750">
-              <a:buFont typeface="Courier New" panose="02070309020205020404" pitchFamily="49" charset="0"/>
-              <a:buChar char="o"/>
-            </a:pPr>
-            <a:r>
-              <a:rPr lang="en-US" sz="1200" b="1" dirty="0">
-                <a:solidFill>
-                  <a:srgbClr val="FF0000"/>
-                </a:solidFill>
-              </a:rPr>
-              <a:t>Engine block heater</a:t>
-            </a:r>
-            <a:r>
-              <a:rPr lang="en-US" sz="1200" dirty="0"/>
-              <a:t> – JD engine </a:t>
-            </a:r>
-            <a:r>
-              <a:rPr lang="en-US" sz="1200" b="1" dirty="0">
-                <a:solidFill>
-                  <a:srgbClr val="00B0F0"/>
-                </a:solidFill>
-              </a:rPr>
-              <a:t>coolant heater (part number AR87167)</a:t>
-            </a:r>
-            <a:r>
-              <a:rPr lang="en-US" sz="1200" dirty="0"/>
-              <a:t> requires an </a:t>
-            </a:r>
-            <a:r>
-              <a:rPr lang="en-US" sz="1200" b="1" dirty="0">
-                <a:solidFill>
-                  <a:srgbClr val="00B0F0"/>
-                </a:solidFill>
-              </a:rPr>
-              <a:t>adapter kit (MIA881629) </a:t>
-            </a:r>
-            <a:r>
-              <a:rPr lang="en-US" sz="1200" dirty="0"/>
-              <a:t>for installation on the X758 and should be plugged in for at least </a:t>
-            </a:r>
-            <a:r>
-              <a:rPr lang="en-US" sz="1200" b="1" dirty="0">
-                <a:solidFill>
-                  <a:srgbClr val="FF0000"/>
-                </a:solidFill>
-              </a:rPr>
-              <a:t>one hour before starting</a:t>
-            </a:r>
-            <a:r>
-              <a:rPr lang="en-US" sz="1200" dirty="0"/>
-              <a:t>.</a:t>
-            </a:r>
-          </a:p>
-          <a:p>
-            <a:pPr marL="285750" indent="-285750">
-              <a:buFont typeface="Courier New" panose="02070309020205020404" pitchFamily="49" charset="0"/>
-              <a:buChar char="o"/>
-            </a:pPr>
-            <a:r>
-              <a:rPr lang="en-US" sz="1200" b="1" dirty="0">
-                <a:solidFill>
-                  <a:srgbClr val="FF0000"/>
-                </a:solidFill>
-              </a:rPr>
-              <a:t>Replace fuel filters before cold weather </a:t>
-            </a:r>
-            <a:r>
-              <a:rPr lang="en-US" sz="1200" dirty="0"/>
-              <a:t>arrives, as dirty filters trap moisture and accelerate gelling.</a:t>
-            </a:r>
-            <a:endParaRPr lang="en-US" sz="1200" b="1" dirty="0">
-              <a:solidFill>
-                <a:srgbClr val="FF0000"/>
-              </a:solidFill>
-            </a:endParaRPr>
-          </a:p>
-          <a:p>
-            <a:pPr marL="285750" indent="-285750">
-              <a:buFont typeface="Courier New" panose="02070309020205020404" pitchFamily="49" charset="0"/>
-              <a:buChar char="o"/>
-            </a:pPr>
-            <a:r>
-              <a:rPr lang="en-US" sz="1200" b="1" dirty="0">
-                <a:solidFill>
-                  <a:srgbClr val="FF0000"/>
-                </a:solidFill>
-              </a:rPr>
-              <a:t>Engine Warm-Up </a:t>
-            </a:r>
-            <a:r>
-              <a:rPr lang="en-US" sz="1200" dirty="0"/>
-              <a:t>- the X758 has glow plugs that warm the cylinders before starting.  Turn the key to the "ON" position, wait for the glow plug indicator light (squiggly line) to go off before cranking the engine. Then let the tractor idle for several minutes to </a:t>
-            </a:r>
-            <a:r>
-              <a:rPr lang="en-US" sz="1200" b="1" dirty="0">
-                <a:solidFill>
-                  <a:srgbClr val="FF0000"/>
-                </a:solidFill>
-              </a:rPr>
-              <a:t>allow both the engine and hydraulic oil to warm up</a:t>
-            </a:r>
-            <a:r>
-              <a:rPr lang="en-US" sz="1200" dirty="0"/>
-              <a:t> before operating implements or the power steering system under load</a:t>
-            </a:r>
-          </a:p>
-        </p:txBody>
-      </p:sp>
-      <p:pic>
-        <p:nvPicPr>
-          <p:cNvPr id="1026" name="Picture 2" descr="AR87167 Engine Block Coolant Heater Kit Fits for John Deere 1025R 110 2210  2305 4210 445 X495 XUV Gator 850D 855D 855M 865E - AliExpress">
-            <a:extLst>
-              <a:ext uri="{FF2B5EF4-FFF2-40B4-BE49-F238E27FC236}">
-                <a16:creationId xmlns:a16="http://schemas.microsoft.com/office/drawing/2014/main" id="{E31E646C-AD08-4238-DAB7-02DE88ECA7CC}"/>
-              </a:ext>
-            </a:extLst>
-          </p:cNvPr>
-          <p:cNvPicPr>
-            <a:picLocks noChangeAspect="1" noChangeArrowheads="1"/>
-          </p:cNvPicPr>
-          <p:nvPr/>
-        </p:nvPicPr>
-        <p:blipFill>
-          <a:blip r:embed="rId2" cstate="email">
-            <a:extLst>
-              <a:ext uri="{28A0092B-C50C-407E-A947-70E740481C1C}">
-                <a14:useLocalDpi xmlns:a14="http://schemas.microsoft.com/office/drawing/2010/main"/>
-              </a:ext>
-            </a:extLst>
-          </a:blip>
-          <a:srcRect/>
-          <a:stretch>
-            <a:fillRect/>
-          </a:stretch>
-        </p:blipFill>
-        <p:spPr bwMode="auto">
-          <a:xfrm>
-            <a:off x="147120" y="2500930"/>
-            <a:ext cx="4087091" cy="4087091"/>
-          </a:xfrm>
-          <a:prstGeom prst="rect">
-            <a:avLst/>
-          </a:prstGeom>
-          <a:noFill/>
-          <a:extLst>
-            <a:ext uri="{909E8E84-426E-40DD-AFC4-6F175D3DCCD1}">
-              <a14:hiddenFill xmlns:a14="http://schemas.microsoft.com/office/drawing/2010/main">
-                <a:solidFill>
-                  <a:srgbClr val="FFFFFF"/>
-                </a:solidFill>
-              </a14:hiddenFill>
-            </a:ext>
-          </a:extLst>
-        </p:spPr>
-      </p:pic>
-      <p:pic>
-        <p:nvPicPr>
-          <p:cNvPr id="1028" name="Picture 4" descr="John Deere AR87167 Engine Block Coolant Heater Kit 1025R 110 2210 2305 Gator">
-            <a:extLst>
-              <a:ext uri="{FF2B5EF4-FFF2-40B4-BE49-F238E27FC236}">
-                <a16:creationId xmlns:a16="http://schemas.microsoft.com/office/drawing/2014/main" id="{F97D0BC0-FBA4-1B8E-A5A3-C35BC59A28F2}"/>
-              </a:ext>
-            </a:extLst>
-          </p:cNvPr>
-          <p:cNvPicPr>
-            <a:picLocks noChangeAspect="1" noChangeArrowheads="1"/>
-          </p:cNvPicPr>
-          <p:nvPr/>
-        </p:nvPicPr>
-        <p:blipFill>
-          <a:blip r:embed="rId3" cstate="email">
-            <a:extLst>
-              <a:ext uri="{28A0092B-C50C-407E-A947-70E740481C1C}">
-                <a14:useLocalDpi xmlns:a14="http://schemas.microsoft.com/office/drawing/2010/main"/>
-              </a:ext>
-            </a:extLst>
-          </a:blip>
-          <a:srcRect/>
-          <a:stretch>
-            <a:fillRect/>
-          </a:stretch>
-        </p:blipFill>
-        <p:spPr bwMode="auto">
-          <a:xfrm>
-            <a:off x="147120" y="770857"/>
-            <a:ext cx="1482436" cy="1482436"/>
-          </a:xfrm>
-          <a:prstGeom prst="rect">
-            <a:avLst/>
-          </a:prstGeom>
-          <a:noFill/>
-          <a:extLst>
-            <a:ext uri="{909E8E84-426E-40DD-AFC4-6F175D3DCCD1}">
-              <a14:hiddenFill xmlns:a14="http://schemas.microsoft.com/office/drawing/2010/main">
-                <a:solidFill>
-                  <a:srgbClr val="FFFFFF"/>
-                </a:solidFill>
-              </a14:hiddenFill>
-            </a:ext>
-          </a:extLst>
-        </p:spPr>
-      </p:pic>
-      <p:sp>
-        <p:nvSpPr>
-          <p:cNvPr id="4" name="TextBox 3">
-            <a:extLst>
-              <a:ext uri="{FF2B5EF4-FFF2-40B4-BE49-F238E27FC236}">
-                <a16:creationId xmlns:a16="http://schemas.microsoft.com/office/drawing/2014/main" id="{4248EAA2-37A7-21EF-BFB2-53447F6C3A8C}"/>
-              </a:ext>
-            </a:extLst>
-          </p:cNvPr>
-          <p:cNvSpPr txBox="1"/>
-          <p:nvPr/>
-        </p:nvSpPr>
-        <p:spPr>
-          <a:xfrm>
-            <a:off x="1629556" y="808399"/>
-            <a:ext cx="3164117" cy="1200329"/>
-          </a:xfrm>
-          <a:prstGeom prst="rect">
-            <a:avLst/>
-          </a:prstGeom>
-          <a:noFill/>
-        </p:spPr>
-        <p:txBody>
-          <a:bodyPr wrap="square" rtlCol="0">
-            <a:spAutoFit/>
-          </a:bodyPr>
-          <a:lstStyle/>
-          <a:p>
-            <a:r>
-              <a:rPr lang="en-US" dirty="0"/>
-              <a:t>The warmth spreads through the entire engine via natural convection of the coolant. It takes 1-2 hours </a:t>
-            </a:r>
-            <a:endParaRPr lang="en-US" sz="1400" dirty="0"/>
-          </a:p>
-        </p:txBody>
-      </p:sp>
-    </p:spTree>
-    <p:extLst>
-      <p:ext uri="{BB962C8B-B14F-4D97-AF65-F5344CB8AC3E}">
-        <p14:creationId xmlns:p14="http://schemas.microsoft.com/office/powerpoint/2010/main" val="1065232430"/>
       </p:ext>
     </p:extLst>
   </p:cSld>
@@ -10975,17 +10986,17 @@
           <a:p>
             <a:r>
               <a:rPr lang="en-US" sz="2800" b="1" dirty="0"/>
-              <a:t>John Deere X758 – Fuel Filter Heater</a:t>
+              <a:t>John Deere X758</a:t>
             </a:r>
           </a:p>
         </p:txBody>
       </p:sp>
       <p:sp>
         <p:nvSpPr>
-          <p:cNvPr id="4" name="TextBox 3">
-            <a:extLst>
-              <a:ext uri="{FF2B5EF4-FFF2-40B4-BE49-F238E27FC236}">
-                <a16:creationId xmlns:a16="http://schemas.microsoft.com/office/drawing/2014/main" id="{4248EAA2-37A7-21EF-BFB2-53447F6C3A8C}"/>
+          <p:cNvPr id="3" name="TextBox 2">
+            <a:extLst>
+              <a:ext uri="{FF2B5EF4-FFF2-40B4-BE49-F238E27FC236}">
+                <a16:creationId xmlns:a16="http://schemas.microsoft.com/office/drawing/2014/main" id="{DC69E50A-DD6F-49A2-50A0-AE0A50A8C419}"/>
               </a:ext>
             </a:extLst>
           </p:cNvPr>
@@ -10994,23 +11005,13 @@
         </p:nvSpPr>
         <p:spPr>
           <a:xfrm>
-            <a:off x="128977" y="523220"/>
-            <a:ext cx="5838044" cy="1384995"/>
+            <a:off x="5048251" y="567268"/>
+            <a:ext cx="6996630" cy="5632311"/>
           </a:xfrm>
           <a:prstGeom prst="rect">
             <a:avLst/>
           </a:prstGeom>
-          <a:solidFill>
-            <a:schemeClr val="accent4">
-              <a:lumMod val="20000"/>
-              <a:lumOff val="80000"/>
-            </a:schemeClr>
-          </a:solidFill>
-          <a:ln>
-            <a:solidFill>
-              <a:srgbClr val="FF0000"/>
-            </a:solidFill>
-          </a:ln>
+          <a:noFill/>
         </p:spPr>
         <p:txBody>
           <a:bodyPr wrap="square" rtlCol="0">
@@ -11019,254 +11020,330 @@
           <a:lstStyle/>
           <a:p>
             <a:r>
-              <a:rPr lang="en-US" sz="1400" b="1" dirty="0" err="1">
+              <a:rPr lang="en-US" sz="1200" b="1" dirty="0">
+                <a:solidFill>
+                  <a:srgbClr val="00B050"/>
+                </a:solidFill>
+              </a:rPr>
+              <a:t>What to do at low temperature: -20°C (-4°F):</a:t>
+            </a:r>
+            <a:endParaRPr lang="en-US" sz="1200" dirty="0">
+              <a:solidFill>
+                <a:srgbClr val="00B050"/>
+              </a:solidFill>
+            </a:endParaRPr>
+          </a:p>
+          <a:p>
+            <a:pPr marL="285750" indent="-285750">
+              <a:buFont typeface="Courier New" panose="02070309020205020404" pitchFamily="49" charset="0"/>
+              <a:buChar char="o"/>
+            </a:pPr>
+            <a:r>
+              <a:rPr lang="en-US" sz="1200" b="1" dirty="0">
                 <a:solidFill>
                   <a:srgbClr val="FF0000"/>
                 </a:solidFill>
               </a:rPr>
-              <a:t>ZeroStart</a:t>
-            </a:r>
-            <a:r>
-              <a:rPr lang="en-US" sz="1400" b="1" dirty="0">
+              <a:t>Engine oil</a:t>
+            </a:r>
+            <a:r>
+              <a:rPr lang="en-US" sz="1200" dirty="0"/>
+              <a:t>: use lower viscosity 0W-40 or 5W-40 </a:t>
+            </a:r>
+            <a:r>
+              <a:rPr lang="en-US" sz="1200" b="1" dirty="0">
+                <a:solidFill>
+                  <a:srgbClr val="00B0F0"/>
+                </a:solidFill>
+              </a:rPr>
+              <a:t>synthetic diesel oil</a:t>
+            </a:r>
+          </a:p>
+          <a:p>
+            <a:pPr marL="285750" indent="-285750">
+              <a:buFont typeface="Courier New" panose="02070309020205020404" pitchFamily="49" charset="0"/>
+              <a:buChar char="o"/>
+            </a:pPr>
+            <a:r>
+              <a:rPr lang="en-US" sz="1200" b="1" dirty="0">
                 <a:solidFill>
                   <a:srgbClr val="FF0000"/>
                 </a:solidFill>
               </a:rPr>
-              <a:t> 3400037 </a:t>
-            </a:r>
-            <a:r>
-              <a:rPr lang="en-US" sz="1400" dirty="0"/>
-              <a:t>- 100W 12V flexible silicone wrap measuring 12" x 4", designed for fuel filter diameters between 3.5" and 5.0". It uses </a:t>
-            </a:r>
-            <a:r>
-              <a:rPr lang="en-US" sz="1400" dirty="0" err="1"/>
-              <a:t>velcro</a:t>
-            </a:r>
-            <a:r>
-              <a:rPr lang="en-US" sz="1400" dirty="0"/>
-              <a:t>/hook-and-loop straps to secure around the filter housing and connects directly to your 12V battery with a toggle switch (switch sold separately). </a:t>
-            </a:r>
-          </a:p>
-          <a:p>
-            <a:r>
-              <a:rPr lang="en-US" sz="1400" dirty="0">
-                <a:hlinkClick r:id="rId2"/>
-              </a:rPr>
-              <a:t>https://www.drivetrainamerica.com/3400037-zerostart-flexible-diesel-fuel-warmer-100w-120v-12-x-4/</a:t>
-            </a:r>
-            <a:endParaRPr lang="en-US" sz="1400" dirty="0"/>
-          </a:p>
-        </p:txBody>
-      </p:sp>
-      <p:sp>
-        <p:nvSpPr>
-          <p:cNvPr id="5" name="TextBox 4">
-            <a:extLst>
-              <a:ext uri="{FF2B5EF4-FFF2-40B4-BE49-F238E27FC236}">
-                <a16:creationId xmlns:a16="http://schemas.microsoft.com/office/drawing/2014/main" id="{8039C89E-E08B-184B-D776-5785D7E1A8EC}"/>
-              </a:ext>
-            </a:extLst>
-          </p:cNvPr>
-          <p:cNvSpPr txBox="1"/>
-          <p:nvPr/>
-        </p:nvSpPr>
-        <p:spPr>
-          <a:xfrm>
-            <a:off x="128977" y="1980932"/>
-            <a:ext cx="5838044" cy="1384995"/>
-          </a:xfrm>
-          <a:prstGeom prst="rect">
-            <a:avLst/>
-          </a:prstGeom>
-          <a:solidFill>
-            <a:schemeClr val="accent4">
-              <a:lumMod val="20000"/>
-              <a:lumOff val="80000"/>
-            </a:schemeClr>
-          </a:solidFill>
-          <a:ln>
-            <a:solidFill>
-              <a:srgbClr val="FF0000"/>
-            </a:solidFill>
-          </a:ln>
-        </p:spPr>
-        <p:txBody>
-          <a:bodyPr wrap="square" rtlCol="0">
-            <a:spAutoFit/>
-          </a:bodyPr>
-          <a:lstStyle/>
-          <a:p>
-            <a:r>
-              <a:rPr lang="en-US" sz="1400" b="1" dirty="0">
+              <a:t>Hydraulic fluid </a:t>
+            </a:r>
+            <a:r>
+              <a:rPr lang="en-US" sz="1200" dirty="0"/>
+              <a:t>– </a:t>
+            </a:r>
+            <a:r>
+              <a:rPr lang="en-US" sz="1200" b="1" dirty="0">
+                <a:solidFill>
+                  <a:srgbClr val="00B0F0"/>
+                </a:solidFill>
+              </a:rPr>
+              <a:t>use premium synthetic hydraulic fluids with cold-flow improvers</a:t>
+            </a:r>
+            <a:r>
+              <a:rPr lang="en-US" sz="1200" dirty="0"/>
+              <a:t>. </a:t>
+            </a:r>
+          </a:p>
+          <a:p>
+            <a:pPr marL="285750" indent="-285750">
+              <a:buFont typeface="Courier New" panose="02070309020205020404" pitchFamily="49" charset="0"/>
+              <a:buChar char="o"/>
+            </a:pPr>
+            <a:r>
+              <a:rPr lang="en-US" sz="1200" b="1" dirty="0">
                 <a:solidFill>
                   <a:srgbClr val="FF0000"/>
                 </a:solidFill>
               </a:rPr>
-              <a:t>US </a:t>
-            </a:r>
-            <a:r>
-              <a:rPr lang="en-US" sz="1400" b="1" dirty="0" err="1">
+              <a:t>Fuel Additives (anti-gel additives) </a:t>
+            </a:r>
+            <a:r>
+              <a:rPr lang="en-US" sz="1200" dirty="0"/>
+              <a:t>– need to be added at temperatures below -12°C (10-15°F), they prevent wax crystals from sticking together, and disperse moisture to prevent ice formation in fuel filters. </a:t>
+            </a:r>
+          </a:p>
+          <a:p>
+            <a:pPr marL="285750" indent="-285750">
+              <a:buFont typeface="Courier New" panose="02070309020205020404" pitchFamily="49" charset="0"/>
+              <a:buChar char="o"/>
+            </a:pPr>
+            <a:r>
+              <a:rPr lang="en-US" sz="1200" dirty="0"/>
+              <a:t>John Deere Recommended its own Additive - John Deere Fuel-Protect Winter Formula (TY27786). It contains wax crystal modifiers that prevent fuel gelling by changing the shape and size of wax crystals as they form. This allows smaller crystals to pass through the fuel filter instead of clumping together and blocking flow. </a:t>
+            </a:r>
+          </a:p>
+          <a:p>
+            <a:pPr marL="285750" indent="-285750">
+              <a:buFont typeface="Courier New" panose="02070309020205020404" pitchFamily="49" charset="0"/>
+              <a:buChar char="o"/>
+            </a:pPr>
+            <a:r>
+              <a:rPr lang="en-US" sz="1200" dirty="0"/>
+              <a:t>The winter formula typically protects 15-20°F below the fuel's cloud point (which is 15-19F, so with additive we can go down to </a:t>
+            </a:r>
+            <a:r>
+              <a:rPr lang="en-US" sz="1200" dirty="0" err="1"/>
+              <a:t>approx</a:t>
+            </a:r>
+            <a:r>
+              <a:rPr lang="en-US" sz="1200" dirty="0"/>
+              <a:t> 0°F )</a:t>
+            </a:r>
+          </a:p>
+          <a:p>
+            <a:pPr marL="285750" indent="-285750">
+              <a:buFont typeface="Courier New" panose="02070309020205020404" pitchFamily="49" charset="0"/>
+              <a:buChar char="o"/>
+            </a:pPr>
+            <a:r>
+              <a:rPr lang="en-US" sz="1200" dirty="0"/>
+              <a:t>Products like </a:t>
+            </a:r>
+            <a:r>
+              <a:rPr lang="en-US" sz="1200" b="1" dirty="0">
+                <a:solidFill>
+                  <a:srgbClr val="00B0F0"/>
+                </a:solidFill>
+              </a:rPr>
+              <a:t>Hot Shot's Secret Diesel Winter Anti-Gel or </a:t>
+            </a:r>
+            <a:r>
+              <a:rPr lang="en-US" sz="1200" b="1" dirty="0" err="1">
+                <a:solidFill>
+                  <a:srgbClr val="00B0F0"/>
+                </a:solidFill>
+              </a:rPr>
+              <a:t>Archoil</a:t>
+            </a:r>
+            <a:r>
+              <a:rPr lang="en-US" sz="1200" b="1" dirty="0">
+                <a:solidFill>
+                  <a:srgbClr val="00B0F0"/>
+                </a:solidFill>
+              </a:rPr>
+              <a:t> AR6300 </a:t>
+            </a:r>
+            <a:r>
+              <a:rPr lang="en-US" sz="1200" dirty="0"/>
+              <a:t>can protect diesel fuel down to -40°F (-40°C) when used at every fill-up. </a:t>
+            </a:r>
+          </a:p>
+          <a:p>
+            <a:pPr marL="285750" indent="-285750">
+              <a:buFont typeface="Courier New" panose="02070309020205020404" pitchFamily="49" charset="0"/>
+              <a:buChar char="o"/>
+            </a:pPr>
+            <a:r>
+              <a:rPr lang="en-US" sz="1200" dirty="0"/>
+              <a:t>Important - the additives should be mixed with fuel before temperatures drop, as </a:t>
+            </a:r>
+            <a:r>
+              <a:rPr lang="en-US" sz="1200" dirty="0">
+                <a:solidFill>
+                  <a:srgbClr val="00B0F0"/>
+                </a:solidFill>
+              </a:rPr>
+              <a:t>they cannot reverse gelling once it has already occurred</a:t>
+            </a:r>
+            <a:r>
+              <a:rPr lang="en-US" sz="1200" dirty="0"/>
+              <a:t>.</a:t>
+            </a:r>
+          </a:p>
+          <a:p>
+            <a:pPr marL="285750" indent="-285750">
+              <a:buFont typeface="Courier New" panose="02070309020205020404" pitchFamily="49" charset="0"/>
+              <a:buChar char="o"/>
+            </a:pPr>
+            <a:r>
+              <a:rPr lang="en-US" sz="1200" dirty="0"/>
+              <a:t>K100 - is a premium all-in-one diesel fuel treatment and anti-gel additive that eliminates water in fuel systems and prevents fuel gelling in cold weather. The product chemically bond with water molecules, encapsulating them and allowing them to burn harmlessly through the engine rather than causing problems.</a:t>
+            </a:r>
+          </a:p>
+          <a:p>
+            <a:r>
+              <a:rPr lang="en-US" sz="1200" dirty="0"/>
+              <a:t>------------------------------------------------</a:t>
+            </a:r>
+          </a:p>
+          <a:p>
+            <a:pPr marL="285750" indent="-285750">
+              <a:buFont typeface="Courier New" panose="02070309020205020404" pitchFamily="49" charset="0"/>
+              <a:buChar char="o"/>
+            </a:pPr>
+            <a:r>
+              <a:rPr lang="en-US" sz="1200" b="1" dirty="0">
                 <a:solidFill>
                   <a:srgbClr val="FF0000"/>
                 </a:solidFill>
               </a:rPr>
-              <a:t>Filtermaxx</a:t>
-            </a:r>
-            <a:r>
-              <a:rPr lang="en-US" sz="1400" b="1" dirty="0">
+              <a:t>Keep fuel tank full </a:t>
+            </a:r>
+            <a:r>
+              <a:rPr lang="en-US" sz="1200" dirty="0"/>
+              <a:t>to reduce air space and reduce moisture condensation inside the tank which can freeze and cause additional fuel system blockages. The anti-gel additive should be added to the tank before filling so it mixes thoroughly with the incoming fuel.</a:t>
+            </a:r>
+          </a:p>
+          <a:p>
+            <a:pPr marL="285750" indent="-285750">
+              <a:buFont typeface="Courier New" panose="02070309020205020404" pitchFamily="49" charset="0"/>
+              <a:buChar char="o"/>
+            </a:pPr>
+            <a:r>
+              <a:rPr lang="en-US" sz="1200" b="1" dirty="0">
                 <a:solidFill>
                   <a:srgbClr val="FF0000"/>
                 </a:solidFill>
               </a:rPr>
-              <a:t> Fuel Filter Heater </a:t>
-            </a:r>
-            <a:r>
-              <a:rPr lang="en-US" sz="1400" dirty="0"/>
-              <a:t>- A thermostat-controlled 12V 100W wrap-around heater that fits most standard filters up to 4.5" diameter. The built-in thermostat is preset to 150°F and automatically regulates temperature, which prevents overheating without requiring manual monitoring </a:t>
-            </a:r>
-            <a:r>
-              <a:rPr lang="en-US" sz="1400" dirty="0">
-                <a:hlinkClick r:id="rId3"/>
-              </a:rPr>
-              <a:t>https://usfiltermaxx.com/</a:t>
-            </a:r>
-            <a:r>
-              <a:rPr lang="en-US" sz="1400" dirty="0" err="1">
-                <a:hlinkClick r:id="rId3"/>
-              </a:rPr>
-              <a:t>en</a:t>
-            </a:r>
-            <a:r>
-              <a:rPr lang="en-US" sz="1400" dirty="0">
-                <a:hlinkClick r:id="rId3"/>
-              </a:rPr>
-              <a:t>/home/55--12-volt-fuel-and-oil-filter-heater-for-wvo-and-biodiesel.html</a:t>
-            </a:r>
-            <a:endParaRPr lang="en-US" sz="1400" dirty="0"/>
-          </a:p>
-        </p:txBody>
-      </p:sp>
-      <p:sp>
-        <p:nvSpPr>
-          <p:cNvPr id="6" name="TextBox 5">
-            <a:extLst>
-              <a:ext uri="{FF2B5EF4-FFF2-40B4-BE49-F238E27FC236}">
-                <a16:creationId xmlns:a16="http://schemas.microsoft.com/office/drawing/2014/main" id="{E1A2222B-A6D3-4A46-E220-566D4232382E}"/>
-              </a:ext>
-            </a:extLst>
-          </p:cNvPr>
-          <p:cNvSpPr txBox="1"/>
-          <p:nvPr/>
-        </p:nvSpPr>
-        <p:spPr>
-          <a:xfrm>
-            <a:off x="128977" y="4896356"/>
-            <a:ext cx="5838044" cy="1169551"/>
-          </a:xfrm>
-          <a:prstGeom prst="rect">
-            <a:avLst/>
-          </a:prstGeom>
-          <a:solidFill>
-            <a:schemeClr val="accent4">
-              <a:lumMod val="20000"/>
-              <a:lumOff val="80000"/>
-            </a:schemeClr>
-          </a:solidFill>
-          <a:ln>
-            <a:solidFill>
-              <a:srgbClr val="FF0000"/>
-            </a:solidFill>
-          </a:ln>
-        </p:spPr>
-        <p:txBody>
-          <a:bodyPr wrap="square" rtlCol="0">
-            <a:spAutoFit/>
-          </a:bodyPr>
-          <a:lstStyle/>
-          <a:p>
-            <a:r>
-              <a:rPr lang="en-US" sz="1400" dirty="0"/>
-              <a:t>The X758 fuel filter is mounted on the front of the engine, making it accessible for heater installation. Wire the heater to your 12V battery system through a toggle switch so you can activate it 15 minutes before starting on cold mornings. Position the switch conveniently on your dashboard or near the operator seat for easy access. </a:t>
-            </a:r>
-          </a:p>
-        </p:txBody>
-      </p:sp>
-      <p:sp>
-        <p:nvSpPr>
-          <p:cNvPr id="7" name="TextBox 6">
-            <a:extLst>
-              <a:ext uri="{FF2B5EF4-FFF2-40B4-BE49-F238E27FC236}">
-                <a16:creationId xmlns:a16="http://schemas.microsoft.com/office/drawing/2014/main" id="{EEDF5ECF-4B02-D395-F79D-932A88711A5F}"/>
-              </a:ext>
-            </a:extLst>
-          </p:cNvPr>
-          <p:cNvSpPr txBox="1"/>
-          <p:nvPr/>
-        </p:nvSpPr>
-        <p:spPr>
-          <a:xfrm>
-            <a:off x="128977" y="3438644"/>
-            <a:ext cx="5838044" cy="1384995"/>
-          </a:xfrm>
-          <a:prstGeom prst="rect">
-            <a:avLst/>
-          </a:prstGeom>
-          <a:solidFill>
-            <a:schemeClr val="accent4">
-              <a:lumMod val="20000"/>
-              <a:lumOff val="80000"/>
-            </a:schemeClr>
-          </a:solidFill>
-          <a:ln>
-            <a:solidFill>
-              <a:srgbClr val="FF0000"/>
-            </a:solidFill>
-          </a:ln>
-        </p:spPr>
-        <p:txBody>
-          <a:bodyPr wrap="square" rtlCol="0">
-            <a:spAutoFit/>
-          </a:bodyPr>
-          <a:lstStyle/>
-          <a:p>
-            <a:r>
-              <a:rPr lang="en-US" sz="1400" dirty="0" err="1"/>
-              <a:t>Keenovo</a:t>
-            </a:r>
-            <a:r>
-              <a:rPr lang="en-US" sz="1400" dirty="0"/>
-              <a:t> Silicone Heating Pad - Available in various sizes with 12V 100W configurations, featuring built-in thermostats for over-heating protection. These use metal grommets for securing and can easily transfer between filters. </a:t>
-            </a:r>
-          </a:p>
-          <a:p>
-            <a:r>
-              <a:rPr lang="en-US" sz="1400" dirty="0">
-                <a:hlinkClick r:id="rId4"/>
-              </a:rPr>
-              <a:t>https://</a:t>
-            </a:r>
-            <a:r>
-              <a:rPr lang="en-US" sz="1400" dirty="0" err="1">
-                <a:hlinkClick r:id="rId4"/>
-              </a:rPr>
-              <a:t>keenovo.store</a:t>
-            </a:r>
-            <a:r>
-              <a:rPr lang="en-US" sz="1400" dirty="0">
-                <a:hlinkClick r:id="rId4"/>
-              </a:rPr>
-              <a:t>/products/keenovo-silicone-heating-pad-wvo-svo-fuel-filter-diesel-heater-nos-bottle-heater</a:t>
-            </a:r>
-            <a:endParaRPr lang="en-US" sz="1400" dirty="0"/>
+              <a:t>Engine block heater</a:t>
+            </a:r>
+            <a:r>
+              <a:rPr lang="en-US" sz="1200" dirty="0"/>
+              <a:t> – JD engine </a:t>
+            </a:r>
+            <a:r>
+              <a:rPr lang="en-US" sz="1200" b="1" dirty="0">
+                <a:solidFill>
+                  <a:srgbClr val="00B0F0"/>
+                </a:solidFill>
+              </a:rPr>
+              <a:t>coolant heater (part number AR87167)</a:t>
+            </a:r>
+            <a:r>
+              <a:rPr lang="en-US" sz="1200" dirty="0"/>
+              <a:t> requires an </a:t>
+            </a:r>
+            <a:r>
+              <a:rPr lang="en-US" sz="1200" b="1" dirty="0">
+                <a:solidFill>
+                  <a:srgbClr val="00B0F0"/>
+                </a:solidFill>
+              </a:rPr>
+              <a:t>adapter kit (MIA881629) </a:t>
+            </a:r>
+            <a:r>
+              <a:rPr lang="en-US" sz="1200" dirty="0"/>
+              <a:t>for installation on the X758 and should be plugged in for at least </a:t>
+            </a:r>
+            <a:r>
+              <a:rPr lang="en-US" sz="1200" b="1" dirty="0">
+                <a:solidFill>
+                  <a:srgbClr val="FF0000"/>
+                </a:solidFill>
+              </a:rPr>
+              <a:t>one hour before starting</a:t>
+            </a:r>
+            <a:r>
+              <a:rPr lang="en-US" sz="1200" dirty="0"/>
+              <a:t>.</a:t>
+            </a:r>
+          </a:p>
+          <a:p>
+            <a:pPr marL="285750" indent="-285750">
+              <a:buFont typeface="Courier New" panose="02070309020205020404" pitchFamily="49" charset="0"/>
+              <a:buChar char="o"/>
+            </a:pPr>
+            <a:r>
+              <a:rPr lang="en-US" sz="1200" b="1" dirty="0">
+                <a:solidFill>
+                  <a:srgbClr val="FF0000"/>
+                </a:solidFill>
+              </a:rPr>
+              <a:t>Replace fuel filters before cold weather </a:t>
+            </a:r>
+            <a:r>
+              <a:rPr lang="en-US" sz="1200" dirty="0"/>
+              <a:t>arrives, as dirty filters trap moisture and accelerate gelling.</a:t>
+            </a:r>
+            <a:endParaRPr lang="en-US" sz="1200" b="1" dirty="0">
+              <a:solidFill>
+                <a:srgbClr val="FF0000"/>
+              </a:solidFill>
+            </a:endParaRPr>
+          </a:p>
+          <a:p>
+            <a:pPr marL="285750" indent="-285750">
+              <a:buFont typeface="Courier New" panose="02070309020205020404" pitchFamily="49" charset="0"/>
+              <a:buChar char="o"/>
+            </a:pPr>
+            <a:r>
+              <a:rPr lang="en-US" sz="1200" b="1" dirty="0">
+                <a:solidFill>
+                  <a:srgbClr val="FF0000"/>
+                </a:solidFill>
+              </a:rPr>
+              <a:t>Engine Warm-Up </a:t>
+            </a:r>
+            <a:r>
+              <a:rPr lang="en-US" sz="1200" dirty="0"/>
+              <a:t>- the X758 has glow plugs that warm the cylinders before starting.  Turn the key to the "ON" position, wait for the glow plug indicator light (squiggly line) to go off before cranking the engine. Then let the tractor idle for several minutes to </a:t>
+            </a:r>
+            <a:r>
+              <a:rPr lang="en-US" sz="1200" b="1" dirty="0">
+                <a:solidFill>
+                  <a:srgbClr val="FF0000"/>
+                </a:solidFill>
+              </a:rPr>
+              <a:t>allow both the engine and hydraulic oil to warm up</a:t>
+            </a:r>
+            <a:r>
+              <a:rPr lang="en-US" sz="1200" dirty="0"/>
+              <a:t> before operating implements or the power steering system under load</a:t>
+            </a:r>
           </a:p>
         </p:txBody>
       </p:sp>
       <p:pic>
         <p:nvPicPr>
-          <p:cNvPr id="8" name="Picture 2" descr="KEENOVO Silicone Heating Pad WVO SVO Fuel Filter Diesel Heater NOS Bottle Heater">
-            <a:extLst>
-              <a:ext uri="{FF2B5EF4-FFF2-40B4-BE49-F238E27FC236}">
-                <a16:creationId xmlns:a16="http://schemas.microsoft.com/office/drawing/2014/main" id="{20446E96-8501-F9FE-7FD5-53EFB008B285}"/>
+          <p:cNvPr id="1026" name="Picture 2" descr="AR87167 Engine Block Coolant Heater Kit Fits for John Deere 1025R 110 2210  2305 4210 445 X495 XUV Gator 850D 855D 855M 865E - AliExpress">
+            <a:extLst>
+              <a:ext uri="{FF2B5EF4-FFF2-40B4-BE49-F238E27FC236}">
+                <a16:creationId xmlns:a16="http://schemas.microsoft.com/office/drawing/2014/main" id="{E31E646C-AD08-4238-DAB7-02DE88ECA7CC}"/>
               </a:ext>
             </a:extLst>
           </p:cNvPr>
@@ -11275,23 +11352,23 @@
           </p:cNvPicPr>
           <p:nvPr/>
         </p:nvPicPr>
-        <p:blipFill rotWithShape="1">
-          <a:blip r:embed="rId5" cstate="email">
+        <p:blipFill>
+          <a:blip r:embed="rId2" cstate="email">
             <a:extLst>
               <a:ext uri="{28A0092B-C50C-407E-A947-70E740481C1C}">
                 <a14:useLocalDpi xmlns:a14="http://schemas.microsoft.com/office/drawing/2010/main"/>
               </a:ext>
             </a:extLst>
           </a:blip>
-          <a:srcRect t="12957" b="12957"/>
+          <a:srcRect/>
           <a:stretch>
             <a:fillRect/>
           </a:stretch>
         </p:blipFill>
         <p:spPr bwMode="auto">
           <a:xfrm>
-            <a:off x="6291014" y="3013194"/>
-            <a:ext cx="1869430" cy="1384995"/>
+            <a:off x="147120" y="2500930"/>
+            <a:ext cx="4087091" cy="4087091"/>
           </a:xfrm>
           <a:prstGeom prst="rect">
             <a:avLst/>
@@ -11310,10 +11387,10 @@
       </p:pic>
       <p:pic>
         <p:nvPicPr>
-          <p:cNvPr id="9" name="Picture 4">
-            <a:extLst>
-              <a:ext uri="{FF2B5EF4-FFF2-40B4-BE49-F238E27FC236}">
-                <a16:creationId xmlns:a16="http://schemas.microsoft.com/office/drawing/2014/main" id="{9C444F37-DBB4-9594-003B-9EB1F0E8DC15}"/>
+          <p:cNvPr id="1028" name="Picture 4" descr="John Deere AR87167 Engine Block Coolant Heater Kit 1025R 110 2210 2305 Gator">
+            <a:extLst>
+              <a:ext uri="{FF2B5EF4-FFF2-40B4-BE49-F238E27FC236}">
+                <a16:creationId xmlns:a16="http://schemas.microsoft.com/office/drawing/2014/main" id="{F97D0BC0-FBA4-1B8E-A5A3-C35BC59A28F2}"/>
               </a:ext>
             </a:extLst>
           </p:cNvPr>
@@ -11322,8 +11399,8 @@
           </p:cNvPicPr>
           <p:nvPr/>
         </p:nvPicPr>
-        <p:blipFill rotWithShape="1">
-          <a:blip r:embed="rId6" cstate="email">
+        <p:blipFill>
+          <a:blip r:embed="rId3" cstate="email">
             <a:extLst>
               <a:ext uri="{28A0092B-C50C-407E-A947-70E740481C1C}">
                 <a14:useLocalDpi xmlns:a14="http://schemas.microsoft.com/office/drawing/2010/main"/>
@@ -11337,8 +11414,8 @@
         </p:blipFill>
         <p:spPr bwMode="auto">
           <a:xfrm>
-            <a:off x="9901974" y="1628199"/>
-            <a:ext cx="1947126" cy="1384995"/>
+            <a:off x="147120" y="770857"/>
+            <a:ext cx="1482436" cy="1482436"/>
           </a:xfrm>
           <a:prstGeom prst="rect">
             <a:avLst/>
@@ -11355,46 +11432,46 @@
           </a:extLst>
         </p:spPr>
       </p:pic>
-      <p:pic>
-        <p:nvPicPr>
-          <p:cNvPr id="10" name="Picture 9">
-            <a:extLst>
-              <a:ext uri="{FF2B5EF4-FFF2-40B4-BE49-F238E27FC236}">
-                <a16:creationId xmlns:a16="http://schemas.microsoft.com/office/drawing/2014/main" id="{17492681-5E1B-7EEF-E9CF-696955100BF8}"/>
-              </a:ext>
-            </a:extLst>
-          </p:cNvPr>
-          <p:cNvPicPr>
-            <a:picLocks noChangeAspect="1"/>
-          </p:cNvPicPr>
-          <p:nvPr/>
-        </p:nvPicPr>
-        <p:blipFill>
-          <a:blip r:embed="rId7" cstate="email">
-            <a:extLst>
-              <a:ext uri="{28A0092B-C50C-407E-A947-70E740481C1C}">
-                <a14:useLocalDpi xmlns:a14="http://schemas.microsoft.com/office/drawing/2010/main"/>
-              </a:ext>
-            </a:extLst>
-          </a:blip>
-          <a:stretch>
-            <a:fillRect/>
-          </a:stretch>
-        </p:blipFill>
+      <p:sp>
+        <p:nvSpPr>
+          <p:cNvPr id="4" name="TextBox 3">
+            <a:extLst>
+              <a:ext uri="{FF2B5EF4-FFF2-40B4-BE49-F238E27FC236}">
+                <a16:creationId xmlns:a16="http://schemas.microsoft.com/office/drawing/2014/main" id="{4248EAA2-37A7-21EF-BFB2-53447F6C3A8C}"/>
+              </a:ext>
+            </a:extLst>
+          </p:cNvPr>
+          <p:cNvSpPr txBox="1"/>
+          <p:nvPr/>
+        </p:nvSpPr>
         <p:spPr>
           <a:xfrm>
-            <a:off x="6644258" y="523220"/>
-            <a:ext cx="2956942" cy="1797477"/>
+            <a:off x="1629556" y="808399"/>
+            <a:ext cx="3164117" cy="1200329"/>
           </a:xfrm>
           <a:prstGeom prst="rect">
             <a:avLst/>
           </a:prstGeom>
-        </p:spPr>
-      </p:pic>
+          <a:noFill/>
+        </p:spPr>
+        <p:txBody>
+          <a:bodyPr wrap="square" rtlCol="0">
+            <a:spAutoFit/>
+          </a:bodyPr>
+          <a:lstStyle/>
+          <a:p>
+            <a:r>
+              <a:rPr lang="en-US" dirty="0"/>
+              <a:t>The warmth spreads through the entire engine via natural convection of the coolant. It takes 1-2 hours </a:t>
+            </a:r>
+            <a:endParaRPr lang="en-US" sz="1400" dirty="0"/>
+          </a:p>
+        </p:txBody>
+      </p:sp>
     </p:spTree>
     <p:extLst>
       <p:ext uri="{BB962C8B-B14F-4D97-AF65-F5344CB8AC3E}">
-        <p14:creationId xmlns:p14="http://schemas.microsoft.com/office/powerpoint/2010/main" val="3269277156"/>
+        <p14:creationId xmlns:p14="http://schemas.microsoft.com/office/powerpoint/2010/main" val="1065232430"/>
       </p:ext>
     </p:extLst>
   </p:cSld>
@@ -11409,13 +11486,7 @@
   <p:cSld>
     <p:spTree>
       <p:nvGrpSpPr>
-        <p:cNvPr id="1" name="">
-          <a:extLst>
-            <a:ext uri="{FF2B5EF4-FFF2-40B4-BE49-F238E27FC236}">
-              <a16:creationId xmlns:a16="http://schemas.microsoft.com/office/drawing/2014/main" id="{2D16B695-A4C0-BC53-15EF-81548A04F130}"/>
-            </a:ext>
-          </a:extLst>
-        </p:cNvPr>
+        <p:cNvPr id="1" name=""/>
         <p:cNvGrpSpPr/>
         <p:nvPr/>
       </p:nvGrpSpPr>
@@ -11432,7 +11503,7 @@
           <p:cNvPr id="2" name="TextBox 1">
             <a:extLst>
               <a:ext uri="{FF2B5EF4-FFF2-40B4-BE49-F238E27FC236}">
-                <a16:creationId xmlns:a16="http://schemas.microsoft.com/office/drawing/2014/main" id="{A5F44891-376B-DAA0-385F-BE3EBBF84680}"/>
+                <a16:creationId xmlns:a16="http://schemas.microsoft.com/office/drawing/2014/main" id="{775BBD15-AEC2-1815-2347-A5BB8F308263}"/>
               </a:ext>
             </a:extLst>
           </p:cNvPr>
@@ -11442,7 +11513,7 @@
         <p:spPr>
           <a:xfrm>
             <a:off x="-1" y="0"/>
-            <a:ext cx="4431253" cy="523220"/>
+            <a:ext cx="6096001" cy="523220"/>
           </a:xfrm>
           <a:prstGeom prst="rect">
             <a:avLst/>
@@ -11457,17 +11528,17 @@
           <a:p>
             <a:r>
               <a:rPr lang="en-US" sz="2800" b="1" dirty="0"/>
-              <a:t>Bagger = Hopper</a:t>
+              <a:t>John Deere X758 – Fuel Filter Heater</a:t>
             </a:r>
           </a:p>
         </p:txBody>
       </p:sp>
       <p:sp>
         <p:nvSpPr>
-          <p:cNvPr id="8" name="TextBox 7">
-            <a:extLst>
-              <a:ext uri="{FF2B5EF4-FFF2-40B4-BE49-F238E27FC236}">
-                <a16:creationId xmlns:a16="http://schemas.microsoft.com/office/drawing/2014/main" id="{E5EAD597-53B0-1A66-BAB2-6EA6A21F38F7}"/>
+          <p:cNvPr id="4" name="TextBox 3">
+            <a:extLst>
+              <a:ext uri="{FF2B5EF4-FFF2-40B4-BE49-F238E27FC236}">
+                <a16:creationId xmlns:a16="http://schemas.microsoft.com/office/drawing/2014/main" id="{4248EAA2-37A7-21EF-BFB2-53447F6C3A8C}"/>
               </a:ext>
             </a:extLst>
           </p:cNvPr>
@@ -11476,13 +11547,23 @@
         </p:nvSpPr>
         <p:spPr>
           <a:xfrm>
-            <a:off x="164052" y="807468"/>
-            <a:ext cx="5506736" cy="2192908"/>
+            <a:off x="128977" y="523220"/>
+            <a:ext cx="5838044" cy="1384995"/>
           </a:xfrm>
           <a:prstGeom prst="rect">
             <a:avLst/>
           </a:prstGeom>
-          <a:noFill/>
+          <a:solidFill>
+            <a:schemeClr val="accent4">
+              <a:lumMod val="20000"/>
+              <a:lumOff val="80000"/>
+            </a:schemeClr>
+          </a:solidFill>
+          <a:ln>
+            <a:solidFill>
+              <a:srgbClr val="FF0000"/>
+            </a:solidFill>
+          </a:ln>
         </p:spPr>
         <p:txBody>
           <a:bodyPr wrap="square" rtlCol="0">
@@ -11491,101 +11572,348 @@
           <a:lstStyle/>
           <a:p>
             <a:r>
+              <a:rPr lang="en-US" sz="1400" b="1" dirty="0" err="1">
+                <a:solidFill>
+                  <a:srgbClr val="FF0000"/>
+                </a:solidFill>
+              </a:rPr>
+              <a:t>ZeroStart</a:t>
+            </a:r>
+            <a:r>
+              <a:rPr lang="en-US" sz="1400" b="1" dirty="0">
+                <a:solidFill>
+                  <a:srgbClr val="FF0000"/>
+                </a:solidFill>
+              </a:rPr>
+              <a:t> 3400037 </a:t>
+            </a:r>
+            <a:r>
+              <a:rPr lang="en-US" sz="1400" dirty="0"/>
+              <a:t>- 100W 12V flexible silicone wrap measuring 12" x 4", designed for fuel filter diameters between 3.5" and 5.0". It uses </a:t>
+            </a:r>
+            <a:r>
+              <a:rPr lang="en-US" sz="1400" dirty="0" err="1"/>
+              <a:t>velcro</a:t>
+            </a:r>
+            <a:r>
+              <a:rPr lang="en-US" sz="1400" dirty="0"/>
+              <a:t>/hook-and-loop straps to secure around the filter housing and connects directly to your 12V battery with a toggle switch (switch sold separately). </a:t>
+            </a:r>
+          </a:p>
+          <a:p>
+            <a:r>
               <a:rPr lang="en-US" sz="1400" dirty="0">
-                <a:latin typeface="Calibri" panose="020F0502020204030204" pitchFamily="34" charset="0"/>
-                <a:cs typeface="Calibri" panose="020F0502020204030204" pitchFamily="34" charset="0"/>
-              </a:rPr>
-              <a:t>I have a bagger with 2 bags.</a:t>
-            </a:r>
-          </a:p>
-          <a:p>
+                <a:hlinkClick r:id="rId2"/>
+              </a:rPr>
+              <a:t>https://www.drivetrainamerica.com/3400037-zerostart-flexible-diesel-fuel-warmer-100w-120v-12-x-4/</a:t>
+            </a:r>
+            <a:endParaRPr lang="en-US" sz="1400" dirty="0"/>
+          </a:p>
+        </p:txBody>
+      </p:sp>
+      <p:sp>
+        <p:nvSpPr>
+          <p:cNvPr id="5" name="TextBox 4">
+            <a:extLst>
+              <a:ext uri="{FF2B5EF4-FFF2-40B4-BE49-F238E27FC236}">
+                <a16:creationId xmlns:a16="http://schemas.microsoft.com/office/drawing/2014/main" id="{8039C89E-E08B-184B-D776-5785D7E1A8EC}"/>
+              </a:ext>
+            </a:extLst>
+          </p:cNvPr>
+          <p:cNvSpPr txBox="1"/>
+          <p:nvPr/>
+        </p:nvSpPr>
+        <p:spPr>
+          <a:xfrm>
+            <a:off x="128977" y="1980932"/>
+            <a:ext cx="5838044" cy="1384995"/>
+          </a:xfrm>
+          <a:prstGeom prst="rect">
+            <a:avLst/>
+          </a:prstGeom>
+          <a:solidFill>
+            <a:schemeClr val="accent4">
+              <a:lumMod val="20000"/>
+              <a:lumOff val="80000"/>
+            </a:schemeClr>
+          </a:solidFill>
+          <a:ln>
+            <a:solidFill>
+              <a:srgbClr val="FF0000"/>
+            </a:solidFill>
+          </a:ln>
+        </p:spPr>
+        <p:txBody>
+          <a:bodyPr wrap="square" rtlCol="0">
+            <a:spAutoFit/>
+          </a:bodyPr>
+          <a:lstStyle/>
+          <a:p>
+            <a:r>
+              <a:rPr lang="en-US" sz="1400" b="1" dirty="0">
+                <a:solidFill>
+                  <a:srgbClr val="FF0000"/>
+                </a:solidFill>
+              </a:rPr>
+              <a:t>US </a:t>
+            </a:r>
+            <a:r>
+              <a:rPr lang="en-US" sz="1400" b="1" dirty="0" err="1">
+                <a:solidFill>
+                  <a:srgbClr val="FF0000"/>
+                </a:solidFill>
+              </a:rPr>
+              <a:t>Filtermaxx</a:t>
+            </a:r>
+            <a:r>
+              <a:rPr lang="en-US" sz="1400" b="1" dirty="0">
+                <a:solidFill>
+                  <a:srgbClr val="FF0000"/>
+                </a:solidFill>
+              </a:rPr>
+              <a:t> Fuel Filter Heater </a:t>
+            </a:r>
+            <a:r>
+              <a:rPr lang="en-US" sz="1400" dirty="0"/>
+              <a:t>- A thermostat-controlled 12V 100W wrap-around heater that fits most standard filters up to 4.5" diameter. The built-in thermostat is preset to 150°F and automatically regulates temperature, which prevents overheating without requiring manual monitoring </a:t>
+            </a:r>
             <a:r>
               <a:rPr lang="en-US" sz="1400" dirty="0">
-                <a:latin typeface="Calibri" panose="020F0502020204030204" pitchFamily="34" charset="0"/>
-                <a:cs typeface="Calibri" panose="020F0502020204030204" pitchFamily="34" charset="0"/>
-              </a:rPr>
-              <a:t>It has an annoying problem.</a:t>
-            </a:r>
-          </a:p>
-          <a:p>
+                <a:hlinkClick r:id="rId3"/>
+              </a:rPr>
+              <a:t>https://usfiltermaxx.com/</a:t>
+            </a:r>
+            <a:r>
+              <a:rPr lang="en-US" sz="1400" dirty="0" err="1">
+                <a:hlinkClick r:id="rId3"/>
+              </a:rPr>
+              <a:t>en</a:t>
+            </a:r>
             <a:r>
               <a:rPr lang="en-US" sz="1400" dirty="0">
-                <a:latin typeface="Calibri" panose="020F0502020204030204" pitchFamily="34" charset="0"/>
-                <a:cs typeface="Calibri" panose="020F0502020204030204" pitchFamily="34" charset="0"/>
-              </a:rPr>
-              <a:t>It fills the left bag first &amp; only the over-flow goes to the right bag. </a:t>
+                <a:hlinkClick r:id="rId3"/>
+              </a:rPr>
+              <a:t>/home/55--12-volt-fuel-and-oil-filter-heater-for-wvo-and-biodiesel.html</a:t>
+            </a:r>
+            <a:endParaRPr lang="en-US" sz="1400" dirty="0"/>
+          </a:p>
+        </p:txBody>
+      </p:sp>
+      <p:sp>
+        <p:nvSpPr>
+          <p:cNvPr id="6" name="TextBox 5">
+            <a:extLst>
+              <a:ext uri="{FF2B5EF4-FFF2-40B4-BE49-F238E27FC236}">
+                <a16:creationId xmlns:a16="http://schemas.microsoft.com/office/drawing/2014/main" id="{E1A2222B-A6D3-4A46-E220-566D4232382E}"/>
+              </a:ext>
+            </a:extLst>
+          </p:cNvPr>
+          <p:cNvSpPr txBox="1"/>
+          <p:nvPr/>
+        </p:nvSpPr>
+        <p:spPr>
+          <a:xfrm>
+            <a:off x="128977" y="4896356"/>
+            <a:ext cx="5838044" cy="1169551"/>
+          </a:xfrm>
+          <a:prstGeom prst="rect">
+            <a:avLst/>
+          </a:prstGeom>
+          <a:solidFill>
+            <a:schemeClr val="accent4">
+              <a:lumMod val="20000"/>
+              <a:lumOff val="80000"/>
+            </a:schemeClr>
+          </a:solidFill>
+          <a:ln>
+            <a:solidFill>
+              <a:srgbClr val="FF0000"/>
+            </a:solidFill>
+          </a:ln>
+        </p:spPr>
+        <p:txBody>
+          <a:bodyPr wrap="square" rtlCol="0">
+            <a:spAutoFit/>
+          </a:bodyPr>
+          <a:lstStyle/>
+          <a:p>
+            <a:r>
+              <a:rPr lang="en-US" sz="1400" dirty="0"/>
+              <a:t>The X758 fuel filter is mounted on the front of the engine, making it accessible for heater installation. Wire the heater to your 12V battery system through a toggle switch so you can activate it 15 minutes before starting on cold mornings. Position the switch conveniently on your dashboard or near the operator seat for easy access. </a:t>
+            </a:r>
+          </a:p>
+        </p:txBody>
+      </p:sp>
+      <p:sp>
+        <p:nvSpPr>
+          <p:cNvPr id="7" name="TextBox 6">
+            <a:extLst>
+              <a:ext uri="{FF2B5EF4-FFF2-40B4-BE49-F238E27FC236}">
+                <a16:creationId xmlns:a16="http://schemas.microsoft.com/office/drawing/2014/main" id="{EEDF5ECF-4B02-D395-F79D-932A88711A5F}"/>
+              </a:ext>
+            </a:extLst>
+          </p:cNvPr>
+          <p:cNvSpPr txBox="1"/>
+          <p:nvPr/>
+        </p:nvSpPr>
+        <p:spPr>
+          <a:xfrm>
+            <a:off x="128977" y="3438644"/>
+            <a:ext cx="5838044" cy="1384995"/>
+          </a:xfrm>
+          <a:prstGeom prst="rect">
+            <a:avLst/>
+          </a:prstGeom>
+          <a:solidFill>
+            <a:schemeClr val="accent4">
+              <a:lumMod val="20000"/>
+              <a:lumOff val="80000"/>
+            </a:schemeClr>
+          </a:solidFill>
+          <a:ln>
+            <a:solidFill>
+              <a:srgbClr val="FF0000"/>
+            </a:solidFill>
+          </a:ln>
+        </p:spPr>
+        <p:txBody>
+          <a:bodyPr wrap="square" rtlCol="0">
+            <a:spAutoFit/>
+          </a:bodyPr>
+          <a:lstStyle/>
+          <a:p>
+            <a:r>
+              <a:rPr lang="en-US" sz="1400" dirty="0" err="1"/>
+              <a:t>Keenovo</a:t>
+            </a:r>
+            <a:r>
+              <a:rPr lang="en-US" sz="1400" dirty="0"/>
+              <a:t> Silicone Heating Pad - Available in various sizes with 12V 100W configurations, featuring built-in thermostats for over-heating protection. These use metal grommets for securing and can easily transfer between filters. </a:t>
             </a:r>
           </a:p>
           <a:p>
             <a:r>
               <a:rPr lang="en-US" sz="1400" dirty="0">
-                <a:latin typeface="Calibri" panose="020F0502020204030204" pitchFamily="34" charset="0"/>
-                <a:cs typeface="Calibri" panose="020F0502020204030204" pitchFamily="34" charset="0"/>
-              </a:rPr>
-              <a:t>This makes the left bag  heavy while right bag is empty</a:t>
-            </a:r>
-          </a:p>
-          <a:p>
-            <a:endParaRPr lang="en-US" sz="1400" dirty="0">
-              <a:latin typeface="Calibri" panose="020F0502020204030204" pitchFamily="34" charset="0"/>
-              <a:cs typeface="Calibri" panose="020F0502020204030204" pitchFamily="34" charset="0"/>
-            </a:endParaRPr>
-          </a:p>
-          <a:p>
+                <a:hlinkClick r:id="rId4"/>
+              </a:rPr>
+              <a:t>https://</a:t>
+            </a:r>
+            <a:r>
+              <a:rPr lang="en-US" sz="1400" dirty="0" err="1">
+                <a:hlinkClick r:id="rId4"/>
+              </a:rPr>
+              <a:t>keenovo.store</a:t>
+            </a:r>
             <a:r>
               <a:rPr lang="en-US" sz="1400" dirty="0">
-                <a:latin typeface="Calibri" panose="020F0502020204030204" pitchFamily="34" charset="0"/>
-                <a:cs typeface="Calibri" panose="020F0502020204030204" pitchFamily="34" charset="0"/>
-              </a:rPr>
-              <a:t>Easy fix – block part of the chute opening as shown.</a:t>
-            </a:r>
-          </a:p>
-          <a:p>
-            <a:r>
-              <a:rPr lang="en-US" sz="1400" dirty="0">
-                <a:latin typeface="Calibri" panose="020F0502020204030204" pitchFamily="34" charset="0"/>
-                <a:cs typeface="Calibri" panose="020F0502020204030204" pitchFamily="34" charset="0"/>
-              </a:rPr>
-              <a:t>Two layers of duct tape facing each other, nothing is sticking to them.</a:t>
-            </a:r>
-          </a:p>
-          <a:p>
-            <a:endParaRPr lang="en-US" sz="1400" dirty="0">
-              <a:latin typeface="Calibri" panose="020F0502020204030204" pitchFamily="34" charset="0"/>
-              <a:cs typeface="Calibri" panose="020F0502020204030204" pitchFamily="34" charset="0"/>
-            </a:endParaRPr>
-          </a:p>
-          <a:p>
-            <a:r>
-              <a:rPr lang="en-US" sz="1400" dirty="0">
-                <a:latin typeface="Calibri" panose="020F0502020204030204" pitchFamily="34" charset="0"/>
-                <a:cs typeface="Calibri" panose="020F0502020204030204" pitchFamily="34" charset="0"/>
-              </a:rPr>
-              <a:t>The 2 bags now got filled up at similar speed. </a:t>
-            </a:r>
-          </a:p>
-          <a:p>
-            <a:r>
-              <a:rPr lang="en-US" sz="1050" dirty="0">
-                <a:latin typeface="Calibri" panose="020F0502020204030204" pitchFamily="34" charset="0"/>
-                <a:cs typeface="Calibri" panose="020F0502020204030204" pitchFamily="34" charset="0"/>
-                <a:hlinkClick r:id="rId2"/>
-              </a:rPr>
-              <a:t>https://www.facebook.com/groups/781254733349946/posts/803478744460878/</a:t>
-            </a:r>
-            <a:endParaRPr lang="en-US" sz="1050" dirty="0">
-              <a:latin typeface="Calibri" panose="020F0502020204030204" pitchFamily="34" charset="0"/>
-              <a:cs typeface="Calibri" panose="020F0502020204030204" pitchFamily="34" charset="0"/>
-            </a:endParaRPr>
+                <a:hlinkClick r:id="rId4"/>
+              </a:rPr>
+              <a:t>/products/keenovo-silicone-heating-pad-wvo-svo-fuel-filter-diesel-heater-nos-bottle-heater</a:t>
+            </a:r>
+            <a:endParaRPr lang="en-US" sz="1400" dirty="0"/>
           </a:p>
         </p:txBody>
       </p:sp>
       <p:pic>
         <p:nvPicPr>
-          <p:cNvPr id="3" name="Picture 2">
-            <a:extLst>
-              <a:ext uri="{FF2B5EF4-FFF2-40B4-BE49-F238E27FC236}">
-                <a16:creationId xmlns:a16="http://schemas.microsoft.com/office/drawing/2014/main" id="{FAA518FD-7EE2-032F-1F24-036ACB62B912}"/>
+          <p:cNvPr id="8" name="Picture 2" descr="KEENOVO Silicone Heating Pad WVO SVO Fuel Filter Diesel Heater NOS Bottle Heater">
+            <a:extLst>
+              <a:ext uri="{FF2B5EF4-FFF2-40B4-BE49-F238E27FC236}">
+                <a16:creationId xmlns:a16="http://schemas.microsoft.com/office/drawing/2014/main" id="{20446E96-8501-F9FE-7FD5-53EFB008B285}"/>
+              </a:ext>
+            </a:extLst>
+          </p:cNvPr>
+          <p:cNvPicPr>
+            <a:picLocks noChangeAspect="1" noChangeArrowheads="1"/>
+          </p:cNvPicPr>
+          <p:nvPr/>
+        </p:nvPicPr>
+        <p:blipFill rotWithShape="1">
+          <a:blip r:embed="rId5" cstate="email">
+            <a:extLst>
+              <a:ext uri="{28A0092B-C50C-407E-A947-70E740481C1C}">
+                <a14:useLocalDpi xmlns:a14="http://schemas.microsoft.com/office/drawing/2010/main"/>
+              </a:ext>
+            </a:extLst>
+          </a:blip>
+          <a:srcRect t="12957" b="12957"/>
+          <a:stretch>
+            <a:fillRect/>
+          </a:stretch>
+        </p:blipFill>
+        <p:spPr bwMode="auto">
+          <a:xfrm>
+            <a:off x="6291014" y="3013194"/>
+            <a:ext cx="1869430" cy="1384995"/>
+          </a:xfrm>
+          <a:prstGeom prst="rect">
+            <a:avLst/>
+          </a:prstGeom>
+          <a:noFill/>
+          <a:extLst>
+            <a:ext uri="{909E8E84-426E-40DD-AFC4-6F175D3DCCD1}">
+              <a14:hiddenFill xmlns:a14="http://schemas.microsoft.com/office/drawing/2010/main">
+                <a:solidFill>
+                  <a:srgbClr val="FFFFFF"/>
+                </a:solidFill>
+              </a14:hiddenFill>
+            </a:ext>
+          </a:extLst>
+        </p:spPr>
+      </p:pic>
+      <p:pic>
+        <p:nvPicPr>
+          <p:cNvPr id="9" name="Picture 4">
+            <a:extLst>
+              <a:ext uri="{FF2B5EF4-FFF2-40B4-BE49-F238E27FC236}">
+                <a16:creationId xmlns:a16="http://schemas.microsoft.com/office/drawing/2014/main" id="{9C444F37-DBB4-9594-003B-9EB1F0E8DC15}"/>
+              </a:ext>
+            </a:extLst>
+          </p:cNvPr>
+          <p:cNvPicPr>
+            <a:picLocks noChangeAspect="1" noChangeArrowheads="1"/>
+          </p:cNvPicPr>
+          <p:nvPr/>
+        </p:nvPicPr>
+        <p:blipFill rotWithShape="1">
+          <a:blip r:embed="rId6" cstate="email">
+            <a:extLst>
+              <a:ext uri="{28A0092B-C50C-407E-A947-70E740481C1C}">
+                <a14:useLocalDpi xmlns:a14="http://schemas.microsoft.com/office/drawing/2010/main"/>
+              </a:ext>
+            </a:extLst>
+          </a:blip>
+          <a:srcRect/>
+          <a:stretch>
+            <a:fillRect/>
+          </a:stretch>
+        </p:blipFill>
+        <p:spPr bwMode="auto">
+          <a:xfrm>
+            <a:off x="9901974" y="1628199"/>
+            <a:ext cx="1947126" cy="1384995"/>
+          </a:xfrm>
+          <a:prstGeom prst="rect">
+            <a:avLst/>
+          </a:prstGeom>
+          <a:noFill/>
+          <a:extLst>
+            <a:ext uri="{909E8E84-426E-40DD-AFC4-6F175D3DCCD1}">
+              <a14:hiddenFill xmlns:a14="http://schemas.microsoft.com/office/drawing/2010/main">
+                <a:solidFill>
+                  <a:srgbClr val="FFFFFF"/>
+                </a:solidFill>
+              </a14:hiddenFill>
+            </a:ext>
+          </a:extLst>
+        </p:spPr>
+      </p:pic>
+      <p:pic>
+        <p:nvPicPr>
+          <p:cNvPr id="10" name="Picture 9">
+            <a:extLst>
+              <a:ext uri="{FF2B5EF4-FFF2-40B4-BE49-F238E27FC236}">
+                <a16:creationId xmlns:a16="http://schemas.microsoft.com/office/drawing/2014/main" id="{17492681-5E1B-7EEF-E9CF-696955100BF8}"/>
               </a:ext>
             </a:extLst>
           </p:cNvPr>
@@ -11595,7 +11923,7 @@
           <p:nvPr/>
         </p:nvPicPr>
         <p:blipFill>
-          <a:blip r:embed="rId3" cstate="email">
+          <a:blip r:embed="rId7" cstate="email">
             <a:extLst>
               <a:ext uri="{28A0092B-C50C-407E-A947-70E740481C1C}">
                 <a14:useLocalDpi xmlns:a14="http://schemas.microsoft.com/office/drawing/2010/main"/>
@@ -11608,80 +11936,8 @@
         </p:blipFill>
         <p:spPr>
           <a:xfrm>
-            <a:off x="9492343" y="149679"/>
-            <a:ext cx="2699657" cy="2616377"/>
-          </a:xfrm>
-          <a:prstGeom prst="rect">
-            <a:avLst/>
-          </a:prstGeom>
-        </p:spPr>
-      </p:pic>
-      <p:pic>
-        <p:nvPicPr>
-          <p:cNvPr id="4" name="Picture 3">
-            <a:extLst>
-              <a:ext uri="{FF2B5EF4-FFF2-40B4-BE49-F238E27FC236}">
-                <a16:creationId xmlns:a16="http://schemas.microsoft.com/office/drawing/2014/main" id="{F37986CB-6953-B8BE-0826-E958A8437145}"/>
-              </a:ext>
-            </a:extLst>
-          </p:cNvPr>
-          <p:cNvPicPr>
-            <a:picLocks noChangeAspect="1"/>
-          </p:cNvPicPr>
-          <p:nvPr/>
-        </p:nvPicPr>
-        <p:blipFill>
-          <a:blip r:embed="rId4" cstate="email">
-            <a:extLst>
-              <a:ext uri="{28A0092B-C50C-407E-A947-70E740481C1C}">
-                <a14:useLocalDpi xmlns:a14="http://schemas.microsoft.com/office/drawing/2010/main"/>
-              </a:ext>
-            </a:extLst>
-          </a:blip>
-          <a:stretch>
-            <a:fillRect/>
-          </a:stretch>
-        </p:blipFill>
-        <p:spPr>
-          <a:xfrm>
-            <a:off x="9492342" y="3613391"/>
-            <a:ext cx="2699657" cy="2281997"/>
-          </a:xfrm>
-          <a:prstGeom prst="rect">
-            <a:avLst/>
-          </a:prstGeom>
-        </p:spPr>
-      </p:pic>
-      <p:pic>
-        <p:nvPicPr>
-          <p:cNvPr id="5" name="Picture 4">
-            <a:extLst>
-              <a:ext uri="{FF2B5EF4-FFF2-40B4-BE49-F238E27FC236}">
-                <a16:creationId xmlns:a16="http://schemas.microsoft.com/office/drawing/2014/main" id="{65079173-F2C4-DB18-BDAD-0AEF787B154F}"/>
-              </a:ext>
-            </a:extLst>
-          </p:cNvPr>
-          <p:cNvPicPr>
-            <a:picLocks noChangeAspect="1"/>
-          </p:cNvPicPr>
-          <p:nvPr/>
-        </p:nvPicPr>
-        <p:blipFill>
-          <a:blip r:embed="rId5" cstate="email">
-            <a:extLst>
-              <a:ext uri="{28A0092B-C50C-407E-A947-70E740481C1C}">
-                <a14:useLocalDpi xmlns:a14="http://schemas.microsoft.com/office/drawing/2010/main"/>
-              </a:ext>
-            </a:extLst>
-          </a:blip>
-          <a:stretch>
-            <a:fillRect/>
-          </a:stretch>
-        </p:blipFill>
-        <p:spPr>
-          <a:xfrm>
-            <a:off x="6909866" y="149679"/>
-            <a:ext cx="2374900" cy="2311400"/>
+            <a:off x="6644258" y="523220"/>
+            <a:ext cx="2956942" cy="1797477"/>
           </a:xfrm>
           <a:prstGeom prst="rect">
             <a:avLst/>
@@ -11691,7 +11947,7 @@
     </p:spTree>
     <p:extLst>
       <p:ext uri="{BB962C8B-B14F-4D97-AF65-F5344CB8AC3E}">
-        <p14:creationId xmlns:p14="http://schemas.microsoft.com/office/powerpoint/2010/main" val="1255854292"/>
+        <p14:creationId xmlns:p14="http://schemas.microsoft.com/office/powerpoint/2010/main" val="3269277156"/>
       </p:ext>
     </p:extLst>
   </p:cSld>

--- a/tractor_jd_1025r_X758.pptx
+++ b/tractor_jd_1025r_X758.pptx
@@ -273,7 +273,7 @@
           <a:lstStyle/>
           <a:p>
             <a:fld id="{16286276-9013-2A43-82D1-BA4685C95117}" type="datetimeFigureOut">
-              <a:t>6/18/26</a:t>
+              <a:t>6/22/26</a:t>
             </a:fld>
             <a:endParaRPr lang="en-US"/>
           </a:p>
@@ -469,7 +469,7 @@
           <a:lstStyle/>
           <a:p>
             <a:fld id="{16286276-9013-2A43-82D1-BA4685C95117}" type="datetimeFigureOut">
-              <a:t>6/18/26</a:t>
+              <a:t>6/22/26</a:t>
             </a:fld>
             <a:endParaRPr lang="en-US"/>
           </a:p>
@@ -675,7 +675,7 @@
           <a:lstStyle/>
           <a:p>
             <a:fld id="{16286276-9013-2A43-82D1-BA4685C95117}" type="datetimeFigureOut">
-              <a:t>6/18/26</a:t>
+              <a:t>6/22/26</a:t>
             </a:fld>
             <a:endParaRPr lang="en-US"/>
           </a:p>
@@ -871,7 +871,7 @@
           <a:lstStyle/>
           <a:p>
             <a:fld id="{16286276-9013-2A43-82D1-BA4685C95117}" type="datetimeFigureOut">
-              <a:t>6/18/26</a:t>
+              <a:t>6/22/26</a:t>
             </a:fld>
             <a:endParaRPr lang="en-US"/>
           </a:p>
@@ -1144,7 +1144,7 @@
           <a:lstStyle/>
           <a:p>
             <a:fld id="{16286276-9013-2A43-82D1-BA4685C95117}" type="datetimeFigureOut">
-              <a:t>6/18/26</a:t>
+              <a:t>6/22/26</a:t>
             </a:fld>
             <a:endParaRPr lang="en-US"/>
           </a:p>
@@ -1407,7 +1407,7 @@
           <a:lstStyle/>
           <a:p>
             <a:fld id="{16286276-9013-2A43-82D1-BA4685C95117}" type="datetimeFigureOut">
-              <a:t>6/18/26</a:t>
+              <a:t>6/22/26</a:t>
             </a:fld>
             <a:endParaRPr lang="en-US"/>
           </a:p>
@@ -1817,7 +1817,7 @@
           <a:lstStyle/>
           <a:p>
             <a:fld id="{16286276-9013-2A43-82D1-BA4685C95117}" type="datetimeFigureOut">
-              <a:t>6/18/26</a:t>
+              <a:t>6/22/26</a:t>
             </a:fld>
             <a:endParaRPr lang="en-US"/>
           </a:p>
@@ -1956,7 +1956,7 @@
           <a:lstStyle/>
           <a:p>
             <a:fld id="{16286276-9013-2A43-82D1-BA4685C95117}" type="datetimeFigureOut">
-              <a:t>6/18/26</a:t>
+              <a:t>6/22/26</a:t>
             </a:fld>
             <a:endParaRPr lang="en-US"/>
           </a:p>
@@ -2067,7 +2067,7 @@
           <a:lstStyle/>
           <a:p>
             <a:fld id="{16286276-9013-2A43-82D1-BA4685C95117}" type="datetimeFigureOut">
-              <a:t>6/18/26</a:t>
+              <a:t>6/22/26</a:t>
             </a:fld>
             <a:endParaRPr lang="en-US"/>
           </a:p>
@@ -2376,7 +2376,7 @@
           <a:lstStyle/>
           <a:p>
             <a:fld id="{16286276-9013-2A43-82D1-BA4685C95117}" type="datetimeFigureOut">
-              <a:t>6/18/26</a:t>
+              <a:t>6/22/26</a:t>
             </a:fld>
             <a:endParaRPr lang="en-US"/>
           </a:p>
@@ -2662,7 +2662,7 @@
           <a:lstStyle/>
           <a:p>
             <a:fld id="{16286276-9013-2A43-82D1-BA4685C95117}" type="datetimeFigureOut">
-              <a:t>6/18/26</a:t>
+              <a:t>6/22/26</a:t>
             </a:fld>
             <a:endParaRPr lang="en-US"/>
           </a:p>
@@ -2901,7 +2901,7 @@
           </a:lstStyle>
           <a:p>
             <a:fld id="{16286276-9013-2A43-82D1-BA4685C95117}" type="datetimeFigureOut">
-              <a:t>6/18/26</a:t>
+              <a:t>6/22/26</a:t>
             </a:fld>
             <a:endParaRPr lang="en-US"/>
           </a:p>
@@ -3926,7 +3926,7 @@
         <p:spPr>
           <a:xfrm>
             <a:off x="-1" y="0"/>
-            <a:ext cx="4431253" cy="523220"/>
+            <a:ext cx="2552997" cy="523220"/>
           </a:xfrm>
           <a:prstGeom prst="rect">
             <a:avLst/>
@@ -4737,6 +4737,87 @@
           <a:xfrm>
             <a:off x="2778404" y="4787273"/>
             <a:ext cx="1930074" cy="1983265"/>
+          </a:xfrm>
+          <a:prstGeom prst="rect">
+            <a:avLst/>
+          </a:prstGeom>
+          <a:ln>
+            <a:solidFill>
+              <a:srgbClr val="FF0000"/>
+            </a:solidFill>
+          </a:ln>
+        </p:spPr>
+      </p:pic>
+      <p:sp>
+        <p:nvSpPr>
+          <p:cNvPr id="3" name="TextBox 2">
+            <a:extLst>
+              <a:ext uri="{FF2B5EF4-FFF2-40B4-BE49-F238E27FC236}">
+                <a16:creationId xmlns:a16="http://schemas.microsoft.com/office/drawing/2014/main" id="{25A3B33B-2A6D-C342-CB7E-F1D8A330A28A}"/>
+              </a:ext>
+            </a:extLst>
+          </p:cNvPr>
+          <p:cNvSpPr txBox="1"/>
+          <p:nvPr/>
+        </p:nvSpPr>
+        <p:spPr>
+          <a:xfrm>
+            <a:off x="9690846" y="1361665"/>
+            <a:ext cx="2353336" cy="1015663"/>
+          </a:xfrm>
+          <a:prstGeom prst="rect">
+            <a:avLst/>
+          </a:prstGeom>
+          <a:noFill/>
+          <a:ln>
+            <a:solidFill>
+              <a:srgbClr val="FF0000"/>
+            </a:solidFill>
+          </a:ln>
+        </p:spPr>
+        <p:txBody>
+          <a:bodyPr wrap="square" rtlCol="0">
+            <a:spAutoFit/>
+          </a:bodyPr>
+          <a:lstStyle/>
+          <a:p>
+            <a:r>
+              <a:rPr lang="en-US" sz="1200" dirty="0"/>
+              <a:t>Note: when installing the power flow, the longer leg of the Z‑rod goes into the impeller (Power Flow) housing, and the shorter leg goes into the deck bracket</a:t>
+            </a:r>
+          </a:p>
+        </p:txBody>
+      </p:sp>
+      <p:pic>
+        <p:nvPicPr>
+          <p:cNvPr id="4" name="Picture 3" descr="Installing">
+            <a:extLst>
+              <a:ext uri="{FF2B5EF4-FFF2-40B4-BE49-F238E27FC236}">
+                <a16:creationId xmlns:a16="http://schemas.microsoft.com/office/drawing/2014/main" id="{6E9DD1D4-B3ED-AA71-DB0E-CA5C7635CAC9}"/>
+              </a:ext>
+            </a:extLst>
+          </p:cNvPr>
+          <p:cNvPicPr>
+            <a:picLocks noChangeAspect="1"/>
+          </p:cNvPicPr>
+          <p:nvPr/>
+        </p:nvPicPr>
+        <p:blipFill>
+          <a:blip r:embed="rId8" cstate="email">
+            <a:extLst>
+              <a:ext uri="{28A0092B-C50C-407E-A947-70E740481C1C}">
+                <a14:useLocalDpi xmlns:a14="http://schemas.microsoft.com/office/drawing/2010/main"/>
+              </a:ext>
+            </a:extLst>
+          </a:blip>
+          <a:stretch>
+            <a:fillRect/>
+          </a:stretch>
+        </p:blipFill>
+        <p:spPr>
+          <a:xfrm>
+            <a:off x="10026234" y="117685"/>
+            <a:ext cx="2019300" cy="1219200"/>
           </a:xfrm>
           <a:prstGeom prst="rect">
             <a:avLst/>
@@ -7858,7 +7939,7 @@
         <p:spPr>
           <a:xfrm>
             <a:off x="6086560" y="2323154"/>
-            <a:ext cx="4093760" cy="2800767"/>
+            <a:ext cx="4437666" cy="2462213"/>
           </a:xfrm>
           <a:prstGeom prst="rect">
             <a:avLst/>
@@ -7939,250 +8020,6 @@
             </a:endParaRPr>
           </a:p>
           <a:p>
-            <a:r>
-              <a:rPr lang="en-US" sz="1100" dirty="0">
-                <a:latin typeface="Menlo" panose="020B0609030804020204" pitchFamily="49" charset="0"/>
-                <a:ea typeface="Menlo" panose="020B0609030804020204" pitchFamily="49" charset="0"/>
-                <a:cs typeface="Menlo" panose="020B0609030804020204" pitchFamily="49" charset="0"/>
-              </a:rPr>
-              <a:t>---------</a:t>
-            </a:r>
-          </a:p>
-          <a:p>
-            <a:r>
-              <a:rPr lang="en-US" sz="1100" dirty="0">
-                <a:latin typeface="Menlo" panose="020B0609030804020204" pitchFamily="49" charset="0"/>
-                <a:ea typeface="Menlo" panose="020B0609030804020204" pitchFamily="49" charset="0"/>
-                <a:cs typeface="Menlo" panose="020B0609030804020204" pitchFamily="49" charset="0"/>
-              </a:rPr>
-              <a:t>X485 4wd gas fuel injection</a:t>
-            </a:r>
-          </a:p>
-          <a:p>
-            <a:r>
-              <a:rPr lang="en-US" sz="1100" b="1" dirty="0">
-                <a:solidFill>
-                  <a:srgbClr val="FF0000"/>
-                </a:solidFill>
-                <a:latin typeface="Menlo" panose="020B0609030804020204" pitchFamily="49" charset="0"/>
-                <a:ea typeface="Menlo" panose="020B0609030804020204" pitchFamily="49" charset="0"/>
-                <a:cs typeface="Menlo" panose="020B0609030804020204" pitchFamily="49" charset="0"/>
-              </a:rPr>
-              <a:t>X495 2wd diesel  (2002-2005)</a:t>
-            </a:r>
-            <a:r>
-              <a:rPr lang="en-US" sz="1100" dirty="0">
-                <a:latin typeface="Menlo" panose="020B0609030804020204" pitchFamily="49" charset="0"/>
-                <a:ea typeface="Menlo" panose="020B0609030804020204" pitchFamily="49" charset="0"/>
-                <a:cs typeface="Menlo" panose="020B0609030804020204" pitchFamily="49" charset="0"/>
-              </a:rPr>
-              <a:t> - </a:t>
-            </a:r>
-            <a:r>
-              <a:rPr lang="en-US" sz="1100" dirty="0">
-                <a:latin typeface="Menlo" panose="020B0609030804020204" pitchFamily="49" charset="0"/>
-                <a:ea typeface="Menlo" panose="020B0609030804020204" pitchFamily="49" charset="0"/>
-                <a:cs typeface="Menlo" panose="020B0609030804020204" pitchFamily="49" charset="0"/>
-                <a:hlinkClick r:id="rId6"/>
-              </a:rPr>
-              <a:t>link</a:t>
-            </a:r>
-            <a:r>
-              <a:rPr lang="en-US" sz="1100" dirty="0">
-                <a:latin typeface="Menlo" panose="020B0609030804020204" pitchFamily="49" charset="0"/>
-                <a:ea typeface="Menlo" panose="020B0609030804020204" pitchFamily="49" charset="0"/>
-                <a:cs typeface="Menlo" panose="020B0609030804020204" pitchFamily="49" charset="0"/>
-              </a:rPr>
-              <a:t> </a:t>
-            </a:r>
-          </a:p>
-          <a:p>
-            <a:r>
-              <a:rPr lang="en-US" sz="1100" dirty="0">
-                <a:latin typeface="Menlo" panose="020B0609030804020204" pitchFamily="49" charset="0"/>
-                <a:ea typeface="Menlo" panose="020B0609030804020204" pitchFamily="49" charset="0"/>
-                <a:cs typeface="Menlo" panose="020B0609030804020204" pitchFamily="49" charset="0"/>
-              </a:rPr>
-              <a:t>---------</a:t>
-            </a:r>
-          </a:p>
-          <a:p>
-            <a:r>
-              <a:rPr lang="en-US" sz="1100" dirty="0">
-                <a:latin typeface="Menlo" panose="020B0609030804020204" pitchFamily="49" charset="0"/>
-                <a:ea typeface="Menlo" panose="020B0609030804020204" pitchFamily="49" charset="0"/>
-                <a:cs typeface="Menlo" panose="020B0609030804020204" pitchFamily="49" charset="0"/>
-              </a:rPr>
-              <a:t>X590 2wd gas fuel injection</a:t>
-            </a:r>
-          </a:p>
-          <a:p>
-            <a:r>
-              <a:rPr lang="en-US" sz="1100" b="1" dirty="0">
-                <a:solidFill>
-                  <a:srgbClr val="FF0000"/>
-                </a:solidFill>
-                <a:highlight>
-                  <a:srgbClr val="FFFF00"/>
-                </a:highlight>
-                <a:latin typeface="Menlo" panose="020B0609030804020204" pitchFamily="49" charset="0"/>
-                <a:ea typeface="Menlo" panose="020B0609030804020204" pitchFamily="49" charset="0"/>
-                <a:cs typeface="Menlo" panose="020B0609030804020204" pitchFamily="49" charset="0"/>
-              </a:rPr>
-              <a:t>X595 4wd diesel (2002-2005) </a:t>
-            </a:r>
-            <a:r>
-              <a:rPr lang="en-US" sz="1100" dirty="0">
-                <a:highlight>
-                  <a:srgbClr val="FFFF00"/>
-                </a:highlight>
-                <a:latin typeface="Menlo" panose="020B0609030804020204" pitchFamily="49" charset="0"/>
-                <a:ea typeface="Menlo" panose="020B0609030804020204" pitchFamily="49" charset="0"/>
-                <a:cs typeface="Menlo" panose="020B0609030804020204" pitchFamily="49" charset="0"/>
-              </a:rPr>
-              <a:t> - </a:t>
-            </a:r>
-            <a:r>
-              <a:rPr lang="en-US" sz="1100" dirty="0">
-                <a:highlight>
-                  <a:srgbClr val="FFFF00"/>
-                </a:highlight>
-                <a:latin typeface="Menlo" panose="020B0609030804020204" pitchFamily="49" charset="0"/>
-                <a:ea typeface="Menlo" panose="020B0609030804020204" pitchFamily="49" charset="0"/>
-                <a:cs typeface="Menlo" panose="020B0609030804020204" pitchFamily="49" charset="0"/>
-                <a:hlinkClick r:id="rId7"/>
-              </a:rPr>
-              <a:t>link</a:t>
-            </a:r>
-            <a:endParaRPr lang="en-US" sz="1100" b="1" dirty="0">
-              <a:solidFill>
-                <a:srgbClr val="FF0000"/>
-              </a:solidFill>
-              <a:highlight>
-                <a:srgbClr val="FFFF00"/>
-              </a:highlight>
-              <a:latin typeface="Menlo" panose="020B0609030804020204" pitchFamily="49" charset="0"/>
-              <a:ea typeface="Menlo" panose="020B0609030804020204" pitchFamily="49" charset="0"/>
-              <a:cs typeface="Menlo" panose="020B0609030804020204" pitchFamily="49" charset="0"/>
-            </a:endParaRPr>
-          </a:p>
-          <a:p>
-            <a:r>
-              <a:rPr lang="en-US" sz="1100" dirty="0">
-                <a:latin typeface="Menlo" panose="020B0609030804020204" pitchFamily="49" charset="0"/>
-                <a:ea typeface="Menlo" panose="020B0609030804020204" pitchFamily="49" charset="0"/>
-                <a:cs typeface="Menlo" panose="020B0609030804020204" pitchFamily="49" charset="0"/>
-              </a:rPr>
-              <a:t>---------</a:t>
-            </a:r>
-          </a:p>
-          <a:p>
-            <a:r>
-              <a:rPr lang="en-US" sz="1100" dirty="0">
-                <a:latin typeface="Menlo" panose="020B0609030804020204" pitchFamily="49" charset="0"/>
-                <a:ea typeface="Menlo" panose="020B0609030804020204" pitchFamily="49" charset="0"/>
-                <a:cs typeface="Menlo" panose="020B0609030804020204" pitchFamily="49" charset="0"/>
-              </a:rPr>
-              <a:t>X738, X739 4wd gas fuel injection</a:t>
-            </a:r>
-          </a:p>
-          <a:p>
-            <a:r>
-              <a:rPr lang="en-US" sz="1100" b="1" dirty="0">
-                <a:solidFill>
-                  <a:srgbClr val="FF0000"/>
-                </a:solidFill>
-                <a:latin typeface="Menlo" panose="020B0609030804020204" pitchFamily="49" charset="0"/>
-                <a:ea typeface="Menlo" panose="020B0609030804020204" pitchFamily="49" charset="0"/>
-                <a:cs typeface="Menlo" panose="020B0609030804020204" pitchFamily="49" charset="0"/>
-              </a:rPr>
-              <a:t>X740, X744 </a:t>
-            </a:r>
-            <a:r>
-              <a:rPr lang="en-US" sz="1100" dirty="0">
-                <a:latin typeface="Menlo" panose="020B0609030804020204" pitchFamily="49" charset="0"/>
-                <a:ea typeface="Menlo" panose="020B0609030804020204" pitchFamily="49" charset="0"/>
-                <a:cs typeface="Menlo" panose="020B0609030804020204" pitchFamily="49" charset="0"/>
-              </a:rPr>
-              <a:t>2wd diesel (2006-12)</a:t>
-            </a:r>
-          </a:p>
-          <a:p>
-            <a:r>
-              <a:rPr lang="en-US" sz="1100" b="1" dirty="0">
-                <a:solidFill>
-                  <a:srgbClr val="FF0000"/>
-                </a:solidFill>
-                <a:highlight>
-                  <a:srgbClr val="FFFF00"/>
-                </a:highlight>
-                <a:latin typeface="Menlo" panose="020B0609030804020204" pitchFamily="49" charset="0"/>
-                <a:ea typeface="Menlo" panose="020B0609030804020204" pitchFamily="49" charset="0"/>
-                <a:cs typeface="Menlo" panose="020B0609030804020204" pitchFamily="49" charset="0"/>
-              </a:rPr>
-              <a:t>X748, X749</a:t>
-            </a:r>
-            <a:r>
-              <a:rPr lang="en-US" sz="1100" dirty="0">
-                <a:highlight>
-                  <a:srgbClr val="FFFF00"/>
-                </a:highlight>
-                <a:latin typeface="Menlo" panose="020B0609030804020204" pitchFamily="49" charset="0"/>
-                <a:ea typeface="Menlo" panose="020B0609030804020204" pitchFamily="49" charset="0"/>
-                <a:cs typeface="Menlo" panose="020B0609030804020204" pitchFamily="49" charset="0"/>
-              </a:rPr>
-              <a:t> 4wd diesel (2006-12) - </a:t>
-            </a:r>
-            <a:r>
-              <a:rPr lang="en-US" sz="1100" dirty="0">
-                <a:highlight>
-                  <a:srgbClr val="FFFF00"/>
-                </a:highlight>
-                <a:latin typeface="Menlo" panose="020B0609030804020204" pitchFamily="49" charset="0"/>
-                <a:ea typeface="Menlo" panose="020B0609030804020204" pitchFamily="49" charset="0"/>
-                <a:cs typeface="Menlo" panose="020B0609030804020204" pitchFamily="49" charset="0"/>
-                <a:hlinkClick r:id="rId8"/>
-              </a:rPr>
-              <a:t>link</a:t>
-            </a:r>
-            <a:endParaRPr lang="en-US" sz="1100" dirty="0">
-              <a:highlight>
-                <a:srgbClr val="FFFF00"/>
-              </a:highlight>
-              <a:latin typeface="Menlo" panose="020B0609030804020204" pitchFamily="49" charset="0"/>
-              <a:ea typeface="Menlo" panose="020B0609030804020204" pitchFamily="49" charset="0"/>
-              <a:cs typeface="Menlo" panose="020B0609030804020204" pitchFamily="49" charset="0"/>
-            </a:endParaRPr>
-          </a:p>
-          <a:p>
-            <a:r>
-              <a:rPr lang="en-US" sz="1100" b="1" dirty="0">
-                <a:solidFill>
-                  <a:srgbClr val="FF0000"/>
-                </a:solidFill>
-                <a:latin typeface="Menlo" panose="020B0609030804020204" pitchFamily="49" charset="0"/>
-                <a:ea typeface="Menlo" panose="020B0609030804020204" pitchFamily="49" charset="0"/>
-                <a:cs typeface="Menlo" panose="020B0609030804020204" pitchFamily="49" charset="0"/>
-              </a:rPr>
-              <a:t>X750, X754</a:t>
-            </a:r>
-            <a:r>
-              <a:rPr lang="en-US" sz="1100" dirty="0">
-                <a:latin typeface="Menlo" panose="020B0609030804020204" pitchFamily="49" charset="0"/>
-                <a:ea typeface="Menlo" panose="020B0609030804020204" pitchFamily="49" charset="0"/>
-                <a:cs typeface="Menlo" panose="020B0609030804020204" pitchFamily="49" charset="0"/>
-              </a:rPr>
-              <a:t> 2wd diesel (2013-present) - </a:t>
-            </a:r>
-            <a:r>
-              <a:rPr lang="en-US" sz="1100" dirty="0">
-                <a:latin typeface="Menlo" panose="020B0609030804020204" pitchFamily="49" charset="0"/>
-                <a:ea typeface="Menlo" panose="020B0609030804020204" pitchFamily="49" charset="0"/>
-                <a:cs typeface="Menlo" panose="020B0609030804020204" pitchFamily="49" charset="0"/>
-                <a:hlinkClick r:id="rId9"/>
-              </a:rPr>
-              <a:t>link</a:t>
-            </a:r>
             <a:endParaRPr lang="en-US" sz="1100" dirty="0">
               <a:latin typeface="Menlo" panose="020B0609030804020204" pitchFamily="49" charset="0"/>
               <a:ea typeface="Menlo" panose="020B0609030804020204" pitchFamily="49" charset="0"/>
@@ -8191,59 +8028,102 @@
           </a:p>
           <a:p>
             <a:r>
-              <a:rPr lang="en-US" sz="1100" b="1" dirty="0">
-                <a:solidFill>
-                  <a:srgbClr val="FF0000"/>
-                </a:solidFill>
-                <a:highlight>
-                  <a:srgbClr val="FFFF00"/>
-                </a:highlight>
-                <a:latin typeface="Menlo" panose="020B0609030804020204" pitchFamily="49" charset="0"/>
-                <a:ea typeface="Menlo" panose="020B0609030804020204" pitchFamily="49" charset="0"/>
-                <a:cs typeface="Menlo" panose="020B0609030804020204" pitchFamily="49" charset="0"/>
-              </a:rPr>
-              <a:t>X758</a:t>
-            </a:r>
-            <a:r>
-              <a:rPr lang="en-US" sz="1100" dirty="0">
-                <a:highlight>
-                  <a:srgbClr val="FFFF00"/>
-                </a:highlight>
-                <a:latin typeface="Menlo" panose="020B0609030804020204" pitchFamily="49" charset="0"/>
-                <a:ea typeface="Menlo" panose="020B0609030804020204" pitchFamily="49" charset="0"/>
-                <a:cs typeface="Menlo" panose="020B0609030804020204" pitchFamily="49" charset="0"/>
-              </a:rPr>
-              <a:t>       4wd diesel (2013-present) - </a:t>
-            </a:r>
-            <a:r>
-              <a:rPr lang="en-US" sz="1100" dirty="0">
-                <a:highlight>
-                  <a:srgbClr val="FFFF00"/>
-                </a:highlight>
-                <a:latin typeface="Menlo" panose="020B0609030804020204" pitchFamily="49" charset="0"/>
-                <a:ea typeface="Menlo" panose="020B0609030804020204" pitchFamily="49" charset="0"/>
-                <a:cs typeface="Menlo" panose="020B0609030804020204" pitchFamily="49" charset="0"/>
-                <a:hlinkClick r:id="rId9"/>
-              </a:rPr>
-              <a:t>link</a:t>
-            </a:r>
-            <a:endParaRPr lang="en-US" sz="1100" dirty="0">
-              <a:highlight>
-                <a:srgbClr val="FFFF00"/>
-              </a:highlight>
-              <a:latin typeface="Menlo" panose="020B0609030804020204" pitchFamily="49" charset="0"/>
-              <a:ea typeface="Menlo" panose="020B0609030804020204" pitchFamily="49" charset="0"/>
-              <a:cs typeface="Menlo" panose="020B0609030804020204" pitchFamily="49" charset="0"/>
-            </a:endParaRPr>
-          </a:p>
-          <a:p>
-            <a:r>
               <a:rPr lang="en-US" sz="1100" dirty="0">
                 <a:latin typeface="Menlo" panose="020B0609030804020204" pitchFamily="49" charset="0"/>
                 <a:ea typeface="Menlo" panose="020B0609030804020204" pitchFamily="49" charset="0"/>
                 <a:cs typeface="Menlo" panose="020B0609030804020204" pitchFamily="49" charset="0"/>
               </a:rPr>
-              <a:t>---------</a:t>
+              <a:t>--------- 4WD Diesel of Fuel Injection ----------</a:t>
+            </a:r>
+          </a:p>
+          <a:p>
+            <a:r>
+              <a:rPr lang="en-US" sz="1100" dirty="0">
+                <a:latin typeface="Menlo" panose="020B0609030804020204" pitchFamily="49" charset="0"/>
+                <a:ea typeface="Menlo" panose="020B0609030804020204" pitchFamily="49" charset="0"/>
+                <a:cs typeface="Menlo" panose="020B0609030804020204" pitchFamily="49" charset="0"/>
+              </a:rPr>
+              <a:t>X585 – Gas EFI, 2002–2006 ($3K–$7K)</a:t>
+            </a:r>
+          </a:p>
+          <a:p>
+            <a:r>
+              <a:rPr lang="en-US" sz="1100" dirty="0">
+                <a:latin typeface="Menlo" panose="020B0609030804020204" pitchFamily="49" charset="0"/>
+                <a:ea typeface="Menlo" panose="020B0609030804020204" pitchFamily="49" charset="0"/>
+                <a:cs typeface="Menlo" panose="020B0609030804020204" pitchFamily="49" charset="0"/>
+              </a:rPr>
+              <a:t>X595 – Diesel, 2002–2005 ($6K–$12K)</a:t>
+            </a:r>
+          </a:p>
+          <a:p>
+            <a:r>
+              <a:rPr lang="en-US" sz="1100" dirty="0">
+                <a:latin typeface="Menlo" panose="020B0609030804020204" pitchFamily="49" charset="0"/>
+                <a:ea typeface="Menlo" panose="020B0609030804020204" pitchFamily="49" charset="0"/>
+                <a:cs typeface="Menlo" panose="020B0609030804020204" pitchFamily="49" charset="0"/>
+              </a:rPr>
+              <a:t>X728 – Gas EFI, 2006–2012 ($6K–$8K)</a:t>
+            </a:r>
+          </a:p>
+          <a:p>
+            <a:r>
+              <a:rPr lang="en-US" sz="1100" dirty="0">
+                <a:latin typeface="Menlo" panose="020B0609030804020204" pitchFamily="49" charset="0"/>
+                <a:ea typeface="Menlo" panose="020B0609030804020204" pitchFamily="49" charset="0"/>
+                <a:cs typeface="Menlo" panose="020B0609030804020204" pitchFamily="49" charset="0"/>
+              </a:rPr>
+              <a:t>X729 – Gas EFI, 2006–2012 ($6K–$9K)</a:t>
+            </a:r>
+          </a:p>
+          <a:p>
+            <a:r>
+              <a:rPr lang="en-US" sz="1100" dirty="0">
+                <a:latin typeface="Menlo" panose="020B0609030804020204" pitchFamily="49" charset="0"/>
+                <a:ea typeface="Menlo" panose="020B0609030804020204" pitchFamily="49" charset="0"/>
+                <a:cs typeface="Menlo" panose="020B0609030804020204" pitchFamily="49" charset="0"/>
+              </a:rPr>
+              <a:t>X738 – Gas EFI, 2013–present ($9K–$13K+)</a:t>
+            </a:r>
+          </a:p>
+          <a:p>
+            <a:r>
+              <a:rPr lang="en-US" sz="1100" dirty="0">
+                <a:latin typeface="Menlo" panose="020B0609030804020204" pitchFamily="49" charset="0"/>
+                <a:ea typeface="Menlo" panose="020B0609030804020204" pitchFamily="49" charset="0"/>
+                <a:cs typeface="Menlo" panose="020B0609030804020204" pitchFamily="49" charset="0"/>
+              </a:rPr>
+              <a:t>X739 – Gas EFI, 2013–present ($10K–$14K+)</a:t>
+            </a:r>
+          </a:p>
+          <a:p>
+            <a:r>
+              <a:rPr lang="en-US" sz="1100" dirty="0">
+                <a:latin typeface="Menlo" panose="020B0609030804020204" pitchFamily="49" charset="0"/>
+                <a:ea typeface="Menlo" panose="020B0609030804020204" pitchFamily="49" charset="0"/>
+                <a:cs typeface="Menlo" panose="020B0609030804020204" pitchFamily="49" charset="0"/>
+              </a:rPr>
+              <a:t>X748 – Diesel, 2006–2012 ($7K–$10K)</a:t>
+            </a:r>
+          </a:p>
+          <a:p>
+            <a:r>
+              <a:rPr lang="en-US" sz="1100" dirty="0">
+                <a:latin typeface="Menlo" panose="020B0609030804020204" pitchFamily="49" charset="0"/>
+                <a:ea typeface="Menlo" panose="020B0609030804020204" pitchFamily="49" charset="0"/>
+                <a:cs typeface="Menlo" panose="020B0609030804020204" pitchFamily="49" charset="0"/>
+              </a:rPr>
+              <a:t>X749 – Diesel, 2008–2012 ($8K–$11K)</a:t>
+            </a:r>
+          </a:p>
+          <a:p>
+            <a:r>
+              <a:rPr lang="en-US" sz="1100" dirty="0">
+                <a:latin typeface="Menlo" panose="020B0609030804020204" pitchFamily="49" charset="0"/>
+                <a:ea typeface="Menlo" panose="020B0609030804020204" pitchFamily="49" charset="0"/>
+                <a:cs typeface="Menlo" panose="020B0609030804020204" pitchFamily="49" charset="0"/>
+              </a:rPr>
+              <a:t>X758 – Diesel, 2013–present ($11K–$15K+)</a:t>
             </a:r>
           </a:p>
         </p:txBody>

--- a/tractor_jd_1025r_X758.pptx
+++ b/tractor_jd_1025r_X758.pptx
@@ -273,7 +273,7 @@
           <a:lstStyle/>
           <a:p>
             <a:fld id="{16286276-9013-2A43-82D1-BA4685C95117}" type="datetimeFigureOut">
-              <a:t>6/22/26</a:t>
+              <a:t>6/29/26</a:t>
             </a:fld>
             <a:endParaRPr lang="en-US"/>
           </a:p>
@@ -469,7 +469,7 @@
           <a:lstStyle/>
           <a:p>
             <a:fld id="{16286276-9013-2A43-82D1-BA4685C95117}" type="datetimeFigureOut">
-              <a:t>6/22/26</a:t>
+              <a:t>6/29/26</a:t>
             </a:fld>
             <a:endParaRPr lang="en-US"/>
           </a:p>
@@ -675,7 +675,7 @@
           <a:lstStyle/>
           <a:p>
             <a:fld id="{16286276-9013-2A43-82D1-BA4685C95117}" type="datetimeFigureOut">
-              <a:t>6/22/26</a:t>
+              <a:t>6/29/26</a:t>
             </a:fld>
             <a:endParaRPr lang="en-US"/>
           </a:p>
@@ -871,7 +871,7 @@
           <a:lstStyle/>
           <a:p>
             <a:fld id="{16286276-9013-2A43-82D1-BA4685C95117}" type="datetimeFigureOut">
-              <a:t>6/22/26</a:t>
+              <a:t>6/29/26</a:t>
             </a:fld>
             <a:endParaRPr lang="en-US"/>
           </a:p>
@@ -1144,7 +1144,7 @@
           <a:lstStyle/>
           <a:p>
             <a:fld id="{16286276-9013-2A43-82D1-BA4685C95117}" type="datetimeFigureOut">
-              <a:t>6/22/26</a:t>
+              <a:t>6/29/26</a:t>
             </a:fld>
             <a:endParaRPr lang="en-US"/>
           </a:p>
@@ -1407,7 +1407,7 @@
           <a:lstStyle/>
           <a:p>
             <a:fld id="{16286276-9013-2A43-82D1-BA4685C95117}" type="datetimeFigureOut">
-              <a:t>6/22/26</a:t>
+              <a:t>6/29/26</a:t>
             </a:fld>
             <a:endParaRPr lang="en-US"/>
           </a:p>
@@ -1817,7 +1817,7 @@
           <a:lstStyle/>
           <a:p>
             <a:fld id="{16286276-9013-2A43-82D1-BA4685C95117}" type="datetimeFigureOut">
-              <a:t>6/22/26</a:t>
+              <a:t>6/29/26</a:t>
             </a:fld>
             <a:endParaRPr lang="en-US"/>
           </a:p>
@@ -1956,7 +1956,7 @@
           <a:lstStyle/>
           <a:p>
             <a:fld id="{16286276-9013-2A43-82D1-BA4685C95117}" type="datetimeFigureOut">
-              <a:t>6/22/26</a:t>
+              <a:t>6/29/26</a:t>
             </a:fld>
             <a:endParaRPr lang="en-US"/>
           </a:p>
@@ -2067,7 +2067,7 @@
           <a:lstStyle/>
           <a:p>
             <a:fld id="{16286276-9013-2A43-82D1-BA4685C95117}" type="datetimeFigureOut">
-              <a:t>6/22/26</a:t>
+              <a:t>6/29/26</a:t>
             </a:fld>
             <a:endParaRPr lang="en-US"/>
           </a:p>
@@ -2376,7 +2376,7 @@
           <a:lstStyle/>
           <a:p>
             <a:fld id="{16286276-9013-2A43-82D1-BA4685C95117}" type="datetimeFigureOut">
-              <a:t>6/22/26</a:t>
+              <a:t>6/29/26</a:t>
             </a:fld>
             <a:endParaRPr lang="en-US"/>
           </a:p>
@@ -2662,7 +2662,7 @@
           <a:lstStyle/>
           <a:p>
             <a:fld id="{16286276-9013-2A43-82D1-BA4685C95117}" type="datetimeFigureOut">
-              <a:t>6/22/26</a:t>
+              <a:t>6/29/26</a:t>
             </a:fld>
             <a:endParaRPr lang="en-US"/>
           </a:p>
@@ -2901,7 +2901,7 @@
           </a:lstStyle>
           <a:p>
             <a:fld id="{16286276-9013-2A43-82D1-BA4685C95117}" type="datetimeFigureOut">
-              <a:t>6/22/26</a:t>
+              <a:t>6/29/26</a:t>
             </a:fld>
             <a:endParaRPr lang="en-US"/>
           </a:p>
@@ -10305,7 +10305,7 @@
         <p:spPr>
           <a:xfrm>
             <a:off x="230822" y="726949"/>
-            <a:ext cx="5865177" cy="738664"/>
+            <a:ext cx="4741859" cy="738664"/>
           </a:xfrm>
           <a:prstGeom prst="rect">
             <a:avLst/>
@@ -10405,8 +10405,244 @@
         </p:blipFill>
         <p:spPr>
           <a:xfrm>
-            <a:off x="775945" y="1669342"/>
+            <a:off x="230822" y="1465613"/>
             <a:ext cx="4741859" cy="2168533"/>
+          </a:xfrm>
+          <a:prstGeom prst="rect">
+            <a:avLst/>
+          </a:prstGeom>
+        </p:spPr>
+      </p:pic>
+      <p:sp>
+        <p:nvSpPr>
+          <p:cNvPr id="3" name="TextBox 2">
+            <a:extLst>
+              <a:ext uri="{FF2B5EF4-FFF2-40B4-BE49-F238E27FC236}">
+                <a16:creationId xmlns:a16="http://schemas.microsoft.com/office/drawing/2014/main" id="{B354BB14-A52F-AD3F-AFD2-103D844FCA35}"/>
+              </a:ext>
+            </a:extLst>
+          </p:cNvPr>
+          <p:cNvSpPr txBox="1"/>
+          <p:nvPr/>
+        </p:nvSpPr>
+        <p:spPr>
+          <a:xfrm>
+            <a:off x="230821" y="3765634"/>
+            <a:ext cx="4741859" cy="1661993"/>
+          </a:xfrm>
+          <a:prstGeom prst="rect">
+            <a:avLst/>
+          </a:prstGeom>
+          <a:solidFill>
+            <a:schemeClr val="accent4">
+              <a:lumMod val="20000"/>
+              <a:lumOff val="80000"/>
+            </a:schemeClr>
+          </a:solidFill>
+          <a:ln>
+            <a:solidFill>
+              <a:srgbClr val="FF0000"/>
+            </a:solidFill>
+          </a:ln>
+        </p:spPr>
+        <p:txBody>
+          <a:bodyPr wrap="square" rtlCol="0">
+            <a:spAutoFit/>
+          </a:bodyPr>
+          <a:lstStyle/>
+          <a:p>
+            <a:r>
+              <a:rPr lang="en-US" sz="1400" dirty="0"/>
+              <a:t>Auger rotation – from shaft that used for mowing blades</a:t>
+            </a:r>
+          </a:p>
+          <a:p>
+            <a:r>
+              <a:rPr lang="en-US" sz="1400" dirty="0" err="1"/>
+              <a:t>Hydrolics</a:t>
+            </a:r>
+            <a:r>
+              <a:rPr lang="en-US" sz="1400" dirty="0"/>
+              <a:t> – up/down, left/right</a:t>
+            </a:r>
+          </a:p>
+          <a:p>
+            <a:r>
+              <a:rPr lang="en-US" sz="1400" dirty="0"/>
+              <a:t>.. 02C2M, 54-in. (137-cm) Quick-Hitch Snow Blower, $3,525.00 </a:t>
+            </a:r>
+          </a:p>
+          <a:p>
+            <a:r>
+              <a:rPr lang="en-US" sz="1400" dirty="0"/>
+              <a:t>.. 6940, Front quick-hitch, $731.00 </a:t>
+            </a:r>
+          </a:p>
+          <a:p>
+            <a:r>
+              <a:rPr lang="en-US" sz="1400" dirty="0"/>
+              <a:t>.. 6838, Snow blower </a:t>
+            </a:r>
+            <a:r>
+              <a:rPr lang="en-US" sz="1400" dirty="0" err="1"/>
+              <a:t>upstop</a:t>
+            </a:r>
+            <a:r>
+              <a:rPr lang="en-US" sz="1400" dirty="0"/>
+              <a:t> and drive shaft, $318.00 </a:t>
+            </a:r>
+          </a:p>
+          <a:p>
+            <a:r>
+              <a:rPr lang="en-US" sz="1400" dirty="0"/>
+              <a:t>.. 6890, 2000-rpm front PTO (4-wheel drive), $399.00</a:t>
+            </a:r>
+          </a:p>
+          <a:p>
+            <a:r>
+              <a:rPr lang="en-US" sz="1400" dirty="0"/>
+              <a:t>.. BM20960 – Remote Spout Cap Control Kit</a:t>
+            </a:r>
+          </a:p>
+        </p:txBody>
+      </p:sp>
+      <p:sp>
+        <p:nvSpPr>
+          <p:cNvPr id="4" name="TextBox 3">
+            <a:extLst>
+              <a:ext uri="{FF2B5EF4-FFF2-40B4-BE49-F238E27FC236}">
+                <a16:creationId xmlns:a16="http://schemas.microsoft.com/office/drawing/2014/main" id="{45CD713C-6DFD-970A-D805-38AA49CCBF74}"/>
+              </a:ext>
+            </a:extLst>
+          </p:cNvPr>
+          <p:cNvSpPr txBox="1"/>
+          <p:nvPr/>
+        </p:nvSpPr>
+        <p:spPr>
+          <a:xfrm>
+            <a:off x="230821" y="5546275"/>
+            <a:ext cx="3651632" cy="1169551"/>
+          </a:xfrm>
+          <a:prstGeom prst="rect">
+            <a:avLst/>
+          </a:prstGeom>
+          <a:solidFill>
+            <a:schemeClr val="accent4">
+              <a:lumMod val="20000"/>
+              <a:lumOff val="80000"/>
+            </a:schemeClr>
+          </a:solidFill>
+          <a:ln>
+            <a:solidFill>
+              <a:srgbClr val="FF0000"/>
+            </a:solidFill>
+          </a:ln>
+        </p:spPr>
+        <p:txBody>
+          <a:bodyPr wrap="square" rtlCol="0">
+            <a:spAutoFit/>
+          </a:bodyPr>
+          <a:lstStyle/>
+          <a:p>
+            <a:r>
+              <a:rPr lang="en-US" sz="1400" dirty="0"/>
+              <a:t>Additional:</a:t>
+            </a:r>
+          </a:p>
+          <a:p>
+            <a:r>
+              <a:rPr lang="en-US" sz="1400" dirty="0"/>
+              <a:t>- Chute control option (electric vs. manual)</a:t>
+            </a:r>
+          </a:p>
+          <a:p>
+            <a:r>
+              <a:rPr lang="en-US" sz="1400" dirty="0"/>
+              <a:t>- Weight bracket + weights at the back</a:t>
+            </a:r>
+          </a:p>
+          <a:p>
+            <a:r>
+              <a:rPr lang="en-US" sz="1400" dirty="0"/>
+              <a:t>- Tire chains</a:t>
+            </a:r>
+          </a:p>
+          <a:p>
+            <a:r>
+              <a:rPr lang="en-US" sz="1400" dirty="0"/>
+              <a:t>- remote spout cap control kit</a:t>
+            </a:r>
+          </a:p>
+        </p:txBody>
+      </p:sp>
+      <p:pic>
+        <p:nvPicPr>
+          <p:cNvPr id="8" name="Picture 7" descr="BM20960-0">
+            <a:extLst>
+              <a:ext uri="{FF2B5EF4-FFF2-40B4-BE49-F238E27FC236}">
+                <a16:creationId xmlns:a16="http://schemas.microsoft.com/office/drawing/2014/main" id="{0B88506C-322A-C203-64D1-1497E10FAAB9}"/>
+              </a:ext>
+            </a:extLst>
+          </p:cNvPr>
+          <p:cNvPicPr>
+            <a:picLocks noChangeAspect="1"/>
+          </p:cNvPicPr>
+          <p:nvPr/>
+        </p:nvPicPr>
+        <p:blipFill>
+          <a:blip r:embed="rId5" cstate="email">
+            <a:extLst>
+              <a:ext uri="{28A0092B-C50C-407E-A947-70E740481C1C}">
+                <a14:useLocalDpi xmlns:a14="http://schemas.microsoft.com/office/drawing/2010/main"/>
+              </a:ext>
+            </a:extLst>
+          </a:blip>
+          <a:srcRect/>
+          <a:stretch>
+            <a:fillRect/>
+          </a:stretch>
+        </p:blipFill>
+        <p:spPr>
+          <a:xfrm>
+            <a:off x="5267325" y="4631875"/>
+            <a:ext cx="1657350" cy="1828800"/>
+          </a:xfrm>
+          <a:prstGeom prst="rect">
+            <a:avLst/>
+          </a:prstGeom>
+        </p:spPr>
+      </p:pic>
+      <p:pic>
+        <p:nvPicPr>
+          <p:cNvPr id="10" name="Picture 9" descr="Remote Spout Cap Control Kit BM20960 for John Deere Snow thrower 38 42 46">
+            <a:extLst>
+              <a:ext uri="{FF2B5EF4-FFF2-40B4-BE49-F238E27FC236}">
+                <a16:creationId xmlns:a16="http://schemas.microsoft.com/office/drawing/2014/main" id="{E1226D3F-29C0-F265-8294-AF23C1E9D31A}"/>
+              </a:ext>
+            </a:extLst>
+          </p:cNvPr>
+          <p:cNvPicPr>
+            <a:picLocks noChangeAspect="1"/>
+          </p:cNvPicPr>
+          <p:nvPr/>
+        </p:nvPicPr>
+        <p:blipFill>
+          <a:blip r:embed="rId6" cstate="email">
+            <a:extLst>
+              <a:ext uri="{28A0092B-C50C-407E-A947-70E740481C1C}">
+                <a14:useLocalDpi xmlns:a14="http://schemas.microsoft.com/office/drawing/2010/main"/>
+              </a:ext>
+            </a:extLst>
+          </a:blip>
+          <a:srcRect/>
+          <a:stretch>
+            <a:fillRect/>
+          </a:stretch>
+        </p:blipFill>
+        <p:spPr>
+          <a:xfrm>
+            <a:off x="7066920" y="4737339"/>
+            <a:ext cx="1657350" cy="1630811"/>
           </a:xfrm>
           <a:prstGeom prst="rect">
             <a:avLst/>
